--- a/pre.pptx
+++ b/pre.pptx
@@ -5,10 +5,10 @@
     <p:sldMasterId id="2147483648" r:id="rId1"/>
   </p:sldMasterIdLst>
   <p:notesMasterIdLst>
-    <p:notesMasterId r:id="rId16"/>
+    <p:notesMasterId r:id="rId20"/>
   </p:notesMasterIdLst>
   <p:handoutMasterIdLst>
-    <p:handoutMasterId r:id="rId17"/>
+    <p:handoutMasterId r:id="rId21"/>
   </p:handoutMasterIdLst>
   <p:sldIdLst>
     <p:sldId id="263" r:id="rId2"/>
@@ -20,11 +20,15 @@
     <p:sldId id="321" r:id="rId8"/>
     <p:sldId id="325" r:id="rId9"/>
     <p:sldId id="314" r:id="rId10"/>
-    <p:sldId id="315" r:id="rId11"/>
-    <p:sldId id="317" r:id="rId12"/>
-    <p:sldId id="319" r:id="rId13"/>
-    <p:sldId id="261" r:id="rId14"/>
-    <p:sldId id="292" r:id="rId15"/>
+    <p:sldId id="327" r:id="rId11"/>
+    <p:sldId id="328" r:id="rId12"/>
+    <p:sldId id="329" r:id="rId13"/>
+    <p:sldId id="326" r:id="rId14"/>
+    <p:sldId id="315" r:id="rId15"/>
+    <p:sldId id="317" r:id="rId16"/>
+    <p:sldId id="319" r:id="rId17"/>
+    <p:sldId id="261" r:id="rId18"/>
+    <p:sldId id="292" r:id="rId19"/>
   </p:sldIdLst>
   <p:sldSz cx="9144000" cy="5143500" type="screen16x9"/>
   <p:notesSz cx="6858000" cy="9144000"/>
@@ -480,7 +484,7 @@
           <a:p>
             <a:fld id="{89B5E162-9D79-2943-B0A3-211BF28B7513}" type="datetimeFigureOut">
               <a:rPr lang="en-US" smtClean="0"/>
-              <a:t>12/6/25</a:t>
+              <a:t>12/8/25</a:t>
             </a:fld>
             <a:endParaRPr lang="en-US" dirty="0"/>
           </a:p>
@@ -646,7 +650,7 @@
           <a:p>
             <a:fld id="{A1CBAB52-94AF-9448-9B1C-7768B1879D49}" type="datetimeFigureOut">
               <a:rPr lang="en-US" smtClean="0"/>
-              <a:t>12/6/25</a:t>
+              <a:t>12/8/25</a:t>
             </a:fld>
             <a:endParaRPr lang="en-US" dirty="0"/>
           </a:p>
@@ -912,6 +916,181 @@
     </a:lvl9pPr>
   </p:notesStyle>
 </p:notesMaster>
+</file>
+
+<file path=ppt/notesSlides/notesSlide1.xml><?xml version="1.0" encoding="utf-8"?>
+<p:notes xmlns:a="http://schemas.openxmlformats.org/drawingml/2006/main" xmlns:r="http://schemas.openxmlformats.org/officeDocument/2006/relationships" xmlns:p="http://schemas.openxmlformats.org/presentationml/2006/main">
+  <p:cSld>
+    <p:spTree>
+      <p:nvGrpSpPr>
+        <p:cNvPr id="1" name=""/>
+        <p:cNvGrpSpPr/>
+        <p:nvPr/>
+      </p:nvGrpSpPr>
+      <p:grpSpPr>
+        <a:xfrm>
+          <a:off x="0" y="0"/>
+          <a:ext cx="0" cy="0"/>
+          <a:chOff x="0" y="0"/>
+          <a:chExt cx="0" cy="0"/>
+        </a:xfrm>
+      </p:grpSpPr>
+      <p:sp>
+        <p:nvSpPr>
+          <p:cNvPr id="2" name="Slide Image Placeholder 1"/>
+          <p:cNvSpPr>
+            <a:spLocks noGrp="1" noRot="1" noChangeAspect="1"/>
+          </p:cNvSpPr>
+          <p:nvPr>
+            <p:ph type="sldImg"/>
+          </p:nvPr>
+        </p:nvSpPr>
+        <p:spPr/>
+      </p:sp>
+      <p:sp>
+        <p:nvSpPr>
+          <p:cNvPr id="3" name="Notes Placeholder 2"/>
+          <p:cNvSpPr>
+            <a:spLocks noGrp="1"/>
+          </p:cNvSpPr>
+          <p:nvPr>
+            <p:ph type="body" idx="1"/>
+          </p:nvPr>
+        </p:nvSpPr>
+        <p:spPr/>
+        <p:txBody>
+          <a:bodyPr/>
+          <a:lstStyle/>
+          <a:p>
+            <a:endParaRPr lang="en-US" sz="6000" kern="1200" dirty="0">
+              <a:solidFill>
+                <a:schemeClr val="accent3"/>
+              </a:solidFill>
+              <a:latin typeface="+mn-lt"/>
+              <a:ea typeface="+mn-ea"/>
+              <a:cs typeface="+mn-cs"/>
+            </a:endParaRPr>
+          </a:p>
+        </p:txBody>
+      </p:sp>
+      <p:sp>
+        <p:nvSpPr>
+          <p:cNvPr id="4" name="Slide Number Placeholder 3"/>
+          <p:cNvSpPr>
+            <a:spLocks noGrp="1"/>
+          </p:cNvSpPr>
+          <p:nvPr>
+            <p:ph type="sldNum" sz="quarter" idx="5"/>
+          </p:nvPr>
+        </p:nvSpPr>
+        <p:spPr/>
+        <p:txBody>
+          <a:bodyPr/>
+          <a:lstStyle/>
+          <a:p>
+            <a:fld id="{55447283-AD3B-EE49-8B53-C7D74121EF4E}" type="slidenum">
+              <a:rPr lang="en-US" smtClean="0"/>
+              <a:t>11</a:t>
+            </a:fld>
+            <a:endParaRPr lang="en-US" dirty="0"/>
+          </a:p>
+        </p:txBody>
+      </p:sp>
+    </p:spTree>
+    <p:extLst>
+      <p:ext uri="{BB962C8B-B14F-4D97-AF65-F5344CB8AC3E}">
+        <p14:creationId xmlns:p14="http://schemas.microsoft.com/office/powerpoint/2010/main" val="3011463724"/>
+      </p:ext>
+    </p:extLst>
+  </p:cSld>
+  <p:clrMapOvr>
+    <a:masterClrMapping/>
+  </p:clrMapOvr>
+</p:notes>
+</file>
+
+<file path=ppt/notesSlides/notesSlide2.xml><?xml version="1.0" encoding="utf-8"?>
+<p:notes xmlns:a="http://schemas.openxmlformats.org/drawingml/2006/main" xmlns:r="http://schemas.openxmlformats.org/officeDocument/2006/relationships" xmlns:p="http://schemas.openxmlformats.org/presentationml/2006/main">
+  <p:cSld>
+    <p:spTree>
+      <p:nvGrpSpPr>
+        <p:cNvPr id="1" name=""/>
+        <p:cNvGrpSpPr/>
+        <p:nvPr/>
+      </p:nvGrpSpPr>
+      <p:grpSpPr>
+        <a:xfrm>
+          <a:off x="0" y="0"/>
+          <a:ext cx="0" cy="0"/>
+          <a:chOff x="0" y="0"/>
+          <a:chExt cx="0" cy="0"/>
+        </a:xfrm>
+      </p:grpSpPr>
+      <p:sp>
+        <p:nvSpPr>
+          <p:cNvPr id="2" name="Slide Image Placeholder 1"/>
+          <p:cNvSpPr>
+            <a:spLocks noGrp="1" noRot="1" noChangeAspect="1"/>
+          </p:cNvSpPr>
+          <p:nvPr>
+            <p:ph type="sldImg"/>
+          </p:nvPr>
+        </p:nvSpPr>
+        <p:spPr/>
+      </p:sp>
+      <p:sp>
+        <p:nvSpPr>
+          <p:cNvPr id="3" name="Notes Placeholder 2"/>
+          <p:cNvSpPr>
+            <a:spLocks noGrp="1"/>
+          </p:cNvSpPr>
+          <p:nvPr>
+            <p:ph type="body" idx="1"/>
+          </p:nvPr>
+        </p:nvSpPr>
+        <p:spPr/>
+        <p:txBody>
+          <a:bodyPr/>
+          <a:lstStyle/>
+          <a:p>
+            <a:endParaRPr lang="en-US" dirty="0"/>
+          </a:p>
+        </p:txBody>
+      </p:sp>
+      <p:sp>
+        <p:nvSpPr>
+          <p:cNvPr id="4" name="Slide Number Placeholder 3"/>
+          <p:cNvSpPr>
+            <a:spLocks noGrp="1"/>
+          </p:cNvSpPr>
+          <p:nvPr>
+            <p:ph type="sldNum" sz="quarter" idx="5"/>
+          </p:nvPr>
+        </p:nvSpPr>
+        <p:spPr/>
+        <p:txBody>
+          <a:bodyPr/>
+          <a:lstStyle/>
+          <a:p>
+            <a:fld id="{55447283-AD3B-EE49-8B53-C7D74121EF4E}" type="slidenum">
+              <a:rPr lang="en-US" smtClean="0"/>
+              <a:t>12</a:t>
+            </a:fld>
+            <a:endParaRPr lang="en-US" dirty="0"/>
+          </a:p>
+        </p:txBody>
+      </p:sp>
+    </p:spTree>
+    <p:extLst>
+      <p:ext uri="{BB962C8B-B14F-4D97-AF65-F5344CB8AC3E}">
+        <p14:creationId xmlns:p14="http://schemas.microsoft.com/office/powerpoint/2010/main" val="2084486120"/>
+      </p:ext>
+    </p:extLst>
+  </p:cSld>
+  <p:clrMapOvr>
+    <a:masterClrMapping/>
+  </p:clrMapOvr>
+</p:notes>
 </file>
 
 <file path=ppt/slideLayouts/slideLayout1.xml><?xml version="1.0" encoding="utf-8"?>
@@ -10605,6 +10784,1309 @@
   <p:cSld>
     <p:spTree>
       <p:nvGrpSpPr>
+        <p:cNvPr id="1" name="">
+          <a:extLst>
+            <a:ext uri="{FF2B5EF4-FFF2-40B4-BE49-F238E27FC236}">
+              <a16:creationId xmlns:a16="http://schemas.microsoft.com/office/drawing/2014/main" id="{9FCA9C86-0D7D-6271-E17B-0E1193CAFEFA}"/>
+            </a:ext>
+          </a:extLst>
+        </p:cNvPr>
+        <p:cNvGrpSpPr/>
+        <p:nvPr/>
+      </p:nvGrpSpPr>
+      <p:grpSpPr>
+        <a:xfrm>
+          <a:off x="0" y="0"/>
+          <a:ext cx="0" cy="0"/>
+          <a:chOff x="0" y="0"/>
+          <a:chExt cx="0" cy="0"/>
+        </a:xfrm>
+      </p:grpSpPr>
+      <p:sp>
+        <p:nvSpPr>
+          <p:cNvPr id="2" name="Slide Number Placeholder 1">
+            <a:extLst>
+              <a:ext uri="{FF2B5EF4-FFF2-40B4-BE49-F238E27FC236}">
+                <a16:creationId xmlns:a16="http://schemas.microsoft.com/office/drawing/2014/main" id="{38892FEC-544B-C94A-3519-33D237786C1B}"/>
+              </a:ext>
+            </a:extLst>
+          </p:cNvPr>
+          <p:cNvSpPr>
+            <a:spLocks noGrp="1"/>
+          </p:cNvSpPr>
+          <p:nvPr>
+            <p:ph type="sldNum" sz="quarter" idx="12"/>
+          </p:nvPr>
+        </p:nvSpPr>
+        <p:spPr/>
+        <p:txBody>
+          <a:bodyPr/>
+          <a:lstStyle/>
+          <a:p>
+            <a:fld id="{8A758EFE-665F-4341-B5B8-2DAEADA52F6C}" type="slidenum">
+              <a:rPr lang="en-US" smtClean="0"/>
+              <a:pPr/>
+              <a:t>10</a:t>
+            </a:fld>
+            <a:endParaRPr lang="en-US" dirty="0"/>
+          </a:p>
+        </p:txBody>
+      </p:sp>
+      <p:sp>
+        <p:nvSpPr>
+          <p:cNvPr id="3" name="Title 2">
+            <a:extLst>
+              <a:ext uri="{FF2B5EF4-FFF2-40B4-BE49-F238E27FC236}">
+                <a16:creationId xmlns:a16="http://schemas.microsoft.com/office/drawing/2014/main" id="{162748E1-831B-0EE5-0D70-8054A3B0829A}"/>
+              </a:ext>
+            </a:extLst>
+          </p:cNvPr>
+          <p:cNvSpPr>
+            <a:spLocks noGrp="1"/>
+          </p:cNvSpPr>
+          <p:nvPr>
+            <p:ph type="title"/>
+          </p:nvPr>
+        </p:nvSpPr>
+        <p:spPr/>
+        <p:txBody>
+          <a:bodyPr>
+            <a:normAutofit/>
+          </a:bodyPr>
+          <a:lstStyle/>
+          <a:p>
+            <a:r>
+              <a:rPr lang="en-US" dirty="0"/>
+              <a:t>EDA Insights</a:t>
+            </a:r>
+            <a:r>
+              <a:rPr lang="zh-CN" altLang="en-US" dirty="0"/>
+              <a:t> </a:t>
+            </a:r>
+            <a:r>
+              <a:rPr lang="en-US" altLang="zh-CN" dirty="0"/>
+              <a:t>#2</a:t>
+            </a:r>
+            <a:endParaRPr lang="en-US" dirty="0"/>
+          </a:p>
+        </p:txBody>
+      </p:sp>
+      <p:sp>
+        <p:nvSpPr>
+          <p:cNvPr id="5" name="Content Placeholder 3">
+            <a:extLst>
+              <a:ext uri="{FF2B5EF4-FFF2-40B4-BE49-F238E27FC236}">
+                <a16:creationId xmlns:a16="http://schemas.microsoft.com/office/drawing/2014/main" id="{9D8EFC6E-5586-831C-AC4E-6D356157FF44}"/>
+              </a:ext>
+            </a:extLst>
+          </p:cNvPr>
+          <p:cNvSpPr txBox="1">
+            <a:spLocks/>
+          </p:cNvSpPr>
+          <p:nvPr/>
+        </p:nvSpPr>
+        <p:spPr>
+          <a:xfrm>
+            <a:off x="457199" y="1016001"/>
+            <a:ext cx="7890933" cy="3578622"/>
+          </a:xfrm>
+          <a:prstGeom prst="rect">
+            <a:avLst/>
+          </a:prstGeom>
+        </p:spPr>
+        <p:txBody>
+          <a:bodyPr>
+            <a:normAutofit/>
+          </a:bodyPr>
+          <a:lstStyle>
+            <a:lvl1pPr marL="342900" indent="-342900" algn="l" defTabSz="457200" rtl="0" eaLnBrk="1" latinLnBrk="0" hangingPunct="1">
+              <a:spcBef>
+                <a:spcPct val="20000"/>
+              </a:spcBef>
+              <a:buClr>
+                <a:schemeClr val="tx1"/>
+              </a:buClr>
+              <a:buFont typeface="Arial"/>
+              <a:buChar char="•"/>
+              <a:defRPr sz="2800" kern="1200">
+                <a:solidFill>
+                  <a:schemeClr val="accent6"/>
+                </a:solidFill>
+                <a:latin typeface="Gill Sans"/>
+                <a:ea typeface="+mn-ea"/>
+                <a:cs typeface="Gill Sans"/>
+              </a:defRPr>
+            </a:lvl1pPr>
+            <a:lvl2pPr marL="742950" indent="-285750" algn="l" defTabSz="457200" rtl="0" eaLnBrk="1" latinLnBrk="0" hangingPunct="1">
+              <a:spcBef>
+                <a:spcPct val="20000"/>
+              </a:spcBef>
+              <a:buClr>
+                <a:schemeClr val="tx1"/>
+              </a:buClr>
+              <a:buFont typeface="Arial"/>
+              <a:buChar char="–"/>
+              <a:defRPr sz="2400" kern="1200">
+                <a:solidFill>
+                  <a:schemeClr val="accent6"/>
+                </a:solidFill>
+                <a:latin typeface="Gill Sans"/>
+                <a:ea typeface="+mn-ea"/>
+                <a:cs typeface="Gill Sans"/>
+              </a:defRPr>
+            </a:lvl2pPr>
+            <a:lvl3pPr marL="1143000" indent="-228600" algn="l" defTabSz="457200" rtl="0" eaLnBrk="1" latinLnBrk="0" hangingPunct="1">
+              <a:spcBef>
+                <a:spcPct val="20000"/>
+              </a:spcBef>
+              <a:buClr>
+                <a:schemeClr val="tx1"/>
+              </a:buClr>
+              <a:buFont typeface="Arial"/>
+              <a:buChar char="•"/>
+              <a:defRPr sz="2000" kern="1200">
+                <a:solidFill>
+                  <a:schemeClr val="accent6"/>
+                </a:solidFill>
+                <a:latin typeface="Gill Sans"/>
+                <a:ea typeface="+mn-ea"/>
+                <a:cs typeface="Gill Sans"/>
+              </a:defRPr>
+            </a:lvl3pPr>
+            <a:lvl4pPr marL="1600200" indent="-228600" algn="l" defTabSz="457200" rtl="0" eaLnBrk="1" latinLnBrk="0" hangingPunct="1">
+              <a:spcBef>
+                <a:spcPct val="20000"/>
+              </a:spcBef>
+              <a:buClr>
+                <a:schemeClr val="tx1"/>
+              </a:buClr>
+              <a:buFont typeface="Arial"/>
+              <a:buChar char="–"/>
+              <a:defRPr sz="1800" kern="1200">
+                <a:solidFill>
+                  <a:schemeClr val="accent6"/>
+                </a:solidFill>
+                <a:latin typeface="Gill Sans"/>
+                <a:ea typeface="+mn-ea"/>
+                <a:cs typeface="Gill Sans"/>
+              </a:defRPr>
+            </a:lvl4pPr>
+            <a:lvl5pPr marL="2057400" indent="-228600" algn="l" defTabSz="457200" rtl="0" eaLnBrk="1" latinLnBrk="0" hangingPunct="1">
+              <a:spcBef>
+                <a:spcPct val="20000"/>
+              </a:spcBef>
+              <a:buClr>
+                <a:schemeClr val="tx1"/>
+              </a:buClr>
+              <a:buFont typeface="Arial"/>
+              <a:buChar char="»"/>
+              <a:defRPr sz="1800" kern="1200">
+                <a:solidFill>
+                  <a:schemeClr val="accent6"/>
+                </a:solidFill>
+                <a:latin typeface="Gill Sans"/>
+                <a:ea typeface="+mn-ea"/>
+                <a:cs typeface="Gill Sans"/>
+              </a:defRPr>
+            </a:lvl5pPr>
+            <a:lvl6pPr marL="2514600" indent="-228600" algn="l" defTabSz="457200" rtl="0" eaLnBrk="1" latinLnBrk="0" hangingPunct="1">
+              <a:spcBef>
+                <a:spcPct val="20000"/>
+              </a:spcBef>
+              <a:buFont typeface="Arial"/>
+              <a:buChar char="•"/>
+              <a:defRPr sz="2000" kern="1200">
+                <a:solidFill>
+                  <a:schemeClr val="tx1"/>
+                </a:solidFill>
+                <a:latin typeface="+mn-lt"/>
+                <a:ea typeface="+mn-ea"/>
+                <a:cs typeface="+mn-cs"/>
+              </a:defRPr>
+            </a:lvl6pPr>
+            <a:lvl7pPr marL="2971800" indent="-228600" algn="l" defTabSz="457200" rtl="0" eaLnBrk="1" latinLnBrk="0" hangingPunct="1">
+              <a:spcBef>
+                <a:spcPct val="20000"/>
+              </a:spcBef>
+              <a:buFont typeface="Arial"/>
+              <a:buChar char="•"/>
+              <a:defRPr sz="2000" kern="1200">
+                <a:solidFill>
+                  <a:schemeClr val="tx1"/>
+                </a:solidFill>
+                <a:latin typeface="+mn-lt"/>
+                <a:ea typeface="+mn-ea"/>
+                <a:cs typeface="+mn-cs"/>
+              </a:defRPr>
+            </a:lvl7pPr>
+            <a:lvl8pPr marL="3429000" indent="-228600" algn="l" defTabSz="457200" rtl="0" eaLnBrk="1" latinLnBrk="0" hangingPunct="1">
+              <a:spcBef>
+                <a:spcPct val="20000"/>
+              </a:spcBef>
+              <a:buFont typeface="Arial"/>
+              <a:buChar char="•"/>
+              <a:defRPr sz="2000" kern="1200">
+                <a:solidFill>
+                  <a:schemeClr val="tx1"/>
+                </a:solidFill>
+                <a:latin typeface="+mn-lt"/>
+                <a:ea typeface="+mn-ea"/>
+                <a:cs typeface="+mn-cs"/>
+              </a:defRPr>
+            </a:lvl8pPr>
+            <a:lvl9pPr marL="3886200" indent="-228600" algn="l" defTabSz="457200" rtl="0" eaLnBrk="1" latinLnBrk="0" hangingPunct="1">
+              <a:spcBef>
+                <a:spcPct val="20000"/>
+              </a:spcBef>
+              <a:buFont typeface="Arial"/>
+              <a:buChar char="•"/>
+              <a:defRPr sz="2000" kern="1200">
+                <a:solidFill>
+                  <a:schemeClr val="tx1"/>
+                </a:solidFill>
+                <a:latin typeface="+mn-lt"/>
+                <a:ea typeface="+mn-ea"/>
+                <a:cs typeface="+mn-cs"/>
+              </a:defRPr>
+            </a:lvl9pPr>
+          </a:lstStyle>
+          <a:p>
+            <a:endParaRPr lang="en-US" dirty="0"/>
+          </a:p>
+        </p:txBody>
+      </p:sp>
+      <p:sp>
+        <p:nvSpPr>
+          <p:cNvPr id="7" name="TextBox 6">
+            <a:extLst>
+              <a:ext uri="{FF2B5EF4-FFF2-40B4-BE49-F238E27FC236}">
+                <a16:creationId xmlns:a16="http://schemas.microsoft.com/office/drawing/2014/main" id="{C3847CB3-6860-276B-FAE4-D4362072A10F}"/>
+              </a:ext>
+            </a:extLst>
+          </p:cNvPr>
+          <p:cNvSpPr txBox="1"/>
+          <p:nvPr/>
+        </p:nvSpPr>
+        <p:spPr>
+          <a:xfrm>
+            <a:off x="251012" y="884518"/>
+            <a:ext cx="3937812" cy="1785104"/>
+          </a:xfrm>
+          <a:prstGeom prst="rect">
+            <a:avLst/>
+          </a:prstGeom>
+          <a:noFill/>
+        </p:spPr>
+        <p:txBody>
+          <a:bodyPr wrap="square" rtlCol="0">
+            <a:spAutoFit/>
+          </a:bodyPr>
+          <a:lstStyle/>
+          <a:p>
+            <a:r>
+              <a:rPr lang="en-US" dirty="0">
+                <a:solidFill>
+                  <a:schemeClr val="accent3"/>
+                </a:solidFill>
+              </a:rPr>
+              <a:t>Shape Distribution in Most Reported American Cities</a:t>
+            </a:r>
+          </a:p>
+          <a:p>
+            <a:endParaRPr lang="en-US" sz="1600" dirty="0"/>
+          </a:p>
+          <a:p>
+            <a:pPr marL="285750" indent="-285750">
+              <a:buFontTx/>
+              <a:buChar char="-"/>
+            </a:pPr>
+            <a:r>
+              <a:rPr lang="en-US" sz="1400" dirty="0"/>
+              <a:t>Different shape rankings among cities</a:t>
+            </a:r>
+          </a:p>
+          <a:p>
+            <a:pPr marL="285750" indent="-285750">
+              <a:buFontTx/>
+              <a:buChar char="-"/>
+            </a:pPr>
+            <a:r>
+              <a:rPr lang="en-US" sz="1400" dirty="0"/>
+              <a:t>Distribution of shapes not tied to a single region</a:t>
+            </a:r>
+          </a:p>
+          <a:p>
+            <a:pPr marL="285750" indent="-285750">
+              <a:buFontTx/>
+              <a:buChar char="-"/>
+            </a:pPr>
+            <a:endParaRPr lang="en-US" sz="1600" dirty="0"/>
+          </a:p>
+        </p:txBody>
+      </p:sp>
+      <p:pic>
+        <p:nvPicPr>
+          <p:cNvPr id="3076" name="Picture 4">
+            <a:extLst>
+              <a:ext uri="{FF2B5EF4-FFF2-40B4-BE49-F238E27FC236}">
+                <a16:creationId xmlns:a16="http://schemas.microsoft.com/office/drawing/2014/main" id="{A76AF0A2-90DE-4413-920D-DA3BB3BF7F37}"/>
+              </a:ext>
+            </a:extLst>
+          </p:cNvPr>
+          <p:cNvPicPr>
+            <a:picLocks noChangeAspect="1" noChangeArrowheads="1"/>
+          </p:cNvPicPr>
+          <p:nvPr/>
+        </p:nvPicPr>
+        <p:blipFill>
+          <a:blip r:embed="rId2">
+            <a:extLst>
+              <a:ext uri="{28A0092B-C50C-407E-A947-70E740481C1C}">
+                <a14:useLocalDpi xmlns:a14="http://schemas.microsoft.com/office/drawing/2010/main" val="0"/>
+              </a:ext>
+            </a:extLst>
+          </a:blip>
+          <a:srcRect/>
+          <a:stretch>
+            <a:fillRect/>
+          </a:stretch>
+        </p:blipFill>
+        <p:spPr bwMode="auto">
+          <a:xfrm>
+            <a:off x="4395011" y="884518"/>
+            <a:ext cx="4710499" cy="3777727"/>
+          </a:xfrm>
+          <a:prstGeom prst="rect">
+            <a:avLst/>
+          </a:prstGeom>
+          <a:noFill/>
+          <a:extLst>
+            <a:ext uri="{909E8E84-426E-40DD-AFC4-6F175D3DCCD1}">
+              <a14:hiddenFill xmlns:a14="http://schemas.microsoft.com/office/drawing/2010/main">
+                <a:solidFill>
+                  <a:srgbClr val="FFFFFF"/>
+                </a:solidFill>
+              </a14:hiddenFill>
+            </a:ext>
+          </a:extLst>
+        </p:spPr>
+      </p:pic>
+    </p:spTree>
+    <p:extLst>
+      <p:ext uri="{BB962C8B-B14F-4D97-AF65-F5344CB8AC3E}">
+        <p14:creationId xmlns:p14="http://schemas.microsoft.com/office/powerpoint/2010/main" val="1415643589"/>
+      </p:ext>
+    </p:extLst>
+  </p:cSld>
+  <p:clrMapOvr>
+    <a:masterClrMapping/>
+  </p:clrMapOvr>
+</p:sld>
+</file>
+
+<file path=ppt/slides/slide11.xml><?xml version="1.0" encoding="utf-8"?>
+<p:sld xmlns:a="http://schemas.openxmlformats.org/drawingml/2006/main" xmlns:r="http://schemas.openxmlformats.org/officeDocument/2006/relationships" xmlns:p="http://schemas.openxmlformats.org/presentationml/2006/main">
+  <p:cSld>
+    <p:spTree>
+      <p:nvGrpSpPr>
+        <p:cNvPr id="1" name="">
+          <a:extLst>
+            <a:ext uri="{FF2B5EF4-FFF2-40B4-BE49-F238E27FC236}">
+              <a16:creationId xmlns:a16="http://schemas.microsoft.com/office/drawing/2014/main" id="{2C6FAC7C-7CED-116E-5825-3895CBF49177}"/>
+            </a:ext>
+          </a:extLst>
+        </p:cNvPr>
+        <p:cNvGrpSpPr/>
+        <p:nvPr/>
+      </p:nvGrpSpPr>
+      <p:grpSpPr>
+        <a:xfrm>
+          <a:off x="0" y="0"/>
+          <a:ext cx="0" cy="0"/>
+          <a:chOff x="0" y="0"/>
+          <a:chExt cx="0" cy="0"/>
+        </a:xfrm>
+      </p:grpSpPr>
+      <p:sp>
+        <p:nvSpPr>
+          <p:cNvPr id="2" name="Slide Number Placeholder 1">
+            <a:extLst>
+              <a:ext uri="{FF2B5EF4-FFF2-40B4-BE49-F238E27FC236}">
+                <a16:creationId xmlns:a16="http://schemas.microsoft.com/office/drawing/2014/main" id="{6817B76F-DD27-485A-C58B-71B97E3538D1}"/>
+              </a:ext>
+            </a:extLst>
+          </p:cNvPr>
+          <p:cNvSpPr>
+            <a:spLocks noGrp="1"/>
+          </p:cNvSpPr>
+          <p:nvPr>
+            <p:ph type="sldNum" sz="quarter" idx="12"/>
+          </p:nvPr>
+        </p:nvSpPr>
+        <p:spPr/>
+        <p:txBody>
+          <a:bodyPr/>
+          <a:lstStyle/>
+          <a:p>
+            <a:fld id="{8A758EFE-665F-4341-B5B8-2DAEADA52F6C}" type="slidenum">
+              <a:rPr lang="en-US" smtClean="0"/>
+              <a:pPr/>
+              <a:t>11</a:t>
+            </a:fld>
+            <a:endParaRPr lang="en-US" dirty="0"/>
+          </a:p>
+        </p:txBody>
+      </p:sp>
+      <p:sp>
+        <p:nvSpPr>
+          <p:cNvPr id="3" name="Title 2">
+            <a:extLst>
+              <a:ext uri="{FF2B5EF4-FFF2-40B4-BE49-F238E27FC236}">
+                <a16:creationId xmlns:a16="http://schemas.microsoft.com/office/drawing/2014/main" id="{00B0E40D-CAC7-07F1-0660-983BE95641E8}"/>
+              </a:ext>
+            </a:extLst>
+          </p:cNvPr>
+          <p:cNvSpPr>
+            <a:spLocks noGrp="1"/>
+          </p:cNvSpPr>
+          <p:nvPr>
+            <p:ph type="title"/>
+          </p:nvPr>
+        </p:nvSpPr>
+        <p:spPr/>
+        <p:txBody>
+          <a:bodyPr>
+            <a:normAutofit/>
+          </a:bodyPr>
+          <a:lstStyle/>
+          <a:p>
+            <a:r>
+              <a:rPr lang="en-US" dirty="0"/>
+              <a:t>EDA Insights</a:t>
+            </a:r>
+            <a:r>
+              <a:rPr lang="zh-CN" altLang="en-US" dirty="0"/>
+              <a:t> </a:t>
+            </a:r>
+            <a:r>
+              <a:rPr lang="en-US" altLang="zh-CN" dirty="0"/>
+              <a:t>#3</a:t>
+            </a:r>
+            <a:endParaRPr lang="en-US" dirty="0"/>
+          </a:p>
+        </p:txBody>
+      </p:sp>
+      <p:sp>
+        <p:nvSpPr>
+          <p:cNvPr id="5" name="Content Placeholder 3">
+            <a:extLst>
+              <a:ext uri="{FF2B5EF4-FFF2-40B4-BE49-F238E27FC236}">
+                <a16:creationId xmlns:a16="http://schemas.microsoft.com/office/drawing/2014/main" id="{5EEED942-33B0-A4C4-1810-5F06C0D61C1B}"/>
+              </a:ext>
+            </a:extLst>
+          </p:cNvPr>
+          <p:cNvSpPr txBox="1">
+            <a:spLocks/>
+          </p:cNvSpPr>
+          <p:nvPr/>
+        </p:nvSpPr>
+        <p:spPr>
+          <a:xfrm>
+            <a:off x="457199" y="1016001"/>
+            <a:ext cx="7890933" cy="3578622"/>
+          </a:xfrm>
+          <a:prstGeom prst="rect">
+            <a:avLst/>
+          </a:prstGeom>
+        </p:spPr>
+        <p:txBody>
+          <a:bodyPr>
+            <a:normAutofit/>
+          </a:bodyPr>
+          <a:lstStyle>
+            <a:lvl1pPr marL="342900" indent="-342900" algn="l" defTabSz="457200" rtl="0" eaLnBrk="1" latinLnBrk="0" hangingPunct="1">
+              <a:spcBef>
+                <a:spcPct val="20000"/>
+              </a:spcBef>
+              <a:buClr>
+                <a:schemeClr val="tx1"/>
+              </a:buClr>
+              <a:buFont typeface="Arial"/>
+              <a:buChar char="•"/>
+              <a:defRPr sz="2800" kern="1200">
+                <a:solidFill>
+                  <a:schemeClr val="accent6"/>
+                </a:solidFill>
+                <a:latin typeface="Gill Sans"/>
+                <a:ea typeface="+mn-ea"/>
+                <a:cs typeface="Gill Sans"/>
+              </a:defRPr>
+            </a:lvl1pPr>
+            <a:lvl2pPr marL="742950" indent="-285750" algn="l" defTabSz="457200" rtl="0" eaLnBrk="1" latinLnBrk="0" hangingPunct="1">
+              <a:spcBef>
+                <a:spcPct val="20000"/>
+              </a:spcBef>
+              <a:buClr>
+                <a:schemeClr val="tx1"/>
+              </a:buClr>
+              <a:buFont typeface="Arial"/>
+              <a:buChar char="–"/>
+              <a:defRPr sz="2400" kern="1200">
+                <a:solidFill>
+                  <a:schemeClr val="accent6"/>
+                </a:solidFill>
+                <a:latin typeface="Gill Sans"/>
+                <a:ea typeface="+mn-ea"/>
+                <a:cs typeface="Gill Sans"/>
+              </a:defRPr>
+            </a:lvl2pPr>
+            <a:lvl3pPr marL="1143000" indent="-228600" algn="l" defTabSz="457200" rtl="0" eaLnBrk="1" latinLnBrk="0" hangingPunct="1">
+              <a:spcBef>
+                <a:spcPct val="20000"/>
+              </a:spcBef>
+              <a:buClr>
+                <a:schemeClr val="tx1"/>
+              </a:buClr>
+              <a:buFont typeface="Arial"/>
+              <a:buChar char="•"/>
+              <a:defRPr sz="2000" kern="1200">
+                <a:solidFill>
+                  <a:schemeClr val="accent6"/>
+                </a:solidFill>
+                <a:latin typeface="Gill Sans"/>
+                <a:ea typeface="+mn-ea"/>
+                <a:cs typeface="Gill Sans"/>
+              </a:defRPr>
+            </a:lvl3pPr>
+            <a:lvl4pPr marL="1600200" indent="-228600" algn="l" defTabSz="457200" rtl="0" eaLnBrk="1" latinLnBrk="0" hangingPunct="1">
+              <a:spcBef>
+                <a:spcPct val="20000"/>
+              </a:spcBef>
+              <a:buClr>
+                <a:schemeClr val="tx1"/>
+              </a:buClr>
+              <a:buFont typeface="Arial"/>
+              <a:buChar char="–"/>
+              <a:defRPr sz="1800" kern="1200">
+                <a:solidFill>
+                  <a:schemeClr val="accent6"/>
+                </a:solidFill>
+                <a:latin typeface="Gill Sans"/>
+                <a:ea typeface="+mn-ea"/>
+                <a:cs typeface="Gill Sans"/>
+              </a:defRPr>
+            </a:lvl4pPr>
+            <a:lvl5pPr marL="2057400" indent="-228600" algn="l" defTabSz="457200" rtl="0" eaLnBrk="1" latinLnBrk="0" hangingPunct="1">
+              <a:spcBef>
+                <a:spcPct val="20000"/>
+              </a:spcBef>
+              <a:buClr>
+                <a:schemeClr val="tx1"/>
+              </a:buClr>
+              <a:buFont typeface="Arial"/>
+              <a:buChar char="»"/>
+              <a:defRPr sz="1800" kern="1200">
+                <a:solidFill>
+                  <a:schemeClr val="accent6"/>
+                </a:solidFill>
+                <a:latin typeface="Gill Sans"/>
+                <a:ea typeface="+mn-ea"/>
+                <a:cs typeface="Gill Sans"/>
+              </a:defRPr>
+            </a:lvl5pPr>
+            <a:lvl6pPr marL="2514600" indent="-228600" algn="l" defTabSz="457200" rtl="0" eaLnBrk="1" latinLnBrk="0" hangingPunct="1">
+              <a:spcBef>
+                <a:spcPct val="20000"/>
+              </a:spcBef>
+              <a:buFont typeface="Arial"/>
+              <a:buChar char="•"/>
+              <a:defRPr sz="2000" kern="1200">
+                <a:solidFill>
+                  <a:schemeClr val="tx1"/>
+                </a:solidFill>
+                <a:latin typeface="+mn-lt"/>
+                <a:ea typeface="+mn-ea"/>
+                <a:cs typeface="+mn-cs"/>
+              </a:defRPr>
+            </a:lvl6pPr>
+            <a:lvl7pPr marL="2971800" indent="-228600" algn="l" defTabSz="457200" rtl="0" eaLnBrk="1" latinLnBrk="0" hangingPunct="1">
+              <a:spcBef>
+                <a:spcPct val="20000"/>
+              </a:spcBef>
+              <a:buFont typeface="Arial"/>
+              <a:buChar char="•"/>
+              <a:defRPr sz="2000" kern="1200">
+                <a:solidFill>
+                  <a:schemeClr val="tx1"/>
+                </a:solidFill>
+                <a:latin typeface="+mn-lt"/>
+                <a:ea typeface="+mn-ea"/>
+                <a:cs typeface="+mn-cs"/>
+              </a:defRPr>
+            </a:lvl7pPr>
+            <a:lvl8pPr marL="3429000" indent="-228600" algn="l" defTabSz="457200" rtl="0" eaLnBrk="1" latinLnBrk="0" hangingPunct="1">
+              <a:spcBef>
+                <a:spcPct val="20000"/>
+              </a:spcBef>
+              <a:buFont typeface="Arial"/>
+              <a:buChar char="•"/>
+              <a:defRPr sz="2000" kern="1200">
+                <a:solidFill>
+                  <a:schemeClr val="tx1"/>
+                </a:solidFill>
+                <a:latin typeface="+mn-lt"/>
+                <a:ea typeface="+mn-ea"/>
+                <a:cs typeface="+mn-cs"/>
+              </a:defRPr>
+            </a:lvl8pPr>
+            <a:lvl9pPr marL="3886200" indent="-228600" algn="l" defTabSz="457200" rtl="0" eaLnBrk="1" latinLnBrk="0" hangingPunct="1">
+              <a:spcBef>
+                <a:spcPct val="20000"/>
+              </a:spcBef>
+              <a:buFont typeface="Arial"/>
+              <a:buChar char="•"/>
+              <a:defRPr sz="2000" kern="1200">
+                <a:solidFill>
+                  <a:schemeClr val="tx1"/>
+                </a:solidFill>
+                <a:latin typeface="+mn-lt"/>
+                <a:ea typeface="+mn-ea"/>
+                <a:cs typeface="+mn-cs"/>
+              </a:defRPr>
+            </a:lvl9pPr>
+          </a:lstStyle>
+          <a:p>
+            <a:endParaRPr lang="en-US" dirty="0"/>
+          </a:p>
+        </p:txBody>
+      </p:sp>
+      <p:pic>
+        <p:nvPicPr>
+          <p:cNvPr id="4098" name="Picture 2">
+            <a:extLst>
+              <a:ext uri="{FF2B5EF4-FFF2-40B4-BE49-F238E27FC236}">
+                <a16:creationId xmlns:a16="http://schemas.microsoft.com/office/drawing/2014/main" id="{3D61BE02-2537-0DCF-3709-C2661EC0C614}"/>
+              </a:ext>
+            </a:extLst>
+          </p:cNvPr>
+          <p:cNvPicPr>
+            <a:picLocks noChangeAspect="1" noChangeArrowheads="1"/>
+          </p:cNvPicPr>
+          <p:nvPr/>
+        </p:nvPicPr>
+        <p:blipFill rotWithShape="1">
+          <a:blip r:embed="rId3">
+            <a:extLst>
+              <a:ext uri="{28A0092B-C50C-407E-A947-70E740481C1C}">
+                <a14:useLocalDpi xmlns:a14="http://schemas.microsoft.com/office/drawing/2010/main" val="0"/>
+              </a:ext>
+            </a:extLst>
+          </a:blip>
+          <a:srcRect r="50809" b="3857"/>
+          <a:stretch>
+            <a:fillRect/>
+          </a:stretch>
+        </p:blipFill>
+        <p:spPr bwMode="auto">
+          <a:xfrm>
+            <a:off x="4750342" y="846810"/>
+            <a:ext cx="3963936" cy="3852189"/>
+          </a:xfrm>
+          <a:prstGeom prst="rect">
+            <a:avLst/>
+          </a:prstGeom>
+          <a:noFill/>
+          <a:extLst>
+            <a:ext uri="{909E8E84-426E-40DD-AFC4-6F175D3DCCD1}">
+              <a14:hiddenFill xmlns:a14="http://schemas.microsoft.com/office/drawing/2010/main">
+                <a:solidFill>
+                  <a:srgbClr val="FFFFFF"/>
+                </a:solidFill>
+              </a14:hiddenFill>
+            </a:ext>
+          </a:extLst>
+        </p:spPr>
+      </p:pic>
+      <p:sp>
+        <p:nvSpPr>
+          <p:cNvPr id="6" name="TextBox 5">
+            <a:extLst>
+              <a:ext uri="{FF2B5EF4-FFF2-40B4-BE49-F238E27FC236}">
+                <a16:creationId xmlns:a16="http://schemas.microsoft.com/office/drawing/2014/main" id="{D42FC580-F7CE-88CE-F1D6-F48FE031D089}"/>
+              </a:ext>
+            </a:extLst>
+          </p:cNvPr>
+          <p:cNvSpPr txBox="1"/>
+          <p:nvPr/>
+        </p:nvSpPr>
+        <p:spPr>
+          <a:xfrm>
+            <a:off x="251011" y="884518"/>
+            <a:ext cx="4320989" cy="1569660"/>
+          </a:xfrm>
+          <a:prstGeom prst="rect">
+            <a:avLst/>
+          </a:prstGeom>
+          <a:noFill/>
+        </p:spPr>
+        <p:txBody>
+          <a:bodyPr wrap="square" rtlCol="0">
+            <a:spAutoFit/>
+          </a:bodyPr>
+          <a:lstStyle/>
+          <a:p>
+            <a:r>
+              <a:rPr lang="en-US" dirty="0">
+                <a:solidFill>
+                  <a:schemeClr val="accent3"/>
+                </a:solidFill>
+              </a:rPr>
+              <a:t>24-Hour Patterns for Top 5 Shapes</a:t>
+            </a:r>
+          </a:p>
+          <a:p>
+            <a:endParaRPr lang="en-US" dirty="0">
+              <a:solidFill>
+                <a:schemeClr val="accent3"/>
+              </a:solidFill>
+            </a:endParaRPr>
+          </a:p>
+          <a:p>
+            <a:endParaRPr lang="en-US" dirty="0">
+              <a:solidFill>
+                <a:schemeClr val="accent3"/>
+              </a:solidFill>
+            </a:endParaRPr>
+          </a:p>
+          <a:p>
+            <a:pPr marL="285750" indent="-285750">
+              <a:buFontTx/>
+              <a:buChar char="-"/>
+            </a:pPr>
+            <a:r>
+              <a:rPr lang="en-US" sz="1400" dirty="0"/>
+              <a:t>Shows shapes behave differently across hours: ”light" has largest difference between night and afternoon, “circle” and ”triangle” remain flat</a:t>
+            </a:r>
+          </a:p>
+        </p:txBody>
+      </p:sp>
+    </p:spTree>
+    <p:extLst>
+      <p:ext uri="{BB962C8B-B14F-4D97-AF65-F5344CB8AC3E}">
+        <p14:creationId xmlns:p14="http://schemas.microsoft.com/office/powerpoint/2010/main" val="1124376189"/>
+      </p:ext>
+    </p:extLst>
+  </p:cSld>
+  <p:clrMapOvr>
+    <a:masterClrMapping/>
+  </p:clrMapOvr>
+</p:sld>
+</file>
+
+<file path=ppt/slides/slide12.xml><?xml version="1.0" encoding="utf-8"?>
+<p:sld xmlns:a="http://schemas.openxmlformats.org/drawingml/2006/main" xmlns:r="http://schemas.openxmlformats.org/officeDocument/2006/relationships" xmlns:p="http://schemas.openxmlformats.org/presentationml/2006/main">
+  <p:cSld>
+    <p:spTree>
+      <p:nvGrpSpPr>
+        <p:cNvPr id="1" name=""/>
+        <p:cNvGrpSpPr/>
+        <p:nvPr/>
+      </p:nvGrpSpPr>
+      <p:grpSpPr>
+        <a:xfrm>
+          <a:off x="0" y="0"/>
+          <a:ext cx="0" cy="0"/>
+          <a:chOff x="0" y="0"/>
+          <a:chExt cx="0" cy="0"/>
+        </a:xfrm>
+      </p:grpSpPr>
+      <p:sp>
+        <p:nvSpPr>
+          <p:cNvPr id="2" name="Slide Number Placeholder 1">
+            <a:extLst>
+              <a:ext uri="{FF2B5EF4-FFF2-40B4-BE49-F238E27FC236}">
+                <a16:creationId xmlns:a16="http://schemas.microsoft.com/office/drawing/2014/main" id="{FB08311A-B289-7F4A-2348-9B8859FA71DD}"/>
+              </a:ext>
+            </a:extLst>
+          </p:cNvPr>
+          <p:cNvSpPr>
+            <a:spLocks noGrp="1"/>
+          </p:cNvSpPr>
+          <p:nvPr>
+            <p:ph type="sldNum" sz="quarter" idx="12"/>
+          </p:nvPr>
+        </p:nvSpPr>
+        <p:spPr/>
+        <p:txBody>
+          <a:bodyPr/>
+          <a:lstStyle/>
+          <a:p>
+            <a:fld id="{8A758EFE-665F-4341-B5B8-2DAEADA52F6C}" type="slidenum">
+              <a:rPr lang="en-US" smtClean="0"/>
+              <a:pPr/>
+              <a:t>12</a:t>
+            </a:fld>
+            <a:endParaRPr lang="en-US" dirty="0"/>
+          </a:p>
+        </p:txBody>
+      </p:sp>
+      <p:sp>
+        <p:nvSpPr>
+          <p:cNvPr id="3" name="Title 2">
+            <a:extLst>
+              <a:ext uri="{FF2B5EF4-FFF2-40B4-BE49-F238E27FC236}">
+                <a16:creationId xmlns:a16="http://schemas.microsoft.com/office/drawing/2014/main" id="{65DD227F-77ED-8197-5AD6-5BDFA5D1125A}"/>
+              </a:ext>
+            </a:extLst>
+          </p:cNvPr>
+          <p:cNvSpPr>
+            <a:spLocks noGrp="1"/>
+          </p:cNvSpPr>
+          <p:nvPr>
+            <p:ph type="title"/>
+          </p:nvPr>
+        </p:nvSpPr>
+        <p:spPr/>
+        <p:txBody>
+          <a:bodyPr/>
+          <a:lstStyle/>
+          <a:p>
+            <a:r>
+              <a:rPr lang="en-US" dirty="0"/>
+              <a:t>EDA Insights</a:t>
+            </a:r>
+            <a:r>
+              <a:rPr lang="zh-CN" altLang="en-US" dirty="0"/>
+              <a:t> </a:t>
+            </a:r>
+            <a:r>
+              <a:rPr lang="en-US" altLang="zh-CN" dirty="0"/>
+              <a:t>#4</a:t>
+            </a:r>
+            <a:endParaRPr lang="en-US" dirty="0"/>
+          </a:p>
+        </p:txBody>
+      </p:sp>
+      <p:pic>
+        <p:nvPicPr>
+          <p:cNvPr id="5" name="Picture 2">
+            <a:extLst>
+              <a:ext uri="{FF2B5EF4-FFF2-40B4-BE49-F238E27FC236}">
+                <a16:creationId xmlns:a16="http://schemas.microsoft.com/office/drawing/2014/main" id="{C481FF9C-0EAB-B5E4-A81D-5601ED7BEE4C}"/>
+              </a:ext>
+            </a:extLst>
+          </p:cNvPr>
+          <p:cNvPicPr>
+            <a:picLocks noChangeAspect="1" noChangeArrowheads="1"/>
+          </p:cNvPicPr>
+          <p:nvPr/>
+        </p:nvPicPr>
+        <p:blipFill rotWithShape="1">
+          <a:blip r:embed="rId3">
+            <a:extLst>
+              <a:ext uri="{28A0092B-C50C-407E-A947-70E740481C1C}">
+                <a14:useLocalDpi xmlns:a14="http://schemas.microsoft.com/office/drawing/2010/main" val="0"/>
+              </a:ext>
+            </a:extLst>
+          </a:blip>
+          <a:srcRect l="49074" r="-244"/>
+          <a:stretch>
+            <a:fillRect/>
+          </a:stretch>
+        </p:blipFill>
+        <p:spPr bwMode="auto">
+          <a:xfrm>
+            <a:off x="4769565" y="761094"/>
+            <a:ext cx="4123424" cy="4006715"/>
+          </a:xfrm>
+          <a:prstGeom prst="rect">
+            <a:avLst/>
+          </a:prstGeom>
+          <a:noFill/>
+          <a:extLst>
+            <a:ext uri="{909E8E84-426E-40DD-AFC4-6F175D3DCCD1}">
+              <a14:hiddenFill xmlns:a14="http://schemas.microsoft.com/office/drawing/2010/main">
+                <a:solidFill>
+                  <a:srgbClr val="FFFFFF"/>
+                </a:solidFill>
+              </a14:hiddenFill>
+            </a:ext>
+          </a:extLst>
+        </p:spPr>
+      </p:pic>
+      <p:sp>
+        <p:nvSpPr>
+          <p:cNvPr id="6" name="TextBox 5">
+            <a:extLst>
+              <a:ext uri="{FF2B5EF4-FFF2-40B4-BE49-F238E27FC236}">
+                <a16:creationId xmlns:a16="http://schemas.microsoft.com/office/drawing/2014/main" id="{39D0D8E6-7FBF-AEBD-01EF-4EE62240885E}"/>
+              </a:ext>
+            </a:extLst>
+          </p:cNvPr>
+          <p:cNvSpPr txBox="1"/>
+          <p:nvPr/>
+        </p:nvSpPr>
+        <p:spPr>
+          <a:xfrm>
+            <a:off x="251011" y="884518"/>
+            <a:ext cx="3963937" cy="1877437"/>
+          </a:xfrm>
+          <a:prstGeom prst="rect">
+            <a:avLst/>
+          </a:prstGeom>
+          <a:noFill/>
+        </p:spPr>
+        <p:txBody>
+          <a:bodyPr wrap="square" rtlCol="0">
+            <a:spAutoFit/>
+          </a:bodyPr>
+          <a:lstStyle/>
+          <a:p>
+            <a:r>
+              <a:rPr lang="en-US" dirty="0">
+                <a:solidFill>
+                  <a:schemeClr val="accent3"/>
+                </a:solidFill>
+              </a:rPr>
+              <a:t>Shape Composition by Time of Day</a:t>
+            </a:r>
+          </a:p>
+          <a:p>
+            <a:endParaRPr lang="en-US" sz="1400" dirty="0">
+              <a:solidFill>
+                <a:schemeClr val="accent3"/>
+              </a:solidFill>
+            </a:endParaRPr>
+          </a:p>
+          <a:p>
+            <a:pPr marL="285750" indent="-285750">
+              <a:buFontTx/>
+              <a:buChar char="-"/>
+            </a:pPr>
+            <a:r>
+              <a:rPr lang="en-US" sz="1400" dirty="0"/>
+              <a:t>Confirms nighttime dominates reporting for all shapes</a:t>
+            </a:r>
+          </a:p>
+          <a:p>
+            <a:pPr marL="285750" indent="-285750">
+              <a:buFontTx/>
+              <a:buChar char="-"/>
+            </a:pPr>
+            <a:r>
+              <a:rPr lang="en-US" sz="1400" dirty="0"/>
+              <a:t>Shows unequal distribution</a:t>
+            </a:r>
+          </a:p>
+          <a:p>
+            <a:pPr marL="285750" indent="-285750">
+              <a:buFontTx/>
+              <a:buChar char="-"/>
+            </a:pPr>
+            <a:r>
+              <a:rPr lang="en-US" sz="1400" dirty="0"/>
+              <a:t>Justifies including </a:t>
+            </a:r>
+            <a:r>
+              <a:rPr lang="en-US" sz="1400" dirty="0" err="1"/>
+              <a:t>time_of_day</a:t>
+            </a:r>
+            <a:r>
+              <a:rPr lang="en-US" sz="1400" dirty="0"/>
+              <a:t> as a categorical feature since it shifts shape probabilities differently</a:t>
+            </a:r>
+            <a:endParaRPr lang="en-US" sz="1400" dirty="0">
+              <a:solidFill>
+                <a:schemeClr val="accent3"/>
+              </a:solidFill>
+            </a:endParaRPr>
+          </a:p>
+        </p:txBody>
+      </p:sp>
+    </p:spTree>
+    <p:extLst>
+      <p:ext uri="{BB962C8B-B14F-4D97-AF65-F5344CB8AC3E}">
+        <p14:creationId xmlns:p14="http://schemas.microsoft.com/office/powerpoint/2010/main" val="2022292705"/>
+      </p:ext>
+    </p:extLst>
+  </p:cSld>
+  <p:clrMapOvr>
+    <a:masterClrMapping/>
+  </p:clrMapOvr>
+</p:sld>
+</file>
+
+<file path=ppt/slides/slide13.xml><?xml version="1.0" encoding="utf-8"?>
+<p:sld xmlns:a="http://schemas.openxmlformats.org/drawingml/2006/main" xmlns:r="http://schemas.openxmlformats.org/officeDocument/2006/relationships" xmlns:p="http://schemas.openxmlformats.org/presentationml/2006/main">
+  <p:cSld>
+    <p:spTree>
+      <p:nvGrpSpPr>
+        <p:cNvPr id="1" name=""/>
+        <p:cNvGrpSpPr/>
+        <p:nvPr/>
+      </p:nvGrpSpPr>
+      <p:grpSpPr>
+        <a:xfrm>
+          <a:off x="0" y="0"/>
+          <a:ext cx="0" cy="0"/>
+          <a:chOff x="0" y="0"/>
+          <a:chExt cx="0" cy="0"/>
+        </a:xfrm>
+      </p:grpSpPr>
+      <p:sp>
+        <p:nvSpPr>
+          <p:cNvPr id="2" name="Slide Number Placeholder 1">
+            <a:extLst>
+              <a:ext uri="{FF2B5EF4-FFF2-40B4-BE49-F238E27FC236}">
+                <a16:creationId xmlns:a16="http://schemas.microsoft.com/office/drawing/2014/main" id="{624A3A57-49CF-600E-73E9-2C52834345D5}"/>
+              </a:ext>
+            </a:extLst>
+          </p:cNvPr>
+          <p:cNvSpPr>
+            <a:spLocks noGrp="1"/>
+          </p:cNvSpPr>
+          <p:nvPr>
+            <p:ph type="sldNum" sz="quarter" idx="12"/>
+          </p:nvPr>
+        </p:nvSpPr>
+        <p:spPr/>
+        <p:txBody>
+          <a:bodyPr/>
+          <a:lstStyle/>
+          <a:p>
+            <a:fld id="{8A758EFE-665F-4341-B5B8-2DAEADA52F6C}" type="slidenum">
+              <a:rPr lang="en-US" smtClean="0"/>
+              <a:pPr/>
+              <a:t>13</a:t>
+            </a:fld>
+            <a:endParaRPr lang="en-US" dirty="0"/>
+          </a:p>
+        </p:txBody>
+      </p:sp>
+      <p:sp>
+        <p:nvSpPr>
+          <p:cNvPr id="3" name="Title 2">
+            <a:extLst>
+              <a:ext uri="{FF2B5EF4-FFF2-40B4-BE49-F238E27FC236}">
+                <a16:creationId xmlns:a16="http://schemas.microsoft.com/office/drawing/2014/main" id="{C8C95B1B-796B-F489-77E1-CC28F4285336}"/>
+              </a:ext>
+            </a:extLst>
+          </p:cNvPr>
+          <p:cNvSpPr>
+            <a:spLocks noGrp="1"/>
+          </p:cNvSpPr>
+          <p:nvPr>
+            <p:ph type="title"/>
+          </p:nvPr>
+        </p:nvSpPr>
+        <p:spPr/>
+        <p:txBody>
+          <a:bodyPr/>
+          <a:lstStyle/>
+          <a:p>
+            <a:r>
+              <a:rPr lang="en-US" dirty="0"/>
+              <a:t>EDA Insights</a:t>
+            </a:r>
+            <a:r>
+              <a:rPr lang="zh-CN" altLang="en-US" dirty="0"/>
+              <a:t> </a:t>
+            </a:r>
+            <a:r>
+              <a:rPr lang="en-US" altLang="zh-CN" dirty="0"/>
+              <a:t>#5</a:t>
+            </a:r>
+            <a:endParaRPr lang="en-US" dirty="0"/>
+          </a:p>
+        </p:txBody>
+      </p:sp>
+      <p:pic>
+        <p:nvPicPr>
+          <p:cNvPr id="2054" name="Picture 6">
+            <a:extLst>
+              <a:ext uri="{FF2B5EF4-FFF2-40B4-BE49-F238E27FC236}">
+                <a16:creationId xmlns:a16="http://schemas.microsoft.com/office/drawing/2014/main" id="{7AA69823-9710-C2C3-EBB2-9F6761C588F0}"/>
+              </a:ext>
+            </a:extLst>
+          </p:cNvPr>
+          <p:cNvPicPr>
+            <a:picLocks noChangeAspect="1" noChangeArrowheads="1"/>
+          </p:cNvPicPr>
+          <p:nvPr/>
+        </p:nvPicPr>
+        <p:blipFill>
+          <a:blip r:embed="rId2">
+            <a:extLst>
+              <a:ext uri="{28A0092B-C50C-407E-A947-70E740481C1C}">
+                <a14:useLocalDpi xmlns:a14="http://schemas.microsoft.com/office/drawing/2010/main" val="0"/>
+              </a:ext>
+            </a:extLst>
+          </a:blip>
+          <a:srcRect/>
+          <a:stretch>
+            <a:fillRect/>
+          </a:stretch>
+        </p:blipFill>
+        <p:spPr bwMode="auto">
+          <a:xfrm>
+            <a:off x="4722103" y="2112140"/>
+            <a:ext cx="4451075" cy="2652471"/>
+          </a:xfrm>
+          <a:prstGeom prst="rect">
+            <a:avLst/>
+          </a:prstGeom>
+          <a:noFill/>
+          <a:extLst>
+            <a:ext uri="{909E8E84-426E-40DD-AFC4-6F175D3DCCD1}">
+              <a14:hiddenFill xmlns:a14="http://schemas.microsoft.com/office/drawing/2010/main">
+                <a:solidFill>
+                  <a:srgbClr val="FFFFFF"/>
+                </a:solidFill>
+              </a14:hiddenFill>
+            </a:ext>
+          </a:extLst>
+        </p:spPr>
+      </p:pic>
+      <p:pic>
+        <p:nvPicPr>
+          <p:cNvPr id="2056" name="Picture 8">
+            <a:extLst>
+              <a:ext uri="{FF2B5EF4-FFF2-40B4-BE49-F238E27FC236}">
+                <a16:creationId xmlns:a16="http://schemas.microsoft.com/office/drawing/2014/main" id="{BAD8A677-5677-3E12-53CE-FB780B1EE540}"/>
+              </a:ext>
+            </a:extLst>
+          </p:cNvPr>
+          <p:cNvPicPr>
+            <a:picLocks noChangeAspect="1" noChangeArrowheads="1"/>
+          </p:cNvPicPr>
+          <p:nvPr/>
+        </p:nvPicPr>
+        <p:blipFill>
+          <a:blip r:embed="rId3">
+            <a:extLst>
+              <a:ext uri="{28A0092B-C50C-407E-A947-70E740481C1C}">
+                <a14:useLocalDpi xmlns:a14="http://schemas.microsoft.com/office/drawing/2010/main" val="0"/>
+              </a:ext>
+            </a:extLst>
+          </a:blip>
+          <a:srcRect/>
+          <a:stretch>
+            <a:fillRect/>
+          </a:stretch>
+        </p:blipFill>
+        <p:spPr bwMode="auto">
+          <a:xfrm>
+            <a:off x="0" y="2186209"/>
+            <a:ext cx="4717591" cy="2439061"/>
+          </a:xfrm>
+          <a:prstGeom prst="rect">
+            <a:avLst/>
+          </a:prstGeom>
+          <a:noFill/>
+          <a:extLst>
+            <a:ext uri="{909E8E84-426E-40DD-AFC4-6F175D3DCCD1}">
+              <a14:hiddenFill xmlns:a14="http://schemas.microsoft.com/office/drawing/2010/main">
+                <a:solidFill>
+                  <a:srgbClr val="FFFFFF"/>
+                </a:solidFill>
+              </a14:hiddenFill>
+            </a:ext>
+          </a:extLst>
+        </p:spPr>
+      </p:pic>
+      <p:sp>
+        <p:nvSpPr>
+          <p:cNvPr id="5" name="TextBox 4">
+            <a:extLst>
+              <a:ext uri="{FF2B5EF4-FFF2-40B4-BE49-F238E27FC236}">
+                <a16:creationId xmlns:a16="http://schemas.microsoft.com/office/drawing/2014/main" id="{AD008919-90AC-E142-B0DA-B3C64A0C8272}"/>
+              </a:ext>
+            </a:extLst>
+          </p:cNvPr>
+          <p:cNvSpPr txBox="1"/>
+          <p:nvPr/>
+        </p:nvSpPr>
+        <p:spPr>
+          <a:xfrm>
+            <a:off x="251011" y="884518"/>
+            <a:ext cx="6713889" cy="1538883"/>
+          </a:xfrm>
+          <a:prstGeom prst="rect">
+            <a:avLst/>
+          </a:prstGeom>
+          <a:noFill/>
+        </p:spPr>
+        <p:txBody>
+          <a:bodyPr wrap="none" rtlCol="0">
+            <a:spAutoFit/>
+          </a:bodyPr>
+          <a:lstStyle/>
+          <a:p>
+            <a:r>
+              <a:rPr lang="en-US" dirty="0">
+                <a:solidFill>
+                  <a:schemeClr val="accent3"/>
+                </a:solidFill>
+              </a:rPr>
+              <a:t>Duration vs Shape Analysis</a:t>
+            </a:r>
+          </a:p>
+          <a:p>
+            <a:r>
+              <a:rPr lang="en-US" sz="1600" dirty="0"/>
+              <a:t>Boxplot showing median duration per shape; bar chart showing mean duration</a:t>
+            </a:r>
+          </a:p>
+          <a:p>
+            <a:endParaRPr lang="en-US" sz="1600" dirty="0"/>
+          </a:p>
+          <a:p>
+            <a:pPr marL="285750" indent="-285750">
+              <a:buFontTx/>
+              <a:buChar char="-"/>
+            </a:pPr>
+            <a:r>
+              <a:rPr lang="en-US" sz="1400" dirty="0"/>
+              <a:t>Duration (seconds) has predictive signal</a:t>
+            </a:r>
+          </a:p>
+          <a:p>
+            <a:pPr marL="285750" indent="-285750">
+              <a:buFontTx/>
+              <a:buChar char="-"/>
+            </a:pPr>
+            <a:r>
+              <a:rPr lang="en-US" sz="1400" dirty="0"/>
+              <a:t>Suggesting certain shapes are associated with longer/shorter sightings</a:t>
+            </a:r>
+          </a:p>
+          <a:p>
+            <a:endParaRPr lang="en-US" sz="1600" dirty="0">
+              <a:solidFill>
+                <a:schemeClr val="accent5"/>
+              </a:solidFill>
+            </a:endParaRPr>
+          </a:p>
+        </p:txBody>
+      </p:sp>
+    </p:spTree>
+    <p:extLst>
+      <p:ext uri="{BB962C8B-B14F-4D97-AF65-F5344CB8AC3E}">
+        <p14:creationId xmlns:p14="http://schemas.microsoft.com/office/powerpoint/2010/main" val="3522553134"/>
+      </p:ext>
+    </p:extLst>
+  </p:cSld>
+  <p:clrMapOvr>
+    <a:masterClrMapping/>
+  </p:clrMapOvr>
+</p:sld>
+</file>
+
+<file path=ppt/slides/slide14.xml><?xml version="1.0" encoding="utf-8"?>
+<p:sld xmlns:a="http://schemas.openxmlformats.org/drawingml/2006/main" xmlns:r="http://schemas.openxmlformats.org/officeDocument/2006/relationships" xmlns:p="http://schemas.openxmlformats.org/presentationml/2006/main">
+  <p:cSld>
+    <p:spTree>
+      <p:nvGrpSpPr>
         <p:cNvPr id="1" name=""/>
         <p:cNvGrpSpPr/>
         <p:nvPr/>
@@ -10635,7 +12117,7 @@
             <a:fld id="{8A758EFE-665F-4341-B5B8-2DAEADA52F6C}" type="slidenum">
               <a:rPr lang="en-US" smtClean="0"/>
               <a:pPr/>
-              <a:t>10</a:t>
+              <a:t>14</a:t>
             </a:fld>
             <a:endParaRPr lang="en-US" dirty="0"/>
           </a:p>
@@ -10885,7 +12367,7 @@
 </p:sld>
 </file>
 
-<file path=ppt/slides/slide11.xml><?xml version="1.0" encoding="utf-8"?>
+<file path=ppt/slides/slide15.xml><?xml version="1.0" encoding="utf-8"?>
 <p:sld xmlns:a="http://schemas.openxmlformats.org/drawingml/2006/main" xmlns:r="http://schemas.openxmlformats.org/officeDocument/2006/relationships" xmlns:p="http://schemas.openxmlformats.org/presentationml/2006/main">
   <p:cSld>
     <p:spTree>
@@ -10920,7 +12402,7 @@
             <a:fld id="{8A758EFE-665F-4341-B5B8-2DAEADA52F6C}" type="slidenum">
               <a:rPr lang="en-US" smtClean="0"/>
               <a:pPr/>
-              <a:t>11</a:t>
+              <a:t>15</a:t>
             </a:fld>
             <a:endParaRPr lang="en-US" dirty="0"/>
           </a:p>
@@ -11194,7 +12676,7 @@
 </p:sld>
 </file>
 
-<file path=ppt/slides/slide12.xml><?xml version="1.0" encoding="utf-8"?>
+<file path=ppt/slides/slide16.xml><?xml version="1.0" encoding="utf-8"?>
 <p:sld xmlns:a="http://schemas.openxmlformats.org/drawingml/2006/main" xmlns:r="http://schemas.openxmlformats.org/officeDocument/2006/relationships" xmlns:p="http://schemas.openxmlformats.org/presentationml/2006/main">
   <p:cSld>
     <p:spTree>
@@ -11229,7 +12711,7 @@
             <a:fld id="{8A758EFE-665F-4341-B5B8-2DAEADA52F6C}" type="slidenum">
               <a:rPr lang="en-US" smtClean="0"/>
               <a:pPr/>
-              <a:t>12</a:t>
+              <a:t>16</a:t>
             </a:fld>
             <a:endParaRPr lang="en-US" dirty="0"/>
           </a:p>
@@ -11507,7 +12989,7 @@
 </p:sld>
 </file>
 
-<file path=ppt/slides/slide13.xml><?xml version="1.0" encoding="utf-8"?>
+<file path=ppt/slides/slide17.xml><?xml version="1.0" encoding="utf-8"?>
 <p:sld xmlns:a="http://schemas.openxmlformats.org/drawingml/2006/main" xmlns:r="http://schemas.openxmlformats.org/officeDocument/2006/relationships" xmlns:p="http://schemas.openxmlformats.org/presentationml/2006/main">
   <p:cSld>
     <p:spTree>
@@ -11542,7 +13024,7 @@
             <a:fld id="{8A758EFE-665F-4341-B5B8-2DAEADA52F6C}" type="slidenum">
               <a:rPr lang="en-US" smtClean="0"/>
               <a:pPr/>
-              <a:t>13</a:t>
+              <a:t>17</a:t>
             </a:fld>
             <a:endParaRPr lang="en-US" dirty="0"/>
           </a:p>
@@ -12550,7 +14032,7 @@
 </p:sld>
 </file>
 
-<file path=ppt/slides/slide14.xml><?xml version="1.0" encoding="utf-8"?>
+<file path=ppt/slides/slide18.xml><?xml version="1.0" encoding="utf-8"?>
 <p:sld xmlns:a="http://schemas.openxmlformats.org/drawingml/2006/main" xmlns:r="http://schemas.openxmlformats.org/officeDocument/2006/relationships" xmlns:p="http://schemas.openxmlformats.org/presentationml/2006/main">
   <p:cSld>
     <p:spTree>
@@ -12585,7 +14067,7 @@
             <a:fld id="{8A758EFE-665F-4341-B5B8-2DAEADA52F6C}" type="slidenum">
               <a:rPr lang="en-US" smtClean="0"/>
               <a:pPr/>
-              <a:t>14</a:t>
+              <a:t>18</a:t>
             </a:fld>
             <a:endParaRPr lang="en-US" dirty="0"/>
           </a:p>
@@ -14081,7 +15563,7 @@
         <p:spPr>
           <a:xfrm>
             <a:off x="251011" y="884518"/>
-            <a:ext cx="6522106" cy="1631216"/>
+            <a:ext cx="6586227" cy="1600438"/>
           </a:xfrm>
           <a:prstGeom prst="rect">
             <a:avLst/>
@@ -14100,7 +15582,7 @@
                   <a:schemeClr val="accent3"/>
                 </a:solidFill>
               </a:rPr>
-              <a:t>City Features Dataset(</a:t>
+              <a:t>City Features Dataset (</a:t>
             </a:r>
             <a:r>
               <a:rPr lang="en-US" dirty="0" err="1">
@@ -14860,8 +16342,17 @@
           <a:p>
             <a:r>
               <a:rPr lang="en-US" dirty="0"/>
-              <a:t>Contributions of this work (1 slide)</a:t>
-            </a:r>
+              <a:t>EDA Insights</a:t>
+            </a:r>
+            <a:r>
+              <a:rPr lang="zh-CN" altLang="en-US" dirty="0"/>
+              <a:t> </a:t>
+            </a:r>
+            <a:r>
+              <a:rPr lang="en-US" altLang="zh-CN" dirty="0"/>
+              <a:t>#1</a:t>
+            </a:r>
+            <a:endParaRPr lang="en-US" dirty="0"/>
           </a:p>
         </p:txBody>
       </p:sp>
@@ -15039,24 +16530,125 @@
             </a:lvl9pPr>
           </a:lstStyle>
           <a:p>
-            <a:r>
-              <a:rPr lang="en-US" dirty="0"/>
-              <a:t>Sneak peak into the contributions of this work</a:t>
-            </a:r>
-          </a:p>
-          <a:p>
-            <a:pPr lvl="1"/>
-            <a:r>
-              <a:rPr lang="en-US" dirty="0"/>
-              <a:t>Eg. New NLP problems, Representations, Models, Algorithmic approaches, Datasets, etc.</a:t>
-            </a:r>
-          </a:p>
-          <a:p>
-            <a:pPr lvl="1"/>
-            <a:r>
-              <a:rPr lang="en-US" dirty="0"/>
-              <a:t>Potentially discuss additional contributions that the work makes, but were not explicitly stated in the paper</a:t>
-            </a:r>
+            <a:endParaRPr lang="en-US" dirty="0"/>
+          </a:p>
+        </p:txBody>
+      </p:sp>
+      <p:pic>
+        <p:nvPicPr>
+          <p:cNvPr id="1026" name="Picture 2">
+            <a:extLst>
+              <a:ext uri="{FF2B5EF4-FFF2-40B4-BE49-F238E27FC236}">
+                <a16:creationId xmlns:a16="http://schemas.microsoft.com/office/drawing/2014/main" id="{855A5BD8-2E13-3C8A-1EA5-E531B88C9CFB}"/>
+              </a:ext>
+            </a:extLst>
+          </p:cNvPr>
+          <p:cNvPicPr>
+            <a:picLocks noChangeAspect="1" noChangeArrowheads="1"/>
+          </p:cNvPicPr>
+          <p:nvPr/>
+        </p:nvPicPr>
+        <p:blipFill>
+          <a:blip r:embed="rId2">
+            <a:extLst>
+              <a:ext uri="{28A0092B-C50C-407E-A947-70E740481C1C}">
+                <a14:useLocalDpi xmlns:a14="http://schemas.microsoft.com/office/drawing/2010/main" val="0"/>
+              </a:ext>
+            </a:extLst>
+          </a:blip>
+          <a:srcRect/>
+          <a:stretch>
+            <a:fillRect/>
+          </a:stretch>
+        </p:blipFill>
+        <p:spPr bwMode="auto">
+          <a:xfrm>
+            <a:off x="4960014" y="751594"/>
+            <a:ext cx="3494547" cy="4391906"/>
+          </a:xfrm>
+          <a:prstGeom prst="rect">
+            <a:avLst/>
+          </a:prstGeom>
+          <a:noFill/>
+          <a:extLst>
+            <a:ext uri="{909E8E84-426E-40DD-AFC4-6F175D3DCCD1}">
+              <a14:hiddenFill xmlns:a14="http://schemas.microsoft.com/office/drawing/2010/main">
+                <a:solidFill>
+                  <a:srgbClr val="FFFFFF"/>
+                </a:solidFill>
+              </a14:hiddenFill>
+            </a:ext>
+          </a:extLst>
+        </p:spPr>
+      </p:pic>
+      <p:sp>
+        <p:nvSpPr>
+          <p:cNvPr id="4" name="TextBox 3">
+            <a:extLst>
+              <a:ext uri="{FF2B5EF4-FFF2-40B4-BE49-F238E27FC236}">
+                <a16:creationId xmlns:a16="http://schemas.microsoft.com/office/drawing/2014/main" id="{45BB53D2-35E8-2DCB-D801-B51C26B7D47F}"/>
+              </a:ext>
+            </a:extLst>
+          </p:cNvPr>
+          <p:cNvSpPr txBox="1"/>
+          <p:nvPr/>
+        </p:nvSpPr>
+        <p:spPr>
+          <a:xfrm>
+            <a:off x="251011" y="884518"/>
+            <a:ext cx="4709003" cy="1292662"/>
+          </a:xfrm>
+          <a:prstGeom prst="rect">
+            <a:avLst/>
+          </a:prstGeom>
+          <a:noFill/>
+        </p:spPr>
+        <p:txBody>
+          <a:bodyPr wrap="square" rtlCol="0">
+            <a:spAutoFit/>
+          </a:bodyPr>
+          <a:lstStyle/>
+          <a:p>
+            <a:r>
+              <a:rPr lang="en-US" dirty="0">
+                <a:solidFill>
+                  <a:schemeClr val="accent3"/>
+                </a:solidFill>
+              </a:rPr>
+              <a:t>Target Class Distribution (Shape Distribution)</a:t>
+            </a:r>
+          </a:p>
+          <a:p>
+            <a:endParaRPr lang="en-US" dirty="0">
+              <a:solidFill>
+                <a:schemeClr val="accent3"/>
+              </a:solidFill>
+            </a:endParaRPr>
+          </a:p>
+          <a:p>
+            <a:pPr marL="285750" indent="-285750">
+              <a:buFontTx/>
+              <a:buChar char="-"/>
+            </a:pPr>
+            <a:r>
+              <a:rPr lang="en-US" sz="1400" dirty="0"/>
+              <a:t>Shows the severe class imbalance</a:t>
+            </a:r>
+          </a:p>
+          <a:p>
+            <a:pPr marL="285750" indent="-285750">
+              <a:buFontTx/>
+              <a:buChar char="-"/>
+            </a:pPr>
+            <a:r>
+              <a:rPr lang="en-US" sz="1400" dirty="0"/>
+              <a:t>Informed our choice of SMOTE in feature engineering to prepare data for modeling</a:t>
+            </a:r>
+            <a:endParaRPr lang="en-US" sz="1400" dirty="0">
+              <a:solidFill>
+                <a:schemeClr val="accent5"/>
+              </a:solidFill>
+            </a:endParaRPr>
           </a:p>
         </p:txBody>
       </p:sp>

--- a/pre.pptx
+++ b/pre.pptx
@@ -1,34 +1,38 @@
 
 <file path=ppt/presentation.xml><?xml version="1.0" encoding="utf-8"?>
-<p:presentation xmlns:a="http://schemas.openxmlformats.org/drawingml/2006/main" xmlns:r="http://schemas.openxmlformats.org/officeDocument/2006/relationships" xmlns:p="http://schemas.openxmlformats.org/presentationml/2006/main" saveSubsetFonts="1" autoCompressPictures="0">
+<p:presentation xmlns:a="http://schemas.openxmlformats.org/drawingml/2006/main" xmlns:r="http://schemas.openxmlformats.org/officeDocument/2006/relationships" xmlns:p="http://schemas.openxmlformats.org/presentationml/2006/main" autoCompressPictures="0">
   <p:sldMasterIdLst>
     <p:sldMasterId id="2147483648" r:id="rId1"/>
   </p:sldMasterIdLst>
   <p:notesMasterIdLst>
-    <p:notesMasterId r:id="rId20"/>
+    <p:notesMasterId r:id="rId14"/>
   </p:notesMasterIdLst>
   <p:handoutMasterIdLst>
-    <p:handoutMasterId r:id="rId21"/>
+    <p:handoutMasterId r:id="rId26"/>
   </p:handoutMasterIdLst>
   <p:sldIdLst>
-    <p:sldId id="263" r:id="rId2"/>
-    <p:sldId id="311" r:id="rId3"/>
-    <p:sldId id="320" r:id="rId4"/>
-    <p:sldId id="296" r:id="rId5"/>
-    <p:sldId id="305" r:id="rId6"/>
-    <p:sldId id="324" r:id="rId7"/>
-    <p:sldId id="321" r:id="rId8"/>
-    <p:sldId id="325" r:id="rId9"/>
-    <p:sldId id="314" r:id="rId10"/>
-    <p:sldId id="327" r:id="rId11"/>
-    <p:sldId id="328" r:id="rId12"/>
-    <p:sldId id="329" r:id="rId13"/>
-    <p:sldId id="326" r:id="rId14"/>
-    <p:sldId id="315" r:id="rId15"/>
-    <p:sldId id="317" r:id="rId16"/>
-    <p:sldId id="319" r:id="rId17"/>
-    <p:sldId id="261" r:id="rId18"/>
-    <p:sldId id="292" r:id="rId19"/>
+    <p:sldId id="263" r:id="rId3"/>
+    <p:sldId id="311" r:id="rId4"/>
+    <p:sldId id="320" r:id="rId5"/>
+    <p:sldId id="296" r:id="rId6"/>
+    <p:sldId id="305" r:id="rId7"/>
+    <p:sldId id="324" r:id="rId8"/>
+    <p:sldId id="321" r:id="rId9"/>
+    <p:sldId id="325" r:id="rId10"/>
+    <p:sldId id="314" r:id="rId11"/>
+    <p:sldId id="327" r:id="rId12"/>
+    <p:sldId id="328" r:id="rId13"/>
+    <p:sldId id="329" r:id="rId15"/>
+    <p:sldId id="326" r:id="rId16"/>
+    <p:sldId id="330" r:id="rId17"/>
+    <p:sldId id="331" r:id="rId18"/>
+    <p:sldId id="332" r:id="rId19"/>
+    <p:sldId id="333" r:id="rId20"/>
+    <p:sldId id="315" r:id="rId21"/>
+    <p:sldId id="317" r:id="rId22"/>
+    <p:sldId id="319" r:id="rId23"/>
+    <p:sldId id="261" r:id="rId24"/>
+    <p:sldId id="292" r:id="rId25"/>
   </p:sldIdLst>
   <p:sldSz cx="9144000" cy="5143500" type="screen16x9"/>
   <p:notesSz cx="6858000" cy="9144000"/>
@@ -130,12 +134,12 @@
   <p:extLst>
     <p:ext uri="{EFAFB233-063F-42B5-8137-9DF3F51BA10A}">
       <p15:sldGuideLst xmlns:p15="http://schemas.microsoft.com/office/powerpoint/2012/main">
-        <p15:guide id="1" orient="horz" pos="1620">
+        <p15:guide id="1" orient="horz" pos="1646" userDrawn="1">
           <p15:clr>
             <a:srgbClr val="A4A3A4"/>
           </p15:clr>
         </p15:guide>
-        <p15:guide id="2" pos="2880">
+        <p15:guide id="2" pos="2871" userDrawn="1">
           <p15:clr>
             <a:srgbClr val="A4A3A4"/>
           </p15:clr>
@@ -147,9 +151,9 @@
 </file>
 
 <file path=ppt/charts/chart1.xml><?xml version="1.0" encoding="utf-8"?>
-<c:chartSpace xmlns:c="http://schemas.openxmlformats.org/drawingml/2006/chart" xmlns:a="http://schemas.openxmlformats.org/drawingml/2006/main" xmlns:r="http://schemas.openxmlformats.org/officeDocument/2006/relationships" xmlns:c16r2="http://schemas.microsoft.com/office/drawing/2015/06/chart">
+<c:chartSpace xmlns:c="http://schemas.openxmlformats.org/drawingml/2006/chart" xmlns:a="http://schemas.openxmlformats.org/drawingml/2006/main" xmlns:r="http://schemas.openxmlformats.org/officeDocument/2006/relationships">
   <c:date1904 val="0"/>
-  <c:lang val="en-US"/>
+  <c:lang val="zh-CN"/>
   <c:roundedCorners val="0"/>
   <mc:AlternateContent xmlns:mc="http://schemas.openxmlformats.org/markup-compatibility/2006">
     <mc:Choice xmlns:c14="http://schemas.microsoft.com/office/drawing/2007/8/2/chart" Requires="c14">
@@ -160,17 +164,17 @@
     </mc:Fallback>
   </mc:AlternateContent>
   <c:chart>
-    <c:autoTitleDeleted val="0"/>
+    <c:autoTitleDeleted val="1"/>
     <c:plotArea>
       <c:layout>
         <c:manualLayout>
           <c:layoutTarget val="inner"/>
           <c:xMode val="edge"/>
           <c:yMode val="edge"/>
-          <c:x val="0.14977800183295301"/>
-          <c:y val="4.2670177509307301E-2"/>
-          <c:w val="0.57948787445501004"/>
-          <c:h val="0.82030038736718303"/>
+          <c:x val="0.149778001832953"/>
+          <c:y val="0.0426701775093073"/>
+          <c:w val="0.57948787445501"/>
+          <c:h val="0.820300387367183"/>
         </c:manualLayout>
       </c:layout>
       <c:barChart>
@@ -202,6 +206,9 @@
             <a:effectLst/>
           </c:spPr>
           <c:invertIfNegative val="0"/>
+          <c:dLbls>
+            <c:delete val="1"/>
+          </c:dLbls>
           <c:cat>
             <c:strRef>
               <c:f>Sheet1!$A$2:$A$5</c:f>
@@ -243,11 +250,6 @@
               </c:numCache>
             </c:numRef>
           </c:val>
-          <c:extLst>
-            <c:ext xmlns:c16="http://schemas.microsoft.com/office/drawing/2014/chart" uri="{C3380CC4-5D6E-409C-BE32-E72D297353CC}">
-              <c16:uniqueId val="{00000000-3921-D74C-9AAC-26AFFF125592}"/>
-            </c:ext>
-          </c:extLst>
         </c:ser>
         <c:ser>
           <c:idx val="1"/>
@@ -274,6 +276,9 @@
             <a:effectLst/>
           </c:spPr>
           <c:invertIfNegative val="0"/>
+          <c:dLbls>
+            <c:delete val="1"/>
+          </c:dLbls>
           <c:cat>
             <c:strRef>
               <c:f>Sheet1!$A$2:$A$5</c:f>
@@ -315,11 +320,6 @@
               </c:numCache>
             </c:numRef>
           </c:val>
-          <c:extLst>
-            <c:ext xmlns:c16="http://schemas.microsoft.com/office/drawing/2014/chart" uri="{C3380CC4-5D6E-409C-BE32-E72D297353CC}">
-              <c16:uniqueId val="{00000001-3921-D74C-9AAC-26AFFF125592}"/>
-            </c:ext>
-          </c:extLst>
         </c:ser>
         <c:dLbls>
           <c:showLegendKey val="0"/>
@@ -344,6 +344,22 @@
         <c:majorTickMark val="out"/>
         <c:minorTickMark val="none"/>
         <c:tickLblPos val="nextTo"/>
+        <c:txPr>
+          <a:bodyPr rot="-60000000" spcFirstLastPara="0" vertOverflow="ellipsis" vert="horz" wrap="square" anchor="ctr" anchorCtr="1"/>
+          <a:lstStyle/>
+          <a:p>
+            <a:pPr>
+              <a:defRPr lang="zh-CN" sz="1800" b="0" i="0" u="none" strike="noStrike" kern="1200" baseline="0">
+                <a:solidFill>
+                  <a:schemeClr val="tx1"/>
+                </a:solidFill>
+                <a:latin typeface="+mn-lt"/>
+                <a:ea typeface="+mn-ea"/>
+                <a:cs typeface="+mn-cs"/>
+              </a:defRPr>
+            </a:pPr>
+          </a:p>
+        </c:txPr>
         <c:crossAx val="-2128989408"/>
         <c:crosses val="autoZero"/>
         <c:auto val="1"/>
@@ -363,6 +379,22 @@
         <c:majorTickMark val="out"/>
         <c:minorTickMark val="none"/>
         <c:tickLblPos val="nextTo"/>
+        <c:txPr>
+          <a:bodyPr rot="-60000000" spcFirstLastPara="0" vertOverflow="ellipsis" vert="horz" wrap="square" anchor="ctr" anchorCtr="1"/>
+          <a:lstStyle/>
+          <a:p>
+            <a:pPr>
+              <a:defRPr lang="zh-CN" sz="1800" b="0" i="0" u="none" strike="noStrike" kern="1200" baseline="0">
+                <a:solidFill>
+                  <a:schemeClr val="tx1"/>
+                </a:solidFill>
+                <a:latin typeface="+mn-lt"/>
+                <a:ea typeface="+mn-ea"/>
+                <a:cs typeface="+mn-cs"/>
+              </a:defRPr>
+            </a:pPr>
+          </a:p>
+        </c:txPr>
         <c:crossAx val="-2128992192"/>
         <c:crosses val="autoZero"/>
         <c:crossBetween val="between"/>
@@ -374,26 +406,46 @@
         <c:manualLayout>
           <c:xMode val="edge"/>
           <c:yMode val="edge"/>
-          <c:x val="0.78064003203872501"/>
-          <c:y val="0.41185824111032099"/>
-          <c:w val="0.21935996796127499"/>
-          <c:h val="0.17628328445597299"/>
+          <c:x val="0.780640032038725"/>
+          <c:y val="0.411858241110321"/>
+          <c:w val="0.219359967961275"/>
+          <c:h val="0.176283284455973"/>
         </c:manualLayout>
       </c:layout>
       <c:overlay val="0"/>
+      <c:txPr>
+        <a:bodyPr rot="0" spcFirstLastPara="0" vertOverflow="ellipsis" vert="horz" wrap="square" anchor="ctr" anchorCtr="1"/>
+        <a:lstStyle/>
+        <a:p>
+          <a:pPr>
+            <a:defRPr lang="zh-CN" sz="1800" b="0" i="0" u="none" strike="noStrike" kern="1200" baseline="0">
+              <a:solidFill>
+                <a:schemeClr val="tx1"/>
+              </a:solidFill>
+              <a:latin typeface="+mn-lt"/>
+              <a:ea typeface="+mn-ea"/>
+              <a:cs typeface="+mn-cs"/>
+            </a:defRPr>
+          </a:pPr>
+        </a:p>
+      </c:txPr>
     </c:legend>
     <c:plotVisOnly val="1"/>
     <c:dispBlanksAs val="gap"/>
     <c:showDLblsOverMax val="0"/>
+    <c:extLst>
+      <c:ext uri="{0b15fc19-7d7d-44ad-8c2d-2c3a37ce22c3}">
+        <chartProps xmlns="https://web.wps.cn/et/2018/main" chartId="{f2bc7788-875f-47b6-bf51-96bf700c5d78}"/>
+      </c:ext>
+    </c:extLst>
   </c:chart>
   <c:txPr>
     <a:bodyPr/>
     <a:lstStyle/>
     <a:p>
       <a:pPr>
-        <a:defRPr sz="1800"/>
+        <a:defRPr lang="zh-CN" sz="1800"/>
       </a:pPr>
-      <a:endParaRPr lang="en-US"/>
     </a:p>
   </c:txPr>
   <c:externalData r:id="rId1">
@@ -484,7 +536,6 @@
           <a:p>
             <a:fld id="{89B5E162-9D79-2943-B0A3-211BF28B7513}" type="datetimeFigureOut">
               <a:rPr lang="en-US" smtClean="0"/>
-              <a:t>12/8/25</a:t>
             </a:fld>
             <a:endParaRPr lang="en-US" dirty="0"/>
           </a:p>
@@ -550,18 +601,12 @@
           <a:p>
             <a:fld id="{8222E400-0EC4-CD46-9C72-78BD5E94273C}" type="slidenum">
               <a:rPr lang="en-US" smtClean="0"/>
-              <a:t>‹#›</a:t>
             </a:fld>
             <a:endParaRPr lang="en-US" dirty="0"/>
           </a:p>
         </p:txBody>
       </p:sp>
     </p:spTree>
-    <p:extLst>
-      <p:ext uri="{BB962C8B-B14F-4D97-AF65-F5344CB8AC3E}">
-        <p14:creationId xmlns:p14="http://schemas.microsoft.com/office/powerpoint/2010/main" val="2457242784"/>
-      </p:ext>
-    </p:extLst>
   </p:cSld>
   <p:clrMap bg1="lt1" tx1="dk1" bg2="lt2" tx2="dk2" accent1="accent1" accent2="accent2" accent3="accent3" accent4="accent4" accent5="accent5" accent6="accent6" hlink="hlink" folHlink="folHlink"/>
   <p:hf hdr="0" ftr="0" dt="0"/>
@@ -650,7 +695,6 @@
           <a:p>
             <a:fld id="{A1CBAB52-94AF-9448-9B1C-7768B1879D49}" type="datetimeFigureOut">
               <a:rPr lang="en-US" smtClean="0"/>
-              <a:t>12/8/25</a:t>
             </a:fld>
             <a:endParaRPr lang="en-US" dirty="0"/>
           </a:p>
@@ -717,6 +761,7 @@
               <a:rPr lang="en-US"/>
               <a:t>Click to edit Master text styles</a:t>
             </a:r>
+            <a:endParaRPr lang="en-US"/>
           </a:p>
           <a:p>
             <a:pPr lvl="1"/>
@@ -724,6 +769,7 @@
               <a:rPr lang="en-US"/>
               <a:t>Second level</a:t>
             </a:r>
+            <a:endParaRPr lang="en-US"/>
           </a:p>
           <a:p>
             <a:pPr lvl="2"/>
@@ -731,6 +777,7 @@
               <a:rPr lang="en-US"/>
               <a:t>Third level</a:t>
             </a:r>
+            <a:endParaRPr lang="en-US"/>
           </a:p>
           <a:p>
             <a:pPr lvl="3"/>
@@ -738,6 +785,7 @@
               <a:rPr lang="en-US"/>
               <a:t>Fourth level</a:t>
             </a:r>
+            <a:endParaRPr lang="en-US"/>
           </a:p>
           <a:p>
             <a:pPr lvl="4"/>
@@ -745,6 +793,7 @@
               <a:rPr lang="en-US"/>
               <a:t>Fifth level</a:t>
             </a:r>
+            <a:endParaRPr lang="en-US"/>
           </a:p>
         </p:txBody>
       </p:sp>
@@ -808,18 +857,12 @@
           <a:p>
             <a:fld id="{55447283-AD3B-EE49-8B53-C7D74121EF4E}" type="slidenum">
               <a:rPr lang="en-US" smtClean="0"/>
-              <a:t>‹#›</a:t>
             </a:fld>
             <a:endParaRPr lang="en-US" dirty="0"/>
           </a:p>
         </p:txBody>
       </p:sp>
     </p:spTree>
-    <p:extLst>
-      <p:ext uri="{BB962C8B-B14F-4D97-AF65-F5344CB8AC3E}">
-        <p14:creationId xmlns:p14="http://schemas.microsoft.com/office/powerpoint/2010/main" val="2423512021"/>
-      </p:ext>
-    </p:extLst>
   </p:cSld>
   <p:clrMap bg1="lt1" tx1="dk1" bg2="lt2" tx2="dk2" accent1="accent1" accent2="accent2" accent3="accent3" accent4="accent4" accent5="accent5" accent6="accent6" hlink="hlink" folHlink="folHlink"/>
   <p:hf hdr="0" ftr="0" dt="0"/>
@@ -990,18 +1033,12 @@
           <a:p>
             <a:fld id="{55447283-AD3B-EE49-8B53-C7D74121EF4E}" type="slidenum">
               <a:rPr lang="en-US" smtClean="0"/>
-              <a:t>11</a:t>
             </a:fld>
             <a:endParaRPr lang="en-US" dirty="0"/>
           </a:p>
         </p:txBody>
       </p:sp>
     </p:spTree>
-    <p:extLst>
-      <p:ext uri="{BB962C8B-B14F-4D97-AF65-F5344CB8AC3E}">
-        <p14:creationId xmlns:p14="http://schemas.microsoft.com/office/powerpoint/2010/main" val="3011463724"/>
-      </p:ext>
-    </p:extLst>
   </p:cSld>
   <p:clrMapOvr>
     <a:masterClrMapping/>
@@ -1074,18 +1111,81 @@
           <a:p>
             <a:fld id="{55447283-AD3B-EE49-8B53-C7D74121EF4E}" type="slidenum">
               <a:rPr lang="en-US" smtClean="0"/>
-              <a:t>12</a:t>
             </a:fld>
             <a:endParaRPr lang="en-US" dirty="0"/>
           </a:p>
         </p:txBody>
       </p:sp>
     </p:spTree>
-    <p:extLst>
-      <p:ext uri="{BB962C8B-B14F-4D97-AF65-F5344CB8AC3E}">
-        <p14:creationId xmlns:p14="http://schemas.microsoft.com/office/powerpoint/2010/main" val="2084486120"/>
-      </p:ext>
-    </p:extLst>
+  </p:cSld>
+  <p:clrMapOvr>
+    <a:masterClrMapping/>
+  </p:clrMapOvr>
+</p:notes>
+</file>
+
+<file path=ppt/notesSlides/notesSlide3.xml><?xml version="1.0" encoding="utf-8"?>
+<p:notes xmlns:a="http://schemas.openxmlformats.org/drawingml/2006/main" xmlns:r="http://schemas.openxmlformats.org/officeDocument/2006/relationships" xmlns:p="http://schemas.openxmlformats.org/presentationml/2006/main">
+  <p:cSld>
+    <p:spTree>
+      <p:nvGrpSpPr>
+        <p:cNvPr id="1" name=""/>
+        <p:cNvGrpSpPr/>
+        <p:nvPr/>
+      </p:nvGrpSpPr>
+      <p:grpSpPr/>
+      <p:sp>
+        <p:nvSpPr>
+          <p:cNvPr id="2" name="幻灯片图像占位符 1"/>
+          <p:cNvSpPr>
+            <a:spLocks noGrp="1"/>
+          </p:cNvSpPr>
+          <p:nvPr>
+            <p:ph type="sldImg" idx="2"/>
+          </p:nvPr>
+        </p:nvSpPr>
+        <p:spPr/>
+      </p:sp>
+      <p:sp>
+        <p:nvSpPr>
+          <p:cNvPr id="3" name="文本占位符 2"/>
+          <p:cNvSpPr>
+            <a:spLocks noGrp="1"/>
+          </p:cNvSpPr>
+          <p:nvPr>
+            <p:ph type="body" idx="3"/>
+          </p:nvPr>
+        </p:nvSpPr>
+        <p:spPr/>
+        <p:txBody>
+          <a:bodyPr/>
+          <a:p>
+            <a:endParaRPr lang="zh-CN" altLang="en-US"/>
+          </a:p>
+        </p:txBody>
+      </p:sp>
+      <p:sp>
+        <p:nvSpPr>
+          <p:cNvPr id="4" name="灯片编号占位符 3"/>
+          <p:cNvSpPr>
+            <a:spLocks noGrp="1"/>
+          </p:cNvSpPr>
+          <p:nvPr>
+            <p:ph type="sldNum" sz="quarter" idx="5"/>
+          </p:nvPr>
+        </p:nvSpPr>
+        <p:spPr/>
+        <p:txBody>
+          <a:bodyPr/>
+          <a:p>
+            <a:fld id="{55447283-AD3B-EE49-8B53-C7D74121EF4E}" type="slidenum">
+              <a:rPr lang="en-US" smtClean="0"/>
+            </a:fld>
+            <a:endParaRPr lang="en-US" dirty="0"/>
+          </a:p>
+        </p:txBody>
+      </p:sp>
+    </p:spTree>
   </p:cSld>
   <p:clrMapOvr>
     <a:masterClrMapping/>
@@ -1148,9 +1248,6 @@
         </p:style>
         <p:txBody>
           <a:bodyPr rot="0" spcFirstLastPara="0" vertOverflow="overflow" horzOverflow="overflow" vert="horz" wrap="square" lIns="91440" tIns="45720" rIns="91440" bIns="45720" numCol="1" spcCol="0" rtlCol="0" fromWordArt="0" anchor="ctr" anchorCtr="0" forceAA="0" compatLnSpc="1">
-            <a:prstTxWarp prst="textNoShape">
-              <a:avLst/>
-            </a:prstTxWarp>
             <a:noAutofit/>
           </a:bodyPr>
           <a:lstStyle/>
@@ -1163,9 +1260,7 @@
       <p:pic>
         <p:nvPicPr>
           <p:cNvPr id="14" name="Picture 13" descr="2-line-whitetext-colorshield.png"/>
-          <p:cNvPicPr>
-            <a:picLocks/>
-          </p:cNvPicPr>
+          <p:cNvPicPr/>
           <p:nvPr userDrawn="1"/>
         </p:nvPicPr>
         <p:blipFill>
@@ -1193,9 +1288,7 @@
       <p:pic>
         <p:nvPicPr>
           <p:cNvPr id="13" name="Picture 12"/>
-          <p:cNvPicPr>
-            <a:picLocks/>
-          </p:cNvPicPr>
+          <p:cNvPicPr/>
           <p:nvPr userDrawn="1"/>
         </p:nvPicPr>
         <p:blipFill>
@@ -1256,6 +1349,7 @@
               <a:rPr lang="en-US" dirty="0"/>
               <a:t>Click to edit Master title style</a:t>
             </a:r>
+            <a:endParaRPr lang="en-US" dirty="0"/>
           </a:p>
         </p:txBody>
       </p:sp>
@@ -1374,6 +1468,7 @@
               <a:rPr lang="en-US" dirty="0"/>
               <a:t>Click to edit Master subtitle style</a:t>
             </a:r>
+            <a:endParaRPr lang="en-US" dirty="0"/>
           </a:p>
         </p:txBody>
       </p:sp>
@@ -1528,11 +1623,6 @@
         </p:sp>
       </p:grpSp>
     </p:spTree>
-    <p:extLst>
-      <p:ext uri="{BB962C8B-B14F-4D97-AF65-F5344CB8AC3E}">
-        <p14:creationId xmlns:p14="http://schemas.microsoft.com/office/powerpoint/2010/main" val="1052348369"/>
-      </p:ext>
-    </p:extLst>
   </p:cSld>
   <p:clrMapOvr>
     <a:masterClrMapping/>
@@ -1625,6 +1715,7 @@
               <a:rPr lang="en-US" dirty="0"/>
               <a:t>Click to edit Master text styles</a:t>
             </a:r>
+            <a:endParaRPr lang="en-US" dirty="0"/>
           </a:p>
         </p:txBody>
       </p:sp>
@@ -1663,9 +1754,8 @@
                 <a:schemeClr val="tx1"/>
               </a:buClr>
               <a:buSzTx/>
-              <a:buFont typeface="Arial"/>
+              <a:buFont typeface="Arial" panose="020B0604020202020204"/>
               <a:buChar char="•"/>
-              <a:tabLst/>
               <a:defRPr sz="1600"/>
             </a:lvl1pPr>
             <a:lvl2pPr>
@@ -1699,6 +1789,7 @@
               <a:rPr lang="en-US" dirty="0"/>
               <a:t>Click to edit Master text styles</a:t>
             </a:r>
+            <a:endParaRPr lang="en-US" dirty="0"/>
           </a:p>
           <a:p>
             <a:pPr marL="342900" marR="0" lvl="0" indent="-342900" algn="l" defTabSz="457200" rtl="0" eaLnBrk="1" fontAlgn="auto" latinLnBrk="0" hangingPunct="1">
@@ -1715,15 +1806,15 @@
                 <a:schemeClr val="tx1"/>
               </a:buClr>
               <a:buSzTx/>
-              <a:buFont typeface="Arial"/>
+              <a:buFont typeface="Arial" panose="020B0604020202020204"/>
               <a:buChar char="•"/>
-              <a:tabLst/>
               <a:defRPr/>
             </a:pPr>
             <a:r>
               <a:rPr lang="en-US" dirty="0"/>
               <a:t>Click to edit Master text styles</a:t>
             </a:r>
+            <a:endParaRPr lang="en-US" dirty="0"/>
           </a:p>
           <a:p>
             <a:pPr marL="342900" marR="0" lvl="0" indent="-342900" algn="l" defTabSz="457200" rtl="0" eaLnBrk="1" fontAlgn="auto" latinLnBrk="0" hangingPunct="1">
@@ -1740,15 +1831,15 @@
                 <a:schemeClr val="tx1"/>
               </a:buClr>
               <a:buSzTx/>
-              <a:buFont typeface="Arial"/>
+              <a:buFont typeface="Arial" panose="020B0604020202020204"/>
               <a:buChar char="•"/>
-              <a:tabLst/>
               <a:defRPr/>
             </a:pPr>
             <a:r>
               <a:rPr lang="en-US" dirty="0"/>
               <a:t>Click to edit Master text styles</a:t>
             </a:r>
+            <a:endParaRPr lang="en-US" dirty="0"/>
           </a:p>
           <a:p>
             <a:pPr marL="342900" marR="0" lvl="0" indent="-342900" algn="l" defTabSz="457200" rtl="0" eaLnBrk="1" fontAlgn="auto" latinLnBrk="0" hangingPunct="1">
@@ -1765,15 +1856,15 @@
                 <a:schemeClr val="tx1"/>
               </a:buClr>
               <a:buSzTx/>
-              <a:buFont typeface="Arial"/>
+              <a:buFont typeface="Arial" panose="020B0604020202020204"/>
               <a:buChar char="•"/>
-              <a:tabLst/>
               <a:defRPr/>
             </a:pPr>
             <a:r>
               <a:rPr lang="en-US" dirty="0"/>
               <a:t>Click to edit Master text styles</a:t>
             </a:r>
+            <a:endParaRPr lang="en-US" dirty="0"/>
           </a:p>
           <a:p>
             <a:pPr lvl="0"/>
@@ -1811,8 +1902,6 @@
           <a:p>
             <a:fld id="{8A758EFE-665F-4341-B5B8-2DAEADA52F6C}" type="slidenum">
               <a:rPr lang="en-US" smtClean="0"/>
-              <a:pPr/>
-              <a:t>‹#›</a:t>
             </a:fld>
             <a:endParaRPr lang="en-US" dirty="0"/>
           </a:p>
@@ -1851,6 +1940,7 @@
               <a:rPr lang="en-US" dirty="0"/>
               <a:t>Click to edit Master title style</a:t>
             </a:r>
+            <a:endParaRPr lang="en-US" dirty="0"/>
           </a:p>
         </p:txBody>
       </p:sp>
@@ -2075,9 +2165,8 @@
                 <a:schemeClr val="tx1"/>
               </a:buClr>
               <a:buSzTx/>
-              <a:buFont typeface="Arial"/>
+              <a:buFont typeface="Arial" panose="020B0604020202020204"/>
               <a:buNone/>
-              <a:tabLst/>
               <a:defRPr sz="1600" b="1">
                 <a:solidFill>
                   <a:schemeClr val="accent1"/>
@@ -2115,6 +2204,7 @@
               <a:rPr lang="en-US" dirty="0"/>
               <a:t>Click to edit Master text styles</a:t>
             </a:r>
+            <a:endParaRPr lang="en-US" dirty="0"/>
           </a:p>
         </p:txBody>
       </p:sp>
@@ -2153,9 +2243,8 @@
                 <a:schemeClr val="tx1"/>
               </a:buClr>
               <a:buSzTx/>
-              <a:buFont typeface="Arial"/>
+              <a:buFont typeface="Arial" panose="020B0604020202020204"/>
               <a:buNone/>
-              <a:tabLst/>
               <a:defRPr sz="1400" b="0">
                 <a:solidFill>
                   <a:schemeClr val="tx1"/>
@@ -2193,6 +2282,7 @@
               <a:rPr lang="en-US" dirty="0"/>
               <a:t>Click to edit Master text styles</a:t>
             </a:r>
+            <a:endParaRPr lang="en-US" dirty="0"/>
           </a:p>
           <a:p>
             <a:pPr lvl="0"/>
@@ -2239,9 +2329,8 @@
                 <a:schemeClr val="tx1"/>
               </a:buClr>
               <a:buSzTx/>
-              <a:buFont typeface="Arial"/>
+              <a:buFont typeface="Arial" panose="020B0604020202020204"/>
               <a:buNone/>
-              <a:tabLst/>
               <a:defRPr sz="1600" b="1">
                 <a:solidFill>
                   <a:schemeClr val="accent1"/>
@@ -2279,6 +2368,7 @@
               <a:rPr lang="en-US" dirty="0"/>
               <a:t>Click to edit Master text styles</a:t>
             </a:r>
+            <a:endParaRPr lang="en-US" dirty="0"/>
           </a:p>
         </p:txBody>
       </p:sp>
@@ -2317,9 +2407,8 @@
                 <a:schemeClr val="tx1"/>
               </a:buClr>
               <a:buSzTx/>
-              <a:buFont typeface="Arial"/>
+              <a:buFont typeface="Arial" panose="020B0604020202020204"/>
               <a:buNone/>
-              <a:tabLst/>
               <a:defRPr sz="1400" b="0">
                 <a:solidFill>
                   <a:schemeClr val="tx1"/>
@@ -2357,6 +2446,7 @@
               <a:rPr lang="en-US" dirty="0"/>
               <a:t>Click to edit Master text styles</a:t>
             </a:r>
+            <a:endParaRPr lang="en-US" dirty="0"/>
           </a:p>
           <a:p>
             <a:pPr lvl="0"/>
@@ -2403,9 +2493,8 @@
                 <a:schemeClr val="tx1"/>
               </a:buClr>
               <a:buSzTx/>
-              <a:buFont typeface="Arial"/>
+              <a:buFont typeface="Arial" panose="020B0604020202020204"/>
               <a:buNone/>
-              <a:tabLst/>
               <a:defRPr sz="1600" b="1">
                 <a:solidFill>
                   <a:schemeClr val="accent1"/>
@@ -2443,6 +2532,7 @@
               <a:rPr lang="en-US" dirty="0"/>
               <a:t>Click to edit Master text styles</a:t>
             </a:r>
+            <a:endParaRPr lang="en-US" dirty="0"/>
           </a:p>
         </p:txBody>
       </p:sp>
@@ -2481,9 +2571,8 @@
                 <a:schemeClr val="tx1"/>
               </a:buClr>
               <a:buSzTx/>
-              <a:buFont typeface="Arial"/>
+              <a:buFont typeface="Arial" panose="020B0604020202020204"/>
               <a:buNone/>
-              <a:tabLst/>
               <a:defRPr sz="1400" b="0">
                 <a:solidFill>
                   <a:schemeClr val="tx1"/>
@@ -2521,6 +2610,7 @@
               <a:rPr lang="en-US" dirty="0"/>
               <a:t>Click to edit Master text styles</a:t>
             </a:r>
+            <a:endParaRPr lang="en-US" dirty="0"/>
           </a:p>
           <a:p>
             <a:pPr lvl="0"/>
@@ -2584,15 +2674,11 @@
               <a:rPr lang="en-US" dirty="0"/>
               <a:t>Click to edit Master text styles</a:t>
             </a:r>
+            <a:endParaRPr lang="en-US" dirty="0"/>
           </a:p>
         </p:txBody>
       </p:sp>
     </p:spTree>
-    <p:extLst>
-      <p:ext uri="{BB962C8B-B14F-4D97-AF65-F5344CB8AC3E}">
-        <p14:creationId xmlns:p14="http://schemas.microsoft.com/office/powerpoint/2010/main" val="826121326"/>
-      </p:ext>
-    </p:extLst>
   </p:cSld>
   <p:clrMapOvr>
     <a:masterClrMapping/>
@@ -2647,8 +2733,6 @@
           <a:p>
             <a:fld id="{8A758EFE-665F-4341-B5B8-2DAEADA52F6C}" type="slidenum">
               <a:rPr lang="en-US" smtClean="0"/>
-              <a:pPr/>
-              <a:t>‹#›</a:t>
             </a:fld>
             <a:endParaRPr lang="en-US" dirty="0"/>
           </a:p>
@@ -2687,6 +2771,7 @@
               <a:rPr lang="en-US" dirty="0"/>
               <a:t>Click to edit Master title style</a:t>
             </a:r>
+            <a:endParaRPr lang="en-US" dirty="0"/>
           </a:p>
         </p:txBody>
       </p:sp>
@@ -3574,9 +3659,8 @@
                 <a:schemeClr val="tx1"/>
               </a:buClr>
               <a:buSzTx/>
-              <a:buFont typeface="Arial"/>
+              <a:buFont typeface="Arial" panose="020B0604020202020204"/>
               <a:buNone/>
-              <a:tabLst/>
               <a:defRPr sz="4000" b="1">
                 <a:solidFill>
                   <a:schemeClr val="accent1"/>
@@ -3614,6 +3698,7 @@
               <a:rPr lang="en-US" dirty="0"/>
               <a:t>Edit</a:t>
             </a:r>
+            <a:endParaRPr lang="en-US" dirty="0"/>
           </a:p>
         </p:txBody>
       </p:sp>
@@ -3624,7 +3709,7 @@
             <a:spLocks noGrp="1"/>
           </p:cNvSpPr>
           <p:nvPr>
-            <p:ph sz="quarter" idx="15"/>
+            <p:ph sz="quarter" idx="15" hasCustomPrompt="1"/>
           </p:nvPr>
         </p:nvSpPr>
         <p:spPr>
@@ -3652,9 +3737,8 @@
                 <a:schemeClr val="tx1"/>
               </a:buClr>
               <a:buSzTx/>
-              <a:buFont typeface="Arial"/>
+              <a:buFont typeface="Arial" panose="020B0604020202020204"/>
               <a:buNone/>
-              <a:tabLst/>
               <a:defRPr sz="2400" b="0">
                 <a:solidFill>
                   <a:schemeClr val="accent1"/>
@@ -3692,6 +3776,7 @@
               <a:rPr lang="en-US" dirty="0"/>
               <a:t>Click to edit</a:t>
             </a:r>
+            <a:endParaRPr lang="en-US" dirty="0"/>
           </a:p>
         </p:txBody>
       </p:sp>
@@ -3730,9 +3815,8 @@
                 <a:schemeClr val="tx1"/>
               </a:buClr>
               <a:buSzTx/>
-              <a:buFont typeface="Arial"/>
+              <a:buFont typeface="Arial" panose="020B0604020202020204"/>
               <a:buNone/>
-              <a:tabLst/>
               <a:defRPr sz="4000" b="1">
                 <a:solidFill>
                   <a:schemeClr val="accent1"/>
@@ -3770,6 +3854,7 @@
               <a:rPr lang="en-US" dirty="0"/>
               <a:t>Edit</a:t>
             </a:r>
+            <a:endParaRPr lang="en-US" dirty="0"/>
           </a:p>
         </p:txBody>
       </p:sp>
@@ -3780,7 +3865,7 @@
             <a:spLocks noGrp="1"/>
           </p:cNvSpPr>
           <p:nvPr>
-            <p:ph sz="quarter" idx="22"/>
+            <p:ph sz="quarter" idx="22" hasCustomPrompt="1"/>
           </p:nvPr>
         </p:nvSpPr>
         <p:spPr>
@@ -3808,9 +3893,8 @@
                 <a:schemeClr val="tx1"/>
               </a:buClr>
               <a:buSzTx/>
-              <a:buFont typeface="Arial"/>
+              <a:buFont typeface="Arial" panose="020B0604020202020204"/>
               <a:buNone/>
-              <a:tabLst/>
               <a:defRPr sz="2400" b="0">
                 <a:solidFill>
                   <a:schemeClr val="accent1"/>
@@ -3848,6 +3932,7 @@
               <a:rPr lang="en-US" dirty="0"/>
               <a:t>Click to edit</a:t>
             </a:r>
+            <a:endParaRPr lang="en-US" dirty="0"/>
           </a:p>
         </p:txBody>
       </p:sp>
@@ -3886,9 +3971,8 @@
                 <a:schemeClr val="tx1"/>
               </a:buClr>
               <a:buSzTx/>
-              <a:buFont typeface="Arial"/>
+              <a:buFont typeface="Arial" panose="020B0604020202020204"/>
               <a:buNone/>
-              <a:tabLst/>
               <a:defRPr sz="4000" b="1">
                 <a:solidFill>
                   <a:schemeClr val="accent1"/>
@@ -3926,6 +4010,7 @@
               <a:rPr lang="en-US" dirty="0"/>
               <a:t>Edit</a:t>
             </a:r>
+            <a:endParaRPr lang="en-US" dirty="0"/>
           </a:p>
         </p:txBody>
       </p:sp>
@@ -3936,7 +4021,7 @@
             <a:spLocks noGrp="1"/>
           </p:cNvSpPr>
           <p:nvPr>
-            <p:ph sz="quarter" idx="24"/>
+            <p:ph sz="quarter" idx="24" hasCustomPrompt="1"/>
           </p:nvPr>
         </p:nvSpPr>
         <p:spPr>
@@ -3964,9 +4049,8 @@
                 <a:schemeClr val="tx1"/>
               </a:buClr>
               <a:buSzTx/>
-              <a:buFont typeface="Arial"/>
+              <a:buFont typeface="Arial" panose="020B0604020202020204"/>
               <a:buNone/>
-              <a:tabLst/>
               <a:defRPr sz="2400" b="0">
                 <a:solidFill>
                   <a:schemeClr val="accent1"/>
@@ -4004,6 +4088,7 @@
               <a:rPr lang="en-US" dirty="0"/>
               <a:t>Click to edit</a:t>
             </a:r>
+            <a:endParaRPr lang="en-US" dirty="0"/>
           </a:p>
         </p:txBody>
       </p:sp>
@@ -4042,9 +4127,8 @@
                 <a:schemeClr val="tx1"/>
               </a:buClr>
               <a:buSzTx/>
-              <a:buFont typeface="Arial"/>
+              <a:buFont typeface="Arial" panose="020B0604020202020204"/>
               <a:buNone/>
-              <a:tabLst/>
               <a:defRPr sz="4000" b="1">
                 <a:solidFill>
                   <a:schemeClr val="tx2"/>
@@ -4082,6 +4166,7 @@
               <a:rPr lang="en-US" dirty="0"/>
               <a:t>Edit</a:t>
             </a:r>
+            <a:endParaRPr lang="en-US" dirty="0"/>
           </a:p>
         </p:txBody>
       </p:sp>
@@ -4092,7 +4177,7 @@
             <a:spLocks noGrp="1"/>
           </p:cNvSpPr>
           <p:nvPr>
-            <p:ph sz="quarter" idx="26"/>
+            <p:ph sz="quarter" idx="26" hasCustomPrompt="1"/>
           </p:nvPr>
         </p:nvSpPr>
         <p:spPr>
@@ -4120,9 +4205,8 @@
                 <a:schemeClr val="tx1"/>
               </a:buClr>
               <a:buSzTx/>
-              <a:buFont typeface="Arial"/>
+              <a:buFont typeface="Arial" panose="020B0604020202020204"/>
               <a:buNone/>
-              <a:tabLst/>
               <a:defRPr sz="2400" b="0">
                 <a:solidFill>
                   <a:schemeClr val="tx2"/>
@@ -4160,6 +4244,7 @@
               <a:rPr lang="en-US" dirty="0"/>
               <a:t>Click to edit</a:t>
             </a:r>
+            <a:endParaRPr lang="en-US" dirty="0"/>
           </a:p>
         </p:txBody>
       </p:sp>
@@ -4198,9 +4283,8 @@
                 <a:schemeClr val="tx1"/>
               </a:buClr>
               <a:buSzTx/>
-              <a:buFont typeface="Arial"/>
+              <a:buFont typeface="Arial" panose="020B0604020202020204"/>
               <a:buNone/>
-              <a:tabLst/>
               <a:defRPr sz="4000" b="1">
                 <a:solidFill>
                   <a:schemeClr val="tx2"/>
@@ -4238,6 +4322,7 @@
               <a:rPr lang="en-US" dirty="0"/>
               <a:t>Edit</a:t>
             </a:r>
+            <a:endParaRPr lang="en-US" dirty="0"/>
           </a:p>
         </p:txBody>
       </p:sp>
@@ -4248,7 +4333,7 @@
             <a:spLocks noGrp="1"/>
           </p:cNvSpPr>
           <p:nvPr>
-            <p:ph sz="quarter" idx="28"/>
+            <p:ph sz="quarter" idx="28" hasCustomPrompt="1"/>
           </p:nvPr>
         </p:nvSpPr>
         <p:spPr>
@@ -4276,9 +4361,8 @@
                 <a:schemeClr val="tx1"/>
               </a:buClr>
               <a:buSzTx/>
-              <a:buFont typeface="Arial"/>
+              <a:buFont typeface="Arial" panose="020B0604020202020204"/>
               <a:buNone/>
-              <a:tabLst/>
               <a:defRPr sz="2400" b="0">
                 <a:solidFill>
                   <a:schemeClr val="tx2"/>
@@ -4316,6 +4400,7 @@
               <a:rPr lang="en-US" dirty="0"/>
               <a:t>Click to edit</a:t>
             </a:r>
+            <a:endParaRPr lang="en-US" dirty="0"/>
           </a:p>
         </p:txBody>
       </p:sp>
@@ -4354,9 +4439,8 @@
                 <a:schemeClr val="tx1"/>
               </a:buClr>
               <a:buSzTx/>
-              <a:buFont typeface="Arial"/>
+              <a:buFont typeface="Arial" panose="020B0604020202020204"/>
               <a:buNone/>
-              <a:tabLst/>
               <a:defRPr sz="4000" b="1">
                 <a:solidFill>
                   <a:schemeClr val="bg2"/>
@@ -4394,6 +4478,7 @@
               <a:rPr lang="en-US" dirty="0"/>
               <a:t>Edit</a:t>
             </a:r>
+            <a:endParaRPr lang="en-US" dirty="0"/>
           </a:p>
         </p:txBody>
       </p:sp>
@@ -4404,7 +4489,7 @@
             <a:spLocks noGrp="1"/>
           </p:cNvSpPr>
           <p:nvPr>
-            <p:ph sz="quarter" idx="30"/>
+            <p:ph sz="quarter" idx="30" hasCustomPrompt="1"/>
           </p:nvPr>
         </p:nvSpPr>
         <p:spPr>
@@ -4432,9 +4517,8 @@
                 <a:schemeClr val="tx1"/>
               </a:buClr>
               <a:buSzTx/>
-              <a:buFont typeface="Arial"/>
+              <a:buFont typeface="Arial" panose="020B0604020202020204"/>
               <a:buNone/>
-              <a:tabLst/>
               <a:defRPr sz="2400" b="0">
                 <a:solidFill>
                   <a:schemeClr val="bg2"/>
@@ -4472,15 +4556,11 @@
               <a:rPr lang="en-US" dirty="0"/>
               <a:t>Click to edit</a:t>
             </a:r>
+            <a:endParaRPr lang="en-US" dirty="0"/>
           </a:p>
         </p:txBody>
       </p:sp>
     </p:spTree>
-    <p:extLst>
-      <p:ext uri="{BB962C8B-B14F-4D97-AF65-F5344CB8AC3E}">
-        <p14:creationId xmlns:p14="http://schemas.microsoft.com/office/powerpoint/2010/main" val="209585581"/>
-      </p:ext>
-    </p:extLst>
   </p:cSld>
   <p:clrMapOvr>
     <a:masterClrMapping/>
@@ -4535,8 +4615,6 @@
           <a:p>
             <a:fld id="{8A758EFE-665F-4341-B5B8-2DAEADA52F6C}" type="slidenum">
               <a:rPr lang="en-US" smtClean="0"/>
-              <a:pPr/>
-              <a:t>‹#›</a:t>
             </a:fld>
             <a:endParaRPr lang="en-US" dirty="0"/>
           </a:p>
@@ -4575,6 +4653,7 @@
               <a:rPr lang="en-US" dirty="0"/>
               <a:t>Click to edit Master title style</a:t>
             </a:r>
+            <a:endParaRPr lang="en-US" dirty="0"/>
           </a:p>
         </p:txBody>
       </p:sp>
@@ -4783,6 +4862,7 @@
               <a:rPr lang="en-US" dirty="0"/>
               <a:t>Click to edit Master text styles</a:t>
             </a:r>
+            <a:endParaRPr lang="en-US" dirty="0"/>
           </a:p>
           <a:p>
             <a:pPr lvl="1"/>
@@ -4790,6 +4870,7 @@
               <a:rPr lang="en-US" dirty="0"/>
               <a:t>Second level</a:t>
             </a:r>
+            <a:endParaRPr lang="en-US" dirty="0"/>
           </a:p>
           <a:p>
             <a:pPr lvl="2"/>
@@ -4797,6 +4878,7 @@
               <a:rPr lang="en-US" dirty="0"/>
               <a:t>Third level</a:t>
             </a:r>
+            <a:endParaRPr lang="en-US" dirty="0"/>
           </a:p>
           <a:p>
             <a:pPr lvl="3"/>
@@ -4804,6 +4886,7 @@
               <a:rPr lang="en-US" dirty="0"/>
               <a:t>Fourth level</a:t>
             </a:r>
+            <a:endParaRPr lang="en-US" dirty="0"/>
           </a:p>
           <a:p>
             <a:pPr lvl="4"/>
@@ -4811,15 +4894,11 @@
               <a:rPr lang="en-US" dirty="0"/>
               <a:t>Fifth level</a:t>
             </a:r>
+            <a:endParaRPr lang="en-US" dirty="0"/>
           </a:p>
         </p:txBody>
       </p:sp>
     </p:spTree>
-    <p:extLst>
-      <p:ext uri="{BB962C8B-B14F-4D97-AF65-F5344CB8AC3E}">
-        <p14:creationId xmlns:p14="http://schemas.microsoft.com/office/powerpoint/2010/main" val="2976028444"/>
-      </p:ext>
-    </p:extLst>
   </p:cSld>
   <p:clrMapOvr>
     <a:masterClrMapping/>
@@ -4874,19 +4953,12 @@
           <a:p>
             <a:fld id="{8A758EFE-665F-4341-B5B8-2DAEADA52F6C}" type="slidenum">
               <a:rPr lang="en-US" smtClean="0"/>
-              <a:pPr/>
-              <a:t>‹#›</a:t>
             </a:fld>
             <a:endParaRPr lang="en-US" dirty="0"/>
           </a:p>
         </p:txBody>
       </p:sp>
     </p:spTree>
-    <p:extLst>
-      <p:ext uri="{BB962C8B-B14F-4D97-AF65-F5344CB8AC3E}">
-        <p14:creationId xmlns:p14="http://schemas.microsoft.com/office/powerpoint/2010/main" val="2900341738"/>
-      </p:ext>
-    </p:extLst>
   </p:cSld>
   <p:clrMapOvr>
     <a:masterClrMapping/>
@@ -4954,8 +5026,8 @@
           <a:p>
             <a:pPr algn="ctr"/>
             <a:endParaRPr lang="en-US" sz="1600" dirty="0">
-              <a:latin typeface="Calibri"/>
-              <a:cs typeface="Calibri"/>
+              <a:latin typeface="Calibri" panose="020F0502020204030204"/>
+              <a:cs typeface="Calibri" panose="020F0502020204030204"/>
             </a:endParaRPr>
           </a:p>
         </p:txBody>
@@ -5005,8 +5077,8 @@
           <a:p>
             <a:pPr algn="ctr"/>
             <a:endParaRPr lang="en-US" sz="1600" dirty="0">
-              <a:latin typeface="Calibri"/>
-              <a:cs typeface="Calibri"/>
+              <a:latin typeface="Calibri" panose="020F0502020204030204"/>
+              <a:cs typeface="Calibri" panose="020F0502020204030204"/>
             </a:endParaRPr>
           </a:p>
         </p:txBody>
@@ -5041,8 +5113,6 @@
           <a:p>
             <a:fld id="{8A758EFE-665F-4341-B5B8-2DAEADA52F6C}" type="slidenum">
               <a:rPr lang="en-US" smtClean="0"/>
-              <a:pPr/>
-              <a:t>‹#›</a:t>
             </a:fld>
             <a:endParaRPr lang="en-US" dirty="0"/>
           </a:p>
@@ -5085,6 +5155,7 @@
               <a:rPr lang="en-US" dirty="0"/>
               <a:t>CLICK TO EDIT MASTER TITLE STYLE</a:t>
             </a:r>
+            <a:endParaRPr lang="en-US" dirty="0"/>
           </a:p>
         </p:txBody>
       </p:sp>
@@ -5290,6 +5361,7 @@
               <a:rPr lang="en-US" dirty="0"/>
               <a:t>Click to edit Master text styles</a:t>
             </a:r>
+            <a:endParaRPr lang="en-US" dirty="0"/>
           </a:p>
         </p:txBody>
       </p:sp>
@@ -5329,6 +5401,7 @@
               <a:rPr lang="en-US" dirty="0"/>
               <a:t>CLICK TO EDIT MASTER TEXT STYLE</a:t>
             </a:r>
+            <a:endParaRPr lang="en-US" dirty="0"/>
           </a:p>
         </p:txBody>
       </p:sp>
@@ -5384,15 +5457,11 @@
               <a:rPr lang="en-US" dirty="0"/>
               <a:t>CLICK TO EDIT MASTER TEXT STYLE</a:t>
             </a:r>
+            <a:endParaRPr lang="en-US" dirty="0"/>
           </a:p>
         </p:txBody>
       </p:sp>
     </p:spTree>
-    <p:extLst>
-      <p:ext uri="{BB962C8B-B14F-4D97-AF65-F5344CB8AC3E}">
-        <p14:creationId xmlns:p14="http://schemas.microsoft.com/office/powerpoint/2010/main" val="1135514465"/>
-      </p:ext>
-    </p:extLst>
   </p:cSld>
   <p:clrMapOvr>
     <a:masterClrMapping/>
@@ -5455,9 +5524,6 @@
         </p:style>
         <p:txBody>
           <a:bodyPr rot="0" spcFirstLastPara="0" vertOverflow="overflow" horzOverflow="overflow" vert="horz" wrap="square" lIns="91440" tIns="45720" rIns="91440" bIns="45720" numCol="1" spcCol="0" rtlCol="0" fromWordArt="0" anchor="ctr" anchorCtr="0" forceAA="0" compatLnSpc="1">
-            <a:prstTxWarp prst="textNoShape">
-              <a:avLst/>
-            </a:prstTxWarp>
             <a:noAutofit/>
           </a:bodyPr>
           <a:lstStyle/>
@@ -5569,9 +5635,6 @@
         </p:style>
         <p:txBody>
           <a:bodyPr rot="0" spcFirstLastPara="0" vertOverflow="overflow" horzOverflow="overflow" vert="horz" wrap="square" lIns="91440" tIns="45720" rIns="91440" bIns="45720" numCol="1" spcCol="0" rtlCol="0" fromWordArt="0" anchor="ctr" anchorCtr="0" forceAA="0" compatLnSpc="1">
-            <a:prstTxWarp prst="textNoShape">
-              <a:avLst/>
-            </a:prstTxWarp>
             <a:noAutofit/>
           </a:bodyPr>
           <a:lstStyle/>
@@ -5649,6 +5712,7 @@
               <a:rPr lang="en-US" dirty="0"/>
               <a:t>Click to edit Master text styles</a:t>
             </a:r>
+            <a:endParaRPr lang="en-US" dirty="0"/>
           </a:p>
         </p:txBody>
       </p:sp>
@@ -5682,8 +5746,6 @@
           <a:p>
             <a:fld id="{8A758EFE-665F-4341-B5B8-2DAEADA52F6C}" type="slidenum">
               <a:rPr lang="en-US" smtClean="0"/>
-              <a:pPr/>
-              <a:t>‹#›</a:t>
             </a:fld>
             <a:endParaRPr lang="en-US" dirty="0"/>
           </a:p>
@@ -5840,11 +5902,6 @@
         </p:sp>
       </p:grpSp>
     </p:spTree>
-    <p:extLst>
-      <p:ext uri="{BB962C8B-B14F-4D97-AF65-F5344CB8AC3E}">
-        <p14:creationId xmlns:p14="http://schemas.microsoft.com/office/powerpoint/2010/main" val="283962570"/>
-      </p:ext>
-    </p:extLst>
   </p:cSld>
   <p:clrMapOvr>
     <a:masterClrMapping/>
@@ -5907,9 +5964,6 @@
         </p:style>
         <p:txBody>
           <a:bodyPr rot="0" spcFirstLastPara="0" vertOverflow="overflow" horzOverflow="overflow" vert="horz" wrap="square" lIns="91440" tIns="45720" rIns="91440" bIns="45720" numCol="1" spcCol="0" rtlCol="0" fromWordArt="0" anchor="ctr" anchorCtr="0" forceAA="0" compatLnSpc="1">
-            <a:prstTxWarp prst="textNoShape">
-              <a:avLst/>
-            </a:prstTxWarp>
             <a:noAutofit/>
           </a:bodyPr>
           <a:lstStyle/>
@@ -6051,6 +6105,7 @@
               <a:rPr lang="en-US" dirty="0"/>
               <a:t>Click to edit Master text styles</a:t>
             </a:r>
+            <a:endParaRPr lang="en-US" dirty="0"/>
           </a:p>
         </p:txBody>
       </p:sp>
@@ -6084,8 +6139,6 @@
           <a:p>
             <a:fld id="{8A758EFE-665F-4341-B5B8-2DAEADA52F6C}" type="slidenum">
               <a:rPr lang="en-US" smtClean="0"/>
-              <a:pPr/>
-              <a:t>‹#›</a:t>
             </a:fld>
             <a:endParaRPr lang="en-US" dirty="0"/>
           </a:p>
@@ -6242,11 +6295,6 @@
         </p:sp>
       </p:grpSp>
     </p:spTree>
-    <p:extLst>
-      <p:ext uri="{BB962C8B-B14F-4D97-AF65-F5344CB8AC3E}">
-        <p14:creationId xmlns:p14="http://schemas.microsoft.com/office/powerpoint/2010/main" val="3920860809"/>
-      </p:ext>
-    </p:extLst>
   </p:cSld>
   <p:clrMapOvr>
     <a:masterClrMapping/>
@@ -6309,9 +6357,6 @@
         </p:style>
         <p:txBody>
           <a:bodyPr rot="0" spcFirstLastPara="0" vertOverflow="overflow" horzOverflow="overflow" vert="horz" wrap="square" lIns="91440" tIns="45720" rIns="91440" bIns="45720" numCol="1" spcCol="0" rtlCol="0" fromWordArt="0" anchor="ctr" anchorCtr="0" forceAA="0" compatLnSpc="1">
-            <a:prstTxWarp prst="textNoShape">
-              <a:avLst/>
-            </a:prstTxWarp>
             <a:noAutofit/>
           </a:bodyPr>
           <a:lstStyle/>
@@ -6423,9 +6468,6 @@
         </p:style>
         <p:txBody>
           <a:bodyPr rot="0" spcFirstLastPara="0" vertOverflow="overflow" horzOverflow="overflow" vert="horz" wrap="square" lIns="91440" tIns="45720" rIns="91440" bIns="45720" numCol="1" spcCol="0" rtlCol="0" fromWordArt="0" anchor="ctr" anchorCtr="0" forceAA="0" compatLnSpc="1">
-            <a:prstTxWarp prst="textNoShape">
-              <a:avLst/>
-            </a:prstTxWarp>
             <a:noAutofit/>
           </a:bodyPr>
           <a:lstStyle/>
@@ -6503,6 +6545,7 @@
               <a:rPr lang="en-US" dirty="0"/>
               <a:t>Click to edit Master text styles</a:t>
             </a:r>
+            <a:endParaRPr lang="en-US" dirty="0"/>
           </a:p>
         </p:txBody>
       </p:sp>
@@ -6536,8 +6579,6 @@
           <a:p>
             <a:fld id="{8A758EFE-665F-4341-B5B8-2DAEADA52F6C}" type="slidenum">
               <a:rPr lang="en-US" smtClean="0"/>
-              <a:pPr/>
-              <a:t>‹#›</a:t>
             </a:fld>
             <a:endParaRPr lang="en-US" dirty="0"/>
           </a:p>
@@ -6694,11 +6735,6 @@
         </p:sp>
       </p:grpSp>
     </p:spTree>
-    <p:extLst>
-      <p:ext uri="{BB962C8B-B14F-4D97-AF65-F5344CB8AC3E}">
-        <p14:creationId xmlns:p14="http://schemas.microsoft.com/office/powerpoint/2010/main" val="2279852087"/>
-      </p:ext>
-    </p:extLst>
   </p:cSld>
   <p:clrMapOvr>
     <a:masterClrMapping/>
@@ -6726,9 +6762,7 @@
       <p:pic>
         <p:nvPicPr>
           <p:cNvPr id="12" name="Picture 11" descr="2-line-bluetext-colorshield.png"/>
-          <p:cNvPicPr>
-            <a:picLocks/>
-          </p:cNvPicPr>
+          <p:cNvPicPr/>
           <p:nvPr userDrawn="1"/>
         </p:nvPicPr>
         <p:blipFill rotWithShape="1">
@@ -6740,7 +6774,9 @@
             </a:extLst>
           </a:blip>
           <a:srcRect l="-1" r="-157" b="-1906"/>
-          <a:stretch/>
+          <a:stretch>
+            <a:fillRect/>
+          </a:stretch>
         </p:blipFill>
         <p:spPr>
           <a:xfrm>
@@ -6755,9 +6791,7 @@
       <p:pic>
         <p:nvPicPr>
           <p:cNvPr id="14" name="Picture 13" descr="upennwatermark.pdf"/>
-          <p:cNvPicPr>
-            <a:picLocks/>
-          </p:cNvPicPr>
+          <p:cNvPicPr/>
           <p:nvPr userDrawn="1"/>
         </p:nvPicPr>
         <p:blipFill>
@@ -6814,6 +6848,7 @@
               <a:rPr lang="en-US" dirty="0"/>
               <a:t>Click to edit Master title style</a:t>
             </a:r>
+            <a:endParaRPr lang="en-US" dirty="0"/>
           </a:p>
         </p:txBody>
       </p:sp>
@@ -6932,6 +6967,7 @@
               <a:rPr lang="en-US" dirty="0"/>
               <a:t>Click to edit Master subtitle style</a:t>
             </a:r>
+            <a:endParaRPr lang="en-US" dirty="0"/>
           </a:p>
         </p:txBody>
       </p:sp>
@@ -7123,9 +7159,6 @@
         </p:style>
         <p:txBody>
           <a:bodyPr rot="0" spcFirstLastPara="0" vertOverflow="overflow" horzOverflow="overflow" vert="horz" wrap="square" lIns="91440" tIns="45720" rIns="91440" bIns="45720" numCol="1" spcCol="0" rtlCol="0" fromWordArt="0" anchor="ctr" anchorCtr="0" forceAA="0" compatLnSpc="1">
-            <a:prstTxWarp prst="textNoShape">
-              <a:avLst/>
-            </a:prstTxWarp>
             <a:noAutofit/>
           </a:bodyPr>
           <a:lstStyle/>
@@ -7136,11 +7169,6 @@
         </p:txBody>
       </p:sp>
     </p:spTree>
-    <p:extLst>
-      <p:ext uri="{BB962C8B-B14F-4D97-AF65-F5344CB8AC3E}">
-        <p14:creationId xmlns:p14="http://schemas.microsoft.com/office/powerpoint/2010/main" val="175249852"/>
-      </p:ext>
-    </p:extLst>
   </p:cSld>
   <p:clrMapOvr>
     <a:masterClrMapping/>
@@ -7195,8 +7223,6 @@
           <a:p>
             <a:fld id="{8A758EFE-665F-4341-B5B8-2DAEADA52F6C}" type="slidenum">
               <a:rPr lang="en-US" smtClean="0"/>
-              <a:pPr/>
-              <a:t>‹#›</a:t>
             </a:fld>
             <a:endParaRPr lang="en-US" dirty="0"/>
           </a:p>
@@ -7235,6 +7261,7 @@
               <a:rPr lang="en-US" dirty="0"/>
               <a:t>Click to edit Master title style</a:t>
             </a:r>
+            <a:endParaRPr lang="en-US" dirty="0"/>
           </a:p>
         </p:txBody>
       </p:sp>
@@ -7263,6 +7290,7 @@
               <a:rPr lang="en-US" dirty="0"/>
               <a:t>Click to edit Master text styles</a:t>
             </a:r>
+            <a:endParaRPr lang="en-US" dirty="0"/>
           </a:p>
           <a:p>
             <a:pPr lvl="1"/>
@@ -7270,6 +7298,7 @@
               <a:rPr lang="en-US" dirty="0"/>
               <a:t>Second level</a:t>
             </a:r>
+            <a:endParaRPr lang="en-US" dirty="0"/>
           </a:p>
           <a:p>
             <a:pPr lvl="2"/>
@@ -7277,6 +7306,7 @@
               <a:rPr lang="en-US" dirty="0"/>
               <a:t>Third level</a:t>
             </a:r>
+            <a:endParaRPr lang="en-US" dirty="0"/>
           </a:p>
           <a:p>
             <a:pPr lvl="3"/>
@@ -7284,6 +7314,7 @@
               <a:rPr lang="en-US" dirty="0"/>
               <a:t>Fourth level</a:t>
             </a:r>
+            <a:endParaRPr lang="en-US" dirty="0"/>
           </a:p>
           <a:p>
             <a:pPr lvl="4"/>
@@ -7291,6 +7322,7 @@
               <a:rPr lang="en-US" dirty="0"/>
               <a:t>Fifth level</a:t>
             </a:r>
+            <a:endParaRPr lang="en-US" dirty="0"/>
           </a:p>
         </p:txBody>
       </p:sp>
@@ -7445,11 +7477,6 @@
         </p:sp>
       </p:grpSp>
     </p:spTree>
-    <p:extLst>
-      <p:ext uri="{BB962C8B-B14F-4D97-AF65-F5344CB8AC3E}">
-        <p14:creationId xmlns:p14="http://schemas.microsoft.com/office/powerpoint/2010/main" val="3159591512"/>
-      </p:ext>
-    </p:extLst>
   </p:cSld>
   <p:clrMapOvr>
     <a:masterClrMapping/>
@@ -7552,8 +7579,6 @@
           <a:p>
             <a:fld id="{8A758EFE-665F-4341-B5B8-2DAEADA52F6C}" type="slidenum">
               <a:rPr lang="en-US" smtClean="0"/>
-              <a:pPr/>
-              <a:t>‹#›</a:t>
             </a:fld>
             <a:endParaRPr lang="en-US" dirty="0"/>
           </a:p>
@@ -7592,6 +7617,7 @@
               <a:rPr lang="en-US" dirty="0"/>
               <a:t>Click to edit Master title style</a:t>
             </a:r>
+            <a:endParaRPr lang="en-US" dirty="0"/>
           </a:p>
         </p:txBody>
       </p:sp>
@@ -7620,6 +7646,7 @@
               <a:rPr lang="en-US" dirty="0"/>
               <a:t>Click to edit Master text styles</a:t>
             </a:r>
+            <a:endParaRPr lang="en-US" dirty="0"/>
           </a:p>
           <a:p>
             <a:pPr lvl="1"/>
@@ -7627,6 +7654,7 @@
               <a:rPr lang="en-US" dirty="0"/>
               <a:t>Second level</a:t>
             </a:r>
+            <a:endParaRPr lang="en-US" dirty="0"/>
           </a:p>
           <a:p>
             <a:pPr lvl="2"/>
@@ -7634,6 +7662,7 @@
               <a:rPr lang="en-US" dirty="0"/>
               <a:t>Third level</a:t>
             </a:r>
+            <a:endParaRPr lang="en-US" dirty="0"/>
           </a:p>
           <a:p>
             <a:pPr lvl="3"/>
@@ -7641,6 +7670,7 @@
               <a:rPr lang="en-US" dirty="0"/>
               <a:t>Fourth level</a:t>
             </a:r>
+            <a:endParaRPr lang="en-US" dirty="0"/>
           </a:p>
           <a:p>
             <a:pPr lvl="4"/>
@@ -7648,6 +7678,7 @@
               <a:rPr lang="en-US" dirty="0"/>
               <a:t>Fifth level</a:t>
             </a:r>
+            <a:endParaRPr lang="en-US" dirty="0"/>
           </a:p>
         </p:txBody>
       </p:sp>
@@ -7804,9 +7835,7 @@
       <p:pic>
         <p:nvPicPr>
           <p:cNvPr id="13" name="Picture 12" descr="1-line-bluetext-colorshield.png"/>
-          <p:cNvPicPr>
-            <a:picLocks/>
-          </p:cNvPicPr>
+          <p:cNvPicPr/>
           <p:nvPr userDrawn="1"/>
         </p:nvPicPr>
         <p:blipFill>
@@ -7832,11 +7861,6 @@
         </p:spPr>
       </p:pic>
     </p:spTree>
-    <p:extLst>
-      <p:ext uri="{BB962C8B-B14F-4D97-AF65-F5344CB8AC3E}">
-        <p14:creationId xmlns:p14="http://schemas.microsoft.com/office/powerpoint/2010/main" val="2022321973"/>
-      </p:ext>
-    </p:extLst>
   </p:cSld>
   <p:clrMapOvr>
     <a:masterClrMapping/>
@@ -7864,9 +7888,7 @@
       <p:pic>
         <p:nvPicPr>
           <p:cNvPr id="15" name="Picture 14" descr="upennwatermark.pdf"/>
-          <p:cNvPicPr>
-            <a:picLocks/>
-          </p:cNvPicPr>
+          <p:cNvPicPr/>
           <p:nvPr userDrawn="1"/>
         </p:nvPicPr>
         <p:blipFill>
@@ -7925,6 +7947,7 @@
               <a:rPr lang="en-US" dirty="0"/>
               <a:t>Click to edit Master title style</a:t>
             </a:r>
+            <a:endParaRPr lang="en-US" dirty="0"/>
           </a:p>
         </p:txBody>
       </p:sp>
@@ -7953,6 +7976,7 @@
               <a:rPr lang="en-US" dirty="0"/>
               <a:t>Click to edit Master text styles</a:t>
             </a:r>
+            <a:endParaRPr lang="en-US" dirty="0"/>
           </a:p>
           <a:p>
             <a:pPr lvl="1"/>
@@ -7960,6 +7984,7 @@
               <a:rPr lang="en-US" dirty="0"/>
               <a:t>Second level</a:t>
             </a:r>
+            <a:endParaRPr lang="en-US" dirty="0"/>
           </a:p>
           <a:p>
             <a:pPr lvl="2"/>
@@ -7967,6 +7992,7 @@
               <a:rPr lang="en-US" dirty="0"/>
               <a:t>Third level</a:t>
             </a:r>
+            <a:endParaRPr lang="en-US" dirty="0"/>
           </a:p>
           <a:p>
             <a:pPr lvl="3"/>
@@ -7974,6 +8000,7 @@
               <a:rPr lang="en-US" dirty="0"/>
               <a:t>Fourth level</a:t>
             </a:r>
+            <a:endParaRPr lang="en-US" dirty="0"/>
           </a:p>
           <a:p>
             <a:pPr lvl="4"/>
@@ -7981,6 +8008,7 @@
               <a:rPr lang="en-US" dirty="0"/>
               <a:t>Fifth level</a:t>
             </a:r>
+            <a:endParaRPr lang="en-US" dirty="0"/>
           </a:p>
         </p:txBody>
       </p:sp>
@@ -8014,8 +8042,6 @@
           <a:p>
             <a:fld id="{8A758EFE-665F-4341-B5B8-2DAEADA52F6C}" type="slidenum">
               <a:rPr lang="en-US" smtClean="0"/>
-              <a:pPr/>
-              <a:t>‹#›</a:t>
             </a:fld>
             <a:endParaRPr lang="en-US" dirty="0"/>
           </a:p>
@@ -8172,11 +8198,6 @@
         </p:sp>
       </p:grpSp>
     </p:spTree>
-    <p:extLst>
-      <p:ext uri="{BB962C8B-B14F-4D97-AF65-F5344CB8AC3E}">
-        <p14:creationId xmlns:p14="http://schemas.microsoft.com/office/powerpoint/2010/main" val="3754852520"/>
-      </p:ext>
-    </p:extLst>
   </p:cSld>
   <p:clrMapOvr>
     <a:masterClrMapping/>
@@ -8328,6 +8349,7 @@
               <a:rPr lang="en-US" dirty="0"/>
               <a:t>Click to edit Master text styles</a:t>
             </a:r>
+            <a:endParaRPr lang="en-US" dirty="0"/>
           </a:p>
         </p:txBody>
       </p:sp>
@@ -8386,6 +8408,7 @@
               <a:rPr lang="en-US" dirty="0"/>
               <a:t>Click to edit Master text styles</a:t>
             </a:r>
+            <a:endParaRPr lang="en-US" dirty="0"/>
           </a:p>
           <a:p>
             <a:pPr lvl="1"/>
@@ -8393,6 +8416,7 @@
               <a:rPr lang="en-US" dirty="0"/>
               <a:t>Second level</a:t>
             </a:r>
+            <a:endParaRPr lang="en-US" dirty="0"/>
           </a:p>
           <a:p>
             <a:pPr lvl="2"/>
@@ -8400,6 +8424,7 @@
               <a:rPr lang="en-US" dirty="0"/>
               <a:t>Third level</a:t>
             </a:r>
+            <a:endParaRPr lang="en-US" dirty="0"/>
           </a:p>
           <a:p>
             <a:pPr lvl="3"/>
@@ -8407,6 +8432,7 @@
               <a:rPr lang="en-US" dirty="0"/>
               <a:t>Fourth level</a:t>
             </a:r>
+            <a:endParaRPr lang="en-US" dirty="0"/>
           </a:p>
           <a:p>
             <a:pPr lvl="4"/>
@@ -8414,6 +8440,7 @@
               <a:rPr lang="en-US" dirty="0"/>
               <a:t>Fifth level</a:t>
             </a:r>
+            <a:endParaRPr lang="en-US" dirty="0"/>
           </a:p>
         </p:txBody>
       </p:sp>
@@ -8447,8 +8474,6 @@
           <a:p>
             <a:fld id="{8A758EFE-665F-4341-B5B8-2DAEADA52F6C}" type="slidenum">
               <a:rPr lang="en-US" smtClean="0"/>
-              <a:pPr/>
-              <a:t>‹#›</a:t>
             </a:fld>
             <a:endParaRPr lang="en-US" dirty="0"/>
           </a:p>
@@ -8487,6 +8512,7 @@
               <a:rPr lang="en-US" dirty="0"/>
               <a:t>Click to edit Master title style</a:t>
             </a:r>
+            <a:endParaRPr lang="en-US" dirty="0"/>
           </a:p>
         </p:txBody>
       </p:sp>
@@ -8641,11 +8667,6 @@
         </p:sp>
       </p:grpSp>
     </p:spTree>
-    <p:extLst>
-      <p:ext uri="{BB962C8B-B14F-4D97-AF65-F5344CB8AC3E}">
-        <p14:creationId xmlns:p14="http://schemas.microsoft.com/office/powerpoint/2010/main" val="2152610816"/>
-      </p:ext>
-    </p:extLst>
   </p:cSld>
   <p:clrMapOvr>
     <a:masterClrMapping/>
@@ -8828,6 +8849,7 @@
               <a:rPr lang="en-US" dirty="0"/>
               <a:t>Click to edit Master text styles</a:t>
             </a:r>
+            <a:endParaRPr lang="en-US" dirty="0"/>
           </a:p>
         </p:txBody>
       </p:sp>
@@ -8886,6 +8908,7 @@
               <a:rPr lang="en-US" dirty="0"/>
               <a:t>Click to edit Master text styles</a:t>
             </a:r>
+            <a:endParaRPr lang="en-US" dirty="0"/>
           </a:p>
           <a:p>
             <a:pPr lvl="1"/>
@@ -8893,6 +8916,7 @@
               <a:rPr lang="en-US" dirty="0"/>
               <a:t>Second level</a:t>
             </a:r>
+            <a:endParaRPr lang="en-US" dirty="0"/>
           </a:p>
           <a:p>
             <a:pPr lvl="2"/>
@@ -8900,6 +8924,7 @@
               <a:rPr lang="en-US" dirty="0"/>
               <a:t>Third level</a:t>
             </a:r>
+            <a:endParaRPr lang="en-US" dirty="0"/>
           </a:p>
           <a:p>
             <a:pPr lvl="3"/>
@@ -8907,6 +8932,7 @@
               <a:rPr lang="en-US" dirty="0"/>
               <a:t>Fourth level</a:t>
             </a:r>
+            <a:endParaRPr lang="en-US" dirty="0"/>
           </a:p>
           <a:p>
             <a:pPr lvl="4"/>
@@ -8914,6 +8940,7 @@
               <a:rPr lang="en-US" dirty="0"/>
               <a:t>Fifth level</a:t>
             </a:r>
+            <a:endParaRPr lang="en-US" dirty="0"/>
           </a:p>
         </p:txBody>
       </p:sp>
@@ -8947,8 +8974,6 @@
           <a:p>
             <a:fld id="{8A758EFE-665F-4341-B5B8-2DAEADA52F6C}" type="slidenum">
               <a:rPr lang="en-US" smtClean="0"/>
-              <a:pPr/>
-              <a:t>‹#›</a:t>
             </a:fld>
             <a:endParaRPr lang="en-US" dirty="0"/>
           </a:p>
@@ -8987,6 +9012,7 @@
               <a:rPr lang="en-US" dirty="0"/>
               <a:t>Click to edit Master title style</a:t>
             </a:r>
+            <a:endParaRPr lang="en-US" dirty="0"/>
           </a:p>
         </p:txBody>
       </p:sp>
@@ -9141,11 +9167,6 @@
         </p:sp>
       </p:grpSp>
     </p:spTree>
-    <p:extLst>
-      <p:ext uri="{BB962C8B-B14F-4D97-AF65-F5344CB8AC3E}">
-        <p14:creationId xmlns:p14="http://schemas.microsoft.com/office/powerpoint/2010/main" val="3669391638"/>
-      </p:ext>
-    </p:extLst>
   </p:cSld>
   <p:clrMapOvr>
     <a:masterClrMapping/>
@@ -9225,6 +9246,7 @@
               <a:rPr lang="en-US" dirty="0"/>
               <a:t>Click to edit Master text styles</a:t>
             </a:r>
+            <a:endParaRPr lang="en-US" dirty="0"/>
           </a:p>
           <a:p>
             <a:pPr lvl="1"/>
@@ -9232,6 +9254,7 @@
               <a:rPr lang="en-US" dirty="0"/>
               <a:t>Second level</a:t>
             </a:r>
+            <a:endParaRPr lang="en-US" dirty="0"/>
           </a:p>
           <a:p>
             <a:pPr lvl="2"/>
@@ -9239,6 +9262,7 @@
               <a:rPr lang="en-US" dirty="0"/>
               <a:t>Third level</a:t>
             </a:r>
+            <a:endParaRPr lang="en-US" dirty="0"/>
           </a:p>
           <a:p>
             <a:pPr lvl="3"/>
@@ -9246,6 +9270,7 @@
               <a:rPr lang="en-US" dirty="0"/>
               <a:t>Fourth level</a:t>
             </a:r>
+            <a:endParaRPr lang="en-US" dirty="0"/>
           </a:p>
           <a:p>
             <a:pPr lvl="4"/>
@@ -9253,6 +9278,7 @@
               <a:rPr lang="en-US" dirty="0"/>
               <a:t>Fifth level</a:t>
             </a:r>
+            <a:endParaRPr lang="en-US" dirty="0"/>
           </a:p>
         </p:txBody>
       </p:sp>
@@ -9311,6 +9337,7 @@
               <a:rPr lang="en-US" dirty="0"/>
               <a:t>Click to edit Master text styles</a:t>
             </a:r>
+            <a:endParaRPr lang="en-US" dirty="0"/>
           </a:p>
           <a:p>
             <a:pPr lvl="1"/>
@@ -9318,6 +9345,7 @@
               <a:rPr lang="en-US" dirty="0"/>
               <a:t>Second level</a:t>
             </a:r>
+            <a:endParaRPr lang="en-US" dirty="0"/>
           </a:p>
           <a:p>
             <a:pPr lvl="2"/>
@@ -9325,6 +9353,7 @@
               <a:rPr lang="en-US" dirty="0"/>
               <a:t>Third level</a:t>
             </a:r>
+            <a:endParaRPr lang="en-US" dirty="0"/>
           </a:p>
           <a:p>
             <a:pPr lvl="3"/>
@@ -9332,6 +9361,7 @@
               <a:rPr lang="en-US" dirty="0"/>
               <a:t>Fourth level</a:t>
             </a:r>
+            <a:endParaRPr lang="en-US" dirty="0"/>
           </a:p>
           <a:p>
             <a:pPr lvl="4"/>
@@ -9339,6 +9369,7 @@
               <a:rPr lang="en-US" dirty="0"/>
               <a:t>Fifth level</a:t>
             </a:r>
+            <a:endParaRPr lang="en-US" dirty="0"/>
           </a:p>
         </p:txBody>
       </p:sp>
@@ -9372,8 +9403,6 @@
           <a:p>
             <a:fld id="{8A758EFE-665F-4341-B5B8-2DAEADA52F6C}" type="slidenum">
               <a:rPr lang="en-US" smtClean="0"/>
-              <a:pPr/>
-              <a:t>‹#›</a:t>
             </a:fld>
             <a:endParaRPr lang="en-US" dirty="0"/>
           </a:p>
@@ -9412,6 +9441,7 @@
               <a:rPr lang="en-US" dirty="0"/>
               <a:t>Click to edit Master title style</a:t>
             </a:r>
+            <a:endParaRPr lang="en-US" dirty="0"/>
           </a:p>
         </p:txBody>
       </p:sp>
@@ -9566,11 +9596,6 @@
         </p:sp>
       </p:grpSp>
     </p:spTree>
-    <p:extLst>
-      <p:ext uri="{BB962C8B-B14F-4D97-AF65-F5344CB8AC3E}">
-        <p14:creationId xmlns:p14="http://schemas.microsoft.com/office/powerpoint/2010/main" val="1923846021"/>
-      </p:ext>
-    </p:extLst>
   </p:cSld>
   <p:clrMapOvr>
     <a:masterClrMapping/>
@@ -9661,6 +9686,7 @@
               <a:rPr lang="en-US" dirty="0"/>
               <a:t>Click to edit Master text styles</a:t>
             </a:r>
+            <a:endParaRPr lang="en-US" dirty="0"/>
           </a:p>
         </p:txBody>
       </p:sp>
@@ -9719,6 +9745,7 @@
               <a:rPr lang="en-US" dirty="0"/>
               <a:t>Click to edit Master text styles</a:t>
             </a:r>
+            <a:endParaRPr lang="en-US" dirty="0"/>
           </a:p>
           <a:p>
             <a:pPr lvl="1"/>
@@ -9726,6 +9753,7 @@
               <a:rPr lang="en-US" dirty="0"/>
               <a:t>Second level</a:t>
             </a:r>
+            <a:endParaRPr lang="en-US" dirty="0"/>
           </a:p>
           <a:p>
             <a:pPr lvl="2"/>
@@ -9733,6 +9761,7 @@
               <a:rPr lang="en-US" dirty="0"/>
               <a:t>Third level</a:t>
             </a:r>
+            <a:endParaRPr lang="en-US" dirty="0"/>
           </a:p>
           <a:p>
             <a:pPr lvl="3"/>
@@ -9740,6 +9769,7 @@
               <a:rPr lang="en-US" dirty="0"/>
               <a:t>Fourth level</a:t>
             </a:r>
+            <a:endParaRPr lang="en-US" dirty="0"/>
           </a:p>
           <a:p>
             <a:pPr lvl="4"/>
@@ -9747,6 +9777,7 @@
               <a:rPr lang="en-US" dirty="0"/>
               <a:t>Fifth level</a:t>
             </a:r>
+            <a:endParaRPr lang="en-US" dirty="0"/>
           </a:p>
         </p:txBody>
       </p:sp>
@@ -9816,6 +9847,7 @@
               <a:rPr lang="en-US" dirty="0"/>
               <a:t>Click to edit Master text styles</a:t>
             </a:r>
+            <a:endParaRPr lang="en-US" dirty="0"/>
           </a:p>
         </p:txBody>
       </p:sp>
@@ -9874,6 +9906,7 @@
               <a:rPr lang="en-US" dirty="0"/>
               <a:t>Click to edit Master text styles</a:t>
             </a:r>
+            <a:endParaRPr lang="en-US" dirty="0"/>
           </a:p>
           <a:p>
             <a:pPr lvl="1"/>
@@ -9881,6 +9914,7 @@
               <a:rPr lang="en-US" dirty="0"/>
               <a:t>Second level</a:t>
             </a:r>
+            <a:endParaRPr lang="en-US" dirty="0"/>
           </a:p>
           <a:p>
             <a:pPr lvl="2"/>
@@ -9888,6 +9922,7 @@
               <a:rPr lang="en-US" dirty="0"/>
               <a:t>Third level</a:t>
             </a:r>
+            <a:endParaRPr lang="en-US" dirty="0"/>
           </a:p>
           <a:p>
             <a:pPr lvl="3"/>
@@ -9895,6 +9930,7 @@
               <a:rPr lang="en-US" dirty="0"/>
               <a:t>Fourth level</a:t>
             </a:r>
+            <a:endParaRPr lang="en-US" dirty="0"/>
           </a:p>
           <a:p>
             <a:pPr lvl="4"/>
@@ -9902,6 +9938,7 @@
               <a:rPr lang="en-US" dirty="0"/>
               <a:t>Fifth level</a:t>
             </a:r>
+            <a:endParaRPr lang="en-US" dirty="0"/>
           </a:p>
         </p:txBody>
       </p:sp>
@@ -9935,8 +9972,6 @@
           <a:p>
             <a:fld id="{8A758EFE-665F-4341-B5B8-2DAEADA52F6C}" type="slidenum">
               <a:rPr lang="en-US" smtClean="0"/>
-              <a:pPr/>
-              <a:t>‹#›</a:t>
             </a:fld>
             <a:endParaRPr lang="en-US" dirty="0"/>
           </a:p>
@@ -9975,6 +10010,7 @@
               <a:rPr lang="en-US" dirty="0"/>
               <a:t>Click to edit Master title style</a:t>
             </a:r>
+            <a:endParaRPr lang="en-US" dirty="0"/>
           </a:p>
         </p:txBody>
       </p:sp>
@@ -10129,11 +10165,6 @@
         </p:sp>
       </p:grpSp>
     </p:spTree>
-    <p:extLst>
-      <p:ext uri="{BB962C8B-B14F-4D97-AF65-F5344CB8AC3E}">
-        <p14:creationId xmlns:p14="http://schemas.microsoft.com/office/powerpoint/2010/main" val="1514279529"/>
-      </p:ext>
-    </p:extLst>
   </p:cSld>
   <p:clrMapOvr>
     <a:masterClrMapping/>
@@ -10166,13 +10197,11 @@
       <p:pic>
         <p:nvPicPr>
           <p:cNvPr id="7" name="Picture 6" descr="1-line-bluetext-colorshield.png"/>
-          <p:cNvPicPr>
-            <a:picLocks/>
-          </p:cNvPicPr>
+          <p:cNvPicPr/>
           <p:nvPr userDrawn="1"/>
         </p:nvPicPr>
         <p:blipFill>
-          <a:blip r:embed="rId19">
+          <a:blip r:embed="rId18">
             <a:extLst>
               <a:ext uri="{28A0092B-C50C-407E-A947-70E740481C1C}">
                 <a14:useLocalDpi xmlns:a14="http://schemas.microsoft.com/office/drawing/2010/main" val="0"/>
@@ -10223,6 +10252,7 @@
               <a:rPr lang="en-US" dirty="0"/>
               <a:t>Click to edit Master text styles</a:t>
             </a:r>
+            <a:endParaRPr lang="en-US" dirty="0"/>
           </a:p>
           <a:p>
             <a:pPr lvl="1"/>
@@ -10230,6 +10260,7 @@
               <a:rPr lang="en-US" dirty="0"/>
               <a:t>Second level</a:t>
             </a:r>
+            <a:endParaRPr lang="en-US" dirty="0"/>
           </a:p>
           <a:p>
             <a:pPr lvl="2"/>
@@ -10237,6 +10268,7 @@
               <a:rPr lang="en-US" dirty="0"/>
               <a:t>Third level</a:t>
             </a:r>
+            <a:endParaRPr lang="en-US" dirty="0"/>
           </a:p>
           <a:p>
             <a:pPr lvl="3"/>
@@ -10244,6 +10276,7 @@
               <a:rPr lang="en-US" dirty="0"/>
               <a:t>Fourth level</a:t>
             </a:r>
+            <a:endParaRPr lang="en-US" dirty="0"/>
           </a:p>
           <a:p>
             <a:pPr lvl="4"/>
@@ -10251,6 +10284,7 @@
               <a:rPr lang="en-US" dirty="0"/>
               <a:t>Fifth level</a:t>
             </a:r>
+            <a:endParaRPr lang="en-US" dirty="0"/>
           </a:p>
         </p:txBody>
       </p:sp>
@@ -10330,8 +10364,6 @@
           <a:p>
             <a:fld id="{8A758EFE-665F-4341-B5B8-2DAEADA52F6C}" type="slidenum">
               <a:rPr lang="en-US" smtClean="0"/>
-              <a:pPr/>
-              <a:t>‹#›</a:t>
             </a:fld>
             <a:endParaRPr lang="en-US" dirty="0"/>
           </a:p>
@@ -10366,35 +10398,31 @@
               <a:rPr lang="en-US" dirty="0"/>
               <a:t>Click to edit Master title style</a:t>
             </a:r>
+            <a:endParaRPr lang="en-US" dirty="0"/>
           </a:p>
         </p:txBody>
       </p:sp>
     </p:spTree>
-    <p:extLst>
-      <p:ext uri="{BB962C8B-B14F-4D97-AF65-F5344CB8AC3E}">
-        <p14:creationId xmlns:p14="http://schemas.microsoft.com/office/powerpoint/2010/main" val="1807833175"/>
-      </p:ext>
-    </p:extLst>
   </p:cSld>
   <p:clrMap bg1="lt1" tx1="dk1" bg2="lt2" tx2="dk2" accent1="accent1" accent2="accent2" accent3="accent3" accent4="accent4" accent5="accent5" accent6="accent6" hlink="hlink" folHlink="folHlink"/>
   <p:sldLayoutIdLst>
-    <p:sldLayoutId id="2147483661" r:id="rId1"/>
-    <p:sldLayoutId id="2147483659" r:id="rId2"/>
-    <p:sldLayoutId id="2147483660" r:id="rId3"/>
-    <p:sldLayoutId id="2147483670" r:id="rId4"/>
-    <p:sldLayoutId id="2147483668" r:id="rId5"/>
-    <p:sldLayoutId id="2147483658" r:id="rId6"/>
-    <p:sldLayoutId id="2147483667" r:id="rId7"/>
-    <p:sldLayoutId id="2147483652" r:id="rId8"/>
-    <p:sldLayoutId id="2147483653" r:id="rId9"/>
-    <p:sldLayoutId id="2147483671" r:id="rId10"/>
-    <p:sldLayoutId id="2147483672" r:id="rId11"/>
-    <p:sldLayoutId id="2147483654" r:id="rId12"/>
-    <p:sldLayoutId id="2147483655" r:id="rId13"/>
-    <p:sldLayoutId id="2147483656" r:id="rId14"/>
-    <p:sldLayoutId id="2147483657" r:id="rId15"/>
-    <p:sldLayoutId id="2147483666" r:id="rId16"/>
-    <p:sldLayoutId id="2147483669" r:id="rId17"/>
+    <p:sldLayoutId id="2147483649" r:id="rId1"/>
+    <p:sldLayoutId id="2147483650" r:id="rId2"/>
+    <p:sldLayoutId id="2147483651" r:id="rId3"/>
+    <p:sldLayoutId id="2147483652" r:id="rId4"/>
+    <p:sldLayoutId id="2147483653" r:id="rId5"/>
+    <p:sldLayoutId id="2147483654" r:id="rId6"/>
+    <p:sldLayoutId id="2147483655" r:id="rId7"/>
+    <p:sldLayoutId id="2147483656" r:id="rId8"/>
+    <p:sldLayoutId id="2147483657" r:id="rId9"/>
+    <p:sldLayoutId id="2147483658" r:id="rId10"/>
+    <p:sldLayoutId id="2147483659" r:id="rId11"/>
+    <p:sldLayoutId id="2147483660" r:id="rId12"/>
+    <p:sldLayoutId id="2147483661" r:id="rId13"/>
+    <p:sldLayoutId id="2147483662" r:id="rId14"/>
+    <p:sldLayoutId id="2147483663" r:id="rId15"/>
+    <p:sldLayoutId id="2147483664" r:id="rId16"/>
+    <p:sldLayoutId id="2147483665" r:id="rId17"/>
   </p:sldLayoutIdLst>
   <p:hf hdr="0" ftr="0" dt="0"/>
   <p:txStyles>
@@ -10422,7 +10450,7 @@
         <a:buClr>
           <a:schemeClr val="tx1"/>
         </a:buClr>
-        <a:buFont typeface="Arial"/>
+        <a:buFont typeface="Arial" panose="020B0604020202020204"/>
         <a:buChar char="•"/>
         <a:defRPr sz="2800" kern="1200">
           <a:solidFill>
@@ -10440,7 +10468,7 @@
         <a:buClr>
           <a:schemeClr val="tx1"/>
         </a:buClr>
-        <a:buFont typeface="Arial"/>
+        <a:buFont typeface="Arial" panose="020B0604020202020204"/>
         <a:buChar char="–"/>
         <a:defRPr sz="2400" kern="1200">
           <a:solidFill>
@@ -10458,7 +10486,7 @@
         <a:buClr>
           <a:schemeClr val="tx1"/>
         </a:buClr>
-        <a:buFont typeface="Arial"/>
+        <a:buFont typeface="Arial" panose="020B0604020202020204"/>
         <a:buChar char="•"/>
         <a:defRPr sz="2000" kern="1200">
           <a:solidFill>
@@ -10476,7 +10504,7 @@
         <a:buClr>
           <a:schemeClr val="tx1"/>
         </a:buClr>
-        <a:buFont typeface="Arial"/>
+        <a:buFont typeface="Arial" panose="020B0604020202020204"/>
         <a:buChar char="–"/>
         <a:defRPr sz="1800" kern="1200">
           <a:solidFill>
@@ -10494,7 +10522,7 @@
         <a:buClr>
           <a:schemeClr val="tx1"/>
         </a:buClr>
-        <a:buFont typeface="Arial"/>
+        <a:buFont typeface="Arial" panose="020B0604020202020204"/>
         <a:buChar char="»"/>
         <a:defRPr sz="1800" kern="1200">
           <a:solidFill>
@@ -10509,7 +10537,7 @@
         <a:spcBef>
           <a:spcPct val="20000"/>
         </a:spcBef>
-        <a:buFont typeface="Arial"/>
+        <a:buFont typeface="Arial" panose="020B0604020202020204"/>
         <a:buChar char="•"/>
         <a:defRPr sz="2000" kern="1200">
           <a:solidFill>
@@ -10524,7 +10552,7 @@
         <a:spcBef>
           <a:spcPct val="20000"/>
         </a:spcBef>
-        <a:buFont typeface="Arial"/>
+        <a:buFont typeface="Arial" panose="020B0604020202020204"/>
         <a:buChar char="•"/>
         <a:defRPr sz="2000" kern="1200">
           <a:solidFill>
@@ -10539,7 +10567,7 @@
         <a:spcBef>
           <a:spcPct val="20000"/>
         </a:spcBef>
-        <a:buFont typeface="Arial"/>
+        <a:buFont typeface="Arial" panose="020B0604020202020204"/>
         <a:buChar char="•"/>
         <a:defRPr sz="2000" kern="1200">
           <a:solidFill>
@@ -10554,7 +10582,7 @@
         <a:spcBef>
           <a:spcPct val="20000"/>
         </a:spcBef>
-        <a:buFont typeface="Arial"/>
+        <a:buFont typeface="Arial" panose="020B0604020202020204"/>
         <a:buChar char="•"/>
         <a:defRPr sz="2000" kern="1200">
           <a:solidFill>
@@ -10763,15 +10791,11 @@
               <a:rPr lang="en-US" dirty="0"/>
               <a:t> Du</a:t>
             </a:r>
+            <a:endParaRPr lang="en-US" dirty="0"/>
           </a:p>
         </p:txBody>
       </p:sp>
     </p:spTree>
-    <p:extLst>
-      <p:ext uri="{BB962C8B-B14F-4D97-AF65-F5344CB8AC3E}">
-        <p14:creationId xmlns:p14="http://schemas.microsoft.com/office/powerpoint/2010/main" val="3947575450"/>
-      </p:ext>
-    </p:extLst>
   </p:cSld>
   <p:clrMapOvr>
     <a:masterClrMapping/>
@@ -10780,1309 +10804,6 @@
 </file>
 
 <file path=ppt/slides/slide10.xml><?xml version="1.0" encoding="utf-8"?>
-<p:sld xmlns:a="http://schemas.openxmlformats.org/drawingml/2006/main" xmlns:r="http://schemas.openxmlformats.org/officeDocument/2006/relationships" xmlns:p="http://schemas.openxmlformats.org/presentationml/2006/main">
-  <p:cSld>
-    <p:spTree>
-      <p:nvGrpSpPr>
-        <p:cNvPr id="1" name="">
-          <a:extLst>
-            <a:ext uri="{FF2B5EF4-FFF2-40B4-BE49-F238E27FC236}">
-              <a16:creationId xmlns:a16="http://schemas.microsoft.com/office/drawing/2014/main" id="{9FCA9C86-0D7D-6271-E17B-0E1193CAFEFA}"/>
-            </a:ext>
-          </a:extLst>
-        </p:cNvPr>
-        <p:cNvGrpSpPr/>
-        <p:nvPr/>
-      </p:nvGrpSpPr>
-      <p:grpSpPr>
-        <a:xfrm>
-          <a:off x="0" y="0"/>
-          <a:ext cx="0" cy="0"/>
-          <a:chOff x="0" y="0"/>
-          <a:chExt cx="0" cy="0"/>
-        </a:xfrm>
-      </p:grpSpPr>
-      <p:sp>
-        <p:nvSpPr>
-          <p:cNvPr id="2" name="Slide Number Placeholder 1">
-            <a:extLst>
-              <a:ext uri="{FF2B5EF4-FFF2-40B4-BE49-F238E27FC236}">
-                <a16:creationId xmlns:a16="http://schemas.microsoft.com/office/drawing/2014/main" id="{38892FEC-544B-C94A-3519-33D237786C1B}"/>
-              </a:ext>
-            </a:extLst>
-          </p:cNvPr>
-          <p:cNvSpPr>
-            <a:spLocks noGrp="1"/>
-          </p:cNvSpPr>
-          <p:nvPr>
-            <p:ph type="sldNum" sz="quarter" idx="12"/>
-          </p:nvPr>
-        </p:nvSpPr>
-        <p:spPr/>
-        <p:txBody>
-          <a:bodyPr/>
-          <a:lstStyle/>
-          <a:p>
-            <a:fld id="{8A758EFE-665F-4341-B5B8-2DAEADA52F6C}" type="slidenum">
-              <a:rPr lang="en-US" smtClean="0"/>
-              <a:pPr/>
-              <a:t>10</a:t>
-            </a:fld>
-            <a:endParaRPr lang="en-US" dirty="0"/>
-          </a:p>
-        </p:txBody>
-      </p:sp>
-      <p:sp>
-        <p:nvSpPr>
-          <p:cNvPr id="3" name="Title 2">
-            <a:extLst>
-              <a:ext uri="{FF2B5EF4-FFF2-40B4-BE49-F238E27FC236}">
-                <a16:creationId xmlns:a16="http://schemas.microsoft.com/office/drawing/2014/main" id="{162748E1-831B-0EE5-0D70-8054A3B0829A}"/>
-              </a:ext>
-            </a:extLst>
-          </p:cNvPr>
-          <p:cNvSpPr>
-            <a:spLocks noGrp="1"/>
-          </p:cNvSpPr>
-          <p:nvPr>
-            <p:ph type="title"/>
-          </p:nvPr>
-        </p:nvSpPr>
-        <p:spPr/>
-        <p:txBody>
-          <a:bodyPr>
-            <a:normAutofit/>
-          </a:bodyPr>
-          <a:lstStyle/>
-          <a:p>
-            <a:r>
-              <a:rPr lang="en-US" dirty="0"/>
-              <a:t>EDA Insights</a:t>
-            </a:r>
-            <a:r>
-              <a:rPr lang="zh-CN" altLang="en-US" dirty="0"/>
-              <a:t> </a:t>
-            </a:r>
-            <a:r>
-              <a:rPr lang="en-US" altLang="zh-CN" dirty="0"/>
-              <a:t>#2</a:t>
-            </a:r>
-            <a:endParaRPr lang="en-US" dirty="0"/>
-          </a:p>
-        </p:txBody>
-      </p:sp>
-      <p:sp>
-        <p:nvSpPr>
-          <p:cNvPr id="5" name="Content Placeholder 3">
-            <a:extLst>
-              <a:ext uri="{FF2B5EF4-FFF2-40B4-BE49-F238E27FC236}">
-                <a16:creationId xmlns:a16="http://schemas.microsoft.com/office/drawing/2014/main" id="{9D8EFC6E-5586-831C-AC4E-6D356157FF44}"/>
-              </a:ext>
-            </a:extLst>
-          </p:cNvPr>
-          <p:cNvSpPr txBox="1">
-            <a:spLocks/>
-          </p:cNvSpPr>
-          <p:nvPr/>
-        </p:nvSpPr>
-        <p:spPr>
-          <a:xfrm>
-            <a:off x="457199" y="1016001"/>
-            <a:ext cx="7890933" cy="3578622"/>
-          </a:xfrm>
-          <a:prstGeom prst="rect">
-            <a:avLst/>
-          </a:prstGeom>
-        </p:spPr>
-        <p:txBody>
-          <a:bodyPr>
-            <a:normAutofit/>
-          </a:bodyPr>
-          <a:lstStyle>
-            <a:lvl1pPr marL="342900" indent="-342900" algn="l" defTabSz="457200" rtl="0" eaLnBrk="1" latinLnBrk="0" hangingPunct="1">
-              <a:spcBef>
-                <a:spcPct val="20000"/>
-              </a:spcBef>
-              <a:buClr>
-                <a:schemeClr val="tx1"/>
-              </a:buClr>
-              <a:buFont typeface="Arial"/>
-              <a:buChar char="•"/>
-              <a:defRPr sz="2800" kern="1200">
-                <a:solidFill>
-                  <a:schemeClr val="accent6"/>
-                </a:solidFill>
-                <a:latin typeface="Gill Sans"/>
-                <a:ea typeface="+mn-ea"/>
-                <a:cs typeface="Gill Sans"/>
-              </a:defRPr>
-            </a:lvl1pPr>
-            <a:lvl2pPr marL="742950" indent="-285750" algn="l" defTabSz="457200" rtl="0" eaLnBrk="1" latinLnBrk="0" hangingPunct="1">
-              <a:spcBef>
-                <a:spcPct val="20000"/>
-              </a:spcBef>
-              <a:buClr>
-                <a:schemeClr val="tx1"/>
-              </a:buClr>
-              <a:buFont typeface="Arial"/>
-              <a:buChar char="–"/>
-              <a:defRPr sz="2400" kern="1200">
-                <a:solidFill>
-                  <a:schemeClr val="accent6"/>
-                </a:solidFill>
-                <a:latin typeface="Gill Sans"/>
-                <a:ea typeface="+mn-ea"/>
-                <a:cs typeface="Gill Sans"/>
-              </a:defRPr>
-            </a:lvl2pPr>
-            <a:lvl3pPr marL="1143000" indent="-228600" algn="l" defTabSz="457200" rtl="0" eaLnBrk="1" latinLnBrk="0" hangingPunct="1">
-              <a:spcBef>
-                <a:spcPct val="20000"/>
-              </a:spcBef>
-              <a:buClr>
-                <a:schemeClr val="tx1"/>
-              </a:buClr>
-              <a:buFont typeface="Arial"/>
-              <a:buChar char="•"/>
-              <a:defRPr sz="2000" kern="1200">
-                <a:solidFill>
-                  <a:schemeClr val="accent6"/>
-                </a:solidFill>
-                <a:latin typeface="Gill Sans"/>
-                <a:ea typeface="+mn-ea"/>
-                <a:cs typeface="Gill Sans"/>
-              </a:defRPr>
-            </a:lvl3pPr>
-            <a:lvl4pPr marL="1600200" indent="-228600" algn="l" defTabSz="457200" rtl="0" eaLnBrk="1" latinLnBrk="0" hangingPunct="1">
-              <a:spcBef>
-                <a:spcPct val="20000"/>
-              </a:spcBef>
-              <a:buClr>
-                <a:schemeClr val="tx1"/>
-              </a:buClr>
-              <a:buFont typeface="Arial"/>
-              <a:buChar char="–"/>
-              <a:defRPr sz="1800" kern="1200">
-                <a:solidFill>
-                  <a:schemeClr val="accent6"/>
-                </a:solidFill>
-                <a:latin typeface="Gill Sans"/>
-                <a:ea typeface="+mn-ea"/>
-                <a:cs typeface="Gill Sans"/>
-              </a:defRPr>
-            </a:lvl4pPr>
-            <a:lvl5pPr marL="2057400" indent="-228600" algn="l" defTabSz="457200" rtl="0" eaLnBrk="1" latinLnBrk="0" hangingPunct="1">
-              <a:spcBef>
-                <a:spcPct val="20000"/>
-              </a:spcBef>
-              <a:buClr>
-                <a:schemeClr val="tx1"/>
-              </a:buClr>
-              <a:buFont typeface="Arial"/>
-              <a:buChar char="»"/>
-              <a:defRPr sz="1800" kern="1200">
-                <a:solidFill>
-                  <a:schemeClr val="accent6"/>
-                </a:solidFill>
-                <a:latin typeface="Gill Sans"/>
-                <a:ea typeface="+mn-ea"/>
-                <a:cs typeface="Gill Sans"/>
-              </a:defRPr>
-            </a:lvl5pPr>
-            <a:lvl6pPr marL="2514600" indent="-228600" algn="l" defTabSz="457200" rtl="0" eaLnBrk="1" latinLnBrk="0" hangingPunct="1">
-              <a:spcBef>
-                <a:spcPct val="20000"/>
-              </a:spcBef>
-              <a:buFont typeface="Arial"/>
-              <a:buChar char="•"/>
-              <a:defRPr sz="2000" kern="1200">
-                <a:solidFill>
-                  <a:schemeClr val="tx1"/>
-                </a:solidFill>
-                <a:latin typeface="+mn-lt"/>
-                <a:ea typeface="+mn-ea"/>
-                <a:cs typeface="+mn-cs"/>
-              </a:defRPr>
-            </a:lvl6pPr>
-            <a:lvl7pPr marL="2971800" indent="-228600" algn="l" defTabSz="457200" rtl="0" eaLnBrk="1" latinLnBrk="0" hangingPunct="1">
-              <a:spcBef>
-                <a:spcPct val="20000"/>
-              </a:spcBef>
-              <a:buFont typeface="Arial"/>
-              <a:buChar char="•"/>
-              <a:defRPr sz="2000" kern="1200">
-                <a:solidFill>
-                  <a:schemeClr val="tx1"/>
-                </a:solidFill>
-                <a:latin typeface="+mn-lt"/>
-                <a:ea typeface="+mn-ea"/>
-                <a:cs typeface="+mn-cs"/>
-              </a:defRPr>
-            </a:lvl7pPr>
-            <a:lvl8pPr marL="3429000" indent="-228600" algn="l" defTabSz="457200" rtl="0" eaLnBrk="1" latinLnBrk="0" hangingPunct="1">
-              <a:spcBef>
-                <a:spcPct val="20000"/>
-              </a:spcBef>
-              <a:buFont typeface="Arial"/>
-              <a:buChar char="•"/>
-              <a:defRPr sz="2000" kern="1200">
-                <a:solidFill>
-                  <a:schemeClr val="tx1"/>
-                </a:solidFill>
-                <a:latin typeface="+mn-lt"/>
-                <a:ea typeface="+mn-ea"/>
-                <a:cs typeface="+mn-cs"/>
-              </a:defRPr>
-            </a:lvl8pPr>
-            <a:lvl9pPr marL="3886200" indent="-228600" algn="l" defTabSz="457200" rtl="0" eaLnBrk="1" latinLnBrk="0" hangingPunct="1">
-              <a:spcBef>
-                <a:spcPct val="20000"/>
-              </a:spcBef>
-              <a:buFont typeface="Arial"/>
-              <a:buChar char="•"/>
-              <a:defRPr sz="2000" kern="1200">
-                <a:solidFill>
-                  <a:schemeClr val="tx1"/>
-                </a:solidFill>
-                <a:latin typeface="+mn-lt"/>
-                <a:ea typeface="+mn-ea"/>
-                <a:cs typeface="+mn-cs"/>
-              </a:defRPr>
-            </a:lvl9pPr>
-          </a:lstStyle>
-          <a:p>
-            <a:endParaRPr lang="en-US" dirty="0"/>
-          </a:p>
-        </p:txBody>
-      </p:sp>
-      <p:sp>
-        <p:nvSpPr>
-          <p:cNvPr id="7" name="TextBox 6">
-            <a:extLst>
-              <a:ext uri="{FF2B5EF4-FFF2-40B4-BE49-F238E27FC236}">
-                <a16:creationId xmlns:a16="http://schemas.microsoft.com/office/drawing/2014/main" id="{C3847CB3-6860-276B-FAE4-D4362072A10F}"/>
-              </a:ext>
-            </a:extLst>
-          </p:cNvPr>
-          <p:cNvSpPr txBox="1"/>
-          <p:nvPr/>
-        </p:nvSpPr>
-        <p:spPr>
-          <a:xfrm>
-            <a:off x="251012" y="884518"/>
-            <a:ext cx="3937812" cy="1785104"/>
-          </a:xfrm>
-          <a:prstGeom prst="rect">
-            <a:avLst/>
-          </a:prstGeom>
-          <a:noFill/>
-        </p:spPr>
-        <p:txBody>
-          <a:bodyPr wrap="square" rtlCol="0">
-            <a:spAutoFit/>
-          </a:bodyPr>
-          <a:lstStyle/>
-          <a:p>
-            <a:r>
-              <a:rPr lang="en-US" dirty="0">
-                <a:solidFill>
-                  <a:schemeClr val="accent3"/>
-                </a:solidFill>
-              </a:rPr>
-              <a:t>Shape Distribution in Most Reported American Cities</a:t>
-            </a:r>
-          </a:p>
-          <a:p>
-            <a:endParaRPr lang="en-US" sz="1600" dirty="0"/>
-          </a:p>
-          <a:p>
-            <a:pPr marL="285750" indent="-285750">
-              <a:buFontTx/>
-              <a:buChar char="-"/>
-            </a:pPr>
-            <a:r>
-              <a:rPr lang="en-US" sz="1400" dirty="0"/>
-              <a:t>Different shape rankings among cities</a:t>
-            </a:r>
-          </a:p>
-          <a:p>
-            <a:pPr marL="285750" indent="-285750">
-              <a:buFontTx/>
-              <a:buChar char="-"/>
-            </a:pPr>
-            <a:r>
-              <a:rPr lang="en-US" sz="1400" dirty="0"/>
-              <a:t>Distribution of shapes not tied to a single region</a:t>
-            </a:r>
-          </a:p>
-          <a:p>
-            <a:pPr marL="285750" indent="-285750">
-              <a:buFontTx/>
-              <a:buChar char="-"/>
-            </a:pPr>
-            <a:endParaRPr lang="en-US" sz="1600" dirty="0"/>
-          </a:p>
-        </p:txBody>
-      </p:sp>
-      <p:pic>
-        <p:nvPicPr>
-          <p:cNvPr id="3076" name="Picture 4">
-            <a:extLst>
-              <a:ext uri="{FF2B5EF4-FFF2-40B4-BE49-F238E27FC236}">
-                <a16:creationId xmlns:a16="http://schemas.microsoft.com/office/drawing/2014/main" id="{A76AF0A2-90DE-4413-920D-DA3BB3BF7F37}"/>
-              </a:ext>
-            </a:extLst>
-          </p:cNvPr>
-          <p:cNvPicPr>
-            <a:picLocks noChangeAspect="1" noChangeArrowheads="1"/>
-          </p:cNvPicPr>
-          <p:nvPr/>
-        </p:nvPicPr>
-        <p:blipFill>
-          <a:blip r:embed="rId2">
-            <a:extLst>
-              <a:ext uri="{28A0092B-C50C-407E-A947-70E740481C1C}">
-                <a14:useLocalDpi xmlns:a14="http://schemas.microsoft.com/office/drawing/2010/main" val="0"/>
-              </a:ext>
-            </a:extLst>
-          </a:blip>
-          <a:srcRect/>
-          <a:stretch>
-            <a:fillRect/>
-          </a:stretch>
-        </p:blipFill>
-        <p:spPr bwMode="auto">
-          <a:xfrm>
-            <a:off x="4395011" y="884518"/>
-            <a:ext cx="4710499" cy="3777727"/>
-          </a:xfrm>
-          <a:prstGeom prst="rect">
-            <a:avLst/>
-          </a:prstGeom>
-          <a:noFill/>
-          <a:extLst>
-            <a:ext uri="{909E8E84-426E-40DD-AFC4-6F175D3DCCD1}">
-              <a14:hiddenFill xmlns:a14="http://schemas.microsoft.com/office/drawing/2010/main">
-                <a:solidFill>
-                  <a:srgbClr val="FFFFFF"/>
-                </a:solidFill>
-              </a14:hiddenFill>
-            </a:ext>
-          </a:extLst>
-        </p:spPr>
-      </p:pic>
-    </p:spTree>
-    <p:extLst>
-      <p:ext uri="{BB962C8B-B14F-4D97-AF65-F5344CB8AC3E}">
-        <p14:creationId xmlns:p14="http://schemas.microsoft.com/office/powerpoint/2010/main" val="1415643589"/>
-      </p:ext>
-    </p:extLst>
-  </p:cSld>
-  <p:clrMapOvr>
-    <a:masterClrMapping/>
-  </p:clrMapOvr>
-</p:sld>
-</file>
-
-<file path=ppt/slides/slide11.xml><?xml version="1.0" encoding="utf-8"?>
-<p:sld xmlns:a="http://schemas.openxmlformats.org/drawingml/2006/main" xmlns:r="http://schemas.openxmlformats.org/officeDocument/2006/relationships" xmlns:p="http://schemas.openxmlformats.org/presentationml/2006/main">
-  <p:cSld>
-    <p:spTree>
-      <p:nvGrpSpPr>
-        <p:cNvPr id="1" name="">
-          <a:extLst>
-            <a:ext uri="{FF2B5EF4-FFF2-40B4-BE49-F238E27FC236}">
-              <a16:creationId xmlns:a16="http://schemas.microsoft.com/office/drawing/2014/main" id="{2C6FAC7C-7CED-116E-5825-3895CBF49177}"/>
-            </a:ext>
-          </a:extLst>
-        </p:cNvPr>
-        <p:cNvGrpSpPr/>
-        <p:nvPr/>
-      </p:nvGrpSpPr>
-      <p:grpSpPr>
-        <a:xfrm>
-          <a:off x="0" y="0"/>
-          <a:ext cx="0" cy="0"/>
-          <a:chOff x="0" y="0"/>
-          <a:chExt cx="0" cy="0"/>
-        </a:xfrm>
-      </p:grpSpPr>
-      <p:sp>
-        <p:nvSpPr>
-          <p:cNvPr id="2" name="Slide Number Placeholder 1">
-            <a:extLst>
-              <a:ext uri="{FF2B5EF4-FFF2-40B4-BE49-F238E27FC236}">
-                <a16:creationId xmlns:a16="http://schemas.microsoft.com/office/drawing/2014/main" id="{6817B76F-DD27-485A-C58B-71B97E3538D1}"/>
-              </a:ext>
-            </a:extLst>
-          </p:cNvPr>
-          <p:cNvSpPr>
-            <a:spLocks noGrp="1"/>
-          </p:cNvSpPr>
-          <p:nvPr>
-            <p:ph type="sldNum" sz="quarter" idx="12"/>
-          </p:nvPr>
-        </p:nvSpPr>
-        <p:spPr/>
-        <p:txBody>
-          <a:bodyPr/>
-          <a:lstStyle/>
-          <a:p>
-            <a:fld id="{8A758EFE-665F-4341-B5B8-2DAEADA52F6C}" type="slidenum">
-              <a:rPr lang="en-US" smtClean="0"/>
-              <a:pPr/>
-              <a:t>11</a:t>
-            </a:fld>
-            <a:endParaRPr lang="en-US" dirty="0"/>
-          </a:p>
-        </p:txBody>
-      </p:sp>
-      <p:sp>
-        <p:nvSpPr>
-          <p:cNvPr id="3" name="Title 2">
-            <a:extLst>
-              <a:ext uri="{FF2B5EF4-FFF2-40B4-BE49-F238E27FC236}">
-                <a16:creationId xmlns:a16="http://schemas.microsoft.com/office/drawing/2014/main" id="{00B0E40D-CAC7-07F1-0660-983BE95641E8}"/>
-              </a:ext>
-            </a:extLst>
-          </p:cNvPr>
-          <p:cNvSpPr>
-            <a:spLocks noGrp="1"/>
-          </p:cNvSpPr>
-          <p:nvPr>
-            <p:ph type="title"/>
-          </p:nvPr>
-        </p:nvSpPr>
-        <p:spPr/>
-        <p:txBody>
-          <a:bodyPr>
-            <a:normAutofit/>
-          </a:bodyPr>
-          <a:lstStyle/>
-          <a:p>
-            <a:r>
-              <a:rPr lang="en-US" dirty="0"/>
-              <a:t>EDA Insights</a:t>
-            </a:r>
-            <a:r>
-              <a:rPr lang="zh-CN" altLang="en-US" dirty="0"/>
-              <a:t> </a:t>
-            </a:r>
-            <a:r>
-              <a:rPr lang="en-US" altLang="zh-CN" dirty="0"/>
-              <a:t>#3</a:t>
-            </a:r>
-            <a:endParaRPr lang="en-US" dirty="0"/>
-          </a:p>
-        </p:txBody>
-      </p:sp>
-      <p:sp>
-        <p:nvSpPr>
-          <p:cNvPr id="5" name="Content Placeholder 3">
-            <a:extLst>
-              <a:ext uri="{FF2B5EF4-FFF2-40B4-BE49-F238E27FC236}">
-                <a16:creationId xmlns:a16="http://schemas.microsoft.com/office/drawing/2014/main" id="{5EEED942-33B0-A4C4-1810-5F06C0D61C1B}"/>
-              </a:ext>
-            </a:extLst>
-          </p:cNvPr>
-          <p:cNvSpPr txBox="1">
-            <a:spLocks/>
-          </p:cNvSpPr>
-          <p:nvPr/>
-        </p:nvSpPr>
-        <p:spPr>
-          <a:xfrm>
-            <a:off x="457199" y="1016001"/>
-            <a:ext cx="7890933" cy="3578622"/>
-          </a:xfrm>
-          <a:prstGeom prst="rect">
-            <a:avLst/>
-          </a:prstGeom>
-        </p:spPr>
-        <p:txBody>
-          <a:bodyPr>
-            <a:normAutofit/>
-          </a:bodyPr>
-          <a:lstStyle>
-            <a:lvl1pPr marL="342900" indent="-342900" algn="l" defTabSz="457200" rtl="0" eaLnBrk="1" latinLnBrk="0" hangingPunct="1">
-              <a:spcBef>
-                <a:spcPct val="20000"/>
-              </a:spcBef>
-              <a:buClr>
-                <a:schemeClr val="tx1"/>
-              </a:buClr>
-              <a:buFont typeface="Arial"/>
-              <a:buChar char="•"/>
-              <a:defRPr sz="2800" kern="1200">
-                <a:solidFill>
-                  <a:schemeClr val="accent6"/>
-                </a:solidFill>
-                <a:latin typeface="Gill Sans"/>
-                <a:ea typeface="+mn-ea"/>
-                <a:cs typeface="Gill Sans"/>
-              </a:defRPr>
-            </a:lvl1pPr>
-            <a:lvl2pPr marL="742950" indent="-285750" algn="l" defTabSz="457200" rtl="0" eaLnBrk="1" latinLnBrk="0" hangingPunct="1">
-              <a:spcBef>
-                <a:spcPct val="20000"/>
-              </a:spcBef>
-              <a:buClr>
-                <a:schemeClr val="tx1"/>
-              </a:buClr>
-              <a:buFont typeface="Arial"/>
-              <a:buChar char="–"/>
-              <a:defRPr sz="2400" kern="1200">
-                <a:solidFill>
-                  <a:schemeClr val="accent6"/>
-                </a:solidFill>
-                <a:latin typeface="Gill Sans"/>
-                <a:ea typeface="+mn-ea"/>
-                <a:cs typeface="Gill Sans"/>
-              </a:defRPr>
-            </a:lvl2pPr>
-            <a:lvl3pPr marL="1143000" indent="-228600" algn="l" defTabSz="457200" rtl="0" eaLnBrk="1" latinLnBrk="0" hangingPunct="1">
-              <a:spcBef>
-                <a:spcPct val="20000"/>
-              </a:spcBef>
-              <a:buClr>
-                <a:schemeClr val="tx1"/>
-              </a:buClr>
-              <a:buFont typeface="Arial"/>
-              <a:buChar char="•"/>
-              <a:defRPr sz="2000" kern="1200">
-                <a:solidFill>
-                  <a:schemeClr val="accent6"/>
-                </a:solidFill>
-                <a:latin typeface="Gill Sans"/>
-                <a:ea typeface="+mn-ea"/>
-                <a:cs typeface="Gill Sans"/>
-              </a:defRPr>
-            </a:lvl3pPr>
-            <a:lvl4pPr marL="1600200" indent="-228600" algn="l" defTabSz="457200" rtl="0" eaLnBrk="1" latinLnBrk="0" hangingPunct="1">
-              <a:spcBef>
-                <a:spcPct val="20000"/>
-              </a:spcBef>
-              <a:buClr>
-                <a:schemeClr val="tx1"/>
-              </a:buClr>
-              <a:buFont typeface="Arial"/>
-              <a:buChar char="–"/>
-              <a:defRPr sz="1800" kern="1200">
-                <a:solidFill>
-                  <a:schemeClr val="accent6"/>
-                </a:solidFill>
-                <a:latin typeface="Gill Sans"/>
-                <a:ea typeface="+mn-ea"/>
-                <a:cs typeface="Gill Sans"/>
-              </a:defRPr>
-            </a:lvl4pPr>
-            <a:lvl5pPr marL="2057400" indent="-228600" algn="l" defTabSz="457200" rtl="0" eaLnBrk="1" latinLnBrk="0" hangingPunct="1">
-              <a:spcBef>
-                <a:spcPct val="20000"/>
-              </a:spcBef>
-              <a:buClr>
-                <a:schemeClr val="tx1"/>
-              </a:buClr>
-              <a:buFont typeface="Arial"/>
-              <a:buChar char="»"/>
-              <a:defRPr sz="1800" kern="1200">
-                <a:solidFill>
-                  <a:schemeClr val="accent6"/>
-                </a:solidFill>
-                <a:latin typeface="Gill Sans"/>
-                <a:ea typeface="+mn-ea"/>
-                <a:cs typeface="Gill Sans"/>
-              </a:defRPr>
-            </a:lvl5pPr>
-            <a:lvl6pPr marL="2514600" indent="-228600" algn="l" defTabSz="457200" rtl="0" eaLnBrk="1" latinLnBrk="0" hangingPunct="1">
-              <a:spcBef>
-                <a:spcPct val="20000"/>
-              </a:spcBef>
-              <a:buFont typeface="Arial"/>
-              <a:buChar char="•"/>
-              <a:defRPr sz="2000" kern="1200">
-                <a:solidFill>
-                  <a:schemeClr val="tx1"/>
-                </a:solidFill>
-                <a:latin typeface="+mn-lt"/>
-                <a:ea typeface="+mn-ea"/>
-                <a:cs typeface="+mn-cs"/>
-              </a:defRPr>
-            </a:lvl6pPr>
-            <a:lvl7pPr marL="2971800" indent="-228600" algn="l" defTabSz="457200" rtl="0" eaLnBrk="1" latinLnBrk="0" hangingPunct="1">
-              <a:spcBef>
-                <a:spcPct val="20000"/>
-              </a:spcBef>
-              <a:buFont typeface="Arial"/>
-              <a:buChar char="•"/>
-              <a:defRPr sz="2000" kern="1200">
-                <a:solidFill>
-                  <a:schemeClr val="tx1"/>
-                </a:solidFill>
-                <a:latin typeface="+mn-lt"/>
-                <a:ea typeface="+mn-ea"/>
-                <a:cs typeface="+mn-cs"/>
-              </a:defRPr>
-            </a:lvl7pPr>
-            <a:lvl8pPr marL="3429000" indent="-228600" algn="l" defTabSz="457200" rtl="0" eaLnBrk="1" latinLnBrk="0" hangingPunct="1">
-              <a:spcBef>
-                <a:spcPct val="20000"/>
-              </a:spcBef>
-              <a:buFont typeface="Arial"/>
-              <a:buChar char="•"/>
-              <a:defRPr sz="2000" kern="1200">
-                <a:solidFill>
-                  <a:schemeClr val="tx1"/>
-                </a:solidFill>
-                <a:latin typeface="+mn-lt"/>
-                <a:ea typeface="+mn-ea"/>
-                <a:cs typeface="+mn-cs"/>
-              </a:defRPr>
-            </a:lvl8pPr>
-            <a:lvl9pPr marL="3886200" indent="-228600" algn="l" defTabSz="457200" rtl="0" eaLnBrk="1" latinLnBrk="0" hangingPunct="1">
-              <a:spcBef>
-                <a:spcPct val="20000"/>
-              </a:spcBef>
-              <a:buFont typeface="Arial"/>
-              <a:buChar char="•"/>
-              <a:defRPr sz="2000" kern="1200">
-                <a:solidFill>
-                  <a:schemeClr val="tx1"/>
-                </a:solidFill>
-                <a:latin typeface="+mn-lt"/>
-                <a:ea typeface="+mn-ea"/>
-                <a:cs typeface="+mn-cs"/>
-              </a:defRPr>
-            </a:lvl9pPr>
-          </a:lstStyle>
-          <a:p>
-            <a:endParaRPr lang="en-US" dirty="0"/>
-          </a:p>
-        </p:txBody>
-      </p:sp>
-      <p:pic>
-        <p:nvPicPr>
-          <p:cNvPr id="4098" name="Picture 2">
-            <a:extLst>
-              <a:ext uri="{FF2B5EF4-FFF2-40B4-BE49-F238E27FC236}">
-                <a16:creationId xmlns:a16="http://schemas.microsoft.com/office/drawing/2014/main" id="{3D61BE02-2537-0DCF-3709-C2661EC0C614}"/>
-              </a:ext>
-            </a:extLst>
-          </p:cNvPr>
-          <p:cNvPicPr>
-            <a:picLocks noChangeAspect="1" noChangeArrowheads="1"/>
-          </p:cNvPicPr>
-          <p:nvPr/>
-        </p:nvPicPr>
-        <p:blipFill rotWithShape="1">
-          <a:blip r:embed="rId3">
-            <a:extLst>
-              <a:ext uri="{28A0092B-C50C-407E-A947-70E740481C1C}">
-                <a14:useLocalDpi xmlns:a14="http://schemas.microsoft.com/office/drawing/2010/main" val="0"/>
-              </a:ext>
-            </a:extLst>
-          </a:blip>
-          <a:srcRect r="50809" b="3857"/>
-          <a:stretch>
-            <a:fillRect/>
-          </a:stretch>
-        </p:blipFill>
-        <p:spPr bwMode="auto">
-          <a:xfrm>
-            <a:off x="4750342" y="846810"/>
-            <a:ext cx="3963936" cy="3852189"/>
-          </a:xfrm>
-          <a:prstGeom prst="rect">
-            <a:avLst/>
-          </a:prstGeom>
-          <a:noFill/>
-          <a:extLst>
-            <a:ext uri="{909E8E84-426E-40DD-AFC4-6F175D3DCCD1}">
-              <a14:hiddenFill xmlns:a14="http://schemas.microsoft.com/office/drawing/2010/main">
-                <a:solidFill>
-                  <a:srgbClr val="FFFFFF"/>
-                </a:solidFill>
-              </a14:hiddenFill>
-            </a:ext>
-          </a:extLst>
-        </p:spPr>
-      </p:pic>
-      <p:sp>
-        <p:nvSpPr>
-          <p:cNvPr id="6" name="TextBox 5">
-            <a:extLst>
-              <a:ext uri="{FF2B5EF4-FFF2-40B4-BE49-F238E27FC236}">
-                <a16:creationId xmlns:a16="http://schemas.microsoft.com/office/drawing/2014/main" id="{D42FC580-F7CE-88CE-F1D6-F48FE031D089}"/>
-              </a:ext>
-            </a:extLst>
-          </p:cNvPr>
-          <p:cNvSpPr txBox="1"/>
-          <p:nvPr/>
-        </p:nvSpPr>
-        <p:spPr>
-          <a:xfrm>
-            <a:off x="251011" y="884518"/>
-            <a:ext cx="4320989" cy="1569660"/>
-          </a:xfrm>
-          <a:prstGeom prst="rect">
-            <a:avLst/>
-          </a:prstGeom>
-          <a:noFill/>
-        </p:spPr>
-        <p:txBody>
-          <a:bodyPr wrap="square" rtlCol="0">
-            <a:spAutoFit/>
-          </a:bodyPr>
-          <a:lstStyle/>
-          <a:p>
-            <a:r>
-              <a:rPr lang="en-US" dirty="0">
-                <a:solidFill>
-                  <a:schemeClr val="accent3"/>
-                </a:solidFill>
-              </a:rPr>
-              <a:t>24-Hour Patterns for Top 5 Shapes</a:t>
-            </a:r>
-          </a:p>
-          <a:p>
-            <a:endParaRPr lang="en-US" dirty="0">
-              <a:solidFill>
-                <a:schemeClr val="accent3"/>
-              </a:solidFill>
-            </a:endParaRPr>
-          </a:p>
-          <a:p>
-            <a:endParaRPr lang="en-US" dirty="0">
-              <a:solidFill>
-                <a:schemeClr val="accent3"/>
-              </a:solidFill>
-            </a:endParaRPr>
-          </a:p>
-          <a:p>
-            <a:pPr marL="285750" indent="-285750">
-              <a:buFontTx/>
-              <a:buChar char="-"/>
-            </a:pPr>
-            <a:r>
-              <a:rPr lang="en-US" sz="1400" dirty="0"/>
-              <a:t>Shows shapes behave differently across hours: ”light" has largest difference between night and afternoon, “circle” and ”triangle” remain flat</a:t>
-            </a:r>
-          </a:p>
-        </p:txBody>
-      </p:sp>
-    </p:spTree>
-    <p:extLst>
-      <p:ext uri="{BB962C8B-B14F-4D97-AF65-F5344CB8AC3E}">
-        <p14:creationId xmlns:p14="http://schemas.microsoft.com/office/powerpoint/2010/main" val="1124376189"/>
-      </p:ext>
-    </p:extLst>
-  </p:cSld>
-  <p:clrMapOvr>
-    <a:masterClrMapping/>
-  </p:clrMapOvr>
-</p:sld>
-</file>
-
-<file path=ppt/slides/slide12.xml><?xml version="1.0" encoding="utf-8"?>
-<p:sld xmlns:a="http://schemas.openxmlformats.org/drawingml/2006/main" xmlns:r="http://schemas.openxmlformats.org/officeDocument/2006/relationships" xmlns:p="http://schemas.openxmlformats.org/presentationml/2006/main">
-  <p:cSld>
-    <p:spTree>
-      <p:nvGrpSpPr>
-        <p:cNvPr id="1" name=""/>
-        <p:cNvGrpSpPr/>
-        <p:nvPr/>
-      </p:nvGrpSpPr>
-      <p:grpSpPr>
-        <a:xfrm>
-          <a:off x="0" y="0"/>
-          <a:ext cx="0" cy="0"/>
-          <a:chOff x="0" y="0"/>
-          <a:chExt cx="0" cy="0"/>
-        </a:xfrm>
-      </p:grpSpPr>
-      <p:sp>
-        <p:nvSpPr>
-          <p:cNvPr id="2" name="Slide Number Placeholder 1">
-            <a:extLst>
-              <a:ext uri="{FF2B5EF4-FFF2-40B4-BE49-F238E27FC236}">
-                <a16:creationId xmlns:a16="http://schemas.microsoft.com/office/drawing/2014/main" id="{FB08311A-B289-7F4A-2348-9B8859FA71DD}"/>
-              </a:ext>
-            </a:extLst>
-          </p:cNvPr>
-          <p:cNvSpPr>
-            <a:spLocks noGrp="1"/>
-          </p:cNvSpPr>
-          <p:nvPr>
-            <p:ph type="sldNum" sz="quarter" idx="12"/>
-          </p:nvPr>
-        </p:nvSpPr>
-        <p:spPr/>
-        <p:txBody>
-          <a:bodyPr/>
-          <a:lstStyle/>
-          <a:p>
-            <a:fld id="{8A758EFE-665F-4341-B5B8-2DAEADA52F6C}" type="slidenum">
-              <a:rPr lang="en-US" smtClean="0"/>
-              <a:pPr/>
-              <a:t>12</a:t>
-            </a:fld>
-            <a:endParaRPr lang="en-US" dirty="0"/>
-          </a:p>
-        </p:txBody>
-      </p:sp>
-      <p:sp>
-        <p:nvSpPr>
-          <p:cNvPr id="3" name="Title 2">
-            <a:extLst>
-              <a:ext uri="{FF2B5EF4-FFF2-40B4-BE49-F238E27FC236}">
-                <a16:creationId xmlns:a16="http://schemas.microsoft.com/office/drawing/2014/main" id="{65DD227F-77ED-8197-5AD6-5BDFA5D1125A}"/>
-              </a:ext>
-            </a:extLst>
-          </p:cNvPr>
-          <p:cNvSpPr>
-            <a:spLocks noGrp="1"/>
-          </p:cNvSpPr>
-          <p:nvPr>
-            <p:ph type="title"/>
-          </p:nvPr>
-        </p:nvSpPr>
-        <p:spPr/>
-        <p:txBody>
-          <a:bodyPr/>
-          <a:lstStyle/>
-          <a:p>
-            <a:r>
-              <a:rPr lang="en-US" dirty="0"/>
-              <a:t>EDA Insights</a:t>
-            </a:r>
-            <a:r>
-              <a:rPr lang="zh-CN" altLang="en-US" dirty="0"/>
-              <a:t> </a:t>
-            </a:r>
-            <a:r>
-              <a:rPr lang="en-US" altLang="zh-CN" dirty="0"/>
-              <a:t>#4</a:t>
-            </a:r>
-            <a:endParaRPr lang="en-US" dirty="0"/>
-          </a:p>
-        </p:txBody>
-      </p:sp>
-      <p:pic>
-        <p:nvPicPr>
-          <p:cNvPr id="5" name="Picture 2">
-            <a:extLst>
-              <a:ext uri="{FF2B5EF4-FFF2-40B4-BE49-F238E27FC236}">
-                <a16:creationId xmlns:a16="http://schemas.microsoft.com/office/drawing/2014/main" id="{C481FF9C-0EAB-B5E4-A81D-5601ED7BEE4C}"/>
-              </a:ext>
-            </a:extLst>
-          </p:cNvPr>
-          <p:cNvPicPr>
-            <a:picLocks noChangeAspect="1" noChangeArrowheads="1"/>
-          </p:cNvPicPr>
-          <p:nvPr/>
-        </p:nvPicPr>
-        <p:blipFill rotWithShape="1">
-          <a:blip r:embed="rId3">
-            <a:extLst>
-              <a:ext uri="{28A0092B-C50C-407E-A947-70E740481C1C}">
-                <a14:useLocalDpi xmlns:a14="http://schemas.microsoft.com/office/drawing/2010/main" val="0"/>
-              </a:ext>
-            </a:extLst>
-          </a:blip>
-          <a:srcRect l="49074" r="-244"/>
-          <a:stretch>
-            <a:fillRect/>
-          </a:stretch>
-        </p:blipFill>
-        <p:spPr bwMode="auto">
-          <a:xfrm>
-            <a:off x="4769565" y="761094"/>
-            <a:ext cx="4123424" cy="4006715"/>
-          </a:xfrm>
-          <a:prstGeom prst="rect">
-            <a:avLst/>
-          </a:prstGeom>
-          <a:noFill/>
-          <a:extLst>
-            <a:ext uri="{909E8E84-426E-40DD-AFC4-6F175D3DCCD1}">
-              <a14:hiddenFill xmlns:a14="http://schemas.microsoft.com/office/drawing/2010/main">
-                <a:solidFill>
-                  <a:srgbClr val="FFFFFF"/>
-                </a:solidFill>
-              </a14:hiddenFill>
-            </a:ext>
-          </a:extLst>
-        </p:spPr>
-      </p:pic>
-      <p:sp>
-        <p:nvSpPr>
-          <p:cNvPr id="6" name="TextBox 5">
-            <a:extLst>
-              <a:ext uri="{FF2B5EF4-FFF2-40B4-BE49-F238E27FC236}">
-                <a16:creationId xmlns:a16="http://schemas.microsoft.com/office/drawing/2014/main" id="{39D0D8E6-7FBF-AEBD-01EF-4EE62240885E}"/>
-              </a:ext>
-            </a:extLst>
-          </p:cNvPr>
-          <p:cNvSpPr txBox="1"/>
-          <p:nvPr/>
-        </p:nvSpPr>
-        <p:spPr>
-          <a:xfrm>
-            <a:off x="251011" y="884518"/>
-            <a:ext cx="3963937" cy="1877437"/>
-          </a:xfrm>
-          <a:prstGeom prst="rect">
-            <a:avLst/>
-          </a:prstGeom>
-          <a:noFill/>
-        </p:spPr>
-        <p:txBody>
-          <a:bodyPr wrap="square" rtlCol="0">
-            <a:spAutoFit/>
-          </a:bodyPr>
-          <a:lstStyle/>
-          <a:p>
-            <a:r>
-              <a:rPr lang="en-US" dirty="0">
-                <a:solidFill>
-                  <a:schemeClr val="accent3"/>
-                </a:solidFill>
-              </a:rPr>
-              <a:t>Shape Composition by Time of Day</a:t>
-            </a:r>
-          </a:p>
-          <a:p>
-            <a:endParaRPr lang="en-US" sz="1400" dirty="0">
-              <a:solidFill>
-                <a:schemeClr val="accent3"/>
-              </a:solidFill>
-            </a:endParaRPr>
-          </a:p>
-          <a:p>
-            <a:pPr marL="285750" indent="-285750">
-              <a:buFontTx/>
-              <a:buChar char="-"/>
-            </a:pPr>
-            <a:r>
-              <a:rPr lang="en-US" sz="1400" dirty="0"/>
-              <a:t>Confirms nighttime dominates reporting for all shapes</a:t>
-            </a:r>
-          </a:p>
-          <a:p>
-            <a:pPr marL="285750" indent="-285750">
-              <a:buFontTx/>
-              <a:buChar char="-"/>
-            </a:pPr>
-            <a:r>
-              <a:rPr lang="en-US" sz="1400" dirty="0"/>
-              <a:t>Shows unequal distribution</a:t>
-            </a:r>
-          </a:p>
-          <a:p>
-            <a:pPr marL="285750" indent="-285750">
-              <a:buFontTx/>
-              <a:buChar char="-"/>
-            </a:pPr>
-            <a:r>
-              <a:rPr lang="en-US" sz="1400" dirty="0"/>
-              <a:t>Justifies including </a:t>
-            </a:r>
-            <a:r>
-              <a:rPr lang="en-US" sz="1400" dirty="0" err="1"/>
-              <a:t>time_of_day</a:t>
-            </a:r>
-            <a:r>
-              <a:rPr lang="en-US" sz="1400" dirty="0"/>
-              <a:t> as a categorical feature since it shifts shape probabilities differently</a:t>
-            </a:r>
-            <a:endParaRPr lang="en-US" sz="1400" dirty="0">
-              <a:solidFill>
-                <a:schemeClr val="accent3"/>
-              </a:solidFill>
-            </a:endParaRPr>
-          </a:p>
-        </p:txBody>
-      </p:sp>
-    </p:spTree>
-    <p:extLst>
-      <p:ext uri="{BB962C8B-B14F-4D97-AF65-F5344CB8AC3E}">
-        <p14:creationId xmlns:p14="http://schemas.microsoft.com/office/powerpoint/2010/main" val="2022292705"/>
-      </p:ext>
-    </p:extLst>
-  </p:cSld>
-  <p:clrMapOvr>
-    <a:masterClrMapping/>
-  </p:clrMapOvr>
-</p:sld>
-</file>
-
-<file path=ppt/slides/slide13.xml><?xml version="1.0" encoding="utf-8"?>
-<p:sld xmlns:a="http://schemas.openxmlformats.org/drawingml/2006/main" xmlns:r="http://schemas.openxmlformats.org/officeDocument/2006/relationships" xmlns:p="http://schemas.openxmlformats.org/presentationml/2006/main">
-  <p:cSld>
-    <p:spTree>
-      <p:nvGrpSpPr>
-        <p:cNvPr id="1" name=""/>
-        <p:cNvGrpSpPr/>
-        <p:nvPr/>
-      </p:nvGrpSpPr>
-      <p:grpSpPr>
-        <a:xfrm>
-          <a:off x="0" y="0"/>
-          <a:ext cx="0" cy="0"/>
-          <a:chOff x="0" y="0"/>
-          <a:chExt cx="0" cy="0"/>
-        </a:xfrm>
-      </p:grpSpPr>
-      <p:sp>
-        <p:nvSpPr>
-          <p:cNvPr id="2" name="Slide Number Placeholder 1">
-            <a:extLst>
-              <a:ext uri="{FF2B5EF4-FFF2-40B4-BE49-F238E27FC236}">
-                <a16:creationId xmlns:a16="http://schemas.microsoft.com/office/drawing/2014/main" id="{624A3A57-49CF-600E-73E9-2C52834345D5}"/>
-              </a:ext>
-            </a:extLst>
-          </p:cNvPr>
-          <p:cNvSpPr>
-            <a:spLocks noGrp="1"/>
-          </p:cNvSpPr>
-          <p:nvPr>
-            <p:ph type="sldNum" sz="quarter" idx="12"/>
-          </p:nvPr>
-        </p:nvSpPr>
-        <p:spPr/>
-        <p:txBody>
-          <a:bodyPr/>
-          <a:lstStyle/>
-          <a:p>
-            <a:fld id="{8A758EFE-665F-4341-B5B8-2DAEADA52F6C}" type="slidenum">
-              <a:rPr lang="en-US" smtClean="0"/>
-              <a:pPr/>
-              <a:t>13</a:t>
-            </a:fld>
-            <a:endParaRPr lang="en-US" dirty="0"/>
-          </a:p>
-        </p:txBody>
-      </p:sp>
-      <p:sp>
-        <p:nvSpPr>
-          <p:cNvPr id="3" name="Title 2">
-            <a:extLst>
-              <a:ext uri="{FF2B5EF4-FFF2-40B4-BE49-F238E27FC236}">
-                <a16:creationId xmlns:a16="http://schemas.microsoft.com/office/drawing/2014/main" id="{C8C95B1B-796B-F489-77E1-CC28F4285336}"/>
-              </a:ext>
-            </a:extLst>
-          </p:cNvPr>
-          <p:cNvSpPr>
-            <a:spLocks noGrp="1"/>
-          </p:cNvSpPr>
-          <p:nvPr>
-            <p:ph type="title"/>
-          </p:nvPr>
-        </p:nvSpPr>
-        <p:spPr/>
-        <p:txBody>
-          <a:bodyPr/>
-          <a:lstStyle/>
-          <a:p>
-            <a:r>
-              <a:rPr lang="en-US" dirty="0"/>
-              <a:t>EDA Insights</a:t>
-            </a:r>
-            <a:r>
-              <a:rPr lang="zh-CN" altLang="en-US" dirty="0"/>
-              <a:t> </a:t>
-            </a:r>
-            <a:r>
-              <a:rPr lang="en-US" altLang="zh-CN" dirty="0"/>
-              <a:t>#5</a:t>
-            </a:r>
-            <a:endParaRPr lang="en-US" dirty="0"/>
-          </a:p>
-        </p:txBody>
-      </p:sp>
-      <p:pic>
-        <p:nvPicPr>
-          <p:cNvPr id="2054" name="Picture 6">
-            <a:extLst>
-              <a:ext uri="{FF2B5EF4-FFF2-40B4-BE49-F238E27FC236}">
-                <a16:creationId xmlns:a16="http://schemas.microsoft.com/office/drawing/2014/main" id="{7AA69823-9710-C2C3-EBB2-9F6761C588F0}"/>
-              </a:ext>
-            </a:extLst>
-          </p:cNvPr>
-          <p:cNvPicPr>
-            <a:picLocks noChangeAspect="1" noChangeArrowheads="1"/>
-          </p:cNvPicPr>
-          <p:nvPr/>
-        </p:nvPicPr>
-        <p:blipFill>
-          <a:blip r:embed="rId2">
-            <a:extLst>
-              <a:ext uri="{28A0092B-C50C-407E-A947-70E740481C1C}">
-                <a14:useLocalDpi xmlns:a14="http://schemas.microsoft.com/office/drawing/2010/main" val="0"/>
-              </a:ext>
-            </a:extLst>
-          </a:blip>
-          <a:srcRect/>
-          <a:stretch>
-            <a:fillRect/>
-          </a:stretch>
-        </p:blipFill>
-        <p:spPr bwMode="auto">
-          <a:xfrm>
-            <a:off x="4722103" y="2112140"/>
-            <a:ext cx="4451075" cy="2652471"/>
-          </a:xfrm>
-          <a:prstGeom prst="rect">
-            <a:avLst/>
-          </a:prstGeom>
-          <a:noFill/>
-          <a:extLst>
-            <a:ext uri="{909E8E84-426E-40DD-AFC4-6F175D3DCCD1}">
-              <a14:hiddenFill xmlns:a14="http://schemas.microsoft.com/office/drawing/2010/main">
-                <a:solidFill>
-                  <a:srgbClr val="FFFFFF"/>
-                </a:solidFill>
-              </a14:hiddenFill>
-            </a:ext>
-          </a:extLst>
-        </p:spPr>
-      </p:pic>
-      <p:pic>
-        <p:nvPicPr>
-          <p:cNvPr id="2056" name="Picture 8">
-            <a:extLst>
-              <a:ext uri="{FF2B5EF4-FFF2-40B4-BE49-F238E27FC236}">
-                <a16:creationId xmlns:a16="http://schemas.microsoft.com/office/drawing/2014/main" id="{BAD8A677-5677-3E12-53CE-FB780B1EE540}"/>
-              </a:ext>
-            </a:extLst>
-          </p:cNvPr>
-          <p:cNvPicPr>
-            <a:picLocks noChangeAspect="1" noChangeArrowheads="1"/>
-          </p:cNvPicPr>
-          <p:nvPr/>
-        </p:nvPicPr>
-        <p:blipFill>
-          <a:blip r:embed="rId3">
-            <a:extLst>
-              <a:ext uri="{28A0092B-C50C-407E-A947-70E740481C1C}">
-                <a14:useLocalDpi xmlns:a14="http://schemas.microsoft.com/office/drawing/2010/main" val="0"/>
-              </a:ext>
-            </a:extLst>
-          </a:blip>
-          <a:srcRect/>
-          <a:stretch>
-            <a:fillRect/>
-          </a:stretch>
-        </p:blipFill>
-        <p:spPr bwMode="auto">
-          <a:xfrm>
-            <a:off x="0" y="2186209"/>
-            <a:ext cx="4717591" cy="2439061"/>
-          </a:xfrm>
-          <a:prstGeom prst="rect">
-            <a:avLst/>
-          </a:prstGeom>
-          <a:noFill/>
-          <a:extLst>
-            <a:ext uri="{909E8E84-426E-40DD-AFC4-6F175D3DCCD1}">
-              <a14:hiddenFill xmlns:a14="http://schemas.microsoft.com/office/drawing/2010/main">
-                <a:solidFill>
-                  <a:srgbClr val="FFFFFF"/>
-                </a:solidFill>
-              </a14:hiddenFill>
-            </a:ext>
-          </a:extLst>
-        </p:spPr>
-      </p:pic>
-      <p:sp>
-        <p:nvSpPr>
-          <p:cNvPr id="5" name="TextBox 4">
-            <a:extLst>
-              <a:ext uri="{FF2B5EF4-FFF2-40B4-BE49-F238E27FC236}">
-                <a16:creationId xmlns:a16="http://schemas.microsoft.com/office/drawing/2014/main" id="{AD008919-90AC-E142-B0DA-B3C64A0C8272}"/>
-              </a:ext>
-            </a:extLst>
-          </p:cNvPr>
-          <p:cNvSpPr txBox="1"/>
-          <p:nvPr/>
-        </p:nvSpPr>
-        <p:spPr>
-          <a:xfrm>
-            <a:off x="251011" y="884518"/>
-            <a:ext cx="6713889" cy="1538883"/>
-          </a:xfrm>
-          <a:prstGeom prst="rect">
-            <a:avLst/>
-          </a:prstGeom>
-          <a:noFill/>
-        </p:spPr>
-        <p:txBody>
-          <a:bodyPr wrap="none" rtlCol="0">
-            <a:spAutoFit/>
-          </a:bodyPr>
-          <a:lstStyle/>
-          <a:p>
-            <a:r>
-              <a:rPr lang="en-US" dirty="0">
-                <a:solidFill>
-                  <a:schemeClr val="accent3"/>
-                </a:solidFill>
-              </a:rPr>
-              <a:t>Duration vs Shape Analysis</a:t>
-            </a:r>
-          </a:p>
-          <a:p>
-            <a:r>
-              <a:rPr lang="en-US" sz="1600" dirty="0"/>
-              <a:t>Boxplot showing median duration per shape; bar chart showing mean duration</a:t>
-            </a:r>
-          </a:p>
-          <a:p>
-            <a:endParaRPr lang="en-US" sz="1600" dirty="0"/>
-          </a:p>
-          <a:p>
-            <a:pPr marL="285750" indent="-285750">
-              <a:buFontTx/>
-              <a:buChar char="-"/>
-            </a:pPr>
-            <a:r>
-              <a:rPr lang="en-US" sz="1400" dirty="0"/>
-              <a:t>Duration (seconds) has predictive signal</a:t>
-            </a:r>
-          </a:p>
-          <a:p>
-            <a:pPr marL="285750" indent="-285750">
-              <a:buFontTx/>
-              <a:buChar char="-"/>
-            </a:pPr>
-            <a:r>
-              <a:rPr lang="en-US" sz="1400" dirty="0"/>
-              <a:t>Suggesting certain shapes are associated with longer/shorter sightings</a:t>
-            </a:r>
-          </a:p>
-          <a:p>
-            <a:endParaRPr lang="en-US" sz="1600" dirty="0">
-              <a:solidFill>
-                <a:schemeClr val="accent5"/>
-              </a:solidFill>
-            </a:endParaRPr>
-          </a:p>
-        </p:txBody>
-      </p:sp>
-    </p:spTree>
-    <p:extLst>
-      <p:ext uri="{BB962C8B-B14F-4D97-AF65-F5344CB8AC3E}">
-        <p14:creationId xmlns:p14="http://schemas.microsoft.com/office/powerpoint/2010/main" val="3522553134"/>
-      </p:ext>
-    </p:extLst>
-  </p:cSld>
-  <p:clrMapOvr>
-    <a:masterClrMapping/>
-  </p:clrMapOvr>
-</p:sld>
-</file>
-
-<file path=ppt/slides/slide14.xml><?xml version="1.0" encoding="utf-8"?>
 <p:sld xmlns:a="http://schemas.openxmlformats.org/drawingml/2006/main" xmlns:r="http://schemas.openxmlformats.org/officeDocument/2006/relationships" xmlns:p="http://schemas.openxmlformats.org/presentationml/2006/main">
   <p:cSld>
     <p:spTree>
@@ -12116,8 +10837,6 @@
           <a:p>
             <a:fld id="{8A758EFE-665F-4341-B5B8-2DAEADA52F6C}" type="slidenum">
               <a:rPr lang="en-US" smtClean="0"/>
-              <a:pPr/>
-              <a:t>14</a:t>
             </a:fld>
             <a:endParaRPr lang="en-US" dirty="0"/>
           </a:p>
@@ -12142,17 +10861,24 @@
           <a:p>
             <a:r>
               <a:rPr lang="en-US" dirty="0"/>
-              <a:t>Details of the contributions (3-4 slides)</a:t>
-            </a:r>
+              <a:t>EDA Insights</a:t>
+            </a:r>
+            <a:r>
+              <a:rPr lang="zh-CN" altLang="en-US" dirty="0"/>
+              <a:t> </a:t>
+            </a:r>
+            <a:r>
+              <a:rPr lang="en-US" altLang="zh-CN" dirty="0"/>
+              <a:t>#2</a:t>
+            </a:r>
+            <a:endParaRPr lang="en-US" dirty="0"/>
           </a:p>
         </p:txBody>
       </p:sp>
       <p:sp>
         <p:nvSpPr>
           <p:cNvPr id="5" name="Content Placeholder 3"/>
-          <p:cNvSpPr txBox="1">
-            <a:spLocks/>
-          </p:cNvSpPr>
+          <p:cNvSpPr txBox="1"/>
           <p:nvPr/>
         </p:nvSpPr>
         <p:spPr>
@@ -12176,7 +10902,7 @@
               <a:buClr>
                 <a:schemeClr val="tx1"/>
               </a:buClr>
-              <a:buFont typeface="Arial"/>
+              <a:buFont typeface="Arial" panose="020B0604020202020204"/>
               <a:buChar char="•"/>
               <a:defRPr sz="2800" kern="1200">
                 <a:solidFill>
@@ -12194,7 +10920,7 @@
               <a:buClr>
                 <a:schemeClr val="tx1"/>
               </a:buClr>
-              <a:buFont typeface="Arial"/>
+              <a:buFont typeface="Arial" panose="020B0604020202020204"/>
               <a:buChar char="–"/>
               <a:defRPr sz="2400" kern="1200">
                 <a:solidFill>
@@ -12212,7 +10938,7 @@
               <a:buClr>
                 <a:schemeClr val="tx1"/>
               </a:buClr>
-              <a:buFont typeface="Arial"/>
+              <a:buFont typeface="Arial" panose="020B0604020202020204"/>
               <a:buChar char="•"/>
               <a:defRPr sz="2000" kern="1200">
                 <a:solidFill>
@@ -12230,7 +10956,7 @@
               <a:buClr>
                 <a:schemeClr val="tx1"/>
               </a:buClr>
-              <a:buFont typeface="Arial"/>
+              <a:buFont typeface="Arial" panose="020B0604020202020204"/>
               <a:buChar char="–"/>
               <a:defRPr sz="1800" kern="1200">
                 <a:solidFill>
@@ -12248,7 +10974,7 @@
               <a:buClr>
                 <a:schemeClr val="tx1"/>
               </a:buClr>
-              <a:buFont typeface="Arial"/>
+              <a:buFont typeface="Arial" panose="020B0604020202020204"/>
               <a:buChar char="»"/>
               <a:defRPr sz="1800" kern="1200">
                 <a:solidFill>
@@ -12263,7 +10989,7 @@
               <a:spcBef>
                 <a:spcPct val="20000"/>
               </a:spcBef>
-              <a:buFont typeface="Arial"/>
+              <a:buFont typeface="Arial" panose="020B0604020202020204"/>
               <a:buChar char="•"/>
               <a:defRPr sz="2000" kern="1200">
                 <a:solidFill>
@@ -12278,7 +11004,7 @@
               <a:spcBef>
                 <a:spcPct val="20000"/>
               </a:spcBef>
-              <a:buFont typeface="Arial"/>
+              <a:buFont typeface="Arial" panose="020B0604020202020204"/>
               <a:buChar char="•"/>
               <a:defRPr sz="2000" kern="1200">
                 <a:solidFill>
@@ -12293,7 +11019,7 @@
               <a:spcBef>
                 <a:spcPct val="20000"/>
               </a:spcBef>
-              <a:buFont typeface="Arial"/>
+              <a:buFont typeface="Arial" panose="020B0604020202020204"/>
               <a:buChar char="•"/>
               <a:defRPr sz="2000" kern="1200">
                 <a:solidFill>
@@ -12308,7 +11034,7 @@
               <a:spcBef>
                 <a:spcPct val="20000"/>
               </a:spcBef>
-              <a:buFont typeface="Arial"/>
+              <a:buFont typeface="Arial" panose="020B0604020202020204"/>
               <a:buChar char="•"/>
               <a:defRPr sz="2000" kern="1200">
                 <a:solidFill>
@@ -12321,45 +11047,122 @@
             </a:lvl9pPr>
           </a:lstStyle>
           <a:p>
-            <a:r>
-              <a:rPr lang="en-US" dirty="0"/>
-              <a:t>Explain the high-level idea of the paper</a:t>
-            </a:r>
-          </a:p>
-          <a:p>
-            <a:pPr lvl="1"/>
-            <a:r>
-              <a:rPr lang="en-US" dirty="0"/>
-              <a:t>preferably using an overview image, if relevant</a:t>
-            </a:r>
-          </a:p>
-          <a:p>
-            <a:r>
-              <a:rPr lang="en-US" dirty="0"/>
-              <a:t>Identify and clearly explain the assumptions made</a:t>
-            </a:r>
-          </a:p>
-          <a:p>
-            <a:r>
-              <a:rPr lang="en-US" dirty="0"/>
-              <a:t>Present the details of the proposed approaches, including important mathematical details.</a:t>
-            </a:r>
-          </a:p>
-          <a:p>
-            <a:pPr lvl="1"/>
-            <a:r>
-              <a:rPr lang="en-US" dirty="0"/>
-              <a:t>If there are parts of the model that already existed, point it out clearly to isolate the contributions of this work</a:t>
-            </a:r>
+            <a:endParaRPr lang="en-US" dirty="0"/>
           </a:p>
         </p:txBody>
       </p:sp>
+      <p:sp>
+        <p:nvSpPr>
+          <p:cNvPr id="7" name="TextBox 6"/>
+          <p:cNvSpPr txBox="1"/>
+          <p:nvPr/>
+        </p:nvSpPr>
+        <p:spPr>
+          <a:xfrm>
+            <a:off x="251012" y="884518"/>
+            <a:ext cx="3937812" cy="1785104"/>
+          </a:xfrm>
+          <a:prstGeom prst="rect">
+            <a:avLst/>
+          </a:prstGeom>
+          <a:noFill/>
+        </p:spPr>
+        <p:txBody>
+          <a:bodyPr wrap="square" rtlCol="0">
+            <a:spAutoFit/>
+          </a:bodyPr>
+          <a:lstStyle/>
+          <a:p>
+            <a:r>
+              <a:rPr lang="en-US" dirty="0">
+                <a:solidFill>
+                  <a:schemeClr val="accent3"/>
+                </a:solidFill>
+              </a:rPr>
+              <a:t>Shape Distribution in Most Reported American Cities</a:t>
+            </a:r>
+            <a:endParaRPr lang="en-US" dirty="0">
+              <a:solidFill>
+                <a:schemeClr val="accent3"/>
+              </a:solidFill>
+            </a:endParaRPr>
+          </a:p>
+          <a:p>
+            <a:endParaRPr lang="en-US" sz="1600" dirty="0"/>
+          </a:p>
+          <a:p>
+            <a:pPr marL="285750" indent="-285750">
+              <a:buFontTx/>
+              <a:buChar char="-"/>
+            </a:pPr>
+            <a:r>
+              <a:rPr lang="en-US" sz="1400" dirty="0"/>
+              <a:t>Different shape rankings among cities</a:t>
+            </a:r>
+            <a:endParaRPr lang="en-US" sz="1400" dirty="0"/>
+          </a:p>
+          <a:p>
+            <a:pPr marL="285750" indent="-285750">
+              <a:buFontTx/>
+              <a:buChar char="-"/>
+            </a:pPr>
+            <a:r>
+              <a:rPr lang="en-US" sz="1400" dirty="0"/>
+              <a:t>Distribution of shapes not tied to a single region</a:t>
+            </a:r>
+            <a:endParaRPr lang="en-US" sz="1400" dirty="0"/>
+          </a:p>
+          <a:p>
+            <a:pPr marL="285750" indent="-285750">
+              <a:buFontTx/>
+              <a:buChar char="-"/>
+            </a:pPr>
+            <a:endParaRPr lang="en-US" sz="1600" dirty="0"/>
+          </a:p>
+        </p:txBody>
+      </p:sp>
+      <p:pic>
+        <p:nvPicPr>
+          <p:cNvPr id="3076" name="Picture 4"/>
+          <p:cNvPicPr>
+            <a:picLocks noChangeAspect="1" noChangeArrowheads="1"/>
+          </p:cNvPicPr>
+          <p:nvPr/>
+        </p:nvPicPr>
+        <p:blipFill>
+          <a:blip r:embed="rId1">
+            <a:extLst>
+              <a:ext uri="{28A0092B-C50C-407E-A947-70E740481C1C}">
+                <a14:useLocalDpi xmlns:a14="http://schemas.microsoft.com/office/drawing/2010/main" val="0"/>
+              </a:ext>
+            </a:extLst>
+          </a:blip>
+          <a:srcRect/>
+          <a:stretch>
+            <a:fillRect/>
+          </a:stretch>
+        </p:blipFill>
+        <p:spPr bwMode="auto">
+          <a:xfrm>
+            <a:off x="4395011" y="884518"/>
+            <a:ext cx="4710499" cy="3777727"/>
+          </a:xfrm>
+          <a:prstGeom prst="rect">
+            <a:avLst/>
+          </a:prstGeom>
+          <a:noFill/>
+          <a:extLst>
+            <a:ext uri="{909E8E84-426E-40DD-AFC4-6F175D3DCCD1}">
+              <a14:hiddenFill xmlns:a14="http://schemas.microsoft.com/office/drawing/2010/main">
+                <a:solidFill>
+                  <a:srgbClr val="FFFFFF"/>
+                </a:solidFill>
+              </a14:hiddenFill>
+            </a:ext>
+          </a:extLst>
+        </p:spPr>
+      </p:pic>
     </p:spTree>
-    <p:extLst>
-      <p:ext uri="{BB962C8B-B14F-4D97-AF65-F5344CB8AC3E}">
-        <p14:creationId xmlns:p14="http://schemas.microsoft.com/office/powerpoint/2010/main" val="584558863"/>
-      </p:ext>
-    </p:extLst>
   </p:cSld>
   <p:clrMapOvr>
     <a:masterClrMapping/>
@@ -12367,7 +11170,7 @@
 </p:sld>
 </file>
 
-<file path=ppt/slides/slide15.xml><?xml version="1.0" encoding="utf-8"?>
+<file path=ppt/slides/slide11.xml><?xml version="1.0" encoding="utf-8"?>
 <p:sld xmlns:a="http://schemas.openxmlformats.org/drawingml/2006/main" xmlns:r="http://schemas.openxmlformats.org/officeDocument/2006/relationships" xmlns:p="http://schemas.openxmlformats.org/presentationml/2006/main">
   <p:cSld>
     <p:spTree>
@@ -12401,8 +11204,6 @@
           <a:p>
             <a:fld id="{8A758EFE-665F-4341-B5B8-2DAEADA52F6C}" type="slidenum">
               <a:rPr lang="en-US" smtClean="0"/>
-              <a:pPr/>
-              <a:t>15</a:t>
             </a:fld>
             <a:endParaRPr lang="en-US" dirty="0"/>
           </a:p>
@@ -12427,17 +11228,24 @@
           <a:p>
             <a:r>
               <a:rPr lang="en-US" dirty="0"/>
-              <a:t>Results and Analysis (2-3 slides)</a:t>
-            </a:r>
+              <a:t>EDA Insights</a:t>
+            </a:r>
+            <a:r>
+              <a:rPr lang="zh-CN" altLang="en-US" dirty="0"/>
+              <a:t> </a:t>
+            </a:r>
+            <a:r>
+              <a:rPr lang="en-US" altLang="zh-CN" dirty="0"/>
+              <a:t>#3</a:t>
+            </a:r>
+            <a:endParaRPr lang="en-US" dirty="0"/>
           </a:p>
         </p:txBody>
       </p:sp>
       <p:sp>
         <p:nvSpPr>
           <p:cNvPr id="5" name="Content Placeholder 3"/>
-          <p:cNvSpPr txBox="1">
-            <a:spLocks/>
-          </p:cNvSpPr>
+          <p:cNvSpPr txBox="1"/>
           <p:nvPr/>
         </p:nvSpPr>
         <p:spPr>
@@ -12451,7 +11259,7 @@
         </p:spPr>
         <p:txBody>
           <a:bodyPr>
-            <a:normAutofit fontScale="62500" lnSpcReduction="20000"/>
+            <a:normAutofit/>
           </a:bodyPr>
           <a:lstStyle>
             <a:lvl1pPr marL="342900" indent="-342900" algn="l" defTabSz="457200" rtl="0" eaLnBrk="1" latinLnBrk="0" hangingPunct="1">
@@ -12461,7 +11269,7 @@
               <a:buClr>
                 <a:schemeClr val="tx1"/>
               </a:buClr>
-              <a:buFont typeface="Arial"/>
+              <a:buFont typeface="Arial" panose="020B0604020202020204"/>
               <a:buChar char="•"/>
               <a:defRPr sz="2800" kern="1200">
                 <a:solidFill>
@@ -12479,7 +11287,7 @@
               <a:buClr>
                 <a:schemeClr val="tx1"/>
               </a:buClr>
-              <a:buFont typeface="Arial"/>
+              <a:buFont typeface="Arial" panose="020B0604020202020204"/>
               <a:buChar char="–"/>
               <a:defRPr sz="2400" kern="1200">
                 <a:solidFill>
@@ -12497,7 +11305,7 @@
               <a:buClr>
                 <a:schemeClr val="tx1"/>
               </a:buClr>
-              <a:buFont typeface="Arial"/>
+              <a:buFont typeface="Arial" panose="020B0604020202020204"/>
               <a:buChar char="•"/>
               <a:defRPr sz="2000" kern="1200">
                 <a:solidFill>
@@ -12515,7 +11323,7 @@
               <a:buClr>
                 <a:schemeClr val="tx1"/>
               </a:buClr>
-              <a:buFont typeface="Arial"/>
+              <a:buFont typeface="Arial" panose="020B0604020202020204"/>
               <a:buChar char="–"/>
               <a:defRPr sz="1800" kern="1200">
                 <a:solidFill>
@@ -12533,7 +11341,7 @@
               <a:buClr>
                 <a:schemeClr val="tx1"/>
               </a:buClr>
-              <a:buFont typeface="Arial"/>
+              <a:buFont typeface="Arial" panose="020B0604020202020204"/>
               <a:buChar char="»"/>
               <a:defRPr sz="1800" kern="1200">
                 <a:solidFill>
@@ -12548,7 +11356,7 @@
               <a:spcBef>
                 <a:spcPct val="20000"/>
               </a:spcBef>
-              <a:buFont typeface="Arial"/>
+              <a:buFont typeface="Arial" panose="020B0604020202020204"/>
               <a:buChar char="•"/>
               <a:defRPr sz="2000" kern="1200">
                 <a:solidFill>
@@ -12563,7 +11371,7 @@
               <a:spcBef>
                 <a:spcPct val="20000"/>
               </a:spcBef>
-              <a:buFont typeface="Arial"/>
+              <a:buFont typeface="Arial" panose="020B0604020202020204"/>
               <a:buChar char="•"/>
               <a:defRPr sz="2000" kern="1200">
                 <a:solidFill>
@@ -12578,7 +11386,7 @@
               <a:spcBef>
                 <a:spcPct val="20000"/>
               </a:spcBef>
-              <a:buFont typeface="Arial"/>
+              <a:buFont typeface="Arial" panose="020B0604020202020204"/>
               <a:buChar char="•"/>
               <a:defRPr sz="2000" kern="1200">
                 <a:solidFill>
@@ -12593,7 +11401,7 @@
               <a:spcBef>
                 <a:spcPct val="20000"/>
               </a:spcBef>
-              <a:buFont typeface="Arial"/>
+              <a:buFont typeface="Arial" panose="020B0604020202020204"/>
               <a:buChar char="•"/>
               <a:defRPr sz="2000" kern="1200">
                 <a:solidFill>
@@ -12606,69 +11414,115 @@
             </a:lvl9pPr>
           </a:lstStyle>
           <a:p>
-            <a:r>
-              <a:rPr lang="en-US" dirty="0"/>
-              <a:t>How does the paper argue for the claimed contributions</a:t>
-            </a:r>
-          </a:p>
-          <a:p>
-            <a:pPr lvl="1"/>
-            <a:r>
-              <a:rPr lang="en-US" dirty="0"/>
-              <a:t>Typically these will be the experiments conducted to test the hypothesis; in some cases these can be mathematical proofs; or in rare cases it will be only arguments and examples.</a:t>
-            </a:r>
-          </a:p>
-          <a:p>
-            <a:pPr lvl="1"/>
-            <a:r>
-              <a:rPr lang="en-US" dirty="0"/>
-              <a:t>Focus on the key experiments/arguments (not necessarily all)</a:t>
-            </a:r>
-          </a:p>
-          <a:p>
-            <a:pPr lvl="1"/>
-            <a:endParaRPr lang="en-US" dirty="0"/>
-          </a:p>
-          <a:p>
-            <a:r>
-              <a:rPr lang="en-US" dirty="0"/>
-              <a:t>Clearly define the experimental setup, datasets used, evaluation methodology</a:t>
-            </a:r>
-          </a:p>
-          <a:p>
-            <a:endParaRPr lang="en-US" dirty="0"/>
-          </a:p>
-          <a:p>
-            <a:r>
-              <a:rPr lang="en-US" dirty="0"/>
-              <a:t>Analyze the results presented in the paper, and present only data-points that convey some information.</a:t>
-            </a:r>
-          </a:p>
-          <a:p>
-            <a:pPr lvl="1"/>
-            <a:r>
-              <a:rPr lang="en-US" dirty="0"/>
-              <a:t>Do not blindly copy/screenshot tables from the papers. Make your own tables/plots (A template is at the end of this slide deck)</a:t>
-            </a:r>
-          </a:p>
-          <a:p>
-            <a:pPr lvl="1"/>
-            <a:endParaRPr lang="en-US" dirty="0"/>
-          </a:p>
-          <a:p>
-            <a:r>
-              <a:rPr lang="en-US" dirty="0"/>
-              <a:t>Analysis of the outputs – If there is analysis provided for outputs, example predictions (if present), etc.</a:t>
-            </a:r>
+            <a:endParaRPr lang="en-US" dirty="0"/>
+          </a:p>
+        </p:txBody>
+      </p:sp>
+      <p:pic>
+        <p:nvPicPr>
+          <p:cNvPr id="4098" name="Picture 2"/>
+          <p:cNvPicPr>
+            <a:picLocks noChangeAspect="1" noChangeArrowheads="1"/>
+          </p:cNvPicPr>
+          <p:nvPr/>
+        </p:nvPicPr>
+        <p:blipFill rotWithShape="1">
+          <a:blip r:embed="rId1">
+            <a:extLst>
+              <a:ext uri="{28A0092B-C50C-407E-A947-70E740481C1C}">
+                <a14:useLocalDpi xmlns:a14="http://schemas.microsoft.com/office/drawing/2010/main" val="0"/>
+              </a:ext>
+            </a:extLst>
+          </a:blip>
+          <a:srcRect r="50809" b="3857"/>
+          <a:stretch>
+            <a:fillRect/>
+          </a:stretch>
+        </p:blipFill>
+        <p:spPr bwMode="auto">
+          <a:xfrm>
+            <a:off x="4750342" y="846810"/>
+            <a:ext cx="3963936" cy="3852189"/>
+          </a:xfrm>
+          <a:prstGeom prst="rect">
+            <a:avLst/>
+          </a:prstGeom>
+          <a:noFill/>
+          <a:extLst>
+            <a:ext uri="{909E8E84-426E-40DD-AFC4-6F175D3DCCD1}">
+              <a14:hiddenFill xmlns:a14="http://schemas.microsoft.com/office/drawing/2010/main">
+                <a:solidFill>
+                  <a:srgbClr val="FFFFFF"/>
+                </a:solidFill>
+              </a14:hiddenFill>
+            </a:ext>
+          </a:extLst>
+        </p:spPr>
+      </p:pic>
+      <p:sp>
+        <p:nvSpPr>
+          <p:cNvPr id="6" name="TextBox 5"/>
+          <p:cNvSpPr txBox="1"/>
+          <p:nvPr/>
+        </p:nvSpPr>
+        <p:spPr>
+          <a:xfrm>
+            <a:off x="251011" y="884518"/>
+            <a:ext cx="4320989" cy="1569660"/>
+          </a:xfrm>
+          <a:prstGeom prst="rect">
+            <a:avLst/>
+          </a:prstGeom>
+          <a:noFill/>
+        </p:spPr>
+        <p:txBody>
+          <a:bodyPr wrap="square" rtlCol="0">
+            <a:spAutoFit/>
+          </a:bodyPr>
+          <a:lstStyle/>
+          <a:p>
+            <a:r>
+              <a:rPr lang="en-US" dirty="0">
+                <a:solidFill>
+                  <a:schemeClr val="accent3"/>
+                </a:solidFill>
+              </a:rPr>
+              <a:t>24-Hour Patterns for Top 5 Shapes</a:t>
+            </a:r>
+            <a:endParaRPr lang="en-US" dirty="0">
+              <a:solidFill>
+                <a:schemeClr val="accent3"/>
+              </a:solidFill>
+            </a:endParaRPr>
+          </a:p>
+          <a:p>
+            <a:endParaRPr lang="en-US" dirty="0">
+              <a:solidFill>
+                <a:schemeClr val="accent3"/>
+              </a:solidFill>
+            </a:endParaRPr>
+          </a:p>
+          <a:p>
+            <a:endParaRPr lang="en-US" dirty="0">
+              <a:solidFill>
+                <a:schemeClr val="accent3"/>
+              </a:solidFill>
+            </a:endParaRPr>
+          </a:p>
+          <a:p>
+            <a:pPr marL="285750" indent="-285750">
+              <a:buFontTx/>
+              <a:buChar char="-"/>
+            </a:pPr>
+            <a:r>
+              <a:rPr lang="en-US" sz="1400" dirty="0"/>
+              <a:t>Shows shapes behave differently across hours: ”light" has largest difference between night and afternoon, “circle” and ”triangle” remain flat</a:t>
+            </a:r>
+            <a:endParaRPr lang="en-US" sz="1400" dirty="0"/>
           </a:p>
         </p:txBody>
       </p:sp>
     </p:spTree>
-    <p:extLst>
-      <p:ext uri="{BB962C8B-B14F-4D97-AF65-F5344CB8AC3E}">
-        <p14:creationId xmlns:p14="http://schemas.microsoft.com/office/powerpoint/2010/main" val="361824456"/>
-      </p:ext>
-    </p:extLst>
   </p:cSld>
   <p:clrMapOvr>
     <a:masterClrMapping/>
@@ -12676,7 +11530,7 @@
 </p:sld>
 </file>
 
-<file path=ppt/slides/slide16.xml><?xml version="1.0" encoding="utf-8"?>
+<file path=ppt/slides/slide12.xml><?xml version="1.0" encoding="utf-8"?>
 <p:sld xmlns:a="http://schemas.openxmlformats.org/drawingml/2006/main" xmlns:r="http://schemas.openxmlformats.org/officeDocument/2006/relationships" xmlns:p="http://schemas.openxmlformats.org/presentationml/2006/main">
   <p:cSld>
     <p:spTree>
@@ -12710,8 +11564,2941 @@
           <a:p>
             <a:fld id="{8A758EFE-665F-4341-B5B8-2DAEADA52F6C}" type="slidenum">
               <a:rPr lang="en-US" smtClean="0"/>
-              <a:pPr/>
-              <a:t>16</a:t>
+            </a:fld>
+            <a:endParaRPr lang="en-US" dirty="0"/>
+          </a:p>
+        </p:txBody>
+      </p:sp>
+      <p:sp>
+        <p:nvSpPr>
+          <p:cNvPr id="3" name="Title 2"/>
+          <p:cNvSpPr>
+            <a:spLocks noGrp="1"/>
+          </p:cNvSpPr>
+          <p:nvPr>
+            <p:ph type="title"/>
+          </p:nvPr>
+        </p:nvSpPr>
+        <p:spPr/>
+        <p:txBody>
+          <a:bodyPr/>
+          <a:lstStyle/>
+          <a:p>
+            <a:r>
+              <a:rPr lang="en-US" dirty="0"/>
+              <a:t>EDA Insights</a:t>
+            </a:r>
+            <a:r>
+              <a:rPr lang="zh-CN" altLang="en-US" dirty="0"/>
+              <a:t> </a:t>
+            </a:r>
+            <a:r>
+              <a:rPr lang="en-US" altLang="zh-CN" dirty="0"/>
+              <a:t>#4</a:t>
+            </a:r>
+            <a:endParaRPr lang="en-US" dirty="0"/>
+          </a:p>
+        </p:txBody>
+      </p:sp>
+      <p:pic>
+        <p:nvPicPr>
+          <p:cNvPr id="5" name="Picture 2"/>
+          <p:cNvPicPr>
+            <a:picLocks noChangeAspect="1" noChangeArrowheads="1"/>
+          </p:cNvPicPr>
+          <p:nvPr/>
+        </p:nvPicPr>
+        <p:blipFill rotWithShape="1">
+          <a:blip r:embed="rId1">
+            <a:extLst>
+              <a:ext uri="{28A0092B-C50C-407E-A947-70E740481C1C}">
+                <a14:useLocalDpi xmlns:a14="http://schemas.microsoft.com/office/drawing/2010/main" val="0"/>
+              </a:ext>
+            </a:extLst>
+          </a:blip>
+          <a:srcRect l="49074" r="-244"/>
+          <a:stretch>
+            <a:fillRect/>
+          </a:stretch>
+        </p:blipFill>
+        <p:spPr bwMode="auto">
+          <a:xfrm>
+            <a:off x="4769565" y="761094"/>
+            <a:ext cx="4123424" cy="4006715"/>
+          </a:xfrm>
+          <a:prstGeom prst="rect">
+            <a:avLst/>
+          </a:prstGeom>
+          <a:noFill/>
+          <a:extLst>
+            <a:ext uri="{909E8E84-426E-40DD-AFC4-6F175D3DCCD1}">
+              <a14:hiddenFill xmlns:a14="http://schemas.microsoft.com/office/drawing/2010/main">
+                <a:solidFill>
+                  <a:srgbClr val="FFFFFF"/>
+                </a:solidFill>
+              </a14:hiddenFill>
+            </a:ext>
+          </a:extLst>
+        </p:spPr>
+      </p:pic>
+      <p:sp>
+        <p:nvSpPr>
+          <p:cNvPr id="6" name="TextBox 5"/>
+          <p:cNvSpPr txBox="1"/>
+          <p:nvPr/>
+        </p:nvSpPr>
+        <p:spPr>
+          <a:xfrm>
+            <a:off x="251011" y="884518"/>
+            <a:ext cx="3963937" cy="1877437"/>
+          </a:xfrm>
+          <a:prstGeom prst="rect">
+            <a:avLst/>
+          </a:prstGeom>
+          <a:noFill/>
+        </p:spPr>
+        <p:txBody>
+          <a:bodyPr wrap="square" rtlCol="0">
+            <a:spAutoFit/>
+          </a:bodyPr>
+          <a:lstStyle/>
+          <a:p>
+            <a:r>
+              <a:rPr lang="en-US" dirty="0">
+                <a:solidFill>
+                  <a:schemeClr val="accent3"/>
+                </a:solidFill>
+              </a:rPr>
+              <a:t>Shape Composition by Time of Day</a:t>
+            </a:r>
+            <a:endParaRPr lang="en-US" dirty="0">
+              <a:solidFill>
+                <a:schemeClr val="accent3"/>
+              </a:solidFill>
+            </a:endParaRPr>
+          </a:p>
+          <a:p>
+            <a:endParaRPr lang="en-US" sz="1400" dirty="0">
+              <a:solidFill>
+                <a:schemeClr val="accent3"/>
+              </a:solidFill>
+            </a:endParaRPr>
+          </a:p>
+          <a:p>
+            <a:pPr marL="285750" indent="-285750">
+              <a:buFontTx/>
+              <a:buChar char="-"/>
+            </a:pPr>
+            <a:r>
+              <a:rPr lang="en-US" sz="1400" dirty="0"/>
+              <a:t>Confirms nighttime dominates reporting for all shapes</a:t>
+            </a:r>
+            <a:endParaRPr lang="en-US" sz="1400" dirty="0"/>
+          </a:p>
+          <a:p>
+            <a:pPr marL="285750" indent="-285750">
+              <a:buFontTx/>
+              <a:buChar char="-"/>
+            </a:pPr>
+            <a:r>
+              <a:rPr lang="en-US" sz="1400" dirty="0"/>
+              <a:t>Shows unequal distribution</a:t>
+            </a:r>
+            <a:endParaRPr lang="en-US" sz="1400" dirty="0"/>
+          </a:p>
+          <a:p>
+            <a:pPr marL="285750" indent="-285750">
+              <a:buFontTx/>
+              <a:buChar char="-"/>
+            </a:pPr>
+            <a:r>
+              <a:rPr lang="en-US" sz="1400" dirty="0"/>
+              <a:t>Justifies including </a:t>
+            </a:r>
+            <a:r>
+              <a:rPr lang="en-US" sz="1400" dirty="0" err="1"/>
+              <a:t>time_of_day</a:t>
+            </a:r>
+            <a:r>
+              <a:rPr lang="en-US" sz="1400" dirty="0"/>
+              <a:t> as a categorical feature since it shifts shape probabilities differently</a:t>
+            </a:r>
+            <a:endParaRPr lang="en-US" sz="1400" dirty="0">
+              <a:solidFill>
+                <a:schemeClr val="accent3"/>
+              </a:solidFill>
+            </a:endParaRPr>
+          </a:p>
+        </p:txBody>
+      </p:sp>
+    </p:spTree>
+  </p:cSld>
+  <p:clrMapOvr>
+    <a:masterClrMapping/>
+  </p:clrMapOvr>
+</p:sld>
+</file>
+
+<file path=ppt/slides/slide13.xml><?xml version="1.0" encoding="utf-8"?>
+<p:sld xmlns:a="http://schemas.openxmlformats.org/drawingml/2006/main" xmlns:r="http://schemas.openxmlformats.org/officeDocument/2006/relationships" xmlns:p="http://schemas.openxmlformats.org/presentationml/2006/main">
+  <p:cSld>
+    <p:spTree>
+      <p:nvGrpSpPr>
+        <p:cNvPr id="1" name=""/>
+        <p:cNvGrpSpPr/>
+        <p:nvPr/>
+      </p:nvGrpSpPr>
+      <p:grpSpPr>
+        <a:xfrm>
+          <a:off x="0" y="0"/>
+          <a:ext cx="0" cy="0"/>
+          <a:chOff x="0" y="0"/>
+          <a:chExt cx="0" cy="0"/>
+        </a:xfrm>
+      </p:grpSpPr>
+      <p:sp>
+        <p:nvSpPr>
+          <p:cNvPr id="2" name="Slide Number Placeholder 1"/>
+          <p:cNvSpPr>
+            <a:spLocks noGrp="1"/>
+          </p:cNvSpPr>
+          <p:nvPr>
+            <p:ph type="sldNum" sz="quarter" idx="12"/>
+          </p:nvPr>
+        </p:nvSpPr>
+        <p:spPr/>
+        <p:txBody>
+          <a:bodyPr/>
+          <a:lstStyle/>
+          <a:p>
+            <a:fld id="{8A758EFE-665F-4341-B5B8-2DAEADA52F6C}" type="slidenum">
+              <a:rPr lang="en-US" smtClean="0"/>
+            </a:fld>
+            <a:endParaRPr lang="en-US" dirty="0"/>
+          </a:p>
+        </p:txBody>
+      </p:sp>
+      <p:sp>
+        <p:nvSpPr>
+          <p:cNvPr id="3" name="Title 2"/>
+          <p:cNvSpPr>
+            <a:spLocks noGrp="1"/>
+          </p:cNvSpPr>
+          <p:nvPr>
+            <p:ph type="title"/>
+          </p:nvPr>
+        </p:nvSpPr>
+        <p:spPr/>
+        <p:txBody>
+          <a:bodyPr/>
+          <a:lstStyle/>
+          <a:p>
+            <a:r>
+              <a:rPr lang="en-US" dirty="0"/>
+              <a:t>EDA Insights</a:t>
+            </a:r>
+            <a:r>
+              <a:rPr lang="zh-CN" altLang="en-US" dirty="0"/>
+              <a:t> </a:t>
+            </a:r>
+            <a:r>
+              <a:rPr lang="en-US" altLang="zh-CN" dirty="0"/>
+              <a:t>#5</a:t>
+            </a:r>
+            <a:endParaRPr lang="en-US" dirty="0"/>
+          </a:p>
+        </p:txBody>
+      </p:sp>
+      <p:pic>
+        <p:nvPicPr>
+          <p:cNvPr id="2054" name="Picture 6"/>
+          <p:cNvPicPr>
+            <a:picLocks noChangeAspect="1" noChangeArrowheads="1"/>
+          </p:cNvPicPr>
+          <p:nvPr/>
+        </p:nvPicPr>
+        <p:blipFill>
+          <a:blip r:embed="rId1">
+            <a:extLst>
+              <a:ext uri="{28A0092B-C50C-407E-A947-70E740481C1C}">
+                <a14:useLocalDpi xmlns:a14="http://schemas.microsoft.com/office/drawing/2010/main" val="0"/>
+              </a:ext>
+            </a:extLst>
+          </a:blip>
+          <a:srcRect/>
+          <a:stretch>
+            <a:fillRect/>
+          </a:stretch>
+        </p:blipFill>
+        <p:spPr bwMode="auto">
+          <a:xfrm>
+            <a:off x="4722103" y="2112140"/>
+            <a:ext cx="4451075" cy="2652471"/>
+          </a:xfrm>
+          <a:prstGeom prst="rect">
+            <a:avLst/>
+          </a:prstGeom>
+          <a:noFill/>
+          <a:extLst>
+            <a:ext uri="{909E8E84-426E-40DD-AFC4-6F175D3DCCD1}">
+              <a14:hiddenFill xmlns:a14="http://schemas.microsoft.com/office/drawing/2010/main">
+                <a:solidFill>
+                  <a:srgbClr val="FFFFFF"/>
+                </a:solidFill>
+              </a14:hiddenFill>
+            </a:ext>
+          </a:extLst>
+        </p:spPr>
+      </p:pic>
+      <p:pic>
+        <p:nvPicPr>
+          <p:cNvPr id="2056" name="Picture 8"/>
+          <p:cNvPicPr>
+            <a:picLocks noChangeAspect="1" noChangeArrowheads="1"/>
+          </p:cNvPicPr>
+          <p:nvPr/>
+        </p:nvPicPr>
+        <p:blipFill>
+          <a:blip r:embed="rId2">
+            <a:extLst>
+              <a:ext uri="{28A0092B-C50C-407E-A947-70E740481C1C}">
+                <a14:useLocalDpi xmlns:a14="http://schemas.microsoft.com/office/drawing/2010/main" val="0"/>
+              </a:ext>
+            </a:extLst>
+          </a:blip>
+          <a:srcRect/>
+          <a:stretch>
+            <a:fillRect/>
+          </a:stretch>
+        </p:blipFill>
+        <p:spPr bwMode="auto">
+          <a:xfrm>
+            <a:off x="0" y="2186209"/>
+            <a:ext cx="4717591" cy="2439061"/>
+          </a:xfrm>
+          <a:prstGeom prst="rect">
+            <a:avLst/>
+          </a:prstGeom>
+          <a:noFill/>
+          <a:extLst>
+            <a:ext uri="{909E8E84-426E-40DD-AFC4-6F175D3DCCD1}">
+              <a14:hiddenFill xmlns:a14="http://schemas.microsoft.com/office/drawing/2010/main">
+                <a:solidFill>
+                  <a:srgbClr val="FFFFFF"/>
+                </a:solidFill>
+              </a14:hiddenFill>
+            </a:ext>
+          </a:extLst>
+        </p:spPr>
+      </p:pic>
+      <p:sp>
+        <p:nvSpPr>
+          <p:cNvPr id="5" name="TextBox 4"/>
+          <p:cNvSpPr txBox="1"/>
+          <p:nvPr/>
+        </p:nvSpPr>
+        <p:spPr>
+          <a:xfrm>
+            <a:off x="251011" y="884518"/>
+            <a:ext cx="6713889" cy="1538883"/>
+          </a:xfrm>
+          <a:prstGeom prst="rect">
+            <a:avLst/>
+          </a:prstGeom>
+          <a:noFill/>
+        </p:spPr>
+        <p:txBody>
+          <a:bodyPr wrap="none" rtlCol="0">
+            <a:spAutoFit/>
+          </a:bodyPr>
+          <a:lstStyle/>
+          <a:p>
+            <a:r>
+              <a:rPr lang="en-US" dirty="0">
+                <a:solidFill>
+                  <a:schemeClr val="accent3"/>
+                </a:solidFill>
+              </a:rPr>
+              <a:t>Duration vs Shape Analysis</a:t>
+            </a:r>
+            <a:endParaRPr lang="en-US" dirty="0">
+              <a:solidFill>
+                <a:schemeClr val="accent3"/>
+              </a:solidFill>
+            </a:endParaRPr>
+          </a:p>
+          <a:p>
+            <a:r>
+              <a:rPr lang="en-US" sz="1600" dirty="0"/>
+              <a:t>Boxplot showing median duration per shape; bar chart showing mean duration</a:t>
+            </a:r>
+            <a:endParaRPr lang="en-US" sz="1600" dirty="0"/>
+          </a:p>
+          <a:p>
+            <a:endParaRPr lang="en-US" sz="1600" dirty="0"/>
+          </a:p>
+          <a:p>
+            <a:pPr marL="285750" indent="-285750">
+              <a:buFontTx/>
+              <a:buChar char="-"/>
+            </a:pPr>
+            <a:r>
+              <a:rPr lang="en-US" sz="1400" dirty="0"/>
+              <a:t>Duration (seconds) has predictive signal</a:t>
+            </a:r>
+            <a:endParaRPr lang="en-US" sz="1400" dirty="0"/>
+          </a:p>
+          <a:p>
+            <a:pPr marL="285750" indent="-285750">
+              <a:buFontTx/>
+              <a:buChar char="-"/>
+            </a:pPr>
+            <a:r>
+              <a:rPr lang="en-US" sz="1400" dirty="0"/>
+              <a:t>Suggesting certain shapes are associated with longer/shorter sightings</a:t>
+            </a:r>
+            <a:endParaRPr lang="en-US" sz="1400" dirty="0"/>
+          </a:p>
+          <a:p>
+            <a:endParaRPr lang="en-US" sz="1600" dirty="0">
+              <a:solidFill>
+                <a:schemeClr val="accent5"/>
+              </a:solidFill>
+            </a:endParaRPr>
+          </a:p>
+        </p:txBody>
+      </p:sp>
+    </p:spTree>
+  </p:cSld>
+  <p:clrMapOvr>
+    <a:masterClrMapping/>
+  </p:clrMapOvr>
+</p:sld>
+</file>
+
+<file path=ppt/slides/slide14.xml><?xml version="1.0" encoding="utf-8"?>
+<p:sld xmlns:a="http://schemas.openxmlformats.org/drawingml/2006/main" xmlns:r="http://schemas.openxmlformats.org/officeDocument/2006/relationships" xmlns:p="http://schemas.openxmlformats.org/presentationml/2006/main">
+  <p:cSld>
+    <p:spTree>
+      <p:nvGrpSpPr>
+        <p:cNvPr id="1" name=""/>
+        <p:cNvGrpSpPr/>
+        <p:nvPr/>
+      </p:nvGrpSpPr>
+      <p:grpSpPr/>
+      <p:sp>
+        <p:nvSpPr>
+          <p:cNvPr id="2" name="标题 1"/>
+          <p:cNvSpPr>
+            <a:spLocks noGrp="1"/>
+          </p:cNvSpPr>
+          <p:nvPr>
+            <p:ph type="title"/>
+          </p:nvPr>
+        </p:nvSpPr>
+        <p:spPr/>
+        <p:txBody>
+          <a:bodyPr/>
+          <a:p>
+            <a:r>
+              <a:rPr lang="en-US" altLang="zh-CN"/>
+              <a:t>Baseline Models</a:t>
+            </a:r>
+            <a:endParaRPr lang="en-US" altLang="zh-CN"/>
+          </a:p>
+        </p:txBody>
+      </p:sp>
+      <p:sp>
+        <p:nvSpPr>
+          <p:cNvPr id="4" name="灯片编号占位符 3"/>
+          <p:cNvSpPr>
+            <a:spLocks noGrp="1"/>
+          </p:cNvSpPr>
+          <p:nvPr>
+            <p:ph type="sldNum" sz="quarter" idx="12"/>
+          </p:nvPr>
+        </p:nvSpPr>
+        <p:spPr/>
+        <p:txBody>
+          <a:bodyPr/>
+          <a:p>
+            <a:fld id="{8A758EFE-665F-4341-B5B8-2DAEADA52F6C}" type="slidenum">
+              <a:rPr lang="en-US" smtClean="0"/>
+            </a:fld>
+            <a:endParaRPr lang="en-US" dirty="0"/>
+          </a:p>
+        </p:txBody>
+      </p:sp>
+      <p:sp>
+        <p:nvSpPr>
+          <p:cNvPr id="8" name="TextBox 4"/>
+          <p:cNvSpPr txBox="1"/>
+          <p:nvPr/>
+        </p:nvSpPr>
+        <p:spPr>
+          <a:xfrm>
+            <a:off x="250825" y="884555"/>
+            <a:ext cx="3747135" cy="1353185"/>
+          </a:xfrm>
+          <a:prstGeom prst="rect">
+            <a:avLst/>
+          </a:prstGeom>
+          <a:noFill/>
+        </p:spPr>
+        <p:txBody>
+          <a:bodyPr wrap="square" rtlCol="0">
+            <a:spAutoFit/>
+          </a:bodyPr>
+          <a:lstStyle/>
+          <a:p>
+            <a:pPr algn="l"/>
+            <a:r>
+              <a:rPr lang="en-US" altLang="zh-CN" dirty="0">
+                <a:solidFill>
+                  <a:schemeClr val="accent3"/>
+                </a:solidFill>
+              </a:rPr>
+              <a:t>Two Baseline Models</a:t>
+            </a:r>
+            <a:endParaRPr lang="en-US" dirty="0">
+              <a:solidFill>
+                <a:schemeClr val="accent3"/>
+              </a:solidFill>
+            </a:endParaRPr>
+          </a:p>
+          <a:p>
+            <a:pPr algn="l"/>
+            <a:r>
+              <a:rPr lang="en-US" altLang="zh-CN" sz="1600" dirty="0"/>
+              <a:t>Baseline 1: Majority-class model</a:t>
+            </a:r>
+            <a:endParaRPr lang="en-US" altLang="zh-CN" sz="1600" dirty="0"/>
+          </a:p>
+          <a:p>
+            <a:pPr algn="l"/>
+            <a:endParaRPr lang="en-US" altLang="zh-CN" sz="1600" dirty="0"/>
+          </a:p>
+          <a:p>
+            <a:pPr marL="285750" indent="-285750" algn="l">
+              <a:buFontTx/>
+              <a:buChar char="-"/>
+            </a:pPr>
+            <a:r>
+              <a:rPr lang="en-US" altLang="zh-CN" sz="1600" dirty="0">
+                <a:sym typeface="+mn-ea"/>
+              </a:rPr>
+              <a:t>Always predicts the most frequent shape (“light”)</a:t>
+            </a:r>
+            <a:endParaRPr lang="en-US" sz="1600" dirty="0">
+              <a:solidFill>
+                <a:schemeClr val="accent5"/>
+              </a:solidFill>
+            </a:endParaRPr>
+          </a:p>
+        </p:txBody>
+      </p:sp>
+      <p:sp>
+        <p:nvSpPr>
+          <p:cNvPr id="9" name="TextBox 4"/>
+          <p:cNvSpPr txBox="1"/>
+          <p:nvPr/>
+        </p:nvSpPr>
+        <p:spPr>
+          <a:xfrm>
+            <a:off x="4558851" y="1146138"/>
+            <a:ext cx="3902075" cy="829945"/>
+          </a:xfrm>
+          <a:prstGeom prst="rect">
+            <a:avLst/>
+          </a:prstGeom>
+          <a:noFill/>
+        </p:spPr>
+        <p:txBody>
+          <a:bodyPr wrap="none" rtlCol="0">
+            <a:spAutoFit/>
+          </a:bodyPr>
+          <a:lstStyle/>
+          <a:p>
+            <a:pPr algn="l"/>
+            <a:r>
+              <a:rPr lang="en-US" altLang="zh-CN" sz="1600" dirty="0"/>
+              <a:t>Baseline 2: Multinomial Logistic Regression</a:t>
+            </a:r>
+            <a:endParaRPr lang="en-US" altLang="zh-CN" sz="1600" dirty="0"/>
+          </a:p>
+          <a:p>
+            <a:pPr algn="l"/>
+            <a:endParaRPr lang="en-US" altLang="zh-CN" sz="1600" dirty="0"/>
+          </a:p>
+          <a:p>
+            <a:pPr marL="285750" indent="-285750" algn="l">
+              <a:buFontTx/>
+              <a:buChar char="-"/>
+            </a:pPr>
+            <a:r>
+              <a:rPr lang="en-US" altLang="zh-CN" sz="1600" dirty="0">
+                <a:solidFill>
+                  <a:schemeClr val="accent5"/>
+                </a:solidFill>
+              </a:rPr>
+              <a:t>Linear classifier on all engineered features</a:t>
+            </a:r>
+            <a:endParaRPr lang="en-US" altLang="zh-CN" sz="1600" dirty="0">
+              <a:solidFill>
+                <a:schemeClr val="accent5"/>
+              </a:solidFill>
+            </a:endParaRPr>
+          </a:p>
+        </p:txBody>
+      </p:sp>
+      <p:pic>
+        <p:nvPicPr>
+          <p:cNvPr id="10" name="图片 9"/>
+          <p:cNvPicPr>
+            <a:picLocks noChangeAspect="1"/>
+          </p:cNvPicPr>
+          <p:nvPr/>
+        </p:nvPicPr>
+        <p:blipFill>
+          <a:blip r:embed="rId1"/>
+          <a:stretch>
+            <a:fillRect/>
+          </a:stretch>
+        </p:blipFill>
+        <p:spPr>
+          <a:xfrm>
+            <a:off x="250825" y="2696210"/>
+            <a:ext cx="3935095" cy="554990"/>
+          </a:xfrm>
+          <a:prstGeom prst="rect">
+            <a:avLst/>
+          </a:prstGeom>
+        </p:spPr>
+      </p:pic>
+      <p:pic>
+        <p:nvPicPr>
+          <p:cNvPr id="11" name="图片 10"/>
+          <p:cNvPicPr>
+            <a:picLocks noChangeAspect="1"/>
+          </p:cNvPicPr>
+          <p:nvPr/>
+        </p:nvPicPr>
+        <p:blipFill>
+          <a:blip r:embed="rId2"/>
+          <a:stretch>
+            <a:fillRect/>
+          </a:stretch>
+        </p:blipFill>
+        <p:spPr>
+          <a:xfrm>
+            <a:off x="4991100" y="2413000"/>
+            <a:ext cx="3037205" cy="838200"/>
+          </a:xfrm>
+          <a:prstGeom prst="rect">
+            <a:avLst/>
+          </a:prstGeom>
+        </p:spPr>
+      </p:pic>
+    </p:spTree>
+  </p:cSld>
+  <p:clrMapOvr>
+    <a:masterClrMapping/>
+  </p:clrMapOvr>
+</p:sld>
+</file>
+
+<file path=ppt/slides/slide15.xml><?xml version="1.0" encoding="utf-8"?>
+<p:sld xmlns:a="http://schemas.openxmlformats.org/drawingml/2006/main" xmlns:r="http://schemas.openxmlformats.org/officeDocument/2006/relationships" xmlns:p="http://schemas.openxmlformats.org/presentationml/2006/main">
+  <p:cSld>
+    <p:spTree>
+      <p:nvGrpSpPr>
+        <p:cNvPr id="1" name=""/>
+        <p:cNvGrpSpPr/>
+        <p:nvPr/>
+      </p:nvGrpSpPr>
+      <p:grpSpPr/>
+      <p:sp>
+        <p:nvSpPr>
+          <p:cNvPr id="2" name="标题 1"/>
+          <p:cNvSpPr>
+            <a:spLocks noGrp="1"/>
+          </p:cNvSpPr>
+          <p:nvPr>
+            <p:ph type="title"/>
+          </p:nvPr>
+        </p:nvSpPr>
+        <p:spPr/>
+        <p:txBody>
+          <a:bodyPr/>
+          <a:p>
+            <a:r>
+              <a:rPr lang="en-US" altLang="zh-CN"/>
+              <a:t>Modeling Pt.2</a:t>
+            </a:r>
+            <a:endParaRPr lang="en-US" altLang="zh-CN"/>
+          </a:p>
+        </p:txBody>
+      </p:sp>
+      <p:sp>
+        <p:nvSpPr>
+          <p:cNvPr id="4" name="灯片编号占位符 3"/>
+          <p:cNvSpPr>
+            <a:spLocks noGrp="1"/>
+          </p:cNvSpPr>
+          <p:nvPr>
+            <p:ph type="sldNum" sz="quarter" idx="12"/>
+          </p:nvPr>
+        </p:nvSpPr>
+        <p:spPr/>
+        <p:txBody>
+          <a:bodyPr/>
+          <a:p>
+            <a:fld id="{8A758EFE-665F-4341-B5B8-2DAEADA52F6C}" type="slidenum">
+              <a:rPr lang="en-US" smtClean="0"/>
+            </a:fld>
+            <a:endParaRPr lang="en-US" dirty="0"/>
+          </a:p>
+        </p:txBody>
+      </p:sp>
+      <p:sp>
+        <p:nvSpPr>
+          <p:cNvPr id="6" name="TextBox 5"/>
+          <p:cNvSpPr txBox="1"/>
+          <p:nvPr/>
+        </p:nvSpPr>
+        <p:spPr>
+          <a:xfrm>
+            <a:off x="251011" y="884518"/>
+            <a:ext cx="3963937" cy="2953385"/>
+          </a:xfrm>
+          <a:prstGeom prst="rect">
+            <a:avLst/>
+          </a:prstGeom>
+          <a:noFill/>
+        </p:spPr>
+        <p:txBody>
+          <a:bodyPr wrap="square" rtlCol="0">
+            <a:spAutoFit/>
+          </a:bodyPr>
+          <a:lstStyle/>
+          <a:p>
+            <a:r>
+              <a:rPr lang="en-US" dirty="0">
+                <a:solidFill>
+                  <a:schemeClr val="accent3"/>
+                </a:solidFill>
+              </a:rPr>
+              <a:t>Nonlinear Models &amp; Imbalance Handling</a:t>
+            </a:r>
+            <a:endParaRPr lang="en-US" dirty="0">
+              <a:solidFill>
+                <a:schemeClr val="accent3"/>
+              </a:solidFill>
+            </a:endParaRPr>
+          </a:p>
+          <a:p>
+            <a:r>
+              <a:rPr lang="en-US" altLang="zh-CN" sz="1400" dirty="0"/>
+              <a:t>4 Models evaluated:</a:t>
+            </a:r>
+            <a:endParaRPr lang="en-US" altLang="zh-CN" sz="1400" dirty="0"/>
+          </a:p>
+          <a:p>
+            <a:pPr marL="285750" indent="-285750">
+              <a:buFontTx/>
+              <a:buChar char="-"/>
+            </a:pPr>
+            <a:r>
+              <a:rPr lang="en-US" sz="1400" dirty="0"/>
+              <a:t>Random Forests</a:t>
+            </a:r>
+            <a:endParaRPr lang="en-US" sz="1400" dirty="0"/>
+          </a:p>
+          <a:p>
+            <a:pPr marL="285750" indent="-285750">
+              <a:buFontTx/>
+              <a:buChar char="-"/>
+            </a:pPr>
+            <a:r>
+              <a:rPr lang="en-US" sz="1400" dirty="0"/>
+              <a:t>AdaBoost</a:t>
+            </a:r>
+            <a:endParaRPr lang="en-US" sz="1400" dirty="0"/>
+          </a:p>
+          <a:p>
+            <a:pPr marL="285750" indent="-285750">
+              <a:buFontTx/>
+              <a:buChar char="-"/>
+            </a:pPr>
+            <a:r>
+              <a:rPr lang="en-US" sz="1400" dirty="0"/>
+              <a:t>XGBoost</a:t>
+            </a:r>
+            <a:endParaRPr lang="en-US" sz="1400" dirty="0"/>
+          </a:p>
+          <a:p>
+            <a:pPr marL="285750" indent="-285750">
+              <a:buFontTx/>
+              <a:buChar char="-"/>
+            </a:pPr>
+            <a:r>
+              <a:rPr lang="en-US" altLang="zh-CN" sz="1400" dirty="0"/>
+              <a:t>SVM(RBF)</a:t>
+            </a:r>
+            <a:endParaRPr lang="en-US" altLang="zh-CN" sz="1400" dirty="0"/>
+          </a:p>
+          <a:p>
+            <a:pPr indent="0">
+              <a:buFontTx/>
+              <a:buNone/>
+            </a:pPr>
+            <a:endParaRPr lang="en-US" sz="1400" dirty="0">
+              <a:solidFill>
+                <a:schemeClr val="accent3"/>
+              </a:solidFill>
+            </a:endParaRPr>
+          </a:p>
+          <a:p>
+            <a:pPr indent="0">
+              <a:buFontTx/>
+              <a:buNone/>
+            </a:pPr>
+            <a:r>
+              <a:rPr lang="en-US" altLang="zh-CN" sz="1400" dirty="0"/>
+              <a:t>Two imbalance strategies</a:t>
+            </a:r>
+            <a:endParaRPr lang="en-US" altLang="zh-CN" sz="1400" dirty="0"/>
+          </a:p>
+          <a:p>
+            <a:pPr marL="285750" indent="-285750">
+              <a:buFontTx/>
+              <a:buChar char="-"/>
+            </a:pPr>
+            <a:r>
+              <a:rPr lang="en-US" altLang="zh-CN" sz="1400" dirty="0">
+                <a:sym typeface="+mn-ea"/>
+              </a:rPr>
+              <a:t>Original train set + class or sample weights</a:t>
+            </a:r>
+            <a:endParaRPr lang="en-US" altLang="zh-CN" sz="1400" dirty="0">
+              <a:sym typeface="+mn-ea"/>
+            </a:endParaRPr>
+          </a:p>
+          <a:p>
+            <a:pPr marL="285750" indent="-285750">
+              <a:buFontTx/>
+              <a:buChar char="-"/>
+            </a:pPr>
+            <a:r>
+              <a:rPr lang="en-US" altLang="zh-CN" sz="1400" dirty="0"/>
+              <a:t>SMOTE-balanced train set, no weights</a:t>
+            </a:r>
+            <a:endParaRPr lang="en-US" altLang="zh-CN" sz="1400" dirty="0"/>
+          </a:p>
+          <a:p>
+            <a:pPr marL="285750" indent="-285750">
+              <a:buFontTx/>
+              <a:buChar char="-"/>
+            </a:pPr>
+            <a:endParaRPr lang="en-US" altLang="zh-CN" sz="1400" dirty="0"/>
+          </a:p>
+          <a:p>
+            <a:pPr indent="0">
+              <a:buFontTx/>
+              <a:buNone/>
+            </a:pPr>
+            <a:r>
+              <a:rPr lang="en-US" altLang="zh-CN" sz="1400" dirty="0"/>
+              <a:t>Hyperparameter Tuning</a:t>
+            </a:r>
+            <a:endParaRPr lang="en-US" altLang="zh-CN" sz="1400" dirty="0"/>
+          </a:p>
+          <a:p>
+            <a:pPr marL="285750" indent="-285750">
+              <a:buFontTx/>
+              <a:buChar char="-"/>
+            </a:pPr>
+            <a:r>
+              <a:rPr lang="en-US" altLang="zh-CN" sz="1400" dirty="0"/>
+              <a:t>RandomizedSearchCV</a:t>
+            </a:r>
+            <a:endParaRPr lang="en-US" altLang="zh-CN" sz="1400" dirty="0"/>
+          </a:p>
+        </p:txBody>
+      </p:sp>
+      <p:graphicFrame>
+        <p:nvGraphicFramePr>
+          <p:cNvPr id="8" name="表格 7"/>
+          <p:cNvGraphicFramePr/>
+          <p:nvPr>
+            <p:custDataLst>
+              <p:tags r:id="rId1"/>
+            </p:custDataLst>
+          </p:nvPr>
+        </p:nvGraphicFramePr>
+        <p:xfrm>
+          <a:off x="3967480" y="1322705"/>
+          <a:ext cx="5086350" cy="2524760"/>
+        </p:xfrm>
+        <a:graphic>
+          <a:graphicData uri="http://schemas.openxmlformats.org/drawingml/2006/table">
+            <a:tbl>
+              <a:tblPr firstRow="1" bandRow="1">
+                <a:tableStyleId>{5C22544A-7EE6-4342-B048-85BDC9FD1C3A}</a:tableStyleId>
+              </a:tblPr>
+              <a:tblGrid>
+                <a:gridCol w="1017270"/>
+                <a:gridCol w="1017270"/>
+                <a:gridCol w="1017270"/>
+                <a:gridCol w="1017270"/>
+                <a:gridCol w="1017270"/>
+              </a:tblGrid>
+              <a:tr h="360680">
+                <a:tc>
+                  <a:txBody>
+                    <a:bodyPr/>
+                    <a:p>
+                      <a:pPr algn="ctr">
+                        <a:buNone/>
+                      </a:pPr>
+                      <a:endParaRPr lang="zh-CN" altLang="en-US" sz="1600"/>
+                    </a:p>
+                  </a:txBody>
+                  <a:tcPr/>
+                </a:tc>
+                <a:tc>
+                  <a:txBody>
+                    <a:bodyPr/>
+                    <a:p>
+                      <a:pPr algn="ctr">
+                        <a:buNone/>
+                      </a:pPr>
+                      <a:r>
+                        <a:rPr lang="en-US" altLang="zh-CN" sz="1400"/>
+                        <a:t>Acc</a:t>
+                      </a:r>
+                      <a:endParaRPr lang="en-US" altLang="zh-CN" sz="1400"/>
+                    </a:p>
+                    <a:p>
+                      <a:pPr algn="ctr">
+                        <a:buNone/>
+                      </a:pPr>
+                      <a:r>
+                        <a:rPr lang="en-US" altLang="zh-CN" sz="1400"/>
+                        <a:t>(Orig)</a:t>
+                      </a:r>
+                      <a:endParaRPr lang="en-US" altLang="zh-CN" sz="1400"/>
+                    </a:p>
+                  </a:txBody>
+                  <a:tcPr/>
+                </a:tc>
+                <a:tc>
+                  <a:txBody>
+                    <a:bodyPr/>
+                    <a:p>
+                      <a:pPr algn="ctr">
+                        <a:buNone/>
+                      </a:pPr>
+                      <a:r>
+                        <a:rPr lang="en-US" altLang="zh-CN" sz="1400"/>
+                        <a:t>Macro F1</a:t>
+                      </a:r>
+                      <a:endParaRPr lang="en-US" altLang="zh-CN" sz="1400"/>
+                    </a:p>
+                    <a:p>
+                      <a:pPr algn="ctr">
+                        <a:buNone/>
+                      </a:pPr>
+                      <a:r>
+                        <a:rPr lang="en-US" altLang="zh-CN" sz="1400"/>
+                        <a:t>(Orig)</a:t>
+                      </a:r>
+                      <a:endParaRPr lang="en-US" altLang="zh-CN" sz="1400"/>
+                    </a:p>
+                  </a:txBody>
+                  <a:tcPr/>
+                </a:tc>
+                <a:tc>
+                  <a:txBody>
+                    <a:bodyPr/>
+                    <a:p>
+                      <a:pPr algn="ctr">
+                        <a:buNone/>
+                      </a:pPr>
+                      <a:r>
+                        <a:rPr lang="en-US" altLang="zh-CN" sz="1400"/>
+                        <a:t>Acc (SMOTE)</a:t>
+                      </a:r>
+                      <a:endParaRPr lang="en-US" altLang="zh-CN" sz="1400"/>
+                    </a:p>
+                  </a:txBody>
+                  <a:tcPr/>
+                </a:tc>
+                <a:tc>
+                  <a:txBody>
+                    <a:bodyPr/>
+                    <a:p>
+                      <a:pPr algn="ctr">
+                        <a:buNone/>
+                      </a:pPr>
+                      <a:r>
+                        <a:rPr lang="en-US" altLang="zh-CN" sz="1400">
+                          <a:sym typeface="+mn-ea"/>
+                        </a:rPr>
+                        <a:t>Macro F1</a:t>
+                      </a:r>
+                      <a:endParaRPr lang="en-US" altLang="zh-CN" sz="1400"/>
+                    </a:p>
+                    <a:p>
+                      <a:pPr algn="ctr">
+                        <a:buNone/>
+                      </a:pPr>
+                      <a:r>
+                        <a:rPr lang="en-US" altLang="zh-CN" sz="1400">
+                          <a:sym typeface="+mn-ea"/>
+                        </a:rPr>
+                        <a:t>(SMOTE)</a:t>
+                      </a:r>
+                      <a:endParaRPr lang="zh-CN" altLang="en-US" sz="1400"/>
+                    </a:p>
+                  </a:txBody>
+                  <a:tcPr/>
+                </a:tc>
+              </a:tr>
+              <a:tr h="360680">
+                <a:tc>
+                  <a:txBody>
+                    <a:bodyPr/>
+                    <a:p>
+                      <a:pPr algn="ctr">
+                        <a:buNone/>
+                      </a:pPr>
+                      <a:r>
+                        <a:rPr lang="en-US" altLang="zh-CN" sz="1600"/>
+                        <a:t>Majority</a:t>
+                      </a:r>
+                      <a:endParaRPr lang="en-US" altLang="zh-CN" sz="1600"/>
+                    </a:p>
+                  </a:txBody>
+                  <a:tcPr/>
+                </a:tc>
+                <a:tc>
+                  <a:txBody>
+                    <a:bodyPr/>
+                    <a:p>
+                      <a:pPr algn="ctr">
+                        <a:buNone/>
+                      </a:pPr>
+                      <a:r>
+                        <a:rPr lang="en-US" altLang="zh-CN" sz="1600"/>
+                        <a:t>/</a:t>
+                      </a:r>
+                      <a:endParaRPr lang="en-US" altLang="zh-CN" sz="1600"/>
+                    </a:p>
+                  </a:txBody>
+                  <a:tcPr/>
+                </a:tc>
+                <a:tc>
+                  <a:txBody>
+                    <a:bodyPr/>
+                    <a:p>
+                      <a:pPr algn="ctr">
+                        <a:buNone/>
+                      </a:pPr>
+                      <a:r>
+                        <a:rPr lang="en-US" altLang="zh-CN" sz="1600"/>
+                        <a:t>/</a:t>
+                      </a:r>
+                      <a:endParaRPr lang="en-US" altLang="zh-CN" sz="1600"/>
+                    </a:p>
+                  </a:txBody>
+                  <a:tcPr/>
+                </a:tc>
+                <a:tc>
+                  <a:txBody>
+                    <a:bodyPr/>
+                    <a:p>
+                      <a:pPr algn="ctr">
+                        <a:buNone/>
+                      </a:pPr>
+                      <a:r>
+                        <a:rPr lang="en-US" altLang="zh-CN" sz="1600">
+                          <a:sym typeface="+mn-ea"/>
+                        </a:rPr>
+                        <a:t>21.0%</a:t>
+                      </a:r>
+                      <a:endParaRPr lang="en-US" altLang="zh-CN" sz="1600"/>
+                    </a:p>
+                  </a:txBody>
+                  <a:tcPr/>
+                </a:tc>
+                <a:tc>
+                  <a:txBody>
+                    <a:bodyPr/>
+                    <a:p>
+                      <a:pPr algn="ctr">
+                        <a:buNone/>
+                      </a:pPr>
+                      <a:r>
+                        <a:rPr lang="en-US" altLang="zh-CN" sz="1600"/>
+                        <a:t>0.073</a:t>
+                      </a:r>
+                      <a:endParaRPr lang="en-US" altLang="zh-CN" sz="1600"/>
+                    </a:p>
+                  </a:txBody>
+                  <a:tcPr/>
+                </a:tc>
+              </a:tr>
+              <a:tr h="360680">
+                <a:tc>
+                  <a:txBody>
+                    <a:bodyPr/>
+                    <a:p>
+                      <a:pPr algn="ctr">
+                        <a:buNone/>
+                      </a:pPr>
+                      <a:r>
+                        <a:rPr lang="en-US" altLang="zh-CN" sz="1600"/>
+                        <a:t>LogReg</a:t>
+                      </a:r>
+                      <a:endParaRPr lang="en-US" altLang="zh-CN" sz="1600"/>
+                    </a:p>
+                  </a:txBody>
+                  <a:tcPr/>
+                </a:tc>
+                <a:tc>
+                  <a:txBody>
+                    <a:bodyPr/>
+                    <a:p>
+                      <a:pPr algn="ctr">
+                        <a:buNone/>
+                      </a:pPr>
+                      <a:r>
+                        <a:rPr lang="en-US" altLang="zh-CN" sz="1600"/>
+                        <a:t>/</a:t>
+                      </a:r>
+                      <a:endParaRPr lang="en-US" altLang="zh-CN" sz="1600"/>
+                    </a:p>
+                  </a:txBody>
+                  <a:tcPr/>
+                </a:tc>
+                <a:tc>
+                  <a:txBody>
+                    <a:bodyPr/>
+                    <a:p>
+                      <a:pPr algn="ctr">
+                        <a:buNone/>
+                      </a:pPr>
+                      <a:r>
+                        <a:rPr lang="en-US" altLang="zh-CN" sz="1600"/>
+                        <a:t>/</a:t>
+                      </a:r>
+                      <a:endParaRPr lang="en-US" altLang="zh-CN" sz="1600"/>
+                    </a:p>
+                  </a:txBody>
+                  <a:tcPr/>
+                </a:tc>
+                <a:tc>
+                  <a:txBody>
+                    <a:bodyPr/>
+                    <a:p>
+                      <a:pPr algn="ctr">
+                        <a:buNone/>
+                      </a:pPr>
+                      <a:r>
+                        <a:rPr lang="en-US" altLang="zh-CN" sz="1600"/>
+                        <a:t>21.0%</a:t>
+                      </a:r>
+                      <a:endParaRPr lang="en-US" altLang="zh-CN" sz="1600"/>
+                    </a:p>
+                  </a:txBody>
+                  <a:tcPr/>
+                </a:tc>
+                <a:tc>
+                  <a:txBody>
+                    <a:bodyPr/>
+                    <a:p>
+                      <a:pPr algn="ctr">
+                        <a:buNone/>
+                      </a:pPr>
+                      <a:r>
+                        <a:rPr lang="en-US" altLang="zh-CN" sz="1600"/>
+                        <a:t>0.073</a:t>
+                      </a:r>
+                      <a:endParaRPr lang="en-US" altLang="zh-CN" sz="1600"/>
+                    </a:p>
+                  </a:txBody>
+                  <a:tcPr/>
+                </a:tc>
+              </a:tr>
+              <a:tr h="360680">
+                <a:tc>
+                  <a:txBody>
+                    <a:bodyPr/>
+                    <a:p>
+                      <a:pPr algn="ctr">
+                        <a:buNone/>
+                      </a:pPr>
+                      <a:r>
+                        <a:rPr lang="en-US" altLang="zh-CN" sz="1600"/>
+                        <a:t>RF</a:t>
+                      </a:r>
+                      <a:endParaRPr lang="en-US" altLang="zh-CN" sz="1600"/>
+                    </a:p>
+                  </a:txBody>
+                  <a:tcPr/>
+                </a:tc>
+                <a:tc>
+                  <a:txBody>
+                    <a:bodyPr/>
+                    <a:p>
+                      <a:pPr algn="ctr">
+                        <a:buNone/>
+                      </a:pPr>
+                      <a:r>
+                        <a:rPr lang="en-US" altLang="zh-CN" sz="1600"/>
+                        <a:t>12.9%</a:t>
+                      </a:r>
+                      <a:endParaRPr lang="en-US" altLang="zh-CN" sz="1600"/>
+                    </a:p>
+                  </a:txBody>
+                  <a:tcPr/>
+                </a:tc>
+                <a:tc>
+                  <a:txBody>
+                    <a:bodyPr/>
+                    <a:p>
+                      <a:pPr algn="ctr">
+                        <a:buNone/>
+                      </a:pPr>
+                      <a:r>
+                        <a:rPr lang="en-US" altLang="zh-CN" sz="1600"/>
+                        <a:t>0.127</a:t>
+                      </a:r>
+                      <a:endParaRPr lang="en-US" altLang="zh-CN" sz="1600"/>
+                    </a:p>
+                  </a:txBody>
+                  <a:tcPr/>
+                </a:tc>
+                <a:tc>
+                  <a:txBody>
+                    <a:bodyPr/>
+                    <a:p>
+                      <a:pPr algn="ctr">
+                        <a:buNone/>
+                      </a:pPr>
+                      <a:r>
+                        <a:rPr lang="en-US" altLang="zh-CN" sz="1600"/>
+                        <a:t>12.7%</a:t>
+                      </a:r>
+                      <a:endParaRPr lang="en-US" altLang="zh-CN" sz="1600"/>
+                    </a:p>
+                  </a:txBody>
+                  <a:tcPr/>
+                </a:tc>
+                <a:tc>
+                  <a:txBody>
+                    <a:bodyPr/>
+                    <a:p>
+                      <a:pPr algn="ctr">
+                        <a:buNone/>
+                      </a:pPr>
+                      <a:r>
+                        <a:rPr lang="en-US" altLang="zh-CN" sz="1600"/>
+                        <a:t>0.125</a:t>
+                      </a:r>
+                      <a:endParaRPr lang="en-US" altLang="zh-CN" sz="1600"/>
+                    </a:p>
+                  </a:txBody>
+                  <a:tcPr/>
+                </a:tc>
+              </a:tr>
+              <a:tr h="360680">
+                <a:tc>
+                  <a:txBody>
+                    <a:bodyPr/>
+                    <a:p>
+                      <a:pPr algn="ctr">
+                        <a:buNone/>
+                      </a:pPr>
+                      <a:r>
+                        <a:rPr lang="en-US" altLang="zh-CN" sz="1600"/>
+                        <a:t>AdaBoost</a:t>
+                      </a:r>
+                      <a:endParaRPr lang="en-US" altLang="zh-CN" sz="1600"/>
+                    </a:p>
+                  </a:txBody>
+                  <a:tcPr/>
+                </a:tc>
+                <a:tc>
+                  <a:txBody>
+                    <a:bodyPr/>
+                    <a:p>
+                      <a:pPr algn="ctr">
+                        <a:buNone/>
+                      </a:pPr>
+                      <a:r>
+                        <a:rPr lang="en-US" altLang="zh-CN" sz="1600"/>
+                        <a:t>12.6%</a:t>
+                      </a:r>
+                      <a:endParaRPr lang="en-US" altLang="zh-CN" sz="1600"/>
+                    </a:p>
+                  </a:txBody>
+                  <a:tcPr/>
+                </a:tc>
+                <a:tc>
+                  <a:txBody>
+                    <a:bodyPr/>
+                    <a:p>
+                      <a:pPr algn="ctr">
+                        <a:buNone/>
+                      </a:pPr>
+                      <a:r>
+                        <a:rPr lang="en-US" altLang="zh-CN" sz="1600"/>
+                        <a:t>0.127</a:t>
+                      </a:r>
+                      <a:endParaRPr lang="en-US" altLang="zh-CN" sz="1600"/>
+                    </a:p>
+                  </a:txBody>
+                  <a:tcPr/>
+                </a:tc>
+                <a:tc>
+                  <a:txBody>
+                    <a:bodyPr/>
+                    <a:p>
+                      <a:pPr algn="ctr">
+                        <a:buNone/>
+                      </a:pPr>
+                      <a:r>
+                        <a:rPr lang="en-US" altLang="zh-CN" sz="1600"/>
+                        <a:t>11.0%</a:t>
+                      </a:r>
+                      <a:endParaRPr lang="en-US" altLang="zh-CN" sz="1600"/>
+                    </a:p>
+                  </a:txBody>
+                  <a:tcPr/>
+                </a:tc>
+                <a:tc>
+                  <a:txBody>
+                    <a:bodyPr/>
+                    <a:p>
+                      <a:pPr algn="ctr">
+                        <a:buNone/>
+                      </a:pPr>
+                      <a:r>
+                        <a:rPr lang="en-US" altLang="zh-CN" sz="1600"/>
+                        <a:t>0.112</a:t>
+                      </a:r>
+                      <a:endParaRPr lang="en-US" altLang="zh-CN" sz="1600"/>
+                    </a:p>
+                  </a:txBody>
+                  <a:tcPr/>
+                </a:tc>
+              </a:tr>
+              <a:tr h="360680">
+                <a:tc>
+                  <a:txBody>
+                    <a:bodyPr/>
+                    <a:p>
+                      <a:pPr algn="ctr">
+                        <a:buNone/>
+                      </a:pPr>
+                      <a:r>
+                        <a:rPr lang="en-US" altLang="zh-CN" sz="1600"/>
+                        <a:t>XG</a:t>
+                      </a:r>
+                      <a:endParaRPr lang="en-US" altLang="zh-CN" sz="1600"/>
+                    </a:p>
+                  </a:txBody>
+                  <a:tcPr/>
+                </a:tc>
+                <a:tc>
+                  <a:txBody>
+                    <a:bodyPr/>
+                    <a:p>
+                      <a:pPr algn="ctr">
+                        <a:buNone/>
+                      </a:pPr>
+                      <a:r>
+                        <a:rPr lang="en-US" altLang="zh-CN" sz="1600"/>
+                        <a:t>7.2%</a:t>
+                      </a:r>
+                      <a:endParaRPr lang="en-US" altLang="zh-CN" sz="1600"/>
+                    </a:p>
+                  </a:txBody>
+                  <a:tcPr/>
+                </a:tc>
+                <a:tc>
+                  <a:txBody>
+                    <a:bodyPr/>
+                    <a:p>
+                      <a:pPr algn="ctr">
+                        <a:buNone/>
+                      </a:pPr>
+                      <a:r>
+                        <a:rPr lang="en-US" altLang="zh-CN" sz="1600"/>
+                        <a:t>0.076</a:t>
+                      </a:r>
+                      <a:endParaRPr lang="en-US" altLang="zh-CN" sz="1600"/>
+                    </a:p>
+                  </a:txBody>
+                  <a:tcPr/>
+                </a:tc>
+                <a:tc>
+                  <a:txBody>
+                    <a:bodyPr/>
+                    <a:p>
+                      <a:pPr algn="ctr">
+                        <a:buNone/>
+                      </a:pPr>
+                      <a:r>
+                        <a:rPr lang="en-US" altLang="zh-CN" sz="1600"/>
+                        <a:t>16.4%</a:t>
+                      </a:r>
+                      <a:endParaRPr lang="en-US" altLang="zh-CN" sz="1600"/>
+                    </a:p>
+                  </a:txBody>
+                  <a:tcPr/>
+                </a:tc>
+                <a:tc>
+                  <a:txBody>
+                    <a:bodyPr/>
+                    <a:p>
+                      <a:pPr algn="ctr">
+                        <a:buNone/>
+                      </a:pPr>
+                      <a:r>
+                        <a:rPr lang="en-US" altLang="zh-CN" sz="1600"/>
+                        <a:t>0.125</a:t>
+                      </a:r>
+                      <a:endParaRPr lang="en-US" altLang="zh-CN" sz="1600"/>
+                    </a:p>
+                  </a:txBody>
+                  <a:tcPr/>
+                </a:tc>
+              </a:tr>
+              <a:tr h="360680">
+                <a:tc>
+                  <a:txBody>
+                    <a:bodyPr/>
+                    <a:p>
+                      <a:pPr algn="ctr">
+                        <a:buNone/>
+                      </a:pPr>
+                      <a:r>
+                        <a:rPr lang="en-US" altLang="zh-CN" sz="1600"/>
+                        <a:t>SVM</a:t>
+                      </a:r>
+                      <a:endParaRPr lang="en-US" altLang="zh-CN" sz="1600"/>
+                    </a:p>
+                  </a:txBody>
+                  <a:tcPr/>
+                </a:tc>
+                <a:tc>
+                  <a:txBody>
+                    <a:bodyPr/>
+                    <a:p>
+                      <a:pPr algn="ctr">
+                        <a:buNone/>
+                      </a:pPr>
+                      <a:r>
+                        <a:rPr lang="en-US" altLang="zh-CN" sz="1600"/>
+                        <a:t>4.1%</a:t>
+                      </a:r>
+                      <a:endParaRPr lang="en-US" altLang="zh-CN" sz="1600"/>
+                    </a:p>
+                  </a:txBody>
+                  <a:tcPr/>
+                </a:tc>
+                <a:tc>
+                  <a:txBody>
+                    <a:bodyPr/>
+                    <a:p>
+                      <a:pPr algn="ctr">
+                        <a:buNone/>
+                      </a:pPr>
+                      <a:r>
+                        <a:rPr lang="en-US" altLang="zh-CN" sz="1600"/>
+                        <a:t>0.044</a:t>
+                      </a:r>
+                      <a:endParaRPr lang="en-US" altLang="zh-CN" sz="1600"/>
+                    </a:p>
+                  </a:txBody>
+                  <a:tcPr/>
+                </a:tc>
+                <a:tc>
+                  <a:txBody>
+                    <a:bodyPr/>
+                    <a:p>
+                      <a:pPr algn="ctr">
+                        <a:buNone/>
+                      </a:pPr>
+                      <a:r>
+                        <a:rPr lang="en-US" altLang="zh-CN" sz="1600"/>
+                        <a:t>4.4%</a:t>
+                      </a:r>
+                      <a:endParaRPr lang="en-US" altLang="zh-CN" sz="1600"/>
+                    </a:p>
+                  </a:txBody>
+                  <a:tcPr/>
+                </a:tc>
+                <a:tc>
+                  <a:txBody>
+                    <a:bodyPr/>
+                    <a:p>
+                      <a:pPr algn="ctr">
+                        <a:buNone/>
+                      </a:pPr>
+                      <a:r>
+                        <a:rPr lang="en-US" altLang="zh-CN" sz="1600"/>
+                        <a:t>0.052</a:t>
+                      </a:r>
+                      <a:endParaRPr lang="en-US" altLang="zh-CN" sz="1600"/>
+                    </a:p>
+                  </a:txBody>
+                  <a:tcPr/>
+                </a:tc>
+              </a:tr>
+            </a:tbl>
+          </a:graphicData>
+        </a:graphic>
+      </p:graphicFrame>
+    </p:spTree>
+  </p:cSld>
+  <p:clrMapOvr>
+    <a:masterClrMapping/>
+  </p:clrMapOvr>
+</p:sld>
+</file>
+
+<file path=ppt/slides/slide16.xml><?xml version="1.0" encoding="utf-8"?>
+<p:sld xmlns:a="http://schemas.openxmlformats.org/drawingml/2006/main" xmlns:r="http://schemas.openxmlformats.org/officeDocument/2006/relationships" xmlns:p="http://schemas.openxmlformats.org/presentationml/2006/main">
+  <p:cSld>
+    <p:spTree>
+      <p:nvGrpSpPr>
+        <p:cNvPr id="1" name=""/>
+        <p:cNvGrpSpPr/>
+        <p:nvPr/>
+      </p:nvGrpSpPr>
+      <p:grpSpPr/>
+      <p:sp>
+        <p:nvSpPr>
+          <p:cNvPr id="2" name="标题 1"/>
+          <p:cNvSpPr>
+            <a:spLocks noGrp="1"/>
+          </p:cNvSpPr>
+          <p:nvPr>
+            <p:ph type="title"/>
+          </p:nvPr>
+        </p:nvSpPr>
+        <p:spPr/>
+        <p:txBody>
+          <a:bodyPr/>
+          <a:p>
+            <a:r>
+              <a:rPr lang="en-US" altLang="zh-CN"/>
+              <a:t>Overfitting &amp; Effect of SMOTE</a:t>
+            </a:r>
+            <a:endParaRPr lang="en-US" altLang="zh-CN"/>
+          </a:p>
+        </p:txBody>
+      </p:sp>
+      <p:sp>
+        <p:nvSpPr>
+          <p:cNvPr id="4" name="灯片编号占位符 3"/>
+          <p:cNvSpPr>
+            <a:spLocks noGrp="1"/>
+          </p:cNvSpPr>
+          <p:nvPr>
+            <p:ph type="sldNum" sz="quarter" idx="12"/>
+          </p:nvPr>
+        </p:nvSpPr>
+        <p:spPr/>
+        <p:txBody>
+          <a:bodyPr/>
+          <a:p>
+            <a:fld id="{8A758EFE-665F-4341-B5B8-2DAEADA52F6C}" type="slidenum">
+              <a:rPr lang="en-US" smtClean="0"/>
+            </a:fld>
+            <a:endParaRPr lang="en-US" dirty="0"/>
+          </a:p>
+        </p:txBody>
+      </p:sp>
+      <p:sp>
+        <p:nvSpPr>
+          <p:cNvPr id="6" name="TextBox 5"/>
+          <p:cNvSpPr txBox="1"/>
+          <p:nvPr/>
+        </p:nvSpPr>
+        <p:spPr>
+          <a:xfrm>
+            <a:off x="250825" y="884555"/>
+            <a:ext cx="5509260" cy="2953385"/>
+          </a:xfrm>
+          <a:prstGeom prst="rect">
+            <a:avLst/>
+          </a:prstGeom>
+          <a:noFill/>
+        </p:spPr>
+        <p:txBody>
+          <a:bodyPr wrap="square" rtlCol="0">
+            <a:spAutoFit/>
+          </a:bodyPr>
+          <a:lstStyle/>
+          <a:p>
+            <a:r>
+              <a:rPr lang="en-US" dirty="0">
+                <a:solidFill>
+                  <a:schemeClr val="accent3"/>
+                </a:solidFill>
+              </a:rPr>
+              <a:t>Overfitting</a:t>
+            </a:r>
+            <a:endParaRPr lang="en-US" dirty="0">
+              <a:solidFill>
+                <a:schemeClr val="accent3"/>
+              </a:solidFill>
+            </a:endParaRPr>
+          </a:p>
+          <a:p>
+            <a:r>
+              <a:rPr lang="en-US" altLang="zh-CN" sz="1400" dirty="0"/>
+              <a:t>Good Training Result:</a:t>
+            </a:r>
+            <a:endParaRPr lang="en-US" altLang="zh-CN" sz="1400" dirty="0"/>
+          </a:p>
+          <a:p>
+            <a:pPr marL="285750" indent="-285750">
+              <a:buFontTx/>
+              <a:buChar char="-"/>
+            </a:pPr>
+            <a:r>
+              <a:rPr lang="en-US" altLang="zh-CN" sz="1400" dirty="0"/>
+              <a:t>RF (SMOTE):</a:t>
+            </a:r>
+            <a:r>
+              <a:rPr lang="en-US" altLang="zh-CN" sz="1400" b="1" dirty="0"/>
+              <a:t> 94.7% train accuracy,  0.95 macro F1</a:t>
+            </a:r>
+            <a:endParaRPr lang="en-US" sz="1400" b="1" dirty="0"/>
+          </a:p>
+          <a:p>
+            <a:pPr marL="285750" indent="-285750">
+              <a:buFontTx/>
+              <a:buChar char="-"/>
+            </a:pPr>
+            <a:r>
+              <a:rPr lang="en-US" altLang="zh-CN" sz="1400" dirty="0"/>
+              <a:t>AdaBoost (SMOTE): </a:t>
+            </a:r>
+            <a:r>
+              <a:rPr lang="en-US" altLang="zh-CN" sz="1400" b="1" dirty="0"/>
+              <a:t>97.4% train accuracy,  0.97 </a:t>
+            </a:r>
+            <a:r>
+              <a:rPr lang="en-US" altLang="zh-CN" sz="1400" b="1" dirty="0">
+                <a:sym typeface="+mn-ea"/>
+              </a:rPr>
+              <a:t>macro F1</a:t>
+            </a:r>
+            <a:endParaRPr lang="en-US" sz="1400" dirty="0"/>
+          </a:p>
+          <a:p>
+            <a:pPr marL="285750" indent="-285750">
+              <a:buFontTx/>
+              <a:buChar char="-"/>
+            </a:pPr>
+            <a:endParaRPr lang="en-US" altLang="zh-CN" sz="1400" dirty="0"/>
+          </a:p>
+          <a:p>
+            <a:pPr indent="0">
+              <a:buFontTx/>
+              <a:buNone/>
+            </a:pPr>
+            <a:r>
+              <a:rPr lang="en-US" sz="1400" dirty="0"/>
+              <a:t>Weak Generalization to Test Set</a:t>
+            </a:r>
+            <a:endParaRPr lang="en-US" sz="1400" dirty="0"/>
+          </a:p>
+          <a:p>
+            <a:pPr marL="285750" indent="-285750">
+              <a:buFontTx/>
+              <a:buChar char="-"/>
+            </a:pPr>
+            <a:r>
+              <a:rPr lang="en-US" altLang="zh-CN" sz="1400" dirty="0"/>
+              <a:t>Only </a:t>
+            </a:r>
+            <a:r>
+              <a:rPr lang="en-US" altLang="zh-CN" sz="1400" b="1" dirty="0"/>
+              <a:t>7–16%</a:t>
+            </a:r>
+            <a:r>
+              <a:rPr lang="en-US" altLang="zh-CN" sz="1400" dirty="0"/>
+              <a:t> accuracy across all models</a:t>
+            </a:r>
+            <a:endParaRPr lang="en-US" altLang="zh-CN" sz="1400" dirty="0"/>
+          </a:p>
+          <a:p>
+            <a:pPr indent="0">
+              <a:buFontTx/>
+              <a:buNone/>
+            </a:pPr>
+            <a:endParaRPr lang="en-US" sz="1400" dirty="0">
+              <a:solidFill>
+                <a:schemeClr val="accent3"/>
+              </a:solidFill>
+            </a:endParaRPr>
+          </a:p>
+          <a:p>
+            <a:pPr indent="0">
+              <a:buFontTx/>
+              <a:buNone/>
+            </a:pPr>
+            <a:r>
+              <a:rPr lang="en-US" altLang="zh-CN" sz="1400" dirty="0"/>
+              <a:t>Imbalance handling</a:t>
+            </a:r>
+            <a:endParaRPr lang="en-US" altLang="zh-CN" sz="1400" dirty="0"/>
+          </a:p>
+          <a:p>
+            <a:pPr marL="285750" indent="-285750">
+              <a:buFontTx/>
+              <a:buChar char="-"/>
+            </a:pPr>
+            <a:r>
+              <a:rPr lang="en-US" altLang="zh-CN" sz="1400" dirty="0"/>
+              <a:t>Class / sample weights: improve training metrics, small gains on test</a:t>
+            </a:r>
+            <a:endParaRPr lang="en-US" altLang="zh-CN" sz="1400" dirty="0"/>
+          </a:p>
+          <a:p>
+            <a:pPr marL="285750" indent="-285750">
+              <a:buFontTx/>
+              <a:buChar char="-"/>
+            </a:pPr>
+            <a:r>
+              <a:rPr lang="en-US" altLang="zh-CN" sz="1400" dirty="0"/>
+              <a:t>SMOTE: makes training easier, slightly improves XGBoost, but</a:t>
+            </a:r>
+            <a:endParaRPr lang="en-US" altLang="zh-CN" sz="1400" dirty="0"/>
+          </a:p>
+          <a:p>
+            <a:pPr marL="742950" lvl="1" indent="-285750">
+              <a:buFontTx/>
+              <a:buChar char="-"/>
+            </a:pPr>
+            <a:r>
+              <a:rPr lang="en-US" altLang="zh-CN" sz="1400" dirty="0"/>
+              <a:t>Still below majority baseline accuracy</a:t>
+            </a:r>
+            <a:endParaRPr lang="en-US" altLang="zh-CN" sz="1400" dirty="0"/>
+          </a:p>
+          <a:p>
+            <a:pPr marL="742950" lvl="1" indent="-285750">
+              <a:buFontTx/>
+              <a:buChar char="-"/>
+            </a:pPr>
+            <a:r>
+              <a:rPr lang="en-US" altLang="zh-CN" sz="1400" dirty="0"/>
+              <a:t>Rare shapes remain very hard to predict</a:t>
+            </a:r>
+            <a:endParaRPr lang="en-US" altLang="zh-CN" sz="1400" dirty="0"/>
+          </a:p>
+        </p:txBody>
+      </p:sp>
+    </p:spTree>
+  </p:cSld>
+  <p:clrMapOvr>
+    <a:masterClrMapping/>
+  </p:clrMapOvr>
+</p:sld>
+</file>
+
+<file path=ppt/slides/slide17.xml><?xml version="1.0" encoding="utf-8"?>
+<p:sld xmlns:a="http://schemas.openxmlformats.org/drawingml/2006/main" xmlns:r="http://schemas.openxmlformats.org/officeDocument/2006/relationships" xmlns:p="http://schemas.openxmlformats.org/presentationml/2006/main">
+  <p:cSld>
+    <p:spTree>
+      <p:nvGrpSpPr>
+        <p:cNvPr id="1" name=""/>
+        <p:cNvGrpSpPr/>
+        <p:nvPr/>
+      </p:nvGrpSpPr>
+      <p:grpSpPr/>
+      <p:sp>
+        <p:nvSpPr>
+          <p:cNvPr id="2" name="标题 1"/>
+          <p:cNvSpPr>
+            <a:spLocks noGrp="1"/>
+          </p:cNvSpPr>
+          <p:nvPr>
+            <p:ph type="title"/>
+          </p:nvPr>
+        </p:nvSpPr>
+        <p:spPr/>
+        <p:txBody>
+          <a:bodyPr/>
+          <a:p>
+            <a:r>
+              <a:rPr lang="en-US" altLang="zh-CN"/>
+              <a:t>Conclusion</a:t>
+            </a:r>
+            <a:endParaRPr lang="en-US" altLang="zh-CN"/>
+          </a:p>
+        </p:txBody>
+      </p:sp>
+      <p:sp>
+        <p:nvSpPr>
+          <p:cNvPr id="4" name="灯片编号占位符 3"/>
+          <p:cNvSpPr>
+            <a:spLocks noGrp="1"/>
+          </p:cNvSpPr>
+          <p:nvPr>
+            <p:ph type="sldNum" sz="quarter" idx="12"/>
+          </p:nvPr>
+        </p:nvSpPr>
+        <p:spPr/>
+        <p:txBody>
+          <a:bodyPr/>
+          <a:p>
+            <a:fld id="{8A758EFE-665F-4341-B5B8-2DAEADA52F6C}" type="slidenum">
+              <a:rPr lang="en-US" smtClean="0"/>
+            </a:fld>
+            <a:endParaRPr lang="en-US" dirty="0"/>
+          </a:p>
+        </p:txBody>
+      </p:sp>
+      <p:sp>
+        <p:nvSpPr>
+          <p:cNvPr id="6" name="TextBox 5"/>
+          <p:cNvSpPr txBox="1"/>
+          <p:nvPr/>
+        </p:nvSpPr>
+        <p:spPr>
+          <a:xfrm>
+            <a:off x="250825" y="884555"/>
+            <a:ext cx="5509260" cy="3014980"/>
+          </a:xfrm>
+          <a:prstGeom prst="rect">
+            <a:avLst/>
+          </a:prstGeom>
+          <a:noFill/>
+        </p:spPr>
+        <p:txBody>
+          <a:bodyPr wrap="square" rtlCol="0">
+            <a:spAutoFit/>
+          </a:bodyPr>
+          <a:lstStyle/>
+          <a:p>
+            <a:r>
+              <a:rPr lang="en-US" altLang="zh-CN" dirty="0">
+                <a:solidFill>
+                  <a:schemeClr val="accent3"/>
+                </a:solidFill>
+              </a:rPr>
+              <a:t>Main Takeaways</a:t>
+            </a:r>
+            <a:endParaRPr lang="en-US" altLang="zh-CN" dirty="0">
+              <a:solidFill>
+                <a:schemeClr val="accent3"/>
+              </a:solidFill>
+            </a:endParaRPr>
+          </a:p>
+          <a:p>
+            <a:pPr marL="285750" indent="-285750">
+              <a:buFont typeface="Arial" panose="020B0604020202020204" pitchFamily="34" charset="0"/>
+              <a:buChar char="•"/>
+            </a:pPr>
+            <a:r>
+              <a:rPr lang="en-US" altLang="zh-CN" sz="1400" dirty="0"/>
+              <a:t>Linear baselines + current features ≈ majority classifier</a:t>
+            </a:r>
+            <a:endParaRPr lang="en-US" altLang="zh-CN" sz="1400" dirty="0"/>
+          </a:p>
+          <a:p>
+            <a:pPr marL="285750" indent="-285750">
+              <a:buFont typeface="Arial" panose="020B0604020202020204" pitchFamily="34" charset="0"/>
+              <a:buChar char="•"/>
+            </a:pPr>
+            <a:r>
+              <a:rPr lang="en-US" altLang="zh-CN" sz="1400" dirty="0"/>
+              <a:t>Nonlinear ensembles + imbalance tricks</a:t>
+            </a:r>
+            <a:endParaRPr lang="en-US" altLang="zh-CN" sz="1400" dirty="0"/>
+          </a:p>
+          <a:p>
+            <a:pPr marL="742950" lvl="1" indent="-285750">
+              <a:buFontTx/>
+              <a:buChar char="-"/>
+            </a:pPr>
+            <a:r>
+              <a:rPr lang="en-US" altLang="zh-CN" sz="1400" dirty="0"/>
+              <a:t>High training F1, but </a:t>
+            </a:r>
+            <a:r>
+              <a:rPr lang="en-US" altLang="zh-CN" sz="1400" b="1" dirty="0"/>
+              <a:t>test accuracy &lt; 21% baseline</a:t>
+            </a:r>
+            <a:endParaRPr lang="en-US" altLang="zh-CN" sz="1400" dirty="0"/>
+          </a:p>
+          <a:p>
+            <a:pPr marL="742950" lvl="1" indent="-285750">
+              <a:buFontTx/>
+              <a:buChar char="-"/>
+            </a:pPr>
+            <a:r>
+              <a:rPr lang="en-US" altLang="zh-CN" sz="1400" dirty="0"/>
+              <a:t>Rare shapes remain difficult to predict</a:t>
+            </a:r>
+            <a:endParaRPr lang="en-US" altLang="zh-CN" sz="1400" dirty="0"/>
+          </a:p>
+          <a:p>
+            <a:pPr marL="285750" indent="-285750">
+              <a:buFont typeface="Arial" panose="020B0604020202020204" pitchFamily="34" charset="0"/>
+              <a:buChar char="•"/>
+            </a:pPr>
+            <a:r>
+              <a:rPr lang="en-US" altLang="zh-CN" sz="1400" dirty="0"/>
+              <a:t>Main bottleneck: limited signal in current features</a:t>
+            </a:r>
+            <a:endParaRPr lang="en-US" altLang="zh-CN" sz="1400" dirty="0"/>
+          </a:p>
+          <a:p>
+            <a:pPr marL="285750" indent="-285750">
+              <a:buFontTx/>
+              <a:buChar char="-"/>
+            </a:pPr>
+            <a:endParaRPr lang="en-US" altLang="zh-CN" sz="1400" dirty="0"/>
+          </a:p>
+          <a:p>
+            <a:pPr indent="0">
+              <a:buFontTx/>
+              <a:buNone/>
+            </a:pPr>
+            <a:r>
+              <a:rPr lang="en-US" altLang="zh-CN" sz="1800" dirty="0">
+                <a:solidFill>
+                  <a:schemeClr val="accent3"/>
+                </a:solidFill>
+                <a:sym typeface="+mn-ea"/>
+              </a:rPr>
+              <a:t>Future Works</a:t>
+            </a:r>
+            <a:endParaRPr lang="en-US" altLang="zh-CN" sz="1800" dirty="0">
+              <a:solidFill>
+                <a:schemeClr val="accent3"/>
+              </a:solidFill>
+            </a:endParaRPr>
+          </a:p>
+          <a:p>
+            <a:pPr marL="285750" indent="-285750">
+              <a:buFont typeface="Arial" panose="020B0604020202020204" pitchFamily="34" charset="0"/>
+              <a:buChar char="•"/>
+            </a:pPr>
+            <a:r>
+              <a:rPr lang="en-US" altLang="zh-CN" sz="1400" dirty="0"/>
+              <a:t>Incorporating additional datasets covering other relevant factors</a:t>
+            </a:r>
+            <a:endParaRPr lang="en-US" altLang="zh-CN" sz="1400" dirty="0"/>
+          </a:p>
+          <a:p>
+            <a:pPr marL="285750" indent="-285750">
+              <a:buFont typeface="Arial" panose="020B0604020202020204" pitchFamily="34" charset="0"/>
+              <a:buChar char="•"/>
+            </a:pPr>
+            <a:r>
+              <a:rPr lang="en-US" altLang="zh-CN" sz="1400" dirty="0"/>
+              <a:t>Adding textual descriptions as a new feature and apply NLP techniques.</a:t>
+            </a:r>
+            <a:endParaRPr lang="en-US" altLang="zh-CN" sz="1400" dirty="0"/>
+          </a:p>
+          <a:p>
+            <a:pPr marL="285750" indent="-285750">
+              <a:buFont typeface="Arial" panose="020B0604020202020204" pitchFamily="34" charset="0"/>
+              <a:buChar char="•"/>
+            </a:pPr>
+            <a:r>
+              <a:rPr lang="en-US" altLang="zh-CN" sz="1400" dirty="0">
+                <a:sym typeface="+mn-ea"/>
+              </a:rPr>
+              <a:t>Neural networks for richer nonlinear representations.</a:t>
+            </a:r>
+            <a:endParaRPr lang="en-US" altLang="zh-CN" sz="1400" dirty="0"/>
+          </a:p>
+          <a:p>
+            <a:pPr marL="285750" indent="-285750">
+              <a:buFont typeface="Arial" panose="020B0604020202020204" pitchFamily="34" charset="0"/>
+              <a:buChar char="•"/>
+            </a:pPr>
+            <a:endParaRPr lang="en-US" altLang="zh-CN" sz="1400" dirty="0"/>
+          </a:p>
+        </p:txBody>
+      </p:sp>
+    </p:spTree>
+  </p:cSld>
+  <p:clrMapOvr>
+    <a:masterClrMapping/>
+  </p:clrMapOvr>
+</p:sld>
+</file>
+
+<file path=ppt/slides/slide18.xml><?xml version="1.0" encoding="utf-8"?>
+<p:sld xmlns:a="http://schemas.openxmlformats.org/drawingml/2006/main" xmlns:r="http://schemas.openxmlformats.org/officeDocument/2006/relationships" xmlns:p="http://schemas.openxmlformats.org/presentationml/2006/main">
+  <p:cSld>
+    <p:spTree>
+      <p:nvGrpSpPr>
+        <p:cNvPr id="1" name=""/>
+        <p:cNvGrpSpPr/>
+        <p:nvPr/>
+      </p:nvGrpSpPr>
+      <p:grpSpPr>
+        <a:xfrm>
+          <a:off x="0" y="0"/>
+          <a:ext cx="0" cy="0"/>
+          <a:chOff x="0" y="0"/>
+          <a:chExt cx="0" cy="0"/>
+        </a:xfrm>
+      </p:grpSpPr>
+      <p:sp>
+        <p:nvSpPr>
+          <p:cNvPr id="2" name="Slide Number Placeholder 1"/>
+          <p:cNvSpPr>
+            <a:spLocks noGrp="1"/>
+          </p:cNvSpPr>
+          <p:nvPr>
+            <p:ph type="sldNum" sz="quarter" idx="12"/>
+          </p:nvPr>
+        </p:nvSpPr>
+        <p:spPr/>
+        <p:txBody>
+          <a:bodyPr/>
+          <a:lstStyle/>
+          <a:p>
+            <a:fld id="{8A758EFE-665F-4341-B5B8-2DAEADA52F6C}" type="slidenum">
+              <a:rPr lang="en-US" smtClean="0"/>
+            </a:fld>
+            <a:endParaRPr lang="en-US" dirty="0"/>
+          </a:p>
+        </p:txBody>
+      </p:sp>
+      <p:sp>
+        <p:nvSpPr>
+          <p:cNvPr id="3" name="Title 2"/>
+          <p:cNvSpPr>
+            <a:spLocks noGrp="1"/>
+          </p:cNvSpPr>
+          <p:nvPr>
+            <p:ph type="title"/>
+          </p:nvPr>
+        </p:nvSpPr>
+        <p:spPr/>
+        <p:txBody>
+          <a:bodyPr>
+            <a:normAutofit/>
+          </a:bodyPr>
+          <a:lstStyle/>
+          <a:p>
+            <a:r>
+              <a:rPr lang="en-US" dirty="0"/>
+              <a:t>Details of the contributions (3-4 slides)</a:t>
+            </a:r>
+            <a:endParaRPr lang="en-US" dirty="0"/>
+          </a:p>
+        </p:txBody>
+      </p:sp>
+      <p:sp>
+        <p:nvSpPr>
+          <p:cNvPr id="5" name="Content Placeholder 3"/>
+          <p:cNvSpPr txBox="1"/>
+          <p:nvPr/>
+        </p:nvSpPr>
+        <p:spPr>
+          <a:xfrm>
+            <a:off x="457199" y="1016001"/>
+            <a:ext cx="7890933" cy="3578622"/>
+          </a:xfrm>
+          <a:prstGeom prst="rect">
+            <a:avLst/>
+          </a:prstGeom>
+        </p:spPr>
+        <p:txBody>
+          <a:bodyPr>
+            <a:normAutofit/>
+          </a:bodyPr>
+          <a:lstStyle>
+            <a:lvl1pPr marL="342900" indent="-342900" algn="l" defTabSz="457200" rtl="0" eaLnBrk="1" latinLnBrk="0" hangingPunct="1">
+              <a:spcBef>
+                <a:spcPct val="20000"/>
+              </a:spcBef>
+              <a:buClr>
+                <a:schemeClr val="tx1"/>
+              </a:buClr>
+              <a:buFont typeface="Arial" panose="020B0604020202020204"/>
+              <a:buChar char="•"/>
+              <a:defRPr sz="2800" kern="1200">
+                <a:solidFill>
+                  <a:schemeClr val="accent6"/>
+                </a:solidFill>
+                <a:latin typeface="Gill Sans"/>
+                <a:ea typeface="+mn-ea"/>
+                <a:cs typeface="Gill Sans"/>
+              </a:defRPr>
+            </a:lvl1pPr>
+            <a:lvl2pPr marL="742950" indent="-285750" algn="l" defTabSz="457200" rtl="0" eaLnBrk="1" latinLnBrk="0" hangingPunct="1">
+              <a:spcBef>
+                <a:spcPct val="20000"/>
+              </a:spcBef>
+              <a:buClr>
+                <a:schemeClr val="tx1"/>
+              </a:buClr>
+              <a:buFont typeface="Arial" panose="020B0604020202020204"/>
+              <a:buChar char="–"/>
+              <a:defRPr sz="2400" kern="1200">
+                <a:solidFill>
+                  <a:schemeClr val="accent6"/>
+                </a:solidFill>
+                <a:latin typeface="Gill Sans"/>
+                <a:ea typeface="+mn-ea"/>
+                <a:cs typeface="Gill Sans"/>
+              </a:defRPr>
+            </a:lvl2pPr>
+            <a:lvl3pPr marL="1143000" indent="-228600" algn="l" defTabSz="457200" rtl="0" eaLnBrk="1" latinLnBrk="0" hangingPunct="1">
+              <a:spcBef>
+                <a:spcPct val="20000"/>
+              </a:spcBef>
+              <a:buClr>
+                <a:schemeClr val="tx1"/>
+              </a:buClr>
+              <a:buFont typeface="Arial" panose="020B0604020202020204"/>
+              <a:buChar char="•"/>
+              <a:defRPr sz="2000" kern="1200">
+                <a:solidFill>
+                  <a:schemeClr val="accent6"/>
+                </a:solidFill>
+                <a:latin typeface="Gill Sans"/>
+                <a:ea typeface="+mn-ea"/>
+                <a:cs typeface="Gill Sans"/>
+              </a:defRPr>
+            </a:lvl3pPr>
+            <a:lvl4pPr marL="1600200" indent="-228600" algn="l" defTabSz="457200" rtl="0" eaLnBrk="1" latinLnBrk="0" hangingPunct="1">
+              <a:spcBef>
+                <a:spcPct val="20000"/>
+              </a:spcBef>
+              <a:buClr>
+                <a:schemeClr val="tx1"/>
+              </a:buClr>
+              <a:buFont typeface="Arial" panose="020B0604020202020204"/>
+              <a:buChar char="–"/>
+              <a:defRPr sz="1800" kern="1200">
+                <a:solidFill>
+                  <a:schemeClr val="accent6"/>
+                </a:solidFill>
+                <a:latin typeface="Gill Sans"/>
+                <a:ea typeface="+mn-ea"/>
+                <a:cs typeface="Gill Sans"/>
+              </a:defRPr>
+            </a:lvl4pPr>
+            <a:lvl5pPr marL="2057400" indent="-228600" algn="l" defTabSz="457200" rtl="0" eaLnBrk="1" latinLnBrk="0" hangingPunct="1">
+              <a:spcBef>
+                <a:spcPct val="20000"/>
+              </a:spcBef>
+              <a:buClr>
+                <a:schemeClr val="tx1"/>
+              </a:buClr>
+              <a:buFont typeface="Arial" panose="020B0604020202020204"/>
+              <a:buChar char="»"/>
+              <a:defRPr sz="1800" kern="1200">
+                <a:solidFill>
+                  <a:schemeClr val="accent6"/>
+                </a:solidFill>
+                <a:latin typeface="Gill Sans"/>
+                <a:ea typeface="+mn-ea"/>
+                <a:cs typeface="Gill Sans"/>
+              </a:defRPr>
+            </a:lvl5pPr>
+            <a:lvl6pPr marL="2514600" indent="-228600" algn="l" defTabSz="457200" rtl="0" eaLnBrk="1" latinLnBrk="0" hangingPunct="1">
+              <a:spcBef>
+                <a:spcPct val="20000"/>
+              </a:spcBef>
+              <a:buFont typeface="Arial" panose="020B0604020202020204"/>
+              <a:buChar char="•"/>
+              <a:defRPr sz="2000" kern="1200">
+                <a:solidFill>
+                  <a:schemeClr val="tx1"/>
+                </a:solidFill>
+                <a:latin typeface="+mn-lt"/>
+                <a:ea typeface="+mn-ea"/>
+                <a:cs typeface="+mn-cs"/>
+              </a:defRPr>
+            </a:lvl6pPr>
+            <a:lvl7pPr marL="2971800" indent="-228600" algn="l" defTabSz="457200" rtl="0" eaLnBrk="1" latinLnBrk="0" hangingPunct="1">
+              <a:spcBef>
+                <a:spcPct val="20000"/>
+              </a:spcBef>
+              <a:buFont typeface="Arial" panose="020B0604020202020204"/>
+              <a:buChar char="•"/>
+              <a:defRPr sz="2000" kern="1200">
+                <a:solidFill>
+                  <a:schemeClr val="tx1"/>
+                </a:solidFill>
+                <a:latin typeface="+mn-lt"/>
+                <a:ea typeface="+mn-ea"/>
+                <a:cs typeface="+mn-cs"/>
+              </a:defRPr>
+            </a:lvl7pPr>
+            <a:lvl8pPr marL="3429000" indent="-228600" algn="l" defTabSz="457200" rtl="0" eaLnBrk="1" latinLnBrk="0" hangingPunct="1">
+              <a:spcBef>
+                <a:spcPct val="20000"/>
+              </a:spcBef>
+              <a:buFont typeface="Arial" panose="020B0604020202020204"/>
+              <a:buChar char="•"/>
+              <a:defRPr sz="2000" kern="1200">
+                <a:solidFill>
+                  <a:schemeClr val="tx1"/>
+                </a:solidFill>
+                <a:latin typeface="+mn-lt"/>
+                <a:ea typeface="+mn-ea"/>
+                <a:cs typeface="+mn-cs"/>
+              </a:defRPr>
+            </a:lvl8pPr>
+            <a:lvl9pPr marL="3886200" indent="-228600" algn="l" defTabSz="457200" rtl="0" eaLnBrk="1" latinLnBrk="0" hangingPunct="1">
+              <a:spcBef>
+                <a:spcPct val="20000"/>
+              </a:spcBef>
+              <a:buFont typeface="Arial" panose="020B0604020202020204"/>
+              <a:buChar char="•"/>
+              <a:defRPr sz="2000" kern="1200">
+                <a:solidFill>
+                  <a:schemeClr val="tx1"/>
+                </a:solidFill>
+                <a:latin typeface="+mn-lt"/>
+                <a:ea typeface="+mn-ea"/>
+                <a:cs typeface="+mn-cs"/>
+              </a:defRPr>
+            </a:lvl9pPr>
+          </a:lstStyle>
+          <a:p>
+            <a:r>
+              <a:rPr lang="en-US" dirty="0"/>
+              <a:t>Explain the high-level idea of the paper</a:t>
+            </a:r>
+            <a:endParaRPr lang="en-US" dirty="0"/>
+          </a:p>
+          <a:p>
+            <a:pPr lvl="1"/>
+            <a:r>
+              <a:rPr lang="en-US" dirty="0"/>
+              <a:t>preferably using an overview image, if relevant</a:t>
+            </a:r>
+            <a:endParaRPr lang="en-US" dirty="0"/>
+          </a:p>
+          <a:p>
+            <a:r>
+              <a:rPr lang="en-US" dirty="0"/>
+              <a:t>Identify and clearly explain the assumptions made</a:t>
+            </a:r>
+            <a:endParaRPr lang="en-US" dirty="0"/>
+          </a:p>
+          <a:p>
+            <a:r>
+              <a:rPr lang="en-US" dirty="0"/>
+              <a:t>Present the details of the proposed approaches, including important mathematical details.</a:t>
+            </a:r>
+            <a:endParaRPr lang="en-US" dirty="0"/>
+          </a:p>
+          <a:p>
+            <a:pPr lvl="1"/>
+            <a:r>
+              <a:rPr lang="en-US" dirty="0"/>
+              <a:t>If there are parts of the model that already existed, point it out clearly to isolate the contributions of this work</a:t>
+            </a:r>
+            <a:endParaRPr lang="en-US" dirty="0"/>
+          </a:p>
+        </p:txBody>
+      </p:sp>
+    </p:spTree>
+  </p:cSld>
+  <p:clrMapOvr>
+    <a:masterClrMapping/>
+  </p:clrMapOvr>
+</p:sld>
+</file>
+
+<file path=ppt/slides/slide19.xml><?xml version="1.0" encoding="utf-8"?>
+<p:sld xmlns:a="http://schemas.openxmlformats.org/drawingml/2006/main" xmlns:r="http://schemas.openxmlformats.org/officeDocument/2006/relationships" xmlns:p="http://schemas.openxmlformats.org/presentationml/2006/main">
+  <p:cSld>
+    <p:spTree>
+      <p:nvGrpSpPr>
+        <p:cNvPr id="1" name=""/>
+        <p:cNvGrpSpPr/>
+        <p:nvPr/>
+      </p:nvGrpSpPr>
+      <p:grpSpPr>
+        <a:xfrm>
+          <a:off x="0" y="0"/>
+          <a:ext cx="0" cy="0"/>
+          <a:chOff x="0" y="0"/>
+          <a:chExt cx="0" cy="0"/>
+        </a:xfrm>
+      </p:grpSpPr>
+      <p:sp>
+        <p:nvSpPr>
+          <p:cNvPr id="2" name="Slide Number Placeholder 1"/>
+          <p:cNvSpPr>
+            <a:spLocks noGrp="1"/>
+          </p:cNvSpPr>
+          <p:nvPr>
+            <p:ph type="sldNum" sz="quarter" idx="12"/>
+          </p:nvPr>
+        </p:nvSpPr>
+        <p:spPr/>
+        <p:txBody>
+          <a:bodyPr/>
+          <a:lstStyle/>
+          <a:p>
+            <a:fld id="{8A758EFE-665F-4341-B5B8-2DAEADA52F6C}" type="slidenum">
+              <a:rPr lang="en-US" smtClean="0"/>
+            </a:fld>
+            <a:endParaRPr lang="en-US" dirty="0"/>
+          </a:p>
+        </p:txBody>
+      </p:sp>
+      <p:sp>
+        <p:nvSpPr>
+          <p:cNvPr id="3" name="Title 2"/>
+          <p:cNvSpPr>
+            <a:spLocks noGrp="1"/>
+          </p:cNvSpPr>
+          <p:nvPr>
+            <p:ph type="title"/>
+          </p:nvPr>
+        </p:nvSpPr>
+        <p:spPr/>
+        <p:txBody>
+          <a:bodyPr>
+            <a:normAutofit/>
+          </a:bodyPr>
+          <a:lstStyle/>
+          <a:p>
+            <a:r>
+              <a:rPr lang="en-US" dirty="0"/>
+              <a:t>Results and Analysis (2-3 slides)</a:t>
+            </a:r>
+            <a:endParaRPr lang="en-US" dirty="0"/>
+          </a:p>
+        </p:txBody>
+      </p:sp>
+      <p:sp>
+        <p:nvSpPr>
+          <p:cNvPr id="5" name="Content Placeholder 3"/>
+          <p:cNvSpPr txBox="1"/>
+          <p:nvPr/>
+        </p:nvSpPr>
+        <p:spPr>
+          <a:xfrm>
+            <a:off x="457199" y="1016001"/>
+            <a:ext cx="7890933" cy="3578622"/>
+          </a:xfrm>
+          <a:prstGeom prst="rect">
+            <a:avLst/>
+          </a:prstGeom>
+        </p:spPr>
+        <p:txBody>
+          <a:bodyPr>
+            <a:normAutofit fontScale="62500" lnSpcReduction="20000"/>
+          </a:bodyPr>
+          <a:lstStyle>
+            <a:lvl1pPr marL="342900" indent="-342900" algn="l" defTabSz="457200" rtl="0" eaLnBrk="1" latinLnBrk="0" hangingPunct="1">
+              <a:spcBef>
+                <a:spcPct val="20000"/>
+              </a:spcBef>
+              <a:buClr>
+                <a:schemeClr val="tx1"/>
+              </a:buClr>
+              <a:buFont typeface="Arial" panose="020B0604020202020204"/>
+              <a:buChar char="•"/>
+              <a:defRPr sz="2800" kern="1200">
+                <a:solidFill>
+                  <a:schemeClr val="accent6"/>
+                </a:solidFill>
+                <a:latin typeface="Gill Sans"/>
+                <a:ea typeface="+mn-ea"/>
+                <a:cs typeface="Gill Sans"/>
+              </a:defRPr>
+            </a:lvl1pPr>
+            <a:lvl2pPr marL="742950" indent="-285750" algn="l" defTabSz="457200" rtl="0" eaLnBrk="1" latinLnBrk="0" hangingPunct="1">
+              <a:spcBef>
+                <a:spcPct val="20000"/>
+              </a:spcBef>
+              <a:buClr>
+                <a:schemeClr val="tx1"/>
+              </a:buClr>
+              <a:buFont typeface="Arial" panose="020B0604020202020204"/>
+              <a:buChar char="–"/>
+              <a:defRPr sz="2400" kern="1200">
+                <a:solidFill>
+                  <a:schemeClr val="accent6"/>
+                </a:solidFill>
+                <a:latin typeface="Gill Sans"/>
+                <a:ea typeface="+mn-ea"/>
+                <a:cs typeface="Gill Sans"/>
+              </a:defRPr>
+            </a:lvl2pPr>
+            <a:lvl3pPr marL="1143000" indent="-228600" algn="l" defTabSz="457200" rtl="0" eaLnBrk="1" latinLnBrk="0" hangingPunct="1">
+              <a:spcBef>
+                <a:spcPct val="20000"/>
+              </a:spcBef>
+              <a:buClr>
+                <a:schemeClr val="tx1"/>
+              </a:buClr>
+              <a:buFont typeface="Arial" panose="020B0604020202020204"/>
+              <a:buChar char="•"/>
+              <a:defRPr sz="2000" kern="1200">
+                <a:solidFill>
+                  <a:schemeClr val="accent6"/>
+                </a:solidFill>
+                <a:latin typeface="Gill Sans"/>
+                <a:ea typeface="+mn-ea"/>
+                <a:cs typeface="Gill Sans"/>
+              </a:defRPr>
+            </a:lvl3pPr>
+            <a:lvl4pPr marL="1600200" indent="-228600" algn="l" defTabSz="457200" rtl="0" eaLnBrk="1" latinLnBrk="0" hangingPunct="1">
+              <a:spcBef>
+                <a:spcPct val="20000"/>
+              </a:spcBef>
+              <a:buClr>
+                <a:schemeClr val="tx1"/>
+              </a:buClr>
+              <a:buFont typeface="Arial" panose="020B0604020202020204"/>
+              <a:buChar char="–"/>
+              <a:defRPr sz="1800" kern="1200">
+                <a:solidFill>
+                  <a:schemeClr val="accent6"/>
+                </a:solidFill>
+                <a:latin typeface="Gill Sans"/>
+                <a:ea typeface="+mn-ea"/>
+                <a:cs typeface="Gill Sans"/>
+              </a:defRPr>
+            </a:lvl4pPr>
+            <a:lvl5pPr marL="2057400" indent="-228600" algn="l" defTabSz="457200" rtl="0" eaLnBrk="1" latinLnBrk="0" hangingPunct="1">
+              <a:spcBef>
+                <a:spcPct val="20000"/>
+              </a:spcBef>
+              <a:buClr>
+                <a:schemeClr val="tx1"/>
+              </a:buClr>
+              <a:buFont typeface="Arial" panose="020B0604020202020204"/>
+              <a:buChar char="»"/>
+              <a:defRPr sz="1800" kern="1200">
+                <a:solidFill>
+                  <a:schemeClr val="accent6"/>
+                </a:solidFill>
+                <a:latin typeface="Gill Sans"/>
+                <a:ea typeface="+mn-ea"/>
+                <a:cs typeface="Gill Sans"/>
+              </a:defRPr>
+            </a:lvl5pPr>
+            <a:lvl6pPr marL="2514600" indent="-228600" algn="l" defTabSz="457200" rtl="0" eaLnBrk="1" latinLnBrk="0" hangingPunct="1">
+              <a:spcBef>
+                <a:spcPct val="20000"/>
+              </a:spcBef>
+              <a:buFont typeface="Arial" panose="020B0604020202020204"/>
+              <a:buChar char="•"/>
+              <a:defRPr sz="2000" kern="1200">
+                <a:solidFill>
+                  <a:schemeClr val="tx1"/>
+                </a:solidFill>
+                <a:latin typeface="+mn-lt"/>
+                <a:ea typeface="+mn-ea"/>
+                <a:cs typeface="+mn-cs"/>
+              </a:defRPr>
+            </a:lvl6pPr>
+            <a:lvl7pPr marL="2971800" indent="-228600" algn="l" defTabSz="457200" rtl="0" eaLnBrk="1" latinLnBrk="0" hangingPunct="1">
+              <a:spcBef>
+                <a:spcPct val="20000"/>
+              </a:spcBef>
+              <a:buFont typeface="Arial" panose="020B0604020202020204"/>
+              <a:buChar char="•"/>
+              <a:defRPr sz="2000" kern="1200">
+                <a:solidFill>
+                  <a:schemeClr val="tx1"/>
+                </a:solidFill>
+                <a:latin typeface="+mn-lt"/>
+                <a:ea typeface="+mn-ea"/>
+                <a:cs typeface="+mn-cs"/>
+              </a:defRPr>
+            </a:lvl7pPr>
+            <a:lvl8pPr marL="3429000" indent="-228600" algn="l" defTabSz="457200" rtl="0" eaLnBrk="1" latinLnBrk="0" hangingPunct="1">
+              <a:spcBef>
+                <a:spcPct val="20000"/>
+              </a:spcBef>
+              <a:buFont typeface="Arial" panose="020B0604020202020204"/>
+              <a:buChar char="•"/>
+              <a:defRPr sz="2000" kern="1200">
+                <a:solidFill>
+                  <a:schemeClr val="tx1"/>
+                </a:solidFill>
+                <a:latin typeface="+mn-lt"/>
+                <a:ea typeface="+mn-ea"/>
+                <a:cs typeface="+mn-cs"/>
+              </a:defRPr>
+            </a:lvl8pPr>
+            <a:lvl9pPr marL="3886200" indent="-228600" algn="l" defTabSz="457200" rtl="0" eaLnBrk="1" latinLnBrk="0" hangingPunct="1">
+              <a:spcBef>
+                <a:spcPct val="20000"/>
+              </a:spcBef>
+              <a:buFont typeface="Arial" panose="020B0604020202020204"/>
+              <a:buChar char="•"/>
+              <a:defRPr sz="2000" kern="1200">
+                <a:solidFill>
+                  <a:schemeClr val="tx1"/>
+                </a:solidFill>
+                <a:latin typeface="+mn-lt"/>
+                <a:ea typeface="+mn-ea"/>
+                <a:cs typeface="+mn-cs"/>
+              </a:defRPr>
+            </a:lvl9pPr>
+          </a:lstStyle>
+          <a:p>
+            <a:r>
+              <a:rPr lang="en-US" dirty="0"/>
+              <a:t>How does the paper argue for the claimed contributions</a:t>
+            </a:r>
+            <a:endParaRPr lang="en-US" dirty="0"/>
+          </a:p>
+          <a:p>
+            <a:pPr lvl="1"/>
+            <a:r>
+              <a:rPr lang="en-US" dirty="0"/>
+              <a:t>Typically these will be the experiments conducted to test the hypothesis; in some cases these can be mathematical proofs; or in rare cases it will be only arguments and examples.</a:t>
+            </a:r>
+            <a:endParaRPr lang="en-US" dirty="0"/>
+          </a:p>
+          <a:p>
+            <a:pPr lvl="1"/>
+            <a:r>
+              <a:rPr lang="en-US" dirty="0"/>
+              <a:t>Focus on the key experiments/arguments (not necessarily all)</a:t>
+            </a:r>
+            <a:endParaRPr lang="en-US" dirty="0"/>
+          </a:p>
+          <a:p>
+            <a:pPr lvl="1"/>
+            <a:endParaRPr lang="en-US" dirty="0"/>
+          </a:p>
+          <a:p>
+            <a:r>
+              <a:rPr lang="en-US" dirty="0"/>
+              <a:t>Clearly define the experimental setup, datasets used, evaluation methodology</a:t>
+            </a:r>
+            <a:endParaRPr lang="en-US" dirty="0"/>
+          </a:p>
+          <a:p>
+            <a:endParaRPr lang="en-US" dirty="0"/>
+          </a:p>
+          <a:p>
+            <a:r>
+              <a:rPr lang="en-US" dirty="0"/>
+              <a:t>Analyze the results presented in the paper, and present only data-points that convey some information.</a:t>
+            </a:r>
+            <a:endParaRPr lang="en-US" dirty="0"/>
+          </a:p>
+          <a:p>
+            <a:pPr lvl="1"/>
+            <a:r>
+              <a:rPr lang="en-US" dirty="0"/>
+              <a:t>Do not blindly copy/screenshot tables from the papers. Make your own tables/plots (A template is at the end of this slide deck)</a:t>
+            </a:r>
+            <a:endParaRPr lang="en-US" dirty="0"/>
+          </a:p>
+          <a:p>
+            <a:pPr lvl="1"/>
+            <a:endParaRPr lang="en-US" dirty="0"/>
+          </a:p>
+          <a:p>
+            <a:r>
+              <a:rPr lang="en-US" dirty="0"/>
+              <a:t>Analysis of the outputs – If there is analysis provided for outputs, example predictions (if present), etc.</a:t>
+            </a:r>
+            <a:endParaRPr lang="en-US" dirty="0"/>
+          </a:p>
+        </p:txBody>
+      </p:sp>
+    </p:spTree>
+  </p:cSld>
+  <p:clrMapOvr>
+    <a:masterClrMapping/>
+  </p:clrMapOvr>
+</p:sld>
+</file>
+
+<file path=ppt/slides/slide2.xml><?xml version="1.0" encoding="utf-8"?>
+<p:sld xmlns:a="http://schemas.openxmlformats.org/drawingml/2006/main" xmlns:r="http://schemas.openxmlformats.org/officeDocument/2006/relationships" xmlns:p="http://schemas.openxmlformats.org/presentationml/2006/main">
+  <p:cSld>
+    <p:spTree>
+      <p:nvGrpSpPr>
+        <p:cNvPr id="1" name=""/>
+        <p:cNvGrpSpPr/>
+        <p:nvPr/>
+      </p:nvGrpSpPr>
+      <p:grpSpPr>
+        <a:xfrm>
+          <a:off x="0" y="0"/>
+          <a:ext cx="0" cy="0"/>
+          <a:chOff x="0" y="0"/>
+          <a:chExt cx="0" cy="0"/>
+        </a:xfrm>
+      </p:grpSpPr>
+      <p:sp>
+        <p:nvSpPr>
+          <p:cNvPr id="2" name="Slide Number Placeholder 1"/>
+          <p:cNvSpPr>
+            <a:spLocks noGrp="1"/>
+          </p:cNvSpPr>
+          <p:nvPr>
+            <p:ph type="sldNum" sz="quarter" idx="12"/>
+          </p:nvPr>
+        </p:nvSpPr>
+        <p:spPr/>
+        <p:txBody>
+          <a:bodyPr/>
+          <a:lstStyle/>
+          <a:p>
+            <a:fld id="{8A758EFE-665F-4341-B5B8-2DAEADA52F6C}" type="slidenum">
+              <a:rPr lang="en-US" smtClean="0"/>
+            </a:fld>
+            <a:endParaRPr lang="en-US" dirty="0"/>
+          </a:p>
+        </p:txBody>
+      </p:sp>
+      <p:sp>
+        <p:nvSpPr>
+          <p:cNvPr id="3" name="Title 2"/>
+          <p:cNvSpPr>
+            <a:spLocks noGrp="1"/>
+          </p:cNvSpPr>
+          <p:nvPr>
+            <p:ph type="title"/>
+          </p:nvPr>
+        </p:nvSpPr>
+        <p:spPr/>
+        <p:txBody>
+          <a:bodyPr>
+            <a:normAutofit/>
+          </a:bodyPr>
+          <a:lstStyle/>
+          <a:p>
+            <a:r>
+              <a:rPr lang="en-US" dirty="0"/>
+              <a:t>Objective</a:t>
+            </a:r>
+            <a:endParaRPr lang="en-US" dirty="0"/>
+          </a:p>
+        </p:txBody>
+      </p:sp>
+      <p:sp>
+        <p:nvSpPr>
+          <p:cNvPr id="5" name="Content Placeholder 3"/>
+          <p:cNvSpPr txBox="1"/>
+          <p:nvPr/>
+        </p:nvSpPr>
+        <p:spPr>
+          <a:xfrm>
+            <a:off x="457199" y="1016001"/>
+            <a:ext cx="7890933" cy="3578622"/>
+          </a:xfrm>
+          <a:prstGeom prst="rect">
+            <a:avLst/>
+          </a:prstGeom>
+        </p:spPr>
+        <p:txBody>
+          <a:bodyPr>
+            <a:normAutofit/>
+          </a:bodyPr>
+          <a:lstStyle>
+            <a:lvl1pPr marL="342900" indent="-342900" algn="l" defTabSz="457200" rtl="0" eaLnBrk="1" latinLnBrk="0" hangingPunct="1">
+              <a:spcBef>
+                <a:spcPct val="20000"/>
+              </a:spcBef>
+              <a:buClr>
+                <a:schemeClr val="tx1"/>
+              </a:buClr>
+              <a:buFont typeface="Arial" panose="020B0604020202020204"/>
+              <a:buChar char="•"/>
+              <a:defRPr sz="2800" kern="1200">
+                <a:solidFill>
+                  <a:schemeClr val="accent6"/>
+                </a:solidFill>
+                <a:latin typeface="Gill Sans"/>
+                <a:ea typeface="+mn-ea"/>
+                <a:cs typeface="Gill Sans"/>
+              </a:defRPr>
+            </a:lvl1pPr>
+            <a:lvl2pPr marL="742950" indent="-285750" algn="l" defTabSz="457200" rtl="0" eaLnBrk="1" latinLnBrk="0" hangingPunct="1">
+              <a:spcBef>
+                <a:spcPct val="20000"/>
+              </a:spcBef>
+              <a:buClr>
+                <a:schemeClr val="tx1"/>
+              </a:buClr>
+              <a:buFont typeface="Arial" panose="020B0604020202020204"/>
+              <a:buChar char="–"/>
+              <a:defRPr sz="2400" kern="1200">
+                <a:solidFill>
+                  <a:schemeClr val="accent6"/>
+                </a:solidFill>
+                <a:latin typeface="Gill Sans"/>
+                <a:ea typeface="+mn-ea"/>
+                <a:cs typeface="Gill Sans"/>
+              </a:defRPr>
+            </a:lvl2pPr>
+            <a:lvl3pPr marL="1143000" indent="-228600" algn="l" defTabSz="457200" rtl="0" eaLnBrk="1" latinLnBrk="0" hangingPunct="1">
+              <a:spcBef>
+                <a:spcPct val="20000"/>
+              </a:spcBef>
+              <a:buClr>
+                <a:schemeClr val="tx1"/>
+              </a:buClr>
+              <a:buFont typeface="Arial" panose="020B0604020202020204"/>
+              <a:buChar char="•"/>
+              <a:defRPr sz="2000" kern="1200">
+                <a:solidFill>
+                  <a:schemeClr val="accent6"/>
+                </a:solidFill>
+                <a:latin typeface="Gill Sans"/>
+                <a:ea typeface="+mn-ea"/>
+                <a:cs typeface="Gill Sans"/>
+              </a:defRPr>
+            </a:lvl3pPr>
+            <a:lvl4pPr marL="1600200" indent="-228600" algn="l" defTabSz="457200" rtl="0" eaLnBrk="1" latinLnBrk="0" hangingPunct="1">
+              <a:spcBef>
+                <a:spcPct val="20000"/>
+              </a:spcBef>
+              <a:buClr>
+                <a:schemeClr val="tx1"/>
+              </a:buClr>
+              <a:buFont typeface="Arial" panose="020B0604020202020204"/>
+              <a:buChar char="–"/>
+              <a:defRPr sz="1800" kern="1200">
+                <a:solidFill>
+                  <a:schemeClr val="accent6"/>
+                </a:solidFill>
+                <a:latin typeface="Gill Sans"/>
+                <a:ea typeface="+mn-ea"/>
+                <a:cs typeface="Gill Sans"/>
+              </a:defRPr>
+            </a:lvl4pPr>
+            <a:lvl5pPr marL="2057400" indent="-228600" algn="l" defTabSz="457200" rtl="0" eaLnBrk="1" latinLnBrk="0" hangingPunct="1">
+              <a:spcBef>
+                <a:spcPct val="20000"/>
+              </a:spcBef>
+              <a:buClr>
+                <a:schemeClr val="tx1"/>
+              </a:buClr>
+              <a:buFont typeface="Arial" panose="020B0604020202020204"/>
+              <a:buChar char="»"/>
+              <a:defRPr sz="1800" kern="1200">
+                <a:solidFill>
+                  <a:schemeClr val="accent6"/>
+                </a:solidFill>
+                <a:latin typeface="Gill Sans"/>
+                <a:ea typeface="+mn-ea"/>
+                <a:cs typeface="Gill Sans"/>
+              </a:defRPr>
+            </a:lvl5pPr>
+            <a:lvl6pPr marL="2514600" indent="-228600" algn="l" defTabSz="457200" rtl="0" eaLnBrk="1" latinLnBrk="0" hangingPunct="1">
+              <a:spcBef>
+                <a:spcPct val="20000"/>
+              </a:spcBef>
+              <a:buFont typeface="Arial" panose="020B0604020202020204"/>
+              <a:buChar char="•"/>
+              <a:defRPr sz="2000" kern="1200">
+                <a:solidFill>
+                  <a:schemeClr val="tx1"/>
+                </a:solidFill>
+                <a:latin typeface="+mn-lt"/>
+                <a:ea typeface="+mn-ea"/>
+                <a:cs typeface="+mn-cs"/>
+              </a:defRPr>
+            </a:lvl6pPr>
+            <a:lvl7pPr marL="2971800" indent="-228600" algn="l" defTabSz="457200" rtl="0" eaLnBrk="1" latinLnBrk="0" hangingPunct="1">
+              <a:spcBef>
+                <a:spcPct val="20000"/>
+              </a:spcBef>
+              <a:buFont typeface="Arial" panose="020B0604020202020204"/>
+              <a:buChar char="•"/>
+              <a:defRPr sz="2000" kern="1200">
+                <a:solidFill>
+                  <a:schemeClr val="tx1"/>
+                </a:solidFill>
+                <a:latin typeface="+mn-lt"/>
+                <a:ea typeface="+mn-ea"/>
+                <a:cs typeface="+mn-cs"/>
+              </a:defRPr>
+            </a:lvl7pPr>
+            <a:lvl8pPr marL="3429000" indent="-228600" algn="l" defTabSz="457200" rtl="0" eaLnBrk="1" latinLnBrk="0" hangingPunct="1">
+              <a:spcBef>
+                <a:spcPct val="20000"/>
+              </a:spcBef>
+              <a:buFont typeface="Arial" panose="020B0604020202020204"/>
+              <a:buChar char="•"/>
+              <a:defRPr sz="2000" kern="1200">
+                <a:solidFill>
+                  <a:schemeClr val="tx1"/>
+                </a:solidFill>
+                <a:latin typeface="+mn-lt"/>
+                <a:ea typeface="+mn-ea"/>
+                <a:cs typeface="+mn-cs"/>
+              </a:defRPr>
+            </a:lvl8pPr>
+            <a:lvl9pPr marL="3886200" indent="-228600" algn="l" defTabSz="457200" rtl="0" eaLnBrk="1" latinLnBrk="0" hangingPunct="1">
+              <a:spcBef>
+                <a:spcPct val="20000"/>
+              </a:spcBef>
+              <a:buFont typeface="Arial" panose="020B0604020202020204"/>
+              <a:buChar char="•"/>
+              <a:defRPr sz="2000" kern="1200">
+                <a:solidFill>
+                  <a:schemeClr val="tx1"/>
+                </a:solidFill>
+                <a:latin typeface="+mn-lt"/>
+                <a:ea typeface="+mn-ea"/>
+                <a:cs typeface="+mn-cs"/>
+              </a:defRPr>
+            </a:lvl9pPr>
+          </a:lstStyle>
+          <a:p>
+            <a:endParaRPr lang="en-US" dirty="0"/>
+          </a:p>
+        </p:txBody>
+      </p:sp>
+      <p:sp>
+        <p:nvSpPr>
+          <p:cNvPr id="4" name="TextBox 3"/>
+          <p:cNvSpPr txBox="1"/>
+          <p:nvPr/>
+        </p:nvSpPr>
+        <p:spPr>
+          <a:xfrm>
+            <a:off x="310152" y="1925419"/>
+            <a:ext cx="8737601" cy="1384995"/>
+          </a:xfrm>
+          <a:prstGeom prst="rect">
+            <a:avLst/>
+          </a:prstGeom>
+          <a:noFill/>
+        </p:spPr>
+        <p:txBody>
+          <a:bodyPr wrap="square" rtlCol="0">
+            <a:spAutoFit/>
+          </a:bodyPr>
+          <a:lstStyle/>
+          <a:p>
+            <a:r>
+              <a:rPr lang="en-US" sz="2800" dirty="0">
+                <a:solidFill>
+                  <a:schemeClr val="accent6"/>
+                </a:solidFill>
+                <a:latin typeface="Gill Sans"/>
+                <a:cs typeface="Gill Sans"/>
+              </a:rPr>
+              <a:t>Model and interpret how contextual factors influence the reporting of UFO shapes using NUFORC sighting data from the late 20th century to the present.</a:t>
+            </a:r>
+            <a:endParaRPr lang="en-US" sz="2800" dirty="0">
+              <a:solidFill>
+                <a:schemeClr val="accent6"/>
+              </a:solidFill>
+              <a:latin typeface="Gill Sans"/>
+              <a:cs typeface="Gill Sans"/>
+            </a:endParaRPr>
+          </a:p>
+        </p:txBody>
+      </p:sp>
+      <p:sp>
+        <p:nvSpPr>
+          <p:cNvPr id="7" name="TextBox 6"/>
+          <p:cNvSpPr txBox="1"/>
+          <p:nvPr/>
+        </p:nvSpPr>
+        <p:spPr>
+          <a:xfrm>
+            <a:off x="310152" y="3894723"/>
+            <a:ext cx="3824701" cy="338554"/>
+          </a:xfrm>
+          <a:prstGeom prst="rect">
+            <a:avLst/>
+          </a:prstGeom>
+          <a:noFill/>
+        </p:spPr>
+        <p:txBody>
+          <a:bodyPr wrap="none" rtlCol="0">
+            <a:spAutoFit/>
+          </a:bodyPr>
+          <a:lstStyle/>
+          <a:p>
+            <a:r>
+              <a:rPr lang="en-US" sz="1600" dirty="0">
+                <a:solidFill>
+                  <a:schemeClr val="bg1">
+                    <a:lumMod val="50000"/>
+                  </a:schemeClr>
+                </a:solidFill>
+              </a:rPr>
+              <a:t>NUFORC: National UFO Reporting Center</a:t>
+            </a:r>
+            <a:endParaRPr lang="en-US" sz="1600" dirty="0">
+              <a:solidFill>
+                <a:schemeClr val="bg1">
+                  <a:lumMod val="50000"/>
+                </a:schemeClr>
+              </a:solidFill>
+            </a:endParaRPr>
+          </a:p>
+        </p:txBody>
+      </p:sp>
+    </p:spTree>
+  </p:cSld>
+  <p:clrMapOvr>
+    <a:masterClrMapping/>
+  </p:clrMapOvr>
+</p:sld>
+</file>
+
+<file path=ppt/slides/slide20.xml><?xml version="1.0" encoding="utf-8"?>
+<p:sld xmlns:a="http://schemas.openxmlformats.org/drawingml/2006/main" xmlns:r="http://schemas.openxmlformats.org/officeDocument/2006/relationships" xmlns:p="http://schemas.openxmlformats.org/presentationml/2006/main">
+  <p:cSld>
+    <p:spTree>
+      <p:nvGrpSpPr>
+        <p:cNvPr id="1" name=""/>
+        <p:cNvGrpSpPr/>
+        <p:nvPr/>
+      </p:nvGrpSpPr>
+      <p:grpSpPr>
+        <a:xfrm>
+          <a:off x="0" y="0"/>
+          <a:ext cx="0" cy="0"/>
+          <a:chOff x="0" y="0"/>
+          <a:chExt cx="0" cy="0"/>
+        </a:xfrm>
+      </p:grpSpPr>
+      <p:sp>
+        <p:nvSpPr>
+          <p:cNvPr id="2" name="Slide Number Placeholder 1"/>
+          <p:cNvSpPr>
+            <a:spLocks noGrp="1"/>
+          </p:cNvSpPr>
+          <p:nvPr>
+            <p:ph type="sldNum" sz="quarter" idx="12"/>
+          </p:nvPr>
+        </p:nvSpPr>
+        <p:spPr/>
+        <p:txBody>
+          <a:bodyPr/>
+          <a:lstStyle/>
+          <a:p>
+            <a:fld id="{8A758EFE-665F-4341-B5B8-2DAEADA52F6C}" type="slidenum">
+              <a:rPr lang="en-US" smtClean="0"/>
             </a:fld>
             <a:endParaRPr lang="en-US" dirty="0"/>
           </a:p>
@@ -12743,15 +14530,14 @@
               <a:rPr lang="en-US" sz="2800" dirty="0"/>
               <a:t>Conclusions, Shortcomings and Future Work (2-3 slides)</a:t>
             </a:r>
+            <a:endParaRPr lang="en-US" sz="2800" dirty="0"/>
           </a:p>
         </p:txBody>
       </p:sp>
       <p:sp>
         <p:nvSpPr>
           <p:cNvPr id="5" name="Content Placeholder 3"/>
-          <p:cNvSpPr txBox="1">
-            <a:spLocks/>
-          </p:cNvSpPr>
+          <p:cNvSpPr txBox="1"/>
           <p:nvPr/>
         </p:nvSpPr>
         <p:spPr>
@@ -12775,7 +14561,7 @@
               <a:buClr>
                 <a:schemeClr val="tx1"/>
               </a:buClr>
-              <a:buFont typeface="Arial"/>
+              <a:buFont typeface="Arial" panose="020B0604020202020204"/>
               <a:buChar char="•"/>
               <a:defRPr sz="2800" kern="1200">
                 <a:solidFill>
@@ -12793,7 +14579,7 @@
               <a:buClr>
                 <a:schemeClr val="tx1"/>
               </a:buClr>
-              <a:buFont typeface="Arial"/>
+              <a:buFont typeface="Arial" panose="020B0604020202020204"/>
               <a:buChar char="–"/>
               <a:defRPr sz="2400" kern="1200">
                 <a:solidFill>
@@ -12811,7 +14597,7 @@
               <a:buClr>
                 <a:schemeClr val="tx1"/>
               </a:buClr>
-              <a:buFont typeface="Arial"/>
+              <a:buFont typeface="Arial" panose="020B0604020202020204"/>
               <a:buChar char="•"/>
               <a:defRPr sz="2000" kern="1200">
                 <a:solidFill>
@@ -12829,7 +14615,7 @@
               <a:buClr>
                 <a:schemeClr val="tx1"/>
               </a:buClr>
-              <a:buFont typeface="Arial"/>
+              <a:buFont typeface="Arial" panose="020B0604020202020204"/>
               <a:buChar char="–"/>
               <a:defRPr sz="1800" kern="1200">
                 <a:solidFill>
@@ -12847,7 +14633,7 @@
               <a:buClr>
                 <a:schemeClr val="tx1"/>
               </a:buClr>
-              <a:buFont typeface="Arial"/>
+              <a:buFont typeface="Arial" panose="020B0604020202020204"/>
               <a:buChar char="»"/>
               <a:defRPr sz="1800" kern="1200">
                 <a:solidFill>
@@ -12862,7 +14648,7 @@
               <a:spcBef>
                 <a:spcPct val="20000"/>
               </a:spcBef>
-              <a:buFont typeface="Arial"/>
+              <a:buFont typeface="Arial" panose="020B0604020202020204"/>
               <a:buChar char="•"/>
               <a:defRPr sz="2000" kern="1200">
                 <a:solidFill>
@@ -12877,7 +14663,7 @@
               <a:spcBef>
                 <a:spcPct val="20000"/>
               </a:spcBef>
-              <a:buFont typeface="Arial"/>
+              <a:buFont typeface="Arial" panose="020B0604020202020204"/>
               <a:buChar char="•"/>
               <a:defRPr sz="2000" kern="1200">
                 <a:solidFill>
@@ -12892,7 +14678,7 @@
               <a:spcBef>
                 <a:spcPct val="20000"/>
               </a:spcBef>
-              <a:buFont typeface="Arial"/>
+              <a:buFont typeface="Arial" panose="020B0604020202020204"/>
               <a:buChar char="•"/>
               <a:defRPr sz="2000" kern="1200">
                 <a:solidFill>
@@ -12907,7 +14693,7 @@
               <a:spcBef>
                 <a:spcPct val="20000"/>
               </a:spcBef>
-              <a:buFont typeface="Arial"/>
+              <a:buFont typeface="Arial" panose="020B0604020202020204"/>
               <a:buChar char="•"/>
               <a:defRPr sz="2000" kern="1200">
                 <a:solidFill>
@@ -12932,6 +14718,7 @@
               <a:rPr lang="en-US" dirty="0"/>
               <a:t> learned from this paper?</a:t>
             </a:r>
+            <a:endParaRPr lang="en-US" dirty="0"/>
           </a:p>
           <a:p>
             <a:pPr lvl="1"/>
@@ -12939,6 +14726,7 @@
               <a:rPr lang="en-US" dirty="0"/>
               <a:t>What are the important lessons that this work leaves for the community</a:t>
             </a:r>
+            <a:endParaRPr lang="en-US" dirty="0"/>
           </a:p>
           <a:p>
             <a:pPr lvl="1"/>
@@ -12954,12 +14742,14 @@
               <a:rPr lang="en-US" dirty="0"/>
               <a:t>. Code, Datasets, Evaluation Metrics, etc. that are used / can be used for future research</a:t>
             </a:r>
+            <a:endParaRPr lang="en-US" dirty="0"/>
           </a:p>
           <a:p>
             <a:r>
               <a:rPr lang="en-US" dirty="0"/>
               <a:t>What are the major shortcomings of the paper</a:t>
             </a:r>
+            <a:endParaRPr lang="en-US" dirty="0"/>
           </a:p>
           <a:p>
             <a:pPr lvl="1"/>
@@ -12967,21 +14757,18 @@
               <a:rPr lang="en-US" dirty="0"/>
               <a:t>It is usually easy to criticize papers, but coming up with solutions for criticism is difficult – Try to come up with possible solutions and discuss</a:t>
             </a:r>
+            <a:endParaRPr lang="en-US" dirty="0"/>
           </a:p>
           <a:p>
             <a:r>
               <a:rPr lang="en-US" dirty="0"/>
               <a:t>How can this work be improved/extended?</a:t>
             </a:r>
+            <a:endParaRPr lang="en-US" dirty="0"/>
           </a:p>
         </p:txBody>
       </p:sp>
     </p:spTree>
-    <p:extLst>
-      <p:ext uri="{BB962C8B-B14F-4D97-AF65-F5344CB8AC3E}">
-        <p14:creationId xmlns:p14="http://schemas.microsoft.com/office/powerpoint/2010/main" val="492352973"/>
-      </p:ext>
-    </p:extLst>
   </p:cSld>
   <p:clrMapOvr>
     <a:masterClrMapping/>
@@ -12989,7 +14776,7 @@
 </p:sld>
 </file>
 
-<file path=ppt/slides/slide17.xml><?xml version="1.0" encoding="utf-8"?>
+<file path=ppt/slides/slide21.xml><?xml version="1.0" encoding="utf-8"?>
 <p:sld xmlns:a="http://schemas.openxmlformats.org/drawingml/2006/main" xmlns:r="http://schemas.openxmlformats.org/officeDocument/2006/relationships" xmlns:p="http://schemas.openxmlformats.org/presentationml/2006/main">
   <p:cSld>
     <p:spTree>
@@ -13023,8 +14810,6 @@
           <a:p>
             <a:fld id="{8A758EFE-665F-4341-B5B8-2DAEADA52F6C}" type="slidenum">
               <a:rPr lang="en-US" smtClean="0"/>
-              <a:pPr/>
-              <a:t>17</a:t>
             </a:fld>
             <a:endParaRPr lang="en-US" dirty="0"/>
           </a:p>
@@ -13049,6 +14834,7 @@
               <a:rPr lang="en-US" dirty="0"/>
               <a:t>Table Slide</a:t>
             </a:r>
+            <a:endParaRPr lang="en-US" dirty="0"/>
           </a:p>
         </p:txBody>
       </p:sp>
@@ -13060,11 +14846,6 @@
           </p:cNvGraphicFramePr>
           <p:nvPr>
             <p:ph idx="1"/>
-            <p:extLst>
-              <p:ext uri="{D42A27DB-BD31-4B8C-83A1-F6EECF244321}">
-                <p14:modId xmlns:p14="http://schemas.microsoft.com/office/powerpoint/2010/main" val="99290385"/>
-              </p:ext>
-            </p:extLst>
           </p:nvPr>
         </p:nvGraphicFramePr>
         <p:xfrm>
@@ -13078,41 +14859,11 @@
                 <a:tableStyleId>{8EC20E35-A176-4012-BC5E-935CFFF8708E}</a:tableStyleId>
               </a:tblPr>
               <a:tblGrid>
-                <a:gridCol w="1850904">
-                  <a:extLst>
-                    <a:ext uri="{9D8B030D-6E8A-4147-A177-3AD203B41FA5}">
-                      <a16:colId xmlns:a16="http://schemas.microsoft.com/office/drawing/2014/main" val="20000"/>
-                    </a:ext>
-                  </a:extLst>
-                </a:gridCol>
-                <a:gridCol w="1879019">
-                  <a:extLst>
-                    <a:ext uri="{9D8B030D-6E8A-4147-A177-3AD203B41FA5}">
-                      <a16:colId xmlns:a16="http://schemas.microsoft.com/office/drawing/2014/main" val="20001"/>
-                    </a:ext>
-                  </a:extLst>
-                </a:gridCol>
-                <a:gridCol w="1632280">
-                  <a:extLst>
-                    <a:ext uri="{9D8B030D-6E8A-4147-A177-3AD203B41FA5}">
-                      <a16:colId xmlns:a16="http://schemas.microsoft.com/office/drawing/2014/main" val="20002"/>
-                    </a:ext>
-                  </a:extLst>
-                </a:gridCol>
-                <a:gridCol w="1433698">
-                  <a:extLst>
-                    <a:ext uri="{9D8B030D-6E8A-4147-A177-3AD203B41FA5}">
-                      <a16:colId xmlns:a16="http://schemas.microsoft.com/office/drawing/2014/main" val="20003"/>
-                    </a:ext>
-                  </a:extLst>
-                </a:gridCol>
-                <a:gridCol w="1433698">
-                  <a:extLst>
-                    <a:ext uri="{9D8B030D-6E8A-4147-A177-3AD203B41FA5}">
-                      <a16:colId xmlns:a16="http://schemas.microsoft.com/office/drawing/2014/main" val="20004"/>
-                    </a:ext>
-                  </a:extLst>
-                </a:gridCol>
+                <a:gridCol w="1850904"/>
+                <a:gridCol w="1879019"/>
+                <a:gridCol w="1632280"/>
+                <a:gridCol w="1433698"/>
+                <a:gridCol w="1433698"/>
               </a:tblGrid>
               <a:tr h="278130">
                 <a:tc>
@@ -13127,6 +14878,10 @@
                         </a:rPr>
                         <a:t>Lorem</a:t>
                       </a:r>
+                      <a:endParaRPr lang="en-US" sz="1100" dirty="0">
+                        <a:latin typeface="Gill Sans"/>
+                        <a:cs typeface="Gill Sans"/>
+                      </a:endParaRPr>
                     </a:p>
                   </a:txBody>
                   <a:tcPr marT="34290" marB="34290"/>
@@ -13144,6 +14899,10 @@
                         </a:rPr>
                         <a:t>Ipsum</a:t>
                       </a:r>
+                      <a:endParaRPr lang="en-US" sz="1100" dirty="0">
+                        <a:latin typeface="Gill Sans"/>
+                        <a:cs typeface="Gill Sans"/>
+                      </a:endParaRPr>
                     </a:p>
                   </a:txBody>
                   <a:tcPr marT="34290" marB="34290"/>
@@ -13161,6 +14920,10 @@
                         </a:rPr>
                         <a:t>Dolor</a:t>
                       </a:r>
+                      <a:endParaRPr lang="en-US" sz="1100" dirty="0">
+                        <a:latin typeface="Gill Sans"/>
+                        <a:cs typeface="Gill Sans"/>
+                      </a:endParaRPr>
                     </a:p>
                   </a:txBody>
                   <a:tcPr marT="34290" marB="34290"/>
@@ -13178,6 +14941,10 @@
                         </a:rPr>
                         <a:t>Closit</a:t>
                       </a:r>
+                      <a:endParaRPr lang="en-US" sz="1100" dirty="0">
+                        <a:latin typeface="Gill Sans"/>
+                        <a:cs typeface="Gill Sans"/>
+                      </a:endParaRPr>
                     </a:p>
                   </a:txBody>
                   <a:tcPr marT="34290" marB="34290"/>
@@ -13195,15 +14962,14 @@
                         </a:rPr>
                         <a:t>Amet</a:t>
                       </a:r>
+                      <a:endParaRPr lang="en-US" sz="1100" dirty="0">
+                        <a:latin typeface="Gill Sans"/>
+                        <a:cs typeface="Gill Sans"/>
+                      </a:endParaRPr>
                     </a:p>
                   </a:txBody>
                   <a:tcPr marT="34290" marB="34290"/>
                 </a:tc>
-                <a:extLst>
-                  <a:ext uri="{0D108BD9-81ED-4DB2-BD59-A6C34878D82A}">
-                    <a16:rowId xmlns:a16="http://schemas.microsoft.com/office/drawing/2014/main" val="10000"/>
-                  </a:ext>
-                </a:extLst>
               </a:tr>
               <a:tr h="278130">
                 <a:tc>
@@ -13218,6 +14984,10 @@
                         </a:rPr>
                         <a:t>Lorem</a:t>
                       </a:r>
+                      <a:endParaRPr lang="en-US" sz="1200" dirty="0">
+                        <a:latin typeface="Gill Sans"/>
+                        <a:cs typeface="Gill Sans"/>
+                      </a:endParaRPr>
                     </a:p>
                   </a:txBody>
                   <a:tcPr marT="34290" marB="34290"/>
@@ -13305,15 +15075,14 @@
                         </a:rPr>
                         <a:t>Amet</a:t>
                       </a:r>
+                      <a:endParaRPr lang="en-US" sz="1100" dirty="0">
+                        <a:latin typeface="Gill Sans"/>
+                        <a:cs typeface="Gill Sans"/>
+                      </a:endParaRPr>
                     </a:p>
                   </a:txBody>
                   <a:tcPr marT="34290" marB="34290"/>
                 </a:tc>
-                <a:extLst>
-                  <a:ext uri="{0D108BD9-81ED-4DB2-BD59-A6C34878D82A}">
-                    <a16:rowId xmlns:a16="http://schemas.microsoft.com/office/drawing/2014/main" val="10001"/>
-                  </a:ext>
-                </a:extLst>
               </a:tr>
               <a:tr h="278130">
                 <a:tc>
@@ -13419,15 +15188,14 @@
                         </a:rPr>
                         <a:t>Amet</a:t>
                       </a:r>
+                      <a:endParaRPr lang="en-US" sz="1100" dirty="0">
+                        <a:latin typeface="Gill Sans"/>
+                        <a:cs typeface="Gill Sans"/>
+                      </a:endParaRPr>
                     </a:p>
                   </a:txBody>
                   <a:tcPr marT="34290" marB="34290"/>
                 </a:tc>
-                <a:extLst>
-                  <a:ext uri="{0D108BD9-81ED-4DB2-BD59-A6C34878D82A}">
-                    <a16:rowId xmlns:a16="http://schemas.microsoft.com/office/drawing/2014/main" val="10002"/>
-                  </a:ext>
-                </a:extLst>
               </a:tr>
               <a:tr h="278130">
                 <a:tc>
@@ -13533,15 +15301,14 @@
                         </a:rPr>
                         <a:t>Amet</a:t>
                       </a:r>
+                      <a:endParaRPr lang="en-US" sz="1100" dirty="0">
+                        <a:latin typeface="Gill Sans"/>
+                        <a:cs typeface="Gill Sans"/>
+                      </a:endParaRPr>
                     </a:p>
                   </a:txBody>
                   <a:tcPr marT="34290" marB="34290"/>
                 </a:tc>
-                <a:extLst>
-                  <a:ext uri="{0D108BD9-81ED-4DB2-BD59-A6C34878D82A}">
-                    <a16:rowId xmlns:a16="http://schemas.microsoft.com/office/drawing/2014/main" val="10003"/>
-                  </a:ext>
-                </a:extLst>
               </a:tr>
               <a:tr h="278130">
                 <a:tc>
@@ -13647,15 +15414,14 @@
                         </a:rPr>
                         <a:t>Amet</a:t>
                       </a:r>
+                      <a:endParaRPr lang="en-US" sz="1100" dirty="0">
+                        <a:latin typeface="Gill Sans"/>
+                        <a:cs typeface="Gill Sans"/>
+                      </a:endParaRPr>
                     </a:p>
                   </a:txBody>
                   <a:tcPr marT="34290" marB="34290"/>
                 </a:tc>
-                <a:extLst>
-                  <a:ext uri="{0D108BD9-81ED-4DB2-BD59-A6C34878D82A}">
-                    <a16:rowId xmlns:a16="http://schemas.microsoft.com/office/drawing/2014/main" val="10004"/>
-                  </a:ext>
-                </a:extLst>
               </a:tr>
               <a:tr h="278130">
                 <a:tc>
@@ -13761,15 +15527,14 @@
                         </a:rPr>
                         <a:t>Amet</a:t>
                       </a:r>
+                      <a:endParaRPr lang="en-US" sz="1100" dirty="0">
+                        <a:latin typeface="Gill Sans"/>
+                        <a:cs typeface="Gill Sans"/>
+                      </a:endParaRPr>
                     </a:p>
                   </a:txBody>
                   <a:tcPr marT="34290" marB="34290"/>
                 </a:tc>
-                <a:extLst>
-                  <a:ext uri="{0D108BD9-81ED-4DB2-BD59-A6C34878D82A}">
-                    <a16:rowId xmlns:a16="http://schemas.microsoft.com/office/drawing/2014/main" val="10005"/>
-                  </a:ext>
-                </a:extLst>
               </a:tr>
               <a:tr h="278130">
                 <a:tc>
@@ -13857,7 +15622,6 @@
                         <a:buSzTx/>
                         <a:buFontTx/>
                         <a:buNone/>
-                        <a:tabLst/>
                         <a:defRPr/>
                       </a:pPr>
                       <a:r>
@@ -13891,15 +15655,14 @@
                         </a:rPr>
                         <a:t>Amet</a:t>
                       </a:r>
+                      <a:endParaRPr lang="en-US" sz="1100" dirty="0">
+                        <a:latin typeface="Gill Sans"/>
+                        <a:cs typeface="Gill Sans"/>
+                      </a:endParaRPr>
                     </a:p>
                   </a:txBody>
                   <a:tcPr marT="34290" marB="34290"/>
                 </a:tc>
-                <a:extLst>
-                  <a:ext uri="{0D108BD9-81ED-4DB2-BD59-A6C34878D82A}">
-                    <a16:rowId xmlns:a16="http://schemas.microsoft.com/office/drawing/2014/main" val="10006"/>
-                  </a:ext>
-                </a:extLst>
               </a:tr>
               <a:tr h="278130">
                 <a:tc>
@@ -14005,26 +15768,20 @@
                         </a:rPr>
                         <a:t>Amet</a:t>
                       </a:r>
+                      <a:endParaRPr lang="en-US" sz="1100" dirty="0">
+                        <a:latin typeface="Gill Sans"/>
+                        <a:cs typeface="Gill Sans"/>
+                      </a:endParaRPr>
                     </a:p>
                   </a:txBody>
                   <a:tcPr marT="34290" marB="34290"/>
                 </a:tc>
-                <a:extLst>
-                  <a:ext uri="{0D108BD9-81ED-4DB2-BD59-A6C34878D82A}">
-                    <a16:rowId xmlns:a16="http://schemas.microsoft.com/office/drawing/2014/main" val="10007"/>
-                  </a:ext>
-                </a:extLst>
               </a:tr>
             </a:tbl>
           </a:graphicData>
         </a:graphic>
       </p:graphicFrame>
     </p:spTree>
-    <p:extLst>
-      <p:ext uri="{BB962C8B-B14F-4D97-AF65-F5344CB8AC3E}">
-        <p14:creationId xmlns:p14="http://schemas.microsoft.com/office/powerpoint/2010/main" val="1077290256"/>
-      </p:ext>
-    </p:extLst>
   </p:cSld>
   <p:clrMapOvr>
     <a:masterClrMapping/>
@@ -14032,7 +15789,7 @@
 </p:sld>
 </file>
 
-<file path=ppt/slides/slide18.xml><?xml version="1.0" encoding="utf-8"?>
+<file path=ppt/slides/slide22.xml><?xml version="1.0" encoding="utf-8"?>
 <p:sld xmlns:a="http://schemas.openxmlformats.org/drawingml/2006/main" xmlns:r="http://schemas.openxmlformats.org/officeDocument/2006/relationships" xmlns:p="http://schemas.openxmlformats.org/presentationml/2006/main">
   <p:cSld>
     <p:spTree>
@@ -14066,8 +15823,6 @@
           <a:p>
             <a:fld id="{8A758EFE-665F-4341-B5B8-2DAEADA52F6C}" type="slidenum">
               <a:rPr lang="en-US" smtClean="0"/>
-              <a:pPr/>
-              <a:t>18</a:t>
             </a:fld>
             <a:endParaRPr lang="en-US" dirty="0"/>
           </a:p>
@@ -14092,6 +15847,7 @@
               <a:rPr lang="en-US" dirty="0"/>
               <a:t>Chart Slide</a:t>
             </a:r>
+            <a:endParaRPr lang="en-US" dirty="0"/>
           </a:p>
         </p:txBody>
       </p:sp>
@@ -14103,11 +15859,6 @@
           </p:cNvGraphicFramePr>
           <p:nvPr>
             <p:ph idx="1"/>
-            <p:extLst>
-              <p:ext uri="{D42A27DB-BD31-4B8C-83A1-F6EECF244321}">
-                <p14:modId xmlns:p14="http://schemas.microsoft.com/office/powerpoint/2010/main" val="781776731"/>
-              </p:ext>
-            </p:extLst>
           </p:nvPr>
         </p:nvGraphicFramePr>
         <p:xfrm>
@@ -14116,16 +15867,11 @@
         </p:xfrm>
         <a:graphic>
           <a:graphicData uri="http://schemas.openxmlformats.org/drawingml/2006/chart">
-            <c:chart xmlns:c="http://schemas.openxmlformats.org/drawingml/2006/chart" xmlns:r="http://schemas.openxmlformats.org/officeDocument/2006/relationships" r:id="rId2"/>
+            <c:chart xmlns:c="http://schemas.openxmlformats.org/drawingml/2006/chart" xmlns:r="http://schemas.openxmlformats.org/officeDocument/2006/relationships" r:id="rId1"/>
           </a:graphicData>
         </a:graphic>
       </p:graphicFrame>
     </p:spTree>
-    <p:extLst>
-      <p:ext uri="{BB962C8B-B14F-4D97-AF65-F5344CB8AC3E}">
-        <p14:creationId xmlns:p14="http://schemas.microsoft.com/office/powerpoint/2010/main" val="3853516268"/>
-      </p:ext>
-    </p:extLst>
   </p:cSld>
   <p:clrMapOvr>
     <a:masterClrMapping/>
@@ -14133,7 +15879,7 @@
 </p:sld>
 </file>
 
-<file path=ppt/slides/slide2.xml><?xml version="1.0" encoding="utf-8"?>
+<file path=ppt/slides/slide3.xml><?xml version="1.0" encoding="utf-8"?>
 <p:sld xmlns:a="http://schemas.openxmlformats.org/drawingml/2006/main" xmlns:r="http://schemas.openxmlformats.org/officeDocument/2006/relationships" xmlns:p="http://schemas.openxmlformats.org/presentationml/2006/main">
   <p:cSld>
     <p:spTree>
@@ -14167,8 +15913,6 @@
           <a:p>
             <a:fld id="{8A758EFE-665F-4341-B5B8-2DAEADA52F6C}" type="slidenum">
               <a:rPr lang="en-US" smtClean="0"/>
-              <a:pPr/>
-              <a:t>2</a:t>
             </a:fld>
             <a:endParaRPr lang="en-US" dirty="0"/>
           </a:p>
@@ -14184,7 +15928,12 @@
             <p:ph type="title"/>
           </p:nvPr>
         </p:nvSpPr>
-        <p:spPr/>
+        <p:spPr>
+          <a:xfrm>
+            <a:off x="310152" y="170657"/>
+            <a:ext cx="8229600" cy="693605"/>
+          </a:xfrm>
+        </p:spPr>
         <p:txBody>
           <a:bodyPr>
             <a:normAutofit/>
@@ -14193,17 +15942,16 @@
           <a:p>
             <a:r>
               <a:rPr lang="en-US" dirty="0"/>
-              <a:t>Objective</a:t>
-            </a:r>
+              <a:t>Value Proposition</a:t>
+            </a:r>
+            <a:endParaRPr lang="en-US" dirty="0"/>
           </a:p>
         </p:txBody>
       </p:sp>
       <p:sp>
         <p:nvSpPr>
           <p:cNvPr id="5" name="Content Placeholder 3"/>
-          <p:cNvSpPr txBox="1">
-            <a:spLocks/>
-          </p:cNvSpPr>
+          <p:cNvSpPr txBox="1"/>
           <p:nvPr/>
         </p:nvSpPr>
         <p:spPr>
@@ -14227,7 +15975,7 @@
               <a:buClr>
                 <a:schemeClr val="tx1"/>
               </a:buClr>
-              <a:buFont typeface="Arial"/>
+              <a:buFont typeface="Arial" panose="020B0604020202020204"/>
               <a:buChar char="•"/>
               <a:defRPr sz="2800" kern="1200">
                 <a:solidFill>
@@ -14245,7 +15993,7 @@
               <a:buClr>
                 <a:schemeClr val="tx1"/>
               </a:buClr>
-              <a:buFont typeface="Arial"/>
+              <a:buFont typeface="Arial" panose="020B0604020202020204"/>
               <a:buChar char="–"/>
               <a:defRPr sz="2400" kern="1200">
                 <a:solidFill>
@@ -14263,7 +16011,7 @@
               <a:buClr>
                 <a:schemeClr val="tx1"/>
               </a:buClr>
-              <a:buFont typeface="Arial"/>
+              <a:buFont typeface="Arial" panose="020B0604020202020204"/>
               <a:buChar char="•"/>
               <a:defRPr sz="2000" kern="1200">
                 <a:solidFill>
@@ -14281,7 +16029,7 @@
               <a:buClr>
                 <a:schemeClr val="tx1"/>
               </a:buClr>
-              <a:buFont typeface="Arial"/>
+              <a:buFont typeface="Arial" panose="020B0604020202020204"/>
               <a:buChar char="–"/>
               <a:defRPr sz="1800" kern="1200">
                 <a:solidFill>
@@ -14299,7 +16047,7 @@
               <a:buClr>
                 <a:schemeClr val="tx1"/>
               </a:buClr>
-              <a:buFont typeface="Arial"/>
+              <a:buFont typeface="Arial" panose="020B0604020202020204"/>
               <a:buChar char="»"/>
               <a:defRPr sz="1800" kern="1200">
                 <a:solidFill>
@@ -14314,7 +16062,7 @@
               <a:spcBef>
                 <a:spcPct val="20000"/>
               </a:spcBef>
-              <a:buFont typeface="Arial"/>
+              <a:buFont typeface="Arial" panose="020B0604020202020204"/>
               <a:buChar char="•"/>
               <a:defRPr sz="2000" kern="1200">
                 <a:solidFill>
@@ -14329,7 +16077,7 @@
               <a:spcBef>
                 <a:spcPct val="20000"/>
               </a:spcBef>
-              <a:buFont typeface="Arial"/>
+              <a:buFont typeface="Arial" panose="020B0604020202020204"/>
               <a:buChar char="•"/>
               <a:defRPr sz="2000" kern="1200">
                 <a:solidFill>
@@ -14344,7 +16092,7 @@
               <a:spcBef>
                 <a:spcPct val="20000"/>
               </a:spcBef>
-              <a:buFont typeface="Arial"/>
+              <a:buFont typeface="Arial" panose="020B0604020202020204"/>
               <a:buChar char="•"/>
               <a:defRPr sz="2000" kern="1200">
                 <a:solidFill>
@@ -14359,7 +16107,7 @@
               <a:spcBef>
                 <a:spcPct val="20000"/>
               </a:spcBef>
-              <a:buFont typeface="Arial"/>
+              <a:buFont typeface="Arial" panose="020B0604020202020204"/>
               <a:buChar char="•"/>
               <a:defRPr sz="2000" kern="1200">
                 <a:solidFill>
@@ -14378,387 +16126,7 @@
       </p:sp>
       <p:sp>
         <p:nvSpPr>
-          <p:cNvPr id="4" name="TextBox 3">
-            <a:extLst>
-              <a:ext uri="{FF2B5EF4-FFF2-40B4-BE49-F238E27FC236}">
-                <a16:creationId xmlns:a16="http://schemas.microsoft.com/office/drawing/2014/main" id="{8FA58248-145D-2883-511E-852C4AA60C29}"/>
-              </a:ext>
-            </a:extLst>
-          </p:cNvPr>
-          <p:cNvSpPr txBox="1"/>
-          <p:nvPr/>
-        </p:nvSpPr>
-        <p:spPr>
-          <a:xfrm>
-            <a:off x="310152" y="1925419"/>
-            <a:ext cx="8737601" cy="1384995"/>
-          </a:xfrm>
-          <a:prstGeom prst="rect">
-            <a:avLst/>
-          </a:prstGeom>
-          <a:noFill/>
-        </p:spPr>
-        <p:txBody>
-          <a:bodyPr wrap="square" rtlCol="0">
-            <a:spAutoFit/>
-          </a:bodyPr>
-          <a:lstStyle/>
-          <a:p>
-            <a:r>
-              <a:rPr lang="en-US" sz="2800" dirty="0">
-                <a:solidFill>
-                  <a:schemeClr val="accent6"/>
-                </a:solidFill>
-                <a:latin typeface="Gill Sans"/>
-                <a:cs typeface="Gill Sans"/>
-              </a:rPr>
-              <a:t>Model and interpret how contextual factors influence the reporting of UFO shapes using NUFORC sighting data from the late 20th century to the present.</a:t>
-            </a:r>
-            <a:endParaRPr lang="en-CN" sz="2800" dirty="0">
-              <a:solidFill>
-                <a:schemeClr val="accent6"/>
-              </a:solidFill>
-              <a:latin typeface="Gill Sans"/>
-              <a:cs typeface="Gill Sans"/>
-            </a:endParaRPr>
-          </a:p>
-        </p:txBody>
-      </p:sp>
-      <p:sp>
-        <p:nvSpPr>
-          <p:cNvPr id="7" name="TextBox 6">
-            <a:extLst>
-              <a:ext uri="{FF2B5EF4-FFF2-40B4-BE49-F238E27FC236}">
-                <a16:creationId xmlns:a16="http://schemas.microsoft.com/office/drawing/2014/main" id="{5D33659F-46BA-C74A-0AE0-650118AA523C}"/>
-              </a:ext>
-            </a:extLst>
-          </p:cNvPr>
-          <p:cNvSpPr txBox="1"/>
-          <p:nvPr/>
-        </p:nvSpPr>
-        <p:spPr>
-          <a:xfrm>
-            <a:off x="310152" y="3894723"/>
-            <a:ext cx="3824701" cy="338554"/>
-          </a:xfrm>
-          <a:prstGeom prst="rect">
-            <a:avLst/>
-          </a:prstGeom>
-          <a:noFill/>
-        </p:spPr>
-        <p:txBody>
-          <a:bodyPr wrap="none" rtlCol="0">
-            <a:spAutoFit/>
-          </a:bodyPr>
-          <a:lstStyle/>
-          <a:p>
-            <a:r>
-              <a:rPr lang="en-CN" sz="1600" dirty="0">
-                <a:solidFill>
-                  <a:schemeClr val="bg1">
-                    <a:lumMod val="50000"/>
-                  </a:schemeClr>
-                </a:solidFill>
-              </a:rPr>
-              <a:t>NUFORC: National UFO Reporting Center</a:t>
-            </a:r>
-          </a:p>
-        </p:txBody>
-      </p:sp>
-    </p:spTree>
-    <p:extLst>
-      <p:ext uri="{BB962C8B-B14F-4D97-AF65-F5344CB8AC3E}">
-        <p14:creationId xmlns:p14="http://schemas.microsoft.com/office/powerpoint/2010/main" val="421809389"/>
-      </p:ext>
-    </p:extLst>
-  </p:cSld>
-  <p:clrMapOvr>
-    <a:masterClrMapping/>
-  </p:clrMapOvr>
-</p:sld>
-</file>
-
-<file path=ppt/slides/slide3.xml><?xml version="1.0" encoding="utf-8"?>
-<p:sld xmlns:a="http://schemas.openxmlformats.org/drawingml/2006/main" xmlns:r="http://schemas.openxmlformats.org/officeDocument/2006/relationships" xmlns:p="http://schemas.openxmlformats.org/presentationml/2006/main">
-  <p:cSld>
-    <p:spTree>
-      <p:nvGrpSpPr>
-        <p:cNvPr id="1" name="">
-          <a:extLst>
-            <a:ext uri="{FF2B5EF4-FFF2-40B4-BE49-F238E27FC236}">
-              <a16:creationId xmlns:a16="http://schemas.microsoft.com/office/drawing/2014/main" id="{2990CB63-F76A-A5F6-BC01-BCE4966B152C}"/>
-            </a:ext>
-          </a:extLst>
-        </p:cNvPr>
-        <p:cNvGrpSpPr/>
-        <p:nvPr/>
-      </p:nvGrpSpPr>
-      <p:grpSpPr>
-        <a:xfrm>
-          <a:off x="0" y="0"/>
-          <a:ext cx="0" cy="0"/>
-          <a:chOff x="0" y="0"/>
-          <a:chExt cx="0" cy="0"/>
-        </a:xfrm>
-      </p:grpSpPr>
-      <p:sp>
-        <p:nvSpPr>
-          <p:cNvPr id="2" name="Slide Number Placeholder 1">
-            <a:extLst>
-              <a:ext uri="{FF2B5EF4-FFF2-40B4-BE49-F238E27FC236}">
-                <a16:creationId xmlns:a16="http://schemas.microsoft.com/office/drawing/2014/main" id="{1B88C7CA-6E5D-9AC7-013B-E7DE33462FA6}"/>
-              </a:ext>
-            </a:extLst>
-          </p:cNvPr>
-          <p:cNvSpPr>
-            <a:spLocks noGrp="1"/>
-          </p:cNvSpPr>
-          <p:nvPr>
-            <p:ph type="sldNum" sz="quarter" idx="12"/>
-          </p:nvPr>
-        </p:nvSpPr>
-        <p:spPr/>
-        <p:txBody>
-          <a:bodyPr/>
-          <a:lstStyle/>
-          <a:p>
-            <a:fld id="{8A758EFE-665F-4341-B5B8-2DAEADA52F6C}" type="slidenum">
-              <a:rPr lang="en-US" smtClean="0"/>
-              <a:pPr/>
-              <a:t>3</a:t>
-            </a:fld>
-            <a:endParaRPr lang="en-US" dirty="0"/>
-          </a:p>
-        </p:txBody>
-      </p:sp>
-      <p:sp>
-        <p:nvSpPr>
-          <p:cNvPr id="3" name="Title 2">
-            <a:extLst>
-              <a:ext uri="{FF2B5EF4-FFF2-40B4-BE49-F238E27FC236}">
-                <a16:creationId xmlns:a16="http://schemas.microsoft.com/office/drawing/2014/main" id="{91BC87DE-C65C-AA01-3D1C-BC77E5A04095}"/>
-              </a:ext>
-            </a:extLst>
-          </p:cNvPr>
-          <p:cNvSpPr>
-            <a:spLocks noGrp="1"/>
-          </p:cNvSpPr>
-          <p:nvPr>
-            <p:ph type="title"/>
-          </p:nvPr>
-        </p:nvSpPr>
-        <p:spPr>
-          <a:xfrm>
-            <a:off x="310152" y="170657"/>
-            <a:ext cx="8229600" cy="693605"/>
-          </a:xfrm>
-        </p:spPr>
-        <p:txBody>
-          <a:bodyPr>
-            <a:normAutofit/>
-          </a:bodyPr>
-          <a:lstStyle/>
-          <a:p>
-            <a:r>
-              <a:rPr lang="en-US" dirty="0"/>
-              <a:t>Value Proposition</a:t>
-            </a:r>
-          </a:p>
-        </p:txBody>
-      </p:sp>
-      <p:sp>
-        <p:nvSpPr>
-          <p:cNvPr id="5" name="Content Placeholder 3">
-            <a:extLst>
-              <a:ext uri="{FF2B5EF4-FFF2-40B4-BE49-F238E27FC236}">
-                <a16:creationId xmlns:a16="http://schemas.microsoft.com/office/drawing/2014/main" id="{CC481432-0CDF-F099-C9BE-39201843D9E4}"/>
-              </a:ext>
-            </a:extLst>
-          </p:cNvPr>
-          <p:cNvSpPr txBox="1">
-            <a:spLocks/>
-          </p:cNvSpPr>
-          <p:nvPr/>
-        </p:nvSpPr>
-        <p:spPr>
-          <a:xfrm>
-            <a:off x="457199" y="1016001"/>
-            <a:ext cx="7890933" cy="3578622"/>
-          </a:xfrm>
-          <a:prstGeom prst="rect">
-            <a:avLst/>
-          </a:prstGeom>
-        </p:spPr>
-        <p:txBody>
-          <a:bodyPr>
-            <a:normAutofit/>
-          </a:bodyPr>
-          <a:lstStyle>
-            <a:lvl1pPr marL="342900" indent="-342900" algn="l" defTabSz="457200" rtl="0" eaLnBrk="1" latinLnBrk="0" hangingPunct="1">
-              <a:spcBef>
-                <a:spcPct val="20000"/>
-              </a:spcBef>
-              <a:buClr>
-                <a:schemeClr val="tx1"/>
-              </a:buClr>
-              <a:buFont typeface="Arial"/>
-              <a:buChar char="•"/>
-              <a:defRPr sz="2800" kern="1200">
-                <a:solidFill>
-                  <a:schemeClr val="accent6"/>
-                </a:solidFill>
-                <a:latin typeface="Gill Sans"/>
-                <a:ea typeface="+mn-ea"/>
-                <a:cs typeface="Gill Sans"/>
-              </a:defRPr>
-            </a:lvl1pPr>
-            <a:lvl2pPr marL="742950" indent="-285750" algn="l" defTabSz="457200" rtl="0" eaLnBrk="1" latinLnBrk="0" hangingPunct="1">
-              <a:spcBef>
-                <a:spcPct val="20000"/>
-              </a:spcBef>
-              <a:buClr>
-                <a:schemeClr val="tx1"/>
-              </a:buClr>
-              <a:buFont typeface="Arial"/>
-              <a:buChar char="–"/>
-              <a:defRPr sz="2400" kern="1200">
-                <a:solidFill>
-                  <a:schemeClr val="accent6"/>
-                </a:solidFill>
-                <a:latin typeface="Gill Sans"/>
-                <a:ea typeface="+mn-ea"/>
-                <a:cs typeface="Gill Sans"/>
-              </a:defRPr>
-            </a:lvl2pPr>
-            <a:lvl3pPr marL="1143000" indent="-228600" algn="l" defTabSz="457200" rtl="0" eaLnBrk="1" latinLnBrk="0" hangingPunct="1">
-              <a:spcBef>
-                <a:spcPct val="20000"/>
-              </a:spcBef>
-              <a:buClr>
-                <a:schemeClr val="tx1"/>
-              </a:buClr>
-              <a:buFont typeface="Arial"/>
-              <a:buChar char="•"/>
-              <a:defRPr sz="2000" kern="1200">
-                <a:solidFill>
-                  <a:schemeClr val="accent6"/>
-                </a:solidFill>
-                <a:latin typeface="Gill Sans"/>
-                <a:ea typeface="+mn-ea"/>
-                <a:cs typeface="Gill Sans"/>
-              </a:defRPr>
-            </a:lvl3pPr>
-            <a:lvl4pPr marL="1600200" indent="-228600" algn="l" defTabSz="457200" rtl="0" eaLnBrk="1" latinLnBrk="0" hangingPunct="1">
-              <a:spcBef>
-                <a:spcPct val="20000"/>
-              </a:spcBef>
-              <a:buClr>
-                <a:schemeClr val="tx1"/>
-              </a:buClr>
-              <a:buFont typeface="Arial"/>
-              <a:buChar char="–"/>
-              <a:defRPr sz="1800" kern="1200">
-                <a:solidFill>
-                  <a:schemeClr val="accent6"/>
-                </a:solidFill>
-                <a:latin typeface="Gill Sans"/>
-                <a:ea typeface="+mn-ea"/>
-                <a:cs typeface="Gill Sans"/>
-              </a:defRPr>
-            </a:lvl4pPr>
-            <a:lvl5pPr marL="2057400" indent="-228600" algn="l" defTabSz="457200" rtl="0" eaLnBrk="1" latinLnBrk="0" hangingPunct="1">
-              <a:spcBef>
-                <a:spcPct val="20000"/>
-              </a:spcBef>
-              <a:buClr>
-                <a:schemeClr val="tx1"/>
-              </a:buClr>
-              <a:buFont typeface="Arial"/>
-              <a:buChar char="»"/>
-              <a:defRPr sz="1800" kern="1200">
-                <a:solidFill>
-                  <a:schemeClr val="accent6"/>
-                </a:solidFill>
-                <a:latin typeface="Gill Sans"/>
-                <a:ea typeface="+mn-ea"/>
-                <a:cs typeface="Gill Sans"/>
-              </a:defRPr>
-            </a:lvl5pPr>
-            <a:lvl6pPr marL="2514600" indent="-228600" algn="l" defTabSz="457200" rtl="0" eaLnBrk="1" latinLnBrk="0" hangingPunct="1">
-              <a:spcBef>
-                <a:spcPct val="20000"/>
-              </a:spcBef>
-              <a:buFont typeface="Arial"/>
-              <a:buChar char="•"/>
-              <a:defRPr sz="2000" kern="1200">
-                <a:solidFill>
-                  <a:schemeClr val="tx1"/>
-                </a:solidFill>
-                <a:latin typeface="+mn-lt"/>
-                <a:ea typeface="+mn-ea"/>
-                <a:cs typeface="+mn-cs"/>
-              </a:defRPr>
-            </a:lvl6pPr>
-            <a:lvl7pPr marL="2971800" indent="-228600" algn="l" defTabSz="457200" rtl="0" eaLnBrk="1" latinLnBrk="0" hangingPunct="1">
-              <a:spcBef>
-                <a:spcPct val="20000"/>
-              </a:spcBef>
-              <a:buFont typeface="Arial"/>
-              <a:buChar char="•"/>
-              <a:defRPr sz="2000" kern="1200">
-                <a:solidFill>
-                  <a:schemeClr val="tx1"/>
-                </a:solidFill>
-                <a:latin typeface="+mn-lt"/>
-                <a:ea typeface="+mn-ea"/>
-                <a:cs typeface="+mn-cs"/>
-              </a:defRPr>
-            </a:lvl7pPr>
-            <a:lvl8pPr marL="3429000" indent="-228600" algn="l" defTabSz="457200" rtl="0" eaLnBrk="1" latinLnBrk="0" hangingPunct="1">
-              <a:spcBef>
-                <a:spcPct val="20000"/>
-              </a:spcBef>
-              <a:buFont typeface="Arial"/>
-              <a:buChar char="•"/>
-              <a:defRPr sz="2000" kern="1200">
-                <a:solidFill>
-                  <a:schemeClr val="tx1"/>
-                </a:solidFill>
-                <a:latin typeface="+mn-lt"/>
-                <a:ea typeface="+mn-ea"/>
-                <a:cs typeface="+mn-cs"/>
-              </a:defRPr>
-            </a:lvl8pPr>
-            <a:lvl9pPr marL="3886200" indent="-228600" algn="l" defTabSz="457200" rtl="0" eaLnBrk="1" latinLnBrk="0" hangingPunct="1">
-              <a:spcBef>
-                <a:spcPct val="20000"/>
-              </a:spcBef>
-              <a:buFont typeface="Arial"/>
-              <a:buChar char="•"/>
-              <a:defRPr sz="2000" kern="1200">
-                <a:solidFill>
-                  <a:schemeClr val="tx1"/>
-                </a:solidFill>
-                <a:latin typeface="+mn-lt"/>
-                <a:ea typeface="+mn-ea"/>
-                <a:cs typeface="+mn-cs"/>
-              </a:defRPr>
-            </a:lvl9pPr>
-          </a:lstStyle>
-          <a:p>
-            <a:endParaRPr lang="en-US" dirty="0"/>
-          </a:p>
-        </p:txBody>
-      </p:sp>
-      <p:sp>
-        <p:nvSpPr>
-          <p:cNvPr id="4" name="TextBox 3">
-            <a:extLst>
-              <a:ext uri="{FF2B5EF4-FFF2-40B4-BE49-F238E27FC236}">
-                <a16:creationId xmlns:a16="http://schemas.microsoft.com/office/drawing/2014/main" id="{8483FFBE-E115-FD7C-2629-5869110B2DDE}"/>
-              </a:ext>
-            </a:extLst>
-          </p:cNvPr>
+          <p:cNvPr id="4" name="TextBox 3"/>
           <p:cNvSpPr txBox="1"/>
           <p:nvPr/>
         </p:nvSpPr>
@@ -14899,9 +16267,7 @@
               </a:rPr>
               <a:t>Ultimately, this work helps clarify whether reported UFO shapes reflect actual aerial anomalies, or if they are shaped more by human interpretation, environment, and culture.</a:t>
             </a:r>
-          </a:p>
-          <a:p>
-            <a:endParaRPr lang="en-CN" sz="2800" dirty="0">
+            <a:endParaRPr lang="en-US" sz="2000" dirty="0">
               <a:solidFill>
                 <a:schemeClr val="accent6"/>
               </a:solidFill>
@@ -14909,17 +16275,20 @@
               <a:cs typeface="Gill Sans"/>
             </a:endParaRPr>
           </a:p>
+          <a:p>
+            <a:endParaRPr lang="en-US" sz="2800" dirty="0">
+              <a:solidFill>
+                <a:schemeClr val="accent6"/>
+              </a:solidFill>
+              <a:latin typeface="Gill Sans"/>
+              <a:cs typeface="Gill Sans"/>
+            </a:endParaRPr>
+          </a:p>
         </p:txBody>
       </p:sp>
       <p:sp>
         <p:nvSpPr>
-          <p:cNvPr id="7" name="TextBox 6">
-            <a:extLst>
-              <a:ext uri="{FF2B5EF4-FFF2-40B4-BE49-F238E27FC236}">
-                <a16:creationId xmlns:a16="http://schemas.microsoft.com/office/drawing/2014/main" id="{E29140F4-E9A2-DF02-D35D-D8D13CB79F66}"/>
-              </a:ext>
-            </a:extLst>
-          </p:cNvPr>
+          <p:cNvPr id="7" name="TextBox 6"/>
           <p:cNvSpPr txBox="1"/>
           <p:nvPr/>
         </p:nvSpPr>
@@ -14940,11 +16309,11 @@
           <a:lstStyle/>
           <a:p>
             <a:r>
-              <a:rPr lang="en-CN" dirty="0"/>
+              <a:rPr lang="en-US" dirty="0"/>
               <a:t>-</a:t>
             </a:r>
             <a:r>
-              <a:rPr lang="en-CN" sz="1600" dirty="0"/>
+              <a:rPr lang="en-US" sz="1600" dirty="0"/>
               <a:t>  </a:t>
             </a:r>
             <a:r>
@@ -14955,12 +16324,14 @@
               <a:rPr lang="en-US" sz="1600" b="1" dirty="0"/>
               <a:t>actual observational features</a:t>
             </a:r>
+            <a:endParaRPr lang="en-US" sz="1600" b="1" dirty="0"/>
           </a:p>
           <a:p>
             <a:r>
               <a:rPr lang="en-US" sz="1600" dirty="0"/>
               <a:t>   e.g., distance to UFO, duration of UFO</a:t>
             </a:r>
+            <a:endParaRPr lang="en-US" sz="1600" dirty="0"/>
           </a:p>
           <a:p>
             <a:endParaRPr lang="en-US" sz="1600" dirty="0"/>
@@ -14978,12 +16349,14 @@
               <a:rPr lang="en-US" sz="1600" dirty="0"/>
               <a:t> that may indicate environmental causes to </a:t>
             </a:r>
+            <a:endParaRPr lang="en-US" sz="1600" dirty="0"/>
           </a:p>
           <a:p>
             <a:r>
               <a:rPr lang="en-US" sz="1600" dirty="0"/>
               <a:t>UFO shapes.</a:t>
             </a:r>
+            <a:endParaRPr lang="en-US" sz="1600" dirty="0"/>
           </a:p>
           <a:p>
             <a:endParaRPr lang="en-US" sz="1600" dirty="0"/>
@@ -15001,24 +16374,20 @@
               <a:rPr lang="en-US" sz="1600" dirty="0"/>
               <a:t>.</a:t>
             </a:r>
+            <a:endParaRPr lang="en-US" sz="1600" dirty="0"/>
           </a:p>
           <a:p>
             <a:r>
               <a:rPr lang="en-US" sz="1600" dirty="0"/>
               <a:t>   e.g., culture, literacy, population density</a:t>
             </a:r>
+            <a:endParaRPr lang="en-US" sz="1600" dirty="0"/>
           </a:p>
         </p:txBody>
       </p:sp>
       <p:sp>
         <p:nvSpPr>
-          <p:cNvPr id="9" name="TextBox 8">
-            <a:extLst>
-              <a:ext uri="{FF2B5EF4-FFF2-40B4-BE49-F238E27FC236}">
-                <a16:creationId xmlns:a16="http://schemas.microsoft.com/office/drawing/2014/main" id="{321F7A97-0851-175F-583F-89CF491C2B79}"/>
-              </a:ext>
-            </a:extLst>
-          </p:cNvPr>
+          <p:cNvPr id="9" name="TextBox 8"/>
           <p:cNvSpPr txBox="1"/>
           <p:nvPr/>
         </p:nvSpPr>
@@ -15042,16 +16411,11 @@
               <a:rPr lang="en-US" sz="1600" dirty="0"/>
               <a:t>Our project allows us to:</a:t>
             </a:r>
-            <a:endParaRPr lang="en-CN" sz="1600" dirty="0"/>
+            <a:endParaRPr lang="en-US" sz="1600" dirty="0"/>
           </a:p>
         </p:txBody>
       </p:sp>
     </p:spTree>
-    <p:extLst>
-      <p:ext uri="{BB962C8B-B14F-4D97-AF65-F5344CB8AC3E}">
-        <p14:creationId xmlns:p14="http://schemas.microsoft.com/office/powerpoint/2010/main" val="160456001"/>
-      </p:ext>
-    </p:extLst>
   </p:cSld>
   <p:clrMapOvr>
     <a:masterClrMapping/>
@@ -15093,8 +16457,6 @@
           <a:p>
             <a:fld id="{8A758EFE-665F-4341-B5B8-2DAEADA52F6C}" type="slidenum">
               <a:rPr lang="en-US" smtClean="0"/>
-              <a:pPr/>
-              <a:t>4</a:t>
             </a:fld>
             <a:endParaRPr lang="en-US" dirty="0"/>
           </a:p>
@@ -15121,6 +16483,7 @@
               <a:rPr lang="en-US" dirty="0"/>
               <a:t>Contents:</a:t>
             </a:r>
+            <a:endParaRPr lang="en-US" dirty="0"/>
           </a:p>
         </p:txBody>
       </p:sp>
@@ -15143,30 +16506,35 @@
               <a:rPr lang="en-US" dirty="0"/>
               <a:t>Datasets Information</a:t>
             </a:r>
+            <a:endParaRPr lang="en-US" dirty="0"/>
           </a:p>
           <a:p>
             <a:r>
               <a:rPr lang="en-US" dirty="0"/>
               <a:t>Major learnings from EDA</a:t>
             </a:r>
+            <a:endParaRPr lang="en-US" dirty="0"/>
           </a:p>
           <a:p>
             <a:r>
               <a:rPr lang="en-US" dirty="0"/>
               <a:t>Modeling results</a:t>
             </a:r>
+            <a:endParaRPr lang="en-US" dirty="0"/>
           </a:p>
           <a:p>
             <a:r>
               <a:rPr lang="en-US" dirty="0"/>
               <a:t>Implications and insights</a:t>
             </a:r>
+            <a:endParaRPr lang="en-US" dirty="0"/>
           </a:p>
           <a:p>
             <a:r>
               <a:rPr lang="en-US" dirty="0"/>
               <a:t>Challenges/limitations/potential future work</a:t>
             </a:r>
+            <a:endParaRPr lang="en-US" dirty="0"/>
           </a:p>
           <a:p>
             <a:endParaRPr lang="en-US" dirty="0"/>
@@ -15174,11 +16542,6 @@
         </p:txBody>
       </p:sp>
     </p:spTree>
-    <p:extLst>
-      <p:ext uri="{BB962C8B-B14F-4D97-AF65-F5344CB8AC3E}">
-        <p14:creationId xmlns:p14="http://schemas.microsoft.com/office/powerpoint/2010/main" val="3544514006"/>
-      </p:ext>
-    </p:extLst>
   </p:cSld>
   <p:clrMapOvr>
     <a:masterClrMapping/>
@@ -15220,8 +16583,6 @@
           <a:p>
             <a:fld id="{8A758EFE-665F-4341-B5B8-2DAEADA52F6C}" type="slidenum">
               <a:rPr lang="en-US" smtClean="0"/>
-              <a:pPr/>
-              <a:t>5</a:t>
             </a:fld>
             <a:endParaRPr lang="en-US" dirty="0"/>
           </a:p>
@@ -15256,18 +16617,13 @@
               <a:rPr lang="en-US" dirty="0"/>
               <a:t> </a:t>
             </a:r>
+            <a:endParaRPr lang="en-US" dirty="0"/>
           </a:p>
         </p:txBody>
       </p:sp>
       <p:sp>
         <p:nvSpPr>
-          <p:cNvPr id="4" name="TextBox 3">
-            <a:extLst>
-              <a:ext uri="{FF2B5EF4-FFF2-40B4-BE49-F238E27FC236}">
-                <a16:creationId xmlns:a16="http://schemas.microsoft.com/office/drawing/2014/main" id="{BACD87CC-F407-0336-BCC3-867FDB210C3B}"/>
-              </a:ext>
-            </a:extLst>
-          </p:cNvPr>
+          <p:cNvPr id="4" name="TextBox 3"/>
           <p:cNvSpPr txBox="1"/>
           <p:nvPr/>
         </p:nvSpPr>
@@ -15288,7 +16644,7 @@
           <a:lstStyle/>
           <a:p>
             <a:r>
-              <a:rPr lang="en-CN" sz="2000" dirty="0">
+              <a:rPr lang="en-US" sz="2000" dirty="0">
                 <a:solidFill>
                   <a:srgbClr val="95001A"/>
                 </a:solidFill>
@@ -15306,6 +16662,11 @@
               </a:rPr>
               <a:t>NUFORC UFO Sightings (NUFORC, Kaggle)</a:t>
             </a:r>
+            <a:endParaRPr lang="en-US" dirty="0">
+              <a:solidFill>
+                <a:schemeClr val="accent3"/>
+              </a:solidFill>
+            </a:endParaRPr>
           </a:p>
           <a:p>
             <a:r>
@@ -15348,8 +16709,6 @@
               </a:rPr>
               <a:t> century.</a:t>
             </a:r>
-          </a:p>
-          <a:p>
             <a:endParaRPr lang="en-US" sz="1600" dirty="0">
               <a:solidFill>
                 <a:schemeClr val="accent5"/>
@@ -15357,43 +16716,45 @@
             </a:endParaRPr>
           </a:p>
           <a:p>
-            <a:r>
-              <a:rPr lang="en-US" sz="1600" b="1" dirty="0"/>
-              <a:t>Size:</a:t>
-            </a:r>
-            <a:r>
-              <a:rPr lang="en-US" sz="1600" dirty="0"/>
-              <a:t> 80,000+ reports</a:t>
-            </a:r>
-          </a:p>
-          <a:p>
-            <a:endParaRPr lang="en-US" sz="1600" dirty="0"/>
-          </a:p>
-          <a:p>
             <a:endParaRPr lang="en-US" sz="1600" dirty="0">
               <a:solidFill>
                 <a:schemeClr val="accent5"/>
               </a:solidFill>
             </a:endParaRPr>
           </a:p>
+          <a:p>
+            <a:r>
+              <a:rPr lang="en-US" sz="1600" b="1" dirty="0"/>
+              <a:t>Size:</a:t>
+            </a:r>
+            <a:r>
+              <a:rPr lang="en-US" sz="1600" dirty="0"/>
+              <a:t> 80,000+ reports</a:t>
+            </a:r>
+            <a:endParaRPr lang="en-US" sz="1600" dirty="0"/>
+          </a:p>
+          <a:p>
+            <a:endParaRPr lang="en-US" sz="1600" dirty="0"/>
+          </a:p>
+          <a:p>
+            <a:endParaRPr lang="en-US" sz="1600" dirty="0">
+              <a:solidFill>
+                <a:schemeClr val="accent5"/>
+              </a:solidFill>
+            </a:endParaRPr>
+          </a:p>
         </p:txBody>
       </p:sp>
       <p:pic>
         <p:nvPicPr>
-          <p:cNvPr id="7" name="Picture 6" descr="A screenshot of a phone&#10;&#10;AI-generated content may be incorrect.">
-            <a:extLst>
-              <a:ext uri="{FF2B5EF4-FFF2-40B4-BE49-F238E27FC236}">
-                <a16:creationId xmlns:a16="http://schemas.microsoft.com/office/drawing/2014/main" id="{977BD170-7353-5E82-5D8F-4DA176C2AE3D}"/>
-              </a:ext>
-            </a:extLst>
-          </p:cNvPr>
+          <p:cNvPr id="7" name="Picture 6" descr="A screenshot of a phone&#10;&#10;AI-generated content may be incorrect."/>
           <p:cNvPicPr>
             <a:picLocks noChangeAspect="1"/>
           </p:cNvPicPr>
           <p:nvPr/>
         </p:nvPicPr>
         <p:blipFill>
-          <a:blip r:embed="rId2"/>
+          <a:blip r:embed="rId1"/>
           <a:stretch>
             <a:fillRect/>
           </a:stretch>
@@ -15410,13 +16771,7 @@
       </p:pic>
       <p:sp>
         <p:nvSpPr>
-          <p:cNvPr id="8" name="TextBox 7">
-            <a:extLst>
-              <a:ext uri="{FF2B5EF4-FFF2-40B4-BE49-F238E27FC236}">
-                <a16:creationId xmlns:a16="http://schemas.microsoft.com/office/drawing/2014/main" id="{44D8A907-7E34-83C3-3B17-DC0C71A07F79}"/>
-              </a:ext>
-            </a:extLst>
-          </p:cNvPr>
+          <p:cNvPr id="8" name="TextBox 7"/>
           <p:cNvSpPr txBox="1"/>
           <p:nvPr/>
         </p:nvSpPr>
@@ -15440,16 +16795,11 @@
               <a:rPr lang="en-US" b="1" dirty="0"/>
               <a:t>→ actual observational features</a:t>
             </a:r>
-            <a:endParaRPr lang="en-CN" dirty="0"/>
+            <a:endParaRPr lang="en-US" dirty="0"/>
           </a:p>
         </p:txBody>
       </p:sp>
     </p:spTree>
-    <p:extLst>
-      <p:ext uri="{BB962C8B-B14F-4D97-AF65-F5344CB8AC3E}">
-        <p14:creationId xmlns:p14="http://schemas.microsoft.com/office/powerpoint/2010/main" val="937808973"/>
-      </p:ext>
-    </p:extLst>
   </p:cSld>
   <p:clrMapOvr>
     <a:masterClrMapping/>
@@ -15462,13 +16812,7 @@
   <p:cSld>
     <p:spTree>
       <p:nvGrpSpPr>
-        <p:cNvPr id="1" name="">
-          <a:extLst>
-            <a:ext uri="{FF2B5EF4-FFF2-40B4-BE49-F238E27FC236}">
-              <a16:creationId xmlns:a16="http://schemas.microsoft.com/office/drawing/2014/main" id="{0D98893C-14EF-E251-8DBB-10FE5057A0BE}"/>
-            </a:ext>
-          </a:extLst>
-        </p:cNvPr>
+        <p:cNvPr id="1" name=""/>
         <p:cNvGrpSpPr/>
         <p:nvPr/>
       </p:nvGrpSpPr>
@@ -15482,13 +16826,7 @@
       </p:grpSpPr>
       <p:sp>
         <p:nvSpPr>
-          <p:cNvPr id="2" name="Slide Number Placeholder 1">
-            <a:extLst>
-              <a:ext uri="{FF2B5EF4-FFF2-40B4-BE49-F238E27FC236}">
-                <a16:creationId xmlns:a16="http://schemas.microsoft.com/office/drawing/2014/main" id="{6D275B5C-7335-A743-2A2F-FB742D4566BC}"/>
-              </a:ext>
-            </a:extLst>
-          </p:cNvPr>
+          <p:cNvPr id="2" name="Slide Number Placeholder 1"/>
           <p:cNvSpPr>
             <a:spLocks noGrp="1"/>
           </p:cNvSpPr>
@@ -15503,8 +16841,6 @@
           <a:p>
             <a:fld id="{8A758EFE-665F-4341-B5B8-2DAEADA52F6C}" type="slidenum">
               <a:rPr lang="en-US" smtClean="0"/>
-              <a:pPr/>
-              <a:t>6</a:t>
             </a:fld>
             <a:endParaRPr lang="en-US" dirty="0"/>
           </a:p>
@@ -15512,13 +16848,7 @@
       </p:sp>
       <p:sp>
         <p:nvSpPr>
-          <p:cNvPr id="3" name="Title 2">
-            <a:extLst>
-              <a:ext uri="{FF2B5EF4-FFF2-40B4-BE49-F238E27FC236}">
-                <a16:creationId xmlns:a16="http://schemas.microsoft.com/office/drawing/2014/main" id="{8BCE8444-80EB-4A49-2942-64DE38D7B4C0}"/>
-              </a:ext>
-            </a:extLst>
-          </p:cNvPr>
+          <p:cNvPr id="3" name="Title 2"/>
           <p:cNvSpPr>
             <a:spLocks noGrp="1"/>
           </p:cNvSpPr>
@@ -15545,18 +16875,13 @@
               <a:rPr lang="en-US" dirty="0"/>
               <a:t> </a:t>
             </a:r>
+            <a:endParaRPr lang="en-US" dirty="0"/>
           </a:p>
         </p:txBody>
       </p:sp>
       <p:sp>
         <p:nvSpPr>
-          <p:cNvPr id="4" name="TextBox 3">
-            <a:extLst>
-              <a:ext uri="{FF2B5EF4-FFF2-40B4-BE49-F238E27FC236}">
-                <a16:creationId xmlns:a16="http://schemas.microsoft.com/office/drawing/2014/main" id="{09CDB6CB-73F7-CEAF-8B70-3806438630C0}"/>
-              </a:ext>
-            </a:extLst>
-          </p:cNvPr>
+          <p:cNvPr id="4" name="TextBox 3"/>
           <p:cNvSpPr txBox="1"/>
           <p:nvPr/>
         </p:nvSpPr>
@@ -15616,6 +16941,11 @@
               </a:rPr>
               <a:t>)</a:t>
             </a:r>
+            <a:endParaRPr lang="en-US" dirty="0">
+              <a:solidFill>
+                <a:schemeClr val="accent3"/>
+              </a:solidFill>
+            </a:endParaRPr>
           </a:p>
           <a:p>
             <a:r>
@@ -15626,8 +16956,6 @@
               </a:rPr>
               <a:t>Geographic and environmental characteristics of cities worldwide</a:t>
             </a:r>
-          </a:p>
-          <a:p>
             <a:endParaRPr lang="en-US" sz="1600" dirty="0">
               <a:solidFill>
                 <a:schemeClr val="accent5"/>
@@ -15635,36 +16963,38 @@
             </a:endParaRPr>
           </a:p>
           <a:p>
-            <a:r>
-              <a:rPr lang="en-US" sz="1600" b="1" dirty="0"/>
-              <a:t>Size:</a:t>
-            </a:r>
-            <a:r>
-              <a:rPr lang="en-US" sz="1600" dirty="0"/>
-              <a:t> 48,000+ cities</a:t>
-            </a:r>
-          </a:p>
-          <a:p>
-            <a:endParaRPr lang="en-US" sz="1600" dirty="0"/>
-          </a:p>
-          <a:p>
             <a:endParaRPr lang="en-US" sz="1600" dirty="0">
               <a:solidFill>
                 <a:schemeClr val="accent5"/>
               </a:solidFill>
             </a:endParaRPr>
           </a:p>
+          <a:p>
+            <a:r>
+              <a:rPr lang="en-US" sz="1600" b="1" dirty="0"/>
+              <a:t>Size:</a:t>
+            </a:r>
+            <a:r>
+              <a:rPr lang="en-US" sz="1600" dirty="0"/>
+              <a:t> 48,000+ cities</a:t>
+            </a:r>
+            <a:endParaRPr lang="en-US" sz="1600" dirty="0"/>
+          </a:p>
+          <a:p>
+            <a:endParaRPr lang="en-US" sz="1600" dirty="0"/>
+          </a:p>
+          <a:p>
+            <a:endParaRPr lang="en-US" sz="1600" dirty="0">
+              <a:solidFill>
+                <a:schemeClr val="accent5"/>
+              </a:solidFill>
+            </a:endParaRPr>
+          </a:p>
         </p:txBody>
       </p:sp>
       <p:sp>
         <p:nvSpPr>
-          <p:cNvPr id="8" name="TextBox 7">
-            <a:extLst>
-              <a:ext uri="{FF2B5EF4-FFF2-40B4-BE49-F238E27FC236}">
-                <a16:creationId xmlns:a16="http://schemas.microsoft.com/office/drawing/2014/main" id="{2E9A9235-135F-984F-CE27-B39FDBD00C9D}"/>
-              </a:ext>
-            </a:extLst>
-          </p:cNvPr>
+          <p:cNvPr id="8" name="TextBox 7"/>
           <p:cNvSpPr txBox="1"/>
           <p:nvPr/>
         </p:nvSpPr>
@@ -15688,26 +17018,20 @@
               <a:rPr lang="en-US" b="1" dirty="0"/>
               <a:t>→ geographic and temporal features</a:t>
             </a:r>
-            <a:endParaRPr lang="en-CN" dirty="0"/>
+            <a:endParaRPr lang="en-US" dirty="0"/>
           </a:p>
         </p:txBody>
       </p:sp>
       <p:pic>
         <p:nvPicPr>
-          <p:cNvPr id="6" name="Picture 5" descr="A screenshot of a computer&#10;&#10;AI-generated content may be incorrect.">
-            <a:extLst>
-              <a:ext uri="{FF2B5EF4-FFF2-40B4-BE49-F238E27FC236}">
-                <a16:creationId xmlns:a16="http://schemas.microsoft.com/office/drawing/2014/main" id="{8B744AD6-4107-E06A-9C27-C78BAC447E57}"/>
-              </a:ext>
-            </a:extLst>
-          </p:cNvPr>
+          <p:cNvPr id="6" name="Picture 5" descr="A screenshot of a computer&#10;&#10;AI-generated content may be incorrect."/>
           <p:cNvPicPr>
             <a:picLocks noChangeAspect="1"/>
           </p:cNvPicPr>
           <p:nvPr/>
         </p:nvPicPr>
         <p:blipFill>
-          <a:blip r:embed="rId2"/>
+          <a:blip r:embed="rId1"/>
           <a:stretch>
             <a:fillRect/>
           </a:stretch>
@@ -15723,11 +17047,6 @@
         </p:spPr>
       </p:pic>
     </p:spTree>
-    <p:extLst>
-      <p:ext uri="{BB962C8B-B14F-4D97-AF65-F5344CB8AC3E}">
-        <p14:creationId xmlns:p14="http://schemas.microsoft.com/office/powerpoint/2010/main" val="2217095867"/>
-      </p:ext>
-    </p:extLst>
   </p:cSld>
   <p:clrMapOvr>
     <a:masterClrMapping/>
@@ -15740,13 +17059,7 @@
   <p:cSld>
     <p:spTree>
       <p:nvGrpSpPr>
-        <p:cNvPr id="1" name="">
-          <a:extLst>
-            <a:ext uri="{FF2B5EF4-FFF2-40B4-BE49-F238E27FC236}">
-              <a16:creationId xmlns:a16="http://schemas.microsoft.com/office/drawing/2014/main" id="{28BB42D7-76A8-69D1-F5FC-108750582FA6}"/>
-            </a:ext>
-          </a:extLst>
-        </p:cNvPr>
+        <p:cNvPr id="1" name=""/>
         <p:cNvGrpSpPr/>
         <p:nvPr/>
       </p:nvGrpSpPr>
@@ -15760,13 +17073,7 @@
       </p:grpSpPr>
       <p:sp>
         <p:nvSpPr>
-          <p:cNvPr id="2" name="Slide Number Placeholder 1">
-            <a:extLst>
-              <a:ext uri="{FF2B5EF4-FFF2-40B4-BE49-F238E27FC236}">
-                <a16:creationId xmlns:a16="http://schemas.microsoft.com/office/drawing/2014/main" id="{CA62124E-40AE-8510-D917-B4EF7CA18759}"/>
-              </a:ext>
-            </a:extLst>
-          </p:cNvPr>
+          <p:cNvPr id="2" name="Slide Number Placeholder 1"/>
           <p:cNvSpPr>
             <a:spLocks noGrp="1"/>
           </p:cNvSpPr>
@@ -15781,8 +17088,6 @@
           <a:p>
             <a:fld id="{8A758EFE-665F-4341-B5B8-2DAEADA52F6C}" type="slidenum">
               <a:rPr lang="en-US" smtClean="0"/>
-              <a:pPr/>
-              <a:t>7</a:t>
             </a:fld>
             <a:endParaRPr lang="en-US" dirty="0"/>
           </a:p>
@@ -15790,13 +17095,7 @@
       </p:sp>
       <p:sp>
         <p:nvSpPr>
-          <p:cNvPr id="3" name="Title 2">
-            <a:extLst>
-              <a:ext uri="{FF2B5EF4-FFF2-40B4-BE49-F238E27FC236}">
-                <a16:creationId xmlns:a16="http://schemas.microsoft.com/office/drawing/2014/main" id="{397D0DB8-1370-329A-E243-2A071D539D9A}"/>
-              </a:ext>
-            </a:extLst>
-          </p:cNvPr>
+          <p:cNvPr id="3" name="Title 2"/>
           <p:cNvSpPr>
             <a:spLocks noGrp="1"/>
           </p:cNvSpPr>
@@ -15823,18 +17122,13 @@
               <a:rPr lang="en-US" dirty="0"/>
               <a:t>  </a:t>
             </a:r>
+            <a:endParaRPr lang="en-US" dirty="0"/>
           </a:p>
         </p:txBody>
       </p:sp>
       <p:sp>
         <p:nvSpPr>
-          <p:cNvPr id="4" name="TextBox 3">
-            <a:extLst>
-              <a:ext uri="{FF2B5EF4-FFF2-40B4-BE49-F238E27FC236}">
-                <a16:creationId xmlns:a16="http://schemas.microsoft.com/office/drawing/2014/main" id="{6EABE9A0-4648-2167-E079-D8B981D1BA22}"/>
-              </a:ext>
-            </a:extLst>
-          </p:cNvPr>
+          <p:cNvPr id="4" name="TextBox 3"/>
           <p:cNvSpPr txBox="1"/>
           <p:nvPr/>
         </p:nvSpPr>
@@ -15878,6 +17172,11 @@
               </a:rPr>
               <a:t>)</a:t>
             </a:r>
+            <a:endParaRPr lang="en-US" dirty="0">
+              <a:solidFill>
+                <a:schemeClr val="accent3"/>
+              </a:solidFill>
+            </a:endParaRPr>
           </a:p>
           <a:p>
             <a:r>
@@ -15888,8 +17187,6 @@
               </a:rPr>
               <a:t>Up-to-date information on airport locations and aviation infrastructure worldwide.</a:t>
             </a:r>
-          </a:p>
-          <a:p>
             <a:endParaRPr lang="en-US" sz="1600" dirty="0">
               <a:solidFill>
                 <a:schemeClr val="accent5"/>
@@ -15897,36 +17194,38 @@
             </a:endParaRPr>
           </a:p>
           <a:p>
-            <a:r>
-              <a:rPr lang="en-US" sz="1600" b="1" dirty="0"/>
-              <a:t>Size:</a:t>
-            </a:r>
-            <a:r>
-              <a:rPr lang="en-US" sz="1600" dirty="0"/>
-              <a:t> 84,000+ airports</a:t>
-            </a:r>
-          </a:p>
-          <a:p>
-            <a:endParaRPr lang="en-US" sz="1600" dirty="0"/>
-          </a:p>
-          <a:p>
             <a:endParaRPr lang="en-US" sz="1600" dirty="0">
               <a:solidFill>
                 <a:schemeClr val="accent5"/>
               </a:solidFill>
             </a:endParaRPr>
           </a:p>
+          <a:p>
+            <a:r>
+              <a:rPr lang="en-US" sz="1600" b="1" dirty="0"/>
+              <a:t>Size:</a:t>
+            </a:r>
+            <a:r>
+              <a:rPr lang="en-US" sz="1600" dirty="0"/>
+              <a:t> 84,000+ airports</a:t>
+            </a:r>
+            <a:endParaRPr lang="en-US" sz="1600" dirty="0"/>
+          </a:p>
+          <a:p>
+            <a:endParaRPr lang="en-US" sz="1600" dirty="0"/>
+          </a:p>
+          <a:p>
+            <a:endParaRPr lang="en-US" sz="1600" dirty="0">
+              <a:solidFill>
+                <a:schemeClr val="accent5"/>
+              </a:solidFill>
+            </a:endParaRPr>
+          </a:p>
         </p:txBody>
       </p:sp>
       <p:sp>
         <p:nvSpPr>
-          <p:cNvPr id="8" name="TextBox 7">
-            <a:extLst>
-              <a:ext uri="{FF2B5EF4-FFF2-40B4-BE49-F238E27FC236}">
-                <a16:creationId xmlns:a16="http://schemas.microsoft.com/office/drawing/2014/main" id="{22253B5A-54F5-2639-219A-C59A3A026005}"/>
-              </a:ext>
-            </a:extLst>
-          </p:cNvPr>
+          <p:cNvPr id="8" name="TextBox 7"/>
           <p:cNvSpPr txBox="1"/>
           <p:nvPr/>
         </p:nvSpPr>
@@ -15954,26 +17253,20 @@
               <a:rPr lang="en-US" dirty="0"/>
               <a:t> </a:t>
             </a:r>
-            <a:endParaRPr lang="en-CN" dirty="0"/>
+            <a:endParaRPr lang="en-US" dirty="0"/>
           </a:p>
         </p:txBody>
       </p:sp>
       <p:pic>
         <p:nvPicPr>
-          <p:cNvPr id="9" name="Picture 8" descr="A screenshot of a computer&#10;&#10;AI-generated content may be incorrect.">
-            <a:extLst>
-              <a:ext uri="{FF2B5EF4-FFF2-40B4-BE49-F238E27FC236}">
-                <a16:creationId xmlns:a16="http://schemas.microsoft.com/office/drawing/2014/main" id="{FEB182C5-4462-31C6-85D3-B3F74D2953EE}"/>
-              </a:ext>
-            </a:extLst>
-          </p:cNvPr>
+          <p:cNvPr id="9" name="Picture 8" descr="A screenshot of a computer&#10;&#10;AI-generated content may be incorrect."/>
           <p:cNvPicPr>
             <a:picLocks noChangeAspect="1"/>
           </p:cNvPicPr>
           <p:nvPr/>
         </p:nvPicPr>
         <p:blipFill>
-          <a:blip r:embed="rId2"/>
+          <a:blip r:embed="rId1"/>
           <a:stretch>
             <a:fillRect/>
           </a:stretch>
@@ -15989,11 +17282,6 @@
         </p:spPr>
       </p:pic>
     </p:spTree>
-    <p:extLst>
-      <p:ext uri="{BB962C8B-B14F-4D97-AF65-F5344CB8AC3E}">
-        <p14:creationId xmlns:p14="http://schemas.microsoft.com/office/powerpoint/2010/main" val="2163562273"/>
-      </p:ext>
-    </p:extLst>
   </p:cSld>
   <p:clrMapOvr>
     <a:masterClrMapping/>
@@ -16006,13 +17294,7 @@
   <p:cSld>
     <p:spTree>
       <p:nvGrpSpPr>
-        <p:cNvPr id="1" name="">
-          <a:extLst>
-            <a:ext uri="{FF2B5EF4-FFF2-40B4-BE49-F238E27FC236}">
-              <a16:creationId xmlns:a16="http://schemas.microsoft.com/office/drawing/2014/main" id="{0A66646F-81A9-AE90-289C-CEE3BB012382}"/>
-            </a:ext>
-          </a:extLst>
-        </p:cNvPr>
+        <p:cNvPr id="1" name=""/>
         <p:cNvGrpSpPr/>
         <p:nvPr/>
       </p:nvGrpSpPr>
@@ -16026,13 +17308,7 @@
       </p:grpSpPr>
       <p:sp>
         <p:nvSpPr>
-          <p:cNvPr id="2" name="Slide Number Placeholder 1">
-            <a:extLst>
-              <a:ext uri="{FF2B5EF4-FFF2-40B4-BE49-F238E27FC236}">
-                <a16:creationId xmlns:a16="http://schemas.microsoft.com/office/drawing/2014/main" id="{725F5251-7962-9A28-2E21-C2C3A8578BA1}"/>
-              </a:ext>
-            </a:extLst>
-          </p:cNvPr>
+          <p:cNvPr id="2" name="Slide Number Placeholder 1"/>
           <p:cNvSpPr>
             <a:spLocks noGrp="1"/>
           </p:cNvSpPr>
@@ -16047,8 +17323,6 @@
           <a:p>
             <a:fld id="{8A758EFE-665F-4341-B5B8-2DAEADA52F6C}" type="slidenum">
               <a:rPr lang="en-US" smtClean="0"/>
-              <a:pPr/>
-              <a:t>8</a:t>
             </a:fld>
             <a:endParaRPr lang="en-US" dirty="0"/>
           </a:p>
@@ -16056,13 +17330,7 @@
       </p:sp>
       <p:sp>
         <p:nvSpPr>
-          <p:cNvPr id="3" name="Title 2">
-            <a:extLst>
-              <a:ext uri="{FF2B5EF4-FFF2-40B4-BE49-F238E27FC236}">
-                <a16:creationId xmlns:a16="http://schemas.microsoft.com/office/drawing/2014/main" id="{06938BA0-17D1-2025-7E92-A02D3FA0E15C}"/>
-              </a:ext>
-            </a:extLst>
-          </p:cNvPr>
+          <p:cNvPr id="3" name="Title 2"/>
           <p:cNvSpPr>
             <a:spLocks noGrp="1"/>
           </p:cNvSpPr>
@@ -16089,18 +17357,13 @@
               <a:rPr lang="en-US" dirty="0"/>
               <a:t>  </a:t>
             </a:r>
+            <a:endParaRPr lang="en-US" dirty="0"/>
           </a:p>
         </p:txBody>
       </p:sp>
       <p:sp>
         <p:nvSpPr>
-          <p:cNvPr id="4" name="TextBox 3">
-            <a:extLst>
-              <a:ext uri="{FF2B5EF4-FFF2-40B4-BE49-F238E27FC236}">
-                <a16:creationId xmlns:a16="http://schemas.microsoft.com/office/drawing/2014/main" id="{E524A25A-1877-34D0-F5C9-CD37AB39E216}"/>
-              </a:ext>
-            </a:extLst>
-          </p:cNvPr>
+          <p:cNvPr id="4" name="TextBox 3"/>
           <p:cNvSpPr txBox="1"/>
           <p:nvPr/>
         </p:nvSpPr>
@@ -16128,6 +17391,11 @@
               </a:rPr>
               <a:t>Country Education Level Dataset (Our World in Data, Kaggle)</a:t>
             </a:r>
+            <a:endParaRPr lang="en-US" dirty="0">
+              <a:solidFill>
+                <a:schemeClr val="accent3"/>
+              </a:solidFill>
+            </a:endParaRPr>
           </a:p>
           <a:p>
             <a:r>
@@ -16138,8 +17406,6 @@
               </a:rPr>
               <a:t>National-level indicators reflecting cultural exposure and socioeconomic conditions</a:t>
             </a:r>
-          </a:p>
-          <a:p>
             <a:endParaRPr lang="en-US" sz="1600" dirty="0">
               <a:solidFill>
                 <a:schemeClr val="accent5"/>
@@ -16147,36 +17413,38 @@
             </a:endParaRPr>
           </a:p>
           <a:p>
-            <a:r>
-              <a:rPr lang="en-US" sz="1600" b="1" dirty="0"/>
-              <a:t>Size:</a:t>
-            </a:r>
-            <a:r>
-              <a:rPr lang="en-US" sz="1600" dirty="0"/>
-              <a:t> 200+ countries</a:t>
-            </a:r>
-          </a:p>
-          <a:p>
-            <a:endParaRPr lang="en-US" sz="1600" dirty="0"/>
-          </a:p>
-          <a:p>
             <a:endParaRPr lang="en-US" sz="1600" dirty="0">
               <a:solidFill>
                 <a:schemeClr val="accent5"/>
               </a:solidFill>
             </a:endParaRPr>
           </a:p>
+          <a:p>
+            <a:r>
+              <a:rPr lang="en-US" sz="1600" b="1" dirty="0"/>
+              <a:t>Size:</a:t>
+            </a:r>
+            <a:r>
+              <a:rPr lang="en-US" sz="1600" dirty="0"/>
+              <a:t> 200+ countries</a:t>
+            </a:r>
+            <a:endParaRPr lang="en-US" sz="1600" dirty="0"/>
+          </a:p>
+          <a:p>
+            <a:endParaRPr lang="en-US" sz="1600" dirty="0"/>
+          </a:p>
+          <a:p>
+            <a:endParaRPr lang="en-US" sz="1600" dirty="0">
+              <a:solidFill>
+                <a:schemeClr val="accent5"/>
+              </a:solidFill>
+            </a:endParaRPr>
+          </a:p>
         </p:txBody>
       </p:sp>
       <p:sp>
         <p:nvSpPr>
-          <p:cNvPr id="8" name="TextBox 7">
-            <a:extLst>
-              <a:ext uri="{FF2B5EF4-FFF2-40B4-BE49-F238E27FC236}">
-                <a16:creationId xmlns:a16="http://schemas.microsoft.com/office/drawing/2014/main" id="{D9350362-4F13-B315-F6E3-9A095ACAE7D9}"/>
-              </a:ext>
-            </a:extLst>
-          </p:cNvPr>
+          <p:cNvPr id="8" name="TextBox 7"/>
           <p:cNvSpPr txBox="1"/>
           <p:nvPr/>
         </p:nvSpPr>
@@ -16204,26 +17472,20 @@
               <a:rPr lang="en-US" dirty="0"/>
               <a:t> </a:t>
             </a:r>
-            <a:endParaRPr lang="en-CN" dirty="0"/>
+            <a:endParaRPr lang="en-US" dirty="0"/>
           </a:p>
         </p:txBody>
       </p:sp>
       <p:pic>
         <p:nvPicPr>
-          <p:cNvPr id="7" name="Picture 6">
-            <a:extLst>
-              <a:ext uri="{FF2B5EF4-FFF2-40B4-BE49-F238E27FC236}">
-                <a16:creationId xmlns:a16="http://schemas.microsoft.com/office/drawing/2014/main" id="{0D50D5F2-0E46-C1AF-3D77-8BA373301050}"/>
-              </a:ext>
-            </a:extLst>
-          </p:cNvPr>
+          <p:cNvPr id="7" name="Picture 6"/>
           <p:cNvPicPr>
             <a:picLocks noChangeAspect="1"/>
           </p:cNvPicPr>
           <p:nvPr/>
         </p:nvPicPr>
         <p:blipFill>
-          <a:blip r:embed="rId2"/>
+          <a:blip r:embed="rId1"/>
           <a:srcRect b="1247"/>
           <a:stretch>
             <a:fillRect/>
@@ -16241,20 +17503,14 @@
       </p:pic>
       <p:pic>
         <p:nvPicPr>
-          <p:cNvPr id="10" name="Picture 9" descr="A screenshot of a graph&#10;&#10;AI-generated content may be incorrect.">
-            <a:extLst>
-              <a:ext uri="{FF2B5EF4-FFF2-40B4-BE49-F238E27FC236}">
-                <a16:creationId xmlns:a16="http://schemas.microsoft.com/office/drawing/2014/main" id="{037AC378-249C-4CE0-8AC2-81CB002C93B9}"/>
-              </a:ext>
-            </a:extLst>
-          </p:cNvPr>
+          <p:cNvPr id="10" name="Picture 9" descr="A screenshot of a graph&#10;&#10;AI-generated content may be incorrect."/>
           <p:cNvPicPr>
             <a:picLocks noChangeAspect="1"/>
           </p:cNvPicPr>
           <p:nvPr/>
         </p:nvPicPr>
         <p:blipFill>
-          <a:blip r:embed="rId3"/>
+          <a:blip r:embed="rId2"/>
           <a:stretch>
             <a:fillRect/>
           </a:stretch>
@@ -16270,11 +17526,6 @@
         </p:spPr>
       </p:pic>
     </p:spTree>
-    <p:extLst>
-      <p:ext uri="{BB962C8B-B14F-4D97-AF65-F5344CB8AC3E}">
-        <p14:creationId xmlns:p14="http://schemas.microsoft.com/office/powerpoint/2010/main" val="2924769423"/>
-      </p:ext>
-    </p:extLst>
   </p:cSld>
   <p:clrMapOvr>
     <a:masterClrMapping/>
@@ -16316,8 +17567,6 @@
           <a:p>
             <a:fld id="{8A758EFE-665F-4341-B5B8-2DAEADA52F6C}" type="slidenum">
               <a:rPr lang="en-US" smtClean="0"/>
-              <a:pPr/>
-              <a:t>9</a:t>
             </a:fld>
             <a:endParaRPr lang="en-US" dirty="0"/>
           </a:p>
@@ -16359,9 +17608,7 @@
       <p:sp>
         <p:nvSpPr>
           <p:cNvPr id="5" name="Content Placeholder 3"/>
-          <p:cNvSpPr txBox="1">
-            <a:spLocks/>
-          </p:cNvSpPr>
+          <p:cNvSpPr txBox="1"/>
           <p:nvPr/>
         </p:nvSpPr>
         <p:spPr>
@@ -16385,7 +17632,7 @@
               <a:buClr>
                 <a:schemeClr val="tx1"/>
               </a:buClr>
-              <a:buFont typeface="Arial"/>
+              <a:buFont typeface="Arial" panose="020B0604020202020204"/>
               <a:buChar char="•"/>
               <a:defRPr sz="2800" kern="1200">
                 <a:solidFill>
@@ -16403,7 +17650,7 @@
               <a:buClr>
                 <a:schemeClr val="tx1"/>
               </a:buClr>
-              <a:buFont typeface="Arial"/>
+              <a:buFont typeface="Arial" panose="020B0604020202020204"/>
               <a:buChar char="–"/>
               <a:defRPr sz="2400" kern="1200">
                 <a:solidFill>
@@ -16421,7 +17668,7 @@
               <a:buClr>
                 <a:schemeClr val="tx1"/>
               </a:buClr>
-              <a:buFont typeface="Arial"/>
+              <a:buFont typeface="Arial" panose="020B0604020202020204"/>
               <a:buChar char="•"/>
               <a:defRPr sz="2000" kern="1200">
                 <a:solidFill>
@@ -16439,7 +17686,7 @@
               <a:buClr>
                 <a:schemeClr val="tx1"/>
               </a:buClr>
-              <a:buFont typeface="Arial"/>
+              <a:buFont typeface="Arial" panose="020B0604020202020204"/>
               <a:buChar char="–"/>
               <a:defRPr sz="1800" kern="1200">
                 <a:solidFill>
@@ -16457,7 +17704,7 @@
               <a:buClr>
                 <a:schemeClr val="tx1"/>
               </a:buClr>
-              <a:buFont typeface="Arial"/>
+              <a:buFont typeface="Arial" panose="020B0604020202020204"/>
               <a:buChar char="»"/>
               <a:defRPr sz="1800" kern="1200">
                 <a:solidFill>
@@ -16472,7 +17719,7 @@
               <a:spcBef>
                 <a:spcPct val="20000"/>
               </a:spcBef>
-              <a:buFont typeface="Arial"/>
+              <a:buFont typeface="Arial" panose="020B0604020202020204"/>
               <a:buChar char="•"/>
               <a:defRPr sz="2000" kern="1200">
                 <a:solidFill>
@@ -16487,7 +17734,7 @@
               <a:spcBef>
                 <a:spcPct val="20000"/>
               </a:spcBef>
-              <a:buFont typeface="Arial"/>
+              <a:buFont typeface="Arial" panose="020B0604020202020204"/>
               <a:buChar char="•"/>
               <a:defRPr sz="2000" kern="1200">
                 <a:solidFill>
@@ -16502,7 +17749,7 @@
               <a:spcBef>
                 <a:spcPct val="20000"/>
               </a:spcBef>
-              <a:buFont typeface="Arial"/>
+              <a:buFont typeface="Arial" panose="020B0604020202020204"/>
               <a:buChar char="•"/>
               <a:defRPr sz="2000" kern="1200">
                 <a:solidFill>
@@ -16517,7 +17764,7 @@
               <a:spcBef>
                 <a:spcPct val="20000"/>
               </a:spcBef>
-              <a:buFont typeface="Arial"/>
+              <a:buFont typeface="Arial" panose="020B0604020202020204"/>
               <a:buChar char="•"/>
               <a:defRPr sz="2000" kern="1200">
                 <a:solidFill>
@@ -16536,20 +17783,14 @@
       </p:sp>
       <p:pic>
         <p:nvPicPr>
-          <p:cNvPr id="1026" name="Picture 2">
-            <a:extLst>
-              <a:ext uri="{FF2B5EF4-FFF2-40B4-BE49-F238E27FC236}">
-                <a16:creationId xmlns:a16="http://schemas.microsoft.com/office/drawing/2014/main" id="{855A5BD8-2E13-3C8A-1EA5-E531B88C9CFB}"/>
-              </a:ext>
-            </a:extLst>
-          </p:cNvPr>
+          <p:cNvPr id="1026" name="Picture 2"/>
           <p:cNvPicPr>
             <a:picLocks noChangeAspect="1" noChangeArrowheads="1"/>
           </p:cNvPicPr>
           <p:nvPr/>
         </p:nvPicPr>
         <p:blipFill>
-          <a:blip r:embed="rId2">
+          <a:blip r:embed="rId1">
             <a:extLst>
               <a:ext uri="{28A0092B-C50C-407E-A947-70E740481C1C}">
                 <a14:useLocalDpi xmlns:a14="http://schemas.microsoft.com/office/drawing/2010/main" val="0"/>
@@ -16583,13 +17824,7 @@
       </p:pic>
       <p:sp>
         <p:nvSpPr>
-          <p:cNvPr id="4" name="TextBox 3">
-            <a:extLst>
-              <a:ext uri="{FF2B5EF4-FFF2-40B4-BE49-F238E27FC236}">
-                <a16:creationId xmlns:a16="http://schemas.microsoft.com/office/drawing/2014/main" id="{45BB53D2-35E8-2DCB-D801-B51C26B7D47F}"/>
-              </a:ext>
-            </a:extLst>
-          </p:cNvPr>
+          <p:cNvPr id="4" name="TextBox 3"/>
           <p:cNvSpPr txBox="1"/>
           <p:nvPr/>
         </p:nvSpPr>
@@ -16617,8 +17852,6 @@
               </a:rPr>
               <a:t>Target Class Distribution (Shape Distribution)</a:t>
             </a:r>
-          </a:p>
-          <a:p>
             <a:endParaRPr lang="en-US" dirty="0">
               <a:solidFill>
                 <a:schemeClr val="accent3"/>
@@ -16626,6 +17859,13 @@
             </a:endParaRPr>
           </a:p>
           <a:p>
+            <a:endParaRPr lang="en-US" dirty="0">
+              <a:solidFill>
+                <a:schemeClr val="accent3"/>
+              </a:solidFill>
+            </a:endParaRPr>
+          </a:p>
+          <a:p>
             <a:pPr marL="285750" indent="-285750">
               <a:buFontTx/>
               <a:buChar char="-"/>
@@ -16634,6 +17874,7 @@
               <a:rPr lang="en-US" sz="1400" dirty="0"/>
               <a:t>Shows the severe class imbalance</a:t>
             </a:r>
+            <a:endParaRPr lang="en-US" sz="1400" dirty="0"/>
           </a:p>
           <a:p>
             <a:pPr marL="285750" indent="-285750">
@@ -16653,16 +17894,18 @@
         </p:txBody>
       </p:sp>
     </p:spTree>
-    <p:extLst>
-      <p:ext uri="{BB962C8B-B14F-4D97-AF65-F5344CB8AC3E}">
-        <p14:creationId xmlns:p14="http://schemas.microsoft.com/office/powerpoint/2010/main" val="1846913649"/>
-      </p:ext>
-    </p:extLst>
   </p:cSld>
   <p:clrMapOvr>
     <a:masterClrMapping/>
   </p:clrMapOvr>
 </p:sld>
+</file>
+
+<file path=ppt/tags/tag1.xml><?xml version="1.0" encoding="utf-8"?>
+<p:tagLst xmlns:p="http://schemas.openxmlformats.org/presentationml/2006/main">
+  <p:tag name="TABLE_ENDDRAG_ORIGIN_RECT" val="400*198"/>
+  <p:tag name="TABLE_ENDDRAG_RECT" val="312*104*400*198"/>
+</p:tagLst>
 </file>
 
 <file path=ppt/theme/theme1.xml><?xml version="1.0" encoding="utf-8"?>
@@ -16952,7 +18195,6 @@
         <a:ln>
           <a:noFill/>
         </a:ln>
-        <a:effectLst/>
       </a:spPr>
       <a:bodyPr rtlCol="0" anchor="ctr"/>
       <a:lstStyle>
@@ -16995,7 +18237,11 @@
       </a:style>
     </a:lnDef>
   </a:objectDefaults>
-  <a:extraClrSchemeLst/>
+  <a:extLst>
+    <a:ext uri="{05A4C25C-085E-4340-85A3-A5531E510DB2}">
+      <thm15:themeFamily xmlns:thm15="http://schemas.microsoft.com/office/thememl/2012/main" name="Office Theme" id="{62F939B6-93AF-4DB8-9C6B-D6C7DFDC589F}" vid="{4A3C46E8-61CC-4603-A589-7422A47A8E4A}"/>
+    </a:ext>
+  </a:extLst>
 </a:theme>
 </file>
 
@@ -17315,7 +18561,11 @@
       </a:style>
     </a:lnDef>
   </a:objectDefaults>
-  <a:extraClrSchemeLst/>
+  <a:extLst>
+    <a:ext uri="{05A4C25C-085E-4340-85A3-A5531E510DB2}">
+      <thm15:themeFamily xmlns:thm15="http://schemas.microsoft.com/office/thememl/2012/main" name="Office Theme" id="{62F939B6-93AF-4DB8-9C6B-D6C7DFDC589F}" vid="{4A3C46E8-61CC-4603-A589-7422A47A8E4A}"/>
+    </a:ext>
+  </a:extLst>
 </a:theme>
 </file>
 
@@ -17635,6 +18885,10 @@
       </a:style>
     </a:lnDef>
   </a:objectDefaults>
-  <a:extraClrSchemeLst/>
+  <a:extLst>
+    <a:ext uri="{05A4C25C-085E-4340-85A3-A5531E510DB2}">
+      <thm15:themeFamily xmlns:thm15="http://schemas.microsoft.com/office/thememl/2012/main" name="Office Theme" id="{62F939B6-93AF-4DB8-9C6B-D6C7DFDC589F}" vid="{4A3C46E8-61CC-4603-A589-7422A47A8E4A}"/>
+    </a:ext>
+  </a:extLst>
 </a:theme>
 </file>
--- a/pre.pptx
+++ b/pre.pptx
@@ -12907,6 +12907,10 @@
                         <a:rPr lang="en-US" altLang="zh-CN" sz="1600"/>
                         <a:t>XG</a:t>
                       </a:r>
+                      <a:r>
+                        <a:rPr lang="en-US" altLang="zh-CN" sz="1600"/>
+                        <a:t>Boost</a:t>
+                      </a:r>
                       <a:endParaRPr lang="en-US" altLang="zh-CN" sz="1600"/>
                     </a:p>
                   </a:txBody>
@@ -13378,7 +13382,7 @@
         <p:spPr>
           <a:xfrm>
             <a:off x="250825" y="884555"/>
-            <a:ext cx="5509260" cy="3014980"/>
+            <a:ext cx="8183880" cy="3014980"/>
           </a:xfrm>
           <a:prstGeom prst="rect">
             <a:avLst/>
@@ -13524,13 +13528,25 @@
               </a:rPr>
               <a:t>Neural networks for richer nonlinear representations.</a:t>
             </a:r>
-            <a:endParaRPr lang="en-US" altLang="zh-CN" sz="1400" dirty="0"/>
+            <a:endParaRPr lang="en-US" altLang="zh-CN" sz="1400" dirty="0">
+              <a:sym typeface="+mn-ea"/>
+            </a:endParaRPr>
           </a:p>
           <a:p>
             <a:pPr marL="285750" indent="-285750">
               <a:buFont typeface="Arial" panose="020B0604020202020204" pitchFamily="34" charset="0"/>
               <a:buChar char="•"/>
             </a:pPr>
+            <a:r>
+              <a:rPr lang="en-US" altLang="zh-CN" sz="1400" dirty="0">
+                <a:sym typeface="+mn-ea"/>
+              </a:rPr>
+              <a:t>If problem still exists, another potential cause could be the UFO shapes are impacted by actual </a:t>
+            </a:r>
+            <a:r>
+              <a:rPr lang="en-US" altLang="zh-CN" sz="1400" dirty="0"/>
+              <a:t>aerial anomalies.</a:t>
+            </a:r>
             <a:endParaRPr lang="en-US" altLang="zh-CN" sz="1400" dirty="0"/>
           </a:p>
         </p:txBody>

--- a/pre.pptx
+++ b/pre.pptx
@@ -8,7 +8,7 @@
     <p:notesMasterId r:id="rId14"/>
   </p:notesMasterIdLst>
   <p:handoutMasterIdLst>
-    <p:handoutMasterId r:id="rId26"/>
+    <p:handoutMasterId r:id="rId21"/>
   </p:handoutMasterIdLst>
   <p:sldIdLst>
     <p:sldId id="263" r:id="rId3"/>
@@ -28,11 +28,6 @@
     <p:sldId id="331" r:id="rId18"/>
     <p:sldId id="332" r:id="rId19"/>
     <p:sldId id="333" r:id="rId20"/>
-    <p:sldId id="315" r:id="rId21"/>
-    <p:sldId id="317" r:id="rId22"/>
-    <p:sldId id="319" r:id="rId23"/>
-    <p:sldId id="261" r:id="rId24"/>
-    <p:sldId id="292" r:id="rId25"/>
   </p:sldIdLst>
   <p:sldSz cx="9144000" cy="5143500" type="screen16x9"/>
   <p:notesSz cx="6858000" cy="9144000"/>
@@ -150,310 +145,6 @@
 </p:presentation>
 </file>
 
-<file path=ppt/charts/chart1.xml><?xml version="1.0" encoding="utf-8"?>
-<c:chartSpace xmlns:c="http://schemas.openxmlformats.org/drawingml/2006/chart" xmlns:a="http://schemas.openxmlformats.org/drawingml/2006/main" xmlns:r="http://schemas.openxmlformats.org/officeDocument/2006/relationships">
-  <c:date1904 val="0"/>
-  <c:lang val="zh-CN"/>
-  <c:roundedCorners val="0"/>
-  <mc:AlternateContent xmlns:mc="http://schemas.openxmlformats.org/markup-compatibility/2006">
-    <mc:Choice xmlns:c14="http://schemas.microsoft.com/office/drawing/2007/8/2/chart" Requires="c14">
-      <c14:style val="118"/>
-    </mc:Choice>
-    <mc:Fallback>
-      <c:style val="18"/>
-    </mc:Fallback>
-  </mc:AlternateContent>
-  <c:chart>
-    <c:autoTitleDeleted val="1"/>
-    <c:plotArea>
-      <c:layout>
-        <c:manualLayout>
-          <c:layoutTarget val="inner"/>
-          <c:xMode val="edge"/>
-          <c:yMode val="edge"/>
-          <c:x val="0.149778001832953"/>
-          <c:y val="0.0426701775093073"/>
-          <c:w val="0.57948787445501"/>
-          <c:h val="0.820300387367183"/>
-        </c:manualLayout>
-      </c:layout>
-      <c:barChart>
-        <c:barDir val="col"/>
-        <c:grouping val="clustered"/>
-        <c:varyColors val="0"/>
-        <c:ser>
-          <c:idx val="0"/>
-          <c:order val="0"/>
-          <c:tx>
-            <c:strRef>
-              <c:f>Sheet1!$B$1</c:f>
-              <c:strCache>
-                <c:ptCount val="1"/>
-                <c:pt idx="0">
-                  <c:v>Restock Time</c:v>
-                </c:pt>
-              </c:strCache>
-            </c:strRef>
-          </c:tx>
-          <c:spPr>
-            <a:solidFill>
-              <a:schemeClr val="accent1"/>
-            </a:solidFill>
-            <a:ln w="25400" cap="flat" cmpd="sng" algn="ctr">
-              <a:noFill/>
-              <a:prstDash val="solid"/>
-            </a:ln>
-            <a:effectLst/>
-          </c:spPr>
-          <c:invertIfNegative val="0"/>
-          <c:dLbls>
-            <c:delete val="1"/>
-          </c:dLbls>
-          <c:cat>
-            <c:strRef>
-              <c:f>Sheet1!$A$2:$A$5</c:f>
-              <c:strCache>
-                <c:ptCount val="4"/>
-                <c:pt idx="0">
-                  <c:v>Apples</c:v>
-                </c:pt>
-                <c:pt idx="1">
-                  <c:v>Oranges</c:v>
-                </c:pt>
-                <c:pt idx="2">
-                  <c:v>Bananas</c:v>
-                </c:pt>
-                <c:pt idx="3">
-                  <c:v>Pears</c:v>
-                </c:pt>
-              </c:strCache>
-            </c:strRef>
-          </c:cat>
-          <c:val>
-            <c:numRef>
-              <c:f>Sheet1!$B$2:$B$5</c:f>
-              <c:numCache>
-                <c:formatCode>General</c:formatCode>
-                <c:ptCount val="4"/>
-                <c:pt idx="0">
-                  <c:v>14</c:v>
-                </c:pt>
-                <c:pt idx="1">
-                  <c:v>8</c:v>
-                </c:pt>
-                <c:pt idx="2">
-                  <c:v>18</c:v>
-                </c:pt>
-                <c:pt idx="3">
-                  <c:v>12</c:v>
-                </c:pt>
-              </c:numCache>
-            </c:numRef>
-          </c:val>
-        </c:ser>
-        <c:ser>
-          <c:idx val="1"/>
-          <c:order val="1"/>
-          <c:tx>
-            <c:strRef>
-              <c:f>Sheet1!$C$1</c:f>
-              <c:strCache>
-                <c:ptCount val="1"/>
-                <c:pt idx="0">
-                  <c:v>Shelf Life</c:v>
-                </c:pt>
-              </c:strCache>
-            </c:strRef>
-          </c:tx>
-          <c:spPr>
-            <a:solidFill>
-              <a:schemeClr val="bg2"/>
-            </a:solidFill>
-            <a:ln w="25400" cap="flat" cmpd="sng" algn="ctr">
-              <a:noFill/>
-              <a:prstDash val="solid"/>
-            </a:ln>
-            <a:effectLst/>
-          </c:spPr>
-          <c:invertIfNegative val="0"/>
-          <c:dLbls>
-            <c:delete val="1"/>
-          </c:dLbls>
-          <c:cat>
-            <c:strRef>
-              <c:f>Sheet1!$A$2:$A$5</c:f>
-              <c:strCache>
-                <c:ptCount val="4"/>
-                <c:pt idx="0">
-                  <c:v>Apples</c:v>
-                </c:pt>
-                <c:pt idx="1">
-                  <c:v>Oranges</c:v>
-                </c:pt>
-                <c:pt idx="2">
-                  <c:v>Bananas</c:v>
-                </c:pt>
-                <c:pt idx="3">
-                  <c:v>Pears</c:v>
-                </c:pt>
-              </c:strCache>
-            </c:strRef>
-          </c:cat>
-          <c:val>
-            <c:numRef>
-              <c:f>Sheet1!$C$2:$C$5</c:f>
-              <c:numCache>
-                <c:formatCode>General</c:formatCode>
-                <c:ptCount val="4"/>
-                <c:pt idx="0">
-                  <c:v>19</c:v>
-                </c:pt>
-                <c:pt idx="1">
-                  <c:v>15</c:v>
-                </c:pt>
-                <c:pt idx="2">
-                  <c:v>7</c:v>
-                </c:pt>
-                <c:pt idx="3">
-                  <c:v>10</c:v>
-                </c:pt>
-              </c:numCache>
-            </c:numRef>
-          </c:val>
-        </c:ser>
-        <c:dLbls>
-          <c:showLegendKey val="0"/>
-          <c:showVal val="0"/>
-          <c:showCatName val="0"/>
-          <c:showSerName val="0"/>
-          <c:showPercent val="0"/>
-          <c:showBubbleSize val="0"/>
-        </c:dLbls>
-        <c:gapWidth val="150"/>
-        <c:axId val="-2128992192"/>
-        <c:axId val="-2128989408"/>
-      </c:barChart>
-      <c:catAx>
-        <c:axId val="-2128992192"/>
-        <c:scaling>
-          <c:orientation val="minMax"/>
-        </c:scaling>
-        <c:delete val="0"/>
-        <c:axPos val="b"/>
-        <c:numFmt formatCode="General" sourceLinked="0"/>
-        <c:majorTickMark val="out"/>
-        <c:minorTickMark val="none"/>
-        <c:tickLblPos val="nextTo"/>
-        <c:txPr>
-          <a:bodyPr rot="-60000000" spcFirstLastPara="0" vertOverflow="ellipsis" vert="horz" wrap="square" anchor="ctr" anchorCtr="1"/>
-          <a:lstStyle/>
-          <a:p>
-            <a:pPr>
-              <a:defRPr lang="zh-CN" sz="1800" b="0" i="0" u="none" strike="noStrike" kern="1200" baseline="0">
-                <a:solidFill>
-                  <a:schemeClr val="tx1"/>
-                </a:solidFill>
-                <a:latin typeface="+mn-lt"/>
-                <a:ea typeface="+mn-ea"/>
-                <a:cs typeface="+mn-cs"/>
-              </a:defRPr>
-            </a:pPr>
-          </a:p>
-        </c:txPr>
-        <c:crossAx val="-2128989408"/>
-        <c:crosses val="autoZero"/>
-        <c:auto val="1"/>
-        <c:lblAlgn val="ctr"/>
-        <c:lblOffset val="100"/>
-        <c:noMultiLvlLbl val="0"/>
-      </c:catAx>
-      <c:valAx>
-        <c:axId val="-2128989408"/>
-        <c:scaling>
-          <c:orientation val="minMax"/>
-        </c:scaling>
-        <c:delete val="0"/>
-        <c:axPos val="l"/>
-        <c:majorGridlines/>
-        <c:numFmt formatCode="General" sourceLinked="1"/>
-        <c:majorTickMark val="out"/>
-        <c:minorTickMark val="none"/>
-        <c:tickLblPos val="nextTo"/>
-        <c:txPr>
-          <a:bodyPr rot="-60000000" spcFirstLastPara="0" vertOverflow="ellipsis" vert="horz" wrap="square" anchor="ctr" anchorCtr="1"/>
-          <a:lstStyle/>
-          <a:p>
-            <a:pPr>
-              <a:defRPr lang="zh-CN" sz="1800" b="0" i="0" u="none" strike="noStrike" kern="1200" baseline="0">
-                <a:solidFill>
-                  <a:schemeClr val="tx1"/>
-                </a:solidFill>
-                <a:latin typeface="+mn-lt"/>
-                <a:ea typeface="+mn-ea"/>
-                <a:cs typeface="+mn-cs"/>
-              </a:defRPr>
-            </a:pPr>
-          </a:p>
-        </c:txPr>
-        <c:crossAx val="-2128992192"/>
-        <c:crosses val="autoZero"/>
-        <c:crossBetween val="between"/>
-      </c:valAx>
-    </c:plotArea>
-    <c:legend>
-      <c:legendPos val="r"/>
-      <c:layout>
-        <c:manualLayout>
-          <c:xMode val="edge"/>
-          <c:yMode val="edge"/>
-          <c:x val="0.780640032038725"/>
-          <c:y val="0.411858241110321"/>
-          <c:w val="0.219359967961275"/>
-          <c:h val="0.176283284455973"/>
-        </c:manualLayout>
-      </c:layout>
-      <c:overlay val="0"/>
-      <c:txPr>
-        <a:bodyPr rot="0" spcFirstLastPara="0" vertOverflow="ellipsis" vert="horz" wrap="square" anchor="ctr" anchorCtr="1"/>
-        <a:lstStyle/>
-        <a:p>
-          <a:pPr>
-            <a:defRPr lang="zh-CN" sz="1800" b="0" i="0" u="none" strike="noStrike" kern="1200" baseline="0">
-              <a:solidFill>
-                <a:schemeClr val="tx1"/>
-              </a:solidFill>
-              <a:latin typeface="+mn-lt"/>
-              <a:ea typeface="+mn-ea"/>
-              <a:cs typeface="+mn-cs"/>
-            </a:defRPr>
-          </a:pPr>
-        </a:p>
-      </c:txPr>
-    </c:legend>
-    <c:plotVisOnly val="1"/>
-    <c:dispBlanksAs val="gap"/>
-    <c:showDLblsOverMax val="0"/>
-    <c:extLst>
-      <c:ext uri="{0b15fc19-7d7d-44ad-8c2d-2c3a37ce22c3}">
-        <chartProps xmlns="https://web.wps.cn/et/2018/main" chartId="{f2bc7788-875f-47b6-bf51-96bf700c5d78}"/>
-      </c:ext>
-    </c:extLst>
-  </c:chart>
-  <c:txPr>
-    <a:bodyPr/>
-    <a:lstStyle/>
-    <a:p>
-      <a:pPr>
-        <a:defRPr lang="zh-CN" sz="1800"/>
-      </a:pPr>
-    </a:p>
-  </c:txPr>
-  <c:externalData r:id="rId1">
-    <c:autoUpdate val="0"/>
-  </c:externalData>
-</c:chartSpace>
-</file>
-
 <file path=ppt/handoutMasters/handoutMaster1.xml><?xml version="1.0" encoding="utf-8"?>
 <p:handoutMaster xmlns:a="http://schemas.openxmlformats.org/drawingml/2006/main" xmlns:r="http://schemas.openxmlformats.org/officeDocument/2006/relationships" xmlns:p="http://schemas.openxmlformats.org/presentationml/2006/main">
   <p:cSld>
@@ -1754,7 +1445,7 @@
                 <a:schemeClr val="tx1"/>
               </a:buClr>
               <a:buSzTx/>
-              <a:buFont typeface="Arial" panose="020B0604020202020204"/>
+              <a:buFont typeface="Arial" panose="020B0604020202090204"/>
               <a:buChar char="•"/>
               <a:defRPr sz="1600"/>
             </a:lvl1pPr>
@@ -1806,7 +1497,7 @@
                 <a:schemeClr val="tx1"/>
               </a:buClr>
               <a:buSzTx/>
-              <a:buFont typeface="Arial" panose="020B0604020202020204"/>
+              <a:buFont typeface="Arial" panose="020B0604020202090204"/>
               <a:buChar char="•"/>
               <a:defRPr/>
             </a:pPr>
@@ -1831,7 +1522,7 @@
                 <a:schemeClr val="tx1"/>
               </a:buClr>
               <a:buSzTx/>
-              <a:buFont typeface="Arial" panose="020B0604020202020204"/>
+              <a:buFont typeface="Arial" panose="020B0604020202090204"/>
               <a:buChar char="•"/>
               <a:defRPr/>
             </a:pPr>
@@ -1856,7 +1547,7 @@
                 <a:schemeClr val="tx1"/>
               </a:buClr>
               <a:buSzTx/>
-              <a:buFont typeface="Arial" panose="020B0604020202020204"/>
+              <a:buFont typeface="Arial" panose="020B0604020202090204"/>
               <a:buChar char="•"/>
               <a:defRPr/>
             </a:pPr>
@@ -2165,7 +1856,7 @@
                 <a:schemeClr val="tx1"/>
               </a:buClr>
               <a:buSzTx/>
-              <a:buFont typeface="Arial" panose="020B0604020202020204"/>
+              <a:buFont typeface="Arial" panose="020B0604020202090204"/>
               <a:buNone/>
               <a:defRPr sz="1600" b="1">
                 <a:solidFill>
@@ -2243,7 +1934,7 @@
                 <a:schemeClr val="tx1"/>
               </a:buClr>
               <a:buSzTx/>
-              <a:buFont typeface="Arial" panose="020B0604020202020204"/>
+              <a:buFont typeface="Arial" panose="020B0604020202090204"/>
               <a:buNone/>
               <a:defRPr sz="1400" b="0">
                 <a:solidFill>
@@ -2329,7 +2020,7 @@
                 <a:schemeClr val="tx1"/>
               </a:buClr>
               <a:buSzTx/>
-              <a:buFont typeface="Arial" panose="020B0604020202020204"/>
+              <a:buFont typeface="Arial" panose="020B0604020202090204"/>
               <a:buNone/>
               <a:defRPr sz="1600" b="1">
                 <a:solidFill>
@@ -2407,7 +2098,7 @@
                 <a:schemeClr val="tx1"/>
               </a:buClr>
               <a:buSzTx/>
-              <a:buFont typeface="Arial" panose="020B0604020202020204"/>
+              <a:buFont typeface="Arial" panose="020B0604020202090204"/>
               <a:buNone/>
               <a:defRPr sz="1400" b="0">
                 <a:solidFill>
@@ -2493,7 +2184,7 @@
                 <a:schemeClr val="tx1"/>
               </a:buClr>
               <a:buSzTx/>
-              <a:buFont typeface="Arial" panose="020B0604020202020204"/>
+              <a:buFont typeface="Arial" panose="020B0604020202090204"/>
               <a:buNone/>
               <a:defRPr sz="1600" b="1">
                 <a:solidFill>
@@ -2571,7 +2262,7 @@
                 <a:schemeClr val="tx1"/>
               </a:buClr>
               <a:buSzTx/>
-              <a:buFont typeface="Arial" panose="020B0604020202020204"/>
+              <a:buFont typeface="Arial" panose="020B0604020202090204"/>
               <a:buNone/>
               <a:defRPr sz="1400" b="0">
                 <a:solidFill>
@@ -2974,8 +2665,8 @@
               <a:solidFill>
                 <a:schemeClr val="accent1"/>
               </a:solidFill>
-              <a:latin typeface="Gill Sans"/>
-              <a:cs typeface="Gill Sans"/>
+              <a:latin typeface="Gill Sans" panose="020B0502020104020203"/>
+              <a:cs typeface="Gill Sans" panose="020B0502020104020203"/>
             </a:endParaRPr>
           </a:p>
         </p:txBody>
@@ -3092,8 +2783,8 @@
                 <a:solidFill>
                   <a:schemeClr val="tx2"/>
                 </a:solidFill>
-                <a:latin typeface="Gill Sans"/>
-                <a:cs typeface="Gill Sans"/>
+                <a:latin typeface="Gill Sans" panose="020B0502020104020203"/>
+                <a:cs typeface="Gill Sans" panose="020B0502020104020203"/>
               </a:endParaRPr>
             </a:p>
           </p:txBody>
@@ -3211,8 +2902,8 @@
                 <a:solidFill>
                   <a:schemeClr val="bg2"/>
                 </a:solidFill>
-                <a:latin typeface="Gill Sans"/>
-                <a:cs typeface="Gill Sans"/>
+                <a:latin typeface="Gill Sans" panose="020B0502020104020203"/>
+                <a:cs typeface="Gill Sans" panose="020B0502020104020203"/>
               </a:endParaRPr>
             </a:p>
           </p:txBody>
@@ -3330,8 +3021,8 @@
                 <a:solidFill>
                   <a:schemeClr val="accent1"/>
                 </a:solidFill>
-                <a:latin typeface="Gill Sans"/>
-                <a:cs typeface="Gill Sans"/>
+                <a:latin typeface="Gill Sans" panose="020B0502020104020203"/>
+                <a:cs typeface="Gill Sans" panose="020B0502020104020203"/>
               </a:endParaRPr>
             </a:p>
           </p:txBody>
@@ -3449,8 +3140,8 @@
                 <a:solidFill>
                   <a:schemeClr val="accent1"/>
                 </a:solidFill>
-                <a:latin typeface="Gill Sans"/>
-                <a:cs typeface="Gill Sans"/>
+                <a:latin typeface="Gill Sans" panose="020B0502020104020203"/>
+                <a:cs typeface="Gill Sans" panose="020B0502020104020203"/>
               </a:endParaRPr>
             </a:p>
           </p:txBody>
@@ -3568,8 +3259,8 @@
                 <a:solidFill>
                   <a:schemeClr val="tx2"/>
                 </a:solidFill>
-                <a:latin typeface="Gill Sans"/>
-                <a:cs typeface="Gill Sans"/>
+                <a:latin typeface="Gill Sans" panose="020B0502020104020203"/>
+                <a:cs typeface="Gill Sans" panose="020B0502020104020203"/>
               </a:endParaRPr>
             </a:p>
           </p:txBody>
@@ -3659,7 +3350,7 @@
                 <a:schemeClr val="tx1"/>
               </a:buClr>
               <a:buSzTx/>
-              <a:buFont typeface="Arial" panose="020B0604020202020204"/>
+              <a:buFont typeface="Arial" panose="020B0604020202090204"/>
               <a:buNone/>
               <a:defRPr sz="4000" b="1">
                 <a:solidFill>
@@ -3737,7 +3428,7 @@
                 <a:schemeClr val="tx1"/>
               </a:buClr>
               <a:buSzTx/>
-              <a:buFont typeface="Arial" panose="020B0604020202020204"/>
+              <a:buFont typeface="Arial" panose="020B0604020202090204"/>
               <a:buNone/>
               <a:defRPr sz="2400" b="0">
                 <a:solidFill>
@@ -3815,7 +3506,7 @@
                 <a:schemeClr val="tx1"/>
               </a:buClr>
               <a:buSzTx/>
-              <a:buFont typeface="Arial" panose="020B0604020202020204"/>
+              <a:buFont typeface="Arial" panose="020B0604020202090204"/>
               <a:buNone/>
               <a:defRPr sz="4000" b="1">
                 <a:solidFill>
@@ -3893,7 +3584,7 @@
                 <a:schemeClr val="tx1"/>
               </a:buClr>
               <a:buSzTx/>
-              <a:buFont typeface="Arial" panose="020B0604020202020204"/>
+              <a:buFont typeface="Arial" panose="020B0604020202090204"/>
               <a:buNone/>
               <a:defRPr sz="2400" b="0">
                 <a:solidFill>
@@ -3971,7 +3662,7 @@
                 <a:schemeClr val="tx1"/>
               </a:buClr>
               <a:buSzTx/>
-              <a:buFont typeface="Arial" panose="020B0604020202020204"/>
+              <a:buFont typeface="Arial" panose="020B0604020202090204"/>
               <a:buNone/>
               <a:defRPr sz="4000" b="1">
                 <a:solidFill>
@@ -4049,7 +3740,7 @@
                 <a:schemeClr val="tx1"/>
               </a:buClr>
               <a:buSzTx/>
-              <a:buFont typeface="Arial" panose="020B0604020202020204"/>
+              <a:buFont typeface="Arial" panose="020B0604020202090204"/>
               <a:buNone/>
               <a:defRPr sz="2400" b="0">
                 <a:solidFill>
@@ -4127,7 +3818,7 @@
                 <a:schemeClr val="tx1"/>
               </a:buClr>
               <a:buSzTx/>
-              <a:buFont typeface="Arial" panose="020B0604020202020204"/>
+              <a:buFont typeface="Arial" panose="020B0604020202090204"/>
               <a:buNone/>
               <a:defRPr sz="4000" b="1">
                 <a:solidFill>
@@ -4205,7 +3896,7 @@
                 <a:schemeClr val="tx1"/>
               </a:buClr>
               <a:buSzTx/>
-              <a:buFont typeface="Arial" panose="020B0604020202020204"/>
+              <a:buFont typeface="Arial" panose="020B0604020202090204"/>
               <a:buNone/>
               <a:defRPr sz="2400" b="0">
                 <a:solidFill>
@@ -4283,7 +3974,7 @@
                 <a:schemeClr val="tx1"/>
               </a:buClr>
               <a:buSzTx/>
-              <a:buFont typeface="Arial" panose="020B0604020202020204"/>
+              <a:buFont typeface="Arial" panose="020B0604020202090204"/>
               <a:buNone/>
               <a:defRPr sz="4000" b="1">
                 <a:solidFill>
@@ -4361,7 +4052,7 @@
                 <a:schemeClr val="tx1"/>
               </a:buClr>
               <a:buSzTx/>
-              <a:buFont typeface="Arial" panose="020B0604020202020204"/>
+              <a:buFont typeface="Arial" panose="020B0604020202090204"/>
               <a:buNone/>
               <a:defRPr sz="2400" b="0">
                 <a:solidFill>
@@ -4439,7 +4130,7 @@
                 <a:schemeClr val="tx1"/>
               </a:buClr>
               <a:buSzTx/>
-              <a:buFont typeface="Arial" panose="020B0604020202020204"/>
+              <a:buFont typeface="Arial" panose="020B0604020202090204"/>
               <a:buNone/>
               <a:defRPr sz="4000" b="1">
                 <a:solidFill>
@@ -4517,7 +4208,7 @@
                 <a:schemeClr val="tx1"/>
               </a:buClr>
               <a:buSzTx/>
-              <a:buFont typeface="Arial" panose="020B0604020202020204"/>
+              <a:buFont typeface="Arial" panose="020B0604020202090204"/>
               <a:buNone/>
               <a:defRPr sz="2400" b="0">
                 <a:solidFill>
@@ -10317,8 +10008,8 @@
                     <a:tint val="75000"/>
                   </a:schemeClr>
                 </a:solidFill>
-                <a:latin typeface="Gill Sans"/>
-                <a:cs typeface="Gill Sans"/>
+                <a:latin typeface="Gill Sans" panose="020B0502020104020203"/>
+                <a:cs typeface="Gill Sans" panose="020B0502020104020203"/>
               </a:defRPr>
             </a:lvl1pPr>
           </a:lstStyle>
@@ -10356,8 +10047,8 @@
                     <a:tint val="75000"/>
                   </a:schemeClr>
                 </a:solidFill>
-                <a:latin typeface="Gill Sans"/>
-                <a:cs typeface="Gill Sans"/>
+                <a:latin typeface="Gill Sans" panose="020B0502020104020203"/>
+                <a:cs typeface="Gill Sans" panose="020B0502020104020203"/>
               </a:defRPr>
             </a:lvl1pPr>
           </a:lstStyle>
@@ -10436,9 +10127,9 @@
           <a:solidFill>
             <a:srgbClr val="95001A"/>
           </a:solidFill>
-          <a:latin typeface="Gill Sans"/>
+          <a:latin typeface="Gill Sans" panose="020B0502020104020203"/>
           <a:ea typeface="+mj-ea"/>
-          <a:cs typeface="Gill Sans"/>
+          <a:cs typeface="Gill Sans" panose="020B0502020104020203"/>
         </a:defRPr>
       </a:lvl1pPr>
     </p:titleStyle>
@@ -10450,15 +10141,15 @@
         <a:buClr>
           <a:schemeClr val="tx1"/>
         </a:buClr>
-        <a:buFont typeface="Arial" panose="020B0604020202020204"/>
+        <a:buFont typeface="Arial" panose="020B0604020202090204"/>
         <a:buChar char="•"/>
         <a:defRPr sz="2800" kern="1200">
           <a:solidFill>
             <a:schemeClr val="accent6"/>
           </a:solidFill>
-          <a:latin typeface="Gill Sans"/>
+          <a:latin typeface="Gill Sans" panose="020B0502020104020203"/>
           <a:ea typeface="+mn-ea"/>
-          <a:cs typeface="Gill Sans"/>
+          <a:cs typeface="Gill Sans" panose="020B0502020104020203"/>
         </a:defRPr>
       </a:lvl1pPr>
       <a:lvl2pPr marL="742950" indent="-285750" algn="l" defTabSz="457200" rtl="0" eaLnBrk="1" latinLnBrk="0" hangingPunct="1">
@@ -10468,15 +10159,15 @@
         <a:buClr>
           <a:schemeClr val="tx1"/>
         </a:buClr>
-        <a:buFont typeface="Arial" panose="020B0604020202020204"/>
+        <a:buFont typeface="Arial" panose="020B0604020202090204"/>
         <a:buChar char="–"/>
         <a:defRPr sz="2400" kern="1200">
           <a:solidFill>
             <a:schemeClr val="accent6"/>
           </a:solidFill>
-          <a:latin typeface="Gill Sans"/>
+          <a:latin typeface="Gill Sans" panose="020B0502020104020203"/>
           <a:ea typeface="+mn-ea"/>
-          <a:cs typeface="Gill Sans"/>
+          <a:cs typeface="Gill Sans" panose="020B0502020104020203"/>
         </a:defRPr>
       </a:lvl2pPr>
       <a:lvl3pPr marL="1143000" indent="-228600" algn="l" defTabSz="457200" rtl="0" eaLnBrk="1" latinLnBrk="0" hangingPunct="1">
@@ -10486,15 +10177,15 @@
         <a:buClr>
           <a:schemeClr val="tx1"/>
         </a:buClr>
-        <a:buFont typeface="Arial" panose="020B0604020202020204"/>
+        <a:buFont typeface="Arial" panose="020B0604020202090204"/>
         <a:buChar char="•"/>
         <a:defRPr sz="2000" kern="1200">
           <a:solidFill>
             <a:schemeClr val="accent6"/>
           </a:solidFill>
-          <a:latin typeface="Gill Sans"/>
+          <a:latin typeface="Gill Sans" panose="020B0502020104020203"/>
           <a:ea typeface="+mn-ea"/>
-          <a:cs typeface="Gill Sans"/>
+          <a:cs typeface="Gill Sans" panose="020B0502020104020203"/>
         </a:defRPr>
       </a:lvl3pPr>
       <a:lvl4pPr marL="1600200" indent="-228600" algn="l" defTabSz="457200" rtl="0" eaLnBrk="1" latinLnBrk="0" hangingPunct="1">
@@ -10504,15 +10195,15 @@
         <a:buClr>
           <a:schemeClr val="tx1"/>
         </a:buClr>
-        <a:buFont typeface="Arial" panose="020B0604020202020204"/>
+        <a:buFont typeface="Arial" panose="020B0604020202090204"/>
         <a:buChar char="–"/>
         <a:defRPr sz="1800" kern="1200">
           <a:solidFill>
             <a:schemeClr val="accent6"/>
           </a:solidFill>
-          <a:latin typeface="Gill Sans"/>
+          <a:latin typeface="Gill Sans" panose="020B0502020104020203"/>
           <a:ea typeface="+mn-ea"/>
-          <a:cs typeface="Gill Sans"/>
+          <a:cs typeface="Gill Sans" panose="020B0502020104020203"/>
         </a:defRPr>
       </a:lvl4pPr>
       <a:lvl5pPr marL="2057400" indent="-228600" algn="l" defTabSz="457200" rtl="0" eaLnBrk="1" latinLnBrk="0" hangingPunct="1">
@@ -10522,22 +10213,22 @@
         <a:buClr>
           <a:schemeClr val="tx1"/>
         </a:buClr>
-        <a:buFont typeface="Arial" panose="020B0604020202020204"/>
+        <a:buFont typeface="Arial" panose="020B0604020202090204"/>
         <a:buChar char="»"/>
         <a:defRPr sz="1800" kern="1200">
           <a:solidFill>
             <a:schemeClr val="accent6"/>
           </a:solidFill>
-          <a:latin typeface="Gill Sans"/>
+          <a:latin typeface="Gill Sans" panose="020B0502020104020203"/>
           <a:ea typeface="+mn-ea"/>
-          <a:cs typeface="Gill Sans"/>
+          <a:cs typeface="Gill Sans" panose="020B0502020104020203"/>
         </a:defRPr>
       </a:lvl5pPr>
       <a:lvl6pPr marL="2514600" indent="-228600" algn="l" defTabSz="457200" rtl="0" eaLnBrk="1" latinLnBrk="0" hangingPunct="1">
         <a:spcBef>
           <a:spcPct val="20000"/>
         </a:spcBef>
-        <a:buFont typeface="Arial" panose="020B0604020202020204"/>
+        <a:buFont typeface="Arial" panose="020B0604020202090204"/>
         <a:buChar char="•"/>
         <a:defRPr sz="2000" kern="1200">
           <a:solidFill>
@@ -10552,7 +10243,7 @@
         <a:spcBef>
           <a:spcPct val="20000"/>
         </a:spcBef>
-        <a:buFont typeface="Arial" panose="020B0604020202020204"/>
+        <a:buFont typeface="Arial" panose="020B0604020202090204"/>
         <a:buChar char="•"/>
         <a:defRPr sz="2000" kern="1200">
           <a:solidFill>
@@ -10567,7 +10258,7 @@
         <a:spcBef>
           <a:spcPct val="20000"/>
         </a:spcBef>
-        <a:buFont typeface="Arial" panose="020B0604020202020204"/>
+        <a:buFont typeface="Arial" panose="020B0604020202090204"/>
         <a:buChar char="•"/>
         <a:defRPr sz="2000" kern="1200">
           <a:solidFill>
@@ -10582,7 +10273,7 @@
         <a:spcBef>
           <a:spcPct val="20000"/>
         </a:spcBef>
-        <a:buFont typeface="Arial" panose="020B0604020202020204"/>
+        <a:buFont typeface="Arial" panose="020B0604020202090204"/>
         <a:buChar char="•"/>
         <a:defRPr sz="2000" kern="1200">
           <a:solidFill>
@@ -10902,15 +10593,15 @@
               <a:buClr>
                 <a:schemeClr val="tx1"/>
               </a:buClr>
-              <a:buFont typeface="Arial" panose="020B0604020202020204"/>
+              <a:buFont typeface="Arial" panose="020B0604020202090204"/>
               <a:buChar char="•"/>
               <a:defRPr sz="2800" kern="1200">
                 <a:solidFill>
                   <a:schemeClr val="accent6"/>
                 </a:solidFill>
-                <a:latin typeface="Gill Sans"/>
+                <a:latin typeface="Gill Sans" panose="020B0502020104020203"/>
                 <a:ea typeface="+mn-ea"/>
-                <a:cs typeface="Gill Sans"/>
+                <a:cs typeface="Gill Sans" panose="020B0502020104020203"/>
               </a:defRPr>
             </a:lvl1pPr>
             <a:lvl2pPr marL="742950" indent="-285750" algn="l" defTabSz="457200" rtl="0" eaLnBrk="1" latinLnBrk="0" hangingPunct="1">
@@ -10920,15 +10611,15 @@
               <a:buClr>
                 <a:schemeClr val="tx1"/>
               </a:buClr>
-              <a:buFont typeface="Arial" panose="020B0604020202020204"/>
+              <a:buFont typeface="Arial" panose="020B0604020202090204"/>
               <a:buChar char="–"/>
               <a:defRPr sz="2400" kern="1200">
                 <a:solidFill>
                   <a:schemeClr val="accent6"/>
                 </a:solidFill>
-                <a:latin typeface="Gill Sans"/>
+                <a:latin typeface="Gill Sans" panose="020B0502020104020203"/>
                 <a:ea typeface="+mn-ea"/>
-                <a:cs typeface="Gill Sans"/>
+                <a:cs typeface="Gill Sans" panose="020B0502020104020203"/>
               </a:defRPr>
             </a:lvl2pPr>
             <a:lvl3pPr marL="1143000" indent="-228600" algn="l" defTabSz="457200" rtl="0" eaLnBrk="1" latinLnBrk="0" hangingPunct="1">
@@ -10938,15 +10629,15 @@
               <a:buClr>
                 <a:schemeClr val="tx1"/>
               </a:buClr>
-              <a:buFont typeface="Arial" panose="020B0604020202020204"/>
+              <a:buFont typeface="Arial" panose="020B0604020202090204"/>
               <a:buChar char="•"/>
               <a:defRPr sz="2000" kern="1200">
                 <a:solidFill>
                   <a:schemeClr val="accent6"/>
                 </a:solidFill>
-                <a:latin typeface="Gill Sans"/>
+                <a:latin typeface="Gill Sans" panose="020B0502020104020203"/>
                 <a:ea typeface="+mn-ea"/>
-                <a:cs typeface="Gill Sans"/>
+                <a:cs typeface="Gill Sans" panose="020B0502020104020203"/>
               </a:defRPr>
             </a:lvl3pPr>
             <a:lvl4pPr marL="1600200" indent="-228600" algn="l" defTabSz="457200" rtl="0" eaLnBrk="1" latinLnBrk="0" hangingPunct="1">
@@ -10956,15 +10647,15 @@
               <a:buClr>
                 <a:schemeClr val="tx1"/>
               </a:buClr>
-              <a:buFont typeface="Arial" panose="020B0604020202020204"/>
+              <a:buFont typeface="Arial" panose="020B0604020202090204"/>
               <a:buChar char="–"/>
               <a:defRPr sz="1800" kern="1200">
                 <a:solidFill>
                   <a:schemeClr val="accent6"/>
                 </a:solidFill>
-                <a:latin typeface="Gill Sans"/>
+                <a:latin typeface="Gill Sans" panose="020B0502020104020203"/>
                 <a:ea typeface="+mn-ea"/>
-                <a:cs typeface="Gill Sans"/>
+                <a:cs typeface="Gill Sans" panose="020B0502020104020203"/>
               </a:defRPr>
             </a:lvl4pPr>
             <a:lvl5pPr marL="2057400" indent="-228600" algn="l" defTabSz="457200" rtl="0" eaLnBrk="1" latinLnBrk="0" hangingPunct="1">
@@ -10974,22 +10665,22 @@
               <a:buClr>
                 <a:schemeClr val="tx1"/>
               </a:buClr>
-              <a:buFont typeface="Arial" panose="020B0604020202020204"/>
+              <a:buFont typeface="Arial" panose="020B0604020202090204"/>
               <a:buChar char="»"/>
               <a:defRPr sz="1800" kern="1200">
                 <a:solidFill>
                   <a:schemeClr val="accent6"/>
                 </a:solidFill>
-                <a:latin typeface="Gill Sans"/>
+                <a:latin typeface="Gill Sans" panose="020B0502020104020203"/>
                 <a:ea typeface="+mn-ea"/>
-                <a:cs typeface="Gill Sans"/>
+                <a:cs typeface="Gill Sans" panose="020B0502020104020203"/>
               </a:defRPr>
             </a:lvl5pPr>
             <a:lvl6pPr marL="2514600" indent="-228600" algn="l" defTabSz="457200" rtl="0" eaLnBrk="1" latinLnBrk="0" hangingPunct="1">
               <a:spcBef>
                 <a:spcPct val="20000"/>
               </a:spcBef>
-              <a:buFont typeface="Arial" panose="020B0604020202020204"/>
+              <a:buFont typeface="Arial" panose="020B0604020202090204"/>
               <a:buChar char="•"/>
               <a:defRPr sz="2000" kern="1200">
                 <a:solidFill>
@@ -11004,7 +10695,7 @@
               <a:spcBef>
                 <a:spcPct val="20000"/>
               </a:spcBef>
-              <a:buFont typeface="Arial" panose="020B0604020202020204"/>
+              <a:buFont typeface="Arial" panose="020B0604020202090204"/>
               <a:buChar char="•"/>
               <a:defRPr sz="2000" kern="1200">
                 <a:solidFill>
@@ -11019,7 +10710,7 @@
               <a:spcBef>
                 <a:spcPct val="20000"/>
               </a:spcBef>
-              <a:buFont typeface="Arial" panose="020B0604020202020204"/>
+              <a:buFont typeface="Arial" panose="020B0604020202090204"/>
               <a:buChar char="•"/>
               <a:defRPr sz="2000" kern="1200">
                 <a:solidFill>
@@ -11034,7 +10725,7 @@
               <a:spcBef>
                 <a:spcPct val="20000"/>
               </a:spcBef>
-              <a:buFont typeface="Arial" panose="020B0604020202020204"/>
+              <a:buFont typeface="Arial" panose="020B0604020202090204"/>
               <a:buChar char="•"/>
               <a:defRPr sz="2000" kern="1200">
                 <a:solidFill>
@@ -11269,15 +10960,15 @@
               <a:buClr>
                 <a:schemeClr val="tx1"/>
               </a:buClr>
-              <a:buFont typeface="Arial" panose="020B0604020202020204"/>
+              <a:buFont typeface="Arial" panose="020B0604020202090204"/>
               <a:buChar char="•"/>
               <a:defRPr sz="2800" kern="1200">
                 <a:solidFill>
                   <a:schemeClr val="accent6"/>
                 </a:solidFill>
-                <a:latin typeface="Gill Sans"/>
+                <a:latin typeface="Gill Sans" panose="020B0502020104020203"/>
                 <a:ea typeface="+mn-ea"/>
-                <a:cs typeface="Gill Sans"/>
+                <a:cs typeface="Gill Sans" panose="020B0502020104020203"/>
               </a:defRPr>
             </a:lvl1pPr>
             <a:lvl2pPr marL="742950" indent="-285750" algn="l" defTabSz="457200" rtl="0" eaLnBrk="1" latinLnBrk="0" hangingPunct="1">
@@ -11287,15 +10978,15 @@
               <a:buClr>
                 <a:schemeClr val="tx1"/>
               </a:buClr>
-              <a:buFont typeface="Arial" panose="020B0604020202020204"/>
+              <a:buFont typeface="Arial" panose="020B0604020202090204"/>
               <a:buChar char="–"/>
               <a:defRPr sz="2400" kern="1200">
                 <a:solidFill>
                   <a:schemeClr val="accent6"/>
                 </a:solidFill>
-                <a:latin typeface="Gill Sans"/>
+                <a:latin typeface="Gill Sans" panose="020B0502020104020203"/>
                 <a:ea typeface="+mn-ea"/>
-                <a:cs typeface="Gill Sans"/>
+                <a:cs typeface="Gill Sans" panose="020B0502020104020203"/>
               </a:defRPr>
             </a:lvl2pPr>
             <a:lvl3pPr marL="1143000" indent="-228600" algn="l" defTabSz="457200" rtl="0" eaLnBrk="1" latinLnBrk="0" hangingPunct="1">
@@ -11305,15 +10996,15 @@
               <a:buClr>
                 <a:schemeClr val="tx1"/>
               </a:buClr>
-              <a:buFont typeface="Arial" panose="020B0604020202020204"/>
+              <a:buFont typeface="Arial" panose="020B0604020202090204"/>
               <a:buChar char="•"/>
               <a:defRPr sz="2000" kern="1200">
                 <a:solidFill>
                   <a:schemeClr val="accent6"/>
                 </a:solidFill>
-                <a:latin typeface="Gill Sans"/>
+                <a:latin typeface="Gill Sans" panose="020B0502020104020203"/>
                 <a:ea typeface="+mn-ea"/>
-                <a:cs typeface="Gill Sans"/>
+                <a:cs typeface="Gill Sans" panose="020B0502020104020203"/>
               </a:defRPr>
             </a:lvl3pPr>
             <a:lvl4pPr marL="1600200" indent="-228600" algn="l" defTabSz="457200" rtl="0" eaLnBrk="1" latinLnBrk="0" hangingPunct="1">
@@ -11323,15 +11014,15 @@
               <a:buClr>
                 <a:schemeClr val="tx1"/>
               </a:buClr>
-              <a:buFont typeface="Arial" panose="020B0604020202020204"/>
+              <a:buFont typeface="Arial" panose="020B0604020202090204"/>
               <a:buChar char="–"/>
               <a:defRPr sz="1800" kern="1200">
                 <a:solidFill>
                   <a:schemeClr val="accent6"/>
                 </a:solidFill>
-                <a:latin typeface="Gill Sans"/>
+                <a:latin typeface="Gill Sans" panose="020B0502020104020203"/>
                 <a:ea typeface="+mn-ea"/>
-                <a:cs typeface="Gill Sans"/>
+                <a:cs typeface="Gill Sans" panose="020B0502020104020203"/>
               </a:defRPr>
             </a:lvl4pPr>
             <a:lvl5pPr marL="2057400" indent="-228600" algn="l" defTabSz="457200" rtl="0" eaLnBrk="1" latinLnBrk="0" hangingPunct="1">
@@ -11341,22 +11032,22 @@
               <a:buClr>
                 <a:schemeClr val="tx1"/>
               </a:buClr>
-              <a:buFont typeface="Arial" panose="020B0604020202020204"/>
+              <a:buFont typeface="Arial" panose="020B0604020202090204"/>
               <a:buChar char="»"/>
               <a:defRPr sz="1800" kern="1200">
                 <a:solidFill>
                   <a:schemeClr val="accent6"/>
                 </a:solidFill>
-                <a:latin typeface="Gill Sans"/>
+                <a:latin typeface="Gill Sans" panose="020B0502020104020203"/>
                 <a:ea typeface="+mn-ea"/>
-                <a:cs typeface="Gill Sans"/>
+                <a:cs typeface="Gill Sans" panose="020B0502020104020203"/>
               </a:defRPr>
             </a:lvl5pPr>
             <a:lvl6pPr marL="2514600" indent="-228600" algn="l" defTabSz="457200" rtl="0" eaLnBrk="1" latinLnBrk="0" hangingPunct="1">
               <a:spcBef>
                 <a:spcPct val="20000"/>
               </a:spcBef>
-              <a:buFont typeface="Arial" panose="020B0604020202020204"/>
+              <a:buFont typeface="Arial" panose="020B0604020202090204"/>
               <a:buChar char="•"/>
               <a:defRPr sz="2000" kern="1200">
                 <a:solidFill>
@@ -11371,7 +11062,7 @@
               <a:spcBef>
                 <a:spcPct val="20000"/>
               </a:spcBef>
-              <a:buFont typeface="Arial" panose="020B0604020202020204"/>
+              <a:buFont typeface="Arial" panose="020B0604020202090204"/>
               <a:buChar char="•"/>
               <a:defRPr sz="2000" kern="1200">
                 <a:solidFill>
@@ -11386,7 +11077,7 @@
               <a:spcBef>
                 <a:spcPct val="20000"/>
               </a:spcBef>
-              <a:buFont typeface="Arial" panose="020B0604020202020204"/>
+              <a:buFont typeface="Arial" panose="020B0604020202090204"/>
               <a:buChar char="•"/>
               <a:defRPr sz="2000" kern="1200">
                 <a:solidFill>
@@ -11401,7 +11092,7 @@
               <a:spcBef>
                 <a:spcPct val="20000"/>
               </a:spcBef>
-              <a:buFont typeface="Arial" panose="020B0604020202020204"/>
+              <a:buFont typeface="Arial" panose="020B0604020202090204"/>
               <a:buChar char="•"/>
               <a:defRPr sz="2000" kern="1200">
                 <a:solidFill>
@@ -13382,7 +13073,7 @@
         <p:spPr>
           <a:xfrm>
             <a:off x="250825" y="884555"/>
-            <a:ext cx="8183880" cy="3014980"/>
+            <a:ext cx="8183880" cy="3661410"/>
           </a:xfrm>
           <a:prstGeom prst="rect">
             <a:avLst/>
@@ -13411,7 +13102,7 @@
           </a:p>
           <a:p>
             <a:pPr marL="285750" indent="-285750">
-              <a:buFont typeface="Arial" panose="020B0604020202020204" pitchFamily="34" charset="0"/>
+              <a:buFont typeface="Arial" panose="020B0604020202090204" pitchFamily="34" charset="0"/>
               <a:buChar char="•"/>
             </a:pPr>
             <a:r>
@@ -13422,7 +13113,7 @@
           </a:p>
           <a:p>
             <a:pPr marL="285750" indent="-285750">
-              <a:buFont typeface="Arial" panose="020B0604020202020204" pitchFamily="34" charset="0"/>
+              <a:buFont typeface="Arial" panose="020B0604020202090204" pitchFamily="34" charset="0"/>
               <a:buChar char="•"/>
             </a:pPr>
             <a:r>
@@ -13459,7 +13150,7 @@
           </a:p>
           <a:p>
             <a:pPr marL="285750" indent="-285750">
-              <a:buFont typeface="Arial" panose="020B0604020202020204" pitchFamily="34" charset="0"/>
+              <a:buFont typeface="Arial" panose="020B0604020202090204" pitchFamily="34" charset="0"/>
               <a:buChar char="•"/>
             </a:pPr>
             <a:r>
@@ -13497,36 +13188,50 @@
           </a:p>
           <a:p>
             <a:pPr marL="285750" indent="-285750">
-              <a:buFont typeface="Arial" panose="020B0604020202020204" pitchFamily="34" charset="0"/>
+              <a:buFont typeface="Arial" panose="020B0604020202090204" pitchFamily="34" charset="0"/>
               <a:buChar char="•"/>
             </a:pPr>
             <a:r>
               <a:rPr lang="en-US" altLang="zh-CN" sz="1400" dirty="0"/>
-              <a:t>Incorporating additional datasets covering other relevant factors</a:t>
-            </a:r>
-            <a:endParaRPr lang="en-US" altLang="zh-CN" sz="1400" dirty="0"/>
+              <a:t>Incorporating additional datasets covering other relevant factors, </a:t>
+            </a:r>
+            <a:r>
+              <a:rPr lang="en-US" altLang="en-US" sz="1400" dirty="0"/>
+              <a:t>but it is challenging because external data often differ in format, coverage, and geographic alignment.</a:t>
+            </a:r>
+            <a:endParaRPr lang="en-US" altLang="en-US" sz="1400" dirty="0"/>
           </a:p>
           <a:p>
             <a:pPr marL="285750" indent="-285750">
-              <a:buFont typeface="Arial" panose="020B0604020202020204" pitchFamily="34" charset="0"/>
+              <a:buFont typeface="Arial" panose="020B0604020202090204" pitchFamily="34" charset="0"/>
               <a:buChar char="•"/>
             </a:pPr>
             <a:r>
               <a:rPr lang="en-US" altLang="zh-CN" sz="1400" dirty="0"/>
-              <a:t>Adding textual descriptions as a new feature and apply NLP techniques.</a:t>
-            </a:r>
-            <a:endParaRPr lang="en-US" altLang="zh-CN" sz="1400" dirty="0"/>
+              <a:t>Adding textual descriptions as a new feature and apply NLP techniques, </a:t>
+            </a:r>
+            <a:r>
+              <a:rPr lang="en-US" altLang="en-US" sz="1400" dirty="0"/>
+              <a:t>but how to proces noisy and unstructured sighting reports makes it difficult.</a:t>
+            </a:r>
+            <a:endParaRPr lang="en-US" altLang="en-US" sz="1400" dirty="0"/>
           </a:p>
           <a:p>
             <a:pPr marL="285750" indent="-285750">
-              <a:buFont typeface="Arial" panose="020B0604020202020204" pitchFamily="34" charset="0"/>
+              <a:buFont typeface="Arial" panose="020B0604020202090204" pitchFamily="34" charset="0"/>
               <a:buChar char="•"/>
             </a:pPr>
             <a:r>
               <a:rPr lang="en-US" altLang="zh-CN" sz="1400" dirty="0">
                 <a:sym typeface="+mn-ea"/>
               </a:rPr>
-              <a:t>Neural networks for richer nonlinear representations.</a:t>
+              <a:t>Neural networks for richer nonlinear representations, </a:t>
+            </a:r>
+            <a:r>
+              <a:rPr lang="en-US" altLang="en-US" sz="1400" dirty="0">
+                <a:sym typeface="+mn-ea"/>
+              </a:rPr>
+              <a:t>but they require even larger, balanced datasets and careful tuning to avoid overfitting.</a:t>
             </a:r>
             <a:endParaRPr lang="en-US" altLang="zh-CN" sz="1400" dirty="0">
               <a:sym typeface="+mn-ea"/>
@@ -13534,610 +13239,20 @@
           </a:p>
           <a:p>
             <a:pPr marL="285750" indent="-285750">
-              <a:buFont typeface="Arial" panose="020B0604020202020204" pitchFamily="34" charset="0"/>
+              <a:buFont typeface="Arial" panose="020B0604020202090204" pitchFamily="34" charset="0"/>
               <a:buChar char="•"/>
             </a:pPr>
             <a:r>
               <a:rPr lang="en-US" altLang="zh-CN" sz="1400" dirty="0">
                 <a:sym typeface="+mn-ea"/>
               </a:rPr>
-              <a:t>If problem still exists, another potential cause could be the UFO shapes are impacted by actual </a:t>
+              <a:t>If problem still exists, we may conclude that the UFO shapes are impacted by actual </a:t>
             </a:r>
             <a:r>
               <a:rPr lang="en-US" altLang="zh-CN" sz="1400" dirty="0"/>
               <a:t>aerial anomalies.</a:t>
             </a:r>
             <a:endParaRPr lang="en-US" altLang="zh-CN" sz="1400" dirty="0"/>
-          </a:p>
-        </p:txBody>
-      </p:sp>
-    </p:spTree>
-  </p:cSld>
-  <p:clrMapOvr>
-    <a:masterClrMapping/>
-  </p:clrMapOvr>
-</p:sld>
-</file>
-
-<file path=ppt/slides/slide18.xml><?xml version="1.0" encoding="utf-8"?>
-<p:sld xmlns:a="http://schemas.openxmlformats.org/drawingml/2006/main" xmlns:r="http://schemas.openxmlformats.org/officeDocument/2006/relationships" xmlns:p="http://schemas.openxmlformats.org/presentationml/2006/main">
-  <p:cSld>
-    <p:spTree>
-      <p:nvGrpSpPr>
-        <p:cNvPr id="1" name=""/>
-        <p:cNvGrpSpPr/>
-        <p:nvPr/>
-      </p:nvGrpSpPr>
-      <p:grpSpPr>
-        <a:xfrm>
-          <a:off x="0" y="0"/>
-          <a:ext cx="0" cy="0"/>
-          <a:chOff x="0" y="0"/>
-          <a:chExt cx="0" cy="0"/>
-        </a:xfrm>
-      </p:grpSpPr>
-      <p:sp>
-        <p:nvSpPr>
-          <p:cNvPr id="2" name="Slide Number Placeholder 1"/>
-          <p:cNvSpPr>
-            <a:spLocks noGrp="1"/>
-          </p:cNvSpPr>
-          <p:nvPr>
-            <p:ph type="sldNum" sz="quarter" idx="12"/>
-          </p:nvPr>
-        </p:nvSpPr>
-        <p:spPr/>
-        <p:txBody>
-          <a:bodyPr/>
-          <a:lstStyle/>
-          <a:p>
-            <a:fld id="{8A758EFE-665F-4341-B5B8-2DAEADA52F6C}" type="slidenum">
-              <a:rPr lang="en-US" smtClean="0"/>
-            </a:fld>
-            <a:endParaRPr lang="en-US" dirty="0"/>
-          </a:p>
-        </p:txBody>
-      </p:sp>
-      <p:sp>
-        <p:nvSpPr>
-          <p:cNvPr id="3" name="Title 2"/>
-          <p:cNvSpPr>
-            <a:spLocks noGrp="1"/>
-          </p:cNvSpPr>
-          <p:nvPr>
-            <p:ph type="title"/>
-          </p:nvPr>
-        </p:nvSpPr>
-        <p:spPr/>
-        <p:txBody>
-          <a:bodyPr>
-            <a:normAutofit/>
-          </a:bodyPr>
-          <a:lstStyle/>
-          <a:p>
-            <a:r>
-              <a:rPr lang="en-US" dirty="0"/>
-              <a:t>Details of the contributions (3-4 slides)</a:t>
-            </a:r>
-            <a:endParaRPr lang="en-US" dirty="0"/>
-          </a:p>
-        </p:txBody>
-      </p:sp>
-      <p:sp>
-        <p:nvSpPr>
-          <p:cNvPr id="5" name="Content Placeholder 3"/>
-          <p:cNvSpPr txBox="1"/>
-          <p:nvPr/>
-        </p:nvSpPr>
-        <p:spPr>
-          <a:xfrm>
-            <a:off x="457199" y="1016001"/>
-            <a:ext cx="7890933" cy="3578622"/>
-          </a:xfrm>
-          <a:prstGeom prst="rect">
-            <a:avLst/>
-          </a:prstGeom>
-        </p:spPr>
-        <p:txBody>
-          <a:bodyPr>
-            <a:normAutofit/>
-          </a:bodyPr>
-          <a:lstStyle>
-            <a:lvl1pPr marL="342900" indent="-342900" algn="l" defTabSz="457200" rtl="0" eaLnBrk="1" latinLnBrk="0" hangingPunct="1">
-              <a:spcBef>
-                <a:spcPct val="20000"/>
-              </a:spcBef>
-              <a:buClr>
-                <a:schemeClr val="tx1"/>
-              </a:buClr>
-              <a:buFont typeface="Arial" panose="020B0604020202020204"/>
-              <a:buChar char="•"/>
-              <a:defRPr sz="2800" kern="1200">
-                <a:solidFill>
-                  <a:schemeClr val="accent6"/>
-                </a:solidFill>
-                <a:latin typeface="Gill Sans"/>
-                <a:ea typeface="+mn-ea"/>
-                <a:cs typeface="Gill Sans"/>
-              </a:defRPr>
-            </a:lvl1pPr>
-            <a:lvl2pPr marL="742950" indent="-285750" algn="l" defTabSz="457200" rtl="0" eaLnBrk="1" latinLnBrk="0" hangingPunct="1">
-              <a:spcBef>
-                <a:spcPct val="20000"/>
-              </a:spcBef>
-              <a:buClr>
-                <a:schemeClr val="tx1"/>
-              </a:buClr>
-              <a:buFont typeface="Arial" panose="020B0604020202020204"/>
-              <a:buChar char="–"/>
-              <a:defRPr sz="2400" kern="1200">
-                <a:solidFill>
-                  <a:schemeClr val="accent6"/>
-                </a:solidFill>
-                <a:latin typeface="Gill Sans"/>
-                <a:ea typeface="+mn-ea"/>
-                <a:cs typeface="Gill Sans"/>
-              </a:defRPr>
-            </a:lvl2pPr>
-            <a:lvl3pPr marL="1143000" indent="-228600" algn="l" defTabSz="457200" rtl="0" eaLnBrk="1" latinLnBrk="0" hangingPunct="1">
-              <a:spcBef>
-                <a:spcPct val="20000"/>
-              </a:spcBef>
-              <a:buClr>
-                <a:schemeClr val="tx1"/>
-              </a:buClr>
-              <a:buFont typeface="Arial" panose="020B0604020202020204"/>
-              <a:buChar char="•"/>
-              <a:defRPr sz="2000" kern="1200">
-                <a:solidFill>
-                  <a:schemeClr val="accent6"/>
-                </a:solidFill>
-                <a:latin typeface="Gill Sans"/>
-                <a:ea typeface="+mn-ea"/>
-                <a:cs typeface="Gill Sans"/>
-              </a:defRPr>
-            </a:lvl3pPr>
-            <a:lvl4pPr marL="1600200" indent="-228600" algn="l" defTabSz="457200" rtl="0" eaLnBrk="1" latinLnBrk="0" hangingPunct="1">
-              <a:spcBef>
-                <a:spcPct val="20000"/>
-              </a:spcBef>
-              <a:buClr>
-                <a:schemeClr val="tx1"/>
-              </a:buClr>
-              <a:buFont typeface="Arial" panose="020B0604020202020204"/>
-              <a:buChar char="–"/>
-              <a:defRPr sz="1800" kern="1200">
-                <a:solidFill>
-                  <a:schemeClr val="accent6"/>
-                </a:solidFill>
-                <a:latin typeface="Gill Sans"/>
-                <a:ea typeface="+mn-ea"/>
-                <a:cs typeface="Gill Sans"/>
-              </a:defRPr>
-            </a:lvl4pPr>
-            <a:lvl5pPr marL="2057400" indent="-228600" algn="l" defTabSz="457200" rtl="0" eaLnBrk="1" latinLnBrk="0" hangingPunct="1">
-              <a:spcBef>
-                <a:spcPct val="20000"/>
-              </a:spcBef>
-              <a:buClr>
-                <a:schemeClr val="tx1"/>
-              </a:buClr>
-              <a:buFont typeface="Arial" panose="020B0604020202020204"/>
-              <a:buChar char="»"/>
-              <a:defRPr sz="1800" kern="1200">
-                <a:solidFill>
-                  <a:schemeClr val="accent6"/>
-                </a:solidFill>
-                <a:latin typeface="Gill Sans"/>
-                <a:ea typeface="+mn-ea"/>
-                <a:cs typeface="Gill Sans"/>
-              </a:defRPr>
-            </a:lvl5pPr>
-            <a:lvl6pPr marL="2514600" indent="-228600" algn="l" defTabSz="457200" rtl="0" eaLnBrk="1" latinLnBrk="0" hangingPunct="1">
-              <a:spcBef>
-                <a:spcPct val="20000"/>
-              </a:spcBef>
-              <a:buFont typeface="Arial" panose="020B0604020202020204"/>
-              <a:buChar char="•"/>
-              <a:defRPr sz="2000" kern="1200">
-                <a:solidFill>
-                  <a:schemeClr val="tx1"/>
-                </a:solidFill>
-                <a:latin typeface="+mn-lt"/>
-                <a:ea typeface="+mn-ea"/>
-                <a:cs typeface="+mn-cs"/>
-              </a:defRPr>
-            </a:lvl6pPr>
-            <a:lvl7pPr marL="2971800" indent="-228600" algn="l" defTabSz="457200" rtl="0" eaLnBrk="1" latinLnBrk="0" hangingPunct="1">
-              <a:spcBef>
-                <a:spcPct val="20000"/>
-              </a:spcBef>
-              <a:buFont typeface="Arial" panose="020B0604020202020204"/>
-              <a:buChar char="•"/>
-              <a:defRPr sz="2000" kern="1200">
-                <a:solidFill>
-                  <a:schemeClr val="tx1"/>
-                </a:solidFill>
-                <a:latin typeface="+mn-lt"/>
-                <a:ea typeface="+mn-ea"/>
-                <a:cs typeface="+mn-cs"/>
-              </a:defRPr>
-            </a:lvl7pPr>
-            <a:lvl8pPr marL="3429000" indent="-228600" algn="l" defTabSz="457200" rtl="0" eaLnBrk="1" latinLnBrk="0" hangingPunct="1">
-              <a:spcBef>
-                <a:spcPct val="20000"/>
-              </a:spcBef>
-              <a:buFont typeface="Arial" panose="020B0604020202020204"/>
-              <a:buChar char="•"/>
-              <a:defRPr sz="2000" kern="1200">
-                <a:solidFill>
-                  <a:schemeClr val="tx1"/>
-                </a:solidFill>
-                <a:latin typeface="+mn-lt"/>
-                <a:ea typeface="+mn-ea"/>
-                <a:cs typeface="+mn-cs"/>
-              </a:defRPr>
-            </a:lvl8pPr>
-            <a:lvl9pPr marL="3886200" indent="-228600" algn="l" defTabSz="457200" rtl="0" eaLnBrk="1" latinLnBrk="0" hangingPunct="1">
-              <a:spcBef>
-                <a:spcPct val="20000"/>
-              </a:spcBef>
-              <a:buFont typeface="Arial" panose="020B0604020202020204"/>
-              <a:buChar char="•"/>
-              <a:defRPr sz="2000" kern="1200">
-                <a:solidFill>
-                  <a:schemeClr val="tx1"/>
-                </a:solidFill>
-                <a:latin typeface="+mn-lt"/>
-                <a:ea typeface="+mn-ea"/>
-                <a:cs typeface="+mn-cs"/>
-              </a:defRPr>
-            </a:lvl9pPr>
-          </a:lstStyle>
-          <a:p>
-            <a:r>
-              <a:rPr lang="en-US" dirty="0"/>
-              <a:t>Explain the high-level idea of the paper</a:t>
-            </a:r>
-            <a:endParaRPr lang="en-US" dirty="0"/>
-          </a:p>
-          <a:p>
-            <a:pPr lvl="1"/>
-            <a:r>
-              <a:rPr lang="en-US" dirty="0"/>
-              <a:t>preferably using an overview image, if relevant</a:t>
-            </a:r>
-            <a:endParaRPr lang="en-US" dirty="0"/>
-          </a:p>
-          <a:p>
-            <a:r>
-              <a:rPr lang="en-US" dirty="0"/>
-              <a:t>Identify and clearly explain the assumptions made</a:t>
-            </a:r>
-            <a:endParaRPr lang="en-US" dirty="0"/>
-          </a:p>
-          <a:p>
-            <a:r>
-              <a:rPr lang="en-US" dirty="0"/>
-              <a:t>Present the details of the proposed approaches, including important mathematical details.</a:t>
-            </a:r>
-            <a:endParaRPr lang="en-US" dirty="0"/>
-          </a:p>
-          <a:p>
-            <a:pPr lvl="1"/>
-            <a:r>
-              <a:rPr lang="en-US" dirty="0"/>
-              <a:t>If there are parts of the model that already existed, point it out clearly to isolate the contributions of this work</a:t>
-            </a:r>
-            <a:endParaRPr lang="en-US" dirty="0"/>
-          </a:p>
-        </p:txBody>
-      </p:sp>
-    </p:spTree>
-  </p:cSld>
-  <p:clrMapOvr>
-    <a:masterClrMapping/>
-  </p:clrMapOvr>
-</p:sld>
-</file>
-
-<file path=ppt/slides/slide19.xml><?xml version="1.0" encoding="utf-8"?>
-<p:sld xmlns:a="http://schemas.openxmlformats.org/drawingml/2006/main" xmlns:r="http://schemas.openxmlformats.org/officeDocument/2006/relationships" xmlns:p="http://schemas.openxmlformats.org/presentationml/2006/main">
-  <p:cSld>
-    <p:spTree>
-      <p:nvGrpSpPr>
-        <p:cNvPr id="1" name=""/>
-        <p:cNvGrpSpPr/>
-        <p:nvPr/>
-      </p:nvGrpSpPr>
-      <p:grpSpPr>
-        <a:xfrm>
-          <a:off x="0" y="0"/>
-          <a:ext cx="0" cy="0"/>
-          <a:chOff x="0" y="0"/>
-          <a:chExt cx="0" cy="0"/>
-        </a:xfrm>
-      </p:grpSpPr>
-      <p:sp>
-        <p:nvSpPr>
-          <p:cNvPr id="2" name="Slide Number Placeholder 1"/>
-          <p:cNvSpPr>
-            <a:spLocks noGrp="1"/>
-          </p:cNvSpPr>
-          <p:nvPr>
-            <p:ph type="sldNum" sz="quarter" idx="12"/>
-          </p:nvPr>
-        </p:nvSpPr>
-        <p:spPr/>
-        <p:txBody>
-          <a:bodyPr/>
-          <a:lstStyle/>
-          <a:p>
-            <a:fld id="{8A758EFE-665F-4341-B5B8-2DAEADA52F6C}" type="slidenum">
-              <a:rPr lang="en-US" smtClean="0"/>
-            </a:fld>
-            <a:endParaRPr lang="en-US" dirty="0"/>
-          </a:p>
-        </p:txBody>
-      </p:sp>
-      <p:sp>
-        <p:nvSpPr>
-          <p:cNvPr id="3" name="Title 2"/>
-          <p:cNvSpPr>
-            <a:spLocks noGrp="1"/>
-          </p:cNvSpPr>
-          <p:nvPr>
-            <p:ph type="title"/>
-          </p:nvPr>
-        </p:nvSpPr>
-        <p:spPr/>
-        <p:txBody>
-          <a:bodyPr>
-            <a:normAutofit/>
-          </a:bodyPr>
-          <a:lstStyle/>
-          <a:p>
-            <a:r>
-              <a:rPr lang="en-US" dirty="0"/>
-              <a:t>Results and Analysis (2-3 slides)</a:t>
-            </a:r>
-            <a:endParaRPr lang="en-US" dirty="0"/>
-          </a:p>
-        </p:txBody>
-      </p:sp>
-      <p:sp>
-        <p:nvSpPr>
-          <p:cNvPr id="5" name="Content Placeholder 3"/>
-          <p:cNvSpPr txBox="1"/>
-          <p:nvPr/>
-        </p:nvSpPr>
-        <p:spPr>
-          <a:xfrm>
-            <a:off x="457199" y="1016001"/>
-            <a:ext cx="7890933" cy="3578622"/>
-          </a:xfrm>
-          <a:prstGeom prst="rect">
-            <a:avLst/>
-          </a:prstGeom>
-        </p:spPr>
-        <p:txBody>
-          <a:bodyPr>
-            <a:normAutofit fontScale="62500" lnSpcReduction="20000"/>
-          </a:bodyPr>
-          <a:lstStyle>
-            <a:lvl1pPr marL="342900" indent="-342900" algn="l" defTabSz="457200" rtl="0" eaLnBrk="1" latinLnBrk="0" hangingPunct="1">
-              <a:spcBef>
-                <a:spcPct val="20000"/>
-              </a:spcBef>
-              <a:buClr>
-                <a:schemeClr val="tx1"/>
-              </a:buClr>
-              <a:buFont typeface="Arial" panose="020B0604020202020204"/>
-              <a:buChar char="•"/>
-              <a:defRPr sz="2800" kern="1200">
-                <a:solidFill>
-                  <a:schemeClr val="accent6"/>
-                </a:solidFill>
-                <a:latin typeface="Gill Sans"/>
-                <a:ea typeface="+mn-ea"/>
-                <a:cs typeface="Gill Sans"/>
-              </a:defRPr>
-            </a:lvl1pPr>
-            <a:lvl2pPr marL="742950" indent="-285750" algn="l" defTabSz="457200" rtl="0" eaLnBrk="1" latinLnBrk="0" hangingPunct="1">
-              <a:spcBef>
-                <a:spcPct val="20000"/>
-              </a:spcBef>
-              <a:buClr>
-                <a:schemeClr val="tx1"/>
-              </a:buClr>
-              <a:buFont typeface="Arial" panose="020B0604020202020204"/>
-              <a:buChar char="–"/>
-              <a:defRPr sz="2400" kern="1200">
-                <a:solidFill>
-                  <a:schemeClr val="accent6"/>
-                </a:solidFill>
-                <a:latin typeface="Gill Sans"/>
-                <a:ea typeface="+mn-ea"/>
-                <a:cs typeface="Gill Sans"/>
-              </a:defRPr>
-            </a:lvl2pPr>
-            <a:lvl3pPr marL="1143000" indent="-228600" algn="l" defTabSz="457200" rtl="0" eaLnBrk="1" latinLnBrk="0" hangingPunct="1">
-              <a:spcBef>
-                <a:spcPct val="20000"/>
-              </a:spcBef>
-              <a:buClr>
-                <a:schemeClr val="tx1"/>
-              </a:buClr>
-              <a:buFont typeface="Arial" panose="020B0604020202020204"/>
-              <a:buChar char="•"/>
-              <a:defRPr sz="2000" kern="1200">
-                <a:solidFill>
-                  <a:schemeClr val="accent6"/>
-                </a:solidFill>
-                <a:latin typeface="Gill Sans"/>
-                <a:ea typeface="+mn-ea"/>
-                <a:cs typeface="Gill Sans"/>
-              </a:defRPr>
-            </a:lvl3pPr>
-            <a:lvl4pPr marL="1600200" indent="-228600" algn="l" defTabSz="457200" rtl="0" eaLnBrk="1" latinLnBrk="0" hangingPunct="1">
-              <a:spcBef>
-                <a:spcPct val="20000"/>
-              </a:spcBef>
-              <a:buClr>
-                <a:schemeClr val="tx1"/>
-              </a:buClr>
-              <a:buFont typeface="Arial" panose="020B0604020202020204"/>
-              <a:buChar char="–"/>
-              <a:defRPr sz="1800" kern="1200">
-                <a:solidFill>
-                  <a:schemeClr val="accent6"/>
-                </a:solidFill>
-                <a:latin typeface="Gill Sans"/>
-                <a:ea typeface="+mn-ea"/>
-                <a:cs typeface="Gill Sans"/>
-              </a:defRPr>
-            </a:lvl4pPr>
-            <a:lvl5pPr marL="2057400" indent="-228600" algn="l" defTabSz="457200" rtl="0" eaLnBrk="1" latinLnBrk="0" hangingPunct="1">
-              <a:spcBef>
-                <a:spcPct val="20000"/>
-              </a:spcBef>
-              <a:buClr>
-                <a:schemeClr val="tx1"/>
-              </a:buClr>
-              <a:buFont typeface="Arial" panose="020B0604020202020204"/>
-              <a:buChar char="»"/>
-              <a:defRPr sz="1800" kern="1200">
-                <a:solidFill>
-                  <a:schemeClr val="accent6"/>
-                </a:solidFill>
-                <a:latin typeface="Gill Sans"/>
-                <a:ea typeface="+mn-ea"/>
-                <a:cs typeface="Gill Sans"/>
-              </a:defRPr>
-            </a:lvl5pPr>
-            <a:lvl6pPr marL="2514600" indent="-228600" algn="l" defTabSz="457200" rtl="0" eaLnBrk="1" latinLnBrk="0" hangingPunct="1">
-              <a:spcBef>
-                <a:spcPct val="20000"/>
-              </a:spcBef>
-              <a:buFont typeface="Arial" panose="020B0604020202020204"/>
-              <a:buChar char="•"/>
-              <a:defRPr sz="2000" kern="1200">
-                <a:solidFill>
-                  <a:schemeClr val="tx1"/>
-                </a:solidFill>
-                <a:latin typeface="+mn-lt"/>
-                <a:ea typeface="+mn-ea"/>
-                <a:cs typeface="+mn-cs"/>
-              </a:defRPr>
-            </a:lvl6pPr>
-            <a:lvl7pPr marL="2971800" indent="-228600" algn="l" defTabSz="457200" rtl="0" eaLnBrk="1" latinLnBrk="0" hangingPunct="1">
-              <a:spcBef>
-                <a:spcPct val="20000"/>
-              </a:spcBef>
-              <a:buFont typeface="Arial" panose="020B0604020202020204"/>
-              <a:buChar char="•"/>
-              <a:defRPr sz="2000" kern="1200">
-                <a:solidFill>
-                  <a:schemeClr val="tx1"/>
-                </a:solidFill>
-                <a:latin typeface="+mn-lt"/>
-                <a:ea typeface="+mn-ea"/>
-                <a:cs typeface="+mn-cs"/>
-              </a:defRPr>
-            </a:lvl7pPr>
-            <a:lvl8pPr marL="3429000" indent="-228600" algn="l" defTabSz="457200" rtl="0" eaLnBrk="1" latinLnBrk="0" hangingPunct="1">
-              <a:spcBef>
-                <a:spcPct val="20000"/>
-              </a:spcBef>
-              <a:buFont typeface="Arial" panose="020B0604020202020204"/>
-              <a:buChar char="•"/>
-              <a:defRPr sz="2000" kern="1200">
-                <a:solidFill>
-                  <a:schemeClr val="tx1"/>
-                </a:solidFill>
-                <a:latin typeface="+mn-lt"/>
-                <a:ea typeface="+mn-ea"/>
-                <a:cs typeface="+mn-cs"/>
-              </a:defRPr>
-            </a:lvl8pPr>
-            <a:lvl9pPr marL="3886200" indent="-228600" algn="l" defTabSz="457200" rtl="0" eaLnBrk="1" latinLnBrk="0" hangingPunct="1">
-              <a:spcBef>
-                <a:spcPct val="20000"/>
-              </a:spcBef>
-              <a:buFont typeface="Arial" panose="020B0604020202020204"/>
-              <a:buChar char="•"/>
-              <a:defRPr sz="2000" kern="1200">
-                <a:solidFill>
-                  <a:schemeClr val="tx1"/>
-                </a:solidFill>
-                <a:latin typeface="+mn-lt"/>
-                <a:ea typeface="+mn-ea"/>
-                <a:cs typeface="+mn-cs"/>
-              </a:defRPr>
-            </a:lvl9pPr>
-          </a:lstStyle>
-          <a:p>
-            <a:r>
-              <a:rPr lang="en-US" dirty="0"/>
-              <a:t>How does the paper argue for the claimed contributions</a:t>
-            </a:r>
-            <a:endParaRPr lang="en-US" dirty="0"/>
-          </a:p>
-          <a:p>
-            <a:pPr lvl="1"/>
-            <a:r>
-              <a:rPr lang="en-US" dirty="0"/>
-              <a:t>Typically these will be the experiments conducted to test the hypothesis; in some cases these can be mathematical proofs; or in rare cases it will be only arguments and examples.</a:t>
-            </a:r>
-            <a:endParaRPr lang="en-US" dirty="0"/>
-          </a:p>
-          <a:p>
-            <a:pPr lvl="1"/>
-            <a:r>
-              <a:rPr lang="en-US" dirty="0"/>
-              <a:t>Focus on the key experiments/arguments (not necessarily all)</a:t>
-            </a:r>
-            <a:endParaRPr lang="en-US" dirty="0"/>
-          </a:p>
-          <a:p>
-            <a:pPr lvl="1"/>
-            <a:endParaRPr lang="en-US" dirty="0"/>
-          </a:p>
-          <a:p>
-            <a:r>
-              <a:rPr lang="en-US" dirty="0"/>
-              <a:t>Clearly define the experimental setup, datasets used, evaluation methodology</a:t>
-            </a:r>
-            <a:endParaRPr lang="en-US" dirty="0"/>
-          </a:p>
-          <a:p>
-            <a:endParaRPr lang="en-US" dirty="0"/>
-          </a:p>
-          <a:p>
-            <a:r>
-              <a:rPr lang="en-US" dirty="0"/>
-              <a:t>Analyze the results presented in the paper, and present only data-points that convey some information.</a:t>
-            </a:r>
-            <a:endParaRPr lang="en-US" dirty="0"/>
-          </a:p>
-          <a:p>
-            <a:pPr lvl="1"/>
-            <a:r>
-              <a:rPr lang="en-US" dirty="0"/>
-              <a:t>Do not blindly copy/screenshot tables from the papers. Make your own tables/plots (A template is at the end of this slide deck)</a:t>
-            </a:r>
-            <a:endParaRPr lang="en-US" dirty="0"/>
-          </a:p>
-          <a:p>
-            <a:pPr lvl="1"/>
-            <a:endParaRPr lang="en-US" dirty="0"/>
-          </a:p>
-          <a:p>
-            <a:r>
-              <a:rPr lang="en-US" dirty="0"/>
-              <a:t>Analysis of the outputs – If there is analysis provided for outputs, example predictions (if present), etc.</a:t>
-            </a:r>
-            <a:endParaRPr lang="en-US" dirty="0"/>
           </a:p>
         </p:txBody>
       </p:sp>
@@ -14240,15 +13355,15 @@
               <a:buClr>
                 <a:schemeClr val="tx1"/>
               </a:buClr>
-              <a:buFont typeface="Arial" panose="020B0604020202020204"/>
+              <a:buFont typeface="Arial" panose="020B0604020202090204"/>
               <a:buChar char="•"/>
               <a:defRPr sz="2800" kern="1200">
                 <a:solidFill>
                   <a:schemeClr val="accent6"/>
                 </a:solidFill>
-                <a:latin typeface="Gill Sans"/>
+                <a:latin typeface="Gill Sans" panose="020B0502020104020203"/>
                 <a:ea typeface="+mn-ea"/>
-                <a:cs typeface="Gill Sans"/>
+                <a:cs typeface="Gill Sans" panose="020B0502020104020203"/>
               </a:defRPr>
             </a:lvl1pPr>
             <a:lvl2pPr marL="742950" indent="-285750" algn="l" defTabSz="457200" rtl="0" eaLnBrk="1" latinLnBrk="0" hangingPunct="1">
@@ -14258,15 +13373,15 @@
               <a:buClr>
                 <a:schemeClr val="tx1"/>
               </a:buClr>
-              <a:buFont typeface="Arial" panose="020B0604020202020204"/>
+              <a:buFont typeface="Arial" panose="020B0604020202090204"/>
               <a:buChar char="–"/>
               <a:defRPr sz="2400" kern="1200">
                 <a:solidFill>
                   <a:schemeClr val="accent6"/>
                 </a:solidFill>
-                <a:latin typeface="Gill Sans"/>
+                <a:latin typeface="Gill Sans" panose="020B0502020104020203"/>
                 <a:ea typeface="+mn-ea"/>
-                <a:cs typeface="Gill Sans"/>
+                <a:cs typeface="Gill Sans" panose="020B0502020104020203"/>
               </a:defRPr>
             </a:lvl2pPr>
             <a:lvl3pPr marL="1143000" indent="-228600" algn="l" defTabSz="457200" rtl="0" eaLnBrk="1" latinLnBrk="0" hangingPunct="1">
@@ -14276,15 +13391,15 @@
               <a:buClr>
                 <a:schemeClr val="tx1"/>
               </a:buClr>
-              <a:buFont typeface="Arial" panose="020B0604020202020204"/>
+              <a:buFont typeface="Arial" panose="020B0604020202090204"/>
               <a:buChar char="•"/>
               <a:defRPr sz="2000" kern="1200">
                 <a:solidFill>
                   <a:schemeClr val="accent6"/>
                 </a:solidFill>
-                <a:latin typeface="Gill Sans"/>
+                <a:latin typeface="Gill Sans" panose="020B0502020104020203"/>
                 <a:ea typeface="+mn-ea"/>
-                <a:cs typeface="Gill Sans"/>
+                <a:cs typeface="Gill Sans" panose="020B0502020104020203"/>
               </a:defRPr>
             </a:lvl3pPr>
             <a:lvl4pPr marL="1600200" indent="-228600" algn="l" defTabSz="457200" rtl="0" eaLnBrk="1" latinLnBrk="0" hangingPunct="1">
@@ -14294,15 +13409,15 @@
               <a:buClr>
                 <a:schemeClr val="tx1"/>
               </a:buClr>
-              <a:buFont typeface="Arial" panose="020B0604020202020204"/>
+              <a:buFont typeface="Arial" panose="020B0604020202090204"/>
               <a:buChar char="–"/>
               <a:defRPr sz="1800" kern="1200">
                 <a:solidFill>
                   <a:schemeClr val="accent6"/>
                 </a:solidFill>
-                <a:latin typeface="Gill Sans"/>
+                <a:latin typeface="Gill Sans" panose="020B0502020104020203"/>
                 <a:ea typeface="+mn-ea"/>
-                <a:cs typeface="Gill Sans"/>
+                <a:cs typeface="Gill Sans" panose="020B0502020104020203"/>
               </a:defRPr>
             </a:lvl4pPr>
             <a:lvl5pPr marL="2057400" indent="-228600" algn="l" defTabSz="457200" rtl="0" eaLnBrk="1" latinLnBrk="0" hangingPunct="1">
@@ -14312,22 +13427,22 @@
               <a:buClr>
                 <a:schemeClr val="tx1"/>
               </a:buClr>
-              <a:buFont typeface="Arial" panose="020B0604020202020204"/>
+              <a:buFont typeface="Arial" panose="020B0604020202090204"/>
               <a:buChar char="»"/>
               <a:defRPr sz="1800" kern="1200">
                 <a:solidFill>
                   <a:schemeClr val="accent6"/>
                 </a:solidFill>
-                <a:latin typeface="Gill Sans"/>
+                <a:latin typeface="Gill Sans" panose="020B0502020104020203"/>
                 <a:ea typeface="+mn-ea"/>
-                <a:cs typeface="Gill Sans"/>
+                <a:cs typeface="Gill Sans" panose="020B0502020104020203"/>
               </a:defRPr>
             </a:lvl5pPr>
             <a:lvl6pPr marL="2514600" indent="-228600" algn="l" defTabSz="457200" rtl="0" eaLnBrk="1" latinLnBrk="0" hangingPunct="1">
               <a:spcBef>
                 <a:spcPct val="20000"/>
               </a:spcBef>
-              <a:buFont typeface="Arial" panose="020B0604020202020204"/>
+              <a:buFont typeface="Arial" panose="020B0604020202090204"/>
               <a:buChar char="•"/>
               <a:defRPr sz="2000" kern="1200">
                 <a:solidFill>
@@ -14342,7 +13457,7 @@
               <a:spcBef>
                 <a:spcPct val="20000"/>
               </a:spcBef>
-              <a:buFont typeface="Arial" panose="020B0604020202020204"/>
+              <a:buFont typeface="Arial" panose="020B0604020202090204"/>
               <a:buChar char="•"/>
               <a:defRPr sz="2000" kern="1200">
                 <a:solidFill>
@@ -14357,7 +13472,7 @@
               <a:spcBef>
                 <a:spcPct val="20000"/>
               </a:spcBef>
-              <a:buFont typeface="Arial" panose="020B0604020202020204"/>
+              <a:buFont typeface="Arial" panose="020B0604020202090204"/>
               <a:buChar char="•"/>
               <a:defRPr sz="2000" kern="1200">
                 <a:solidFill>
@@ -14372,7 +13487,7 @@
               <a:spcBef>
                 <a:spcPct val="20000"/>
               </a:spcBef>
-              <a:buFont typeface="Arial" panose="020B0604020202020204"/>
+              <a:buFont typeface="Arial" panose="020B0604020202090204"/>
               <a:buChar char="•"/>
               <a:defRPr sz="2000" kern="1200">
                 <a:solidFill>
@@ -14416,8 +13531,8 @@
                 <a:solidFill>
                   <a:schemeClr val="accent6"/>
                 </a:solidFill>
-                <a:latin typeface="Gill Sans"/>
-                <a:cs typeface="Gill Sans"/>
+                <a:latin typeface="Gill Sans" panose="020B0502020104020203"/>
+                <a:cs typeface="Gill Sans" panose="020B0502020104020203"/>
               </a:rPr>
               <a:t>Model and interpret how contextual factors influence the reporting of UFO shapes using NUFORC sighting data from the late 20th century to the present.</a:t>
             </a:r>
@@ -14425,8 +13540,8 @@
               <a:solidFill>
                 <a:schemeClr val="accent6"/>
               </a:solidFill>
-              <a:latin typeface="Gill Sans"/>
-              <a:cs typeface="Gill Sans"/>
+              <a:latin typeface="Gill Sans" panose="020B0502020104020203"/>
+              <a:cs typeface="Gill Sans" panose="020B0502020104020203"/>
             </a:endParaRPr>
           </a:p>
         </p:txBody>
@@ -14473,1420 +13588,6 @@
           </a:p>
         </p:txBody>
       </p:sp>
-    </p:spTree>
-  </p:cSld>
-  <p:clrMapOvr>
-    <a:masterClrMapping/>
-  </p:clrMapOvr>
-</p:sld>
-</file>
-
-<file path=ppt/slides/slide20.xml><?xml version="1.0" encoding="utf-8"?>
-<p:sld xmlns:a="http://schemas.openxmlformats.org/drawingml/2006/main" xmlns:r="http://schemas.openxmlformats.org/officeDocument/2006/relationships" xmlns:p="http://schemas.openxmlformats.org/presentationml/2006/main">
-  <p:cSld>
-    <p:spTree>
-      <p:nvGrpSpPr>
-        <p:cNvPr id="1" name=""/>
-        <p:cNvGrpSpPr/>
-        <p:nvPr/>
-      </p:nvGrpSpPr>
-      <p:grpSpPr>
-        <a:xfrm>
-          <a:off x="0" y="0"/>
-          <a:ext cx="0" cy="0"/>
-          <a:chOff x="0" y="0"/>
-          <a:chExt cx="0" cy="0"/>
-        </a:xfrm>
-      </p:grpSpPr>
-      <p:sp>
-        <p:nvSpPr>
-          <p:cNvPr id="2" name="Slide Number Placeholder 1"/>
-          <p:cNvSpPr>
-            <a:spLocks noGrp="1"/>
-          </p:cNvSpPr>
-          <p:nvPr>
-            <p:ph type="sldNum" sz="quarter" idx="12"/>
-          </p:nvPr>
-        </p:nvSpPr>
-        <p:spPr/>
-        <p:txBody>
-          <a:bodyPr/>
-          <a:lstStyle/>
-          <a:p>
-            <a:fld id="{8A758EFE-665F-4341-B5B8-2DAEADA52F6C}" type="slidenum">
-              <a:rPr lang="en-US" smtClean="0"/>
-            </a:fld>
-            <a:endParaRPr lang="en-US" dirty="0"/>
-          </a:p>
-        </p:txBody>
-      </p:sp>
-      <p:sp>
-        <p:nvSpPr>
-          <p:cNvPr id="3" name="Title 2"/>
-          <p:cNvSpPr>
-            <a:spLocks noGrp="1"/>
-          </p:cNvSpPr>
-          <p:nvPr>
-            <p:ph type="title"/>
-          </p:nvPr>
-        </p:nvSpPr>
-        <p:spPr>
-          <a:xfrm>
-            <a:off x="310152" y="0"/>
-            <a:ext cx="8229600" cy="693605"/>
-          </a:xfrm>
-        </p:spPr>
-        <p:txBody>
-          <a:bodyPr>
-            <a:normAutofit fontScale="90000"/>
-          </a:bodyPr>
-          <a:lstStyle/>
-          <a:p>
-            <a:r>
-              <a:rPr lang="en-US" sz="2800" dirty="0"/>
-              <a:t>Conclusions, Shortcomings and Future Work (2-3 slides)</a:t>
-            </a:r>
-            <a:endParaRPr lang="en-US" sz="2800" dirty="0"/>
-          </a:p>
-        </p:txBody>
-      </p:sp>
-      <p:sp>
-        <p:nvSpPr>
-          <p:cNvPr id="5" name="Content Placeholder 3"/>
-          <p:cNvSpPr txBox="1"/>
-          <p:nvPr/>
-        </p:nvSpPr>
-        <p:spPr>
-          <a:xfrm>
-            <a:off x="457199" y="1016001"/>
-            <a:ext cx="7890933" cy="3578622"/>
-          </a:xfrm>
-          <a:prstGeom prst="rect">
-            <a:avLst/>
-          </a:prstGeom>
-        </p:spPr>
-        <p:txBody>
-          <a:bodyPr>
-            <a:normAutofit fontScale="92500" lnSpcReduction="20000"/>
-          </a:bodyPr>
-          <a:lstStyle>
-            <a:lvl1pPr marL="342900" indent="-342900" algn="l" defTabSz="457200" rtl="0" eaLnBrk="1" latinLnBrk="0" hangingPunct="1">
-              <a:spcBef>
-                <a:spcPct val="20000"/>
-              </a:spcBef>
-              <a:buClr>
-                <a:schemeClr val="tx1"/>
-              </a:buClr>
-              <a:buFont typeface="Arial" panose="020B0604020202020204"/>
-              <a:buChar char="•"/>
-              <a:defRPr sz="2800" kern="1200">
-                <a:solidFill>
-                  <a:schemeClr val="accent6"/>
-                </a:solidFill>
-                <a:latin typeface="Gill Sans"/>
-                <a:ea typeface="+mn-ea"/>
-                <a:cs typeface="Gill Sans"/>
-              </a:defRPr>
-            </a:lvl1pPr>
-            <a:lvl2pPr marL="742950" indent="-285750" algn="l" defTabSz="457200" rtl="0" eaLnBrk="1" latinLnBrk="0" hangingPunct="1">
-              <a:spcBef>
-                <a:spcPct val="20000"/>
-              </a:spcBef>
-              <a:buClr>
-                <a:schemeClr val="tx1"/>
-              </a:buClr>
-              <a:buFont typeface="Arial" panose="020B0604020202020204"/>
-              <a:buChar char="–"/>
-              <a:defRPr sz="2400" kern="1200">
-                <a:solidFill>
-                  <a:schemeClr val="accent6"/>
-                </a:solidFill>
-                <a:latin typeface="Gill Sans"/>
-                <a:ea typeface="+mn-ea"/>
-                <a:cs typeface="Gill Sans"/>
-              </a:defRPr>
-            </a:lvl2pPr>
-            <a:lvl3pPr marL="1143000" indent="-228600" algn="l" defTabSz="457200" rtl="0" eaLnBrk="1" latinLnBrk="0" hangingPunct="1">
-              <a:spcBef>
-                <a:spcPct val="20000"/>
-              </a:spcBef>
-              <a:buClr>
-                <a:schemeClr val="tx1"/>
-              </a:buClr>
-              <a:buFont typeface="Arial" panose="020B0604020202020204"/>
-              <a:buChar char="•"/>
-              <a:defRPr sz="2000" kern="1200">
-                <a:solidFill>
-                  <a:schemeClr val="accent6"/>
-                </a:solidFill>
-                <a:latin typeface="Gill Sans"/>
-                <a:ea typeface="+mn-ea"/>
-                <a:cs typeface="Gill Sans"/>
-              </a:defRPr>
-            </a:lvl3pPr>
-            <a:lvl4pPr marL="1600200" indent="-228600" algn="l" defTabSz="457200" rtl="0" eaLnBrk="1" latinLnBrk="0" hangingPunct="1">
-              <a:spcBef>
-                <a:spcPct val="20000"/>
-              </a:spcBef>
-              <a:buClr>
-                <a:schemeClr val="tx1"/>
-              </a:buClr>
-              <a:buFont typeface="Arial" panose="020B0604020202020204"/>
-              <a:buChar char="–"/>
-              <a:defRPr sz="1800" kern="1200">
-                <a:solidFill>
-                  <a:schemeClr val="accent6"/>
-                </a:solidFill>
-                <a:latin typeface="Gill Sans"/>
-                <a:ea typeface="+mn-ea"/>
-                <a:cs typeface="Gill Sans"/>
-              </a:defRPr>
-            </a:lvl4pPr>
-            <a:lvl5pPr marL="2057400" indent="-228600" algn="l" defTabSz="457200" rtl="0" eaLnBrk="1" latinLnBrk="0" hangingPunct="1">
-              <a:spcBef>
-                <a:spcPct val="20000"/>
-              </a:spcBef>
-              <a:buClr>
-                <a:schemeClr val="tx1"/>
-              </a:buClr>
-              <a:buFont typeface="Arial" panose="020B0604020202020204"/>
-              <a:buChar char="»"/>
-              <a:defRPr sz="1800" kern="1200">
-                <a:solidFill>
-                  <a:schemeClr val="accent6"/>
-                </a:solidFill>
-                <a:latin typeface="Gill Sans"/>
-                <a:ea typeface="+mn-ea"/>
-                <a:cs typeface="Gill Sans"/>
-              </a:defRPr>
-            </a:lvl5pPr>
-            <a:lvl6pPr marL="2514600" indent="-228600" algn="l" defTabSz="457200" rtl="0" eaLnBrk="1" latinLnBrk="0" hangingPunct="1">
-              <a:spcBef>
-                <a:spcPct val="20000"/>
-              </a:spcBef>
-              <a:buFont typeface="Arial" panose="020B0604020202020204"/>
-              <a:buChar char="•"/>
-              <a:defRPr sz="2000" kern="1200">
-                <a:solidFill>
-                  <a:schemeClr val="tx1"/>
-                </a:solidFill>
-                <a:latin typeface="+mn-lt"/>
-                <a:ea typeface="+mn-ea"/>
-                <a:cs typeface="+mn-cs"/>
-              </a:defRPr>
-            </a:lvl6pPr>
-            <a:lvl7pPr marL="2971800" indent="-228600" algn="l" defTabSz="457200" rtl="0" eaLnBrk="1" latinLnBrk="0" hangingPunct="1">
-              <a:spcBef>
-                <a:spcPct val="20000"/>
-              </a:spcBef>
-              <a:buFont typeface="Arial" panose="020B0604020202020204"/>
-              <a:buChar char="•"/>
-              <a:defRPr sz="2000" kern="1200">
-                <a:solidFill>
-                  <a:schemeClr val="tx1"/>
-                </a:solidFill>
-                <a:latin typeface="+mn-lt"/>
-                <a:ea typeface="+mn-ea"/>
-                <a:cs typeface="+mn-cs"/>
-              </a:defRPr>
-            </a:lvl7pPr>
-            <a:lvl8pPr marL="3429000" indent="-228600" algn="l" defTabSz="457200" rtl="0" eaLnBrk="1" latinLnBrk="0" hangingPunct="1">
-              <a:spcBef>
-                <a:spcPct val="20000"/>
-              </a:spcBef>
-              <a:buFont typeface="Arial" panose="020B0604020202020204"/>
-              <a:buChar char="•"/>
-              <a:defRPr sz="2000" kern="1200">
-                <a:solidFill>
-                  <a:schemeClr val="tx1"/>
-                </a:solidFill>
-                <a:latin typeface="+mn-lt"/>
-                <a:ea typeface="+mn-ea"/>
-                <a:cs typeface="+mn-cs"/>
-              </a:defRPr>
-            </a:lvl8pPr>
-            <a:lvl9pPr marL="3886200" indent="-228600" algn="l" defTabSz="457200" rtl="0" eaLnBrk="1" latinLnBrk="0" hangingPunct="1">
-              <a:spcBef>
-                <a:spcPct val="20000"/>
-              </a:spcBef>
-              <a:buFont typeface="Arial" panose="020B0604020202020204"/>
-              <a:buChar char="•"/>
-              <a:defRPr sz="2000" kern="1200">
-                <a:solidFill>
-                  <a:schemeClr val="tx1"/>
-                </a:solidFill>
-                <a:latin typeface="+mn-lt"/>
-                <a:ea typeface="+mn-ea"/>
-                <a:cs typeface="+mn-cs"/>
-              </a:defRPr>
-            </a:lvl9pPr>
-          </a:lstStyle>
-          <a:p>
-            <a:r>
-              <a:rPr lang="en-US" dirty="0"/>
-              <a:t>What have </a:t>
-            </a:r>
-            <a:r>
-              <a:rPr lang="en-US" b="1" dirty="0"/>
-              <a:t>you</a:t>
-            </a:r>
-            <a:r>
-              <a:rPr lang="en-US" dirty="0"/>
-              <a:t> learned from this paper?</a:t>
-            </a:r>
-            <a:endParaRPr lang="en-US" dirty="0"/>
-          </a:p>
-          <a:p>
-            <a:pPr lvl="1"/>
-            <a:r>
-              <a:rPr lang="en-US" dirty="0"/>
-              <a:t>What are the important lessons that this work leaves for the community</a:t>
-            </a:r>
-            <a:endParaRPr lang="en-US" dirty="0"/>
-          </a:p>
-          <a:p>
-            <a:pPr lvl="1"/>
-            <a:r>
-              <a:rPr lang="en-US" dirty="0"/>
-              <a:t>Are there any resources, </a:t>
-            </a:r>
-            <a:r>
-              <a:rPr lang="en-US" dirty="0" err="1"/>
-              <a:t>eg</a:t>
-            </a:r>
-            <a:r>
-              <a:rPr lang="en-US" dirty="0"/>
-              <a:t>. Code, Datasets, Evaluation Metrics, etc. that are used / can be used for future research</a:t>
-            </a:r>
-            <a:endParaRPr lang="en-US" dirty="0"/>
-          </a:p>
-          <a:p>
-            <a:r>
-              <a:rPr lang="en-US" dirty="0"/>
-              <a:t>What are the major shortcomings of the paper</a:t>
-            </a:r>
-            <a:endParaRPr lang="en-US" dirty="0"/>
-          </a:p>
-          <a:p>
-            <a:pPr lvl="1"/>
-            <a:r>
-              <a:rPr lang="en-US" dirty="0"/>
-              <a:t>It is usually easy to criticize papers, but coming up with solutions for criticism is difficult – Try to come up with possible solutions and discuss</a:t>
-            </a:r>
-            <a:endParaRPr lang="en-US" dirty="0"/>
-          </a:p>
-          <a:p>
-            <a:r>
-              <a:rPr lang="en-US" dirty="0"/>
-              <a:t>How can this work be improved/extended?</a:t>
-            </a:r>
-            <a:endParaRPr lang="en-US" dirty="0"/>
-          </a:p>
-        </p:txBody>
-      </p:sp>
-    </p:spTree>
-  </p:cSld>
-  <p:clrMapOvr>
-    <a:masterClrMapping/>
-  </p:clrMapOvr>
-</p:sld>
-</file>
-
-<file path=ppt/slides/slide21.xml><?xml version="1.0" encoding="utf-8"?>
-<p:sld xmlns:a="http://schemas.openxmlformats.org/drawingml/2006/main" xmlns:r="http://schemas.openxmlformats.org/officeDocument/2006/relationships" xmlns:p="http://schemas.openxmlformats.org/presentationml/2006/main">
-  <p:cSld>
-    <p:spTree>
-      <p:nvGrpSpPr>
-        <p:cNvPr id="1" name=""/>
-        <p:cNvGrpSpPr/>
-        <p:nvPr/>
-      </p:nvGrpSpPr>
-      <p:grpSpPr>
-        <a:xfrm>
-          <a:off x="0" y="0"/>
-          <a:ext cx="0" cy="0"/>
-          <a:chOff x="0" y="0"/>
-          <a:chExt cx="0" cy="0"/>
-        </a:xfrm>
-      </p:grpSpPr>
-      <p:sp>
-        <p:nvSpPr>
-          <p:cNvPr id="7" name="Slide Number Placeholder 6"/>
-          <p:cNvSpPr>
-            <a:spLocks noGrp="1"/>
-          </p:cNvSpPr>
-          <p:nvPr>
-            <p:ph type="sldNum" sz="quarter" idx="12"/>
-          </p:nvPr>
-        </p:nvSpPr>
-        <p:spPr/>
-        <p:txBody>
-          <a:bodyPr/>
-          <a:lstStyle/>
-          <a:p>
-            <a:fld id="{8A758EFE-665F-4341-B5B8-2DAEADA52F6C}" type="slidenum">
-              <a:rPr lang="en-US" smtClean="0"/>
-            </a:fld>
-            <a:endParaRPr lang="en-US" dirty="0"/>
-          </a:p>
-        </p:txBody>
-      </p:sp>
-      <p:sp>
-        <p:nvSpPr>
-          <p:cNvPr id="2" name="Title 1"/>
-          <p:cNvSpPr>
-            <a:spLocks noGrp="1"/>
-          </p:cNvSpPr>
-          <p:nvPr>
-            <p:ph type="title"/>
-          </p:nvPr>
-        </p:nvSpPr>
-        <p:spPr/>
-        <p:txBody>
-          <a:bodyPr/>
-          <a:lstStyle/>
-          <a:p>
-            <a:r>
-              <a:rPr lang="en-US" dirty="0"/>
-              <a:t>Table Slide</a:t>
-            </a:r>
-            <a:endParaRPr lang="en-US" dirty="0"/>
-          </a:p>
-        </p:txBody>
-      </p:sp>
-      <p:graphicFrame>
-        <p:nvGraphicFramePr>
-          <p:cNvPr id="6" name="Content Placeholder 6"/>
-          <p:cNvGraphicFramePr>
-            <a:graphicFrameLocks noGrp="1"/>
-          </p:cNvGraphicFramePr>
-          <p:nvPr>
-            <p:ph idx="1"/>
-          </p:nvPr>
-        </p:nvGraphicFramePr>
-        <p:xfrm>
-          <a:off x="430223" y="902494"/>
-          <a:ext cx="8229599" cy="2225040"/>
-        </p:xfrm>
-        <a:graphic>
-          <a:graphicData uri="http://schemas.openxmlformats.org/drawingml/2006/table">
-            <a:tbl>
-              <a:tblPr firstRow="1" bandRow="1">
-                <a:tableStyleId>{8EC20E35-A176-4012-BC5E-935CFFF8708E}</a:tableStyleId>
-              </a:tblPr>
-              <a:tblGrid>
-                <a:gridCol w="1850904"/>
-                <a:gridCol w="1879019"/>
-                <a:gridCol w="1632280"/>
-                <a:gridCol w="1433698"/>
-                <a:gridCol w="1433698"/>
-              </a:tblGrid>
-              <a:tr h="278130">
-                <a:tc>
-                  <a:txBody>
-                    <a:bodyPr/>
-                    <a:lstStyle/>
-                    <a:p>
-                      <a:r>
-                        <a:rPr lang="en-US" sz="1100" dirty="0">
-                          <a:latin typeface="Gill Sans"/>
-                          <a:cs typeface="Gill Sans"/>
-                        </a:rPr>
-                        <a:t>Lorem</a:t>
-                      </a:r>
-                      <a:endParaRPr lang="en-US" sz="1100" dirty="0">
-                        <a:latin typeface="Gill Sans"/>
-                        <a:cs typeface="Gill Sans"/>
-                      </a:endParaRPr>
-                    </a:p>
-                  </a:txBody>
-                  <a:tcPr marT="34290" marB="34290"/>
-                </a:tc>
-                <a:tc>
-                  <a:txBody>
-                    <a:bodyPr/>
-                    <a:lstStyle/>
-                    <a:p>
-                      <a:pPr algn="ctr"/>
-                      <a:r>
-                        <a:rPr lang="en-US" sz="1100" dirty="0">
-                          <a:latin typeface="Gill Sans"/>
-                          <a:cs typeface="Gill Sans"/>
-                        </a:rPr>
-                        <a:t>Ipsum</a:t>
-                      </a:r>
-                      <a:endParaRPr lang="en-US" sz="1100" dirty="0">
-                        <a:latin typeface="Gill Sans"/>
-                        <a:cs typeface="Gill Sans"/>
-                      </a:endParaRPr>
-                    </a:p>
-                  </a:txBody>
-                  <a:tcPr marT="34290" marB="34290"/>
-                </a:tc>
-                <a:tc>
-                  <a:txBody>
-                    <a:bodyPr/>
-                    <a:lstStyle/>
-                    <a:p>
-                      <a:pPr algn="ctr"/>
-                      <a:r>
-                        <a:rPr lang="en-US" sz="1100" dirty="0">
-                          <a:latin typeface="Gill Sans"/>
-                          <a:cs typeface="Gill Sans"/>
-                        </a:rPr>
-                        <a:t>Dolor</a:t>
-                      </a:r>
-                      <a:endParaRPr lang="en-US" sz="1100" dirty="0">
-                        <a:latin typeface="Gill Sans"/>
-                        <a:cs typeface="Gill Sans"/>
-                      </a:endParaRPr>
-                    </a:p>
-                  </a:txBody>
-                  <a:tcPr marT="34290" marB="34290"/>
-                </a:tc>
-                <a:tc>
-                  <a:txBody>
-                    <a:bodyPr/>
-                    <a:lstStyle/>
-                    <a:p>
-                      <a:pPr algn="ctr"/>
-                      <a:r>
-                        <a:rPr lang="en-US" sz="1100" dirty="0">
-                          <a:latin typeface="Gill Sans"/>
-                          <a:cs typeface="Gill Sans"/>
-                        </a:rPr>
-                        <a:t>Closit</a:t>
-                      </a:r>
-                      <a:endParaRPr lang="en-US" sz="1100" dirty="0">
-                        <a:latin typeface="Gill Sans"/>
-                        <a:cs typeface="Gill Sans"/>
-                      </a:endParaRPr>
-                    </a:p>
-                  </a:txBody>
-                  <a:tcPr marT="34290" marB="34290"/>
-                </a:tc>
-                <a:tc>
-                  <a:txBody>
-                    <a:bodyPr/>
-                    <a:lstStyle/>
-                    <a:p>
-                      <a:pPr algn="ctr"/>
-                      <a:r>
-                        <a:rPr lang="en-US" sz="1100" dirty="0">
-                          <a:latin typeface="Gill Sans"/>
-                          <a:cs typeface="Gill Sans"/>
-                        </a:rPr>
-                        <a:t>Amet</a:t>
-                      </a:r>
-                      <a:endParaRPr lang="en-US" sz="1100" dirty="0">
-                        <a:latin typeface="Gill Sans"/>
-                        <a:cs typeface="Gill Sans"/>
-                      </a:endParaRPr>
-                    </a:p>
-                  </a:txBody>
-                  <a:tcPr marT="34290" marB="34290"/>
-                </a:tc>
-              </a:tr>
-              <a:tr h="278130">
-                <a:tc>
-                  <a:txBody>
-                    <a:bodyPr/>
-                    <a:lstStyle/>
-                    <a:p>
-                      <a:r>
-                        <a:rPr lang="en-US" sz="1200" dirty="0">
-                          <a:latin typeface="Gill Sans"/>
-                          <a:cs typeface="Gill Sans"/>
-                        </a:rPr>
-                        <a:t>Lorem</a:t>
-                      </a:r>
-                      <a:endParaRPr lang="en-US" sz="1200" dirty="0">
-                        <a:latin typeface="Gill Sans"/>
-                        <a:cs typeface="Gill Sans"/>
-                      </a:endParaRPr>
-                    </a:p>
-                  </a:txBody>
-                  <a:tcPr marT="34290" marB="34290"/>
-                </a:tc>
-                <a:tc>
-                  <a:txBody>
-                    <a:bodyPr/>
-                    <a:lstStyle/>
-                    <a:p>
-                      <a:pPr algn="ctr" fontAlgn="ctr"/>
-                      <a:r>
-                        <a:rPr lang="en-US" sz="1100" dirty="0">
-                          <a:latin typeface="Gill Sans"/>
-                          <a:cs typeface="Gill Sans"/>
-                        </a:rPr>
-                        <a:t>Ipsum</a:t>
-                      </a:r>
-                      <a:endParaRPr lang="en-US" sz="1200" b="0" i="0" u="none" strike="noStrike" dirty="0">
-                        <a:solidFill>
-                          <a:srgbClr val="800000"/>
-                        </a:solidFill>
-                        <a:effectLst/>
-                        <a:latin typeface="Gill Sans"/>
-                        <a:cs typeface="Gill Sans"/>
-                      </a:endParaRPr>
-                    </a:p>
-                  </a:txBody>
-                  <a:tcPr marL="8859" marR="8859" marT="6541" marB="0" anchor="ctr"/>
-                </a:tc>
-                <a:tc>
-                  <a:txBody>
-                    <a:bodyPr/>
-                    <a:lstStyle/>
-                    <a:p>
-                      <a:pPr algn="ctr"/>
-                      <a:r>
-                        <a:rPr lang="en-US" sz="1100" dirty="0">
-                          <a:latin typeface="Gill Sans"/>
-                          <a:cs typeface="Gill Sans"/>
-                        </a:rPr>
-                        <a:t>Dolor</a:t>
-                      </a:r>
-                      <a:endParaRPr lang="en-US" sz="1200" dirty="0">
-                        <a:latin typeface="Gill Sans"/>
-                        <a:cs typeface="Gill Sans"/>
-                      </a:endParaRPr>
-                    </a:p>
-                  </a:txBody>
-                  <a:tcPr marT="34290" marB="34290"/>
-                </a:tc>
-                <a:tc>
-                  <a:txBody>
-                    <a:bodyPr/>
-                    <a:lstStyle/>
-                    <a:p>
-                      <a:pPr algn="ctr"/>
-                      <a:r>
-                        <a:rPr lang="en-US" sz="1100" dirty="0">
-                          <a:latin typeface="Gill Sans"/>
-                          <a:cs typeface="Gill Sans"/>
-                        </a:rPr>
-                        <a:t>Closit</a:t>
-                      </a:r>
-                      <a:endParaRPr lang="en-US" sz="1200" dirty="0">
-                        <a:solidFill>
-                          <a:srgbClr val="FF0000"/>
-                        </a:solidFill>
-                        <a:latin typeface="Gill Sans"/>
-                        <a:cs typeface="Gill Sans"/>
-                      </a:endParaRPr>
-                    </a:p>
-                  </a:txBody>
-                  <a:tcPr marT="34290" marB="34290"/>
-                </a:tc>
-                <a:tc>
-                  <a:txBody>
-                    <a:bodyPr/>
-                    <a:lstStyle/>
-                    <a:p>
-                      <a:pPr algn="ctr"/>
-                      <a:r>
-                        <a:rPr lang="en-US" sz="1100" dirty="0">
-                          <a:latin typeface="Gill Sans"/>
-                          <a:cs typeface="Gill Sans"/>
-                        </a:rPr>
-                        <a:t>Amet</a:t>
-                      </a:r>
-                      <a:endParaRPr lang="en-US" sz="1100" dirty="0">
-                        <a:latin typeface="Gill Sans"/>
-                        <a:cs typeface="Gill Sans"/>
-                      </a:endParaRPr>
-                    </a:p>
-                  </a:txBody>
-                  <a:tcPr marT="34290" marB="34290"/>
-                </a:tc>
-              </a:tr>
-              <a:tr h="278130">
-                <a:tc>
-                  <a:txBody>
-                    <a:bodyPr/>
-                    <a:lstStyle/>
-                    <a:p>
-                      <a:r>
-                        <a:rPr lang="en-US" sz="1100" dirty="0">
-                          <a:latin typeface="Gill Sans"/>
-                          <a:cs typeface="Gill Sans"/>
-                        </a:rPr>
-                        <a:t>Lorem</a:t>
-                      </a:r>
-                      <a:endParaRPr lang="en-US" sz="1200" dirty="0">
-                        <a:latin typeface="Gill Sans"/>
-                        <a:cs typeface="Gill Sans"/>
-                      </a:endParaRPr>
-                    </a:p>
-                  </a:txBody>
-                  <a:tcPr marT="34290" marB="34290"/>
-                </a:tc>
-                <a:tc>
-                  <a:txBody>
-                    <a:bodyPr/>
-                    <a:lstStyle/>
-                    <a:p>
-                      <a:pPr algn="ctr" fontAlgn="ctr"/>
-                      <a:r>
-                        <a:rPr lang="en-US" sz="1100" dirty="0">
-                          <a:latin typeface="Gill Sans"/>
-                          <a:cs typeface="Gill Sans"/>
-                        </a:rPr>
-                        <a:t>Ipsum</a:t>
-                      </a:r>
-                      <a:endParaRPr lang="en-US" sz="1200" b="0" i="0" u="none" strike="noStrike" dirty="0">
-                        <a:solidFill>
-                          <a:srgbClr val="800000"/>
-                        </a:solidFill>
-                        <a:effectLst/>
-                        <a:latin typeface="Gill Sans"/>
-                        <a:cs typeface="Gill Sans"/>
-                      </a:endParaRPr>
-                    </a:p>
-                  </a:txBody>
-                  <a:tcPr marL="8859" marR="8859" marT="6541" marB="0" anchor="ctr"/>
-                </a:tc>
-                <a:tc>
-                  <a:txBody>
-                    <a:bodyPr/>
-                    <a:lstStyle/>
-                    <a:p>
-                      <a:pPr algn="ctr"/>
-                      <a:r>
-                        <a:rPr lang="en-US" sz="1100" dirty="0">
-                          <a:latin typeface="Gill Sans"/>
-                          <a:cs typeface="Gill Sans"/>
-                        </a:rPr>
-                        <a:t>Dolor</a:t>
-                      </a:r>
-                      <a:endParaRPr lang="en-US" sz="1200" dirty="0">
-                        <a:latin typeface="Gill Sans"/>
-                        <a:cs typeface="Gill Sans"/>
-                      </a:endParaRPr>
-                    </a:p>
-                  </a:txBody>
-                  <a:tcPr marT="34290" marB="34290"/>
-                </a:tc>
-                <a:tc>
-                  <a:txBody>
-                    <a:bodyPr/>
-                    <a:lstStyle/>
-                    <a:p>
-                      <a:pPr algn="ctr"/>
-                      <a:r>
-                        <a:rPr lang="en-US" sz="1100" dirty="0">
-                          <a:latin typeface="Gill Sans"/>
-                          <a:cs typeface="Gill Sans"/>
-                        </a:rPr>
-                        <a:t>Closit</a:t>
-                      </a:r>
-                      <a:endParaRPr lang="en-US" sz="1200" dirty="0">
-                        <a:solidFill>
-                          <a:srgbClr val="FF0000"/>
-                        </a:solidFill>
-                        <a:latin typeface="Gill Sans"/>
-                        <a:cs typeface="Gill Sans"/>
-                      </a:endParaRPr>
-                    </a:p>
-                  </a:txBody>
-                  <a:tcPr marT="34290" marB="34290"/>
-                </a:tc>
-                <a:tc>
-                  <a:txBody>
-                    <a:bodyPr/>
-                    <a:lstStyle/>
-                    <a:p>
-                      <a:pPr algn="ctr"/>
-                      <a:r>
-                        <a:rPr lang="en-US" sz="1100" dirty="0">
-                          <a:latin typeface="Gill Sans"/>
-                          <a:cs typeface="Gill Sans"/>
-                        </a:rPr>
-                        <a:t>Amet</a:t>
-                      </a:r>
-                      <a:endParaRPr lang="en-US" sz="1100" dirty="0">
-                        <a:latin typeface="Gill Sans"/>
-                        <a:cs typeface="Gill Sans"/>
-                      </a:endParaRPr>
-                    </a:p>
-                  </a:txBody>
-                  <a:tcPr marT="34290" marB="34290"/>
-                </a:tc>
-              </a:tr>
-              <a:tr h="278130">
-                <a:tc>
-                  <a:txBody>
-                    <a:bodyPr/>
-                    <a:lstStyle/>
-                    <a:p>
-                      <a:r>
-                        <a:rPr lang="en-US" sz="1100" dirty="0">
-                          <a:latin typeface="Gill Sans"/>
-                          <a:cs typeface="Gill Sans"/>
-                        </a:rPr>
-                        <a:t>Lorem</a:t>
-                      </a:r>
-                      <a:endParaRPr lang="en-US" sz="1200" dirty="0">
-                        <a:latin typeface="Gill Sans"/>
-                        <a:cs typeface="Gill Sans"/>
-                      </a:endParaRPr>
-                    </a:p>
-                  </a:txBody>
-                  <a:tcPr marT="34290" marB="34290"/>
-                </a:tc>
-                <a:tc>
-                  <a:txBody>
-                    <a:bodyPr/>
-                    <a:lstStyle/>
-                    <a:p>
-                      <a:pPr algn="ctr" fontAlgn="ctr"/>
-                      <a:r>
-                        <a:rPr lang="en-US" sz="1100" dirty="0">
-                          <a:latin typeface="Gill Sans"/>
-                          <a:cs typeface="Gill Sans"/>
-                        </a:rPr>
-                        <a:t>Ipsum</a:t>
-                      </a:r>
-                      <a:endParaRPr lang="en-US" sz="1200" b="0" i="0" u="none" strike="noStrike" dirty="0">
-                        <a:solidFill>
-                          <a:srgbClr val="800000"/>
-                        </a:solidFill>
-                        <a:effectLst/>
-                        <a:latin typeface="Gill Sans"/>
-                        <a:cs typeface="Gill Sans"/>
-                      </a:endParaRPr>
-                    </a:p>
-                  </a:txBody>
-                  <a:tcPr marL="8859" marR="8859" marT="6541" marB="0" anchor="ctr"/>
-                </a:tc>
-                <a:tc>
-                  <a:txBody>
-                    <a:bodyPr/>
-                    <a:lstStyle/>
-                    <a:p>
-                      <a:pPr algn="ctr"/>
-                      <a:r>
-                        <a:rPr lang="en-US" sz="1100" dirty="0">
-                          <a:latin typeface="Gill Sans"/>
-                          <a:cs typeface="Gill Sans"/>
-                        </a:rPr>
-                        <a:t>Dolor</a:t>
-                      </a:r>
-                      <a:endParaRPr lang="en-US" sz="1200" dirty="0">
-                        <a:latin typeface="Gill Sans"/>
-                        <a:cs typeface="Gill Sans"/>
-                      </a:endParaRPr>
-                    </a:p>
-                  </a:txBody>
-                  <a:tcPr marT="34290" marB="34290"/>
-                </a:tc>
-                <a:tc>
-                  <a:txBody>
-                    <a:bodyPr/>
-                    <a:lstStyle/>
-                    <a:p>
-                      <a:pPr algn="ctr"/>
-                      <a:r>
-                        <a:rPr lang="en-US" sz="1100" dirty="0">
-                          <a:latin typeface="Gill Sans"/>
-                          <a:cs typeface="Gill Sans"/>
-                        </a:rPr>
-                        <a:t>Closit</a:t>
-                      </a:r>
-                      <a:endParaRPr lang="en-US" sz="1200" dirty="0">
-                        <a:solidFill>
-                          <a:srgbClr val="FF0000"/>
-                        </a:solidFill>
-                        <a:latin typeface="Gill Sans"/>
-                        <a:cs typeface="Gill Sans"/>
-                      </a:endParaRPr>
-                    </a:p>
-                  </a:txBody>
-                  <a:tcPr marT="34290" marB="34290"/>
-                </a:tc>
-                <a:tc>
-                  <a:txBody>
-                    <a:bodyPr/>
-                    <a:lstStyle/>
-                    <a:p>
-                      <a:pPr algn="ctr"/>
-                      <a:r>
-                        <a:rPr lang="en-US" sz="1100" dirty="0">
-                          <a:latin typeface="Gill Sans"/>
-                          <a:cs typeface="Gill Sans"/>
-                        </a:rPr>
-                        <a:t>Amet</a:t>
-                      </a:r>
-                      <a:endParaRPr lang="en-US" sz="1100" dirty="0">
-                        <a:latin typeface="Gill Sans"/>
-                        <a:cs typeface="Gill Sans"/>
-                      </a:endParaRPr>
-                    </a:p>
-                  </a:txBody>
-                  <a:tcPr marT="34290" marB="34290"/>
-                </a:tc>
-              </a:tr>
-              <a:tr h="278130">
-                <a:tc>
-                  <a:txBody>
-                    <a:bodyPr/>
-                    <a:lstStyle/>
-                    <a:p>
-                      <a:r>
-                        <a:rPr lang="en-US" sz="1100" dirty="0">
-                          <a:latin typeface="Gill Sans"/>
-                          <a:cs typeface="Gill Sans"/>
-                        </a:rPr>
-                        <a:t>Lorem</a:t>
-                      </a:r>
-                      <a:endParaRPr lang="en-US" sz="1200" dirty="0">
-                        <a:latin typeface="Gill Sans"/>
-                        <a:cs typeface="Gill Sans"/>
-                      </a:endParaRPr>
-                    </a:p>
-                  </a:txBody>
-                  <a:tcPr marT="34290" marB="34290"/>
-                </a:tc>
-                <a:tc>
-                  <a:txBody>
-                    <a:bodyPr/>
-                    <a:lstStyle/>
-                    <a:p>
-                      <a:pPr algn="ctr" fontAlgn="ctr"/>
-                      <a:r>
-                        <a:rPr lang="en-US" sz="1100" dirty="0">
-                          <a:latin typeface="Gill Sans"/>
-                          <a:cs typeface="Gill Sans"/>
-                        </a:rPr>
-                        <a:t>Ipsum</a:t>
-                      </a:r>
-                      <a:endParaRPr lang="en-US" sz="1200" b="0" i="0" u="none" strike="noStrike" dirty="0">
-                        <a:solidFill>
-                          <a:srgbClr val="800000"/>
-                        </a:solidFill>
-                        <a:effectLst/>
-                        <a:latin typeface="Gill Sans"/>
-                        <a:cs typeface="Gill Sans"/>
-                      </a:endParaRPr>
-                    </a:p>
-                  </a:txBody>
-                  <a:tcPr marL="8859" marR="8859" marT="6541" marB="0" anchor="ctr"/>
-                </a:tc>
-                <a:tc>
-                  <a:txBody>
-                    <a:bodyPr/>
-                    <a:lstStyle/>
-                    <a:p>
-                      <a:pPr algn="ctr"/>
-                      <a:r>
-                        <a:rPr lang="en-US" sz="1100" dirty="0">
-                          <a:latin typeface="Gill Sans"/>
-                          <a:cs typeface="Gill Sans"/>
-                        </a:rPr>
-                        <a:t>Dolor</a:t>
-                      </a:r>
-                      <a:endParaRPr lang="en-US" sz="1200" dirty="0">
-                        <a:latin typeface="Gill Sans"/>
-                        <a:cs typeface="Gill Sans"/>
-                      </a:endParaRPr>
-                    </a:p>
-                  </a:txBody>
-                  <a:tcPr marT="34290" marB="34290"/>
-                </a:tc>
-                <a:tc>
-                  <a:txBody>
-                    <a:bodyPr/>
-                    <a:lstStyle/>
-                    <a:p>
-                      <a:pPr algn="ctr"/>
-                      <a:r>
-                        <a:rPr lang="en-US" sz="1100" dirty="0">
-                          <a:latin typeface="Gill Sans"/>
-                          <a:cs typeface="Gill Sans"/>
-                        </a:rPr>
-                        <a:t>Closit</a:t>
-                      </a:r>
-                      <a:endParaRPr lang="en-US" sz="1200" dirty="0">
-                        <a:solidFill>
-                          <a:srgbClr val="FF0000"/>
-                        </a:solidFill>
-                        <a:latin typeface="Gill Sans"/>
-                        <a:cs typeface="Gill Sans"/>
-                      </a:endParaRPr>
-                    </a:p>
-                  </a:txBody>
-                  <a:tcPr marT="34290" marB="34290"/>
-                </a:tc>
-                <a:tc>
-                  <a:txBody>
-                    <a:bodyPr/>
-                    <a:lstStyle/>
-                    <a:p>
-                      <a:pPr algn="ctr"/>
-                      <a:r>
-                        <a:rPr lang="en-US" sz="1100" dirty="0">
-                          <a:latin typeface="Gill Sans"/>
-                          <a:cs typeface="Gill Sans"/>
-                        </a:rPr>
-                        <a:t>Amet</a:t>
-                      </a:r>
-                      <a:endParaRPr lang="en-US" sz="1100" dirty="0">
-                        <a:latin typeface="Gill Sans"/>
-                        <a:cs typeface="Gill Sans"/>
-                      </a:endParaRPr>
-                    </a:p>
-                  </a:txBody>
-                  <a:tcPr marT="34290" marB="34290"/>
-                </a:tc>
-              </a:tr>
-              <a:tr h="278130">
-                <a:tc>
-                  <a:txBody>
-                    <a:bodyPr/>
-                    <a:lstStyle/>
-                    <a:p>
-                      <a:r>
-                        <a:rPr lang="en-US" sz="1100" dirty="0">
-                          <a:latin typeface="Gill Sans"/>
-                          <a:cs typeface="Gill Sans"/>
-                        </a:rPr>
-                        <a:t>Lorem</a:t>
-                      </a:r>
-                      <a:endParaRPr lang="en-US" sz="1200" dirty="0">
-                        <a:latin typeface="Gill Sans"/>
-                        <a:cs typeface="Gill Sans"/>
-                      </a:endParaRPr>
-                    </a:p>
-                  </a:txBody>
-                  <a:tcPr marT="34290" marB="34290"/>
-                </a:tc>
-                <a:tc>
-                  <a:txBody>
-                    <a:bodyPr/>
-                    <a:lstStyle/>
-                    <a:p>
-                      <a:pPr algn="ctr" fontAlgn="ctr"/>
-                      <a:r>
-                        <a:rPr lang="en-US" sz="1100" dirty="0">
-                          <a:latin typeface="Gill Sans"/>
-                          <a:cs typeface="Gill Sans"/>
-                        </a:rPr>
-                        <a:t>Ipsum</a:t>
-                      </a:r>
-                      <a:endParaRPr lang="en-US" sz="1200" b="0" i="0" u="none" strike="noStrike" dirty="0">
-                        <a:solidFill>
-                          <a:srgbClr val="800000"/>
-                        </a:solidFill>
-                        <a:effectLst/>
-                        <a:latin typeface="Gill Sans"/>
-                        <a:cs typeface="Gill Sans"/>
-                      </a:endParaRPr>
-                    </a:p>
-                  </a:txBody>
-                  <a:tcPr marL="8859" marR="8859" marT="6541" marB="0" anchor="ctr"/>
-                </a:tc>
-                <a:tc>
-                  <a:txBody>
-                    <a:bodyPr/>
-                    <a:lstStyle/>
-                    <a:p>
-                      <a:pPr algn="ctr"/>
-                      <a:r>
-                        <a:rPr lang="en-US" sz="1100" dirty="0">
-                          <a:latin typeface="Gill Sans"/>
-                          <a:cs typeface="Gill Sans"/>
-                        </a:rPr>
-                        <a:t>Dolor</a:t>
-                      </a:r>
-                      <a:endParaRPr lang="en-US" sz="1200" dirty="0">
-                        <a:latin typeface="Gill Sans"/>
-                        <a:cs typeface="Gill Sans"/>
-                      </a:endParaRPr>
-                    </a:p>
-                  </a:txBody>
-                  <a:tcPr marT="34290" marB="34290"/>
-                </a:tc>
-                <a:tc>
-                  <a:txBody>
-                    <a:bodyPr/>
-                    <a:lstStyle/>
-                    <a:p>
-                      <a:pPr algn="ctr"/>
-                      <a:r>
-                        <a:rPr lang="en-US" sz="1100" dirty="0">
-                          <a:latin typeface="Gill Sans"/>
-                          <a:cs typeface="Gill Sans"/>
-                        </a:rPr>
-                        <a:t>Closit</a:t>
-                      </a:r>
-                      <a:endParaRPr lang="en-US" sz="1200" dirty="0">
-                        <a:solidFill>
-                          <a:srgbClr val="FF0000"/>
-                        </a:solidFill>
-                        <a:latin typeface="Gill Sans"/>
-                        <a:cs typeface="Gill Sans"/>
-                      </a:endParaRPr>
-                    </a:p>
-                  </a:txBody>
-                  <a:tcPr marT="34290" marB="34290"/>
-                </a:tc>
-                <a:tc>
-                  <a:txBody>
-                    <a:bodyPr/>
-                    <a:lstStyle/>
-                    <a:p>
-                      <a:pPr algn="ctr"/>
-                      <a:r>
-                        <a:rPr lang="en-US" sz="1100" dirty="0">
-                          <a:latin typeface="Gill Sans"/>
-                          <a:cs typeface="Gill Sans"/>
-                        </a:rPr>
-                        <a:t>Amet</a:t>
-                      </a:r>
-                      <a:endParaRPr lang="en-US" sz="1100" dirty="0">
-                        <a:latin typeface="Gill Sans"/>
-                        <a:cs typeface="Gill Sans"/>
-                      </a:endParaRPr>
-                    </a:p>
-                  </a:txBody>
-                  <a:tcPr marT="34290" marB="34290"/>
-                </a:tc>
-              </a:tr>
-              <a:tr h="278130">
-                <a:tc>
-                  <a:txBody>
-                    <a:bodyPr/>
-                    <a:lstStyle/>
-                    <a:p>
-                      <a:r>
-                        <a:rPr lang="en-US" sz="1100" dirty="0">
-                          <a:latin typeface="Gill Sans"/>
-                          <a:cs typeface="Gill Sans"/>
-                        </a:rPr>
-                        <a:t>Lorem</a:t>
-                      </a:r>
-                      <a:endParaRPr lang="en-US" sz="1200" dirty="0">
-                        <a:latin typeface="Gill Sans"/>
-                        <a:cs typeface="Gill Sans"/>
-                      </a:endParaRPr>
-                    </a:p>
-                  </a:txBody>
-                  <a:tcPr marT="34290" marB="34290"/>
-                </a:tc>
-                <a:tc>
-                  <a:txBody>
-                    <a:bodyPr/>
-                    <a:lstStyle/>
-                    <a:p>
-                      <a:pPr algn="ctr" fontAlgn="ctr"/>
-                      <a:r>
-                        <a:rPr lang="en-US" sz="1100" dirty="0">
-                          <a:latin typeface="Gill Sans"/>
-                          <a:cs typeface="Gill Sans"/>
-                        </a:rPr>
-                        <a:t>Ipsum</a:t>
-                      </a:r>
-                      <a:endParaRPr lang="en-US" sz="1200" b="0" i="0" u="none" strike="noStrike" dirty="0">
-                        <a:solidFill>
-                          <a:srgbClr val="800000"/>
-                        </a:solidFill>
-                        <a:effectLst/>
-                        <a:latin typeface="Gill Sans"/>
-                        <a:cs typeface="Gill Sans"/>
-                      </a:endParaRPr>
-                    </a:p>
-                  </a:txBody>
-                  <a:tcPr marL="8859" marR="8859" marT="6541" marB="0" anchor="ctr"/>
-                </a:tc>
-                <a:tc>
-                  <a:txBody>
-                    <a:bodyPr/>
-                    <a:lstStyle/>
-                    <a:p>
-                      <a:pPr algn="ctr"/>
-                      <a:r>
-                        <a:rPr lang="en-US" sz="1100" dirty="0">
-                          <a:latin typeface="Gill Sans"/>
-                          <a:cs typeface="Gill Sans"/>
-                        </a:rPr>
-                        <a:t>Dolor</a:t>
-                      </a:r>
-                      <a:endParaRPr lang="en-US" sz="1200" dirty="0">
-                        <a:latin typeface="Gill Sans"/>
-                        <a:cs typeface="Gill Sans"/>
-                      </a:endParaRPr>
-                    </a:p>
-                  </a:txBody>
-                  <a:tcPr marT="34290" marB="34290"/>
-                </a:tc>
-                <a:tc>
-                  <a:txBody>
-                    <a:bodyPr/>
-                    <a:lstStyle/>
-                    <a:p>
-                      <a:pPr marL="0" marR="0" indent="0" algn="ctr" defTabSz="457200" rtl="0" eaLnBrk="1" fontAlgn="auto" latinLnBrk="0" hangingPunct="1">
-                        <a:lnSpc>
-                          <a:spcPct val="100000"/>
-                        </a:lnSpc>
-                        <a:spcBef>
-                          <a:spcPts val="0"/>
-                        </a:spcBef>
-                        <a:spcAft>
-                          <a:spcPts val="0"/>
-                        </a:spcAft>
-                        <a:buClrTx/>
-                        <a:buSzTx/>
-                        <a:buFontTx/>
-                        <a:buNone/>
-                        <a:defRPr/>
-                      </a:pPr>
-                      <a:r>
-                        <a:rPr lang="en-US" sz="1100" dirty="0">
-                          <a:latin typeface="Gill Sans"/>
-                          <a:cs typeface="Gill Sans"/>
-                        </a:rPr>
-                        <a:t>Closit</a:t>
-                      </a:r>
-                      <a:endParaRPr lang="en-US" sz="1200" dirty="0">
-                        <a:solidFill>
-                          <a:srgbClr val="FF0000"/>
-                        </a:solidFill>
-                        <a:latin typeface="Gill Sans"/>
-                        <a:cs typeface="Gill Sans"/>
-                      </a:endParaRPr>
-                    </a:p>
-                  </a:txBody>
-                  <a:tcPr marT="34290" marB="34290"/>
-                </a:tc>
-                <a:tc>
-                  <a:txBody>
-                    <a:bodyPr/>
-                    <a:lstStyle/>
-                    <a:p>
-                      <a:pPr algn="ctr"/>
-                      <a:r>
-                        <a:rPr lang="en-US" sz="1100" dirty="0">
-                          <a:latin typeface="Gill Sans"/>
-                          <a:cs typeface="Gill Sans"/>
-                        </a:rPr>
-                        <a:t>Amet</a:t>
-                      </a:r>
-                      <a:endParaRPr lang="en-US" sz="1100" dirty="0">
-                        <a:latin typeface="Gill Sans"/>
-                        <a:cs typeface="Gill Sans"/>
-                      </a:endParaRPr>
-                    </a:p>
-                  </a:txBody>
-                  <a:tcPr marT="34290" marB="34290"/>
-                </a:tc>
-              </a:tr>
-              <a:tr h="278130">
-                <a:tc>
-                  <a:txBody>
-                    <a:bodyPr/>
-                    <a:lstStyle/>
-                    <a:p>
-                      <a:r>
-                        <a:rPr lang="en-US" sz="1100" dirty="0">
-                          <a:latin typeface="Gill Sans"/>
-                          <a:cs typeface="Gill Sans"/>
-                        </a:rPr>
-                        <a:t>Lorem</a:t>
-                      </a:r>
-                      <a:endParaRPr lang="en-US" sz="1200" dirty="0">
-                        <a:latin typeface="Gill Sans"/>
-                        <a:cs typeface="Gill Sans"/>
-                      </a:endParaRPr>
-                    </a:p>
-                  </a:txBody>
-                  <a:tcPr marT="34290" marB="34290"/>
-                </a:tc>
-                <a:tc>
-                  <a:txBody>
-                    <a:bodyPr/>
-                    <a:lstStyle/>
-                    <a:p>
-                      <a:pPr algn="ctr" fontAlgn="ctr"/>
-                      <a:r>
-                        <a:rPr lang="en-US" sz="1100" dirty="0">
-                          <a:latin typeface="Gill Sans"/>
-                          <a:cs typeface="Gill Sans"/>
-                        </a:rPr>
-                        <a:t>Ipsum</a:t>
-                      </a:r>
-                      <a:endParaRPr lang="en-US" sz="1200" b="1" i="0" u="none" strike="noStrike" dirty="0">
-                        <a:solidFill>
-                          <a:srgbClr val="800000"/>
-                        </a:solidFill>
-                        <a:effectLst/>
-                        <a:latin typeface="Gill Sans"/>
-                        <a:cs typeface="Gill Sans"/>
-                      </a:endParaRPr>
-                    </a:p>
-                  </a:txBody>
-                  <a:tcPr marL="8859" marR="8859" marT="6541" marB="0" anchor="ctr"/>
-                </a:tc>
-                <a:tc>
-                  <a:txBody>
-                    <a:bodyPr/>
-                    <a:lstStyle/>
-                    <a:p>
-                      <a:pPr algn="ctr"/>
-                      <a:r>
-                        <a:rPr lang="en-US" sz="1100" dirty="0">
-                          <a:latin typeface="Gill Sans"/>
-                          <a:cs typeface="Gill Sans"/>
-                        </a:rPr>
-                        <a:t>Dolor</a:t>
-                      </a:r>
-                      <a:endParaRPr lang="en-US" sz="1200" dirty="0">
-                        <a:latin typeface="Gill Sans"/>
-                        <a:cs typeface="Gill Sans"/>
-                      </a:endParaRPr>
-                    </a:p>
-                  </a:txBody>
-                  <a:tcPr marT="34290" marB="34290"/>
-                </a:tc>
-                <a:tc>
-                  <a:txBody>
-                    <a:bodyPr/>
-                    <a:lstStyle/>
-                    <a:p>
-                      <a:pPr algn="ctr"/>
-                      <a:r>
-                        <a:rPr lang="en-US" sz="1100" dirty="0">
-                          <a:latin typeface="Gill Sans"/>
-                          <a:cs typeface="Gill Sans"/>
-                        </a:rPr>
-                        <a:t>Closit</a:t>
-                      </a:r>
-                      <a:endParaRPr lang="en-US" sz="1200" dirty="0">
-                        <a:solidFill>
-                          <a:srgbClr val="FF0000"/>
-                        </a:solidFill>
-                        <a:latin typeface="Gill Sans"/>
-                        <a:cs typeface="Gill Sans"/>
-                      </a:endParaRPr>
-                    </a:p>
-                  </a:txBody>
-                  <a:tcPr marT="34290" marB="34290"/>
-                </a:tc>
-                <a:tc>
-                  <a:txBody>
-                    <a:bodyPr/>
-                    <a:lstStyle/>
-                    <a:p>
-                      <a:pPr algn="ctr"/>
-                      <a:r>
-                        <a:rPr lang="en-US" sz="1100" dirty="0">
-                          <a:latin typeface="Gill Sans"/>
-                          <a:cs typeface="Gill Sans"/>
-                        </a:rPr>
-                        <a:t>Amet</a:t>
-                      </a:r>
-                      <a:endParaRPr lang="en-US" sz="1100" dirty="0">
-                        <a:latin typeface="Gill Sans"/>
-                        <a:cs typeface="Gill Sans"/>
-                      </a:endParaRPr>
-                    </a:p>
-                  </a:txBody>
-                  <a:tcPr marT="34290" marB="34290"/>
-                </a:tc>
-              </a:tr>
-            </a:tbl>
-          </a:graphicData>
-        </a:graphic>
-      </p:graphicFrame>
-    </p:spTree>
-  </p:cSld>
-  <p:clrMapOvr>
-    <a:masterClrMapping/>
-  </p:clrMapOvr>
-</p:sld>
-</file>
-
-<file path=ppt/slides/slide22.xml><?xml version="1.0" encoding="utf-8"?>
-<p:sld xmlns:a="http://schemas.openxmlformats.org/drawingml/2006/main" xmlns:r="http://schemas.openxmlformats.org/officeDocument/2006/relationships" xmlns:p="http://schemas.openxmlformats.org/presentationml/2006/main">
-  <p:cSld>
-    <p:spTree>
-      <p:nvGrpSpPr>
-        <p:cNvPr id="1" name=""/>
-        <p:cNvGrpSpPr/>
-        <p:nvPr/>
-      </p:nvGrpSpPr>
-      <p:grpSpPr>
-        <a:xfrm>
-          <a:off x="0" y="0"/>
-          <a:ext cx="0" cy="0"/>
-          <a:chOff x="0" y="0"/>
-          <a:chExt cx="0" cy="0"/>
-        </a:xfrm>
-      </p:grpSpPr>
-      <p:sp>
-        <p:nvSpPr>
-          <p:cNvPr id="7" name="Slide Number Placeholder 6"/>
-          <p:cNvSpPr>
-            <a:spLocks noGrp="1"/>
-          </p:cNvSpPr>
-          <p:nvPr>
-            <p:ph type="sldNum" sz="quarter" idx="12"/>
-          </p:nvPr>
-        </p:nvSpPr>
-        <p:spPr/>
-        <p:txBody>
-          <a:bodyPr/>
-          <a:lstStyle/>
-          <a:p>
-            <a:fld id="{8A758EFE-665F-4341-B5B8-2DAEADA52F6C}" type="slidenum">
-              <a:rPr lang="en-US" smtClean="0"/>
-            </a:fld>
-            <a:endParaRPr lang="en-US" dirty="0"/>
-          </a:p>
-        </p:txBody>
-      </p:sp>
-      <p:sp>
-        <p:nvSpPr>
-          <p:cNvPr id="2" name="Title 1"/>
-          <p:cNvSpPr>
-            <a:spLocks noGrp="1"/>
-          </p:cNvSpPr>
-          <p:nvPr>
-            <p:ph type="title"/>
-          </p:nvPr>
-        </p:nvSpPr>
-        <p:spPr/>
-        <p:txBody>
-          <a:bodyPr/>
-          <a:lstStyle/>
-          <a:p>
-            <a:r>
-              <a:rPr lang="en-US" dirty="0"/>
-              <a:t>Chart Slide</a:t>
-            </a:r>
-            <a:endParaRPr lang="en-US" dirty="0"/>
-          </a:p>
-        </p:txBody>
-      </p:sp>
-      <p:graphicFrame>
-        <p:nvGraphicFramePr>
-          <p:cNvPr id="4" name="Content Placeholder 3"/>
-          <p:cNvGraphicFramePr>
-            <a:graphicFrameLocks noGrp="1"/>
-          </p:cNvGraphicFramePr>
-          <p:nvPr>
-            <p:ph idx="1"/>
-          </p:nvPr>
-        </p:nvGraphicFramePr>
-        <p:xfrm>
-          <a:off x="585445" y="1006930"/>
-          <a:ext cx="7246231" cy="3374576"/>
-        </p:xfrm>
-        <a:graphic>
-          <a:graphicData uri="http://schemas.openxmlformats.org/drawingml/2006/chart">
-            <c:chart xmlns:c="http://schemas.openxmlformats.org/drawingml/2006/chart" xmlns:r="http://schemas.openxmlformats.org/officeDocument/2006/relationships" r:id="rId1"/>
-          </a:graphicData>
-        </a:graphic>
-      </p:graphicFrame>
     </p:spTree>
   </p:cSld>
   <p:clrMapOvr>
@@ -15991,15 +13692,15 @@
               <a:buClr>
                 <a:schemeClr val="tx1"/>
               </a:buClr>
-              <a:buFont typeface="Arial" panose="020B0604020202020204"/>
+              <a:buFont typeface="Arial" panose="020B0604020202090204"/>
               <a:buChar char="•"/>
               <a:defRPr sz="2800" kern="1200">
                 <a:solidFill>
                   <a:schemeClr val="accent6"/>
                 </a:solidFill>
-                <a:latin typeface="Gill Sans"/>
+                <a:latin typeface="Gill Sans" panose="020B0502020104020203"/>
                 <a:ea typeface="+mn-ea"/>
-                <a:cs typeface="Gill Sans"/>
+                <a:cs typeface="Gill Sans" panose="020B0502020104020203"/>
               </a:defRPr>
             </a:lvl1pPr>
             <a:lvl2pPr marL="742950" indent="-285750" algn="l" defTabSz="457200" rtl="0" eaLnBrk="1" latinLnBrk="0" hangingPunct="1">
@@ -16009,15 +13710,15 @@
               <a:buClr>
                 <a:schemeClr val="tx1"/>
               </a:buClr>
-              <a:buFont typeface="Arial" panose="020B0604020202020204"/>
+              <a:buFont typeface="Arial" panose="020B0604020202090204"/>
               <a:buChar char="–"/>
               <a:defRPr sz="2400" kern="1200">
                 <a:solidFill>
                   <a:schemeClr val="accent6"/>
                 </a:solidFill>
-                <a:latin typeface="Gill Sans"/>
+                <a:latin typeface="Gill Sans" panose="020B0502020104020203"/>
                 <a:ea typeface="+mn-ea"/>
-                <a:cs typeface="Gill Sans"/>
+                <a:cs typeface="Gill Sans" panose="020B0502020104020203"/>
               </a:defRPr>
             </a:lvl2pPr>
             <a:lvl3pPr marL="1143000" indent="-228600" algn="l" defTabSz="457200" rtl="0" eaLnBrk="1" latinLnBrk="0" hangingPunct="1">
@@ -16027,15 +13728,15 @@
               <a:buClr>
                 <a:schemeClr val="tx1"/>
               </a:buClr>
-              <a:buFont typeface="Arial" panose="020B0604020202020204"/>
+              <a:buFont typeface="Arial" panose="020B0604020202090204"/>
               <a:buChar char="•"/>
               <a:defRPr sz="2000" kern="1200">
                 <a:solidFill>
                   <a:schemeClr val="accent6"/>
                 </a:solidFill>
-                <a:latin typeface="Gill Sans"/>
+                <a:latin typeface="Gill Sans" panose="020B0502020104020203"/>
                 <a:ea typeface="+mn-ea"/>
-                <a:cs typeface="Gill Sans"/>
+                <a:cs typeface="Gill Sans" panose="020B0502020104020203"/>
               </a:defRPr>
             </a:lvl3pPr>
             <a:lvl4pPr marL="1600200" indent="-228600" algn="l" defTabSz="457200" rtl="0" eaLnBrk="1" latinLnBrk="0" hangingPunct="1">
@@ -16045,15 +13746,15 @@
               <a:buClr>
                 <a:schemeClr val="tx1"/>
               </a:buClr>
-              <a:buFont typeface="Arial" panose="020B0604020202020204"/>
+              <a:buFont typeface="Arial" panose="020B0604020202090204"/>
               <a:buChar char="–"/>
               <a:defRPr sz="1800" kern="1200">
                 <a:solidFill>
                   <a:schemeClr val="accent6"/>
                 </a:solidFill>
-                <a:latin typeface="Gill Sans"/>
+                <a:latin typeface="Gill Sans" panose="020B0502020104020203"/>
                 <a:ea typeface="+mn-ea"/>
-                <a:cs typeface="Gill Sans"/>
+                <a:cs typeface="Gill Sans" panose="020B0502020104020203"/>
               </a:defRPr>
             </a:lvl4pPr>
             <a:lvl5pPr marL="2057400" indent="-228600" algn="l" defTabSz="457200" rtl="0" eaLnBrk="1" latinLnBrk="0" hangingPunct="1">
@@ -16063,22 +13764,22 @@
               <a:buClr>
                 <a:schemeClr val="tx1"/>
               </a:buClr>
-              <a:buFont typeface="Arial" panose="020B0604020202020204"/>
+              <a:buFont typeface="Arial" panose="020B0604020202090204"/>
               <a:buChar char="»"/>
               <a:defRPr sz="1800" kern="1200">
                 <a:solidFill>
                   <a:schemeClr val="accent6"/>
                 </a:solidFill>
-                <a:latin typeface="Gill Sans"/>
+                <a:latin typeface="Gill Sans" panose="020B0502020104020203"/>
                 <a:ea typeface="+mn-ea"/>
-                <a:cs typeface="Gill Sans"/>
+                <a:cs typeface="Gill Sans" panose="020B0502020104020203"/>
               </a:defRPr>
             </a:lvl5pPr>
             <a:lvl6pPr marL="2514600" indent="-228600" algn="l" defTabSz="457200" rtl="0" eaLnBrk="1" latinLnBrk="0" hangingPunct="1">
               <a:spcBef>
                 <a:spcPct val="20000"/>
               </a:spcBef>
-              <a:buFont typeface="Arial" panose="020B0604020202020204"/>
+              <a:buFont typeface="Arial" panose="020B0604020202090204"/>
               <a:buChar char="•"/>
               <a:defRPr sz="2000" kern="1200">
                 <a:solidFill>
@@ -16093,7 +13794,7 @@
               <a:spcBef>
                 <a:spcPct val="20000"/>
               </a:spcBef>
-              <a:buFont typeface="Arial" panose="020B0604020202020204"/>
+              <a:buFont typeface="Arial" panose="020B0604020202090204"/>
               <a:buChar char="•"/>
               <a:defRPr sz="2000" kern="1200">
                 <a:solidFill>
@@ -16108,7 +13809,7 @@
               <a:spcBef>
                 <a:spcPct val="20000"/>
               </a:spcBef>
-              <a:buFont typeface="Arial" panose="020B0604020202020204"/>
+              <a:buFont typeface="Arial" panose="020B0604020202090204"/>
               <a:buChar char="•"/>
               <a:defRPr sz="2000" kern="1200">
                 <a:solidFill>
@@ -16123,7 +13824,7 @@
               <a:spcBef>
                 <a:spcPct val="20000"/>
               </a:spcBef>
-              <a:buFont typeface="Arial" panose="020B0604020202020204"/>
+              <a:buFont typeface="Arial" panose="020B0604020202090204"/>
               <a:buChar char="•"/>
               <a:defRPr sz="2000" kern="1200">
                 <a:solidFill>
@@ -16177,8 +13878,8 @@
               <a:solidFill>
                 <a:schemeClr val="accent6"/>
               </a:solidFill>
-              <a:latin typeface="Gill Sans"/>
-              <a:cs typeface="Gill Sans"/>
+              <a:latin typeface="Gill Sans" panose="020B0502020104020203"/>
+              <a:cs typeface="Gill Sans" panose="020B0502020104020203"/>
             </a:endParaRPr>
           </a:p>
           <a:p>
@@ -16197,8 +13898,8 @@
               <a:solidFill>
                 <a:schemeClr val="accent6"/>
               </a:solidFill>
-              <a:latin typeface="Gill Sans"/>
-              <a:cs typeface="Gill Sans"/>
+              <a:latin typeface="Gill Sans" panose="020B0502020104020203"/>
+              <a:cs typeface="Gill Sans" panose="020B0502020104020203"/>
             </a:endParaRPr>
           </a:p>
           <a:p>
@@ -16217,8 +13918,8 @@
               <a:solidFill>
                 <a:schemeClr val="accent6"/>
               </a:solidFill>
-              <a:latin typeface="Gill Sans"/>
-              <a:cs typeface="Gill Sans"/>
+              <a:latin typeface="Gill Sans" panose="020B0502020104020203"/>
+              <a:cs typeface="Gill Sans" panose="020B0502020104020203"/>
             </a:endParaRPr>
           </a:p>
           <a:p>
@@ -16237,8 +13938,8 @@
               <a:solidFill>
                 <a:schemeClr val="accent6"/>
               </a:solidFill>
-              <a:latin typeface="Gill Sans"/>
-              <a:cs typeface="Gill Sans"/>
+              <a:latin typeface="Gill Sans" panose="020B0502020104020203"/>
+              <a:cs typeface="Gill Sans" panose="020B0502020104020203"/>
             </a:endParaRPr>
           </a:p>
           <a:p>
@@ -16257,8 +13958,8 @@
               <a:solidFill>
                 <a:schemeClr val="accent6"/>
               </a:solidFill>
-              <a:latin typeface="Gill Sans"/>
-              <a:cs typeface="Gill Sans"/>
+              <a:latin typeface="Gill Sans" panose="020B0502020104020203"/>
+              <a:cs typeface="Gill Sans" panose="020B0502020104020203"/>
             </a:endParaRPr>
           </a:p>
           <a:p>
@@ -16278,8 +13979,8 @@
                 <a:solidFill>
                   <a:schemeClr val="accent6"/>
                 </a:solidFill>
-                <a:latin typeface="Gill Sans"/>
-                <a:cs typeface="Gill Sans"/>
+                <a:latin typeface="Gill Sans" panose="020B0502020104020203"/>
+                <a:cs typeface="Gill Sans" panose="020B0502020104020203"/>
               </a:rPr>
               <a:t>Ultimately, this work helps clarify whether reported UFO shapes reflect actual aerial anomalies, or if they are shaped more by human interpretation, environment, and culture.</a:t>
             </a:r>
@@ -16287,8 +13988,8 @@
               <a:solidFill>
                 <a:schemeClr val="accent6"/>
               </a:solidFill>
-              <a:latin typeface="Gill Sans"/>
-              <a:cs typeface="Gill Sans"/>
+              <a:latin typeface="Gill Sans" panose="020B0502020104020203"/>
+              <a:cs typeface="Gill Sans" panose="020B0502020104020203"/>
             </a:endParaRPr>
           </a:p>
           <a:p>
@@ -16296,8 +13997,8 @@
               <a:solidFill>
                 <a:schemeClr val="accent6"/>
               </a:solidFill>
-              <a:latin typeface="Gill Sans"/>
-              <a:cs typeface="Gill Sans"/>
+              <a:latin typeface="Gill Sans" panose="020B0502020104020203"/>
+              <a:cs typeface="Gill Sans" panose="020B0502020104020203"/>
             </a:endParaRPr>
           </a:p>
         </p:txBody>
@@ -16664,9 +14365,9 @@
                 <a:solidFill>
                   <a:srgbClr val="95001A"/>
                 </a:solidFill>
-                <a:latin typeface="Gill Sans"/>
+                <a:latin typeface="Gill Sans" panose="020B0502020104020203"/>
                 <a:ea typeface="+mj-ea"/>
-                <a:cs typeface="Gill Sans"/>
+                <a:cs typeface="Gill Sans" panose="020B0502020104020203"/>
               </a:rPr>
               <a:t>Main Dataset:  </a:t>
             </a:r>
@@ -17648,15 +15349,15 @@
               <a:buClr>
                 <a:schemeClr val="tx1"/>
               </a:buClr>
-              <a:buFont typeface="Arial" panose="020B0604020202020204"/>
+              <a:buFont typeface="Arial" panose="020B0604020202090204"/>
               <a:buChar char="•"/>
               <a:defRPr sz="2800" kern="1200">
                 <a:solidFill>
                   <a:schemeClr val="accent6"/>
                 </a:solidFill>
-                <a:latin typeface="Gill Sans"/>
+                <a:latin typeface="Gill Sans" panose="020B0502020104020203"/>
                 <a:ea typeface="+mn-ea"/>
-                <a:cs typeface="Gill Sans"/>
+                <a:cs typeface="Gill Sans" panose="020B0502020104020203"/>
               </a:defRPr>
             </a:lvl1pPr>
             <a:lvl2pPr marL="742950" indent="-285750" algn="l" defTabSz="457200" rtl="0" eaLnBrk="1" latinLnBrk="0" hangingPunct="1">
@@ -17666,15 +15367,15 @@
               <a:buClr>
                 <a:schemeClr val="tx1"/>
               </a:buClr>
-              <a:buFont typeface="Arial" panose="020B0604020202020204"/>
+              <a:buFont typeface="Arial" panose="020B0604020202090204"/>
               <a:buChar char="–"/>
               <a:defRPr sz="2400" kern="1200">
                 <a:solidFill>
                   <a:schemeClr val="accent6"/>
                 </a:solidFill>
-                <a:latin typeface="Gill Sans"/>
+                <a:latin typeface="Gill Sans" panose="020B0502020104020203"/>
                 <a:ea typeface="+mn-ea"/>
-                <a:cs typeface="Gill Sans"/>
+                <a:cs typeface="Gill Sans" panose="020B0502020104020203"/>
               </a:defRPr>
             </a:lvl2pPr>
             <a:lvl3pPr marL="1143000" indent="-228600" algn="l" defTabSz="457200" rtl="0" eaLnBrk="1" latinLnBrk="0" hangingPunct="1">
@@ -17684,15 +15385,15 @@
               <a:buClr>
                 <a:schemeClr val="tx1"/>
               </a:buClr>
-              <a:buFont typeface="Arial" panose="020B0604020202020204"/>
+              <a:buFont typeface="Arial" panose="020B0604020202090204"/>
               <a:buChar char="•"/>
               <a:defRPr sz="2000" kern="1200">
                 <a:solidFill>
                   <a:schemeClr val="accent6"/>
                 </a:solidFill>
-                <a:latin typeface="Gill Sans"/>
+                <a:latin typeface="Gill Sans" panose="020B0502020104020203"/>
                 <a:ea typeface="+mn-ea"/>
-                <a:cs typeface="Gill Sans"/>
+                <a:cs typeface="Gill Sans" panose="020B0502020104020203"/>
               </a:defRPr>
             </a:lvl3pPr>
             <a:lvl4pPr marL="1600200" indent="-228600" algn="l" defTabSz="457200" rtl="0" eaLnBrk="1" latinLnBrk="0" hangingPunct="1">
@@ -17702,15 +15403,15 @@
               <a:buClr>
                 <a:schemeClr val="tx1"/>
               </a:buClr>
-              <a:buFont typeface="Arial" panose="020B0604020202020204"/>
+              <a:buFont typeface="Arial" panose="020B0604020202090204"/>
               <a:buChar char="–"/>
               <a:defRPr sz="1800" kern="1200">
                 <a:solidFill>
                   <a:schemeClr val="accent6"/>
                 </a:solidFill>
-                <a:latin typeface="Gill Sans"/>
+                <a:latin typeface="Gill Sans" panose="020B0502020104020203"/>
                 <a:ea typeface="+mn-ea"/>
-                <a:cs typeface="Gill Sans"/>
+                <a:cs typeface="Gill Sans" panose="020B0502020104020203"/>
               </a:defRPr>
             </a:lvl4pPr>
             <a:lvl5pPr marL="2057400" indent="-228600" algn="l" defTabSz="457200" rtl="0" eaLnBrk="1" latinLnBrk="0" hangingPunct="1">
@@ -17720,22 +15421,22 @@
               <a:buClr>
                 <a:schemeClr val="tx1"/>
               </a:buClr>
-              <a:buFont typeface="Arial" panose="020B0604020202020204"/>
+              <a:buFont typeface="Arial" panose="020B0604020202090204"/>
               <a:buChar char="»"/>
               <a:defRPr sz="1800" kern="1200">
                 <a:solidFill>
                   <a:schemeClr val="accent6"/>
                 </a:solidFill>
-                <a:latin typeface="Gill Sans"/>
+                <a:latin typeface="Gill Sans" panose="020B0502020104020203"/>
                 <a:ea typeface="+mn-ea"/>
-                <a:cs typeface="Gill Sans"/>
+                <a:cs typeface="Gill Sans" panose="020B0502020104020203"/>
               </a:defRPr>
             </a:lvl5pPr>
             <a:lvl6pPr marL="2514600" indent="-228600" algn="l" defTabSz="457200" rtl="0" eaLnBrk="1" latinLnBrk="0" hangingPunct="1">
               <a:spcBef>
                 <a:spcPct val="20000"/>
               </a:spcBef>
-              <a:buFont typeface="Arial" panose="020B0604020202020204"/>
+              <a:buFont typeface="Arial" panose="020B0604020202090204"/>
               <a:buChar char="•"/>
               <a:defRPr sz="2000" kern="1200">
                 <a:solidFill>
@@ -17750,7 +15451,7 @@
               <a:spcBef>
                 <a:spcPct val="20000"/>
               </a:spcBef>
-              <a:buFont typeface="Arial" panose="020B0604020202020204"/>
+              <a:buFont typeface="Arial" panose="020B0604020202090204"/>
               <a:buChar char="•"/>
               <a:defRPr sz="2000" kern="1200">
                 <a:solidFill>
@@ -17765,7 +15466,7 @@
               <a:spcBef>
                 <a:spcPct val="20000"/>
               </a:spcBef>
-              <a:buFont typeface="Arial" panose="020B0604020202020204"/>
+              <a:buFont typeface="Arial" panose="020B0604020202090204"/>
               <a:buChar char="•"/>
               <a:defRPr sz="2000" kern="1200">
                 <a:solidFill>
@@ -17780,7 +15481,7 @@
               <a:spcBef>
                 <a:spcPct val="20000"/>
               </a:spcBef>
-              <a:buFont typeface="Arial" panose="020B0604020202020204"/>
+              <a:buFont typeface="Arial" panose="020B0604020202090204"/>
               <a:buChar char="•"/>
               <a:defRPr sz="2000" kern="1200">
                 <a:solidFill>

--- a/pre.pptx
+++ b/pre.pptx
@@ -5,29 +5,30 @@
     <p:sldMasterId id="2147483648" r:id="rId1"/>
   </p:sldMasterIdLst>
   <p:notesMasterIdLst>
-    <p:notesMasterId r:id="rId14"/>
+    <p:notesMasterId r:id="rId20"/>
   </p:notesMasterIdLst>
   <p:handoutMasterIdLst>
     <p:handoutMasterId r:id="rId21"/>
   </p:handoutMasterIdLst>
   <p:sldIdLst>
-    <p:sldId id="263" r:id="rId3"/>
-    <p:sldId id="311" r:id="rId4"/>
-    <p:sldId id="320" r:id="rId5"/>
-    <p:sldId id="296" r:id="rId6"/>
-    <p:sldId id="305" r:id="rId7"/>
-    <p:sldId id="324" r:id="rId8"/>
-    <p:sldId id="321" r:id="rId9"/>
-    <p:sldId id="325" r:id="rId10"/>
-    <p:sldId id="314" r:id="rId11"/>
-    <p:sldId id="327" r:id="rId12"/>
-    <p:sldId id="328" r:id="rId13"/>
-    <p:sldId id="329" r:id="rId15"/>
-    <p:sldId id="326" r:id="rId16"/>
-    <p:sldId id="330" r:id="rId17"/>
-    <p:sldId id="331" r:id="rId18"/>
-    <p:sldId id="332" r:id="rId19"/>
-    <p:sldId id="333" r:id="rId20"/>
+    <p:sldId id="263" r:id="rId2"/>
+    <p:sldId id="311" r:id="rId3"/>
+    <p:sldId id="320" r:id="rId4"/>
+    <p:sldId id="296" r:id="rId5"/>
+    <p:sldId id="305" r:id="rId6"/>
+    <p:sldId id="324" r:id="rId7"/>
+    <p:sldId id="321" r:id="rId8"/>
+    <p:sldId id="325" r:id="rId9"/>
+    <p:sldId id="314" r:id="rId10"/>
+    <p:sldId id="327" r:id="rId11"/>
+    <p:sldId id="328" r:id="rId12"/>
+    <p:sldId id="329" r:id="rId13"/>
+    <p:sldId id="326" r:id="rId14"/>
+    <p:sldId id="334" r:id="rId15"/>
+    <p:sldId id="330" r:id="rId16"/>
+    <p:sldId id="331" r:id="rId17"/>
+    <p:sldId id="332" r:id="rId18"/>
+    <p:sldId id="333" r:id="rId19"/>
   </p:sldIdLst>
   <p:sldSz cx="9144000" cy="5143500" type="screen16x9"/>
   <p:notesSz cx="6858000" cy="9144000"/>
@@ -227,6 +228,7 @@
           <a:p>
             <a:fld id="{89B5E162-9D79-2943-B0A3-211BF28B7513}" type="datetimeFigureOut">
               <a:rPr lang="en-US" smtClean="0"/>
+              <a:t>12/8/25</a:t>
             </a:fld>
             <a:endParaRPr lang="en-US" dirty="0"/>
           </a:p>
@@ -292,12 +294,18 @@
           <a:p>
             <a:fld id="{8222E400-0EC4-CD46-9C72-78BD5E94273C}" type="slidenum">
               <a:rPr lang="en-US" smtClean="0"/>
+              <a:t>‹#›</a:t>
             </a:fld>
             <a:endParaRPr lang="en-US" dirty="0"/>
           </a:p>
         </p:txBody>
       </p:sp>
     </p:spTree>
+    <p:extLst>
+      <p:ext uri="{BB962C8B-B14F-4D97-AF65-F5344CB8AC3E}">
+        <p14:creationId xmlns:p14="http://schemas.microsoft.com/office/powerpoint/2010/main" val="1"/>
+      </p:ext>
+    </p:extLst>
   </p:cSld>
   <p:clrMap bg1="lt1" tx1="dk1" bg2="lt2" tx2="dk2" accent1="accent1" accent2="accent2" accent3="accent3" accent4="accent4" accent5="accent5" accent6="accent6" hlink="hlink" folHlink="folHlink"/>
   <p:hf hdr="0" ftr="0" dt="0"/>
@@ -386,6 +394,7 @@
           <a:p>
             <a:fld id="{A1CBAB52-94AF-9448-9B1C-7768B1879D49}" type="datetimeFigureOut">
               <a:rPr lang="en-US" smtClean="0"/>
+              <a:t>12/8/25</a:t>
             </a:fld>
             <a:endParaRPr lang="en-US" dirty="0"/>
           </a:p>
@@ -452,7 +461,6 @@
               <a:rPr lang="en-US"/>
               <a:t>Click to edit Master text styles</a:t>
             </a:r>
-            <a:endParaRPr lang="en-US"/>
           </a:p>
           <a:p>
             <a:pPr lvl="1"/>
@@ -460,7 +468,6 @@
               <a:rPr lang="en-US"/>
               <a:t>Second level</a:t>
             </a:r>
-            <a:endParaRPr lang="en-US"/>
           </a:p>
           <a:p>
             <a:pPr lvl="2"/>
@@ -468,7 +475,6 @@
               <a:rPr lang="en-US"/>
               <a:t>Third level</a:t>
             </a:r>
-            <a:endParaRPr lang="en-US"/>
           </a:p>
           <a:p>
             <a:pPr lvl="3"/>
@@ -476,7 +482,6 @@
               <a:rPr lang="en-US"/>
               <a:t>Fourth level</a:t>
             </a:r>
-            <a:endParaRPr lang="en-US"/>
           </a:p>
           <a:p>
             <a:pPr lvl="4"/>
@@ -484,7 +489,6 @@
               <a:rPr lang="en-US"/>
               <a:t>Fifth level</a:t>
             </a:r>
-            <a:endParaRPr lang="en-US"/>
           </a:p>
         </p:txBody>
       </p:sp>
@@ -548,6 +552,7 @@
           <a:p>
             <a:fld id="{55447283-AD3B-EE49-8B53-C7D74121EF4E}" type="slidenum">
               <a:rPr lang="en-US" smtClean="0"/>
+              <a:t>‹#›</a:t>
             </a:fld>
             <a:endParaRPr lang="en-US" dirty="0"/>
           </a:p>
@@ -676,19 +681,19 @@
             <a:spLocks noGrp="1" noRot="1" noChangeAspect="1"/>
           </p:cNvSpPr>
           <p:nvPr>
-            <p:ph type="sldImg"/>
+            <p:ph type="sldImg" idx="2"/>
           </p:nvPr>
         </p:nvSpPr>
         <p:spPr/>
       </p:sp>
       <p:sp>
         <p:nvSpPr>
-          <p:cNvPr id="3" name="Notes Placeholder 2"/>
+          <p:cNvPr id="3" name="Text Placeholder 2"/>
           <p:cNvSpPr>
             <a:spLocks noGrp="1"/>
           </p:cNvSpPr>
           <p:nvPr>
-            <p:ph type="body" idx="1"/>
+            <p:ph type="body" idx="3"/>
           </p:nvPr>
         </p:nvSpPr>
         <p:spPr/>
@@ -696,14 +701,7 @@
           <a:bodyPr/>
           <a:lstStyle/>
           <a:p>
-            <a:endParaRPr lang="en-US" sz="6000" kern="1200" dirty="0">
-              <a:solidFill>
-                <a:schemeClr val="accent3"/>
-              </a:solidFill>
-              <a:latin typeface="+mn-lt"/>
-              <a:ea typeface="+mn-ea"/>
-              <a:cs typeface="+mn-cs"/>
-            </a:endParaRPr>
+            <a:endParaRPr lang="en-US"/>
           </a:p>
         </p:txBody>
       </p:sp>
@@ -724,6 +722,7 @@
           <a:p>
             <a:fld id="{55447283-AD3B-EE49-8B53-C7D74121EF4E}" type="slidenum">
               <a:rPr lang="en-US" smtClean="0"/>
+              <a:t>5</a:t>
             </a:fld>
             <a:endParaRPr lang="en-US" dirty="0"/>
           </a:p>
@@ -761,19 +760,19 @@
             <a:spLocks noGrp="1" noRot="1" noChangeAspect="1"/>
           </p:cNvSpPr>
           <p:nvPr>
-            <p:ph type="sldImg"/>
+            <p:ph type="sldImg" idx="2"/>
           </p:nvPr>
         </p:nvSpPr>
         <p:spPr/>
       </p:sp>
       <p:sp>
         <p:nvSpPr>
-          <p:cNvPr id="3" name="Notes Placeholder 2"/>
+          <p:cNvPr id="3" name="Text Placeholder 2"/>
           <p:cNvSpPr>
             <a:spLocks noGrp="1"/>
           </p:cNvSpPr>
           <p:nvPr>
-            <p:ph type="body" idx="1"/>
+            <p:ph type="body" idx="3"/>
           </p:nvPr>
         </p:nvSpPr>
         <p:spPr/>
@@ -781,7 +780,7 @@
           <a:bodyPr/>
           <a:lstStyle/>
           <a:p>
-            <a:endParaRPr lang="en-US" dirty="0"/>
+            <a:endParaRPr lang="en-US"/>
           </a:p>
         </p:txBody>
       </p:sp>
@@ -802,6 +801,7 @@
           <a:p>
             <a:fld id="{55447283-AD3B-EE49-8B53-C7D74121EF4E}" type="slidenum">
               <a:rPr lang="en-US" smtClean="0"/>
+              <a:t>6</a:t>
             </a:fld>
             <a:endParaRPr lang="en-US" dirty="0"/>
           </a:p>
@@ -824,12 +824,263 @@
         <p:cNvGrpSpPr/>
         <p:nvPr/>
       </p:nvGrpSpPr>
-      <p:grpSpPr/>
+      <p:grpSpPr>
+        <a:xfrm>
+          <a:off x="0" y="0"/>
+          <a:ext cx="0" cy="0"/>
+          <a:chOff x="0" y="0"/>
+          <a:chExt cx="0" cy="0"/>
+        </a:xfrm>
+      </p:grpSpPr>
+      <p:sp>
+        <p:nvSpPr>
+          <p:cNvPr id="2" name="Slide Image Placeholder 1"/>
+          <p:cNvSpPr>
+            <a:spLocks noGrp="1" noRot="1" noChangeAspect="1"/>
+          </p:cNvSpPr>
+          <p:nvPr>
+            <p:ph type="sldImg" idx="2"/>
+          </p:nvPr>
+        </p:nvSpPr>
+        <p:spPr/>
+      </p:sp>
+      <p:sp>
+        <p:nvSpPr>
+          <p:cNvPr id="3" name="Text Placeholder 2"/>
+          <p:cNvSpPr>
+            <a:spLocks noGrp="1"/>
+          </p:cNvSpPr>
+          <p:nvPr>
+            <p:ph type="body" idx="3"/>
+          </p:nvPr>
+        </p:nvSpPr>
+        <p:spPr/>
+        <p:txBody>
+          <a:bodyPr/>
+          <a:lstStyle/>
+          <a:p>
+            <a:endParaRPr lang="en-US"/>
+          </a:p>
+        </p:txBody>
+      </p:sp>
+      <p:sp>
+        <p:nvSpPr>
+          <p:cNvPr id="4" name="Slide Number Placeholder 3"/>
+          <p:cNvSpPr>
+            <a:spLocks noGrp="1"/>
+          </p:cNvSpPr>
+          <p:nvPr>
+            <p:ph type="sldNum" sz="quarter" idx="5"/>
+          </p:nvPr>
+        </p:nvSpPr>
+        <p:spPr/>
+        <p:txBody>
+          <a:bodyPr/>
+          <a:lstStyle/>
+          <a:p>
+            <a:fld id="{55447283-AD3B-EE49-8B53-C7D74121EF4E}" type="slidenum">
+              <a:rPr lang="en-US" smtClean="0"/>
+              <a:t>7</a:t>
+            </a:fld>
+            <a:endParaRPr lang="en-US" dirty="0"/>
+          </a:p>
+        </p:txBody>
+      </p:sp>
+    </p:spTree>
+  </p:cSld>
+  <p:clrMapOvr>
+    <a:masterClrMapping/>
+  </p:clrMapOvr>
+</p:notes>
+</file>
+
+<file path=ppt/notesSlides/notesSlide4.xml><?xml version="1.0" encoding="utf-8"?>
+<p:notes xmlns:a="http://schemas.openxmlformats.org/drawingml/2006/main" xmlns:r="http://schemas.openxmlformats.org/officeDocument/2006/relationships" xmlns:p="http://schemas.openxmlformats.org/presentationml/2006/main">
+  <p:cSld>
+    <p:spTree>
+      <p:nvGrpSpPr>
+        <p:cNvPr id="1" name=""/>
+        <p:cNvGrpSpPr/>
+        <p:nvPr/>
+      </p:nvGrpSpPr>
+      <p:grpSpPr>
+        <a:xfrm>
+          <a:off x="0" y="0"/>
+          <a:ext cx="0" cy="0"/>
+          <a:chOff x="0" y="0"/>
+          <a:chExt cx="0" cy="0"/>
+        </a:xfrm>
+      </p:grpSpPr>
+      <p:sp>
+        <p:nvSpPr>
+          <p:cNvPr id="2" name="Slide Image Placeholder 1"/>
+          <p:cNvSpPr>
+            <a:spLocks noGrp="1" noRot="1" noChangeAspect="1"/>
+          </p:cNvSpPr>
+          <p:nvPr>
+            <p:ph type="sldImg"/>
+          </p:nvPr>
+        </p:nvSpPr>
+        <p:spPr/>
+      </p:sp>
+      <p:sp>
+        <p:nvSpPr>
+          <p:cNvPr id="3" name="Notes Placeholder 2"/>
+          <p:cNvSpPr>
+            <a:spLocks noGrp="1"/>
+          </p:cNvSpPr>
+          <p:nvPr>
+            <p:ph type="body" idx="1"/>
+          </p:nvPr>
+        </p:nvSpPr>
+        <p:spPr/>
+        <p:txBody>
+          <a:bodyPr/>
+          <a:lstStyle/>
+          <a:p>
+            <a:endParaRPr lang="en-US" sz="6000" kern="1200" dirty="0">
+              <a:solidFill>
+                <a:schemeClr val="accent3"/>
+              </a:solidFill>
+              <a:latin typeface="+mn-lt"/>
+              <a:ea typeface="+mn-ea"/>
+              <a:cs typeface="+mn-cs"/>
+            </a:endParaRPr>
+          </a:p>
+        </p:txBody>
+      </p:sp>
+      <p:sp>
+        <p:nvSpPr>
+          <p:cNvPr id="4" name="Slide Number Placeholder 3"/>
+          <p:cNvSpPr>
+            <a:spLocks noGrp="1"/>
+          </p:cNvSpPr>
+          <p:nvPr>
+            <p:ph type="sldNum" sz="quarter" idx="5"/>
+          </p:nvPr>
+        </p:nvSpPr>
+        <p:spPr/>
+        <p:txBody>
+          <a:bodyPr/>
+          <a:lstStyle/>
+          <a:p>
+            <a:fld id="{55447283-AD3B-EE49-8B53-C7D74121EF4E}" type="slidenum">
+              <a:rPr lang="en-US" smtClean="0"/>
+              <a:t>11</a:t>
+            </a:fld>
+            <a:endParaRPr lang="en-US" dirty="0"/>
+          </a:p>
+        </p:txBody>
+      </p:sp>
+    </p:spTree>
+  </p:cSld>
+  <p:clrMapOvr>
+    <a:masterClrMapping/>
+  </p:clrMapOvr>
+</p:notes>
+</file>
+
+<file path=ppt/notesSlides/notesSlide5.xml><?xml version="1.0" encoding="utf-8"?>
+<p:notes xmlns:a="http://schemas.openxmlformats.org/drawingml/2006/main" xmlns:r="http://schemas.openxmlformats.org/officeDocument/2006/relationships" xmlns:p="http://schemas.openxmlformats.org/presentationml/2006/main">
+  <p:cSld>
+    <p:spTree>
+      <p:nvGrpSpPr>
+        <p:cNvPr id="1" name=""/>
+        <p:cNvGrpSpPr/>
+        <p:nvPr/>
+      </p:nvGrpSpPr>
+      <p:grpSpPr>
+        <a:xfrm>
+          <a:off x="0" y="0"/>
+          <a:ext cx="0" cy="0"/>
+          <a:chOff x="0" y="0"/>
+          <a:chExt cx="0" cy="0"/>
+        </a:xfrm>
+      </p:grpSpPr>
+      <p:sp>
+        <p:nvSpPr>
+          <p:cNvPr id="2" name="Slide Image Placeholder 1"/>
+          <p:cNvSpPr>
+            <a:spLocks noGrp="1" noRot="1" noChangeAspect="1"/>
+          </p:cNvSpPr>
+          <p:nvPr>
+            <p:ph type="sldImg"/>
+          </p:nvPr>
+        </p:nvSpPr>
+        <p:spPr/>
+      </p:sp>
+      <p:sp>
+        <p:nvSpPr>
+          <p:cNvPr id="3" name="Notes Placeholder 2"/>
+          <p:cNvSpPr>
+            <a:spLocks noGrp="1"/>
+          </p:cNvSpPr>
+          <p:nvPr>
+            <p:ph type="body" idx="1"/>
+          </p:nvPr>
+        </p:nvSpPr>
+        <p:spPr/>
+        <p:txBody>
+          <a:bodyPr/>
+          <a:lstStyle/>
+          <a:p>
+            <a:endParaRPr lang="en-US" dirty="0"/>
+          </a:p>
+        </p:txBody>
+      </p:sp>
+      <p:sp>
+        <p:nvSpPr>
+          <p:cNvPr id="4" name="Slide Number Placeholder 3"/>
+          <p:cNvSpPr>
+            <a:spLocks noGrp="1"/>
+          </p:cNvSpPr>
+          <p:nvPr>
+            <p:ph type="sldNum" sz="quarter" idx="5"/>
+          </p:nvPr>
+        </p:nvSpPr>
+        <p:spPr/>
+        <p:txBody>
+          <a:bodyPr/>
+          <a:lstStyle/>
+          <a:p>
+            <a:fld id="{55447283-AD3B-EE49-8B53-C7D74121EF4E}" type="slidenum">
+              <a:rPr lang="en-US" smtClean="0"/>
+              <a:t>12</a:t>
+            </a:fld>
+            <a:endParaRPr lang="en-US" dirty="0"/>
+          </a:p>
+        </p:txBody>
+      </p:sp>
+    </p:spTree>
+  </p:cSld>
+  <p:clrMapOvr>
+    <a:masterClrMapping/>
+  </p:clrMapOvr>
+</p:notes>
+</file>
+
+<file path=ppt/notesSlides/notesSlide6.xml><?xml version="1.0" encoding="utf-8"?>
+<p:notes xmlns:a="http://schemas.openxmlformats.org/drawingml/2006/main" xmlns:r="http://schemas.openxmlformats.org/officeDocument/2006/relationships" xmlns:p="http://schemas.openxmlformats.org/presentationml/2006/main">
+  <p:cSld>
+    <p:spTree>
+      <p:nvGrpSpPr>
+        <p:cNvPr id="1" name=""/>
+        <p:cNvGrpSpPr/>
+        <p:nvPr/>
+      </p:nvGrpSpPr>
+      <p:grpSpPr>
+        <a:xfrm>
+          <a:off x="0" y="0"/>
+          <a:ext cx="0" cy="0"/>
+          <a:chOff x="0" y="0"/>
+          <a:chExt cx="0" cy="0"/>
+        </a:xfrm>
+      </p:grpSpPr>
       <p:sp>
         <p:nvSpPr>
           <p:cNvPr id="2" name="幻灯片图像占位符 1"/>
           <p:cNvSpPr>
-            <a:spLocks noGrp="1"/>
+            <a:spLocks noGrp="1" noRot="1" noChangeAspect="1"/>
           </p:cNvSpPr>
           <p:nvPr>
             <p:ph type="sldImg" idx="2"/>
@@ -850,6 +1101,7 @@
         <p:spPr/>
         <p:txBody>
           <a:bodyPr/>
+          <a:lstStyle/>
           <a:p>
             <a:endParaRPr lang="zh-CN" altLang="en-US"/>
           </a:p>
@@ -868,9 +1120,11 @@
         <p:spPr/>
         <p:txBody>
           <a:bodyPr/>
+          <a:lstStyle/>
           <a:p>
             <a:fld id="{55447283-AD3B-EE49-8B53-C7D74121EF4E}" type="slidenum">
               <a:rPr lang="en-US" smtClean="0"/>
+              <a:t>15</a:t>
             </a:fld>
             <a:endParaRPr lang="en-US" dirty="0"/>
           </a:p>
@@ -1040,7 +1294,6 @@
               <a:rPr lang="en-US" dirty="0"/>
               <a:t>Click to edit Master title style</a:t>
             </a:r>
-            <a:endParaRPr lang="en-US" dirty="0"/>
           </a:p>
         </p:txBody>
       </p:sp>
@@ -1159,7 +1412,6 @@
               <a:rPr lang="en-US" dirty="0"/>
               <a:t>Click to edit Master subtitle style</a:t>
             </a:r>
-            <a:endParaRPr lang="en-US" dirty="0"/>
           </a:p>
         </p:txBody>
       </p:sp>
@@ -1406,7 +1658,6 @@
               <a:rPr lang="en-US" dirty="0"/>
               <a:t>Click to edit Master text styles</a:t>
             </a:r>
-            <a:endParaRPr lang="en-US" dirty="0"/>
           </a:p>
         </p:txBody>
       </p:sp>
@@ -1480,7 +1731,6 @@
               <a:rPr lang="en-US" dirty="0"/>
               <a:t>Click to edit Master text styles</a:t>
             </a:r>
-            <a:endParaRPr lang="en-US" dirty="0"/>
           </a:p>
           <a:p>
             <a:pPr marL="342900" marR="0" lvl="0" indent="-342900" algn="l" defTabSz="457200" rtl="0" eaLnBrk="1" fontAlgn="auto" latinLnBrk="0" hangingPunct="1">
@@ -1505,7 +1755,6 @@
               <a:rPr lang="en-US" dirty="0"/>
               <a:t>Click to edit Master text styles</a:t>
             </a:r>
-            <a:endParaRPr lang="en-US" dirty="0"/>
           </a:p>
           <a:p>
             <a:pPr marL="342900" marR="0" lvl="0" indent="-342900" algn="l" defTabSz="457200" rtl="0" eaLnBrk="1" fontAlgn="auto" latinLnBrk="0" hangingPunct="1">
@@ -1530,7 +1779,6 @@
               <a:rPr lang="en-US" dirty="0"/>
               <a:t>Click to edit Master text styles</a:t>
             </a:r>
-            <a:endParaRPr lang="en-US" dirty="0"/>
           </a:p>
           <a:p>
             <a:pPr marL="342900" marR="0" lvl="0" indent="-342900" algn="l" defTabSz="457200" rtl="0" eaLnBrk="1" fontAlgn="auto" latinLnBrk="0" hangingPunct="1">
@@ -1555,7 +1803,6 @@
               <a:rPr lang="en-US" dirty="0"/>
               <a:t>Click to edit Master text styles</a:t>
             </a:r>
-            <a:endParaRPr lang="en-US" dirty="0"/>
           </a:p>
           <a:p>
             <a:pPr lvl="0"/>
@@ -1593,6 +1840,7 @@
           <a:p>
             <a:fld id="{8A758EFE-665F-4341-B5B8-2DAEADA52F6C}" type="slidenum">
               <a:rPr lang="en-US" smtClean="0"/>
+              <a:t>‹#›</a:t>
             </a:fld>
             <a:endParaRPr lang="en-US" dirty="0"/>
           </a:p>
@@ -1631,7 +1879,6 @@
               <a:rPr lang="en-US" dirty="0"/>
               <a:t>Click to edit Master title style</a:t>
             </a:r>
-            <a:endParaRPr lang="en-US" dirty="0"/>
           </a:p>
         </p:txBody>
       </p:sp>
@@ -1895,7 +2142,6 @@
               <a:rPr lang="en-US" dirty="0"/>
               <a:t>Click to edit Master text styles</a:t>
             </a:r>
-            <a:endParaRPr lang="en-US" dirty="0"/>
           </a:p>
         </p:txBody>
       </p:sp>
@@ -1973,7 +2219,6 @@
               <a:rPr lang="en-US" dirty="0"/>
               <a:t>Click to edit Master text styles</a:t>
             </a:r>
-            <a:endParaRPr lang="en-US" dirty="0"/>
           </a:p>
           <a:p>
             <a:pPr lvl="0"/>
@@ -2059,7 +2304,6 @@
               <a:rPr lang="en-US" dirty="0"/>
               <a:t>Click to edit Master text styles</a:t>
             </a:r>
-            <a:endParaRPr lang="en-US" dirty="0"/>
           </a:p>
         </p:txBody>
       </p:sp>
@@ -2137,7 +2381,6 @@
               <a:rPr lang="en-US" dirty="0"/>
               <a:t>Click to edit Master text styles</a:t>
             </a:r>
-            <a:endParaRPr lang="en-US" dirty="0"/>
           </a:p>
           <a:p>
             <a:pPr lvl="0"/>
@@ -2223,7 +2466,6 @@
               <a:rPr lang="en-US" dirty="0"/>
               <a:t>Click to edit Master text styles</a:t>
             </a:r>
-            <a:endParaRPr lang="en-US" dirty="0"/>
           </a:p>
         </p:txBody>
       </p:sp>
@@ -2301,7 +2543,6 @@
               <a:rPr lang="en-US" dirty="0"/>
               <a:t>Click to edit Master text styles</a:t>
             </a:r>
-            <a:endParaRPr lang="en-US" dirty="0"/>
           </a:p>
           <a:p>
             <a:pPr lvl="0"/>
@@ -2365,7 +2606,6 @@
               <a:rPr lang="en-US" dirty="0"/>
               <a:t>Click to edit Master text styles</a:t>
             </a:r>
-            <a:endParaRPr lang="en-US" dirty="0"/>
           </a:p>
         </p:txBody>
       </p:sp>
@@ -2424,6 +2664,7 @@
           <a:p>
             <a:fld id="{8A758EFE-665F-4341-B5B8-2DAEADA52F6C}" type="slidenum">
               <a:rPr lang="en-US" smtClean="0"/>
+              <a:t>‹#›</a:t>
             </a:fld>
             <a:endParaRPr lang="en-US" dirty="0"/>
           </a:p>
@@ -2462,7 +2703,6 @@
               <a:rPr lang="en-US" dirty="0"/>
               <a:t>Click to edit Master title style</a:t>
             </a:r>
-            <a:endParaRPr lang="en-US" dirty="0"/>
           </a:p>
         </p:txBody>
       </p:sp>
@@ -3389,7 +3629,6 @@
               <a:rPr lang="en-US" dirty="0"/>
               <a:t>Edit</a:t>
             </a:r>
-            <a:endParaRPr lang="en-US" dirty="0"/>
           </a:p>
         </p:txBody>
       </p:sp>
@@ -3467,7 +3706,6 @@
               <a:rPr lang="en-US" dirty="0"/>
               <a:t>Click to edit</a:t>
             </a:r>
-            <a:endParaRPr lang="en-US" dirty="0"/>
           </a:p>
         </p:txBody>
       </p:sp>
@@ -3545,7 +3783,6 @@
               <a:rPr lang="en-US" dirty="0"/>
               <a:t>Edit</a:t>
             </a:r>
-            <a:endParaRPr lang="en-US" dirty="0"/>
           </a:p>
         </p:txBody>
       </p:sp>
@@ -3623,7 +3860,6 @@
               <a:rPr lang="en-US" dirty="0"/>
               <a:t>Click to edit</a:t>
             </a:r>
-            <a:endParaRPr lang="en-US" dirty="0"/>
           </a:p>
         </p:txBody>
       </p:sp>
@@ -3701,7 +3937,6 @@
               <a:rPr lang="en-US" dirty="0"/>
               <a:t>Edit</a:t>
             </a:r>
-            <a:endParaRPr lang="en-US" dirty="0"/>
           </a:p>
         </p:txBody>
       </p:sp>
@@ -3779,7 +4014,6 @@
               <a:rPr lang="en-US" dirty="0"/>
               <a:t>Click to edit</a:t>
             </a:r>
-            <a:endParaRPr lang="en-US" dirty="0"/>
           </a:p>
         </p:txBody>
       </p:sp>
@@ -3857,7 +4091,6 @@
               <a:rPr lang="en-US" dirty="0"/>
               <a:t>Edit</a:t>
             </a:r>
-            <a:endParaRPr lang="en-US" dirty="0"/>
           </a:p>
         </p:txBody>
       </p:sp>
@@ -3935,7 +4168,6 @@
               <a:rPr lang="en-US" dirty="0"/>
               <a:t>Click to edit</a:t>
             </a:r>
-            <a:endParaRPr lang="en-US" dirty="0"/>
           </a:p>
         </p:txBody>
       </p:sp>
@@ -4013,7 +4245,6 @@
               <a:rPr lang="en-US" dirty="0"/>
               <a:t>Edit</a:t>
             </a:r>
-            <a:endParaRPr lang="en-US" dirty="0"/>
           </a:p>
         </p:txBody>
       </p:sp>
@@ -4091,7 +4322,6 @@
               <a:rPr lang="en-US" dirty="0"/>
               <a:t>Click to edit</a:t>
             </a:r>
-            <a:endParaRPr lang="en-US" dirty="0"/>
           </a:p>
         </p:txBody>
       </p:sp>
@@ -4169,7 +4399,6 @@
               <a:rPr lang="en-US" dirty="0"/>
               <a:t>Edit</a:t>
             </a:r>
-            <a:endParaRPr lang="en-US" dirty="0"/>
           </a:p>
         </p:txBody>
       </p:sp>
@@ -4247,7 +4476,6 @@
               <a:rPr lang="en-US" dirty="0"/>
               <a:t>Click to edit</a:t>
             </a:r>
-            <a:endParaRPr lang="en-US" dirty="0"/>
           </a:p>
         </p:txBody>
       </p:sp>
@@ -4306,6 +4534,7 @@
           <a:p>
             <a:fld id="{8A758EFE-665F-4341-B5B8-2DAEADA52F6C}" type="slidenum">
               <a:rPr lang="en-US" smtClean="0"/>
+              <a:t>‹#›</a:t>
             </a:fld>
             <a:endParaRPr lang="en-US" dirty="0"/>
           </a:p>
@@ -4344,7 +4573,6 @@
               <a:rPr lang="en-US" dirty="0"/>
               <a:t>Click to edit Master title style</a:t>
             </a:r>
-            <a:endParaRPr lang="en-US" dirty="0"/>
           </a:p>
         </p:txBody>
       </p:sp>
@@ -4553,7 +4781,6 @@
               <a:rPr lang="en-US" dirty="0"/>
               <a:t>Click to edit Master text styles</a:t>
             </a:r>
-            <a:endParaRPr lang="en-US" dirty="0"/>
           </a:p>
           <a:p>
             <a:pPr lvl="1"/>
@@ -4561,7 +4788,6 @@
               <a:rPr lang="en-US" dirty="0"/>
               <a:t>Second level</a:t>
             </a:r>
-            <a:endParaRPr lang="en-US" dirty="0"/>
           </a:p>
           <a:p>
             <a:pPr lvl="2"/>
@@ -4569,7 +4795,6 @@
               <a:rPr lang="en-US" dirty="0"/>
               <a:t>Third level</a:t>
             </a:r>
-            <a:endParaRPr lang="en-US" dirty="0"/>
           </a:p>
           <a:p>
             <a:pPr lvl="3"/>
@@ -4577,7 +4802,6 @@
               <a:rPr lang="en-US" dirty="0"/>
               <a:t>Fourth level</a:t>
             </a:r>
-            <a:endParaRPr lang="en-US" dirty="0"/>
           </a:p>
           <a:p>
             <a:pPr lvl="4"/>
@@ -4585,7 +4809,6 @@
               <a:rPr lang="en-US" dirty="0"/>
               <a:t>Fifth level</a:t>
             </a:r>
-            <a:endParaRPr lang="en-US" dirty="0"/>
           </a:p>
         </p:txBody>
       </p:sp>
@@ -4644,6 +4867,7 @@
           <a:p>
             <a:fld id="{8A758EFE-665F-4341-B5B8-2DAEADA52F6C}" type="slidenum">
               <a:rPr lang="en-US" smtClean="0"/>
+              <a:t>‹#›</a:t>
             </a:fld>
             <a:endParaRPr lang="en-US" dirty="0"/>
           </a:p>
@@ -4804,6 +5028,7 @@
           <a:p>
             <a:fld id="{8A758EFE-665F-4341-B5B8-2DAEADA52F6C}" type="slidenum">
               <a:rPr lang="en-US" smtClean="0"/>
+              <a:t>‹#›</a:t>
             </a:fld>
             <a:endParaRPr lang="en-US" dirty="0"/>
           </a:p>
@@ -4846,7 +5071,6 @@
               <a:rPr lang="en-US" dirty="0"/>
               <a:t>CLICK TO EDIT MASTER TITLE STYLE</a:t>
             </a:r>
-            <a:endParaRPr lang="en-US" dirty="0"/>
           </a:p>
         </p:txBody>
       </p:sp>
@@ -5052,7 +5276,6 @@
               <a:rPr lang="en-US" dirty="0"/>
               <a:t>Click to edit Master text styles</a:t>
             </a:r>
-            <a:endParaRPr lang="en-US" dirty="0"/>
           </a:p>
         </p:txBody>
       </p:sp>
@@ -5092,7 +5315,6 @@
               <a:rPr lang="en-US" dirty="0"/>
               <a:t>CLICK TO EDIT MASTER TEXT STYLE</a:t>
             </a:r>
-            <a:endParaRPr lang="en-US" dirty="0"/>
           </a:p>
         </p:txBody>
       </p:sp>
@@ -5148,7 +5370,6 @@
               <a:rPr lang="en-US" dirty="0"/>
               <a:t>CLICK TO EDIT MASTER TEXT STYLE</a:t>
             </a:r>
-            <a:endParaRPr lang="en-US" dirty="0"/>
           </a:p>
         </p:txBody>
       </p:sp>
@@ -5403,7 +5624,6 @@
               <a:rPr lang="en-US" dirty="0"/>
               <a:t>Click to edit Master text styles</a:t>
             </a:r>
-            <a:endParaRPr lang="en-US" dirty="0"/>
           </a:p>
         </p:txBody>
       </p:sp>
@@ -5437,6 +5657,7 @@
           <a:p>
             <a:fld id="{8A758EFE-665F-4341-B5B8-2DAEADA52F6C}" type="slidenum">
               <a:rPr lang="en-US" smtClean="0"/>
+              <a:t>‹#›</a:t>
             </a:fld>
             <a:endParaRPr lang="en-US" dirty="0"/>
           </a:p>
@@ -5796,7 +6017,6 @@
               <a:rPr lang="en-US" dirty="0"/>
               <a:t>Click to edit Master text styles</a:t>
             </a:r>
-            <a:endParaRPr lang="en-US" dirty="0"/>
           </a:p>
         </p:txBody>
       </p:sp>
@@ -5830,6 +6050,7 @@
           <a:p>
             <a:fld id="{8A758EFE-665F-4341-B5B8-2DAEADA52F6C}" type="slidenum">
               <a:rPr lang="en-US" smtClean="0"/>
+              <a:t>‹#›</a:t>
             </a:fld>
             <a:endParaRPr lang="en-US" dirty="0"/>
           </a:p>
@@ -6236,7 +6457,6 @@
               <a:rPr lang="en-US" dirty="0"/>
               <a:t>Click to edit Master text styles</a:t>
             </a:r>
-            <a:endParaRPr lang="en-US" dirty="0"/>
           </a:p>
         </p:txBody>
       </p:sp>
@@ -6270,6 +6490,7 @@
           <a:p>
             <a:fld id="{8A758EFE-665F-4341-B5B8-2DAEADA52F6C}" type="slidenum">
               <a:rPr lang="en-US" smtClean="0"/>
+              <a:t>‹#›</a:t>
             </a:fld>
             <a:endParaRPr lang="en-US" dirty="0"/>
           </a:p>
@@ -6539,7 +6760,6 @@
               <a:rPr lang="en-US" dirty="0"/>
               <a:t>Click to edit Master title style</a:t>
             </a:r>
-            <a:endParaRPr lang="en-US" dirty="0"/>
           </a:p>
         </p:txBody>
       </p:sp>
@@ -6658,7 +6878,6 @@
               <a:rPr lang="en-US" dirty="0"/>
               <a:t>Click to edit Master subtitle style</a:t>
             </a:r>
-            <a:endParaRPr lang="en-US" dirty="0"/>
           </a:p>
         </p:txBody>
       </p:sp>
@@ -6914,6 +7133,7 @@
           <a:p>
             <a:fld id="{8A758EFE-665F-4341-B5B8-2DAEADA52F6C}" type="slidenum">
               <a:rPr lang="en-US" smtClean="0"/>
+              <a:t>‹#›</a:t>
             </a:fld>
             <a:endParaRPr lang="en-US" dirty="0"/>
           </a:p>
@@ -6952,7 +7172,6 @@
               <a:rPr lang="en-US" dirty="0"/>
               <a:t>Click to edit Master title style</a:t>
             </a:r>
-            <a:endParaRPr lang="en-US" dirty="0"/>
           </a:p>
         </p:txBody>
       </p:sp>
@@ -6981,7 +7200,6 @@
               <a:rPr lang="en-US" dirty="0"/>
               <a:t>Click to edit Master text styles</a:t>
             </a:r>
-            <a:endParaRPr lang="en-US" dirty="0"/>
           </a:p>
           <a:p>
             <a:pPr lvl="1"/>
@@ -6989,7 +7207,6 @@
               <a:rPr lang="en-US" dirty="0"/>
               <a:t>Second level</a:t>
             </a:r>
-            <a:endParaRPr lang="en-US" dirty="0"/>
           </a:p>
           <a:p>
             <a:pPr lvl="2"/>
@@ -6997,7 +7214,6 @@
               <a:rPr lang="en-US" dirty="0"/>
               <a:t>Third level</a:t>
             </a:r>
-            <a:endParaRPr lang="en-US" dirty="0"/>
           </a:p>
           <a:p>
             <a:pPr lvl="3"/>
@@ -7005,7 +7221,6 @@
               <a:rPr lang="en-US" dirty="0"/>
               <a:t>Fourth level</a:t>
             </a:r>
-            <a:endParaRPr lang="en-US" dirty="0"/>
           </a:p>
           <a:p>
             <a:pPr lvl="4"/>
@@ -7013,7 +7228,6 @@
               <a:rPr lang="en-US" dirty="0"/>
               <a:t>Fifth level</a:t>
             </a:r>
-            <a:endParaRPr lang="en-US" dirty="0"/>
           </a:p>
         </p:txBody>
       </p:sp>
@@ -7270,6 +7484,7 @@
           <a:p>
             <a:fld id="{8A758EFE-665F-4341-B5B8-2DAEADA52F6C}" type="slidenum">
               <a:rPr lang="en-US" smtClean="0"/>
+              <a:t>‹#›</a:t>
             </a:fld>
             <a:endParaRPr lang="en-US" dirty="0"/>
           </a:p>
@@ -7308,7 +7523,6 @@
               <a:rPr lang="en-US" dirty="0"/>
               <a:t>Click to edit Master title style</a:t>
             </a:r>
-            <a:endParaRPr lang="en-US" dirty="0"/>
           </a:p>
         </p:txBody>
       </p:sp>
@@ -7337,7 +7551,6 @@
               <a:rPr lang="en-US" dirty="0"/>
               <a:t>Click to edit Master text styles</a:t>
             </a:r>
-            <a:endParaRPr lang="en-US" dirty="0"/>
           </a:p>
           <a:p>
             <a:pPr lvl="1"/>
@@ -7345,7 +7558,6 @@
               <a:rPr lang="en-US" dirty="0"/>
               <a:t>Second level</a:t>
             </a:r>
-            <a:endParaRPr lang="en-US" dirty="0"/>
           </a:p>
           <a:p>
             <a:pPr lvl="2"/>
@@ -7353,7 +7565,6 @@
               <a:rPr lang="en-US" dirty="0"/>
               <a:t>Third level</a:t>
             </a:r>
-            <a:endParaRPr lang="en-US" dirty="0"/>
           </a:p>
           <a:p>
             <a:pPr lvl="3"/>
@@ -7361,7 +7572,6 @@
               <a:rPr lang="en-US" dirty="0"/>
               <a:t>Fourth level</a:t>
             </a:r>
-            <a:endParaRPr lang="en-US" dirty="0"/>
           </a:p>
           <a:p>
             <a:pPr lvl="4"/>
@@ -7369,7 +7579,6 @@
               <a:rPr lang="en-US" dirty="0"/>
               <a:t>Fifth level</a:t>
             </a:r>
-            <a:endParaRPr lang="en-US" dirty="0"/>
           </a:p>
         </p:txBody>
       </p:sp>
@@ -7638,7 +7847,6 @@
               <a:rPr lang="en-US" dirty="0"/>
               <a:t>Click to edit Master title style</a:t>
             </a:r>
-            <a:endParaRPr lang="en-US" dirty="0"/>
           </a:p>
         </p:txBody>
       </p:sp>
@@ -7667,7 +7875,6 @@
               <a:rPr lang="en-US" dirty="0"/>
               <a:t>Click to edit Master text styles</a:t>
             </a:r>
-            <a:endParaRPr lang="en-US" dirty="0"/>
           </a:p>
           <a:p>
             <a:pPr lvl="1"/>
@@ -7675,7 +7882,6 @@
               <a:rPr lang="en-US" dirty="0"/>
               <a:t>Second level</a:t>
             </a:r>
-            <a:endParaRPr lang="en-US" dirty="0"/>
           </a:p>
           <a:p>
             <a:pPr lvl="2"/>
@@ -7683,7 +7889,6 @@
               <a:rPr lang="en-US" dirty="0"/>
               <a:t>Third level</a:t>
             </a:r>
-            <a:endParaRPr lang="en-US" dirty="0"/>
           </a:p>
           <a:p>
             <a:pPr lvl="3"/>
@@ -7691,7 +7896,6 @@
               <a:rPr lang="en-US" dirty="0"/>
               <a:t>Fourth level</a:t>
             </a:r>
-            <a:endParaRPr lang="en-US" dirty="0"/>
           </a:p>
           <a:p>
             <a:pPr lvl="4"/>
@@ -7699,7 +7903,6 @@
               <a:rPr lang="en-US" dirty="0"/>
               <a:t>Fifth level</a:t>
             </a:r>
-            <a:endParaRPr lang="en-US" dirty="0"/>
           </a:p>
         </p:txBody>
       </p:sp>
@@ -7733,6 +7936,7 @@
           <a:p>
             <a:fld id="{8A758EFE-665F-4341-B5B8-2DAEADA52F6C}" type="slidenum">
               <a:rPr lang="en-US" smtClean="0"/>
+              <a:t>‹#›</a:t>
             </a:fld>
             <a:endParaRPr lang="en-US" dirty="0"/>
           </a:p>
@@ -8040,7 +8244,6 @@
               <a:rPr lang="en-US" dirty="0"/>
               <a:t>Click to edit Master text styles</a:t>
             </a:r>
-            <a:endParaRPr lang="en-US" dirty="0"/>
           </a:p>
         </p:txBody>
       </p:sp>
@@ -8099,7 +8302,6 @@
               <a:rPr lang="en-US" dirty="0"/>
               <a:t>Click to edit Master text styles</a:t>
             </a:r>
-            <a:endParaRPr lang="en-US" dirty="0"/>
           </a:p>
           <a:p>
             <a:pPr lvl="1"/>
@@ -8107,7 +8309,6 @@
               <a:rPr lang="en-US" dirty="0"/>
               <a:t>Second level</a:t>
             </a:r>
-            <a:endParaRPr lang="en-US" dirty="0"/>
           </a:p>
           <a:p>
             <a:pPr lvl="2"/>
@@ -8115,7 +8316,6 @@
               <a:rPr lang="en-US" dirty="0"/>
               <a:t>Third level</a:t>
             </a:r>
-            <a:endParaRPr lang="en-US" dirty="0"/>
           </a:p>
           <a:p>
             <a:pPr lvl="3"/>
@@ -8123,7 +8323,6 @@
               <a:rPr lang="en-US" dirty="0"/>
               <a:t>Fourth level</a:t>
             </a:r>
-            <a:endParaRPr lang="en-US" dirty="0"/>
           </a:p>
           <a:p>
             <a:pPr lvl="4"/>
@@ -8131,7 +8330,6 @@
               <a:rPr lang="en-US" dirty="0"/>
               <a:t>Fifth level</a:t>
             </a:r>
-            <a:endParaRPr lang="en-US" dirty="0"/>
           </a:p>
         </p:txBody>
       </p:sp>
@@ -8165,6 +8363,7 @@
           <a:p>
             <a:fld id="{8A758EFE-665F-4341-B5B8-2DAEADA52F6C}" type="slidenum">
               <a:rPr lang="en-US" smtClean="0"/>
+              <a:t>‹#›</a:t>
             </a:fld>
             <a:endParaRPr lang="en-US" dirty="0"/>
           </a:p>
@@ -8203,7 +8402,6 @@
               <a:rPr lang="en-US" dirty="0"/>
               <a:t>Click to edit Master title style</a:t>
             </a:r>
-            <a:endParaRPr lang="en-US" dirty="0"/>
           </a:p>
         </p:txBody>
       </p:sp>
@@ -8540,7 +8738,6 @@
               <a:rPr lang="en-US" dirty="0"/>
               <a:t>Click to edit Master text styles</a:t>
             </a:r>
-            <a:endParaRPr lang="en-US" dirty="0"/>
           </a:p>
         </p:txBody>
       </p:sp>
@@ -8599,7 +8796,6 @@
               <a:rPr lang="en-US" dirty="0"/>
               <a:t>Click to edit Master text styles</a:t>
             </a:r>
-            <a:endParaRPr lang="en-US" dirty="0"/>
           </a:p>
           <a:p>
             <a:pPr lvl="1"/>
@@ -8607,7 +8803,6 @@
               <a:rPr lang="en-US" dirty="0"/>
               <a:t>Second level</a:t>
             </a:r>
-            <a:endParaRPr lang="en-US" dirty="0"/>
           </a:p>
           <a:p>
             <a:pPr lvl="2"/>
@@ -8615,7 +8810,6 @@
               <a:rPr lang="en-US" dirty="0"/>
               <a:t>Third level</a:t>
             </a:r>
-            <a:endParaRPr lang="en-US" dirty="0"/>
           </a:p>
           <a:p>
             <a:pPr lvl="3"/>
@@ -8623,7 +8817,6 @@
               <a:rPr lang="en-US" dirty="0"/>
               <a:t>Fourth level</a:t>
             </a:r>
-            <a:endParaRPr lang="en-US" dirty="0"/>
           </a:p>
           <a:p>
             <a:pPr lvl="4"/>
@@ -8631,7 +8824,6 @@
               <a:rPr lang="en-US" dirty="0"/>
               <a:t>Fifth level</a:t>
             </a:r>
-            <a:endParaRPr lang="en-US" dirty="0"/>
           </a:p>
         </p:txBody>
       </p:sp>
@@ -8665,6 +8857,7 @@
           <a:p>
             <a:fld id="{8A758EFE-665F-4341-B5B8-2DAEADA52F6C}" type="slidenum">
               <a:rPr lang="en-US" smtClean="0"/>
+              <a:t>‹#›</a:t>
             </a:fld>
             <a:endParaRPr lang="en-US" dirty="0"/>
           </a:p>
@@ -8703,7 +8896,6 @@
               <a:rPr lang="en-US" dirty="0"/>
               <a:t>Click to edit Master title style</a:t>
             </a:r>
-            <a:endParaRPr lang="en-US" dirty="0"/>
           </a:p>
         </p:txBody>
       </p:sp>
@@ -8937,7 +9129,6 @@
               <a:rPr lang="en-US" dirty="0"/>
               <a:t>Click to edit Master text styles</a:t>
             </a:r>
-            <a:endParaRPr lang="en-US" dirty="0"/>
           </a:p>
           <a:p>
             <a:pPr lvl="1"/>
@@ -8945,7 +9136,6 @@
               <a:rPr lang="en-US" dirty="0"/>
               <a:t>Second level</a:t>
             </a:r>
-            <a:endParaRPr lang="en-US" dirty="0"/>
           </a:p>
           <a:p>
             <a:pPr lvl="2"/>
@@ -8953,7 +9143,6 @@
               <a:rPr lang="en-US" dirty="0"/>
               <a:t>Third level</a:t>
             </a:r>
-            <a:endParaRPr lang="en-US" dirty="0"/>
           </a:p>
           <a:p>
             <a:pPr lvl="3"/>
@@ -8961,7 +9150,6 @@
               <a:rPr lang="en-US" dirty="0"/>
               <a:t>Fourth level</a:t>
             </a:r>
-            <a:endParaRPr lang="en-US" dirty="0"/>
           </a:p>
           <a:p>
             <a:pPr lvl="4"/>
@@ -8969,7 +9157,6 @@
               <a:rPr lang="en-US" dirty="0"/>
               <a:t>Fifth level</a:t>
             </a:r>
-            <a:endParaRPr lang="en-US" dirty="0"/>
           </a:p>
         </p:txBody>
       </p:sp>
@@ -9028,7 +9215,6 @@
               <a:rPr lang="en-US" dirty="0"/>
               <a:t>Click to edit Master text styles</a:t>
             </a:r>
-            <a:endParaRPr lang="en-US" dirty="0"/>
           </a:p>
           <a:p>
             <a:pPr lvl="1"/>
@@ -9036,7 +9222,6 @@
               <a:rPr lang="en-US" dirty="0"/>
               <a:t>Second level</a:t>
             </a:r>
-            <a:endParaRPr lang="en-US" dirty="0"/>
           </a:p>
           <a:p>
             <a:pPr lvl="2"/>
@@ -9044,7 +9229,6 @@
               <a:rPr lang="en-US" dirty="0"/>
               <a:t>Third level</a:t>
             </a:r>
-            <a:endParaRPr lang="en-US" dirty="0"/>
           </a:p>
           <a:p>
             <a:pPr lvl="3"/>
@@ -9052,7 +9236,6 @@
               <a:rPr lang="en-US" dirty="0"/>
               <a:t>Fourth level</a:t>
             </a:r>
-            <a:endParaRPr lang="en-US" dirty="0"/>
           </a:p>
           <a:p>
             <a:pPr lvl="4"/>
@@ -9060,7 +9243,6 @@
               <a:rPr lang="en-US" dirty="0"/>
               <a:t>Fifth level</a:t>
             </a:r>
-            <a:endParaRPr lang="en-US" dirty="0"/>
           </a:p>
         </p:txBody>
       </p:sp>
@@ -9094,6 +9276,7 @@
           <a:p>
             <a:fld id="{8A758EFE-665F-4341-B5B8-2DAEADA52F6C}" type="slidenum">
               <a:rPr lang="en-US" smtClean="0"/>
+              <a:t>‹#›</a:t>
             </a:fld>
             <a:endParaRPr lang="en-US" dirty="0"/>
           </a:p>
@@ -9132,7 +9315,6 @@
               <a:rPr lang="en-US" dirty="0"/>
               <a:t>Click to edit Master title style</a:t>
             </a:r>
-            <a:endParaRPr lang="en-US" dirty="0"/>
           </a:p>
         </p:txBody>
       </p:sp>
@@ -9377,7 +9559,6 @@
               <a:rPr lang="en-US" dirty="0"/>
               <a:t>Click to edit Master text styles</a:t>
             </a:r>
-            <a:endParaRPr lang="en-US" dirty="0"/>
           </a:p>
         </p:txBody>
       </p:sp>
@@ -9436,7 +9617,6 @@
               <a:rPr lang="en-US" dirty="0"/>
               <a:t>Click to edit Master text styles</a:t>
             </a:r>
-            <a:endParaRPr lang="en-US" dirty="0"/>
           </a:p>
           <a:p>
             <a:pPr lvl="1"/>
@@ -9444,7 +9624,6 @@
               <a:rPr lang="en-US" dirty="0"/>
               <a:t>Second level</a:t>
             </a:r>
-            <a:endParaRPr lang="en-US" dirty="0"/>
           </a:p>
           <a:p>
             <a:pPr lvl="2"/>
@@ -9452,7 +9631,6 @@
               <a:rPr lang="en-US" dirty="0"/>
               <a:t>Third level</a:t>
             </a:r>
-            <a:endParaRPr lang="en-US" dirty="0"/>
           </a:p>
           <a:p>
             <a:pPr lvl="3"/>
@@ -9460,7 +9638,6 @@
               <a:rPr lang="en-US" dirty="0"/>
               <a:t>Fourth level</a:t>
             </a:r>
-            <a:endParaRPr lang="en-US" dirty="0"/>
           </a:p>
           <a:p>
             <a:pPr lvl="4"/>
@@ -9468,7 +9645,6 @@
               <a:rPr lang="en-US" dirty="0"/>
               <a:t>Fifth level</a:t>
             </a:r>
-            <a:endParaRPr lang="en-US" dirty="0"/>
           </a:p>
         </p:txBody>
       </p:sp>
@@ -9538,7 +9714,6 @@
               <a:rPr lang="en-US" dirty="0"/>
               <a:t>Click to edit Master text styles</a:t>
             </a:r>
-            <a:endParaRPr lang="en-US" dirty="0"/>
           </a:p>
         </p:txBody>
       </p:sp>
@@ -9597,7 +9772,6 @@
               <a:rPr lang="en-US" dirty="0"/>
               <a:t>Click to edit Master text styles</a:t>
             </a:r>
-            <a:endParaRPr lang="en-US" dirty="0"/>
           </a:p>
           <a:p>
             <a:pPr lvl="1"/>
@@ -9605,7 +9779,6 @@
               <a:rPr lang="en-US" dirty="0"/>
               <a:t>Second level</a:t>
             </a:r>
-            <a:endParaRPr lang="en-US" dirty="0"/>
           </a:p>
           <a:p>
             <a:pPr lvl="2"/>
@@ -9613,7 +9786,6 @@
               <a:rPr lang="en-US" dirty="0"/>
               <a:t>Third level</a:t>
             </a:r>
-            <a:endParaRPr lang="en-US" dirty="0"/>
           </a:p>
           <a:p>
             <a:pPr lvl="3"/>
@@ -9621,7 +9793,6 @@
               <a:rPr lang="en-US" dirty="0"/>
               <a:t>Fourth level</a:t>
             </a:r>
-            <a:endParaRPr lang="en-US" dirty="0"/>
           </a:p>
           <a:p>
             <a:pPr lvl="4"/>
@@ -9629,7 +9800,6 @@
               <a:rPr lang="en-US" dirty="0"/>
               <a:t>Fifth level</a:t>
             </a:r>
-            <a:endParaRPr lang="en-US" dirty="0"/>
           </a:p>
         </p:txBody>
       </p:sp>
@@ -9663,6 +9833,7 @@
           <a:p>
             <a:fld id="{8A758EFE-665F-4341-B5B8-2DAEADA52F6C}" type="slidenum">
               <a:rPr lang="en-US" smtClean="0"/>
+              <a:t>‹#›</a:t>
             </a:fld>
             <a:endParaRPr lang="en-US" dirty="0"/>
           </a:p>
@@ -9701,7 +9872,6 @@
               <a:rPr lang="en-US" dirty="0"/>
               <a:t>Click to edit Master title style</a:t>
             </a:r>
-            <a:endParaRPr lang="en-US" dirty="0"/>
           </a:p>
         </p:txBody>
       </p:sp>
@@ -9892,7 +10062,7 @@
           <p:nvPr userDrawn="1"/>
         </p:nvPicPr>
         <p:blipFill>
-          <a:blip r:embed="rId18">
+          <a:blip r:embed="rId19">
             <a:extLst>
               <a:ext uri="{28A0092B-C50C-407E-A947-70E740481C1C}">
                 <a14:useLocalDpi xmlns:a14="http://schemas.microsoft.com/office/drawing/2010/main" val="0"/>
@@ -9943,7 +10113,6 @@
               <a:rPr lang="en-US" dirty="0"/>
               <a:t>Click to edit Master text styles</a:t>
             </a:r>
-            <a:endParaRPr lang="en-US" dirty="0"/>
           </a:p>
           <a:p>
             <a:pPr lvl="1"/>
@@ -9951,7 +10120,6 @@
               <a:rPr lang="en-US" dirty="0"/>
               <a:t>Second level</a:t>
             </a:r>
-            <a:endParaRPr lang="en-US" dirty="0"/>
           </a:p>
           <a:p>
             <a:pPr lvl="2"/>
@@ -9959,7 +10127,6 @@
               <a:rPr lang="en-US" dirty="0"/>
               <a:t>Third level</a:t>
             </a:r>
-            <a:endParaRPr lang="en-US" dirty="0"/>
           </a:p>
           <a:p>
             <a:pPr lvl="3"/>
@@ -9967,7 +10134,6 @@
               <a:rPr lang="en-US" dirty="0"/>
               <a:t>Fourth level</a:t>
             </a:r>
-            <a:endParaRPr lang="en-US" dirty="0"/>
           </a:p>
           <a:p>
             <a:pPr lvl="4"/>
@@ -9975,7 +10141,6 @@
               <a:rPr lang="en-US" dirty="0"/>
               <a:t>Fifth level</a:t>
             </a:r>
-            <a:endParaRPr lang="en-US" dirty="0"/>
           </a:p>
         </p:txBody>
       </p:sp>
@@ -10055,6 +10220,7 @@
           <a:p>
             <a:fld id="{8A758EFE-665F-4341-B5B8-2DAEADA52F6C}" type="slidenum">
               <a:rPr lang="en-US" smtClean="0"/>
+              <a:t>‹#›</a:t>
             </a:fld>
             <a:endParaRPr lang="en-US" dirty="0"/>
           </a:p>
@@ -10089,7 +10255,6 @@
               <a:rPr lang="en-US" dirty="0"/>
               <a:t>Click to edit Master title style</a:t>
             </a:r>
-            <a:endParaRPr lang="en-US" dirty="0"/>
           </a:p>
         </p:txBody>
       </p:sp>
@@ -10482,7 +10647,6 @@
               <a:rPr lang="en-US" dirty="0"/>
               <a:t> Du</a:t>
             </a:r>
-            <a:endParaRPr lang="en-US" dirty="0"/>
           </a:p>
         </p:txBody>
       </p:sp>
@@ -10528,6 +10692,7 @@
           <a:p>
             <a:fld id="{8A758EFE-665F-4341-B5B8-2DAEADA52F6C}" type="slidenum">
               <a:rPr lang="en-US" smtClean="0"/>
+              <a:t>10</a:t>
             </a:fld>
             <a:endParaRPr lang="en-US" dirty="0"/>
           </a:p>
@@ -10772,11 +10937,6 @@
               </a:rPr>
               <a:t>Shape Distribution in Most Reported American Cities</a:t>
             </a:r>
-            <a:endParaRPr lang="en-US" dirty="0">
-              <a:solidFill>
-                <a:schemeClr val="accent3"/>
-              </a:solidFill>
-            </a:endParaRPr>
           </a:p>
           <a:p>
             <a:endParaRPr lang="en-US" sz="1600" dirty="0"/>
@@ -10790,7 +10950,6 @@
               <a:rPr lang="en-US" sz="1400" dirty="0"/>
               <a:t>Different shape rankings among cities</a:t>
             </a:r>
-            <a:endParaRPr lang="en-US" sz="1400" dirty="0"/>
           </a:p>
           <a:p>
             <a:pPr marL="285750" indent="-285750">
@@ -10801,7 +10960,6 @@
               <a:rPr lang="en-US" sz="1400" dirty="0"/>
               <a:t>Distribution of shapes not tied to a single region</a:t>
             </a:r>
-            <a:endParaRPr lang="en-US" sz="1400" dirty="0"/>
           </a:p>
           <a:p>
             <a:pPr marL="285750" indent="-285750">
@@ -10821,7 +10979,7 @@
           <p:nvPr/>
         </p:nvPicPr>
         <p:blipFill>
-          <a:blip r:embed="rId1">
+          <a:blip r:embed="rId2">
             <a:extLst>
               <a:ext uri="{28A0092B-C50C-407E-A947-70E740481C1C}">
                 <a14:useLocalDpi xmlns:a14="http://schemas.microsoft.com/office/drawing/2010/main" val="0"/>
@@ -10895,6 +11053,7 @@
           <a:p>
             <a:fld id="{8A758EFE-665F-4341-B5B8-2DAEADA52F6C}" type="slidenum">
               <a:rPr lang="en-US" smtClean="0"/>
+              <a:t>11</a:t>
             </a:fld>
             <a:endParaRPr lang="en-US" dirty="0"/>
           </a:p>
@@ -11118,7 +11277,7 @@
           <p:nvPr/>
         </p:nvPicPr>
         <p:blipFill rotWithShape="1">
-          <a:blip r:embed="rId1">
+          <a:blip r:embed="rId3">
             <a:extLst>
               <a:ext uri="{28A0092B-C50C-407E-A947-70E740481C1C}">
                 <a14:useLocalDpi xmlns:a14="http://schemas.microsoft.com/office/drawing/2010/main" val="0"/>
@@ -11180,6 +11339,8 @@
               </a:rPr>
               <a:t>24-Hour Patterns for Top 5 Shapes</a:t>
             </a:r>
+          </a:p>
+          <a:p>
             <a:endParaRPr lang="en-US" dirty="0">
               <a:solidFill>
                 <a:schemeClr val="accent3"/>
@@ -11194,13 +11355,6 @@
             </a:endParaRPr>
           </a:p>
           <a:p>
-            <a:endParaRPr lang="en-US" dirty="0">
-              <a:solidFill>
-                <a:schemeClr val="accent3"/>
-              </a:solidFill>
-            </a:endParaRPr>
-          </a:p>
-          <a:p>
             <a:pPr marL="285750" indent="-285750">
               <a:buFontTx/>
               <a:buChar char="-"/>
@@ -11209,7 +11363,6 @@
               <a:rPr lang="en-US" sz="1400" dirty="0"/>
               <a:t>Shows shapes behave differently across hours: ”light" has largest difference between night and afternoon, “circle” and ”triangle” remain flat</a:t>
             </a:r>
-            <a:endParaRPr lang="en-US" sz="1400" dirty="0"/>
           </a:p>
         </p:txBody>
       </p:sp>
@@ -11255,6 +11408,7 @@
           <a:p>
             <a:fld id="{8A758EFE-665F-4341-B5B8-2DAEADA52F6C}" type="slidenum">
               <a:rPr lang="en-US" smtClean="0"/>
+              <a:t>12</a:t>
             </a:fld>
             <a:endParaRPr lang="en-US" dirty="0"/>
           </a:p>
@@ -11300,7 +11454,7 @@
           <p:nvPr/>
         </p:nvPicPr>
         <p:blipFill rotWithShape="1">
-          <a:blip r:embed="rId1">
+          <a:blip r:embed="rId3">
             <a:extLst>
               <a:ext uri="{28A0092B-C50C-407E-A947-70E740481C1C}">
                 <a14:useLocalDpi xmlns:a14="http://schemas.microsoft.com/office/drawing/2010/main" val="0"/>
@@ -11362,11 +11516,6 @@
               </a:rPr>
               <a:t>Shape Composition by Time of Day</a:t>
             </a:r>
-            <a:endParaRPr lang="en-US" dirty="0">
-              <a:solidFill>
-                <a:schemeClr val="accent3"/>
-              </a:solidFill>
-            </a:endParaRPr>
           </a:p>
           <a:p>
             <a:endParaRPr lang="en-US" sz="1400" dirty="0">
@@ -11384,7 +11533,6 @@
               <a:rPr lang="en-US" sz="1400" dirty="0"/>
               <a:t>Confirms nighttime dominates reporting for all shapes</a:t>
             </a:r>
-            <a:endParaRPr lang="en-US" sz="1400" dirty="0"/>
           </a:p>
           <a:p>
             <a:pPr marL="285750" indent="-285750">
@@ -11395,7 +11543,6 @@
               <a:rPr lang="en-US" sz="1400" dirty="0"/>
               <a:t>Shows unequal distribution</a:t>
             </a:r>
-            <a:endParaRPr lang="en-US" sz="1400" dirty="0"/>
           </a:p>
           <a:p>
             <a:pPr marL="285750" indent="-285750">
@@ -11464,6 +11611,7 @@
           <a:p>
             <a:fld id="{8A758EFE-665F-4341-B5B8-2DAEADA52F6C}" type="slidenum">
               <a:rPr lang="en-US" smtClean="0"/>
+              <a:t>13</a:t>
             </a:fld>
             <a:endParaRPr lang="en-US" dirty="0"/>
           </a:p>
@@ -11509,7 +11657,7 @@
           <p:nvPr/>
         </p:nvPicPr>
         <p:blipFill>
-          <a:blip r:embed="rId1">
+          <a:blip r:embed="rId2">
             <a:extLst>
               <a:ext uri="{28A0092B-C50C-407E-A947-70E740481C1C}">
                 <a14:useLocalDpi xmlns:a14="http://schemas.microsoft.com/office/drawing/2010/main" val="0"/>
@@ -11550,7 +11698,7 @@
           <p:nvPr/>
         </p:nvPicPr>
         <p:blipFill>
-          <a:blip r:embed="rId2">
+          <a:blip r:embed="rId3">
             <a:extLst>
               <a:ext uri="{28A0092B-C50C-407E-A947-70E740481C1C}">
                 <a14:useLocalDpi xmlns:a14="http://schemas.microsoft.com/office/drawing/2010/main" val="0"/>
@@ -11612,18 +11760,12 @@
               </a:rPr>
               <a:t>Duration vs Shape Analysis</a:t>
             </a:r>
-            <a:endParaRPr lang="en-US" dirty="0">
-              <a:solidFill>
-                <a:schemeClr val="accent3"/>
-              </a:solidFill>
-            </a:endParaRPr>
           </a:p>
           <a:p>
             <a:r>
               <a:rPr lang="en-US" sz="1600" dirty="0"/>
               <a:t>Boxplot showing median duration per shape; bar chart showing mean duration</a:t>
             </a:r>
-            <a:endParaRPr lang="en-US" sz="1600" dirty="0"/>
           </a:p>
           <a:p>
             <a:endParaRPr lang="en-US" sz="1600" dirty="0"/>
@@ -11637,7 +11779,6 @@
               <a:rPr lang="en-US" sz="1400" dirty="0"/>
               <a:t>Duration (seconds) has predictive signal</a:t>
             </a:r>
-            <a:endParaRPr lang="en-US" sz="1400" dirty="0"/>
           </a:p>
           <a:p>
             <a:pPr marL="285750" indent="-285750">
@@ -11648,7 +11789,6 @@
               <a:rPr lang="en-US" sz="1400" dirty="0"/>
               <a:t>Suggesting certain shapes are associated with longer/shorter sightings</a:t>
             </a:r>
-            <a:endParaRPr lang="en-US" sz="1400" dirty="0"/>
           </a:p>
           <a:p>
             <a:endParaRPr lang="en-US" sz="1600" dirty="0">
@@ -11676,10 +11816,17 @@
         <p:cNvGrpSpPr/>
         <p:nvPr/>
       </p:nvGrpSpPr>
-      <p:grpSpPr/>
-      <p:sp>
-        <p:nvSpPr>
-          <p:cNvPr id="2" name="标题 1"/>
+      <p:grpSpPr>
+        <a:xfrm>
+          <a:off x="0" y="0"/>
+          <a:ext cx="0" cy="0"/>
+          <a:chOff x="0" y="0"/>
+          <a:chExt cx="0" cy="0"/>
+        </a:xfrm>
+      </p:grpSpPr>
+      <p:sp>
+        <p:nvSpPr>
+          <p:cNvPr id="2" name="Title 1"/>
           <p:cNvSpPr>
             <a:spLocks noGrp="1"/>
           </p:cNvSpPr>
@@ -11690,18 +11837,48 @@
         <p:spPr/>
         <p:txBody>
           <a:bodyPr/>
-          <a:p>
-            <a:r>
-              <a:rPr lang="en-US" altLang="zh-CN"/>
-              <a:t>Baseline Models</a:t>
-            </a:r>
-            <a:endParaRPr lang="en-US" altLang="zh-CN"/>
-          </a:p>
-        </p:txBody>
-      </p:sp>
-      <p:sp>
-        <p:nvSpPr>
-          <p:cNvPr id="4" name="灯片编号占位符 3"/>
+          <a:lstStyle/>
+          <a:p>
+            <a:r>
+              <a:rPr lang="en-US"/>
+              <a:t>Handling imbalanced classes</a:t>
+            </a:r>
+          </a:p>
+        </p:txBody>
+      </p:sp>
+      <p:sp>
+        <p:nvSpPr>
+          <p:cNvPr id="3" name="Content Placeholder 2"/>
+          <p:cNvSpPr>
+            <a:spLocks noGrp="1"/>
+          </p:cNvSpPr>
+          <p:nvPr>
+            <p:ph sz="half" idx="1"/>
+          </p:nvPr>
+        </p:nvSpPr>
+        <p:spPr>
+          <a:xfrm>
+            <a:off x="873939" y="1032798"/>
+            <a:ext cx="4121501" cy="572405"/>
+          </a:xfrm>
+        </p:spPr>
+        <p:txBody>
+          <a:bodyPr/>
+          <a:lstStyle/>
+          <a:p>
+            <a:pPr marL="0" indent="0">
+              <a:buNone/>
+            </a:pPr>
+            <a:r>
+              <a:rPr lang="en-US" dirty="0"/>
+              <a:t>Oversampling with SMOTE</a:t>
+            </a:r>
+          </a:p>
+        </p:txBody>
+      </p:sp>
+      <p:sp>
+        <p:nvSpPr>
+          <p:cNvPr id="4" name="Slide Number Placeholder 3"/>
           <p:cNvSpPr>
             <a:spLocks noGrp="1"/>
           </p:cNvSpPr>
@@ -11712,9 +11889,11 @@
         <p:spPr/>
         <p:txBody>
           <a:bodyPr/>
+          <a:lstStyle/>
           <a:p>
             <a:fld id="{8A758EFE-665F-4341-B5B8-2DAEADA52F6C}" type="slidenum">
               <a:rPr lang="en-US" smtClean="0"/>
+              <a:t>14</a:t>
             </a:fld>
             <a:endParaRPr lang="en-US" dirty="0"/>
           </a:p>
@@ -11722,14 +11901,70 @@
       </p:sp>
       <p:sp>
         <p:nvSpPr>
-          <p:cNvPr id="8" name="TextBox 4"/>
+          <p:cNvPr id="5" name="Right Arrow 4">
+            <a:extLst>
+              <a:ext uri="{FF2B5EF4-FFF2-40B4-BE49-F238E27FC236}">
+                <a16:creationId xmlns:a16="http://schemas.microsoft.com/office/drawing/2014/main" id="{391C1521-3060-680E-9C60-E86EFEBF7B17}"/>
+              </a:ext>
+            </a:extLst>
+          </p:cNvPr>
+          <p:cNvSpPr/>
+          <p:nvPr/>
+        </p:nvSpPr>
+        <p:spPr>
+          <a:xfrm>
+            <a:off x="412694" y="1221897"/>
+            <a:ext cx="323681" cy="194209"/>
+          </a:xfrm>
+          <a:prstGeom prst="rightArrow">
+            <a:avLst/>
+          </a:prstGeom>
+          <a:solidFill>
+            <a:schemeClr val="accent1"/>
+          </a:solidFill>
+          <a:ln>
+            <a:noFill/>
+          </a:ln>
+        </p:spPr>
+        <p:style>
+          <a:lnRef idx="1">
+            <a:schemeClr val="accent1"/>
+          </a:lnRef>
+          <a:fillRef idx="3">
+            <a:schemeClr val="accent1"/>
+          </a:fillRef>
+          <a:effectRef idx="2">
+            <a:schemeClr val="accent1"/>
+          </a:effectRef>
+          <a:fontRef idx="minor">
+            <a:schemeClr val="lt1"/>
+          </a:fontRef>
+        </p:style>
+        <p:txBody>
+          <a:bodyPr rtlCol="0" anchor="ctr"/>
+          <a:lstStyle/>
+          <a:p>
+            <a:pPr algn="ctr"/>
+            <a:endParaRPr lang="en-CN"/>
+          </a:p>
+        </p:txBody>
+      </p:sp>
+      <p:sp>
+        <p:nvSpPr>
+          <p:cNvPr id="6" name="TextBox 5">
+            <a:extLst>
+              <a:ext uri="{FF2B5EF4-FFF2-40B4-BE49-F238E27FC236}">
+                <a16:creationId xmlns:a16="http://schemas.microsoft.com/office/drawing/2014/main" id="{D3412307-A5D2-5CA9-AF96-B8F0CF207AC8}"/>
+              </a:ext>
+            </a:extLst>
+          </p:cNvPr>
           <p:cNvSpPr txBox="1"/>
           <p:nvPr/>
         </p:nvSpPr>
         <p:spPr>
           <a:xfrm>
-            <a:off x="250825" y="884555"/>
-            <a:ext cx="3747135" cy="1353185"/>
+            <a:off x="310152" y="1559579"/>
+            <a:ext cx="7422738" cy="369332"/>
           </a:xfrm>
           <a:prstGeom prst="rect">
             <a:avLst/>
@@ -11737,138 +11972,28 @@
           <a:noFill/>
         </p:spPr>
         <p:txBody>
-          <a:bodyPr wrap="square" rtlCol="0">
-            <a:spAutoFit/>
-          </a:bodyPr>
-          <a:lstStyle/>
-          <a:p>
-            <a:pPr algn="l"/>
-            <a:r>
-              <a:rPr lang="en-US" altLang="zh-CN" dirty="0">
-                <a:solidFill>
-                  <a:schemeClr val="accent3"/>
-                </a:solidFill>
-              </a:rPr>
-              <a:t>Two Baseline Models</a:t>
-            </a:r>
-            <a:endParaRPr lang="en-US" dirty="0">
-              <a:solidFill>
-                <a:schemeClr val="accent3"/>
-              </a:solidFill>
-            </a:endParaRPr>
-          </a:p>
-          <a:p>
-            <a:pPr algn="l"/>
-            <a:r>
-              <a:rPr lang="en-US" altLang="zh-CN" sz="1600" dirty="0"/>
-              <a:t>Baseline 1: Majority-class model</a:t>
-            </a:r>
-            <a:endParaRPr lang="en-US" altLang="zh-CN" sz="1600" dirty="0"/>
-          </a:p>
-          <a:p>
-            <a:pPr algn="l"/>
-            <a:endParaRPr lang="en-US" altLang="zh-CN" sz="1600" dirty="0"/>
-          </a:p>
-          <a:p>
-            <a:pPr marL="285750" indent="-285750" algn="l">
-              <a:buFontTx/>
-              <a:buChar char="-"/>
-            </a:pPr>
-            <a:r>
-              <a:rPr lang="en-US" altLang="zh-CN" sz="1600" dirty="0">
-                <a:sym typeface="+mn-ea"/>
-              </a:rPr>
-              <a:t>Always predicts the most frequent shape (“light”)</a:t>
-            </a:r>
-            <a:endParaRPr lang="en-US" sz="1600" dirty="0">
-              <a:solidFill>
-                <a:schemeClr val="accent5"/>
-              </a:solidFill>
-            </a:endParaRPr>
-          </a:p>
-        </p:txBody>
-      </p:sp>
-      <p:sp>
-        <p:nvSpPr>
-          <p:cNvPr id="9" name="TextBox 4"/>
-          <p:cNvSpPr txBox="1"/>
-          <p:nvPr/>
-        </p:nvSpPr>
-        <p:spPr>
-          <a:xfrm>
-            <a:off x="4558851" y="1146138"/>
-            <a:ext cx="3902075" cy="829945"/>
-          </a:xfrm>
-          <a:prstGeom prst="rect">
-            <a:avLst/>
-          </a:prstGeom>
-          <a:noFill/>
-        </p:spPr>
-        <p:txBody>
           <a:bodyPr wrap="none" rtlCol="0">
             <a:spAutoFit/>
           </a:bodyPr>
           <a:lstStyle/>
           <a:p>
-            <a:pPr algn="l"/>
-            <a:r>
-              <a:rPr lang="en-US" altLang="zh-CN" sz="1600" dirty="0"/>
-              <a:t>Baseline 2: Multinomial Logistic Regression</a:t>
-            </a:r>
-            <a:endParaRPr lang="en-US" altLang="zh-CN" sz="1600" dirty="0"/>
-          </a:p>
-          <a:p>
-            <a:pPr algn="l"/>
-            <a:endParaRPr lang="en-US" altLang="zh-CN" sz="1600" dirty="0"/>
-          </a:p>
-          <a:p>
-            <a:pPr marL="285750" indent="-285750" algn="l">
-              <a:buFontTx/>
-              <a:buChar char="-"/>
-            </a:pPr>
-            <a:r>
-              <a:rPr lang="en-US" altLang="zh-CN" sz="1600" dirty="0">
-                <a:solidFill>
-                  <a:schemeClr val="accent5"/>
-                </a:solidFill>
-              </a:rPr>
-              <a:t>Linear classifier on all engineered features</a:t>
-            </a:r>
-            <a:endParaRPr lang="en-US" altLang="zh-CN" sz="1600" dirty="0">
-              <a:solidFill>
-                <a:schemeClr val="accent5"/>
-              </a:solidFill>
-            </a:endParaRPr>
+            <a:r>
+              <a:rPr lang="en-US" dirty="0"/>
+              <a:t>Oversample: synthetically generate the minority class to fix class imbalance</a:t>
+            </a:r>
+            <a:endParaRPr lang="en-CN" dirty="0"/>
           </a:p>
         </p:txBody>
       </p:sp>
       <p:pic>
         <p:nvPicPr>
-          <p:cNvPr id="10" name="图片 9"/>
-          <p:cNvPicPr>
-            <a:picLocks noChangeAspect="1"/>
-          </p:cNvPicPr>
-          <p:nvPr/>
-        </p:nvPicPr>
-        <p:blipFill>
-          <a:blip r:embed="rId1"/>
-          <a:stretch>
-            <a:fillRect/>
-          </a:stretch>
-        </p:blipFill>
-        <p:spPr>
-          <a:xfrm>
-            <a:off x="250825" y="2696210"/>
-            <a:ext cx="3935095" cy="554990"/>
-          </a:xfrm>
-          <a:prstGeom prst="rect">
-            <a:avLst/>
-          </a:prstGeom>
-        </p:spPr>
-      </p:pic>
-      <p:pic>
-        <p:nvPicPr>
-          <p:cNvPr id="11" name="图片 10"/>
+          <p:cNvPr id="8" name="Picture 7" descr="A close-up of a graph&#10;&#10;AI-generated content may be incorrect.">
+            <a:extLst>
+              <a:ext uri="{FF2B5EF4-FFF2-40B4-BE49-F238E27FC236}">
+                <a16:creationId xmlns:a16="http://schemas.microsoft.com/office/drawing/2014/main" id="{3CEA1C9A-55F6-8A75-16BF-3C89218C09FE}"/>
+              </a:ext>
+            </a:extLst>
+          </p:cNvPr>
           <p:cNvPicPr>
             <a:picLocks noChangeAspect="1"/>
           </p:cNvPicPr>
@@ -11882,8 +12007,8 @@
         </p:blipFill>
         <p:spPr>
           <a:xfrm>
-            <a:off x="4991100" y="2413000"/>
-            <a:ext cx="3037205" cy="838200"/>
+            <a:off x="477430" y="2131984"/>
+            <a:ext cx="7772400" cy="2546620"/>
           </a:xfrm>
           <a:prstGeom prst="rect">
             <a:avLst/>
@@ -11907,7 +12032,14 @@
         <p:cNvGrpSpPr/>
         <p:nvPr/>
       </p:nvGrpSpPr>
-      <p:grpSpPr/>
+      <p:grpSpPr>
+        <a:xfrm>
+          <a:off x="0" y="0"/>
+          <a:ext cx="0" cy="0"/>
+          <a:chOff x="0" y="0"/>
+          <a:chExt cx="0" cy="0"/>
+        </a:xfrm>
+      </p:grpSpPr>
       <p:sp>
         <p:nvSpPr>
           <p:cNvPr id="2" name="标题 1"/>
@@ -11921,12 +12053,12 @@
         <p:spPr/>
         <p:txBody>
           <a:bodyPr/>
+          <a:lstStyle/>
           <a:p>
             <a:r>
               <a:rPr lang="en-US" altLang="zh-CN"/>
-              <a:t>Modeling Pt.2</a:t>
-            </a:r>
-            <a:endParaRPr lang="en-US" altLang="zh-CN"/>
+              <a:t>Baseline Models</a:t>
+            </a:r>
           </a:p>
         </p:txBody>
       </p:sp>
@@ -11943,9 +12075,244 @@
         <p:spPr/>
         <p:txBody>
           <a:bodyPr/>
+          <a:lstStyle/>
           <a:p>
             <a:fld id="{8A758EFE-665F-4341-B5B8-2DAEADA52F6C}" type="slidenum">
               <a:rPr lang="en-US" smtClean="0"/>
+              <a:t>15</a:t>
+            </a:fld>
+            <a:endParaRPr lang="en-US" dirty="0"/>
+          </a:p>
+        </p:txBody>
+      </p:sp>
+      <p:sp>
+        <p:nvSpPr>
+          <p:cNvPr id="8" name="TextBox 4"/>
+          <p:cNvSpPr txBox="1"/>
+          <p:nvPr/>
+        </p:nvSpPr>
+        <p:spPr>
+          <a:xfrm>
+            <a:off x="250825" y="884555"/>
+            <a:ext cx="3747135" cy="1353185"/>
+          </a:xfrm>
+          <a:prstGeom prst="rect">
+            <a:avLst/>
+          </a:prstGeom>
+          <a:noFill/>
+        </p:spPr>
+        <p:txBody>
+          <a:bodyPr wrap="square" rtlCol="0">
+            <a:spAutoFit/>
+          </a:bodyPr>
+          <a:lstStyle/>
+          <a:p>
+            <a:pPr algn="l"/>
+            <a:r>
+              <a:rPr lang="en-US" altLang="zh-CN" dirty="0">
+                <a:solidFill>
+                  <a:schemeClr val="accent3"/>
+                </a:solidFill>
+              </a:rPr>
+              <a:t>Two Baseline Models</a:t>
+            </a:r>
+            <a:endParaRPr lang="en-US" dirty="0">
+              <a:solidFill>
+                <a:schemeClr val="accent3"/>
+              </a:solidFill>
+            </a:endParaRPr>
+          </a:p>
+          <a:p>
+            <a:pPr algn="l"/>
+            <a:r>
+              <a:rPr lang="en-US" altLang="zh-CN" sz="1600" dirty="0"/>
+              <a:t>Baseline 1: Majority-class model</a:t>
+            </a:r>
+          </a:p>
+          <a:p>
+            <a:pPr algn="l"/>
+            <a:endParaRPr lang="en-US" altLang="zh-CN" sz="1600" dirty="0"/>
+          </a:p>
+          <a:p>
+            <a:pPr marL="285750" indent="-285750" algn="l">
+              <a:buFontTx/>
+              <a:buChar char="-"/>
+            </a:pPr>
+            <a:r>
+              <a:rPr lang="en-US" altLang="zh-CN" sz="1600" dirty="0">
+                <a:sym typeface="+mn-ea"/>
+              </a:rPr>
+              <a:t>Always predicts the most frequent shape (“light”)</a:t>
+            </a:r>
+            <a:endParaRPr lang="en-US" sz="1600" dirty="0">
+              <a:solidFill>
+                <a:schemeClr val="accent5"/>
+              </a:solidFill>
+            </a:endParaRPr>
+          </a:p>
+        </p:txBody>
+      </p:sp>
+      <p:sp>
+        <p:nvSpPr>
+          <p:cNvPr id="9" name="TextBox 4"/>
+          <p:cNvSpPr txBox="1"/>
+          <p:nvPr/>
+        </p:nvSpPr>
+        <p:spPr>
+          <a:xfrm>
+            <a:off x="4558851" y="1146138"/>
+            <a:ext cx="3902075" cy="829945"/>
+          </a:xfrm>
+          <a:prstGeom prst="rect">
+            <a:avLst/>
+          </a:prstGeom>
+          <a:noFill/>
+        </p:spPr>
+        <p:txBody>
+          <a:bodyPr wrap="none" rtlCol="0">
+            <a:spAutoFit/>
+          </a:bodyPr>
+          <a:lstStyle/>
+          <a:p>
+            <a:pPr algn="l"/>
+            <a:r>
+              <a:rPr lang="en-US" altLang="zh-CN" sz="1600" dirty="0"/>
+              <a:t>Baseline 2: Multinomial Logistic Regression</a:t>
+            </a:r>
+          </a:p>
+          <a:p>
+            <a:pPr algn="l"/>
+            <a:endParaRPr lang="en-US" altLang="zh-CN" sz="1600" dirty="0"/>
+          </a:p>
+          <a:p>
+            <a:pPr marL="285750" indent="-285750" algn="l">
+              <a:buFontTx/>
+              <a:buChar char="-"/>
+            </a:pPr>
+            <a:r>
+              <a:rPr lang="en-US" altLang="zh-CN" sz="1600" dirty="0">
+                <a:solidFill>
+                  <a:schemeClr val="accent5"/>
+                </a:solidFill>
+              </a:rPr>
+              <a:t>Linear classifier on all engineered features</a:t>
+            </a:r>
+          </a:p>
+        </p:txBody>
+      </p:sp>
+      <p:pic>
+        <p:nvPicPr>
+          <p:cNvPr id="10" name="图片 9"/>
+          <p:cNvPicPr>
+            <a:picLocks noChangeAspect="1"/>
+          </p:cNvPicPr>
+          <p:nvPr/>
+        </p:nvPicPr>
+        <p:blipFill>
+          <a:blip r:embed="rId3"/>
+          <a:stretch>
+            <a:fillRect/>
+          </a:stretch>
+        </p:blipFill>
+        <p:spPr>
+          <a:xfrm>
+            <a:off x="250825" y="2696210"/>
+            <a:ext cx="3935095" cy="554990"/>
+          </a:xfrm>
+          <a:prstGeom prst="rect">
+            <a:avLst/>
+          </a:prstGeom>
+        </p:spPr>
+      </p:pic>
+      <p:pic>
+        <p:nvPicPr>
+          <p:cNvPr id="11" name="图片 10"/>
+          <p:cNvPicPr>
+            <a:picLocks noChangeAspect="1"/>
+          </p:cNvPicPr>
+          <p:nvPr/>
+        </p:nvPicPr>
+        <p:blipFill>
+          <a:blip r:embed="rId4"/>
+          <a:stretch>
+            <a:fillRect/>
+          </a:stretch>
+        </p:blipFill>
+        <p:spPr>
+          <a:xfrm>
+            <a:off x="4991100" y="2413000"/>
+            <a:ext cx="3037205" cy="838200"/>
+          </a:xfrm>
+          <a:prstGeom prst="rect">
+            <a:avLst/>
+          </a:prstGeom>
+        </p:spPr>
+      </p:pic>
+    </p:spTree>
+  </p:cSld>
+  <p:clrMapOvr>
+    <a:masterClrMapping/>
+  </p:clrMapOvr>
+</p:sld>
+</file>
+
+<file path=ppt/slides/slide16.xml><?xml version="1.0" encoding="utf-8"?>
+<p:sld xmlns:a="http://schemas.openxmlformats.org/drawingml/2006/main" xmlns:r="http://schemas.openxmlformats.org/officeDocument/2006/relationships" xmlns:p="http://schemas.openxmlformats.org/presentationml/2006/main">
+  <p:cSld>
+    <p:spTree>
+      <p:nvGrpSpPr>
+        <p:cNvPr id="1" name=""/>
+        <p:cNvGrpSpPr/>
+        <p:nvPr/>
+      </p:nvGrpSpPr>
+      <p:grpSpPr>
+        <a:xfrm>
+          <a:off x="0" y="0"/>
+          <a:ext cx="0" cy="0"/>
+          <a:chOff x="0" y="0"/>
+          <a:chExt cx="0" cy="0"/>
+        </a:xfrm>
+      </p:grpSpPr>
+      <p:sp>
+        <p:nvSpPr>
+          <p:cNvPr id="2" name="标题 1"/>
+          <p:cNvSpPr>
+            <a:spLocks noGrp="1"/>
+          </p:cNvSpPr>
+          <p:nvPr>
+            <p:ph type="title"/>
+          </p:nvPr>
+        </p:nvSpPr>
+        <p:spPr/>
+        <p:txBody>
+          <a:bodyPr/>
+          <a:lstStyle/>
+          <a:p>
+            <a:r>
+              <a:rPr lang="en-US" altLang="zh-CN"/>
+              <a:t>Modeling Pt.2</a:t>
+            </a:r>
+          </a:p>
+        </p:txBody>
+      </p:sp>
+      <p:sp>
+        <p:nvSpPr>
+          <p:cNvPr id="4" name="灯片编号占位符 3"/>
+          <p:cNvSpPr>
+            <a:spLocks noGrp="1"/>
+          </p:cNvSpPr>
+          <p:nvPr>
+            <p:ph type="sldNum" sz="quarter" idx="12"/>
+          </p:nvPr>
+        </p:nvSpPr>
+        <p:spPr/>
+        <p:txBody>
+          <a:bodyPr/>
+          <a:lstStyle/>
+          <a:p>
+            <a:fld id="{8A758EFE-665F-4341-B5B8-2DAEADA52F6C}" type="slidenum">
+              <a:rPr lang="en-US" smtClean="0"/>
+              <a:t>16</a:t>
             </a:fld>
             <a:endParaRPr lang="en-US" dirty="0"/>
           </a:p>
@@ -11981,18 +12348,12 @@
               </a:rPr>
               <a:t>Nonlinear Models &amp; Imbalance Handling</a:t>
             </a:r>
-            <a:endParaRPr lang="en-US" dirty="0">
-              <a:solidFill>
-                <a:schemeClr val="accent3"/>
-              </a:solidFill>
-            </a:endParaRPr>
           </a:p>
           <a:p>
             <a:r>
               <a:rPr lang="en-US" altLang="zh-CN" sz="1400" dirty="0"/>
               <a:t>4 Models evaluated:</a:t>
             </a:r>
-            <a:endParaRPr lang="en-US" altLang="zh-CN" sz="1400" dirty="0"/>
           </a:p>
           <a:p>
             <a:pPr marL="285750" indent="-285750">
@@ -12003,7 +12364,6 @@
               <a:rPr lang="en-US" sz="1400" dirty="0"/>
               <a:t>Random Forests</a:t>
             </a:r>
-            <a:endParaRPr lang="en-US" sz="1400" dirty="0"/>
           </a:p>
           <a:p>
             <a:pPr marL="285750" indent="-285750">
@@ -12014,7 +12374,6 @@
               <a:rPr lang="en-US" sz="1400" dirty="0"/>
               <a:t>AdaBoost</a:t>
             </a:r>
-            <a:endParaRPr lang="en-US" sz="1400" dirty="0"/>
           </a:p>
           <a:p>
             <a:pPr marL="285750" indent="-285750">
@@ -12025,7 +12384,6 @@
               <a:rPr lang="en-US" sz="1400" dirty="0"/>
               <a:t>XGBoost</a:t>
             </a:r>
-            <a:endParaRPr lang="en-US" sz="1400" dirty="0"/>
           </a:p>
           <a:p>
             <a:pPr marL="285750" indent="-285750">
@@ -12036,7 +12394,6 @@
               <a:rPr lang="en-US" altLang="zh-CN" sz="1400" dirty="0"/>
               <a:t>SVM(RBF)</a:t>
             </a:r>
-            <a:endParaRPr lang="en-US" altLang="zh-CN" sz="1400" dirty="0"/>
           </a:p>
           <a:p>
             <a:pPr indent="0">
@@ -12058,7 +12415,6 @@
               <a:rPr lang="en-US" altLang="zh-CN" sz="1400" dirty="0"/>
               <a:t>Two imbalance strategies</a:t>
             </a:r>
-            <a:endParaRPr lang="en-US" altLang="zh-CN" sz="1400" dirty="0"/>
           </a:p>
           <a:p>
             <a:pPr marL="285750" indent="-285750">
@@ -12071,9 +12427,6 @@
               </a:rPr>
               <a:t>Original train set + class or sample weights</a:t>
             </a:r>
-            <a:endParaRPr lang="en-US" altLang="zh-CN" sz="1400" dirty="0">
-              <a:sym typeface="+mn-ea"/>
-            </a:endParaRPr>
           </a:p>
           <a:p>
             <a:pPr marL="285750" indent="-285750">
@@ -12084,7 +12437,6 @@
               <a:rPr lang="en-US" altLang="zh-CN" sz="1400" dirty="0"/>
               <a:t>SMOTE-balanced train set, no weights</a:t>
             </a:r>
-            <a:endParaRPr lang="en-US" altLang="zh-CN" sz="1400" dirty="0"/>
           </a:p>
           <a:p>
             <a:pPr marL="285750" indent="-285750">
@@ -12102,7 +12454,6 @@
               <a:rPr lang="en-US" altLang="zh-CN" sz="1400" dirty="0"/>
               <a:t>Hyperparameter Tuning</a:t>
             </a:r>
-            <a:endParaRPr lang="en-US" altLang="zh-CN" sz="1400" dirty="0"/>
           </a:p>
           <a:p>
             <a:pPr marL="285750" indent="-285750">
@@ -12113,7 +12464,6 @@
               <a:rPr lang="en-US" altLang="zh-CN" sz="1400" dirty="0"/>
               <a:t>RandomizedSearchCV</a:t>
             </a:r>
-            <a:endParaRPr lang="en-US" altLang="zh-CN" sz="1400" dirty="0"/>
           </a:p>
         </p:txBody>
       </p:sp>
@@ -12138,16 +12488,47 @@
                 <a:tableStyleId>{5C22544A-7EE6-4342-B048-85BDC9FD1C3A}</a:tableStyleId>
               </a:tblPr>
               <a:tblGrid>
-                <a:gridCol w="1017270"/>
-                <a:gridCol w="1017270"/>
-                <a:gridCol w="1017270"/>
-                <a:gridCol w="1017270"/>
-                <a:gridCol w="1017270"/>
+                <a:gridCol w="1017270">
+                  <a:extLst>
+                    <a:ext uri="{9D8B030D-6E8A-4147-A177-3AD203B41FA5}">
+                      <a16:colId xmlns:a16="http://schemas.microsoft.com/office/drawing/2014/main" val="20000"/>
+                    </a:ext>
+                  </a:extLst>
+                </a:gridCol>
+                <a:gridCol w="1017270">
+                  <a:extLst>
+                    <a:ext uri="{9D8B030D-6E8A-4147-A177-3AD203B41FA5}">
+                      <a16:colId xmlns:a16="http://schemas.microsoft.com/office/drawing/2014/main" val="20001"/>
+                    </a:ext>
+                  </a:extLst>
+                </a:gridCol>
+                <a:gridCol w="1017270">
+                  <a:extLst>
+                    <a:ext uri="{9D8B030D-6E8A-4147-A177-3AD203B41FA5}">
+                      <a16:colId xmlns:a16="http://schemas.microsoft.com/office/drawing/2014/main" val="20002"/>
+                    </a:ext>
+                  </a:extLst>
+                </a:gridCol>
+                <a:gridCol w="1017270">
+                  <a:extLst>
+                    <a:ext uri="{9D8B030D-6E8A-4147-A177-3AD203B41FA5}">
+                      <a16:colId xmlns:a16="http://schemas.microsoft.com/office/drawing/2014/main" val="20003"/>
+                    </a:ext>
+                  </a:extLst>
+                </a:gridCol>
+                <a:gridCol w="1017270">
+                  <a:extLst>
+                    <a:ext uri="{9D8B030D-6E8A-4147-A177-3AD203B41FA5}">
+                      <a16:colId xmlns:a16="http://schemas.microsoft.com/office/drawing/2014/main" val="20004"/>
+                    </a:ext>
+                  </a:extLst>
+                </a:gridCol>
               </a:tblGrid>
               <a:tr h="360680">
                 <a:tc>
                   <a:txBody>
                     <a:bodyPr/>
+                    <a:lstStyle/>
                     <a:p>
                       <a:pPr algn="ctr">
                         <a:buNone/>
@@ -12160,6 +12541,7 @@
                 <a:tc>
                   <a:txBody>
                     <a:bodyPr/>
+                    <a:lstStyle/>
                     <a:p>
                       <a:pPr algn="ctr">
                         <a:buNone/>
@@ -12168,7 +12550,6 @@
                         <a:rPr lang="en-US" altLang="zh-CN" sz="1400"/>
                         <a:t>Acc</a:t>
                       </a:r>
-                      <a:endParaRPr lang="en-US" altLang="zh-CN" sz="1400"/>
                     </a:p>
                     <a:p>
                       <a:pPr algn="ctr">
@@ -12178,7 +12559,6 @@
                         <a:rPr lang="en-US" altLang="zh-CN" sz="1400"/>
                         <a:t>(Orig)</a:t>
                       </a:r>
-                      <a:endParaRPr lang="en-US" altLang="zh-CN" sz="1400"/>
                     </a:p>
                   </a:txBody>
                   <a:tcPr/>
@@ -12186,6 +12566,7 @@
                 <a:tc>
                   <a:txBody>
                     <a:bodyPr/>
+                    <a:lstStyle/>
                     <a:p>
                       <a:pPr algn="ctr">
                         <a:buNone/>
@@ -12194,7 +12575,6 @@
                         <a:rPr lang="en-US" altLang="zh-CN" sz="1400"/>
                         <a:t>Macro F1</a:t>
                       </a:r>
-                      <a:endParaRPr lang="en-US" altLang="zh-CN" sz="1400"/>
                     </a:p>
                     <a:p>
                       <a:pPr algn="ctr">
@@ -12204,7 +12584,6 @@
                         <a:rPr lang="en-US" altLang="zh-CN" sz="1400"/>
                         <a:t>(Orig)</a:t>
                       </a:r>
-                      <a:endParaRPr lang="en-US" altLang="zh-CN" sz="1400"/>
                     </a:p>
                   </a:txBody>
                   <a:tcPr/>
@@ -12212,6 +12591,7 @@
                 <a:tc>
                   <a:txBody>
                     <a:bodyPr/>
+                    <a:lstStyle/>
                     <a:p>
                       <a:pPr algn="ctr">
                         <a:buNone/>
@@ -12220,7 +12600,6 @@
                         <a:rPr lang="en-US" altLang="zh-CN" sz="1400"/>
                         <a:t>Acc (SMOTE)</a:t>
                       </a:r>
-                      <a:endParaRPr lang="en-US" altLang="zh-CN" sz="1400"/>
                     </a:p>
                   </a:txBody>
                   <a:tcPr/>
@@ -12228,6 +12607,7 @@
                 <a:tc>
                   <a:txBody>
                     <a:bodyPr/>
+                    <a:lstStyle/>
                     <a:p>
                       <a:pPr algn="ctr">
                         <a:buNone/>
@@ -12255,11 +12635,17 @@
                   </a:txBody>
                   <a:tcPr/>
                 </a:tc>
+                <a:extLst>
+                  <a:ext uri="{0D108BD9-81ED-4DB2-BD59-A6C34878D82A}">
+                    <a16:rowId xmlns:a16="http://schemas.microsoft.com/office/drawing/2014/main" val="10000"/>
+                  </a:ext>
+                </a:extLst>
               </a:tr>
               <a:tr h="360680">
                 <a:tc>
                   <a:txBody>
                     <a:bodyPr/>
+                    <a:lstStyle/>
                     <a:p>
                       <a:pPr algn="ctr">
                         <a:buNone/>
@@ -12268,7 +12654,6 @@
                         <a:rPr lang="en-US" altLang="zh-CN" sz="1600"/>
                         <a:t>Majority</a:t>
                       </a:r>
-                      <a:endParaRPr lang="en-US" altLang="zh-CN" sz="1600"/>
                     </a:p>
                   </a:txBody>
                   <a:tcPr/>
@@ -12276,6 +12661,7 @@
                 <a:tc>
                   <a:txBody>
                     <a:bodyPr/>
+                    <a:lstStyle/>
                     <a:p>
                       <a:pPr algn="ctr">
                         <a:buNone/>
@@ -12284,7 +12670,6 @@
                         <a:rPr lang="en-US" altLang="zh-CN" sz="1600"/>
                         <a:t>/</a:t>
                       </a:r>
-                      <a:endParaRPr lang="en-US" altLang="zh-CN" sz="1600"/>
                     </a:p>
                   </a:txBody>
                   <a:tcPr/>
@@ -12292,6 +12677,7 @@
                 <a:tc>
                   <a:txBody>
                     <a:bodyPr/>
+                    <a:lstStyle/>
                     <a:p>
                       <a:pPr algn="ctr">
                         <a:buNone/>
@@ -12300,7 +12686,6 @@
                         <a:rPr lang="en-US" altLang="zh-CN" sz="1600"/>
                         <a:t>/</a:t>
                       </a:r>
-                      <a:endParaRPr lang="en-US" altLang="zh-CN" sz="1600"/>
                     </a:p>
                   </a:txBody>
                   <a:tcPr/>
@@ -12308,6 +12693,7 @@
                 <a:tc>
                   <a:txBody>
                     <a:bodyPr/>
+                    <a:lstStyle/>
                     <a:p>
                       <a:pPr algn="ctr">
                         <a:buNone/>
@@ -12326,6 +12712,7 @@
                 <a:tc>
                   <a:txBody>
                     <a:bodyPr/>
+                    <a:lstStyle/>
                     <a:p>
                       <a:pPr algn="ctr">
                         <a:buNone/>
@@ -12334,16 +12721,21 @@
                         <a:rPr lang="en-US" altLang="zh-CN" sz="1600"/>
                         <a:t>0.073</a:t>
                       </a:r>
-                      <a:endParaRPr lang="en-US" altLang="zh-CN" sz="1600"/>
                     </a:p>
                   </a:txBody>
                   <a:tcPr/>
                 </a:tc>
+                <a:extLst>
+                  <a:ext uri="{0D108BD9-81ED-4DB2-BD59-A6C34878D82A}">
+                    <a16:rowId xmlns:a16="http://schemas.microsoft.com/office/drawing/2014/main" val="10001"/>
+                  </a:ext>
+                </a:extLst>
               </a:tr>
               <a:tr h="360680">
                 <a:tc>
                   <a:txBody>
                     <a:bodyPr/>
+                    <a:lstStyle/>
                     <a:p>
                       <a:pPr algn="ctr">
                         <a:buNone/>
@@ -12352,7 +12744,6 @@
                         <a:rPr lang="en-US" altLang="zh-CN" sz="1600"/>
                         <a:t>LogReg</a:t>
                       </a:r>
-                      <a:endParaRPr lang="en-US" altLang="zh-CN" sz="1600"/>
                     </a:p>
                   </a:txBody>
                   <a:tcPr/>
@@ -12360,6 +12751,7 @@
                 <a:tc>
                   <a:txBody>
                     <a:bodyPr/>
+                    <a:lstStyle/>
                     <a:p>
                       <a:pPr algn="ctr">
                         <a:buNone/>
@@ -12368,7 +12760,6 @@
                         <a:rPr lang="en-US" altLang="zh-CN" sz="1600"/>
                         <a:t>/</a:t>
                       </a:r>
-                      <a:endParaRPr lang="en-US" altLang="zh-CN" sz="1600"/>
                     </a:p>
                   </a:txBody>
                   <a:tcPr/>
@@ -12376,6 +12767,7 @@
                 <a:tc>
                   <a:txBody>
                     <a:bodyPr/>
+                    <a:lstStyle/>
                     <a:p>
                       <a:pPr algn="ctr">
                         <a:buNone/>
@@ -12384,7 +12776,6 @@
                         <a:rPr lang="en-US" altLang="zh-CN" sz="1600"/>
                         <a:t>/</a:t>
                       </a:r>
-                      <a:endParaRPr lang="en-US" altLang="zh-CN" sz="1600"/>
                     </a:p>
                   </a:txBody>
                   <a:tcPr/>
@@ -12392,6 +12783,7 @@
                 <a:tc>
                   <a:txBody>
                     <a:bodyPr/>
+                    <a:lstStyle/>
                     <a:p>
                       <a:pPr algn="ctr">
                         <a:buNone/>
@@ -12400,7 +12792,6 @@
                         <a:rPr lang="en-US" altLang="zh-CN" sz="1600"/>
                         <a:t>21.0%</a:t>
                       </a:r>
-                      <a:endParaRPr lang="en-US" altLang="zh-CN" sz="1600"/>
                     </a:p>
                   </a:txBody>
                   <a:tcPr/>
@@ -12408,6 +12799,7 @@
                 <a:tc>
                   <a:txBody>
                     <a:bodyPr/>
+                    <a:lstStyle/>
                     <a:p>
                       <a:pPr algn="ctr">
                         <a:buNone/>
@@ -12416,16 +12808,21 @@
                         <a:rPr lang="en-US" altLang="zh-CN" sz="1600"/>
                         <a:t>0.073</a:t>
                       </a:r>
-                      <a:endParaRPr lang="en-US" altLang="zh-CN" sz="1600"/>
                     </a:p>
                   </a:txBody>
                   <a:tcPr/>
                 </a:tc>
+                <a:extLst>
+                  <a:ext uri="{0D108BD9-81ED-4DB2-BD59-A6C34878D82A}">
+                    <a16:rowId xmlns:a16="http://schemas.microsoft.com/office/drawing/2014/main" val="10002"/>
+                  </a:ext>
+                </a:extLst>
               </a:tr>
               <a:tr h="360680">
                 <a:tc>
                   <a:txBody>
                     <a:bodyPr/>
+                    <a:lstStyle/>
                     <a:p>
                       <a:pPr algn="ctr">
                         <a:buNone/>
@@ -12434,7 +12831,6 @@
                         <a:rPr lang="en-US" altLang="zh-CN" sz="1600"/>
                         <a:t>RF</a:t>
                       </a:r>
-                      <a:endParaRPr lang="en-US" altLang="zh-CN" sz="1600"/>
                     </a:p>
                   </a:txBody>
                   <a:tcPr/>
@@ -12442,6 +12838,7 @@
                 <a:tc>
                   <a:txBody>
                     <a:bodyPr/>
+                    <a:lstStyle/>
                     <a:p>
                       <a:pPr algn="ctr">
                         <a:buNone/>
@@ -12450,7 +12847,6 @@
                         <a:rPr lang="en-US" altLang="zh-CN" sz="1600"/>
                         <a:t>12.9%</a:t>
                       </a:r>
-                      <a:endParaRPr lang="en-US" altLang="zh-CN" sz="1600"/>
                     </a:p>
                   </a:txBody>
                   <a:tcPr/>
@@ -12458,6 +12854,7 @@
                 <a:tc>
                   <a:txBody>
                     <a:bodyPr/>
+                    <a:lstStyle/>
                     <a:p>
                       <a:pPr algn="ctr">
                         <a:buNone/>
@@ -12466,7 +12863,6 @@
                         <a:rPr lang="en-US" altLang="zh-CN" sz="1600"/>
                         <a:t>0.127</a:t>
                       </a:r>
-                      <a:endParaRPr lang="en-US" altLang="zh-CN" sz="1600"/>
                     </a:p>
                   </a:txBody>
                   <a:tcPr/>
@@ -12474,6 +12870,7 @@
                 <a:tc>
                   <a:txBody>
                     <a:bodyPr/>
+                    <a:lstStyle/>
                     <a:p>
                       <a:pPr algn="ctr">
                         <a:buNone/>
@@ -12482,7 +12879,6 @@
                         <a:rPr lang="en-US" altLang="zh-CN" sz="1600"/>
                         <a:t>12.7%</a:t>
                       </a:r>
-                      <a:endParaRPr lang="en-US" altLang="zh-CN" sz="1600"/>
                     </a:p>
                   </a:txBody>
                   <a:tcPr/>
@@ -12490,6 +12886,7 @@
                 <a:tc>
                   <a:txBody>
                     <a:bodyPr/>
+                    <a:lstStyle/>
                     <a:p>
                       <a:pPr algn="ctr">
                         <a:buNone/>
@@ -12498,16 +12895,21 @@
                         <a:rPr lang="en-US" altLang="zh-CN" sz="1600"/>
                         <a:t>0.125</a:t>
                       </a:r>
-                      <a:endParaRPr lang="en-US" altLang="zh-CN" sz="1600"/>
                     </a:p>
                   </a:txBody>
                   <a:tcPr/>
                 </a:tc>
+                <a:extLst>
+                  <a:ext uri="{0D108BD9-81ED-4DB2-BD59-A6C34878D82A}">
+                    <a16:rowId xmlns:a16="http://schemas.microsoft.com/office/drawing/2014/main" val="10003"/>
+                  </a:ext>
+                </a:extLst>
               </a:tr>
               <a:tr h="360680">
                 <a:tc>
                   <a:txBody>
                     <a:bodyPr/>
+                    <a:lstStyle/>
                     <a:p>
                       <a:pPr algn="ctr">
                         <a:buNone/>
@@ -12516,7 +12918,6 @@
                         <a:rPr lang="en-US" altLang="zh-CN" sz="1600"/>
                         <a:t>AdaBoost</a:t>
                       </a:r>
-                      <a:endParaRPr lang="en-US" altLang="zh-CN" sz="1600"/>
                     </a:p>
                   </a:txBody>
                   <a:tcPr/>
@@ -12524,6 +12925,7 @@
                 <a:tc>
                   <a:txBody>
                     <a:bodyPr/>
+                    <a:lstStyle/>
                     <a:p>
                       <a:pPr algn="ctr">
                         <a:buNone/>
@@ -12532,7 +12934,6 @@
                         <a:rPr lang="en-US" altLang="zh-CN" sz="1600"/>
                         <a:t>12.6%</a:t>
                       </a:r>
-                      <a:endParaRPr lang="en-US" altLang="zh-CN" sz="1600"/>
                     </a:p>
                   </a:txBody>
                   <a:tcPr/>
@@ -12540,6 +12941,7 @@
                 <a:tc>
                   <a:txBody>
                     <a:bodyPr/>
+                    <a:lstStyle/>
                     <a:p>
                       <a:pPr algn="ctr">
                         <a:buNone/>
@@ -12548,7 +12950,6 @@
                         <a:rPr lang="en-US" altLang="zh-CN" sz="1600"/>
                         <a:t>0.127</a:t>
                       </a:r>
-                      <a:endParaRPr lang="en-US" altLang="zh-CN" sz="1600"/>
                     </a:p>
                   </a:txBody>
                   <a:tcPr/>
@@ -12556,6 +12957,7 @@
                 <a:tc>
                   <a:txBody>
                     <a:bodyPr/>
+                    <a:lstStyle/>
                     <a:p>
                       <a:pPr algn="ctr">
                         <a:buNone/>
@@ -12564,7 +12966,6 @@
                         <a:rPr lang="en-US" altLang="zh-CN" sz="1600"/>
                         <a:t>11.0%</a:t>
                       </a:r>
-                      <a:endParaRPr lang="en-US" altLang="zh-CN" sz="1600"/>
                     </a:p>
                   </a:txBody>
                   <a:tcPr/>
@@ -12572,6 +12973,7 @@
                 <a:tc>
                   <a:txBody>
                     <a:bodyPr/>
+                    <a:lstStyle/>
                     <a:p>
                       <a:pPr algn="ctr">
                         <a:buNone/>
@@ -12580,29 +12982,29 @@
                         <a:rPr lang="en-US" altLang="zh-CN" sz="1600"/>
                         <a:t>0.112</a:t>
                       </a:r>
-                      <a:endParaRPr lang="en-US" altLang="zh-CN" sz="1600"/>
                     </a:p>
                   </a:txBody>
                   <a:tcPr/>
                 </a:tc>
+                <a:extLst>
+                  <a:ext uri="{0D108BD9-81ED-4DB2-BD59-A6C34878D82A}">
+                    <a16:rowId xmlns:a16="http://schemas.microsoft.com/office/drawing/2014/main" val="10004"/>
+                  </a:ext>
+                </a:extLst>
               </a:tr>
               <a:tr h="360680">
                 <a:tc>
                   <a:txBody>
                     <a:bodyPr/>
+                    <a:lstStyle/>
                     <a:p>
                       <a:pPr algn="ctr">
                         <a:buNone/>
                       </a:pPr>
                       <a:r>
                         <a:rPr lang="en-US" altLang="zh-CN" sz="1600"/>
-                        <a:t>XG</a:t>
+                        <a:t>XGBoost</a:t>
                       </a:r>
-                      <a:r>
-                        <a:rPr lang="en-US" altLang="zh-CN" sz="1600"/>
-                        <a:t>Boost</a:t>
-                      </a:r>
-                      <a:endParaRPr lang="en-US" altLang="zh-CN" sz="1600"/>
                     </a:p>
                   </a:txBody>
                   <a:tcPr/>
@@ -12610,6 +13012,7 @@
                 <a:tc>
                   <a:txBody>
                     <a:bodyPr/>
+                    <a:lstStyle/>
                     <a:p>
                       <a:pPr algn="ctr">
                         <a:buNone/>
@@ -12618,7 +13021,6 @@
                         <a:rPr lang="en-US" altLang="zh-CN" sz="1600"/>
                         <a:t>7.2%</a:t>
                       </a:r>
-                      <a:endParaRPr lang="en-US" altLang="zh-CN" sz="1600"/>
                     </a:p>
                   </a:txBody>
                   <a:tcPr/>
@@ -12626,6 +13028,7 @@
                 <a:tc>
                   <a:txBody>
                     <a:bodyPr/>
+                    <a:lstStyle/>
                     <a:p>
                       <a:pPr algn="ctr">
                         <a:buNone/>
@@ -12634,7 +13037,6 @@
                         <a:rPr lang="en-US" altLang="zh-CN" sz="1600"/>
                         <a:t>0.076</a:t>
                       </a:r>
-                      <a:endParaRPr lang="en-US" altLang="zh-CN" sz="1600"/>
                     </a:p>
                   </a:txBody>
                   <a:tcPr/>
@@ -12642,6 +13044,7 @@
                 <a:tc>
                   <a:txBody>
                     <a:bodyPr/>
+                    <a:lstStyle/>
                     <a:p>
                       <a:pPr algn="ctr">
                         <a:buNone/>
@@ -12650,7 +13053,6 @@
                         <a:rPr lang="en-US" altLang="zh-CN" sz="1600"/>
                         <a:t>16.4%</a:t>
                       </a:r>
-                      <a:endParaRPr lang="en-US" altLang="zh-CN" sz="1600"/>
                     </a:p>
                   </a:txBody>
                   <a:tcPr/>
@@ -12658,6 +13060,7 @@
                 <a:tc>
                   <a:txBody>
                     <a:bodyPr/>
+                    <a:lstStyle/>
                     <a:p>
                       <a:pPr algn="ctr">
                         <a:buNone/>
@@ -12666,16 +13069,21 @@
                         <a:rPr lang="en-US" altLang="zh-CN" sz="1600"/>
                         <a:t>0.125</a:t>
                       </a:r>
-                      <a:endParaRPr lang="en-US" altLang="zh-CN" sz="1600"/>
                     </a:p>
                   </a:txBody>
                   <a:tcPr/>
                 </a:tc>
+                <a:extLst>
+                  <a:ext uri="{0D108BD9-81ED-4DB2-BD59-A6C34878D82A}">
+                    <a16:rowId xmlns:a16="http://schemas.microsoft.com/office/drawing/2014/main" val="10005"/>
+                  </a:ext>
+                </a:extLst>
               </a:tr>
               <a:tr h="360680">
                 <a:tc>
                   <a:txBody>
                     <a:bodyPr/>
+                    <a:lstStyle/>
                     <a:p>
                       <a:pPr algn="ctr">
                         <a:buNone/>
@@ -12684,7 +13092,6 @@
                         <a:rPr lang="en-US" altLang="zh-CN" sz="1600"/>
                         <a:t>SVM</a:t>
                       </a:r>
-                      <a:endParaRPr lang="en-US" altLang="zh-CN" sz="1600"/>
                     </a:p>
                   </a:txBody>
                   <a:tcPr/>
@@ -12692,6 +13099,7 @@
                 <a:tc>
                   <a:txBody>
                     <a:bodyPr/>
+                    <a:lstStyle/>
                     <a:p>
                       <a:pPr algn="ctr">
                         <a:buNone/>
@@ -12700,7 +13108,6 @@
                         <a:rPr lang="en-US" altLang="zh-CN" sz="1600"/>
                         <a:t>4.1%</a:t>
                       </a:r>
-                      <a:endParaRPr lang="en-US" altLang="zh-CN" sz="1600"/>
                     </a:p>
                   </a:txBody>
                   <a:tcPr/>
@@ -12708,6 +13115,7 @@
                 <a:tc>
                   <a:txBody>
                     <a:bodyPr/>
+                    <a:lstStyle/>
                     <a:p>
                       <a:pPr algn="ctr">
                         <a:buNone/>
@@ -12716,7 +13124,6 @@
                         <a:rPr lang="en-US" altLang="zh-CN" sz="1600"/>
                         <a:t>0.044</a:t>
                       </a:r>
-                      <a:endParaRPr lang="en-US" altLang="zh-CN" sz="1600"/>
                     </a:p>
                   </a:txBody>
                   <a:tcPr/>
@@ -12724,6 +13131,7 @@
                 <a:tc>
                   <a:txBody>
                     <a:bodyPr/>
+                    <a:lstStyle/>
                     <a:p>
                       <a:pPr algn="ctr">
                         <a:buNone/>
@@ -12732,7 +13140,6 @@
                         <a:rPr lang="en-US" altLang="zh-CN" sz="1600"/>
                         <a:t>4.4%</a:t>
                       </a:r>
-                      <a:endParaRPr lang="en-US" altLang="zh-CN" sz="1600"/>
                     </a:p>
                   </a:txBody>
                   <a:tcPr/>
@@ -12740,6 +13147,7 @@
                 <a:tc>
                   <a:txBody>
                     <a:bodyPr/>
+                    <a:lstStyle/>
                     <a:p>
                       <a:pPr algn="ctr">
                         <a:buNone/>
@@ -12748,261 +13156,20 @@
                         <a:rPr lang="en-US" altLang="zh-CN" sz="1600"/>
                         <a:t>0.052</a:t>
                       </a:r>
-                      <a:endParaRPr lang="en-US" altLang="zh-CN" sz="1600"/>
                     </a:p>
                   </a:txBody>
                   <a:tcPr/>
                 </a:tc>
+                <a:extLst>
+                  <a:ext uri="{0D108BD9-81ED-4DB2-BD59-A6C34878D82A}">
+                    <a16:rowId xmlns:a16="http://schemas.microsoft.com/office/drawing/2014/main" val="10006"/>
+                  </a:ext>
+                </a:extLst>
               </a:tr>
             </a:tbl>
           </a:graphicData>
         </a:graphic>
       </p:graphicFrame>
-    </p:spTree>
-  </p:cSld>
-  <p:clrMapOvr>
-    <a:masterClrMapping/>
-  </p:clrMapOvr>
-</p:sld>
-</file>
-
-<file path=ppt/slides/slide16.xml><?xml version="1.0" encoding="utf-8"?>
-<p:sld xmlns:a="http://schemas.openxmlformats.org/drawingml/2006/main" xmlns:r="http://schemas.openxmlformats.org/officeDocument/2006/relationships" xmlns:p="http://schemas.openxmlformats.org/presentationml/2006/main">
-  <p:cSld>
-    <p:spTree>
-      <p:nvGrpSpPr>
-        <p:cNvPr id="1" name=""/>
-        <p:cNvGrpSpPr/>
-        <p:nvPr/>
-      </p:nvGrpSpPr>
-      <p:grpSpPr/>
-      <p:sp>
-        <p:nvSpPr>
-          <p:cNvPr id="2" name="标题 1"/>
-          <p:cNvSpPr>
-            <a:spLocks noGrp="1"/>
-          </p:cNvSpPr>
-          <p:nvPr>
-            <p:ph type="title"/>
-          </p:nvPr>
-        </p:nvSpPr>
-        <p:spPr/>
-        <p:txBody>
-          <a:bodyPr/>
-          <a:p>
-            <a:r>
-              <a:rPr lang="en-US" altLang="zh-CN"/>
-              <a:t>Overfitting &amp; Effect of SMOTE</a:t>
-            </a:r>
-            <a:endParaRPr lang="en-US" altLang="zh-CN"/>
-          </a:p>
-        </p:txBody>
-      </p:sp>
-      <p:sp>
-        <p:nvSpPr>
-          <p:cNvPr id="4" name="灯片编号占位符 3"/>
-          <p:cNvSpPr>
-            <a:spLocks noGrp="1"/>
-          </p:cNvSpPr>
-          <p:nvPr>
-            <p:ph type="sldNum" sz="quarter" idx="12"/>
-          </p:nvPr>
-        </p:nvSpPr>
-        <p:spPr/>
-        <p:txBody>
-          <a:bodyPr/>
-          <a:p>
-            <a:fld id="{8A758EFE-665F-4341-B5B8-2DAEADA52F6C}" type="slidenum">
-              <a:rPr lang="en-US" smtClean="0"/>
-            </a:fld>
-            <a:endParaRPr lang="en-US" dirty="0"/>
-          </a:p>
-        </p:txBody>
-      </p:sp>
-      <p:sp>
-        <p:nvSpPr>
-          <p:cNvPr id="6" name="TextBox 5"/>
-          <p:cNvSpPr txBox="1"/>
-          <p:nvPr/>
-        </p:nvSpPr>
-        <p:spPr>
-          <a:xfrm>
-            <a:off x="250825" y="884555"/>
-            <a:ext cx="5509260" cy="2953385"/>
-          </a:xfrm>
-          <a:prstGeom prst="rect">
-            <a:avLst/>
-          </a:prstGeom>
-          <a:noFill/>
-        </p:spPr>
-        <p:txBody>
-          <a:bodyPr wrap="square" rtlCol="0">
-            <a:spAutoFit/>
-          </a:bodyPr>
-          <a:lstStyle/>
-          <a:p>
-            <a:r>
-              <a:rPr lang="en-US" dirty="0">
-                <a:solidFill>
-                  <a:schemeClr val="accent3"/>
-                </a:solidFill>
-              </a:rPr>
-              <a:t>Overfitting</a:t>
-            </a:r>
-            <a:endParaRPr lang="en-US" dirty="0">
-              <a:solidFill>
-                <a:schemeClr val="accent3"/>
-              </a:solidFill>
-            </a:endParaRPr>
-          </a:p>
-          <a:p>
-            <a:r>
-              <a:rPr lang="en-US" altLang="zh-CN" sz="1400" dirty="0"/>
-              <a:t>Good Training Result:</a:t>
-            </a:r>
-            <a:endParaRPr lang="en-US" altLang="zh-CN" sz="1400" dirty="0"/>
-          </a:p>
-          <a:p>
-            <a:pPr marL="285750" indent="-285750">
-              <a:buFontTx/>
-              <a:buChar char="-"/>
-            </a:pPr>
-            <a:r>
-              <a:rPr lang="en-US" altLang="zh-CN" sz="1400" dirty="0"/>
-              <a:t>RF (SMOTE):</a:t>
-            </a:r>
-            <a:r>
-              <a:rPr lang="en-US" altLang="zh-CN" sz="1400" b="1" dirty="0"/>
-              <a:t> 94.7% train accuracy,  0.95 macro F1</a:t>
-            </a:r>
-            <a:endParaRPr lang="en-US" sz="1400" b="1" dirty="0"/>
-          </a:p>
-          <a:p>
-            <a:pPr marL="285750" indent="-285750">
-              <a:buFontTx/>
-              <a:buChar char="-"/>
-            </a:pPr>
-            <a:r>
-              <a:rPr lang="en-US" altLang="zh-CN" sz="1400" dirty="0"/>
-              <a:t>AdaBoost (SMOTE): </a:t>
-            </a:r>
-            <a:r>
-              <a:rPr lang="en-US" altLang="zh-CN" sz="1400" b="1" dirty="0"/>
-              <a:t>97.4% train accuracy,  0.97 </a:t>
-            </a:r>
-            <a:r>
-              <a:rPr lang="en-US" altLang="zh-CN" sz="1400" b="1" dirty="0">
-                <a:sym typeface="+mn-ea"/>
-              </a:rPr>
-              <a:t>macro F1</a:t>
-            </a:r>
-            <a:endParaRPr lang="en-US" sz="1400" dirty="0"/>
-          </a:p>
-          <a:p>
-            <a:pPr marL="285750" indent="-285750">
-              <a:buFontTx/>
-              <a:buChar char="-"/>
-            </a:pPr>
-            <a:endParaRPr lang="en-US" altLang="zh-CN" sz="1400" dirty="0"/>
-          </a:p>
-          <a:p>
-            <a:pPr indent="0">
-              <a:buFontTx/>
-              <a:buNone/>
-            </a:pPr>
-            <a:r>
-              <a:rPr lang="en-US" sz="1400" dirty="0"/>
-              <a:t>Weak Generalization to Test Set</a:t>
-            </a:r>
-            <a:endParaRPr lang="en-US" sz="1400" dirty="0"/>
-          </a:p>
-          <a:p>
-            <a:pPr marL="285750" indent="-285750">
-              <a:buFontTx/>
-              <a:buChar char="-"/>
-            </a:pPr>
-            <a:r>
-              <a:rPr lang="en-US" altLang="zh-CN" sz="1400" dirty="0"/>
-              <a:t>Only </a:t>
-            </a:r>
-            <a:r>
-              <a:rPr lang="en-US" altLang="zh-CN" sz="1400" b="1" dirty="0"/>
-              <a:t>7–16%</a:t>
-            </a:r>
-            <a:r>
-              <a:rPr lang="en-US" altLang="zh-CN" sz="1400" dirty="0"/>
-              <a:t> accuracy across all models</a:t>
-            </a:r>
-            <a:endParaRPr lang="en-US" altLang="zh-CN" sz="1400" dirty="0"/>
-          </a:p>
-          <a:p>
-            <a:pPr indent="0">
-              <a:buFontTx/>
-              <a:buNone/>
-            </a:pPr>
-            <a:endParaRPr lang="en-US" sz="1400" dirty="0">
-              <a:solidFill>
-                <a:schemeClr val="accent3"/>
-              </a:solidFill>
-            </a:endParaRPr>
-          </a:p>
-          <a:p>
-            <a:pPr indent="0">
-              <a:buFontTx/>
-              <a:buNone/>
-            </a:pPr>
-            <a:r>
-              <a:rPr lang="en-US" altLang="zh-CN" sz="1400" dirty="0"/>
-              <a:t>Imbalance handling</a:t>
-            </a:r>
-            <a:endParaRPr lang="en-US" altLang="zh-CN" sz="1400" dirty="0"/>
-          </a:p>
-          <a:p>
-            <a:pPr marL="285750" indent="-285750">
-              <a:buFontTx/>
-              <a:buChar char="-"/>
-            </a:pPr>
-            <a:r>
-              <a:rPr lang="en-US" altLang="zh-CN" sz="1400" dirty="0"/>
-              <a:t>Class / sample weights: improve training metrics, small gains on test</a:t>
-            </a:r>
-            <a:endParaRPr lang="en-US" altLang="zh-CN" sz="1400" dirty="0"/>
-          </a:p>
-          <a:p>
-            <a:pPr marL="285750" indent="-285750">
-              <a:buFontTx/>
-              <a:buChar char="-"/>
-            </a:pPr>
-            <a:r>
-              <a:rPr lang="en-US" altLang="zh-CN" sz="1400" dirty="0"/>
-              <a:t>SMOTE: makes training easier, slightly improves XGBoost, but</a:t>
-            </a:r>
-            <a:endParaRPr lang="en-US" altLang="zh-CN" sz="1400" dirty="0"/>
-          </a:p>
-          <a:p>
-            <a:pPr marL="742950" lvl="1" indent="-285750">
-              <a:buFontTx/>
-              <a:buChar char="-"/>
-            </a:pPr>
-            <a:r>
-              <a:rPr lang="en-US" altLang="zh-CN" sz="1400" dirty="0"/>
-              <a:t>Still below majority baseline accuracy</a:t>
-            </a:r>
-            <a:endParaRPr lang="en-US" altLang="zh-CN" sz="1400" dirty="0"/>
-          </a:p>
-          <a:p>
-            <a:pPr marL="742950" lvl="1" indent="-285750">
-              <a:buFontTx/>
-              <a:buChar char="-"/>
-            </a:pPr>
-            <a:r>
-              <a:rPr lang="en-US" altLang="zh-CN" sz="1400" dirty="0"/>
-              <a:t>Rare shapes remain very hard to predict</a:t>
-            </a:r>
-            <a:endParaRPr lang="en-US" altLang="zh-CN" sz="1400" dirty="0"/>
-          </a:p>
-        </p:txBody>
-      </p:sp>
     </p:spTree>
   </p:cSld>
   <p:clrMapOvr>
@@ -13020,7 +13187,14 @@
         <p:cNvGrpSpPr/>
         <p:nvPr/>
       </p:nvGrpSpPr>
-      <p:grpSpPr/>
+      <p:grpSpPr>
+        <a:xfrm>
+          <a:off x="0" y="0"/>
+          <a:ext cx="0" cy="0"/>
+          <a:chOff x="0" y="0"/>
+          <a:chExt cx="0" cy="0"/>
+        </a:xfrm>
+      </p:grpSpPr>
       <p:sp>
         <p:nvSpPr>
           <p:cNvPr id="2" name="标题 1"/>
@@ -13034,12 +13208,12 @@
         <p:spPr/>
         <p:txBody>
           <a:bodyPr/>
+          <a:lstStyle/>
           <a:p>
             <a:r>
               <a:rPr lang="en-US" altLang="zh-CN"/>
-              <a:t>Conclusion</a:t>
-            </a:r>
-            <a:endParaRPr lang="en-US" altLang="zh-CN"/>
+              <a:t>Overfitting &amp; Effect of SMOTE</a:t>
+            </a:r>
           </a:p>
         </p:txBody>
       </p:sp>
@@ -13056,9 +13230,252 @@
         <p:spPr/>
         <p:txBody>
           <a:bodyPr/>
+          <a:lstStyle/>
           <a:p>
             <a:fld id="{8A758EFE-665F-4341-B5B8-2DAEADA52F6C}" type="slidenum">
               <a:rPr lang="en-US" smtClean="0"/>
+              <a:t>17</a:t>
+            </a:fld>
+            <a:endParaRPr lang="en-US" dirty="0"/>
+          </a:p>
+        </p:txBody>
+      </p:sp>
+      <p:sp>
+        <p:nvSpPr>
+          <p:cNvPr id="6" name="TextBox 5"/>
+          <p:cNvSpPr txBox="1"/>
+          <p:nvPr/>
+        </p:nvSpPr>
+        <p:spPr>
+          <a:xfrm>
+            <a:off x="250825" y="884555"/>
+            <a:ext cx="5509260" cy="2953385"/>
+          </a:xfrm>
+          <a:prstGeom prst="rect">
+            <a:avLst/>
+          </a:prstGeom>
+          <a:noFill/>
+        </p:spPr>
+        <p:txBody>
+          <a:bodyPr wrap="square" rtlCol="0">
+            <a:spAutoFit/>
+          </a:bodyPr>
+          <a:lstStyle/>
+          <a:p>
+            <a:r>
+              <a:rPr lang="en-US" dirty="0">
+                <a:solidFill>
+                  <a:schemeClr val="accent3"/>
+                </a:solidFill>
+              </a:rPr>
+              <a:t>Overfitting</a:t>
+            </a:r>
+          </a:p>
+          <a:p>
+            <a:r>
+              <a:rPr lang="en-US" altLang="zh-CN" sz="1400" dirty="0"/>
+              <a:t>Good Training Result:</a:t>
+            </a:r>
+          </a:p>
+          <a:p>
+            <a:pPr marL="285750" indent="-285750">
+              <a:buFontTx/>
+              <a:buChar char="-"/>
+            </a:pPr>
+            <a:r>
+              <a:rPr lang="en-US" altLang="zh-CN" sz="1400" dirty="0"/>
+              <a:t>RF (SMOTE):</a:t>
+            </a:r>
+            <a:r>
+              <a:rPr lang="en-US" altLang="zh-CN" sz="1400" b="1" dirty="0"/>
+              <a:t> 94.7% train accuracy,  0.95 macro F1</a:t>
+            </a:r>
+            <a:endParaRPr lang="en-US" sz="1400" b="1" dirty="0"/>
+          </a:p>
+          <a:p>
+            <a:pPr marL="285750" indent="-285750">
+              <a:buFontTx/>
+              <a:buChar char="-"/>
+            </a:pPr>
+            <a:r>
+              <a:rPr lang="en-US" altLang="zh-CN" sz="1400" dirty="0"/>
+              <a:t>AdaBoost (SMOTE): </a:t>
+            </a:r>
+            <a:r>
+              <a:rPr lang="en-US" altLang="zh-CN" sz="1400" b="1" dirty="0"/>
+              <a:t>97.4% train accuracy,  0.97 </a:t>
+            </a:r>
+            <a:r>
+              <a:rPr lang="en-US" altLang="zh-CN" sz="1400" b="1" dirty="0">
+                <a:sym typeface="+mn-ea"/>
+              </a:rPr>
+              <a:t>macro F1</a:t>
+            </a:r>
+            <a:endParaRPr lang="en-US" sz="1400" dirty="0"/>
+          </a:p>
+          <a:p>
+            <a:pPr marL="285750" indent="-285750">
+              <a:buFontTx/>
+              <a:buChar char="-"/>
+            </a:pPr>
+            <a:endParaRPr lang="en-US" altLang="zh-CN" sz="1400" dirty="0"/>
+          </a:p>
+          <a:p>
+            <a:pPr indent="0">
+              <a:buFontTx/>
+              <a:buNone/>
+            </a:pPr>
+            <a:r>
+              <a:rPr lang="en-US" sz="1400" dirty="0"/>
+              <a:t>Weak Generalization to Test Set</a:t>
+            </a:r>
+          </a:p>
+          <a:p>
+            <a:pPr marL="285750" indent="-285750">
+              <a:buFontTx/>
+              <a:buChar char="-"/>
+            </a:pPr>
+            <a:r>
+              <a:rPr lang="en-US" altLang="zh-CN" sz="1400" dirty="0"/>
+              <a:t>Only </a:t>
+            </a:r>
+            <a:r>
+              <a:rPr lang="en-US" altLang="zh-CN" sz="1400" b="1" dirty="0"/>
+              <a:t>7–16%</a:t>
+            </a:r>
+            <a:r>
+              <a:rPr lang="en-US" altLang="zh-CN" sz="1400" dirty="0"/>
+              <a:t> accuracy across all models</a:t>
+            </a:r>
+          </a:p>
+          <a:p>
+            <a:pPr indent="0">
+              <a:buFontTx/>
+              <a:buNone/>
+            </a:pPr>
+            <a:endParaRPr lang="en-US" sz="1400" dirty="0">
+              <a:solidFill>
+                <a:schemeClr val="accent3"/>
+              </a:solidFill>
+            </a:endParaRPr>
+          </a:p>
+          <a:p>
+            <a:pPr indent="0">
+              <a:buFontTx/>
+              <a:buNone/>
+            </a:pPr>
+            <a:r>
+              <a:rPr lang="en-US" altLang="zh-CN" sz="1400" dirty="0"/>
+              <a:t>Imbalance handling</a:t>
+            </a:r>
+          </a:p>
+          <a:p>
+            <a:pPr marL="285750" indent="-285750">
+              <a:buFontTx/>
+              <a:buChar char="-"/>
+            </a:pPr>
+            <a:r>
+              <a:rPr lang="en-US" altLang="zh-CN" sz="1400" dirty="0"/>
+              <a:t>Class / sample weights: improve training metrics, small gains on test</a:t>
+            </a:r>
+          </a:p>
+          <a:p>
+            <a:pPr marL="285750" indent="-285750">
+              <a:buFontTx/>
+              <a:buChar char="-"/>
+            </a:pPr>
+            <a:r>
+              <a:rPr lang="en-US" altLang="zh-CN" sz="1400" dirty="0"/>
+              <a:t>SMOTE: makes training easier, slightly improves XGBoost, but</a:t>
+            </a:r>
+          </a:p>
+          <a:p>
+            <a:pPr marL="742950" lvl="1" indent="-285750">
+              <a:buFontTx/>
+              <a:buChar char="-"/>
+            </a:pPr>
+            <a:r>
+              <a:rPr lang="en-US" altLang="zh-CN" sz="1400" dirty="0"/>
+              <a:t>Still below majority baseline accuracy</a:t>
+            </a:r>
+          </a:p>
+          <a:p>
+            <a:pPr marL="742950" lvl="1" indent="-285750">
+              <a:buFontTx/>
+              <a:buChar char="-"/>
+            </a:pPr>
+            <a:r>
+              <a:rPr lang="en-US" altLang="zh-CN" sz="1400" dirty="0"/>
+              <a:t>Rare shapes remain very hard to predict</a:t>
+            </a:r>
+          </a:p>
+        </p:txBody>
+      </p:sp>
+    </p:spTree>
+  </p:cSld>
+  <p:clrMapOvr>
+    <a:masterClrMapping/>
+  </p:clrMapOvr>
+</p:sld>
+</file>
+
+<file path=ppt/slides/slide18.xml><?xml version="1.0" encoding="utf-8"?>
+<p:sld xmlns:a="http://schemas.openxmlformats.org/drawingml/2006/main" xmlns:r="http://schemas.openxmlformats.org/officeDocument/2006/relationships" xmlns:p="http://schemas.openxmlformats.org/presentationml/2006/main">
+  <p:cSld>
+    <p:spTree>
+      <p:nvGrpSpPr>
+        <p:cNvPr id="1" name=""/>
+        <p:cNvGrpSpPr/>
+        <p:nvPr/>
+      </p:nvGrpSpPr>
+      <p:grpSpPr>
+        <a:xfrm>
+          <a:off x="0" y="0"/>
+          <a:ext cx="0" cy="0"/>
+          <a:chOff x="0" y="0"/>
+          <a:chExt cx="0" cy="0"/>
+        </a:xfrm>
+      </p:grpSpPr>
+      <p:sp>
+        <p:nvSpPr>
+          <p:cNvPr id="2" name="标题 1"/>
+          <p:cNvSpPr>
+            <a:spLocks noGrp="1"/>
+          </p:cNvSpPr>
+          <p:nvPr>
+            <p:ph type="title"/>
+          </p:nvPr>
+        </p:nvSpPr>
+        <p:spPr/>
+        <p:txBody>
+          <a:bodyPr/>
+          <a:lstStyle/>
+          <a:p>
+            <a:r>
+              <a:rPr lang="en-US" altLang="zh-CN"/>
+              <a:t>Conclusion</a:t>
+            </a:r>
+          </a:p>
+        </p:txBody>
+      </p:sp>
+      <p:sp>
+        <p:nvSpPr>
+          <p:cNvPr id="4" name="灯片编号占位符 3"/>
+          <p:cNvSpPr>
+            <a:spLocks noGrp="1"/>
+          </p:cNvSpPr>
+          <p:nvPr>
+            <p:ph type="sldNum" sz="quarter" idx="12"/>
+          </p:nvPr>
+        </p:nvSpPr>
+        <p:spPr/>
+        <p:txBody>
+          <a:bodyPr/>
+          <a:lstStyle/>
+          <a:p>
+            <a:fld id="{8A758EFE-665F-4341-B5B8-2DAEADA52F6C}" type="slidenum">
+              <a:rPr lang="en-US" smtClean="0"/>
+              <a:t>18</a:t>
             </a:fld>
             <a:endParaRPr lang="en-US" dirty="0"/>
           </a:p>
@@ -13094,11 +13511,6 @@
               </a:rPr>
               <a:t>Main Takeaways</a:t>
             </a:r>
-            <a:endParaRPr lang="en-US" altLang="zh-CN" dirty="0">
-              <a:solidFill>
-                <a:schemeClr val="accent3"/>
-              </a:solidFill>
-            </a:endParaRPr>
           </a:p>
           <a:p>
             <a:pPr marL="285750" indent="-285750">
@@ -13109,7 +13521,6 @@
               <a:rPr lang="en-US" altLang="zh-CN" sz="1400" dirty="0"/>
               <a:t>Linear baselines + current features ≈ majority classifier</a:t>
             </a:r>
-            <a:endParaRPr lang="en-US" altLang="zh-CN" sz="1400" dirty="0"/>
           </a:p>
           <a:p>
             <a:pPr marL="285750" indent="-285750">
@@ -13120,7 +13531,6 @@
               <a:rPr lang="en-US" altLang="zh-CN" sz="1400" dirty="0"/>
               <a:t>Nonlinear ensembles + imbalance tricks</a:t>
             </a:r>
-            <a:endParaRPr lang="en-US" altLang="zh-CN" sz="1400" dirty="0"/>
           </a:p>
           <a:p>
             <a:pPr marL="742950" lvl="1" indent="-285750">
@@ -13146,7 +13556,6 @@
               <a:rPr lang="en-US" altLang="zh-CN" sz="1400" dirty="0"/>
               <a:t>Rare shapes remain difficult to predict</a:t>
             </a:r>
-            <a:endParaRPr lang="en-US" altLang="zh-CN" sz="1400" dirty="0"/>
           </a:p>
           <a:p>
             <a:pPr marL="285750" indent="-285750">
@@ -13157,7 +13566,6 @@
               <a:rPr lang="en-US" altLang="zh-CN" sz="1400" dirty="0"/>
               <a:t>Main bottleneck: limited signal in current features</a:t>
             </a:r>
-            <a:endParaRPr lang="en-US" altLang="zh-CN" sz="1400" dirty="0"/>
           </a:p>
           <a:p>
             <a:pPr marL="285750" indent="-285750">
@@ -13199,7 +13607,6 @@
               <a:rPr lang="en-US" altLang="en-US" sz="1400" dirty="0"/>
               <a:t>but it is challenging because external data often differ in format, coverage, and geographic alignment.</a:t>
             </a:r>
-            <a:endParaRPr lang="en-US" altLang="en-US" sz="1400" dirty="0"/>
           </a:p>
           <a:p>
             <a:pPr marL="285750" indent="-285750">
@@ -13214,7 +13621,6 @@
               <a:rPr lang="en-US" altLang="en-US" sz="1400" dirty="0"/>
               <a:t>but how to proces noisy and unstructured sighting reports makes it difficult.</a:t>
             </a:r>
-            <a:endParaRPr lang="en-US" altLang="en-US" sz="1400" dirty="0"/>
           </a:p>
           <a:p>
             <a:pPr marL="285750" indent="-285750">
@@ -13252,7 +13658,6 @@
               <a:rPr lang="en-US" altLang="zh-CN" sz="1400" dirty="0"/>
               <a:t>aerial anomalies.</a:t>
             </a:r>
-            <a:endParaRPr lang="en-US" altLang="zh-CN" sz="1400" dirty="0"/>
           </a:p>
         </p:txBody>
       </p:sp>
@@ -13298,6 +13703,7 @@
           <a:p>
             <a:fld id="{8A758EFE-665F-4341-B5B8-2DAEADA52F6C}" type="slidenum">
               <a:rPr lang="en-US" smtClean="0"/>
+              <a:t>2</a:t>
             </a:fld>
             <a:endParaRPr lang="en-US" dirty="0"/>
           </a:p>
@@ -13324,7 +13730,6 @@
               <a:rPr lang="en-US" dirty="0"/>
               <a:t>Objective</a:t>
             </a:r>
-            <a:endParaRPr lang="en-US" dirty="0"/>
           </a:p>
         </p:txBody>
       </p:sp>
@@ -13536,13 +13941,6 @@
               </a:rPr>
               <a:t>Model and interpret how contextual factors influence the reporting of UFO shapes using NUFORC sighting data from the late 20th century to the present.</a:t>
             </a:r>
-            <a:endParaRPr lang="en-US" sz="2800" dirty="0">
-              <a:solidFill>
-                <a:schemeClr val="accent6"/>
-              </a:solidFill>
-              <a:latin typeface="Gill Sans" panose="020B0502020104020203"/>
-              <a:cs typeface="Gill Sans" panose="020B0502020104020203"/>
-            </a:endParaRPr>
           </a:p>
         </p:txBody>
       </p:sp>
@@ -13578,13 +13976,6 @@
               </a:rPr>
               <a:t>NUFORC: National UFO Reporting Center</a:t>
             </a:r>
-            <a:endParaRPr lang="en-US" sz="1600" dirty="0">
-              <a:solidFill>
-                <a:schemeClr val="bg1">
-                  <a:lumMod val="50000"/>
-                </a:schemeClr>
-              </a:solidFill>
-            </a:endParaRPr>
           </a:p>
         </p:txBody>
       </p:sp>
@@ -13630,6 +14021,7 @@
           <a:p>
             <a:fld id="{8A758EFE-665F-4341-B5B8-2DAEADA52F6C}" type="slidenum">
               <a:rPr lang="en-US" smtClean="0"/>
+              <a:t>3</a:t>
             </a:fld>
             <a:endParaRPr lang="en-US" dirty="0"/>
           </a:p>
@@ -13661,7 +14053,6 @@
               <a:rPr lang="en-US" dirty="0"/>
               <a:t>Value Proposition</a:t>
             </a:r>
-            <a:endParaRPr lang="en-US" dirty="0"/>
           </a:p>
         </p:txBody>
       </p:sp>
@@ -13984,13 +14375,6 @@
               </a:rPr>
               <a:t>Ultimately, this work helps clarify whether reported UFO shapes reflect actual aerial anomalies, or if they are shaped more by human interpretation, environment, and culture.</a:t>
             </a:r>
-            <a:endParaRPr lang="en-US" sz="2000" dirty="0">
-              <a:solidFill>
-                <a:schemeClr val="accent6"/>
-              </a:solidFill>
-              <a:latin typeface="Gill Sans" panose="020B0502020104020203"/>
-              <a:cs typeface="Gill Sans" panose="020B0502020104020203"/>
-            </a:endParaRPr>
           </a:p>
           <a:p>
             <a:endParaRPr lang="en-US" sz="2800" dirty="0">
@@ -14031,24 +14415,18 @@
             </a:r>
             <a:r>
               <a:rPr lang="en-US" sz="1600" dirty="0"/>
-              <a:t>  </a:t>
-            </a:r>
-            <a:r>
-              <a:rPr lang="en-US" sz="1600" dirty="0"/>
-              <a:t>Evaluate whether UFO shape reports are driven by </a:t>
+              <a:t>  Evaluate whether UFO shape reports are driven by </a:t>
             </a:r>
             <a:r>
               <a:rPr lang="en-US" sz="1600" b="1" dirty="0"/>
               <a:t>actual observational features</a:t>
             </a:r>
-            <a:endParaRPr lang="en-US" sz="1600" b="1" dirty="0"/>
           </a:p>
           <a:p>
             <a:r>
               <a:rPr lang="en-US" sz="1600" dirty="0"/>
               <a:t>   e.g., distance to UFO, duration of UFO</a:t>
             </a:r>
-            <a:endParaRPr lang="en-US" sz="1600" dirty="0"/>
           </a:p>
           <a:p>
             <a:endParaRPr lang="en-US" sz="1600" dirty="0"/>
@@ -14066,14 +14444,12 @@
               <a:rPr lang="en-US" sz="1600" dirty="0"/>
               <a:t> that may indicate environmental causes to </a:t>
             </a:r>
-            <a:endParaRPr lang="en-US" sz="1600" dirty="0"/>
           </a:p>
           <a:p>
             <a:r>
               <a:rPr lang="en-US" sz="1600" dirty="0"/>
               <a:t>UFO shapes.</a:t>
             </a:r>
-            <a:endParaRPr lang="en-US" sz="1600" dirty="0"/>
           </a:p>
           <a:p>
             <a:endParaRPr lang="en-US" sz="1600" dirty="0"/>
@@ -14091,14 +14467,12 @@
               <a:rPr lang="en-US" sz="1600" dirty="0"/>
               <a:t>.</a:t>
             </a:r>
-            <a:endParaRPr lang="en-US" sz="1600" dirty="0"/>
           </a:p>
           <a:p>
             <a:r>
               <a:rPr lang="en-US" sz="1600" dirty="0"/>
               <a:t>   e.g., culture, literacy, population density</a:t>
             </a:r>
-            <a:endParaRPr lang="en-US" sz="1600" dirty="0"/>
           </a:p>
         </p:txBody>
       </p:sp>
@@ -14128,7 +14502,6 @@
               <a:rPr lang="en-US" sz="1600" dirty="0"/>
               <a:t>Our project allows us to:</a:t>
             </a:r>
-            <a:endParaRPr lang="en-US" sz="1600" dirty="0"/>
           </a:p>
         </p:txBody>
       </p:sp>
@@ -14174,6 +14547,7 @@
           <a:p>
             <a:fld id="{8A758EFE-665F-4341-B5B8-2DAEADA52F6C}" type="slidenum">
               <a:rPr lang="en-US" smtClean="0"/>
+              <a:t>4</a:t>
             </a:fld>
             <a:endParaRPr lang="en-US" dirty="0"/>
           </a:p>
@@ -14200,7 +14574,6 @@
               <a:rPr lang="en-US" dirty="0"/>
               <a:t>Contents:</a:t>
             </a:r>
-            <a:endParaRPr lang="en-US" dirty="0"/>
           </a:p>
         </p:txBody>
       </p:sp>
@@ -14223,35 +14596,30 @@
               <a:rPr lang="en-US" dirty="0"/>
               <a:t>Datasets Information</a:t>
             </a:r>
-            <a:endParaRPr lang="en-US" dirty="0"/>
           </a:p>
           <a:p>
             <a:r>
               <a:rPr lang="en-US" dirty="0"/>
               <a:t>Major learnings from EDA</a:t>
             </a:r>
-            <a:endParaRPr lang="en-US" dirty="0"/>
           </a:p>
           <a:p>
             <a:r>
               <a:rPr lang="en-US" dirty="0"/>
               <a:t>Modeling results</a:t>
             </a:r>
-            <a:endParaRPr lang="en-US" dirty="0"/>
           </a:p>
           <a:p>
             <a:r>
               <a:rPr lang="en-US" dirty="0"/>
               <a:t>Implications and insights</a:t>
             </a:r>
-            <a:endParaRPr lang="en-US" dirty="0"/>
           </a:p>
           <a:p>
             <a:r>
               <a:rPr lang="en-US" dirty="0"/>
               <a:t>Challenges/limitations/potential future work</a:t>
             </a:r>
-            <a:endParaRPr lang="en-US" dirty="0"/>
           </a:p>
           <a:p>
             <a:endParaRPr lang="en-US" dirty="0"/>
@@ -14300,6 +14668,7 @@
           <a:p>
             <a:fld id="{8A758EFE-665F-4341-B5B8-2DAEADA52F6C}" type="slidenum">
               <a:rPr lang="en-US" smtClean="0"/>
+              <a:t>5</a:t>
             </a:fld>
             <a:endParaRPr lang="en-US" dirty="0"/>
           </a:p>
@@ -14334,7 +14703,6 @@
               <a:rPr lang="en-US" dirty="0"/>
               <a:t> </a:t>
             </a:r>
-            <a:endParaRPr lang="en-US" dirty="0"/>
           </a:p>
         </p:txBody>
       </p:sp>
@@ -14347,7 +14715,7 @@
         <p:spPr>
           <a:xfrm>
             <a:off x="251011" y="884518"/>
-            <a:ext cx="8971367" cy="1631216"/>
+            <a:ext cx="7957820" cy="1876425"/>
           </a:xfrm>
           <a:prstGeom prst="rect">
             <a:avLst/>
@@ -14379,11 +14747,6 @@
               </a:rPr>
               <a:t>NUFORC UFO Sightings (NUFORC, Kaggle)</a:t>
             </a:r>
-            <a:endParaRPr lang="en-US" dirty="0">
-              <a:solidFill>
-                <a:schemeClr val="accent3"/>
-              </a:solidFill>
-            </a:endParaRPr>
           </a:p>
           <a:p>
             <a:r>
@@ -14408,7 +14771,17 @@
                   <a:schemeClr val="accent5"/>
                 </a:solidFill>
               </a:rPr>
-              <a:t> over 20</a:t>
+              <a:t> </a:t>
+            </a:r>
+          </a:p>
+          <a:p>
+            <a:r>
+              <a:rPr lang="en-US" sz="1600" dirty="0">
+                <a:solidFill>
+                  <a:schemeClr val="accent5"/>
+                </a:solidFill>
+              </a:rPr>
+              <a:t>over 20</a:t>
             </a:r>
             <a:r>
               <a:rPr lang="en-US" sz="1600" baseline="30000" dirty="0">
@@ -14426,6 +14799,8 @@
               </a:rPr>
               <a:t> century.</a:t>
             </a:r>
+          </a:p>
+          <a:p>
             <a:endParaRPr lang="en-US" sz="1600" dirty="0">
               <a:solidFill>
                 <a:schemeClr val="accent5"/>
@@ -14433,13 +14808,6 @@
             </a:endParaRPr>
           </a:p>
           <a:p>
-            <a:endParaRPr lang="en-US" sz="1600" dirty="0">
-              <a:solidFill>
-                <a:schemeClr val="accent5"/>
-              </a:solidFill>
-            </a:endParaRPr>
-          </a:p>
-          <a:p>
             <a:r>
               <a:rPr lang="en-US" sz="1600" b="1" dirty="0"/>
               <a:t>Size:</a:t>
@@ -14448,7 +14816,6 @@
               <a:rPr lang="en-US" sz="1600" dirty="0"/>
               <a:t> 80,000+ reports</a:t>
             </a:r>
-            <a:endParaRPr lang="en-US" sz="1600" dirty="0"/>
           </a:p>
           <a:p>
             <a:endParaRPr lang="en-US" sz="1600" dirty="0"/>
@@ -14471,7 +14838,7 @@
           <p:nvPr/>
         </p:nvPicPr>
         <p:blipFill>
-          <a:blip r:embed="rId1"/>
+          <a:blip r:embed="rId3"/>
           <a:stretch>
             <a:fillRect/>
           </a:stretch>
@@ -14558,6 +14925,7 @@
           <a:p>
             <a:fld id="{8A758EFE-665F-4341-B5B8-2DAEADA52F6C}" type="slidenum">
               <a:rPr lang="en-US" smtClean="0"/>
+              <a:t>6</a:t>
             </a:fld>
             <a:endParaRPr lang="en-US" dirty="0"/>
           </a:p>
@@ -14592,7 +14960,6 @@
               <a:rPr lang="en-US" dirty="0"/>
               <a:t> </a:t>
             </a:r>
-            <a:endParaRPr lang="en-US" dirty="0"/>
           </a:p>
         </p:txBody>
       </p:sp>
@@ -14658,11 +15025,6 @@
               </a:rPr>
               <a:t>)</a:t>
             </a:r>
-            <a:endParaRPr lang="en-US" dirty="0">
-              <a:solidFill>
-                <a:schemeClr val="accent3"/>
-              </a:solidFill>
-            </a:endParaRPr>
           </a:p>
           <a:p>
             <a:r>
@@ -14673,6 +15035,8 @@
               </a:rPr>
               <a:t>Geographic and environmental characteristics of cities worldwide</a:t>
             </a:r>
+          </a:p>
+          <a:p>
             <a:endParaRPr lang="en-US" sz="1600" dirty="0">
               <a:solidFill>
                 <a:schemeClr val="accent5"/>
@@ -14680,13 +15044,6 @@
             </a:endParaRPr>
           </a:p>
           <a:p>
-            <a:endParaRPr lang="en-US" sz="1600" dirty="0">
-              <a:solidFill>
-                <a:schemeClr val="accent5"/>
-              </a:solidFill>
-            </a:endParaRPr>
-          </a:p>
-          <a:p>
             <a:r>
               <a:rPr lang="en-US" sz="1600" b="1" dirty="0"/>
               <a:t>Size:</a:t>
@@ -14695,7 +15052,6 @@
               <a:rPr lang="en-US" sz="1600" dirty="0"/>
               <a:t> 48,000+ cities</a:t>
             </a:r>
-            <a:endParaRPr lang="en-US" sz="1600" dirty="0"/>
           </a:p>
           <a:p>
             <a:endParaRPr lang="en-US" sz="1600" dirty="0"/>
@@ -14748,7 +15104,7 @@
           <p:nvPr/>
         </p:nvPicPr>
         <p:blipFill>
-          <a:blip r:embed="rId1"/>
+          <a:blip r:embed="rId3"/>
           <a:stretch>
             <a:fillRect/>
           </a:stretch>
@@ -14805,6 +15161,7 @@
           <a:p>
             <a:fld id="{8A758EFE-665F-4341-B5B8-2DAEADA52F6C}" type="slidenum">
               <a:rPr lang="en-US" smtClean="0"/>
+              <a:t>7</a:t>
             </a:fld>
             <a:endParaRPr lang="en-US" dirty="0"/>
           </a:p>
@@ -14839,7 +15196,6 @@
               <a:rPr lang="en-US" dirty="0"/>
               <a:t>  </a:t>
             </a:r>
-            <a:endParaRPr lang="en-US" dirty="0"/>
           </a:p>
         </p:txBody>
       </p:sp>
@@ -14889,11 +15245,6 @@
               </a:rPr>
               <a:t>)</a:t>
             </a:r>
-            <a:endParaRPr lang="en-US" dirty="0">
-              <a:solidFill>
-                <a:schemeClr val="accent3"/>
-              </a:solidFill>
-            </a:endParaRPr>
           </a:p>
           <a:p>
             <a:r>
@@ -14904,6 +15255,8 @@
               </a:rPr>
               <a:t>Up-to-date information on airport locations and aviation infrastructure worldwide.</a:t>
             </a:r>
+          </a:p>
+          <a:p>
             <a:endParaRPr lang="en-US" sz="1600" dirty="0">
               <a:solidFill>
                 <a:schemeClr val="accent5"/>
@@ -14911,33 +15264,25 @@
             </a:endParaRPr>
           </a:p>
           <a:p>
+            <a:r>
+              <a:rPr lang="en-US" sz="1600" b="1" dirty="0"/>
+              <a:t>Size:</a:t>
+            </a:r>
+            <a:r>
+              <a:rPr lang="en-US" sz="1600" dirty="0"/>
+              <a:t> 84,000+ airports</a:t>
+            </a:r>
+          </a:p>
+          <a:p>
+            <a:endParaRPr lang="en-US" sz="1600" dirty="0"/>
+          </a:p>
+          <a:p>
             <a:endParaRPr lang="en-US" sz="1600" dirty="0">
               <a:solidFill>
                 <a:schemeClr val="accent5"/>
               </a:solidFill>
             </a:endParaRPr>
           </a:p>
-          <a:p>
-            <a:r>
-              <a:rPr lang="en-US" sz="1600" b="1" dirty="0"/>
-              <a:t>Size:</a:t>
-            </a:r>
-            <a:r>
-              <a:rPr lang="en-US" sz="1600" dirty="0"/>
-              <a:t> 84,000+ airports</a:t>
-            </a:r>
-            <a:endParaRPr lang="en-US" sz="1600" dirty="0"/>
-          </a:p>
-          <a:p>
-            <a:endParaRPr lang="en-US" sz="1600" dirty="0"/>
-          </a:p>
-          <a:p>
-            <a:endParaRPr lang="en-US" sz="1600" dirty="0">
-              <a:solidFill>
-                <a:schemeClr val="accent5"/>
-              </a:solidFill>
-            </a:endParaRPr>
-          </a:p>
         </p:txBody>
       </p:sp>
       <p:sp>
@@ -14970,7 +15315,6 @@
               <a:rPr lang="en-US" dirty="0"/>
               <a:t> </a:t>
             </a:r>
-            <a:endParaRPr lang="en-US" dirty="0"/>
           </a:p>
         </p:txBody>
       </p:sp>
@@ -14983,7 +15327,7 @@
           <p:nvPr/>
         </p:nvPicPr>
         <p:blipFill>
-          <a:blip r:embed="rId1"/>
+          <a:blip r:embed="rId3"/>
           <a:stretch>
             <a:fillRect/>
           </a:stretch>
@@ -15040,6 +15384,7 @@
           <a:p>
             <a:fld id="{8A758EFE-665F-4341-B5B8-2DAEADA52F6C}" type="slidenum">
               <a:rPr lang="en-US" smtClean="0"/>
+              <a:t>8</a:t>
             </a:fld>
             <a:endParaRPr lang="en-US" dirty="0"/>
           </a:p>
@@ -15074,7 +15419,6 @@
               <a:rPr lang="en-US" dirty="0"/>
               <a:t>  </a:t>
             </a:r>
-            <a:endParaRPr lang="en-US" dirty="0"/>
           </a:p>
         </p:txBody>
       </p:sp>
@@ -15108,11 +15452,6 @@
               </a:rPr>
               <a:t>Country Education Level Dataset (Our World in Data, Kaggle)</a:t>
             </a:r>
-            <a:endParaRPr lang="en-US" dirty="0">
-              <a:solidFill>
-                <a:schemeClr val="accent3"/>
-              </a:solidFill>
-            </a:endParaRPr>
           </a:p>
           <a:p>
             <a:r>
@@ -15123,6 +15462,8 @@
               </a:rPr>
               <a:t>National-level indicators reflecting cultural exposure and socioeconomic conditions</a:t>
             </a:r>
+          </a:p>
+          <a:p>
             <a:endParaRPr lang="en-US" sz="1600" dirty="0">
               <a:solidFill>
                 <a:schemeClr val="accent5"/>
@@ -15130,33 +15471,25 @@
             </a:endParaRPr>
           </a:p>
           <a:p>
+            <a:r>
+              <a:rPr lang="en-US" sz="1600" b="1" dirty="0"/>
+              <a:t>Size:</a:t>
+            </a:r>
+            <a:r>
+              <a:rPr lang="en-US" sz="1600" dirty="0"/>
+              <a:t> 200+ countries</a:t>
+            </a:r>
+          </a:p>
+          <a:p>
+            <a:endParaRPr lang="en-US" sz="1600" dirty="0"/>
+          </a:p>
+          <a:p>
             <a:endParaRPr lang="en-US" sz="1600" dirty="0">
               <a:solidFill>
                 <a:schemeClr val="accent5"/>
               </a:solidFill>
             </a:endParaRPr>
           </a:p>
-          <a:p>
-            <a:r>
-              <a:rPr lang="en-US" sz="1600" b="1" dirty="0"/>
-              <a:t>Size:</a:t>
-            </a:r>
-            <a:r>
-              <a:rPr lang="en-US" sz="1600" dirty="0"/>
-              <a:t> 200+ countries</a:t>
-            </a:r>
-            <a:endParaRPr lang="en-US" sz="1600" dirty="0"/>
-          </a:p>
-          <a:p>
-            <a:endParaRPr lang="en-US" sz="1600" dirty="0"/>
-          </a:p>
-          <a:p>
-            <a:endParaRPr lang="en-US" sz="1600" dirty="0">
-              <a:solidFill>
-                <a:schemeClr val="accent5"/>
-              </a:solidFill>
-            </a:endParaRPr>
-          </a:p>
         </p:txBody>
       </p:sp>
       <p:sp>
@@ -15189,7 +15522,6 @@
               <a:rPr lang="en-US" dirty="0"/>
               <a:t> </a:t>
             </a:r>
-            <a:endParaRPr lang="en-US" dirty="0"/>
           </a:p>
         </p:txBody>
       </p:sp>
@@ -15202,7 +15534,7 @@
           <p:nvPr/>
         </p:nvPicPr>
         <p:blipFill>
-          <a:blip r:embed="rId1"/>
+          <a:blip r:embed="rId2"/>
           <a:srcRect b="1247"/>
           <a:stretch>
             <a:fillRect/>
@@ -15227,7 +15559,7 @@
           <p:nvPr/>
         </p:nvPicPr>
         <p:blipFill>
-          <a:blip r:embed="rId2"/>
+          <a:blip r:embed="rId3"/>
           <a:stretch>
             <a:fillRect/>
           </a:stretch>
@@ -15284,6 +15616,7 @@
           <a:p>
             <a:fld id="{8A758EFE-665F-4341-B5B8-2DAEADA52F6C}" type="slidenum">
               <a:rPr lang="en-US" smtClean="0"/>
+              <a:t>9</a:t>
             </a:fld>
             <a:endParaRPr lang="en-US" dirty="0"/>
           </a:p>
@@ -15507,7 +15840,7 @@
           <p:nvPr/>
         </p:nvPicPr>
         <p:blipFill>
-          <a:blip r:embed="rId1">
+          <a:blip r:embed="rId2">
             <a:extLst>
               <a:ext uri="{28A0092B-C50C-407E-A947-70E740481C1C}">
                 <a14:useLocalDpi xmlns:a14="http://schemas.microsoft.com/office/drawing/2010/main" val="0"/>
@@ -15569,6 +15902,8 @@
               </a:rPr>
               <a:t>Target Class Distribution (Shape Distribution)</a:t>
             </a:r>
+          </a:p>
+          <a:p>
             <a:endParaRPr lang="en-US" dirty="0">
               <a:solidFill>
                 <a:schemeClr val="accent3"/>
@@ -15576,13 +15911,6 @@
             </a:endParaRPr>
           </a:p>
           <a:p>
-            <a:endParaRPr lang="en-US" dirty="0">
-              <a:solidFill>
-                <a:schemeClr val="accent3"/>
-              </a:solidFill>
-            </a:endParaRPr>
-          </a:p>
-          <a:p>
             <a:pPr marL="285750" indent="-285750">
               <a:buFontTx/>
               <a:buChar char="-"/>
@@ -15591,7 +15919,6 @@
               <a:rPr lang="en-US" sz="1400" dirty="0"/>
               <a:t>Shows the severe class imbalance</a:t>
             </a:r>
-            <a:endParaRPr lang="en-US" sz="1400" dirty="0"/>
           </a:p>
           <a:p>
             <a:pPr marL="285750" indent="-285750">
@@ -15619,7 +15946,7 @@
 </file>
 
 <file path=ppt/tags/tag1.xml><?xml version="1.0" encoding="utf-8"?>
-<p:tagLst xmlns:p="http://schemas.openxmlformats.org/presentationml/2006/main">
+<p:tagLst xmlns:a="http://schemas.openxmlformats.org/drawingml/2006/main" xmlns:r="http://schemas.openxmlformats.org/officeDocument/2006/relationships" xmlns:p="http://schemas.openxmlformats.org/presentationml/2006/main">
   <p:tag name="TABLE_ENDDRAG_ORIGIN_RECT" val="400*198"/>
   <p:tag name="TABLE_ENDDRAG_RECT" val="312*104*400*198"/>
 </p:tagLst>
@@ -15954,6 +16281,7 @@
       </a:style>
     </a:lnDef>
   </a:objectDefaults>
+  <a:extraClrSchemeLst/>
   <a:extLst>
     <a:ext uri="{05A4C25C-085E-4340-85A3-A5531E510DB2}">
       <thm15:themeFamily xmlns:thm15="http://schemas.microsoft.com/office/thememl/2012/main" name="Office Theme" id="{62F939B6-93AF-4DB8-9C6B-D6C7DFDC589F}" vid="{4A3C46E8-61CC-4603-A589-7422A47A8E4A}"/>
@@ -16278,6 +16606,7 @@
       </a:style>
     </a:lnDef>
   </a:objectDefaults>
+  <a:extraClrSchemeLst/>
   <a:extLst>
     <a:ext uri="{05A4C25C-085E-4340-85A3-A5531E510DB2}">
       <thm15:themeFamily xmlns:thm15="http://schemas.microsoft.com/office/thememl/2012/main" name="Office Theme" id="{62F939B6-93AF-4DB8-9C6B-D6C7DFDC589F}" vid="{4A3C46E8-61CC-4603-A589-7422A47A8E4A}"/>
@@ -16602,6 +16931,7 @@
       </a:style>
     </a:lnDef>
   </a:objectDefaults>
+  <a:extraClrSchemeLst/>
   <a:extLst>
     <a:ext uri="{05A4C25C-085E-4340-85A3-A5531E510DB2}">
       <thm15:themeFamily xmlns:thm15="http://schemas.microsoft.com/office/thememl/2012/main" name="Office Theme" id="{62F939B6-93AF-4DB8-9C6B-D6C7DFDC589F}" vid="{4A3C46E8-61CC-4603-A589-7422A47A8E4A}"/>

--- a/pre.pptx
+++ b/pre.pptx
@@ -5,10 +5,10 @@
     <p:sldMasterId id="2147483648" r:id="rId1"/>
   </p:sldMasterIdLst>
   <p:notesMasterIdLst>
-    <p:notesMasterId r:id="rId20"/>
+    <p:notesMasterId r:id="rId19"/>
   </p:notesMasterIdLst>
   <p:handoutMasterIdLst>
-    <p:handoutMasterId r:id="rId21"/>
+    <p:handoutMasterId r:id="rId20"/>
   </p:handoutMasterIdLst>
   <p:sldIdLst>
     <p:sldId id="263" r:id="rId2"/>
@@ -22,13 +22,12 @@
     <p:sldId id="314" r:id="rId10"/>
     <p:sldId id="327" r:id="rId11"/>
     <p:sldId id="328" r:id="rId12"/>
-    <p:sldId id="329" r:id="rId13"/>
-    <p:sldId id="326" r:id="rId14"/>
-    <p:sldId id="334" r:id="rId15"/>
-    <p:sldId id="330" r:id="rId16"/>
-    <p:sldId id="331" r:id="rId17"/>
-    <p:sldId id="332" r:id="rId18"/>
-    <p:sldId id="333" r:id="rId19"/>
+    <p:sldId id="326" r:id="rId13"/>
+    <p:sldId id="334" r:id="rId14"/>
+    <p:sldId id="330" r:id="rId15"/>
+    <p:sldId id="331" r:id="rId16"/>
+    <p:sldId id="332" r:id="rId17"/>
+    <p:sldId id="333" r:id="rId18"/>
   </p:sldIdLst>
   <p:sldSz cx="9144000" cy="5143500" type="screen16x9"/>
   <p:notesSz cx="6858000" cy="9144000"/>
@@ -999,85 +998,6 @@
       </p:grpSpPr>
       <p:sp>
         <p:nvSpPr>
-          <p:cNvPr id="2" name="Slide Image Placeholder 1"/>
-          <p:cNvSpPr>
-            <a:spLocks noGrp="1" noRot="1" noChangeAspect="1"/>
-          </p:cNvSpPr>
-          <p:nvPr>
-            <p:ph type="sldImg"/>
-          </p:nvPr>
-        </p:nvSpPr>
-        <p:spPr/>
-      </p:sp>
-      <p:sp>
-        <p:nvSpPr>
-          <p:cNvPr id="3" name="Notes Placeholder 2"/>
-          <p:cNvSpPr>
-            <a:spLocks noGrp="1"/>
-          </p:cNvSpPr>
-          <p:nvPr>
-            <p:ph type="body" idx="1"/>
-          </p:nvPr>
-        </p:nvSpPr>
-        <p:spPr/>
-        <p:txBody>
-          <a:bodyPr/>
-          <a:lstStyle/>
-          <a:p>
-            <a:endParaRPr lang="en-US" dirty="0"/>
-          </a:p>
-        </p:txBody>
-      </p:sp>
-      <p:sp>
-        <p:nvSpPr>
-          <p:cNvPr id="4" name="Slide Number Placeholder 3"/>
-          <p:cNvSpPr>
-            <a:spLocks noGrp="1"/>
-          </p:cNvSpPr>
-          <p:nvPr>
-            <p:ph type="sldNum" sz="quarter" idx="5"/>
-          </p:nvPr>
-        </p:nvSpPr>
-        <p:spPr/>
-        <p:txBody>
-          <a:bodyPr/>
-          <a:lstStyle/>
-          <a:p>
-            <a:fld id="{55447283-AD3B-EE49-8B53-C7D74121EF4E}" type="slidenum">
-              <a:rPr lang="en-US" smtClean="0"/>
-              <a:t>12</a:t>
-            </a:fld>
-            <a:endParaRPr lang="en-US" dirty="0"/>
-          </a:p>
-        </p:txBody>
-      </p:sp>
-    </p:spTree>
-  </p:cSld>
-  <p:clrMapOvr>
-    <a:masterClrMapping/>
-  </p:clrMapOvr>
-</p:notes>
-</file>
-
-<file path=ppt/notesSlides/notesSlide6.xml><?xml version="1.0" encoding="utf-8"?>
-<p:notes xmlns:a="http://schemas.openxmlformats.org/drawingml/2006/main" xmlns:r="http://schemas.openxmlformats.org/officeDocument/2006/relationships" xmlns:p="http://schemas.openxmlformats.org/presentationml/2006/main">
-  <p:cSld>
-    <p:spTree>
-      <p:nvGrpSpPr>
-        <p:cNvPr id="1" name=""/>
-        <p:cNvGrpSpPr/>
-        <p:nvPr/>
-      </p:nvGrpSpPr>
-      <p:grpSpPr>
-        <a:xfrm>
-          <a:off x="0" y="0"/>
-          <a:ext cx="0" cy="0"/>
-          <a:chOff x="0" y="0"/>
-          <a:chExt cx="0" cy="0"/>
-        </a:xfrm>
-      </p:grpSpPr>
-      <p:sp>
-        <p:nvSpPr>
           <p:cNvPr id="2" name="幻灯片图像占位符 1"/>
           <p:cNvSpPr>
             <a:spLocks noGrp="1" noRot="1" noChangeAspect="1"/>
@@ -1124,7 +1044,7 @@
           <a:p>
             <a:fld id="{55447283-AD3B-EE49-8B53-C7D74121EF4E}" type="slidenum">
               <a:rPr lang="en-US" smtClean="0"/>
-              <a:t>15</a:t>
+              <a:t>14</a:t>
             </a:fld>
             <a:endParaRPr lang="en-US" dirty="0"/>
           </a:p>
@@ -11291,8 +11211,8 @@
         </p:blipFill>
         <p:spPr bwMode="auto">
           <a:xfrm>
-            <a:off x="4750342" y="846810"/>
-            <a:ext cx="3963936" cy="3852189"/>
+            <a:off x="4973797" y="960544"/>
+            <a:ext cx="3846903" cy="3738455"/>
           </a:xfrm>
           <a:prstGeom prst="rect">
             <a:avLst/>
@@ -11318,7 +11238,7 @@
         <p:spPr>
           <a:xfrm>
             <a:off x="251011" y="884518"/>
-            <a:ext cx="4320989" cy="1569660"/>
+            <a:ext cx="4320989" cy="1292662"/>
           </a:xfrm>
           <a:prstGeom prst="rect">
             <a:avLst/>
@@ -11337,7 +11257,7 @@
                   <a:schemeClr val="accent3"/>
                 </a:solidFill>
               </a:rPr>
-              <a:t>24-Hour Patterns for Top 5 Shapes</a:t>
+              <a:t>Time vs Shape Analysis </a:t>
             </a:r>
           </a:p>
           <a:p>
@@ -11348,20 +11268,13 @@
             </a:endParaRPr>
           </a:p>
           <a:p>
-            <a:endParaRPr lang="en-US" dirty="0">
-              <a:solidFill>
-                <a:schemeClr val="accent3"/>
-              </a:solidFill>
-            </a:endParaRPr>
-          </a:p>
-          <a:p>
             <a:pPr marL="285750" indent="-285750">
               <a:buFontTx/>
               <a:buChar char="-"/>
             </a:pPr>
             <a:r>
               <a:rPr lang="en-US" sz="1400" dirty="0"/>
-              <a:t>Shows shapes behave differently across hours: ”light" has largest difference between night and afternoon, “circle” and ”triangle” remain flat</a:t>
+              <a:t>Shows shapes behave differently across hours: ”light" has largest difference between night and afternoon, “circle” remain flat</a:t>
             </a:r>
           </a:p>
         </p:txBody>
@@ -11438,211 +11351,8 @@
               <a:t> </a:t>
             </a:r>
             <a:r>
-              <a:rPr lang="en-US" altLang="zh-CN" dirty="0"/>
+              <a:rPr lang="en-US" altLang="zh-CN"/>
               <a:t>#4</a:t>
-            </a:r>
-            <a:endParaRPr lang="en-US" dirty="0"/>
-          </a:p>
-        </p:txBody>
-      </p:sp>
-      <p:pic>
-        <p:nvPicPr>
-          <p:cNvPr id="5" name="Picture 2"/>
-          <p:cNvPicPr>
-            <a:picLocks noChangeAspect="1" noChangeArrowheads="1"/>
-          </p:cNvPicPr>
-          <p:nvPr/>
-        </p:nvPicPr>
-        <p:blipFill rotWithShape="1">
-          <a:blip r:embed="rId3">
-            <a:extLst>
-              <a:ext uri="{28A0092B-C50C-407E-A947-70E740481C1C}">
-                <a14:useLocalDpi xmlns:a14="http://schemas.microsoft.com/office/drawing/2010/main" val="0"/>
-              </a:ext>
-            </a:extLst>
-          </a:blip>
-          <a:srcRect l="49074" r="-244"/>
-          <a:stretch>
-            <a:fillRect/>
-          </a:stretch>
-        </p:blipFill>
-        <p:spPr bwMode="auto">
-          <a:xfrm>
-            <a:off x="4769565" y="761094"/>
-            <a:ext cx="4123424" cy="4006715"/>
-          </a:xfrm>
-          <a:prstGeom prst="rect">
-            <a:avLst/>
-          </a:prstGeom>
-          <a:noFill/>
-          <a:extLst>
-            <a:ext uri="{909E8E84-426E-40DD-AFC4-6F175D3DCCD1}">
-              <a14:hiddenFill xmlns:a14="http://schemas.microsoft.com/office/drawing/2010/main">
-                <a:solidFill>
-                  <a:srgbClr val="FFFFFF"/>
-                </a:solidFill>
-              </a14:hiddenFill>
-            </a:ext>
-          </a:extLst>
-        </p:spPr>
-      </p:pic>
-      <p:sp>
-        <p:nvSpPr>
-          <p:cNvPr id="6" name="TextBox 5"/>
-          <p:cNvSpPr txBox="1"/>
-          <p:nvPr/>
-        </p:nvSpPr>
-        <p:spPr>
-          <a:xfrm>
-            <a:off x="251011" y="884518"/>
-            <a:ext cx="3963937" cy="1877437"/>
-          </a:xfrm>
-          <a:prstGeom prst="rect">
-            <a:avLst/>
-          </a:prstGeom>
-          <a:noFill/>
-        </p:spPr>
-        <p:txBody>
-          <a:bodyPr wrap="square" rtlCol="0">
-            <a:spAutoFit/>
-          </a:bodyPr>
-          <a:lstStyle/>
-          <a:p>
-            <a:r>
-              <a:rPr lang="en-US" dirty="0">
-                <a:solidFill>
-                  <a:schemeClr val="accent3"/>
-                </a:solidFill>
-              </a:rPr>
-              <a:t>Shape Composition by Time of Day</a:t>
-            </a:r>
-          </a:p>
-          <a:p>
-            <a:endParaRPr lang="en-US" sz="1400" dirty="0">
-              <a:solidFill>
-                <a:schemeClr val="accent3"/>
-              </a:solidFill>
-            </a:endParaRPr>
-          </a:p>
-          <a:p>
-            <a:pPr marL="285750" indent="-285750">
-              <a:buFontTx/>
-              <a:buChar char="-"/>
-            </a:pPr>
-            <a:r>
-              <a:rPr lang="en-US" sz="1400" dirty="0"/>
-              <a:t>Confirms nighttime dominates reporting for all shapes</a:t>
-            </a:r>
-          </a:p>
-          <a:p>
-            <a:pPr marL="285750" indent="-285750">
-              <a:buFontTx/>
-              <a:buChar char="-"/>
-            </a:pPr>
-            <a:r>
-              <a:rPr lang="en-US" sz="1400" dirty="0"/>
-              <a:t>Shows unequal distribution</a:t>
-            </a:r>
-          </a:p>
-          <a:p>
-            <a:pPr marL="285750" indent="-285750">
-              <a:buFontTx/>
-              <a:buChar char="-"/>
-            </a:pPr>
-            <a:r>
-              <a:rPr lang="en-US" sz="1400" dirty="0"/>
-              <a:t>Justifies including </a:t>
-            </a:r>
-            <a:r>
-              <a:rPr lang="en-US" sz="1400" dirty="0" err="1"/>
-              <a:t>time_of_day</a:t>
-            </a:r>
-            <a:r>
-              <a:rPr lang="en-US" sz="1400" dirty="0"/>
-              <a:t> as a categorical feature since it shifts shape probabilities differently</a:t>
-            </a:r>
-            <a:endParaRPr lang="en-US" sz="1400" dirty="0">
-              <a:solidFill>
-                <a:schemeClr val="accent3"/>
-              </a:solidFill>
-            </a:endParaRPr>
-          </a:p>
-        </p:txBody>
-      </p:sp>
-    </p:spTree>
-  </p:cSld>
-  <p:clrMapOvr>
-    <a:masterClrMapping/>
-  </p:clrMapOvr>
-</p:sld>
-</file>
-
-<file path=ppt/slides/slide13.xml><?xml version="1.0" encoding="utf-8"?>
-<p:sld xmlns:a="http://schemas.openxmlformats.org/drawingml/2006/main" xmlns:r="http://schemas.openxmlformats.org/officeDocument/2006/relationships" xmlns:p="http://schemas.openxmlformats.org/presentationml/2006/main">
-  <p:cSld>
-    <p:spTree>
-      <p:nvGrpSpPr>
-        <p:cNvPr id="1" name=""/>
-        <p:cNvGrpSpPr/>
-        <p:nvPr/>
-      </p:nvGrpSpPr>
-      <p:grpSpPr>
-        <a:xfrm>
-          <a:off x="0" y="0"/>
-          <a:ext cx="0" cy="0"/>
-          <a:chOff x="0" y="0"/>
-          <a:chExt cx="0" cy="0"/>
-        </a:xfrm>
-      </p:grpSpPr>
-      <p:sp>
-        <p:nvSpPr>
-          <p:cNvPr id="2" name="Slide Number Placeholder 1"/>
-          <p:cNvSpPr>
-            <a:spLocks noGrp="1"/>
-          </p:cNvSpPr>
-          <p:nvPr>
-            <p:ph type="sldNum" sz="quarter" idx="12"/>
-          </p:nvPr>
-        </p:nvSpPr>
-        <p:spPr/>
-        <p:txBody>
-          <a:bodyPr/>
-          <a:lstStyle/>
-          <a:p>
-            <a:fld id="{8A758EFE-665F-4341-B5B8-2DAEADA52F6C}" type="slidenum">
-              <a:rPr lang="en-US" smtClean="0"/>
-              <a:t>13</a:t>
-            </a:fld>
-            <a:endParaRPr lang="en-US" dirty="0"/>
-          </a:p>
-        </p:txBody>
-      </p:sp>
-      <p:sp>
-        <p:nvSpPr>
-          <p:cNvPr id="3" name="Title 2"/>
-          <p:cNvSpPr>
-            <a:spLocks noGrp="1"/>
-          </p:cNvSpPr>
-          <p:nvPr>
-            <p:ph type="title"/>
-          </p:nvPr>
-        </p:nvSpPr>
-        <p:spPr/>
-        <p:txBody>
-          <a:bodyPr/>
-          <a:lstStyle/>
-          <a:p>
-            <a:r>
-              <a:rPr lang="en-US" dirty="0"/>
-              <a:t>EDA Insights</a:t>
-            </a:r>
-            <a:r>
-              <a:rPr lang="zh-CN" altLang="en-US" dirty="0"/>
-              <a:t> </a:t>
-            </a:r>
-            <a:r>
-              <a:rPr lang="en-US" altLang="zh-CN" dirty="0"/>
-              <a:t>#5</a:t>
             </a:r>
             <a:endParaRPr lang="en-US" dirty="0"/>
           </a:p>
@@ -11807,7 +11517,7 @@
 </p:sld>
 </file>
 
-<file path=ppt/slides/slide14.xml><?xml version="1.0" encoding="utf-8"?>
+<file path=ppt/slides/slide13.xml><?xml version="1.0" encoding="utf-8"?>
 <p:sld xmlns:a="http://schemas.openxmlformats.org/drawingml/2006/main" xmlns:r="http://schemas.openxmlformats.org/officeDocument/2006/relationships" xmlns:p="http://schemas.openxmlformats.org/presentationml/2006/main">
   <p:cSld>
     <p:spTree>
@@ -11893,7 +11603,7 @@
           <a:p>
             <a:fld id="{8A758EFE-665F-4341-B5B8-2DAEADA52F6C}" type="slidenum">
               <a:rPr lang="en-US" smtClean="0"/>
-              <a:t>14</a:t>
+              <a:t>13</a:t>
             </a:fld>
             <a:endParaRPr lang="en-US" dirty="0"/>
           </a:p>
@@ -12009,6 +11719,239 @@
           <a:xfrm>
             <a:off x="477430" y="2131984"/>
             <a:ext cx="7772400" cy="2546620"/>
+          </a:xfrm>
+          <a:prstGeom prst="rect">
+            <a:avLst/>
+          </a:prstGeom>
+        </p:spPr>
+      </p:pic>
+    </p:spTree>
+  </p:cSld>
+  <p:clrMapOvr>
+    <a:masterClrMapping/>
+  </p:clrMapOvr>
+</p:sld>
+</file>
+
+<file path=ppt/slides/slide14.xml><?xml version="1.0" encoding="utf-8"?>
+<p:sld xmlns:a="http://schemas.openxmlformats.org/drawingml/2006/main" xmlns:r="http://schemas.openxmlformats.org/officeDocument/2006/relationships" xmlns:p="http://schemas.openxmlformats.org/presentationml/2006/main">
+  <p:cSld>
+    <p:spTree>
+      <p:nvGrpSpPr>
+        <p:cNvPr id="1" name=""/>
+        <p:cNvGrpSpPr/>
+        <p:nvPr/>
+      </p:nvGrpSpPr>
+      <p:grpSpPr>
+        <a:xfrm>
+          <a:off x="0" y="0"/>
+          <a:ext cx="0" cy="0"/>
+          <a:chOff x="0" y="0"/>
+          <a:chExt cx="0" cy="0"/>
+        </a:xfrm>
+      </p:grpSpPr>
+      <p:sp>
+        <p:nvSpPr>
+          <p:cNvPr id="2" name="标题 1"/>
+          <p:cNvSpPr>
+            <a:spLocks noGrp="1"/>
+          </p:cNvSpPr>
+          <p:nvPr>
+            <p:ph type="title"/>
+          </p:nvPr>
+        </p:nvSpPr>
+        <p:spPr/>
+        <p:txBody>
+          <a:bodyPr/>
+          <a:lstStyle/>
+          <a:p>
+            <a:r>
+              <a:rPr lang="en-US" altLang="zh-CN"/>
+              <a:t>Baseline Models</a:t>
+            </a:r>
+          </a:p>
+        </p:txBody>
+      </p:sp>
+      <p:sp>
+        <p:nvSpPr>
+          <p:cNvPr id="4" name="灯片编号占位符 3"/>
+          <p:cNvSpPr>
+            <a:spLocks noGrp="1"/>
+          </p:cNvSpPr>
+          <p:nvPr>
+            <p:ph type="sldNum" sz="quarter" idx="12"/>
+          </p:nvPr>
+        </p:nvSpPr>
+        <p:spPr/>
+        <p:txBody>
+          <a:bodyPr/>
+          <a:lstStyle/>
+          <a:p>
+            <a:fld id="{8A758EFE-665F-4341-B5B8-2DAEADA52F6C}" type="slidenum">
+              <a:rPr lang="en-US" smtClean="0"/>
+              <a:t>14</a:t>
+            </a:fld>
+            <a:endParaRPr lang="en-US" dirty="0"/>
+          </a:p>
+        </p:txBody>
+      </p:sp>
+      <p:sp>
+        <p:nvSpPr>
+          <p:cNvPr id="8" name="TextBox 4"/>
+          <p:cNvSpPr txBox="1"/>
+          <p:nvPr/>
+        </p:nvSpPr>
+        <p:spPr>
+          <a:xfrm>
+            <a:off x="250825" y="884555"/>
+            <a:ext cx="3747135" cy="1353185"/>
+          </a:xfrm>
+          <a:prstGeom prst="rect">
+            <a:avLst/>
+          </a:prstGeom>
+          <a:noFill/>
+        </p:spPr>
+        <p:txBody>
+          <a:bodyPr wrap="square" rtlCol="0">
+            <a:spAutoFit/>
+          </a:bodyPr>
+          <a:lstStyle/>
+          <a:p>
+            <a:pPr algn="l"/>
+            <a:r>
+              <a:rPr lang="en-US" altLang="zh-CN" dirty="0">
+                <a:solidFill>
+                  <a:schemeClr val="accent3"/>
+                </a:solidFill>
+              </a:rPr>
+              <a:t>Two Baseline Models</a:t>
+            </a:r>
+            <a:endParaRPr lang="en-US" dirty="0">
+              <a:solidFill>
+                <a:schemeClr val="accent3"/>
+              </a:solidFill>
+            </a:endParaRPr>
+          </a:p>
+          <a:p>
+            <a:pPr algn="l"/>
+            <a:r>
+              <a:rPr lang="en-US" altLang="zh-CN" sz="1600" dirty="0"/>
+              <a:t>Baseline 1: Majority-class model</a:t>
+            </a:r>
+          </a:p>
+          <a:p>
+            <a:pPr algn="l"/>
+            <a:endParaRPr lang="en-US" altLang="zh-CN" sz="1600" dirty="0"/>
+          </a:p>
+          <a:p>
+            <a:pPr marL="285750" indent="-285750" algn="l">
+              <a:buFontTx/>
+              <a:buChar char="-"/>
+            </a:pPr>
+            <a:r>
+              <a:rPr lang="en-US" altLang="zh-CN" sz="1600" dirty="0">
+                <a:sym typeface="+mn-ea"/>
+              </a:rPr>
+              <a:t>Always predicts the most frequent shape (“light”)</a:t>
+            </a:r>
+            <a:endParaRPr lang="en-US" sz="1600" dirty="0">
+              <a:solidFill>
+                <a:schemeClr val="accent5"/>
+              </a:solidFill>
+            </a:endParaRPr>
+          </a:p>
+        </p:txBody>
+      </p:sp>
+      <p:sp>
+        <p:nvSpPr>
+          <p:cNvPr id="9" name="TextBox 4"/>
+          <p:cNvSpPr txBox="1"/>
+          <p:nvPr/>
+        </p:nvSpPr>
+        <p:spPr>
+          <a:xfrm>
+            <a:off x="4558851" y="1146138"/>
+            <a:ext cx="3902075" cy="829945"/>
+          </a:xfrm>
+          <a:prstGeom prst="rect">
+            <a:avLst/>
+          </a:prstGeom>
+          <a:noFill/>
+        </p:spPr>
+        <p:txBody>
+          <a:bodyPr wrap="none" rtlCol="0">
+            <a:spAutoFit/>
+          </a:bodyPr>
+          <a:lstStyle/>
+          <a:p>
+            <a:pPr algn="l"/>
+            <a:r>
+              <a:rPr lang="en-US" altLang="zh-CN" sz="1600" dirty="0"/>
+              <a:t>Baseline 2: Multinomial Logistic Regression</a:t>
+            </a:r>
+          </a:p>
+          <a:p>
+            <a:pPr algn="l"/>
+            <a:endParaRPr lang="en-US" altLang="zh-CN" sz="1600" dirty="0"/>
+          </a:p>
+          <a:p>
+            <a:pPr marL="285750" indent="-285750" algn="l">
+              <a:buFontTx/>
+              <a:buChar char="-"/>
+            </a:pPr>
+            <a:r>
+              <a:rPr lang="en-US" altLang="zh-CN" sz="1600" dirty="0">
+                <a:solidFill>
+                  <a:schemeClr val="accent5"/>
+                </a:solidFill>
+              </a:rPr>
+              <a:t>Linear classifier on all engineered features</a:t>
+            </a:r>
+          </a:p>
+        </p:txBody>
+      </p:sp>
+      <p:pic>
+        <p:nvPicPr>
+          <p:cNvPr id="10" name="图片 9"/>
+          <p:cNvPicPr>
+            <a:picLocks noChangeAspect="1"/>
+          </p:cNvPicPr>
+          <p:nvPr/>
+        </p:nvPicPr>
+        <p:blipFill>
+          <a:blip r:embed="rId3"/>
+          <a:stretch>
+            <a:fillRect/>
+          </a:stretch>
+        </p:blipFill>
+        <p:spPr>
+          <a:xfrm>
+            <a:off x="250825" y="2696210"/>
+            <a:ext cx="3935095" cy="554990"/>
+          </a:xfrm>
+          <a:prstGeom prst="rect">
+            <a:avLst/>
+          </a:prstGeom>
+        </p:spPr>
+      </p:pic>
+      <p:pic>
+        <p:nvPicPr>
+          <p:cNvPr id="11" name="图片 10"/>
+          <p:cNvPicPr>
+            <a:picLocks noChangeAspect="1"/>
+          </p:cNvPicPr>
+          <p:nvPr/>
+        </p:nvPicPr>
+        <p:blipFill>
+          <a:blip r:embed="rId4"/>
+          <a:stretch>
+            <a:fillRect/>
+          </a:stretch>
+        </p:blipFill>
+        <p:spPr>
+          <a:xfrm>
+            <a:off x="4991100" y="2413000"/>
+            <a:ext cx="3037205" cy="838200"/>
           </a:xfrm>
           <a:prstGeom prst="rect">
             <a:avLst/>
@@ -12057,7 +12000,7 @@
           <a:p>
             <a:r>
               <a:rPr lang="en-US" altLang="zh-CN"/>
-              <a:t>Baseline Models</a:t>
+              <a:t>Modeling Pt.2</a:t>
             </a:r>
           </a:p>
         </p:txBody>
@@ -12080,239 +12023,6 @@
             <a:fld id="{8A758EFE-665F-4341-B5B8-2DAEADA52F6C}" type="slidenum">
               <a:rPr lang="en-US" smtClean="0"/>
               <a:t>15</a:t>
-            </a:fld>
-            <a:endParaRPr lang="en-US" dirty="0"/>
-          </a:p>
-        </p:txBody>
-      </p:sp>
-      <p:sp>
-        <p:nvSpPr>
-          <p:cNvPr id="8" name="TextBox 4"/>
-          <p:cNvSpPr txBox="1"/>
-          <p:nvPr/>
-        </p:nvSpPr>
-        <p:spPr>
-          <a:xfrm>
-            <a:off x="250825" y="884555"/>
-            <a:ext cx="3747135" cy="1353185"/>
-          </a:xfrm>
-          <a:prstGeom prst="rect">
-            <a:avLst/>
-          </a:prstGeom>
-          <a:noFill/>
-        </p:spPr>
-        <p:txBody>
-          <a:bodyPr wrap="square" rtlCol="0">
-            <a:spAutoFit/>
-          </a:bodyPr>
-          <a:lstStyle/>
-          <a:p>
-            <a:pPr algn="l"/>
-            <a:r>
-              <a:rPr lang="en-US" altLang="zh-CN" dirty="0">
-                <a:solidFill>
-                  <a:schemeClr val="accent3"/>
-                </a:solidFill>
-              </a:rPr>
-              <a:t>Two Baseline Models</a:t>
-            </a:r>
-            <a:endParaRPr lang="en-US" dirty="0">
-              <a:solidFill>
-                <a:schemeClr val="accent3"/>
-              </a:solidFill>
-            </a:endParaRPr>
-          </a:p>
-          <a:p>
-            <a:pPr algn="l"/>
-            <a:r>
-              <a:rPr lang="en-US" altLang="zh-CN" sz="1600" dirty="0"/>
-              <a:t>Baseline 1: Majority-class model</a:t>
-            </a:r>
-          </a:p>
-          <a:p>
-            <a:pPr algn="l"/>
-            <a:endParaRPr lang="en-US" altLang="zh-CN" sz="1600" dirty="0"/>
-          </a:p>
-          <a:p>
-            <a:pPr marL="285750" indent="-285750" algn="l">
-              <a:buFontTx/>
-              <a:buChar char="-"/>
-            </a:pPr>
-            <a:r>
-              <a:rPr lang="en-US" altLang="zh-CN" sz="1600" dirty="0">
-                <a:sym typeface="+mn-ea"/>
-              </a:rPr>
-              <a:t>Always predicts the most frequent shape (“light”)</a:t>
-            </a:r>
-            <a:endParaRPr lang="en-US" sz="1600" dirty="0">
-              <a:solidFill>
-                <a:schemeClr val="accent5"/>
-              </a:solidFill>
-            </a:endParaRPr>
-          </a:p>
-        </p:txBody>
-      </p:sp>
-      <p:sp>
-        <p:nvSpPr>
-          <p:cNvPr id="9" name="TextBox 4"/>
-          <p:cNvSpPr txBox="1"/>
-          <p:nvPr/>
-        </p:nvSpPr>
-        <p:spPr>
-          <a:xfrm>
-            <a:off x="4558851" y="1146138"/>
-            <a:ext cx="3902075" cy="829945"/>
-          </a:xfrm>
-          <a:prstGeom prst="rect">
-            <a:avLst/>
-          </a:prstGeom>
-          <a:noFill/>
-        </p:spPr>
-        <p:txBody>
-          <a:bodyPr wrap="none" rtlCol="0">
-            <a:spAutoFit/>
-          </a:bodyPr>
-          <a:lstStyle/>
-          <a:p>
-            <a:pPr algn="l"/>
-            <a:r>
-              <a:rPr lang="en-US" altLang="zh-CN" sz="1600" dirty="0"/>
-              <a:t>Baseline 2: Multinomial Logistic Regression</a:t>
-            </a:r>
-          </a:p>
-          <a:p>
-            <a:pPr algn="l"/>
-            <a:endParaRPr lang="en-US" altLang="zh-CN" sz="1600" dirty="0"/>
-          </a:p>
-          <a:p>
-            <a:pPr marL="285750" indent="-285750" algn="l">
-              <a:buFontTx/>
-              <a:buChar char="-"/>
-            </a:pPr>
-            <a:r>
-              <a:rPr lang="en-US" altLang="zh-CN" sz="1600" dirty="0">
-                <a:solidFill>
-                  <a:schemeClr val="accent5"/>
-                </a:solidFill>
-              </a:rPr>
-              <a:t>Linear classifier on all engineered features</a:t>
-            </a:r>
-          </a:p>
-        </p:txBody>
-      </p:sp>
-      <p:pic>
-        <p:nvPicPr>
-          <p:cNvPr id="10" name="图片 9"/>
-          <p:cNvPicPr>
-            <a:picLocks noChangeAspect="1"/>
-          </p:cNvPicPr>
-          <p:nvPr/>
-        </p:nvPicPr>
-        <p:blipFill>
-          <a:blip r:embed="rId3"/>
-          <a:stretch>
-            <a:fillRect/>
-          </a:stretch>
-        </p:blipFill>
-        <p:spPr>
-          <a:xfrm>
-            <a:off x="250825" y="2696210"/>
-            <a:ext cx="3935095" cy="554990"/>
-          </a:xfrm>
-          <a:prstGeom prst="rect">
-            <a:avLst/>
-          </a:prstGeom>
-        </p:spPr>
-      </p:pic>
-      <p:pic>
-        <p:nvPicPr>
-          <p:cNvPr id="11" name="图片 10"/>
-          <p:cNvPicPr>
-            <a:picLocks noChangeAspect="1"/>
-          </p:cNvPicPr>
-          <p:nvPr/>
-        </p:nvPicPr>
-        <p:blipFill>
-          <a:blip r:embed="rId4"/>
-          <a:stretch>
-            <a:fillRect/>
-          </a:stretch>
-        </p:blipFill>
-        <p:spPr>
-          <a:xfrm>
-            <a:off x="4991100" y="2413000"/>
-            <a:ext cx="3037205" cy="838200"/>
-          </a:xfrm>
-          <a:prstGeom prst="rect">
-            <a:avLst/>
-          </a:prstGeom>
-        </p:spPr>
-      </p:pic>
-    </p:spTree>
-  </p:cSld>
-  <p:clrMapOvr>
-    <a:masterClrMapping/>
-  </p:clrMapOvr>
-</p:sld>
-</file>
-
-<file path=ppt/slides/slide16.xml><?xml version="1.0" encoding="utf-8"?>
-<p:sld xmlns:a="http://schemas.openxmlformats.org/drawingml/2006/main" xmlns:r="http://schemas.openxmlformats.org/officeDocument/2006/relationships" xmlns:p="http://schemas.openxmlformats.org/presentationml/2006/main">
-  <p:cSld>
-    <p:spTree>
-      <p:nvGrpSpPr>
-        <p:cNvPr id="1" name=""/>
-        <p:cNvGrpSpPr/>
-        <p:nvPr/>
-      </p:nvGrpSpPr>
-      <p:grpSpPr>
-        <a:xfrm>
-          <a:off x="0" y="0"/>
-          <a:ext cx="0" cy="0"/>
-          <a:chOff x="0" y="0"/>
-          <a:chExt cx="0" cy="0"/>
-        </a:xfrm>
-      </p:grpSpPr>
-      <p:sp>
-        <p:nvSpPr>
-          <p:cNvPr id="2" name="标题 1"/>
-          <p:cNvSpPr>
-            <a:spLocks noGrp="1"/>
-          </p:cNvSpPr>
-          <p:nvPr>
-            <p:ph type="title"/>
-          </p:nvPr>
-        </p:nvSpPr>
-        <p:spPr/>
-        <p:txBody>
-          <a:bodyPr/>
-          <a:lstStyle/>
-          <a:p>
-            <a:r>
-              <a:rPr lang="en-US" altLang="zh-CN"/>
-              <a:t>Modeling Pt.2</a:t>
-            </a:r>
-          </a:p>
-        </p:txBody>
-      </p:sp>
-      <p:sp>
-        <p:nvSpPr>
-          <p:cNvPr id="4" name="灯片编号占位符 3"/>
-          <p:cNvSpPr>
-            <a:spLocks noGrp="1"/>
-          </p:cNvSpPr>
-          <p:nvPr>
-            <p:ph type="sldNum" sz="quarter" idx="12"/>
-          </p:nvPr>
-        </p:nvSpPr>
-        <p:spPr/>
-        <p:txBody>
-          <a:bodyPr/>
-          <a:lstStyle/>
-          <a:p>
-            <a:fld id="{8A758EFE-665F-4341-B5B8-2DAEADA52F6C}" type="slidenum">
-              <a:rPr lang="en-US" smtClean="0"/>
-              <a:t>16</a:t>
             </a:fld>
             <a:endParaRPr lang="en-US" dirty="0"/>
           </a:p>
@@ -12479,7 +12189,7 @@
         </p:nvGraphicFramePr>
         <p:xfrm>
           <a:off x="3967480" y="1322705"/>
-          <a:ext cx="5086350" cy="2524760"/>
+          <a:ext cx="5086350" cy="2682240"/>
         </p:xfrm>
         <a:graphic>
           <a:graphicData uri="http://schemas.openxmlformats.org/drawingml/2006/table">
@@ -13178,6 +12888,247 @@
 </p:sld>
 </file>
 
+<file path=ppt/slides/slide16.xml><?xml version="1.0" encoding="utf-8"?>
+<p:sld xmlns:a="http://schemas.openxmlformats.org/drawingml/2006/main" xmlns:r="http://schemas.openxmlformats.org/officeDocument/2006/relationships" xmlns:p="http://schemas.openxmlformats.org/presentationml/2006/main">
+  <p:cSld>
+    <p:spTree>
+      <p:nvGrpSpPr>
+        <p:cNvPr id="1" name=""/>
+        <p:cNvGrpSpPr/>
+        <p:nvPr/>
+      </p:nvGrpSpPr>
+      <p:grpSpPr>
+        <a:xfrm>
+          <a:off x="0" y="0"/>
+          <a:ext cx="0" cy="0"/>
+          <a:chOff x="0" y="0"/>
+          <a:chExt cx="0" cy="0"/>
+        </a:xfrm>
+      </p:grpSpPr>
+      <p:sp>
+        <p:nvSpPr>
+          <p:cNvPr id="2" name="标题 1"/>
+          <p:cNvSpPr>
+            <a:spLocks noGrp="1"/>
+          </p:cNvSpPr>
+          <p:nvPr>
+            <p:ph type="title"/>
+          </p:nvPr>
+        </p:nvSpPr>
+        <p:spPr/>
+        <p:txBody>
+          <a:bodyPr/>
+          <a:lstStyle/>
+          <a:p>
+            <a:r>
+              <a:rPr lang="en-US" altLang="zh-CN"/>
+              <a:t>Overfitting &amp; Effect of SMOTE</a:t>
+            </a:r>
+          </a:p>
+        </p:txBody>
+      </p:sp>
+      <p:sp>
+        <p:nvSpPr>
+          <p:cNvPr id="4" name="灯片编号占位符 3"/>
+          <p:cNvSpPr>
+            <a:spLocks noGrp="1"/>
+          </p:cNvSpPr>
+          <p:nvPr>
+            <p:ph type="sldNum" sz="quarter" idx="12"/>
+          </p:nvPr>
+        </p:nvSpPr>
+        <p:spPr/>
+        <p:txBody>
+          <a:bodyPr/>
+          <a:lstStyle/>
+          <a:p>
+            <a:fld id="{8A758EFE-665F-4341-B5B8-2DAEADA52F6C}" type="slidenum">
+              <a:rPr lang="en-US" smtClean="0"/>
+              <a:t>16</a:t>
+            </a:fld>
+            <a:endParaRPr lang="en-US" dirty="0"/>
+          </a:p>
+        </p:txBody>
+      </p:sp>
+      <p:sp>
+        <p:nvSpPr>
+          <p:cNvPr id="6" name="TextBox 5"/>
+          <p:cNvSpPr txBox="1"/>
+          <p:nvPr/>
+        </p:nvSpPr>
+        <p:spPr>
+          <a:xfrm>
+            <a:off x="250825" y="884555"/>
+            <a:ext cx="5509260" cy="2953385"/>
+          </a:xfrm>
+          <a:prstGeom prst="rect">
+            <a:avLst/>
+          </a:prstGeom>
+          <a:noFill/>
+        </p:spPr>
+        <p:txBody>
+          <a:bodyPr wrap="square" rtlCol="0">
+            <a:spAutoFit/>
+          </a:bodyPr>
+          <a:lstStyle/>
+          <a:p>
+            <a:r>
+              <a:rPr lang="en-US" dirty="0">
+                <a:solidFill>
+                  <a:schemeClr val="accent3"/>
+                </a:solidFill>
+              </a:rPr>
+              <a:t>Overfitting</a:t>
+            </a:r>
+          </a:p>
+          <a:p>
+            <a:r>
+              <a:rPr lang="en-US" altLang="zh-CN" sz="1400" dirty="0"/>
+              <a:t>Good Training Result:</a:t>
+            </a:r>
+          </a:p>
+          <a:p>
+            <a:pPr marL="285750" indent="-285750">
+              <a:buFontTx/>
+              <a:buChar char="-"/>
+            </a:pPr>
+            <a:r>
+              <a:rPr lang="en-US" altLang="zh-CN" sz="1400" dirty="0"/>
+              <a:t>RF (SMOTE):</a:t>
+            </a:r>
+            <a:r>
+              <a:rPr lang="en-US" altLang="zh-CN" sz="1400" b="1" dirty="0"/>
+              <a:t> 94.7% train accuracy,  0.95 macro F1</a:t>
+            </a:r>
+            <a:endParaRPr lang="en-US" sz="1400" b="1" dirty="0"/>
+          </a:p>
+          <a:p>
+            <a:pPr marL="285750" indent="-285750">
+              <a:buFontTx/>
+              <a:buChar char="-"/>
+            </a:pPr>
+            <a:r>
+              <a:rPr lang="en-US" altLang="zh-CN" sz="1400" dirty="0"/>
+              <a:t>AdaBoost (SMOTE): </a:t>
+            </a:r>
+            <a:r>
+              <a:rPr lang="en-US" altLang="zh-CN" sz="1400" b="1" dirty="0"/>
+              <a:t>97.4% train accuracy,  0.97 </a:t>
+            </a:r>
+            <a:r>
+              <a:rPr lang="en-US" altLang="zh-CN" sz="1400" b="1" dirty="0">
+                <a:sym typeface="+mn-ea"/>
+              </a:rPr>
+              <a:t>macro F1</a:t>
+            </a:r>
+            <a:endParaRPr lang="en-US" sz="1400" dirty="0"/>
+          </a:p>
+          <a:p>
+            <a:pPr marL="285750" indent="-285750">
+              <a:buFontTx/>
+              <a:buChar char="-"/>
+            </a:pPr>
+            <a:endParaRPr lang="en-US" altLang="zh-CN" sz="1400" dirty="0"/>
+          </a:p>
+          <a:p>
+            <a:pPr indent="0">
+              <a:buFontTx/>
+              <a:buNone/>
+            </a:pPr>
+            <a:r>
+              <a:rPr lang="en-US" sz="1400" dirty="0"/>
+              <a:t>Weak Generalization to Test Set</a:t>
+            </a:r>
+          </a:p>
+          <a:p>
+            <a:pPr marL="285750" indent="-285750">
+              <a:buFontTx/>
+              <a:buChar char="-"/>
+            </a:pPr>
+            <a:r>
+              <a:rPr lang="en-US" altLang="zh-CN" sz="1400" dirty="0"/>
+              <a:t>Only </a:t>
+            </a:r>
+            <a:r>
+              <a:rPr lang="en-US" altLang="zh-CN" sz="1400" b="1" dirty="0"/>
+              <a:t>7–16%</a:t>
+            </a:r>
+            <a:r>
+              <a:rPr lang="en-US" altLang="zh-CN" sz="1400" dirty="0"/>
+              <a:t> accuracy across all models</a:t>
+            </a:r>
+          </a:p>
+          <a:p>
+            <a:pPr indent="0">
+              <a:buFontTx/>
+              <a:buNone/>
+            </a:pPr>
+            <a:endParaRPr lang="en-US" sz="1400" dirty="0">
+              <a:solidFill>
+                <a:schemeClr val="accent3"/>
+              </a:solidFill>
+            </a:endParaRPr>
+          </a:p>
+          <a:p>
+            <a:pPr indent="0">
+              <a:buFontTx/>
+              <a:buNone/>
+            </a:pPr>
+            <a:r>
+              <a:rPr lang="en-US" altLang="zh-CN" sz="1400" dirty="0"/>
+              <a:t>Imbalance handling</a:t>
+            </a:r>
+          </a:p>
+          <a:p>
+            <a:pPr marL="285750" indent="-285750">
+              <a:buFontTx/>
+              <a:buChar char="-"/>
+            </a:pPr>
+            <a:r>
+              <a:rPr lang="en-US" altLang="zh-CN" sz="1400" dirty="0"/>
+              <a:t>Class / sample weights: improve training metrics, small gains on test</a:t>
+            </a:r>
+          </a:p>
+          <a:p>
+            <a:pPr marL="285750" indent="-285750">
+              <a:buFontTx/>
+              <a:buChar char="-"/>
+            </a:pPr>
+            <a:r>
+              <a:rPr lang="en-US" altLang="zh-CN" sz="1400" dirty="0"/>
+              <a:t>SMOTE: makes training easier, slightly improves XGBoost, but</a:t>
+            </a:r>
+          </a:p>
+          <a:p>
+            <a:pPr marL="742950" lvl="1" indent="-285750">
+              <a:buFontTx/>
+              <a:buChar char="-"/>
+            </a:pPr>
+            <a:r>
+              <a:rPr lang="en-US" altLang="zh-CN" sz="1400" dirty="0"/>
+              <a:t>Still below majority baseline accuracy</a:t>
+            </a:r>
+          </a:p>
+          <a:p>
+            <a:pPr marL="742950" lvl="1" indent="-285750">
+              <a:buFontTx/>
+              <a:buChar char="-"/>
+            </a:pPr>
+            <a:r>
+              <a:rPr lang="en-US" altLang="zh-CN" sz="1400" dirty="0"/>
+              <a:t>Rare shapes remain very hard to predict</a:t>
+            </a:r>
+          </a:p>
+        </p:txBody>
+      </p:sp>
+    </p:spTree>
+  </p:cSld>
+  <p:clrMapOvr>
+    <a:masterClrMapping/>
+  </p:clrMapOvr>
+</p:sld>
+</file>
+
 <file path=ppt/slides/slide17.xml><?xml version="1.0" encoding="utf-8"?>
 <p:sld xmlns:a="http://schemas.openxmlformats.org/drawingml/2006/main" xmlns:r="http://schemas.openxmlformats.org/officeDocument/2006/relationships" xmlns:p="http://schemas.openxmlformats.org/presentationml/2006/main">
   <p:cSld>
@@ -13212,7 +13163,7 @@
           <a:p>
             <a:r>
               <a:rPr lang="en-US" altLang="zh-CN"/>
-              <a:t>Overfitting &amp; Effect of SMOTE</a:t>
+              <a:t>Conclusion</a:t>
             </a:r>
           </a:p>
         </p:txBody>
@@ -13235,247 +13186,6 @@
             <a:fld id="{8A758EFE-665F-4341-B5B8-2DAEADA52F6C}" type="slidenum">
               <a:rPr lang="en-US" smtClean="0"/>
               <a:t>17</a:t>
-            </a:fld>
-            <a:endParaRPr lang="en-US" dirty="0"/>
-          </a:p>
-        </p:txBody>
-      </p:sp>
-      <p:sp>
-        <p:nvSpPr>
-          <p:cNvPr id="6" name="TextBox 5"/>
-          <p:cNvSpPr txBox="1"/>
-          <p:nvPr/>
-        </p:nvSpPr>
-        <p:spPr>
-          <a:xfrm>
-            <a:off x="250825" y="884555"/>
-            <a:ext cx="5509260" cy="2953385"/>
-          </a:xfrm>
-          <a:prstGeom prst="rect">
-            <a:avLst/>
-          </a:prstGeom>
-          <a:noFill/>
-        </p:spPr>
-        <p:txBody>
-          <a:bodyPr wrap="square" rtlCol="0">
-            <a:spAutoFit/>
-          </a:bodyPr>
-          <a:lstStyle/>
-          <a:p>
-            <a:r>
-              <a:rPr lang="en-US" dirty="0">
-                <a:solidFill>
-                  <a:schemeClr val="accent3"/>
-                </a:solidFill>
-              </a:rPr>
-              <a:t>Overfitting</a:t>
-            </a:r>
-          </a:p>
-          <a:p>
-            <a:r>
-              <a:rPr lang="en-US" altLang="zh-CN" sz="1400" dirty="0"/>
-              <a:t>Good Training Result:</a:t>
-            </a:r>
-          </a:p>
-          <a:p>
-            <a:pPr marL="285750" indent="-285750">
-              <a:buFontTx/>
-              <a:buChar char="-"/>
-            </a:pPr>
-            <a:r>
-              <a:rPr lang="en-US" altLang="zh-CN" sz="1400" dirty="0"/>
-              <a:t>RF (SMOTE):</a:t>
-            </a:r>
-            <a:r>
-              <a:rPr lang="en-US" altLang="zh-CN" sz="1400" b="1" dirty="0"/>
-              <a:t> 94.7% train accuracy,  0.95 macro F1</a:t>
-            </a:r>
-            <a:endParaRPr lang="en-US" sz="1400" b="1" dirty="0"/>
-          </a:p>
-          <a:p>
-            <a:pPr marL="285750" indent="-285750">
-              <a:buFontTx/>
-              <a:buChar char="-"/>
-            </a:pPr>
-            <a:r>
-              <a:rPr lang="en-US" altLang="zh-CN" sz="1400" dirty="0"/>
-              <a:t>AdaBoost (SMOTE): </a:t>
-            </a:r>
-            <a:r>
-              <a:rPr lang="en-US" altLang="zh-CN" sz="1400" b="1" dirty="0"/>
-              <a:t>97.4% train accuracy,  0.97 </a:t>
-            </a:r>
-            <a:r>
-              <a:rPr lang="en-US" altLang="zh-CN" sz="1400" b="1" dirty="0">
-                <a:sym typeface="+mn-ea"/>
-              </a:rPr>
-              <a:t>macro F1</a:t>
-            </a:r>
-            <a:endParaRPr lang="en-US" sz="1400" dirty="0"/>
-          </a:p>
-          <a:p>
-            <a:pPr marL="285750" indent="-285750">
-              <a:buFontTx/>
-              <a:buChar char="-"/>
-            </a:pPr>
-            <a:endParaRPr lang="en-US" altLang="zh-CN" sz="1400" dirty="0"/>
-          </a:p>
-          <a:p>
-            <a:pPr indent="0">
-              <a:buFontTx/>
-              <a:buNone/>
-            </a:pPr>
-            <a:r>
-              <a:rPr lang="en-US" sz="1400" dirty="0"/>
-              <a:t>Weak Generalization to Test Set</a:t>
-            </a:r>
-          </a:p>
-          <a:p>
-            <a:pPr marL="285750" indent="-285750">
-              <a:buFontTx/>
-              <a:buChar char="-"/>
-            </a:pPr>
-            <a:r>
-              <a:rPr lang="en-US" altLang="zh-CN" sz="1400" dirty="0"/>
-              <a:t>Only </a:t>
-            </a:r>
-            <a:r>
-              <a:rPr lang="en-US" altLang="zh-CN" sz="1400" b="1" dirty="0"/>
-              <a:t>7–16%</a:t>
-            </a:r>
-            <a:r>
-              <a:rPr lang="en-US" altLang="zh-CN" sz="1400" dirty="0"/>
-              <a:t> accuracy across all models</a:t>
-            </a:r>
-          </a:p>
-          <a:p>
-            <a:pPr indent="0">
-              <a:buFontTx/>
-              <a:buNone/>
-            </a:pPr>
-            <a:endParaRPr lang="en-US" sz="1400" dirty="0">
-              <a:solidFill>
-                <a:schemeClr val="accent3"/>
-              </a:solidFill>
-            </a:endParaRPr>
-          </a:p>
-          <a:p>
-            <a:pPr indent="0">
-              <a:buFontTx/>
-              <a:buNone/>
-            </a:pPr>
-            <a:r>
-              <a:rPr lang="en-US" altLang="zh-CN" sz="1400" dirty="0"/>
-              <a:t>Imbalance handling</a:t>
-            </a:r>
-          </a:p>
-          <a:p>
-            <a:pPr marL="285750" indent="-285750">
-              <a:buFontTx/>
-              <a:buChar char="-"/>
-            </a:pPr>
-            <a:r>
-              <a:rPr lang="en-US" altLang="zh-CN" sz="1400" dirty="0"/>
-              <a:t>Class / sample weights: improve training metrics, small gains on test</a:t>
-            </a:r>
-          </a:p>
-          <a:p>
-            <a:pPr marL="285750" indent="-285750">
-              <a:buFontTx/>
-              <a:buChar char="-"/>
-            </a:pPr>
-            <a:r>
-              <a:rPr lang="en-US" altLang="zh-CN" sz="1400" dirty="0"/>
-              <a:t>SMOTE: makes training easier, slightly improves XGBoost, but</a:t>
-            </a:r>
-          </a:p>
-          <a:p>
-            <a:pPr marL="742950" lvl="1" indent="-285750">
-              <a:buFontTx/>
-              <a:buChar char="-"/>
-            </a:pPr>
-            <a:r>
-              <a:rPr lang="en-US" altLang="zh-CN" sz="1400" dirty="0"/>
-              <a:t>Still below majority baseline accuracy</a:t>
-            </a:r>
-          </a:p>
-          <a:p>
-            <a:pPr marL="742950" lvl="1" indent="-285750">
-              <a:buFontTx/>
-              <a:buChar char="-"/>
-            </a:pPr>
-            <a:r>
-              <a:rPr lang="en-US" altLang="zh-CN" sz="1400" dirty="0"/>
-              <a:t>Rare shapes remain very hard to predict</a:t>
-            </a:r>
-          </a:p>
-        </p:txBody>
-      </p:sp>
-    </p:spTree>
-  </p:cSld>
-  <p:clrMapOvr>
-    <a:masterClrMapping/>
-  </p:clrMapOvr>
-</p:sld>
-</file>
-
-<file path=ppt/slides/slide18.xml><?xml version="1.0" encoding="utf-8"?>
-<p:sld xmlns:a="http://schemas.openxmlformats.org/drawingml/2006/main" xmlns:r="http://schemas.openxmlformats.org/officeDocument/2006/relationships" xmlns:p="http://schemas.openxmlformats.org/presentationml/2006/main">
-  <p:cSld>
-    <p:spTree>
-      <p:nvGrpSpPr>
-        <p:cNvPr id="1" name=""/>
-        <p:cNvGrpSpPr/>
-        <p:nvPr/>
-      </p:nvGrpSpPr>
-      <p:grpSpPr>
-        <a:xfrm>
-          <a:off x="0" y="0"/>
-          <a:ext cx="0" cy="0"/>
-          <a:chOff x="0" y="0"/>
-          <a:chExt cx="0" cy="0"/>
-        </a:xfrm>
-      </p:grpSpPr>
-      <p:sp>
-        <p:nvSpPr>
-          <p:cNvPr id="2" name="标题 1"/>
-          <p:cNvSpPr>
-            <a:spLocks noGrp="1"/>
-          </p:cNvSpPr>
-          <p:nvPr>
-            <p:ph type="title"/>
-          </p:nvPr>
-        </p:nvSpPr>
-        <p:spPr/>
-        <p:txBody>
-          <a:bodyPr/>
-          <a:lstStyle/>
-          <a:p>
-            <a:r>
-              <a:rPr lang="en-US" altLang="zh-CN"/>
-              <a:t>Conclusion</a:t>
-            </a:r>
-          </a:p>
-        </p:txBody>
-      </p:sp>
-      <p:sp>
-        <p:nvSpPr>
-          <p:cNvPr id="4" name="灯片编号占位符 3"/>
-          <p:cNvSpPr>
-            <a:spLocks noGrp="1"/>
-          </p:cNvSpPr>
-          <p:nvPr>
-            <p:ph type="sldNum" sz="quarter" idx="12"/>
-          </p:nvPr>
-        </p:nvSpPr>
-        <p:spPr/>
-        <p:txBody>
-          <a:bodyPr/>
-          <a:lstStyle/>
-          <a:p>
-            <a:fld id="{8A758EFE-665F-4341-B5B8-2DAEADA52F6C}" type="slidenum">
-              <a:rPr lang="en-US" smtClean="0"/>
-              <a:t>18</a:t>
             </a:fld>
             <a:endParaRPr lang="en-US" dirty="0"/>
           </a:p>
